--- a/sasang-spa/사상체질_프리미엄_스파_프로젝트_제안서_발표자료.pptx
+++ b/sasang-spa/사상체질_프리미엄_스파_프로젝트_제안서_발표자료.pptx
@@ -18,6 +18,9 @@
     <p:sldId id="266" r:id="rId17"/>
     <p:sldId id="267" r:id="rId18"/>
     <p:sldId id="268" r:id="rId19"/>
+    <p:sldId id="269" r:id="rId20"/>
+    <p:sldId id="270" r:id="rId21"/>
+    <p:sldId id="271" r:id="rId22"/>
   </p:sldIdLst>
   <p:sldSz cx="12191695" cy="6858000" type="screen4x3"/>
   <p:notesSz cx="6858000" cy="9144000"/>
@@ -3249,7 +3252,7 @@
               </a:defRPr>
             </a:pPr>
             <a:r>
-              <a:t>한국 고유의 사상체질 의학 × 최고급 100% 순수 에센셜 오일 × 현대 바이오 데이터 융합</a:t>
+              <a:t>현대인의 고질적 불균형을 근본적으로 치유하는 1:1 맞춤 신체 리셋 솔루션</a:t>
             </a:r>
           </a:p>
           <a:p>
@@ -3396,7 +3399,7 @@
               </a:defRPr>
             </a:pPr>
             <a:r>
-              <a:t>VIP 멤버십 &amp; 바이오 LTV 비즈니스 모델</a:t>
+              <a:t>10대 시그니처 테라피 가이드 (Part 2: Themes 06 ~ 10)</a:t>
             </a:r>
           </a:p>
         </p:txBody>
@@ -3410,13 +3413,13 @@
         <p:spPr>
           <a:xfrm>
             <a:off x="731520" y="1554480"/>
-            <a:ext cx="3383280" cy="4663440"/>
+            <a:ext cx="10728655" cy="804672"/>
           </a:xfrm>
           <a:prstGeom prst="roundRect">
             <a:avLst/>
           </a:prstGeom>
           <a:solidFill>
-            <a:srgbClr val="F8F5EE"/>
+            <a:srgbClr val="FFFFFF"/>
           </a:solidFill>
           <a:ln w="15240">
             <a:solidFill>
@@ -3454,8 +3457,8 @@
         </p:nvSpPr>
         <p:spPr>
           <a:xfrm>
-            <a:off x="914400" y="1828800"/>
-            <a:ext cx="3017520" cy="4114800"/>
+            <a:off x="914400" y="1664208"/>
+            <a:ext cx="10332720" cy="594360"/>
           </a:xfrm>
           <a:prstGeom prst="rect">
             <a:avLst/>
@@ -3469,32 +3472,14 @@
           <a:lstStyle/>
           <a:p>
             <a:pPr>
-              <a:spcAft>
-                <a:spcPts val="1400"/>
-              </a:spcAft>
-              <a:defRPr sz="1600" b="1">
-                <a:solidFill>
-                  <a:srgbClr val="1E5037"/>
-                </a:solidFill>
-              </a:defRPr>
-            </a:pPr>
-            <a:r>
-              <a:t>Step 01. 스파 방문 &amp; 키트 채취</a:t>
-            </a:r>
-          </a:p>
-          <a:p>
-            <a:pPr>
-              <a:lnSpc>
-                <a:spcPct val="135000"/>
-              </a:lnSpc>
               <a:defRPr sz="1200">
                 <a:solidFill>
-                  <a:srgbClr val="52463C"/>
-                </a:solidFill>
-              </a:defRPr>
-            </a:pPr>
-            <a:r>
-              <a:t>스파 체크인 시 타액 및 장내 미생물(마이크로바이옴) 키트를 채취하여 전문 분석 기관에 실시간 의뢰.</a:t>
+                  <a:srgbClr val="241E19"/>
+                </a:solidFill>
+              </a:defRPr>
+            </a:pPr>
+            <a:r>
+              <a:t>06. 티 테라피 &amp; 침묵 명상  |  무형문화재 장인 도자기 전통 다기 우림 시연 및 30분 무언 침묵 명상 (부교감 신경 활성도 40% 상승)</a:t>
             </a:r>
           </a:p>
         </p:txBody>
@@ -3507,14 +3492,14 @@
         </p:nvSpPr>
         <p:spPr>
           <a:xfrm>
-            <a:off x="4343400" y="1554480"/>
-            <a:ext cx="3383280" cy="4663440"/>
+            <a:off x="731520" y="2487168"/>
+            <a:ext cx="10728655" cy="804672"/>
           </a:xfrm>
           <a:prstGeom prst="roundRect">
             <a:avLst/>
           </a:prstGeom>
           <a:solidFill>
-            <a:srgbClr val="F8F5EE"/>
+            <a:srgbClr val="FFFFFF"/>
           </a:solidFill>
           <a:ln w="15240">
             <a:solidFill>
@@ -3552,8 +3537,8 @@
         </p:nvSpPr>
         <p:spPr>
           <a:xfrm>
-            <a:off x="4526280" y="1828800"/>
-            <a:ext cx="3017520" cy="4114800"/>
+            <a:off x="914400" y="2596896"/>
+            <a:ext cx="10332720" cy="594360"/>
           </a:xfrm>
           <a:prstGeom prst="rect">
             <a:avLst/>
@@ -3567,32 +3552,14 @@
           <a:lstStyle/>
           <a:p>
             <a:pPr>
-              <a:spcAft>
-                <a:spcPts val="1400"/>
-              </a:spcAft>
-              <a:defRPr sz="1600" b="1">
-                <a:solidFill>
-                  <a:srgbClr val="1E5037"/>
-                </a:solidFill>
-              </a:defRPr>
-            </a:pPr>
-            <a:r>
-              <a:t>Step 02. 모바일 바이오 리포트</a:t>
-            </a:r>
-          </a:p>
-          <a:p>
-            <a:pPr>
-              <a:lnSpc>
-                <a:spcPct val="135000"/>
-              </a:lnSpc>
               <a:defRPr sz="1200">
                 <a:solidFill>
-                  <a:srgbClr val="52463C"/>
-                </a:solidFill>
-              </a:defRPr>
-            </a:pPr>
-            <a:r>
-              <a:t>7일 후 전용 모바일 웹으로 초개인화 유전체 &amp; 장내 균총 분석 리포트 및 식음 가이드라인 발행.</a:t>
+                  <a:srgbClr val="241E19"/>
+                </a:solidFill>
+              </a:defRPr>
+            </a:pPr>
+            <a:r>
+              <a:t>07. 수(水) 테라피 (산화질소)  |  고농도 산화질소(NO) 수 1.5L 정량 음용을 통한 혈관 확장 및 15분 전신 고압 나노 미스트 챔버 입실</a:t>
             </a:r>
           </a:p>
         </p:txBody>
@@ -3605,14 +3572,14 @@
         </p:nvSpPr>
         <p:spPr>
           <a:xfrm>
-            <a:off x="7955280" y="1554480"/>
-            <a:ext cx="3383280" cy="4663440"/>
+            <a:off x="731520" y="3419856"/>
+            <a:ext cx="10728655" cy="804672"/>
           </a:xfrm>
           <a:prstGeom prst="roundRect">
             <a:avLst/>
           </a:prstGeom>
           <a:solidFill>
-            <a:srgbClr val="F8F5EE"/>
+            <a:srgbClr val="FFFFFF"/>
           </a:solidFill>
           <a:ln w="15240">
             <a:solidFill>
@@ -3650,8 +3617,8 @@
         </p:nvSpPr>
         <p:spPr>
           <a:xfrm>
-            <a:off x="8138160" y="1828800"/>
-            <a:ext cx="3017520" cy="4114800"/>
+            <a:off x="914400" y="3529584"/>
+            <a:ext cx="10332720" cy="594360"/>
           </a:xfrm>
           <a:prstGeom prst="rect">
             <a:avLst/>
@@ -3665,32 +3632,174 @@
           <a:lstStyle/>
           <a:p>
             <a:pPr>
-              <a:spcAft>
-                <a:spcPts val="1400"/>
-              </a:spcAft>
-              <a:defRPr sz="1600" b="1">
-                <a:solidFill>
-                  <a:srgbClr val="1E5037"/>
-                </a:solidFill>
-              </a:defRPr>
-            </a:pPr>
-            <a:r>
-              <a:t>Step 03. 월간 맞춤 오일 정기구독(LRP)</a:t>
-            </a:r>
-          </a:p>
-          <a:p>
-            <a:pPr>
-              <a:lnSpc>
-                <a:spcPct val="135000"/>
-              </a:lnSpc>
               <a:defRPr sz="1200">
                 <a:solidFill>
-                  <a:srgbClr val="52463C"/>
-                </a:solidFill>
-              </a:defRPr>
-            </a:pPr>
-            <a:r>
-              <a:t>일상 복귀 후에도 체질 맞춤 최고급 100% 순수 에센셜 오일과 섭생 제품을 매월 정기 배송하는 고수익 구독 모델.</a:t>
+                  <a:srgbClr val="241E19"/>
+                </a:solidFill>
+              </a:defRPr>
+            </a:pPr>
+            <a:r>
+              <a:t>08. 온열 테라피 (체온 1℃ 상승)  |  척추 전용 온열 오일 도포 후 42~45℃ 원적외선 챔버 1시간 입실 (심부 체온 1℃ 상승, 면역 NK세포 5배 증대)</a:t>
+            </a:r>
+          </a:p>
+        </p:txBody>
+      </p:sp>
+      <p:sp>
+        <p:nvSpPr>
+          <p:cNvPr id="11" name="Rounded Rectangle 10"/>
+          <p:cNvSpPr/>
+          <p:nvPr/>
+        </p:nvSpPr>
+        <p:spPr>
+          <a:xfrm>
+            <a:off x="731520" y="4352544"/>
+            <a:ext cx="10728655" cy="804672"/>
+          </a:xfrm>
+          <a:prstGeom prst="roundRect">
+            <a:avLst/>
+          </a:prstGeom>
+          <a:solidFill>
+            <a:srgbClr val="FFFFFF"/>
+          </a:solidFill>
+          <a:ln w="15240">
+            <a:solidFill>
+              <a:srgbClr val="C9A876"/>
+            </a:solidFill>
+          </a:ln>
+        </p:spPr>
+        <p:style>
+          <a:lnRef idx="1">
+            <a:schemeClr val="accent1"/>
+          </a:lnRef>
+          <a:fillRef idx="3">
+            <a:schemeClr val="accent1"/>
+          </a:fillRef>
+          <a:effectRef idx="2">
+            <a:schemeClr val="accent1"/>
+          </a:effectRef>
+          <a:fontRef idx="minor">
+            <a:schemeClr val="lt1"/>
+          </a:fontRef>
+        </p:style>
+        <p:txBody>
+          <a:bodyPr rtlCol="0" anchor="ctr"/>
+          <a:lstStyle/>
+          <a:p>
+            <a:pPr algn="ctr"/>
+          </a:p>
+        </p:txBody>
+      </p:sp>
+      <p:sp>
+        <p:nvSpPr>
+          <p:cNvPr id="12" name="TextBox 11"/>
+          <p:cNvSpPr txBox="1"/>
+          <p:nvPr/>
+        </p:nvSpPr>
+        <p:spPr>
+          <a:xfrm>
+            <a:off x="914400" y="4462272"/>
+            <a:ext cx="10332720" cy="594360"/>
+          </a:xfrm>
+          <a:prstGeom prst="rect">
+            <a:avLst/>
+          </a:prstGeom>
+          <a:noFill/>
+        </p:spPr>
+        <p:txBody>
+          <a:bodyPr wrap="square">
+            <a:spAutoFit/>
+          </a:bodyPr>
+          <a:lstStyle/>
+          <a:p>
+            <a:pPr>
+              <a:defRPr sz="1200">
+                <a:solidFill>
+                  <a:srgbClr val="241E19"/>
+                </a:solidFill>
+              </a:defRPr>
+            </a:pPr>
+            <a:r>
+              <a:t>09. 전통 기체조 (태극선법)  |  서양식 필라테스를 배제하고 단전 호흡으로 탁기를 배출하며 기(氣)의 자연스러운 흐름을 복원하는 태극선법 8초식</a:t>
+            </a:r>
+          </a:p>
+        </p:txBody>
+      </p:sp>
+      <p:sp>
+        <p:nvSpPr>
+          <p:cNvPr id="13" name="Rounded Rectangle 12"/>
+          <p:cNvSpPr/>
+          <p:nvPr/>
+        </p:nvSpPr>
+        <p:spPr>
+          <a:xfrm>
+            <a:off x="731520" y="5285232"/>
+            <a:ext cx="10728655" cy="804672"/>
+          </a:xfrm>
+          <a:prstGeom prst="roundRect">
+            <a:avLst/>
+          </a:prstGeom>
+          <a:solidFill>
+            <a:srgbClr val="FFFFFF"/>
+          </a:solidFill>
+          <a:ln w="15240">
+            <a:solidFill>
+              <a:srgbClr val="C9A876"/>
+            </a:solidFill>
+          </a:ln>
+        </p:spPr>
+        <p:style>
+          <a:lnRef idx="1">
+            <a:schemeClr val="accent1"/>
+          </a:lnRef>
+          <a:fillRef idx="3">
+            <a:schemeClr val="accent1"/>
+          </a:fillRef>
+          <a:effectRef idx="2">
+            <a:schemeClr val="accent1"/>
+          </a:effectRef>
+          <a:fontRef idx="minor">
+            <a:schemeClr val="lt1"/>
+          </a:fontRef>
+        </p:style>
+        <p:txBody>
+          <a:bodyPr rtlCol="0" anchor="ctr"/>
+          <a:lstStyle/>
+          <a:p>
+            <a:pPr algn="ctr"/>
+          </a:p>
+        </p:txBody>
+      </p:sp>
+      <p:sp>
+        <p:nvSpPr>
+          <p:cNvPr id="14" name="TextBox 13"/>
+          <p:cNvSpPr txBox="1"/>
+          <p:nvPr/>
+        </p:nvSpPr>
+        <p:spPr>
+          <a:xfrm>
+            <a:off x="914400" y="5394960"/>
+            <a:ext cx="10332720" cy="594360"/>
+          </a:xfrm>
+          <a:prstGeom prst="rect">
+            <a:avLst/>
+          </a:prstGeom>
+          <a:noFill/>
+        </p:spPr>
+        <p:txBody>
+          <a:bodyPr wrap="square">
+            <a:spAutoFit/>
+          </a:bodyPr>
+          <a:lstStyle/>
+          <a:p>
+            <a:pPr>
+              <a:defRPr sz="1200">
+                <a:solidFill>
+                  <a:srgbClr val="241E19"/>
+                </a:solidFill>
+              </a:defRPr>
+            </a:pPr>
+            <a:r>
+              <a:t>10. 멘탈 관리 (한국 정통 고요 명상)  |  서양식 싱잉볼을 배제하고 한국 전통 사찰과 선도(仙道)의 고요한 침묵 명상으로 뇌 피로도 70% 감소</a:t>
             </a:r>
           </a:p>
         </p:txBody>
@@ -3821,7 +3930,7 @@
               </a:defRPr>
             </a:pPr>
             <a:r>
-              <a:t>호텔 · 리조트 턴키(Turn-Key) 파트너십 스펙</a:t>
+              <a:t>슈리베다식 푸드 테라피 : 12시간 단식 &amp; 4대 체질 미역국</a:t>
             </a:r>
           </a:p>
         </p:txBody>
@@ -3835,7 +3944,122 @@
         <p:spPr>
           <a:xfrm>
             <a:off x="731520" y="1554480"/>
-            <a:ext cx="10728655" cy="960120"/>
+            <a:ext cx="5120640" cy="4663440"/>
+          </a:xfrm>
+          <a:prstGeom prst="roundRect">
+            <a:avLst/>
+          </a:prstGeom>
+          <a:solidFill>
+            <a:srgbClr val="1A3328"/>
+          </a:solidFill>
+          <a:ln w="15240">
+            <a:solidFill>
+              <a:srgbClr val="C9A876"/>
+            </a:solidFill>
+          </a:ln>
+        </p:spPr>
+        <p:style>
+          <a:lnRef idx="1">
+            <a:schemeClr val="accent1"/>
+          </a:lnRef>
+          <a:fillRef idx="3">
+            <a:schemeClr val="accent1"/>
+          </a:fillRef>
+          <a:effectRef idx="2">
+            <a:schemeClr val="accent1"/>
+          </a:effectRef>
+          <a:fontRef idx="minor">
+            <a:schemeClr val="lt1"/>
+          </a:fontRef>
+        </p:style>
+        <p:txBody>
+          <a:bodyPr rtlCol="0" anchor="ctr"/>
+          <a:lstStyle/>
+          <a:p>
+            <a:pPr algn="ctr"/>
+          </a:p>
+        </p:txBody>
+      </p:sp>
+      <p:sp>
+        <p:nvSpPr>
+          <p:cNvPr id="6" name="TextBox 5"/>
+          <p:cNvSpPr txBox="1"/>
+          <p:nvPr/>
+        </p:nvSpPr>
+        <p:spPr>
+          <a:xfrm>
+            <a:off x="1005840" y="1828800"/>
+            <a:ext cx="4572000" cy="4114800"/>
+          </a:xfrm>
+          <a:prstGeom prst="rect">
+            <a:avLst/>
+          </a:prstGeom>
+          <a:noFill/>
+        </p:spPr>
+        <p:txBody>
+          <a:bodyPr wrap="square">
+            <a:spAutoFit/>
+          </a:bodyPr>
+          <a:lstStyle/>
+          <a:p>
+            <a:pPr>
+              <a:spcAft>
+                <a:spcPts val="1200"/>
+              </a:spcAft>
+              <a:defRPr sz="1700" b="1">
+                <a:solidFill>
+                  <a:srgbClr val="C9A876"/>
+                </a:solidFill>
+              </a:defRPr>
+            </a:pPr>
+            <a:r>
+              <a:t>12시간 단식 자가포식(Autophagy) 프로토콜</a:t>
+            </a:r>
+          </a:p>
+          <a:p>
+            <a:pPr>
+              <a:lnSpc>
+                <a:spcPct val="135000"/>
+              </a:lnSpc>
+              <a:defRPr sz="1200">
+                <a:solidFill>
+                  <a:srgbClr val="DCD7C8"/>
+                </a:solidFill>
+              </a:defRPr>
+            </a:pPr>
+            <a:r>
+              <a:t>• 18:00 저녁 약선 식사 종료 및 12시간 단식 돌입</a:t>
+            </a:r>
+            <a:br/>
+            <a:r>
+              <a:t>• 20:00 산화질소(NO) 수 음용 &amp; 30분 침묵 명상</a:t>
+            </a:r>
+            <a:br/>
+            <a:r>
+              <a:t>• 06:00 12시간 단식 완료 ➔ 기상 직후 미온수 &amp; 체질 주스</a:t>
+            </a:r>
+            <a:br/>
+            <a:r>
+              <a:t>• 07:30 4대 체질 맞춤 영양 미역국 조식 정식 제공</a:t>
+            </a:r>
+            <a:br/>
+            <a:br/>
+            <a:r>
+              <a:t>💡 자가포식 효과: 12시간 동안 소화기를 완전히 쉬게 함으로써 세포 내 손상된 단백질과 노폐물을 청소하고 장내 미생물 환경을 리셋합니다.</a:t>
+            </a:r>
+          </a:p>
+        </p:txBody>
+      </p:sp>
+      <p:sp>
+        <p:nvSpPr>
+          <p:cNvPr id="7" name="Rounded Rectangle 6"/>
+          <p:cNvSpPr/>
+          <p:nvPr/>
+        </p:nvSpPr>
+        <p:spPr>
+          <a:xfrm>
+            <a:off x="6217920" y="1554480"/>
+            <a:ext cx="5212080" cy="4663440"/>
           </a:xfrm>
           <a:prstGeom prst="roundRect">
             <a:avLst/>
@@ -3873,14 +4097,14 @@
       </p:sp>
       <p:sp>
         <p:nvSpPr>
-          <p:cNvPr id="6" name="TextBox 5"/>
+          <p:cNvPr id="8" name="TextBox 7"/>
           <p:cNvSpPr txBox="1"/>
           <p:nvPr/>
         </p:nvSpPr>
         <p:spPr>
           <a:xfrm>
-            <a:off x="1005840" y="1691640"/>
-            <a:ext cx="10149840" cy="731520"/>
+            <a:off x="6492240" y="1828800"/>
+            <a:ext cx="4663440" cy="4114800"/>
           </a:xfrm>
           <a:prstGeom prst="rect">
             <a:avLst/>
@@ -3895,20 +4119,23 @@
           <a:p>
             <a:pPr>
               <a:spcAft>
-                <a:spcPts val="300"/>
+                <a:spcPts val="1200"/>
               </a:spcAft>
-              <a:defRPr sz="1500" b="1">
-                <a:solidFill>
-                  <a:srgbClr val="A37F48"/>
-                </a:solidFill>
-              </a:defRPr>
-            </a:pPr>
-            <a:r>
-              <a:t>01. 공간 플로어플랜 표준화</a:t>
-            </a:r>
-          </a:p>
-          <a:p>
-            <a:pPr>
+              <a:defRPr sz="1700" b="1">
+                <a:solidFill>
+                  <a:srgbClr val="241E19"/>
+                </a:solidFill>
+              </a:defRPr>
+            </a:pPr>
+            <a:r>
+              <a:t>4대 체질 맞춤 프리미엄 미역국 조식</a:t>
+            </a:r>
+          </a:p>
+          <a:p>
+            <a:pPr>
+              <a:spcAft>
+                <a:spcPts val="600"/>
+              </a:spcAft>
               <a:defRPr sz="1150">
                 <a:solidFill>
                   <a:srgbClr val="52463C"/>
@@ -3916,94 +4143,14 @@
               </a:defRPr>
             </a:pPr>
             <a:r>
-              <a:t>리셉션, 다실, 진단실, 프라이빗 스파 스위트, 온열 챔버 존의 인테리어 및 동선 설계 매뉴얼 제공</a:t>
-            </a:r>
-          </a:p>
-        </p:txBody>
-      </p:sp>
-      <p:sp>
-        <p:nvSpPr>
-          <p:cNvPr id="7" name="Rounded Rectangle 6"/>
-          <p:cNvSpPr/>
-          <p:nvPr/>
-        </p:nvSpPr>
-        <p:spPr>
-          <a:xfrm>
-            <a:off x="731520" y="2697480"/>
-            <a:ext cx="10728655" cy="960120"/>
-          </a:xfrm>
-          <a:prstGeom prst="roundRect">
-            <a:avLst/>
-          </a:prstGeom>
-          <a:solidFill>
-            <a:srgbClr val="FFFFFF"/>
-          </a:solidFill>
-          <a:ln w="15240">
-            <a:solidFill>
-              <a:srgbClr val="C9A876"/>
-            </a:solidFill>
-          </a:ln>
-        </p:spPr>
-        <p:style>
-          <a:lnRef idx="1">
-            <a:schemeClr val="accent1"/>
-          </a:lnRef>
-          <a:fillRef idx="3">
-            <a:schemeClr val="accent1"/>
-          </a:fillRef>
-          <a:effectRef idx="2">
-            <a:schemeClr val="accent1"/>
-          </a:effectRef>
-          <a:fontRef idx="minor">
-            <a:schemeClr val="lt1"/>
-          </a:fontRef>
-        </p:style>
-        <p:txBody>
-          <a:bodyPr rtlCol="0" anchor="ctr"/>
-          <a:lstStyle/>
-          <a:p>
-            <a:pPr algn="ctr"/>
-          </a:p>
-        </p:txBody>
-      </p:sp>
-      <p:sp>
-        <p:nvSpPr>
-          <p:cNvPr id="8" name="TextBox 7"/>
-          <p:cNvSpPr txBox="1"/>
-          <p:nvPr/>
-        </p:nvSpPr>
-        <p:spPr>
-          <a:xfrm>
-            <a:off x="1005840" y="2834640"/>
-            <a:ext cx="10149840" cy="731520"/>
-          </a:xfrm>
-          <a:prstGeom prst="rect">
-            <a:avLst/>
-          </a:prstGeom>
-          <a:noFill/>
-        </p:spPr>
-        <p:txBody>
-          <a:bodyPr wrap="square">
-            <a:spAutoFit/>
-          </a:bodyPr>
-          <a:lstStyle/>
+              <a:t>• 태음인: 소고기 양지 들깨 미역국 + 율무밥 (폐/기관지 윤활 &amp; 고단백)</a:t>
+            </a:r>
+          </a:p>
           <a:p>
             <a:pPr>
               <a:spcAft>
-                <a:spcPts val="300"/>
+                <a:spcPts val="600"/>
               </a:spcAft>
-              <a:defRPr sz="1500" b="1">
-                <a:solidFill>
-                  <a:srgbClr val="A37F48"/>
-                </a:solidFill>
-              </a:defRPr>
-            </a:pPr>
-            <a:r>
-              <a:t>02. 테라피스트 마스터 아카데미</a:t>
-            </a:r>
-          </a:p>
-          <a:p>
-            <a:pPr>
               <a:defRPr sz="1150">
                 <a:solidFill>
                   <a:srgbClr val="52463C"/>
@@ -4011,94 +4158,14 @@
               </a:defRPr>
             </a:pPr>
             <a:r>
-              <a:t>사상체질 장부대소 이론, 순수 에센셜 오일 처방, 한의 수기 지압 프로토콜 전문 교육 및 인증</a:t>
-            </a:r>
-          </a:p>
-        </p:txBody>
-      </p:sp>
-      <p:sp>
-        <p:nvSpPr>
-          <p:cNvPr id="9" name="Rounded Rectangle 8"/>
-          <p:cNvSpPr/>
-          <p:nvPr/>
-        </p:nvSpPr>
-        <p:spPr>
-          <a:xfrm>
-            <a:off x="731520" y="3840480"/>
-            <a:ext cx="10728655" cy="960120"/>
-          </a:xfrm>
-          <a:prstGeom prst="roundRect">
-            <a:avLst/>
-          </a:prstGeom>
-          <a:solidFill>
-            <a:srgbClr val="FFFFFF"/>
-          </a:solidFill>
-          <a:ln w="15240">
-            <a:solidFill>
-              <a:srgbClr val="C9A876"/>
-            </a:solidFill>
-          </a:ln>
-        </p:spPr>
-        <p:style>
-          <a:lnRef idx="1">
-            <a:schemeClr val="accent1"/>
-          </a:lnRef>
-          <a:fillRef idx="3">
-            <a:schemeClr val="accent1"/>
-          </a:fillRef>
-          <a:effectRef idx="2">
-            <a:schemeClr val="accent1"/>
-          </a:effectRef>
-          <a:fontRef idx="minor">
-            <a:schemeClr val="lt1"/>
-          </a:fontRef>
-        </p:style>
-        <p:txBody>
-          <a:bodyPr rtlCol="0" anchor="ctr"/>
-          <a:lstStyle/>
-          <a:p>
-            <a:pPr algn="ctr"/>
-          </a:p>
-        </p:txBody>
-      </p:sp>
-      <p:sp>
-        <p:nvSpPr>
-          <p:cNvPr id="10" name="TextBox 9"/>
-          <p:cNvSpPr txBox="1"/>
-          <p:nvPr/>
-        </p:nvSpPr>
-        <p:spPr>
-          <a:xfrm>
-            <a:off x="1005840" y="3977640"/>
-            <a:ext cx="10149840" cy="731520"/>
-          </a:xfrm>
-          <a:prstGeom prst="rect">
-            <a:avLst/>
-          </a:prstGeom>
-          <a:noFill/>
-        </p:spPr>
-        <p:txBody>
-          <a:bodyPr wrap="square">
-            <a:spAutoFit/>
-          </a:bodyPr>
-          <a:lstStyle/>
+              <a:t>• 소양인: 맑은 돼지고기 수육 미역국 or 조개 미역국 + 보리밥 (소화기 열 해독)</a:t>
+            </a:r>
+          </a:p>
           <a:p>
             <a:pPr>
               <a:spcAft>
-                <a:spcPts val="300"/>
+                <a:spcPts val="600"/>
               </a:spcAft>
-              <a:defRPr sz="1500" b="1">
-                <a:solidFill>
-                  <a:srgbClr val="A37F48"/>
-                </a:solidFill>
-              </a:defRPr>
-            </a:pPr>
-            <a:r>
-              <a:t>03. 스마트 CRM 모바일 시스템</a:t>
-            </a:r>
-          </a:p>
-          <a:p>
-            <a:pPr>
               <a:defRPr sz="1150">
                 <a:solidFill>
                   <a:srgbClr val="52463C"/>
@@ -4106,94 +4173,14 @@
               </a:defRPr>
             </a:pPr>
             <a:r>
-              <a:t>고객별 체질 데이터 누적, 모바일 웹 처방전 자동 발행 및 B2B 리드 관리 시스템 완비</a:t>
-            </a:r>
-          </a:p>
-        </p:txBody>
-      </p:sp>
-      <p:sp>
-        <p:nvSpPr>
-          <p:cNvPr id="11" name="Rounded Rectangle 10"/>
-          <p:cNvSpPr/>
-          <p:nvPr/>
-        </p:nvSpPr>
-        <p:spPr>
-          <a:xfrm>
-            <a:off x="731520" y="4983480"/>
-            <a:ext cx="10728655" cy="960120"/>
-          </a:xfrm>
-          <a:prstGeom prst="roundRect">
-            <a:avLst/>
-          </a:prstGeom>
-          <a:solidFill>
-            <a:srgbClr val="FFFFFF"/>
-          </a:solidFill>
-          <a:ln w="15240">
-            <a:solidFill>
-              <a:srgbClr val="C9A876"/>
-            </a:solidFill>
-          </a:ln>
-        </p:spPr>
-        <p:style>
-          <a:lnRef idx="1">
-            <a:schemeClr val="accent1"/>
-          </a:lnRef>
-          <a:fillRef idx="3">
-            <a:schemeClr val="accent1"/>
-          </a:fillRef>
-          <a:effectRef idx="2">
-            <a:schemeClr val="accent1"/>
-          </a:effectRef>
-          <a:fontRef idx="minor">
-            <a:schemeClr val="lt1"/>
-          </a:fontRef>
-        </p:style>
-        <p:txBody>
-          <a:bodyPr rtlCol="0" anchor="ctr"/>
-          <a:lstStyle/>
-          <a:p>
-            <a:pPr algn="ctr"/>
-          </a:p>
-        </p:txBody>
-      </p:sp>
-      <p:sp>
-        <p:nvSpPr>
-          <p:cNvPr id="12" name="TextBox 11"/>
-          <p:cNvSpPr txBox="1"/>
-          <p:nvPr/>
-        </p:nvSpPr>
-        <p:spPr>
-          <a:xfrm>
-            <a:off x="1005840" y="5120640"/>
-            <a:ext cx="10149840" cy="731520"/>
-          </a:xfrm>
-          <a:prstGeom prst="rect">
-            <a:avLst/>
-          </a:prstGeom>
-          <a:noFill/>
-        </p:spPr>
-        <p:txBody>
-          <a:bodyPr wrap="square">
-            <a:spAutoFit/>
-          </a:bodyPr>
-          <a:lstStyle/>
+              <a:t>• 소음인: 닭가슴살 황기 보양 미역국 + 찹쌀밥 (위장 보온 &amp; 기력 증진)</a:t>
+            </a:r>
+          </a:p>
           <a:p>
             <a:pPr>
               <a:spcAft>
-                <a:spcPts val="300"/>
+                <a:spcPts val="600"/>
               </a:spcAft>
-              <a:defRPr sz="1500" b="1">
-                <a:solidFill>
-                  <a:srgbClr val="A37F48"/>
-                </a:solidFill>
-              </a:defRPr>
-            </a:pPr>
-            <a:r>
-              <a:t>04. 다각화된 수익 쉐어 모델</a:t>
-            </a:r>
-          </a:p>
-          <a:p>
-            <a:pPr>
               <a:defRPr sz="1150">
                 <a:solidFill>
                   <a:srgbClr val="52463C"/>
@@ -4201,7 +4188,7 @@
               </a:defRPr>
             </a:pPr>
             <a:r>
-              <a:t>스파 트리트먼트 객단가 극대화 + 체질 맞춤 굿즈 커머스 + 바이오 구독(LRP) 정산 턴키 패키지</a:t>
+              <a:t>• 태양인: 완도산 전복 홍합 맑은 해물 미역국 + 메밀죽 (간 해독 &amp; 하체 강화)</a:t>
             </a:r>
           </a:p>
         </p:txBody>
@@ -4332,7 +4319,7 @@
               </a:defRPr>
             </a:pPr>
             <a:r>
-              <a:t>총괄 연구진 및 디렉터 프로필</a:t>
+              <a:t>데이터 기반 4단계 정밀 분석 및 체질 확정 시스템</a:t>
             </a:r>
           </a:p>
         </p:txBody>
@@ -4346,7 +4333,7 @@
         <p:spPr>
           <a:xfrm>
             <a:off x="731520" y="1554480"/>
-            <a:ext cx="5120640" cy="4663440"/>
+            <a:ext cx="2560320" cy="4663440"/>
           </a:xfrm>
           <a:prstGeom prst="roundRect">
             <a:avLst/>
@@ -4390,8 +4377,8 @@
         </p:nvSpPr>
         <p:spPr>
           <a:xfrm>
-            <a:off x="1005840" y="1828800"/>
-            <a:ext cx="4572000" cy="4114800"/>
+            <a:off x="868680" y="1737360"/>
+            <a:ext cx="2286000" cy="4297680"/>
           </a:xfrm>
           <a:prstGeom prst="rect">
             <a:avLst/>
@@ -4405,14 +4392,14 @@
           <a:lstStyle/>
           <a:p>
             <a:pPr>
-              <a:defRPr sz="1100" b="1">
+              <a:defRPr sz="1300" b="1">
                 <a:solidFill>
                   <a:srgbClr val="A37F48"/>
                 </a:solidFill>
               </a:defRPr>
             </a:pPr>
             <a:r>
-              <a:t>WELLNESS MASTER DIRECTOR</a:t>
+              <a:t>STEP 01</a:t>
             </a:r>
           </a:p>
           <a:p>
@@ -4420,14 +4407,14 @@
               <a:spcAft>
                 <a:spcPts val="1000"/>
               </a:spcAft>
-              <a:defRPr sz="2400" b="1">
+              <a:defRPr sz="1400" b="1">
                 <a:solidFill>
                   <a:srgbClr val="241E19"/>
                 </a:solidFill>
               </a:defRPr>
             </a:pPr>
             <a:r>
-              <a:t>유정근 (Ryu Jean)</a:t>
+              <a:t>기초 생체 &amp; 병력 문진표</a:t>
             </a:r>
           </a:p>
           <a:p>
@@ -4435,35 +4422,22 @@
               <a:lnSpc>
                 <a:spcPct val="130000"/>
               </a:lnSpc>
-              <a:defRPr sz="1200">
+              <a:defRPr sz="1100">
                 <a:solidFill>
                   <a:srgbClr val="52463C"/>
                 </a:solidFill>
               </a:defRPr>
             </a:pPr>
             <a:r>
-              <a:t>• 웰니스 총괄 디렉터 / 전담 테라피스트</a:t>
+              <a:t>• 혈압, 공복 혈당, 가족력(심혈관/암)</a:t>
             </a:r>
             <a:br/>
             <a:r>
-              <a:t>• 사상체질 10대 시그니처 테라피 의전 설계</a:t>
+              <a:t>• 담낭 절제 등 주요 수술력 기록</a:t>
             </a:r>
             <a:br/>
             <a:r>
-              <a:t>• 글로벌 호텔/리조트 파트너십 및 브랜드 총괄</a:t>
-            </a:r>
-            <a:br/>
-            <a:r>
-              <a:t>• 1:1 VIP 프라이빗 컨설팅 및 트리트먼트 마스터</a:t>
-            </a:r>
-            <a:br/>
-            <a:br/>
-            <a:r>
-              <a:t>📞 연락처: 010-4728-9917</a:t>
-            </a:r>
-            <a:br/>
-            <a:r>
-              <a:t>✉️ 이메일: ryujean77@gmail.com</a:t>
+              <a:t>• 개인별 알레르기 인자 전방위 분석</a:t>
             </a:r>
           </a:p>
         </p:txBody>
@@ -4476,8 +4450,8 @@
         </p:nvSpPr>
         <p:spPr>
           <a:xfrm>
-            <a:off x="6217920" y="1554480"/>
-            <a:ext cx="5212080" cy="4663440"/>
+            <a:off x="3429000" y="1554480"/>
+            <a:ext cx="2560320" cy="4663440"/>
           </a:xfrm>
           <a:prstGeom prst="roundRect">
             <a:avLst/>
@@ -4521,8 +4495,8 @@
         </p:nvSpPr>
         <p:spPr>
           <a:xfrm>
-            <a:off x="6492240" y="1828800"/>
-            <a:ext cx="4663440" cy="4114800"/>
+            <a:off x="3566160" y="1737360"/>
+            <a:ext cx="2286000" cy="4297680"/>
           </a:xfrm>
           <a:prstGeom prst="rect">
             <a:avLst/>
@@ -4536,14 +4510,14 @@
           <a:lstStyle/>
           <a:p>
             <a:pPr>
-              <a:defRPr sz="1100" b="1">
+              <a:defRPr sz="1300" b="1">
                 <a:solidFill>
                   <a:srgbClr val="A37F48"/>
                 </a:solidFill>
               </a:defRPr>
             </a:pPr>
             <a:r>
-              <a:t>ACADEMIC &amp; MEDICAL DIRECTOR</a:t>
+              <a:t>STEP 02</a:t>
             </a:r>
           </a:p>
           <a:p>
@@ -4551,14 +4525,14 @@
               <a:spcAft>
                 <a:spcPts val="1000"/>
               </a:spcAft>
-              <a:defRPr sz="2400" b="1">
+              <a:defRPr sz="1400" b="1">
                 <a:solidFill>
                   <a:srgbClr val="241E19"/>
                 </a:solidFill>
               </a:defRPr>
             </a:pPr>
             <a:r>
-              <a:t>임동구 박사 (Dr. Dong-Ku Yim)</a:t>
+              <a:t>인바디 &amp; 양자/뇌파(EEG)</a:t>
             </a:r>
           </a:p>
           <a:p>
@@ -4566,35 +4540,258 @@
               <a:lnSpc>
                 <a:spcPct val="130000"/>
               </a:lnSpc>
-              <a:defRPr sz="1200">
+              <a:defRPr sz="1100">
                 <a:solidFill>
                   <a:srgbClr val="52463C"/>
                 </a:solidFill>
               </a:defRPr>
             </a:pPr>
             <a:r>
-              <a:t>• 식품공학박사 / Dr.Yim's 체질라이프스타일 연구소장</a:t>
+              <a:t>• InBody 770 체수분율 &amp; 림프 정체</a:t>
             </a:r>
             <a:br/>
             <a:r>
-              <a:t>• 사상체질 의학의 식품공학적 섭생 연구 권위자</a:t>
+              <a:t>• 장부 에너지 과부하/결핍 판독</a:t>
             </a:r>
             <a:br/>
             <a:r>
-              <a:t>• 4대 체질 맞춤 미역국 &amp; 아로마 배합비 감수</a:t>
+              <a:t>• High-Beta파 68% 뇌 피로 지수 측정</a:t>
+            </a:r>
+          </a:p>
+        </p:txBody>
+      </p:sp>
+      <p:sp>
+        <p:nvSpPr>
+          <p:cNvPr id="9" name="Rounded Rectangle 8"/>
+          <p:cNvSpPr/>
+          <p:nvPr/>
+        </p:nvSpPr>
+        <p:spPr>
+          <a:xfrm>
+            <a:off x="6126480" y="1554480"/>
+            <a:ext cx="2560320" cy="4663440"/>
+          </a:xfrm>
+          <a:prstGeom prst="roundRect">
+            <a:avLst/>
+          </a:prstGeom>
+          <a:solidFill>
+            <a:srgbClr val="FFFFFF"/>
+          </a:solidFill>
+          <a:ln w="15240">
+            <a:solidFill>
+              <a:srgbClr val="C9A876"/>
+            </a:solidFill>
+          </a:ln>
+        </p:spPr>
+        <p:style>
+          <a:lnRef idx="1">
+            <a:schemeClr val="accent1"/>
+          </a:lnRef>
+          <a:fillRef idx="3">
+            <a:schemeClr val="accent1"/>
+          </a:fillRef>
+          <a:effectRef idx="2">
+            <a:schemeClr val="accent1"/>
+          </a:effectRef>
+          <a:fontRef idx="minor">
+            <a:schemeClr val="lt1"/>
+          </a:fontRef>
+        </p:style>
+        <p:txBody>
+          <a:bodyPr rtlCol="0" anchor="ctr"/>
+          <a:lstStyle/>
+          <a:p>
+            <a:pPr algn="ctr"/>
+          </a:p>
+        </p:txBody>
+      </p:sp>
+      <p:sp>
+        <p:nvSpPr>
+          <p:cNvPr id="10" name="TextBox 9"/>
+          <p:cNvSpPr txBox="1"/>
+          <p:nvPr/>
+        </p:nvSpPr>
+        <p:spPr>
+          <a:xfrm>
+            <a:off x="6263640" y="1737360"/>
+            <a:ext cx="2286000" cy="4297680"/>
+          </a:xfrm>
+          <a:prstGeom prst="rect">
+            <a:avLst/>
+          </a:prstGeom>
+          <a:noFill/>
+        </p:spPr>
+        <p:txBody>
+          <a:bodyPr wrap="square">
+            <a:spAutoFit/>
+          </a:bodyPr>
+          <a:lstStyle/>
+          <a:p>
+            <a:pPr>
+              <a:defRPr sz="1300" b="1">
+                <a:solidFill>
+                  <a:srgbClr val="A37F48"/>
+                </a:solidFill>
+              </a:defRPr>
+            </a:pPr>
+            <a:r>
+              <a:t>STEP 03</a:t>
+            </a:r>
+          </a:p>
+          <a:p>
+            <a:pPr>
+              <a:spcAft>
+                <a:spcPts val="1000"/>
+              </a:spcAft>
+              <a:defRPr sz="1400" b="1">
+                <a:solidFill>
+                  <a:srgbClr val="241E19"/>
+                </a:solidFill>
+              </a:defRPr>
+            </a:pPr>
+            <a:r>
+              <a:t>산화질소(NO) 관리</a:t>
+            </a:r>
+          </a:p>
+          <a:p>
+            <a:pPr>
+              <a:lnSpc>
+                <a:spcPct val="130000"/>
+              </a:lnSpc>
+              <a:defRPr sz="1100">
+                <a:solidFill>
+                  <a:srgbClr val="52463C"/>
+                </a:solidFill>
+              </a:defRPr>
+            </a:pPr>
+            <a:r>
+              <a:t>• 타액 NO 산화질소 스트립 판독</a:t>
             </a:r>
             <a:br/>
             <a:r>
-              <a:t>• 현대 생체 데이터 분석 및 체질 확정 알고리즘 구축</a:t>
+              <a:t>• 혈관 탄성도 측정 및 결핍 진단</a:t>
             </a:r>
             <a:br/>
+            <a:r>
+              <a:t>• 1일 1.5L 음용 &amp; 나노 미스트 처방</a:t>
+            </a:r>
+          </a:p>
+        </p:txBody>
+      </p:sp>
+      <p:sp>
+        <p:nvSpPr>
+          <p:cNvPr id="11" name="Rounded Rectangle 10"/>
+          <p:cNvSpPr/>
+          <p:nvPr/>
+        </p:nvSpPr>
+        <p:spPr>
+          <a:xfrm>
+            <a:off x="8823960" y="1554480"/>
+            <a:ext cx="2560320" cy="4663440"/>
+          </a:xfrm>
+          <a:prstGeom prst="roundRect">
+            <a:avLst/>
+          </a:prstGeom>
+          <a:solidFill>
+            <a:srgbClr val="FFFFFF"/>
+          </a:solidFill>
+          <a:ln w="15240">
+            <a:solidFill>
+              <a:srgbClr val="C9A876"/>
+            </a:solidFill>
+          </a:ln>
+        </p:spPr>
+        <p:style>
+          <a:lnRef idx="1">
+            <a:schemeClr val="accent1"/>
+          </a:lnRef>
+          <a:fillRef idx="3">
+            <a:schemeClr val="accent1"/>
+          </a:fillRef>
+          <a:effectRef idx="2">
+            <a:schemeClr val="accent1"/>
+          </a:effectRef>
+          <a:fontRef idx="minor">
+            <a:schemeClr val="lt1"/>
+          </a:fontRef>
+        </p:style>
+        <p:txBody>
+          <a:bodyPr rtlCol="0" anchor="ctr"/>
+          <a:lstStyle/>
+          <a:p>
+            <a:pPr algn="ctr"/>
+          </a:p>
+        </p:txBody>
+      </p:sp>
+      <p:sp>
+        <p:nvSpPr>
+          <p:cNvPr id="12" name="TextBox 11"/>
+          <p:cNvSpPr txBox="1"/>
+          <p:nvPr/>
+        </p:nvSpPr>
+        <p:spPr>
+          <a:xfrm>
+            <a:off x="8961120" y="1737360"/>
+            <a:ext cx="2286000" cy="4297680"/>
+          </a:xfrm>
+          <a:prstGeom prst="rect">
+            <a:avLst/>
+          </a:prstGeom>
+          <a:noFill/>
+        </p:spPr>
+        <p:txBody>
+          <a:bodyPr wrap="square">
+            <a:spAutoFit/>
+          </a:bodyPr>
+          <a:lstStyle/>
+          <a:p>
+            <a:pPr>
+              <a:defRPr sz="1300" b="1">
+                <a:solidFill>
+                  <a:srgbClr val="A37F48"/>
+                </a:solidFill>
+              </a:defRPr>
+            </a:pPr>
+            <a:r>
+              <a:t>STEP 04</a:t>
+            </a:r>
+          </a:p>
+          <a:p>
+            <a:pPr>
+              <a:spcAft>
+                <a:spcPts val="1000"/>
+              </a:spcAft>
+              <a:defRPr sz="1400" b="1">
+                <a:solidFill>
+                  <a:srgbClr val="241E19"/>
+                </a:solidFill>
+              </a:defRPr>
+            </a:pPr>
+            <a:r>
+              <a:t>사상체질 최종 확정</a:t>
+            </a:r>
+          </a:p>
+          <a:p>
+            <a:pPr>
+              <a:lnSpc>
+                <a:spcPct val="130000"/>
+              </a:lnSpc>
+              <a:defRPr sz="1100">
+                <a:solidFill>
+                  <a:srgbClr val="52463C"/>
+                </a:solidFill>
+              </a:defRPr>
+            </a:pPr>
+            <a:r>
+              <a:t>• 태음/소양/소음/태양 장부 확정</a:t>
+            </a:r>
             <a:br/>
             <a:r>
-              <a:t>📞 연락처: 010-2323-4662</a:t>
+              <a:t>• 1:1 맞춤 VIP 웹 처방전 발행</a:t>
             </a:r>
             <a:br/>
             <a:r>
-              <a:t>✉️ 이메일: ydoko@daum.net</a:t>
+              <a:t>• 은반지 착용 및 4대 컬러 가운 배정</a:t>
             </a:r>
           </a:p>
         </p:txBody>
@@ -4632,6 +4829,1379 @@
             <a:avLst/>
           </a:prstGeom>
           <a:solidFill>
+            <a:srgbClr val="FDFBF7"/>
+          </a:solidFill>
+          <a:ln>
+            <a:noFill/>
+          </a:ln>
+        </p:spPr>
+        <p:style>
+          <a:lnRef idx="1">
+            <a:schemeClr val="accent1"/>
+          </a:lnRef>
+          <a:fillRef idx="3">
+            <a:schemeClr val="accent1"/>
+          </a:fillRef>
+          <a:effectRef idx="2">
+            <a:schemeClr val="accent1"/>
+          </a:effectRef>
+          <a:fontRef idx="minor">
+            <a:schemeClr val="lt1"/>
+          </a:fontRef>
+        </p:style>
+        <p:txBody>
+          <a:bodyPr rtlCol="0" anchor="ctr"/>
+          <a:lstStyle/>
+          <a:p>
+            <a:pPr algn="ctr"/>
+          </a:p>
+        </p:txBody>
+      </p:sp>
+      <p:sp>
+        <p:nvSpPr>
+          <p:cNvPr id="3" name="TextBox 2"/>
+          <p:cNvSpPr txBox="1"/>
+          <p:nvPr/>
+        </p:nvSpPr>
+        <p:spPr>
+          <a:xfrm>
+            <a:off x="731520" y="411480"/>
+            <a:ext cx="10515600" cy="365760"/>
+          </a:xfrm>
+          <a:prstGeom prst="rect">
+            <a:avLst/>
+          </a:prstGeom>
+          <a:noFill/>
+        </p:spPr>
+        <p:txBody>
+          <a:bodyPr wrap="square">
+            <a:spAutoFit/>
+          </a:bodyPr>
+          <a:lstStyle/>
+          <a:p>
+            <a:pPr>
+              <a:defRPr sz="1000" b="1">
+                <a:solidFill>
+                  <a:srgbClr val="A37F48"/>
+                </a:solidFill>
+              </a:defRPr>
+            </a:pPr>
+            <a:r>
+              <a:t>K-PREMIUM WELLNESS SPA 2026</a:t>
+            </a:r>
+          </a:p>
+        </p:txBody>
+      </p:sp>
+      <p:sp>
+        <p:nvSpPr>
+          <p:cNvPr id="4" name="TextBox 3"/>
+          <p:cNvSpPr txBox="1"/>
+          <p:nvPr/>
+        </p:nvSpPr>
+        <p:spPr>
+          <a:xfrm>
+            <a:off x="731520" y="685800"/>
+            <a:ext cx="10515600" cy="731520"/>
+          </a:xfrm>
+          <a:prstGeom prst="rect">
+            <a:avLst/>
+          </a:prstGeom>
+          <a:noFill/>
+        </p:spPr>
+        <p:txBody>
+          <a:bodyPr wrap="square">
+            <a:spAutoFit/>
+          </a:bodyPr>
+          <a:lstStyle/>
+          <a:p>
+            <a:pPr>
+              <a:defRPr sz="2200" b="1">
+                <a:solidFill>
+                  <a:srgbClr val="241E19"/>
+                </a:solidFill>
+              </a:defRPr>
+            </a:pPr>
+            <a:r>
+              <a:t>VIP 맞춤형 4대 체류 프로그램 (Stay Programs)</a:t>
+            </a:r>
+          </a:p>
+        </p:txBody>
+      </p:sp>
+      <p:sp>
+        <p:nvSpPr>
+          <p:cNvPr id="5" name="Rounded Rectangle 4"/>
+          <p:cNvSpPr/>
+          <p:nvPr/>
+        </p:nvSpPr>
+        <p:spPr>
+          <a:xfrm>
+            <a:off x="731520" y="1554480"/>
+            <a:ext cx="5120640" cy="2103120"/>
+          </a:xfrm>
+          <a:prstGeom prst="roundRect">
+            <a:avLst/>
+          </a:prstGeom>
+          <a:solidFill>
+            <a:srgbClr val="FFFFFF"/>
+          </a:solidFill>
+          <a:ln w="15240">
+            <a:solidFill>
+              <a:srgbClr val="C9A876"/>
+            </a:solidFill>
+          </a:ln>
+        </p:spPr>
+        <p:style>
+          <a:lnRef idx="1">
+            <a:schemeClr val="accent1"/>
+          </a:lnRef>
+          <a:fillRef idx="3">
+            <a:schemeClr val="accent1"/>
+          </a:fillRef>
+          <a:effectRef idx="2">
+            <a:schemeClr val="accent1"/>
+          </a:effectRef>
+          <a:fontRef idx="minor">
+            <a:schemeClr val="lt1"/>
+          </a:fontRef>
+        </p:style>
+        <p:txBody>
+          <a:bodyPr rtlCol="0" anchor="ctr"/>
+          <a:lstStyle/>
+          <a:p>
+            <a:pPr algn="ctr"/>
+          </a:p>
+        </p:txBody>
+      </p:sp>
+      <p:sp>
+        <p:nvSpPr>
+          <p:cNvPr id="6" name="TextBox 5"/>
+          <p:cNvSpPr txBox="1"/>
+          <p:nvPr/>
+        </p:nvSpPr>
+        <p:spPr>
+          <a:xfrm>
+            <a:off x="960120" y="1737360"/>
+            <a:ext cx="4663440" cy="1737360"/>
+          </a:xfrm>
+          <a:prstGeom prst="rect">
+            <a:avLst/>
+          </a:prstGeom>
+          <a:noFill/>
+        </p:spPr>
+        <p:txBody>
+          <a:bodyPr wrap="square">
+            <a:spAutoFit/>
+          </a:bodyPr>
+          <a:lstStyle/>
+          <a:p>
+            <a:pPr>
+              <a:spcAft>
+                <a:spcPts val="600"/>
+              </a:spcAft>
+              <a:defRPr sz="1600" b="1">
+                <a:solidFill>
+                  <a:srgbClr val="A37F48"/>
+                </a:solidFill>
+              </a:defRPr>
+            </a:pPr>
+            <a:r>
+              <a:t>2박 3일 (단기 리프레시)</a:t>
+            </a:r>
+          </a:p>
+          <a:p>
+            <a:pPr>
+              <a:lnSpc>
+                <a:spcPct val="120000"/>
+              </a:lnSpc>
+              <a:defRPr sz="1100">
+                <a:solidFill>
+                  <a:srgbClr val="52463C"/>
+                </a:solidFill>
+              </a:defRPr>
+            </a:pPr>
+            <a:r>
+              <a:t>• 대상: 주말 힐링 VIP, 비즈니스 출장객</a:t>
+            </a:r>
+            <a:br/>
+            <a:r>
+              <a:t>• 플로우: 진단 ➔ 족욕 ➔ 80분 바디 ➔ 12h 단식 ➔ 태극선법 ➔ 나노 미스트</a:t>
+            </a:r>
+            <a:br/>
+            <a:r>
+              <a:t>• 효과: 뇌 피로 70% 감소, 근육 긴장 완화, 숙면 유도</a:t>
+            </a:r>
+          </a:p>
+        </p:txBody>
+      </p:sp>
+      <p:sp>
+        <p:nvSpPr>
+          <p:cNvPr id="7" name="Rounded Rectangle 6"/>
+          <p:cNvSpPr/>
+          <p:nvPr/>
+        </p:nvSpPr>
+        <p:spPr>
+          <a:xfrm>
+            <a:off x="6126480" y="1554480"/>
+            <a:ext cx="5120640" cy="2103120"/>
+          </a:xfrm>
+          <a:prstGeom prst="roundRect">
+            <a:avLst/>
+          </a:prstGeom>
+          <a:solidFill>
+            <a:srgbClr val="FFFFFF"/>
+          </a:solidFill>
+          <a:ln w="15240">
+            <a:solidFill>
+              <a:srgbClr val="C9A876"/>
+            </a:solidFill>
+          </a:ln>
+        </p:spPr>
+        <p:style>
+          <a:lnRef idx="1">
+            <a:schemeClr val="accent1"/>
+          </a:lnRef>
+          <a:fillRef idx="3">
+            <a:schemeClr val="accent1"/>
+          </a:fillRef>
+          <a:effectRef idx="2">
+            <a:schemeClr val="accent1"/>
+          </a:effectRef>
+          <a:fontRef idx="minor">
+            <a:schemeClr val="lt1"/>
+          </a:fontRef>
+        </p:style>
+        <p:txBody>
+          <a:bodyPr rtlCol="0" anchor="ctr"/>
+          <a:lstStyle/>
+          <a:p>
+            <a:pPr algn="ctr"/>
+          </a:p>
+        </p:txBody>
+      </p:sp>
+      <p:sp>
+        <p:nvSpPr>
+          <p:cNvPr id="8" name="TextBox 7"/>
+          <p:cNvSpPr txBox="1"/>
+          <p:nvPr/>
+        </p:nvSpPr>
+        <p:spPr>
+          <a:xfrm>
+            <a:off x="6355080" y="1737360"/>
+            <a:ext cx="4663440" cy="1737360"/>
+          </a:xfrm>
+          <a:prstGeom prst="rect">
+            <a:avLst/>
+          </a:prstGeom>
+          <a:noFill/>
+        </p:spPr>
+        <p:txBody>
+          <a:bodyPr wrap="square">
+            <a:spAutoFit/>
+          </a:bodyPr>
+          <a:lstStyle/>
+          <a:p>
+            <a:pPr>
+              <a:spcAft>
+                <a:spcPts val="600"/>
+              </a:spcAft>
+              <a:defRPr sz="1600" b="1">
+                <a:solidFill>
+                  <a:srgbClr val="A37F48"/>
+                </a:solidFill>
+              </a:defRPr>
+            </a:pPr>
+            <a:r>
+              <a:t>5박 6일 (중기 디톡스)</a:t>
+            </a:r>
+          </a:p>
+          <a:p>
+            <a:pPr>
+              <a:lnSpc>
+                <a:spcPct val="120000"/>
+              </a:lnSpc>
+              <a:defRPr sz="1100">
+                <a:solidFill>
+                  <a:srgbClr val="52463C"/>
+                </a:solidFill>
+              </a:defRPr>
+            </a:pPr>
+            <a:r>
+              <a:t>• 대상: 만성 피로 및 림프 부종 보유자</a:t>
+            </a:r>
+            <a:br/>
+            <a:r>
+              <a:t>• 플로우: 1~3일 림프 배농 &amp; 온열(체온 1℃ 상승) ➔ 4~6일 마이크로바이옴 &amp; 기체조</a:t>
+            </a:r>
+            <a:br/>
+            <a:r>
+              <a:t>• 효과: 림프 정체 85% 개선, 안색 정화, 활력 복원</a:t>
+            </a:r>
+          </a:p>
+        </p:txBody>
+      </p:sp>
+      <p:sp>
+        <p:nvSpPr>
+          <p:cNvPr id="9" name="Rounded Rectangle 8"/>
+          <p:cNvSpPr/>
+          <p:nvPr/>
+        </p:nvSpPr>
+        <p:spPr>
+          <a:xfrm>
+            <a:off x="731520" y="3931920"/>
+            <a:ext cx="5120640" cy="2103120"/>
+          </a:xfrm>
+          <a:prstGeom prst="roundRect">
+            <a:avLst/>
+          </a:prstGeom>
+          <a:solidFill>
+            <a:srgbClr val="FFFFFF"/>
+          </a:solidFill>
+          <a:ln w="15240">
+            <a:solidFill>
+              <a:srgbClr val="C9A876"/>
+            </a:solidFill>
+          </a:ln>
+        </p:spPr>
+        <p:style>
+          <a:lnRef idx="1">
+            <a:schemeClr val="accent1"/>
+          </a:lnRef>
+          <a:fillRef idx="3">
+            <a:schemeClr val="accent1"/>
+          </a:fillRef>
+          <a:effectRef idx="2">
+            <a:schemeClr val="accent1"/>
+          </a:effectRef>
+          <a:fontRef idx="minor">
+            <a:schemeClr val="lt1"/>
+          </a:fontRef>
+        </p:style>
+        <p:txBody>
+          <a:bodyPr rtlCol="0" anchor="ctr"/>
+          <a:lstStyle/>
+          <a:p>
+            <a:pPr algn="ctr"/>
+          </a:p>
+        </p:txBody>
+      </p:sp>
+      <p:sp>
+        <p:nvSpPr>
+          <p:cNvPr id="10" name="TextBox 9"/>
+          <p:cNvSpPr txBox="1"/>
+          <p:nvPr/>
+        </p:nvSpPr>
+        <p:spPr>
+          <a:xfrm>
+            <a:off x="960120" y="4114800"/>
+            <a:ext cx="4663440" cy="1737360"/>
+          </a:xfrm>
+          <a:prstGeom prst="rect">
+            <a:avLst/>
+          </a:prstGeom>
+          <a:noFill/>
+        </p:spPr>
+        <p:txBody>
+          <a:bodyPr wrap="square">
+            <a:spAutoFit/>
+          </a:bodyPr>
+          <a:lstStyle/>
+          <a:p>
+            <a:pPr>
+              <a:spcAft>
+                <a:spcPts val="600"/>
+              </a:spcAft>
+              <a:defRPr sz="1600" b="1">
+                <a:solidFill>
+                  <a:srgbClr val="A37F48"/>
+                </a:solidFill>
+              </a:defRPr>
+            </a:pPr>
+            <a:r>
+              <a:t>15박 16일 (장기 리셋)</a:t>
+            </a:r>
+          </a:p>
+          <a:p>
+            <a:pPr>
+              <a:lnSpc>
+                <a:spcPct val="120000"/>
+              </a:lnSpc>
+              <a:defRPr sz="1100">
+                <a:solidFill>
+                  <a:srgbClr val="52463C"/>
+                </a:solidFill>
+              </a:defRPr>
+            </a:pPr>
+            <a:r>
+              <a:t>• 대상: 대사증후군 개선 희망 기업 최고경영진</a:t>
+            </a:r>
+            <a:br/>
+            <a:r>
+              <a:t>• 플로우: DTC 유전자 검사 ➔ 10대 테마 매일 순환 ➔ 1:1 라이프스타일 매뉴얼북</a:t>
+            </a:r>
+            <a:br/>
+            <a:r>
+              <a:t>• 효과: 면역 나이 5년 리셋, 평생 섭생 습관 정착</a:t>
+            </a:r>
+          </a:p>
+        </p:txBody>
+      </p:sp>
+      <p:sp>
+        <p:nvSpPr>
+          <p:cNvPr id="11" name="Rounded Rectangle 10"/>
+          <p:cNvSpPr/>
+          <p:nvPr/>
+        </p:nvSpPr>
+        <p:spPr>
+          <a:xfrm>
+            <a:off x="6126480" y="3931920"/>
+            <a:ext cx="5120640" cy="2103120"/>
+          </a:xfrm>
+          <a:prstGeom prst="roundRect">
+            <a:avLst/>
+          </a:prstGeom>
+          <a:solidFill>
+            <a:srgbClr val="FFFFFF"/>
+          </a:solidFill>
+          <a:ln w="15240">
+            <a:solidFill>
+              <a:srgbClr val="C9A876"/>
+            </a:solidFill>
+          </a:ln>
+        </p:spPr>
+        <p:style>
+          <a:lnRef idx="1">
+            <a:schemeClr val="accent1"/>
+          </a:lnRef>
+          <a:fillRef idx="3">
+            <a:schemeClr val="accent1"/>
+          </a:fillRef>
+          <a:effectRef idx="2">
+            <a:schemeClr val="accent1"/>
+          </a:effectRef>
+          <a:fontRef idx="minor">
+            <a:schemeClr val="lt1"/>
+          </a:fontRef>
+        </p:style>
+        <p:txBody>
+          <a:bodyPr rtlCol="0" anchor="ctr"/>
+          <a:lstStyle/>
+          <a:p>
+            <a:pPr algn="ctr"/>
+          </a:p>
+        </p:txBody>
+      </p:sp>
+      <p:sp>
+        <p:nvSpPr>
+          <p:cNvPr id="12" name="TextBox 11"/>
+          <p:cNvSpPr txBox="1"/>
+          <p:nvPr/>
+        </p:nvSpPr>
+        <p:spPr>
+          <a:xfrm>
+            <a:off x="6355080" y="4114800"/>
+            <a:ext cx="4663440" cy="1737360"/>
+          </a:xfrm>
+          <a:prstGeom prst="rect">
+            <a:avLst/>
+          </a:prstGeom>
+          <a:noFill/>
+        </p:spPr>
+        <p:txBody>
+          <a:bodyPr wrap="square">
+            <a:spAutoFit/>
+          </a:bodyPr>
+          <a:lstStyle/>
+          <a:p>
+            <a:pPr>
+              <a:spcAft>
+                <a:spcPts val="600"/>
+              </a:spcAft>
+              <a:defRPr sz="1600" b="1">
+                <a:solidFill>
+                  <a:srgbClr val="A37F48"/>
+                </a:solidFill>
+              </a:defRPr>
+            </a:pPr>
+            <a:r>
+              <a:t>1개월 (특수 집중 케어)</a:t>
+            </a:r>
+          </a:p>
+          <a:p>
+            <a:pPr>
+              <a:lnSpc>
+                <a:spcPct val="120000"/>
+              </a:lnSpc>
+              <a:defRPr sz="1100">
+                <a:solidFill>
+                  <a:srgbClr val="52463C"/>
+                </a:solidFill>
+              </a:defRPr>
+            </a:pPr>
+            <a:r>
+              <a:t>• 대상: 수술 후 회복기 고객, 고령 시니어 VIP</a:t>
+            </a:r>
+            <a:br/>
+            <a:r>
+              <a:t>• 플로우: 37.5℃ 무자극 족욕 ➔ 프랑킨센스 세포 진정 ➔ 면역 NK세포 증대</a:t>
+            </a:r>
+            <a:br/>
+            <a:r>
+              <a:t>• 시설: 프라이빗 단독 빌라 및 메디컬 스파 룸 배정</a:t>
+            </a:r>
+          </a:p>
+        </p:txBody>
+      </p:sp>
+    </p:spTree>
+  </p:cSld>
+  <p:clrMapOvr>
+    <a:masterClrMapping/>
+  </p:clrMapOvr>
+</p:sld>
+</file>
+
+<file path=ppt/slides/slide14.xml><?xml version="1.0" encoding="utf-8"?>
+<p:sld xmlns:a="http://schemas.openxmlformats.org/drawingml/2006/main" xmlns:p="http://schemas.openxmlformats.org/presentationml/2006/main" xmlns:r="http://schemas.openxmlformats.org/officeDocument/2006/relationships">
+  <p:cSld>
+    <p:spTree>
+      <p:nvGrpSpPr>
+        <p:cNvPr id="1" name=""/>
+        <p:cNvGrpSpPr/>
+        <p:nvPr/>
+      </p:nvGrpSpPr>
+      <p:grpSpPr/>
+      <p:sp>
+        <p:nvSpPr>
+          <p:cNvPr id="2" name="Rectangle 1"/>
+          <p:cNvSpPr/>
+          <p:nvPr/>
+        </p:nvSpPr>
+        <p:spPr>
+          <a:xfrm>
+            <a:off x="0" y="0"/>
+            <a:ext cx="12191695" cy="6858000"/>
+          </a:xfrm>
+          <a:prstGeom prst="rect">
+            <a:avLst/>
+          </a:prstGeom>
+          <a:solidFill>
+            <a:srgbClr val="FDFBF7"/>
+          </a:solidFill>
+          <a:ln>
+            <a:noFill/>
+          </a:ln>
+        </p:spPr>
+        <p:style>
+          <a:lnRef idx="1">
+            <a:schemeClr val="accent1"/>
+          </a:lnRef>
+          <a:fillRef idx="3">
+            <a:schemeClr val="accent1"/>
+          </a:fillRef>
+          <a:effectRef idx="2">
+            <a:schemeClr val="accent1"/>
+          </a:effectRef>
+          <a:fontRef idx="minor">
+            <a:schemeClr val="lt1"/>
+          </a:fontRef>
+        </p:style>
+        <p:txBody>
+          <a:bodyPr rtlCol="0" anchor="ctr"/>
+          <a:lstStyle/>
+          <a:p>
+            <a:pPr algn="ctr"/>
+          </a:p>
+        </p:txBody>
+      </p:sp>
+      <p:sp>
+        <p:nvSpPr>
+          <p:cNvPr id="3" name="TextBox 2"/>
+          <p:cNvSpPr txBox="1"/>
+          <p:nvPr/>
+        </p:nvSpPr>
+        <p:spPr>
+          <a:xfrm>
+            <a:off x="731520" y="411480"/>
+            <a:ext cx="10515600" cy="365760"/>
+          </a:xfrm>
+          <a:prstGeom prst="rect">
+            <a:avLst/>
+          </a:prstGeom>
+          <a:noFill/>
+        </p:spPr>
+        <p:txBody>
+          <a:bodyPr wrap="square">
+            <a:spAutoFit/>
+          </a:bodyPr>
+          <a:lstStyle/>
+          <a:p>
+            <a:pPr>
+              <a:defRPr sz="1000" b="1">
+                <a:solidFill>
+                  <a:srgbClr val="A37F48"/>
+                </a:solidFill>
+              </a:defRPr>
+            </a:pPr>
+            <a:r>
+              <a:t>K-PREMIUM WELLNESS SPA 2026</a:t>
+            </a:r>
+          </a:p>
+        </p:txBody>
+      </p:sp>
+      <p:sp>
+        <p:nvSpPr>
+          <p:cNvPr id="4" name="TextBox 3"/>
+          <p:cNvSpPr txBox="1"/>
+          <p:nvPr/>
+        </p:nvSpPr>
+        <p:spPr>
+          <a:xfrm>
+            <a:off x="731520" y="685800"/>
+            <a:ext cx="10515600" cy="731520"/>
+          </a:xfrm>
+          <a:prstGeom prst="rect">
+            <a:avLst/>
+          </a:prstGeom>
+          <a:noFill/>
+        </p:spPr>
+        <p:txBody>
+          <a:bodyPr wrap="square">
+            <a:spAutoFit/>
+          </a:bodyPr>
+          <a:lstStyle/>
+          <a:p>
+            <a:pPr>
+              <a:defRPr sz="2200" b="1">
+                <a:solidFill>
+                  <a:srgbClr val="241E19"/>
+                </a:solidFill>
+              </a:defRPr>
+            </a:pPr>
+            <a:r>
+              <a:t>VIP 멤버십 &amp; 바이오 LTV 비즈니스 모델</a:t>
+            </a:r>
+          </a:p>
+        </p:txBody>
+      </p:sp>
+      <p:sp>
+        <p:nvSpPr>
+          <p:cNvPr id="5" name="Rounded Rectangle 4"/>
+          <p:cNvSpPr/>
+          <p:nvPr/>
+        </p:nvSpPr>
+        <p:spPr>
+          <a:xfrm>
+            <a:off x="731520" y="1554480"/>
+            <a:ext cx="3383280" cy="4663440"/>
+          </a:xfrm>
+          <a:prstGeom prst="roundRect">
+            <a:avLst/>
+          </a:prstGeom>
+          <a:solidFill>
+            <a:srgbClr val="F8F5EE"/>
+          </a:solidFill>
+          <a:ln w="15240">
+            <a:solidFill>
+              <a:srgbClr val="C9A876"/>
+            </a:solidFill>
+          </a:ln>
+        </p:spPr>
+        <p:style>
+          <a:lnRef idx="1">
+            <a:schemeClr val="accent1"/>
+          </a:lnRef>
+          <a:fillRef idx="3">
+            <a:schemeClr val="accent1"/>
+          </a:fillRef>
+          <a:effectRef idx="2">
+            <a:schemeClr val="accent1"/>
+          </a:effectRef>
+          <a:fontRef idx="minor">
+            <a:schemeClr val="lt1"/>
+          </a:fontRef>
+        </p:style>
+        <p:txBody>
+          <a:bodyPr rtlCol="0" anchor="ctr"/>
+          <a:lstStyle/>
+          <a:p>
+            <a:pPr algn="ctr"/>
+          </a:p>
+        </p:txBody>
+      </p:sp>
+      <p:sp>
+        <p:nvSpPr>
+          <p:cNvPr id="6" name="TextBox 5"/>
+          <p:cNvSpPr txBox="1"/>
+          <p:nvPr/>
+        </p:nvSpPr>
+        <p:spPr>
+          <a:xfrm>
+            <a:off x="914400" y="1828800"/>
+            <a:ext cx="3017520" cy="4114800"/>
+          </a:xfrm>
+          <a:prstGeom prst="rect">
+            <a:avLst/>
+          </a:prstGeom>
+          <a:noFill/>
+        </p:spPr>
+        <p:txBody>
+          <a:bodyPr wrap="square">
+            <a:spAutoFit/>
+          </a:bodyPr>
+          <a:lstStyle/>
+          <a:p>
+            <a:pPr>
+              <a:spcAft>
+                <a:spcPts val="1400"/>
+              </a:spcAft>
+              <a:defRPr sz="1600" b="1">
+                <a:solidFill>
+                  <a:srgbClr val="1E5037"/>
+                </a:solidFill>
+              </a:defRPr>
+            </a:pPr>
+            <a:r>
+              <a:t>Step 01. 스파 방문 &amp; 키트 채취</a:t>
+            </a:r>
+          </a:p>
+          <a:p>
+            <a:pPr>
+              <a:lnSpc>
+                <a:spcPct val="135000"/>
+              </a:lnSpc>
+              <a:defRPr sz="1200">
+                <a:solidFill>
+                  <a:srgbClr val="52463C"/>
+                </a:solidFill>
+              </a:defRPr>
+            </a:pPr>
+            <a:r>
+              <a:t>스파 체크인 시 타액 및 장내 미생물(마이크로바이옴) 키트를 채취하여 전문 분석 기관에 실시간 의뢰.</a:t>
+            </a:r>
+          </a:p>
+        </p:txBody>
+      </p:sp>
+      <p:sp>
+        <p:nvSpPr>
+          <p:cNvPr id="7" name="Rounded Rectangle 6"/>
+          <p:cNvSpPr/>
+          <p:nvPr/>
+        </p:nvSpPr>
+        <p:spPr>
+          <a:xfrm>
+            <a:off x="4343400" y="1554480"/>
+            <a:ext cx="3383280" cy="4663440"/>
+          </a:xfrm>
+          <a:prstGeom prst="roundRect">
+            <a:avLst/>
+          </a:prstGeom>
+          <a:solidFill>
+            <a:srgbClr val="F8F5EE"/>
+          </a:solidFill>
+          <a:ln w="15240">
+            <a:solidFill>
+              <a:srgbClr val="C9A876"/>
+            </a:solidFill>
+          </a:ln>
+        </p:spPr>
+        <p:style>
+          <a:lnRef idx="1">
+            <a:schemeClr val="accent1"/>
+          </a:lnRef>
+          <a:fillRef idx="3">
+            <a:schemeClr val="accent1"/>
+          </a:fillRef>
+          <a:effectRef idx="2">
+            <a:schemeClr val="accent1"/>
+          </a:effectRef>
+          <a:fontRef idx="minor">
+            <a:schemeClr val="lt1"/>
+          </a:fontRef>
+        </p:style>
+        <p:txBody>
+          <a:bodyPr rtlCol="0" anchor="ctr"/>
+          <a:lstStyle/>
+          <a:p>
+            <a:pPr algn="ctr"/>
+          </a:p>
+        </p:txBody>
+      </p:sp>
+      <p:sp>
+        <p:nvSpPr>
+          <p:cNvPr id="8" name="TextBox 7"/>
+          <p:cNvSpPr txBox="1"/>
+          <p:nvPr/>
+        </p:nvSpPr>
+        <p:spPr>
+          <a:xfrm>
+            <a:off x="4526280" y="1828800"/>
+            <a:ext cx="3017520" cy="4114800"/>
+          </a:xfrm>
+          <a:prstGeom prst="rect">
+            <a:avLst/>
+          </a:prstGeom>
+          <a:noFill/>
+        </p:spPr>
+        <p:txBody>
+          <a:bodyPr wrap="square">
+            <a:spAutoFit/>
+          </a:bodyPr>
+          <a:lstStyle/>
+          <a:p>
+            <a:pPr>
+              <a:spcAft>
+                <a:spcPts val="1400"/>
+              </a:spcAft>
+              <a:defRPr sz="1600" b="1">
+                <a:solidFill>
+                  <a:srgbClr val="1E5037"/>
+                </a:solidFill>
+              </a:defRPr>
+            </a:pPr>
+            <a:r>
+              <a:t>Step 02. 모바일 바이오 리포트</a:t>
+            </a:r>
+          </a:p>
+          <a:p>
+            <a:pPr>
+              <a:lnSpc>
+                <a:spcPct val="135000"/>
+              </a:lnSpc>
+              <a:defRPr sz="1200">
+                <a:solidFill>
+                  <a:srgbClr val="52463C"/>
+                </a:solidFill>
+              </a:defRPr>
+            </a:pPr>
+            <a:r>
+              <a:t>7일 후 전용 모바일 웹으로 초개인화 유전체 &amp; 장내 균총 분석 리포트 및 식음 가이드라인 발행.</a:t>
+            </a:r>
+          </a:p>
+        </p:txBody>
+      </p:sp>
+      <p:sp>
+        <p:nvSpPr>
+          <p:cNvPr id="9" name="Rounded Rectangle 8"/>
+          <p:cNvSpPr/>
+          <p:nvPr/>
+        </p:nvSpPr>
+        <p:spPr>
+          <a:xfrm>
+            <a:off x="7955280" y="1554480"/>
+            <a:ext cx="3383280" cy="4663440"/>
+          </a:xfrm>
+          <a:prstGeom prst="roundRect">
+            <a:avLst/>
+          </a:prstGeom>
+          <a:solidFill>
+            <a:srgbClr val="F8F5EE"/>
+          </a:solidFill>
+          <a:ln w="15240">
+            <a:solidFill>
+              <a:srgbClr val="C9A876"/>
+            </a:solidFill>
+          </a:ln>
+        </p:spPr>
+        <p:style>
+          <a:lnRef idx="1">
+            <a:schemeClr val="accent1"/>
+          </a:lnRef>
+          <a:fillRef idx="3">
+            <a:schemeClr val="accent1"/>
+          </a:fillRef>
+          <a:effectRef idx="2">
+            <a:schemeClr val="accent1"/>
+          </a:effectRef>
+          <a:fontRef idx="minor">
+            <a:schemeClr val="lt1"/>
+          </a:fontRef>
+        </p:style>
+        <p:txBody>
+          <a:bodyPr rtlCol="0" anchor="ctr"/>
+          <a:lstStyle/>
+          <a:p>
+            <a:pPr algn="ctr"/>
+          </a:p>
+        </p:txBody>
+      </p:sp>
+      <p:sp>
+        <p:nvSpPr>
+          <p:cNvPr id="10" name="TextBox 9"/>
+          <p:cNvSpPr txBox="1"/>
+          <p:nvPr/>
+        </p:nvSpPr>
+        <p:spPr>
+          <a:xfrm>
+            <a:off x="8138160" y="1828800"/>
+            <a:ext cx="3017520" cy="4114800"/>
+          </a:xfrm>
+          <a:prstGeom prst="rect">
+            <a:avLst/>
+          </a:prstGeom>
+          <a:noFill/>
+        </p:spPr>
+        <p:txBody>
+          <a:bodyPr wrap="square">
+            <a:spAutoFit/>
+          </a:bodyPr>
+          <a:lstStyle/>
+          <a:p>
+            <a:pPr>
+              <a:spcAft>
+                <a:spcPts val="1400"/>
+              </a:spcAft>
+              <a:defRPr sz="1600" b="1">
+                <a:solidFill>
+                  <a:srgbClr val="1E5037"/>
+                </a:solidFill>
+              </a:defRPr>
+            </a:pPr>
+            <a:r>
+              <a:t>Step 03. 월간 맞춤 오일 정기구독(LRP)</a:t>
+            </a:r>
+          </a:p>
+          <a:p>
+            <a:pPr>
+              <a:lnSpc>
+                <a:spcPct val="135000"/>
+              </a:lnSpc>
+              <a:defRPr sz="1200">
+                <a:solidFill>
+                  <a:srgbClr val="52463C"/>
+                </a:solidFill>
+              </a:defRPr>
+            </a:pPr>
+            <a:r>
+              <a:t>일상 복귀 후에도 체질 맞춤 최고급 100% 순수 에센셜 오일과 섭생 제품을 매월 정기 배송하는 고수익 구독 모델.</a:t>
+            </a:r>
+          </a:p>
+        </p:txBody>
+      </p:sp>
+    </p:spTree>
+  </p:cSld>
+  <p:clrMapOvr>
+    <a:masterClrMapping/>
+  </p:clrMapOvr>
+</p:sld>
+</file>
+
+<file path=ppt/slides/slide15.xml><?xml version="1.0" encoding="utf-8"?>
+<p:sld xmlns:a="http://schemas.openxmlformats.org/drawingml/2006/main" xmlns:p="http://schemas.openxmlformats.org/presentationml/2006/main" xmlns:r="http://schemas.openxmlformats.org/officeDocument/2006/relationships">
+  <p:cSld>
+    <p:spTree>
+      <p:nvGrpSpPr>
+        <p:cNvPr id="1" name=""/>
+        <p:cNvGrpSpPr/>
+        <p:nvPr/>
+      </p:nvGrpSpPr>
+      <p:grpSpPr/>
+      <p:sp>
+        <p:nvSpPr>
+          <p:cNvPr id="2" name="Rectangle 1"/>
+          <p:cNvSpPr/>
+          <p:nvPr/>
+        </p:nvSpPr>
+        <p:spPr>
+          <a:xfrm>
+            <a:off x="0" y="0"/>
+            <a:ext cx="12191695" cy="6858000"/>
+          </a:xfrm>
+          <a:prstGeom prst="rect">
+            <a:avLst/>
+          </a:prstGeom>
+          <a:solidFill>
+            <a:srgbClr val="FDFBF7"/>
+          </a:solidFill>
+          <a:ln>
+            <a:noFill/>
+          </a:ln>
+        </p:spPr>
+        <p:style>
+          <a:lnRef idx="1">
+            <a:schemeClr val="accent1"/>
+          </a:lnRef>
+          <a:fillRef idx="3">
+            <a:schemeClr val="accent1"/>
+          </a:fillRef>
+          <a:effectRef idx="2">
+            <a:schemeClr val="accent1"/>
+          </a:effectRef>
+          <a:fontRef idx="minor">
+            <a:schemeClr val="lt1"/>
+          </a:fontRef>
+        </p:style>
+        <p:txBody>
+          <a:bodyPr rtlCol="0" anchor="ctr"/>
+          <a:lstStyle/>
+          <a:p>
+            <a:pPr algn="ctr"/>
+          </a:p>
+        </p:txBody>
+      </p:sp>
+      <p:sp>
+        <p:nvSpPr>
+          <p:cNvPr id="3" name="TextBox 2"/>
+          <p:cNvSpPr txBox="1"/>
+          <p:nvPr/>
+        </p:nvSpPr>
+        <p:spPr>
+          <a:xfrm>
+            <a:off x="731520" y="411480"/>
+            <a:ext cx="10515600" cy="365760"/>
+          </a:xfrm>
+          <a:prstGeom prst="rect">
+            <a:avLst/>
+          </a:prstGeom>
+          <a:noFill/>
+        </p:spPr>
+        <p:txBody>
+          <a:bodyPr wrap="square">
+            <a:spAutoFit/>
+          </a:bodyPr>
+          <a:lstStyle/>
+          <a:p>
+            <a:pPr>
+              <a:defRPr sz="1000" b="1">
+                <a:solidFill>
+                  <a:srgbClr val="A37F48"/>
+                </a:solidFill>
+              </a:defRPr>
+            </a:pPr>
+            <a:r>
+              <a:t>K-PREMIUM WELLNESS SPA 2026</a:t>
+            </a:r>
+          </a:p>
+        </p:txBody>
+      </p:sp>
+      <p:sp>
+        <p:nvSpPr>
+          <p:cNvPr id="4" name="TextBox 3"/>
+          <p:cNvSpPr txBox="1"/>
+          <p:nvPr/>
+        </p:nvSpPr>
+        <p:spPr>
+          <a:xfrm>
+            <a:off x="731520" y="685800"/>
+            <a:ext cx="10515600" cy="731520"/>
+          </a:xfrm>
+          <a:prstGeom prst="rect">
+            <a:avLst/>
+          </a:prstGeom>
+          <a:noFill/>
+        </p:spPr>
+        <p:txBody>
+          <a:bodyPr wrap="square">
+            <a:spAutoFit/>
+          </a:bodyPr>
+          <a:lstStyle/>
+          <a:p>
+            <a:pPr>
+              <a:defRPr sz="2200" b="1">
+                <a:solidFill>
+                  <a:srgbClr val="241E19"/>
+                </a:solidFill>
+              </a:defRPr>
+            </a:pPr>
+            <a:r>
+              <a:t>총괄 연구진 및 디렉터 프로필</a:t>
+            </a:r>
+          </a:p>
+        </p:txBody>
+      </p:sp>
+      <p:sp>
+        <p:nvSpPr>
+          <p:cNvPr id="5" name="Rounded Rectangle 4"/>
+          <p:cNvSpPr/>
+          <p:nvPr/>
+        </p:nvSpPr>
+        <p:spPr>
+          <a:xfrm>
+            <a:off x="731520" y="1554480"/>
+            <a:ext cx="5120640" cy="4663440"/>
+          </a:xfrm>
+          <a:prstGeom prst="roundRect">
+            <a:avLst/>
+          </a:prstGeom>
+          <a:solidFill>
+            <a:srgbClr val="FFFFFF"/>
+          </a:solidFill>
+          <a:ln w="15240">
+            <a:solidFill>
+              <a:srgbClr val="C9A876"/>
+            </a:solidFill>
+          </a:ln>
+        </p:spPr>
+        <p:style>
+          <a:lnRef idx="1">
+            <a:schemeClr val="accent1"/>
+          </a:lnRef>
+          <a:fillRef idx="3">
+            <a:schemeClr val="accent1"/>
+          </a:fillRef>
+          <a:effectRef idx="2">
+            <a:schemeClr val="accent1"/>
+          </a:effectRef>
+          <a:fontRef idx="minor">
+            <a:schemeClr val="lt1"/>
+          </a:fontRef>
+        </p:style>
+        <p:txBody>
+          <a:bodyPr rtlCol="0" anchor="ctr"/>
+          <a:lstStyle/>
+          <a:p>
+            <a:pPr algn="ctr"/>
+          </a:p>
+        </p:txBody>
+      </p:sp>
+      <p:sp>
+        <p:nvSpPr>
+          <p:cNvPr id="6" name="TextBox 5"/>
+          <p:cNvSpPr txBox="1"/>
+          <p:nvPr/>
+        </p:nvSpPr>
+        <p:spPr>
+          <a:xfrm>
+            <a:off x="1005840" y="1828800"/>
+            <a:ext cx="4572000" cy="4114800"/>
+          </a:xfrm>
+          <a:prstGeom prst="rect">
+            <a:avLst/>
+          </a:prstGeom>
+          <a:noFill/>
+        </p:spPr>
+        <p:txBody>
+          <a:bodyPr wrap="square">
+            <a:spAutoFit/>
+          </a:bodyPr>
+          <a:lstStyle/>
+          <a:p>
+            <a:pPr>
+              <a:defRPr sz="1100" b="1">
+                <a:solidFill>
+                  <a:srgbClr val="A37F48"/>
+                </a:solidFill>
+              </a:defRPr>
+            </a:pPr>
+            <a:r>
+              <a:t>WELLNESS MASTER DIRECTOR</a:t>
+            </a:r>
+          </a:p>
+          <a:p>
+            <a:pPr>
+              <a:spcAft>
+                <a:spcPts val="1000"/>
+              </a:spcAft>
+              <a:defRPr sz="2400" b="1">
+                <a:solidFill>
+                  <a:srgbClr val="241E19"/>
+                </a:solidFill>
+              </a:defRPr>
+            </a:pPr>
+            <a:r>
+              <a:t>유정근 (Ryu Jean)</a:t>
+            </a:r>
+          </a:p>
+          <a:p>
+            <a:pPr>
+              <a:lnSpc>
+                <a:spcPct val="130000"/>
+              </a:lnSpc>
+              <a:defRPr sz="1200">
+                <a:solidFill>
+                  <a:srgbClr val="52463C"/>
+                </a:solidFill>
+              </a:defRPr>
+            </a:pPr>
+            <a:r>
+              <a:t>• 웰니스 총괄 디렉터 / 전담 테라피스트</a:t>
+            </a:r>
+            <a:br/>
+            <a:r>
+              <a:t>• 사상체질 10대 시그니처 테라피 의전 설계</a:t>
+            </a:r>
+            <a:br/>
+            <a:r>
+              <a:t>• 글로벌 호텔/리조트 파트너십 및 브랜드 총괄</a:t>
+            </a:r>
+            <a:br/>
+            <a:r>
+              <a:t>• 1:1 VIP 프라이빗 컨설팅 및 트리트먼트 마스터</a:t>
+            </a:r>
+            <a:br/>
+            <a:br/>
+            <a:r>
+              <a:t>📞 연락처: 010-4728-9917</a:t>
+            </a:r>
+            <a:br/>
+            <a:r>
+              <a:t>✉️ 이메일: ryujean77@gmail.com</a:t>
+            </a:r>
+          </a:p>
+        </p:txBody>
+      </p:sp>
+      <p:sp>
+        <p:nvSpPr>
+          <p:cNvPr id="7" name="Rounded Rectangle 6"/>
+          <p:cNvSpPr/>
+          <p:nvPr/>
+        </p:nvSpPr>
+        <p:spPr>
+          <a:xfrm>
+            <a:off x="6217920" y="1554480"/>
+            <a:ext cx="5212080" cy="4663440"/>
+          </a:xfrm>
+          <a:prstGeom prst="roundRect">
+            <a:avLst/>
+          </a:prstGeom>
+          <a:solidFill>
+            <a:srgbClr val="FFFFFF"/>
+          </a:solidFill>
+          <a:ln w="15240">
+            <a:solidFill>
+              <a:srgbClr val="C9A876"/>
+            </a:solidFill>
+          </a:ln>
+        </p:spPr>
+        <p:style>
+          <a:lnRef idx="1">
+            <a:schemeClr val="accent1"/>
+          </a:lnRef>
+          <a:fillRef idx="3">
+            <a:schemeClr val="accent1"/>
+          </a:fillRef>
+          <a:effectRef idx="2">
+            <a:schemeClr val="accent1"/>
+          </a:effectRef>
+          <a:fontRef idx="minor">
+            <a:schemeClr val="lt1"/>
+          </a:fontRef>
+        </p:style>
+        <p:txBody>
+          <a:bodyPr rtlCol="0" anchor="ctr"/>
+          <a:lstStyle/>
+          <a:p>
+            <a:pPr algn="ctr"/>
+          </a:p>
+        </p:txBody>
+      </p:sp>
+      <p:sp>
+        <p:nvSpPr>
+          <p:cNvPr id="8" name="TextBox 7"/>
+          <p:cNvSpPr txBox="1"/>
+          <p:nvPr/>
+        </p:nvSpPr>
+        <p:spPr>
+          <a:xfrm>
+            <a:off x="6492240" y="1828800"/>
+            <a:ext cx="4663440" cy="4114800"/>
+          </a:xfrm>
+          <a:prstGeom prst="rect">
+            <a:avLst/>
+          </a:prstGeom>
+          <a:noFill/>
+        </p:spPr>
+        <p:txBody>
+          <a:bodyPr wrap="square">
+            <a:spAutoFit/>
+          </a:bodyPr>
+          <a:lstStyle/>
+          <a:p>
+            <a:pPr>
+              <a:defRPr sz="1100" b="1">
+                <a:solidFill>
+                  <a:srgbClr val="A37F48"/>
+                </a:solidFill>
+              </a:defRPr>
+            </a:pPr>
+            <a:r>
+              <a:t>ACADEMIC &amp; MEDICAL DIRECTOR</a:t>
+            </a:r>
+          </a:p>
+          <a:p>
+            <a:pPr>
+              <a:spcAft>
+                <a:spcPts val="1000"/>
+              </a:spcAft>
+              <a:defRPr sz="2400" b="1">
+                <a:solidFill>
+                  <a:srgbClr val="241E19"/>
+                </a:solidFill>
+              </a:defRPr>
+            </a:pPr>
+            <a:r>
+              <a:t>임동구 박사 (Dr. Dong-Ku Yim)</a:t>
+            </a:r>
+          </a:p>
+          <a:p>
+            <a:pPr>
+              <a:lnSpc>
+                <a:spcPct val="130000"/>
+              </a:lnSpc>
+              <a:defRPr sz="1200">
+                <a:solidFill>
+                  <a:srgbClr val="52463C"/>
+                </a:solidFill>
+              </a:defRPr>
+            </a:pPr>
+            <a:r>
+              <a:t>• 식품공학박사 / Dr.Yim's 체질라이프스타일 연구소장</a:t>
+            </a:r>
+            <a:br/>
+            <a:r>
+              <a:t>• 사상체질 의학의 식품공학적 섭생 연구 권위자</a:t>
+            </a:r>
+            <a:br/>
+            <a:r>
+              <a:t>• 4대 체질 맞춤 미역국 &amp; 아로마 배합비 감수</a:t>
+            </a:r>
+            <a:br/>
+            <a:r>
+              <a:t>• 현대 생체 데이터 분석 및 체질 확정 알고리즘 구축</a:t>
+            </a:r>
+            <a:br/>
+            <a:br/>
+            <a:r>
+              <a:t>📞 연락처: 010-2323-4662</a:t>
+            </a:r>
+            <a:br/>
+            <a:r>
+              <a:t>✉️ 이메일: ydoko@daum.net</a:t>
+            </a:r>
+          </a:p>
+        </p:txBody>
+      </p:sp>
+    </p:spTree>
+  </p:cSld>
+  <p:clrMapOvr>
+    <a:masterClrMapping/>
+  </p:clrMapOvr>
+</p:sld>
+</file>
+
+<file path=ppt/slides/slide16.xml><?xml version="1.0" encoding="utf-8"?>
+<p:sld xmlns:a="http://schemas.openxmlformats.org/drawingml/2006/main" xmlns:p="http://schemas.openxmlformats.org/presentationml/2006/main" xmlns:r="http://schemas.openxmlformats.org/officeDocument/2006/relationships">
+  <p:cSld>
+    <p:spTree>
+      <p:nvGrpSpPr>
+        <p:cNvPr id="1" name=""/>
+        <p:cNvGrpSpPr/>
+        <p:nvPr/>
+      </p:nvGrpSpPr>
+      <p:grpSpPr/>
+      <p:sp>
+        <p:nvSpPr>
+          <p:cNvPr id="2" name="Rectangle 1"/>
+          <p:cNvSpPr/>
+          <p:nvPr/>
+        </p:nvSpPr>
+        <p:spPr>
+          <a:xfrm>
+            <a:off x="0" y="0"/>
+            <a:ext cx="12191695" cy="6858000"/>
+          </a:xfrm>
+          <a:prstGeom prst="rect">
+            <a:avLst/>
+          </a:prstGeom>
+          <a:solidFill>
             <a:srgbClr val="1A3328"/>
           </a:solidFill>
           <a:ln>
@@ -4824,7 +6394,7 @@
               </a:defRPr>
             </a:pPr>
             <a:r>
-              <a:t>K-PREMIUM WELLNESS SPA 2026</a:t>
+              <a:t>THE PROBLEM</a:t>
             </a:r>
           </a:p>
         </p:txBody>
@@ -4859,7 +6429,7 @@
               </a:defRPr>
             </a:pPr>
             <a:r>
-              <a:t>Executive Summary : 사상체질 스파 4대 핵심 축</a:t>
+              <a:t>Problem Statement : 기존 일반 스파와 디톡스의 3대 치명적 한계</a:t>
             </a:r>
           </a:p>
         </p:txBody>
@@ -4873,7 +6443,7 @@
         <p:spPr>
           <a:xfrm>
             <a:off x="731520" y="1554480"/>
-            <a:ext cx="5120640" cy="2103120"/>
+            <a:ext cx="3383280" cy="4663440"/>
           </a:xfrm>
           <a:prstGeom prst="roundRect">
             <a:avLst/>
@@ -4883,7 +6453,7 @@
           </a:solidFill>
           <a:ln w="15240">
             <a:solidFill>
-              <a:srgbClr val="C9A876"/>
+              <a:srgbClr val="A02D2D"/>
             </a:solidFill>
           </a:ln>
         </p:spPr>
@@ -4917,8 +6487,8 @@
         </p:nvSpPr>
         <p:spPr>
           <a:xfrm>
-            <a:off x="960120" y="1737360"/>
-            <a:ext cx="4663440" cy="1737360"/>
+            <a:off x="914400" y="1783080"/>
+            <a:ext cx="3017520" cy="4206240"/>
           </a:xfrm>
           <a:prstGeom prst="rect">
             <a:avLst/>
@@ -4933,31 +6503,36 @@
           <a:p>
             <a:pPr>
               <a:spcAft>
-                <a:spcPts val="800"/>
+                <a:spcPts val="1200"/>
               </a:spcAft>
-              <a:defRPr sz="1600" b="1">
-                <a:solidFill>
-                  <a:srgbClr val="1E5037"/>
-                </a:solidFill>
-              </a:defRPr>
-            </a:pPr>
-            <a:r>
-              <a:t>01. 사상체질 의학 과학화</a:t>
+              <a:defRPr sz="1500" b="1">
+                <a:solidFill>
+                  <a:srgbClr val="A02D2D"/>
+                </a:solidFill>
+              </a:defRPr>
+            </a:pPr>
+            <a:r>
+              <a:t>01. 획일적 처방의 부작용 ('One-Size-Fits-All')</a:t>
             </a:r>
           </a:p>
           <a:p>
             <a:pPr>
               <a:lnSpc>
-                <a:spcPct val="120000"/>
+                <a:spcPct val="130000"/>
               </a:lnSpc>
-              <a:defRPr sz="1200">
+              <a:defRPr sz="1150">
                 <a:solidFill>
                   <a:srgbClr val="52463C"/>
                 </a:solidFill>
               </a:defRPr>
             </a:pPr>
             <a:r>
-              <a:t>1894년 이제마 『동의수세보원』 장부대소(臟腑大小) 원리와 인바디/뇌파/산화질소 데이터의 완벽한 융합</a:t>
+              <a:t>기존 스파는 '만인에게 좋은 것'이라는 잘못된 전제로 라벤더/페퍼민트/온열 사우나를 획일 적용합니다.</a:t>
+            </a:r>
+            <a:br/>
+            <a:br/>
+            <a:r>
+              <a:t>⚠️ 위험성: 열이 많은 사람에게 온열 사우나나 진저 오일을 쓰면 두통·안구충혈·불면이 악화되고, 몸이 찬 사람에게 찬 탄산스파나 페퍼민트를 쓰면 극심한 냉증과 복통을 유발합니다.</a:t>
             </a:r>
           </a:p>
         </p:txBody>
@@ -4970,8 +6545,8 @@
         </p:nvSpPr>
         <p:spPr>
           <a:xfrm>
-            <a:off x="6126480" y="1554480"/>
-            <a:ext cx="5120640" cy="2103120"/>
+            <a:off x="4343400" y="1554480"/>
+            <a:ext cx="3383280" cy="4663440"/>
           </a:xfrm>
           <a:prstGeom prst="roundRect">
             <a:avLst/>
@@ -4981,7 +6556,7 @@
           </a:solidFill>
           <a:ln w="15240">
             <a:solidFill>
-              <a:srgbClr val="C9A876"/>
+              <a:srgbClr val="A02D2D"/>
             </a:solidFill>
           </a:ln>
         </p:spPr>
@@ -5015,8 +6590,8 @@
         </p:nvSpPr>
         <p:spPr>
           <a:xfrm>
-            <a:off x="6355080" y="1737360"/>
-            <a:ext cx="4663440" cy="1737360"/>
+            <a:off x="4526280" y="1783080"/>
+            <a:ext cx="3017520" cy="4206240"/>
           </a:xfrm>
           <a:prstGeom prst="rect">
             <a:avLst/>
@@ -5031,31 +6606,36 @@
           <a:p>
             <a:pPr>
               <a:spcAft>
-                <a:spcPts val="800"/>
+                <a:spcPts val="1200"/>
               </a:spcAft>
-              <a:defRPr sz="1600" b="1">
-                <a:solidFill>
-                  <a:srgbClr val="A37F48"/>
-                </a:solidFill>
-              </a:defRPr>
-            </a:pPr>
-            <a:r>
-              <a:t>02. 10대 시그니처 테라피</a:t>
+              <a:defRPr sz="1500" b="1">
+                <a:solidFill>
+                  <a:srgbClr val="A02D2D"/>
+                </a:solidFill>
+              </a:defRPr>
+            </a:pPr>
+            <a:r>
+              <a:t>02. 1회성 마사지의 한계 (Temporary Relief)</a:t>
             </a:r>
           </a:p>
           <a:p>
             <a:pPr>
               <a:lnSpc>
-                <a:spcPct val="120000"/>
+                <a:spcPct val="130000"/>
               </a:lnSpc>
-              <a:defRPr sz="1200">
+              <a:defRPr sz="1150">
                 <a:solidFill>
                   <a:srgbClr val="52463C"/>
                 </a:solidFill>
               </a:defRPr>
             </a:pPr>
             <a:r>
-              <a:t>20분 약재 족욕, 은반지 의전, 80분 이원화 바디(한의 수기+순수 오일), 1시간 심부 온열, 태극선법 기체조</a:t>
+              <a:t>단순 근육 이완 마사지는 피부와 표층 근육만 일시적으로 만져줄 뿐, 체내 장부의 불균형과 심부 노폐물 정체를 해결하지 못합니다.</a:t>
+            </a:r>
+            <a:br/>
+            <a:br/>
+            <a:r>
+              <a:t>⚠️ 한계: 스파를 받은 당일 밤만 잠시 편안할 뿐, 다음 날 아침이면 만성 피로와 뻐근함이 100% 원상복귀되는 악순환이 반복됩니다.</a:t>
             </a:r>
           </a:p>
         </p:txBody>
@@ -5068,8 +6648,8 @@
         </p:nvSpPr>
         <p:spPr>
           <a:xfrm>
-            <a:off x="731520" y="3931920"/>
-            <a:ext cx="5120640" cy="2103120"/>
+            <a:off x="7955280" y="1554480"/>
+            <a:ext cx="3383280" cy="4663440"/>
           </a:xfrm>
           <a:prstGeom prst="roundRect">
             <a:avLst/>
@@ -5079,7 +6659,7 @@
           </a:solidFill>
           <a:ln w="15240">
             <a:solidFill>
-              <a:srgbClr val="C9A876"/>
+              <a:srgbClr val="A02D2D"/>
             </a:solidFill>
           </a:ln>
         </p:spPr>
@@ -5113,8 +6693,8 @@
         </p:nvSpPr>
         <p:spPr>
           <a:xfrm>
-            <a:off x="960120" y="4114800"/>
-            <a:ext cx="4663440" cy="1737360"/>
+            <a:off x="8138160" y="1783080"/>
+            <a:ext cx="3017520" cy="4206240"/>
           </a:xfrm>
           <a:prstGeom prst="rect">
             <a:avLst/>
@@ -5129,129 +6709,36 @@
           <a:p>
             <a:pPr>
               <a:spcAft>
-                <a:spcPts val="800"/>
+                <a:spcPts val="1200"/>
               </a:spcAft>
-              <a:defRPr sz="1600" b="1">
-                <a:solidFill>
-                  <a:srgbClr val="1E5037"/>
-                </a:solidFill>
-              </a:defRPr>
-            </a:pPr>
-            <a:r>
-              <a:t>03. 12시간 단식 &amp; 맞춤 섭생</a:t>
+              <a:defRPr sz="1500" b="1">
+                <a:solidFill>
+                  <a:srgbClr val="A02D2D"/>
+                </a:solidFill>
+              </a:defRPr>
+            </a:pPr>
+            <a:r>
+              <a:t>03. 무분별한 디톡스의 역효과 (Blind Detox)</a:t>
             </a:r>
           </a:p>
           <a:p>
             <a:pPr>
               <a:lnSpc>
-                <a:spcPct val="120000"/>
+                <a:spcPct val="130000"/>
               </a:lnSpc>
-              <a:defRPr sz="1200">
+              <a:defRPr sz="1150">
                 <a:solidFill>
                   <a:srgbClr val="52463C"/>
                 </a:solidFill>
               </a:defRPr>
             </a:pPr>
             <a:r>
-              <a:t>18:00~06:00 단식을 통한 자가포식(Autophagy) 활성화 및 기상 후 4대 체질 맞춤 영양 미역국 조식</a:t>
-            </a:r>
-          </a:p>
-        </p:txBody>
-      </p:sp>
-      <p:sp>
-        <p:nvSpPr>
-          <p:cNvPr id="11" name="Rounded Rectangle 10"/>
-          <p:cNvSpPr/>
-          <p:nvPr/>
-        </p:nvSpPr>
-        <p:spPr>
-          <a:xfrm>
-            <a:off x="6126480" y="3931920"/>
-            <a:ext cx="5120640" cy="2103120"/>
-          </a:xfrm>
-          <a:prstGeom prst="roundRect">
-            <a:avLst/>
-          </a:prstGeom>
-          <a:solidFill>
-            <a:srgbClr val="FFFFFF"/>
-          </a:solidFill>
-          <a:ln w="15240">
-            <a:solidFill>
-              <a:srgbClr val="C9A876"/>
-            </a:solidFill>
-          </a:ln>
-        </p:spPr>
-        <p:style>
-          <a:lnRef idx="1">
-            <a:schemeClr val="accent1"/>
-          </a:lnRef>
-          <a:fillRef idx="3">
-            <a:schemeClr val="accent1"/>
-          </a:fillRef>
-          <a:effectRef idx="2">
-            <a:schemeClr val="accent1"/>
-          </a:effectRef>
-          <a:fontRef idx="minor">
-            <a:schemeClr val="lt1"/>
-          </a:fontRef>
-        </p:style>
-        <p:txBody>
-          <a:bodyPr rtlCol="0" anchor="ctr"/>
-          <a:lstStyle/>
-          <a:p>
-            <a:pPr algn="ctr"/>
-          </a:p>
-        </p:txBody>
-      </p:sp>
-      <p:sp>
-        <p:nvSpPr>
-          <p:cNvPr id="12" name="TextBox 11"/>
-          <p:cNvSpPr txBox="1"/>
-          <p:nvPr/>
-        </p:nvSpPr>
-        <p:spPr>
-          <a:xfrm>
-            <a:off x="6355080" y="4114800"/>
-            <a:ext cx="4663440" cy="1737360"/>
-          </a:xfrm>
-          <a:prstGeom prst="rect">
-            <a:avLst/>
-          </a:prstGeom>
-          <a:noFill/>
-        </p:spPr>
-        <p:txBody>
-          <a:bodyPr wrap="square">
-            <a:spAutoFit/>
-          </a:bodyPr>
-          <a:lstStyle/>
-          <a:p>
-            <a:pPr>
-              <a:spcAft>
-                <a:spcPts val="800"/>
-              </a:spcAft>
-              <a:defRPr sz="1600" b="1">
-                <a:solidFill>
-                  <a:srgbClr val="A37F48"/>
-                </a:solidFill>
-              </a:defRPr>
-            </a:pPr>
-            <a:r>
-              <a:t>04. VIP 평생 LTV 모델</a:t>
-            </a:r>
-          </a:p>
-          <a:p>
-            <a:pPr>
-              <a:lnSpc>
-                <a:spcPct val="120000"/>
-              </a:lnSpc>
-              <a:defRPr sz="1200">
-                <a:solidFill>
-                  <a:srgbClr val="52463C"/>
-                </a:solidFill>
-              </a:defRPr>
-            </a:pPr>
-            <a:r>
-              <a:t>DTC 유전자 및 마이크로바이옴 검사 연동, 7일 후 1:1 바이오 리포트, 월간 맞춤 오일 정기구독(LRP) 생태계</a:t>
+              <a:t>체질을 무시한 유행성 디톡스 주스(케일/오이 등 찬 성질)나 무작정 굶는 단식은 소화기 장부를 심각하게 훼손합니다.</a:t>
+            </a:r>
+            <a:br/>
+            <a:br/>
+            <a:r>
+              <a:t>⚠️ 피해: 비위가 약하고 몸이 찬 소음인에게 찬 녹즙은 위장 마비를 일으키고, 고단백 육류 과다는 태양인의 간 해독력을 파괴합니다.</a:t>
             </a:r>
           </a:p>
         </p:txBody>
@@ -5347,7 +6834,7 @@
               </a:defRPr>
             </a:pPr>
             <a:r>
-              <a:t>K-PREMIUM WELLNESS SPA 2026</a:t>
+              <a:t>THE SOLUTION</a:t>
             </a:r>
           </a:p>
         </p:txBody>
@@ -5382,7 +6869,7 @@
               </a:defRPr>
             </a:pPr>
             <a:r>
-              <a:t>글로벌 웰니스 시장(GWI)과 3세대 처방형 스파의 급부상</a:t>
+              <a:t>Our Solution : 사상체질 스파가 제시하는 3대 근본 해결책</a:t>
             </a:r>
           </a:p>
         </p:txBody>
@@ -5396,17 +6883,17 @@
         <p:spPr>
           <a:xfrm>
             <a:off x="731520" y="1554480"/>
-            <a:ext cx="3474720" cy="4663440"/>
+            <a:ext cx="3383280" cy="4663440"/>
           </a:xfrm>
           <a:prstGeom prst="roundRect">
             <a:avLst/>
           </a:prstGeom>
           <a:solidFill>
-            <a:srgbClr val="1A3328"/>
+            <a:srgbClr val="FFFFFF"/>
           </a:solidFill>
           <a:ln w="15240">
             <a:solidFill>
-              <a:srgbClr val="C9A876"/>
+              <a:srgbClr val="1E5037"/>
             </a:solidFill>
           </a:ln>
         </p:spPr>
@@ -5440,8 +6927,8 @@
         </p:nvSpPr>
         <p:spPr>
           <a:xfrm>
-            <a:off x="914400" y="1828800"/>
-            <a:ext cx="3108960" cy="4114800"/>
+            <a:off x="914400" y="1783080"/>
+            <a:ext cx="3017520" cy="4206240"/>
           </a:xfrm>
           <a:prstGeom prst="rect">
             <a:avLst/>
@@ -5458,29 +6945,14 @@
               <a:spcAft>
                 <a:spcPts val="1200"/>
               </a:spcAft>
-              <a:defRPr sz="1100" b="1">
-                <a:solidFill>
-                  <a:srgbClr val="C9A876"/>
-                </a:solidFill>
-              </a:defRPr>
-            </a:pPr>
-            <a:r>
-              <a:t>GLOBAL WELLNESS 2026</a:t>
-            </a:r>
-          </a:p>
-          <a:p>
-            <a:pPr>
-              <a:spcAft>
-                <a:spcPts val="800"/>
-              </a:spcAft>
-              <a:defRPr sz="3200" b="1">
-                <a:solidFill>
-                  <a:srgbClr val="FFFFFF"/>
-                </a:solidFill>
-              </a:defRPr>
-            </a:pPr>
-            <a:r>
-              <a:t>$7.0 Trillion</a:t>
+              <a:defRPr sz="1500" b="1">
+                <a:solidFill>
+                  <a:srgbClr val="1E5037"/>
+                </a:solidFill>
+              </a:defRPr>
+            </a:pPr>
+            <a:r>
+              <a:t>01. 장부대소 기반 0% 부작용 초개인화</a:t>
             </a:r>
           </a:p>
           <a:p>
@@ -5488,14 +6960,19 @@
               <a:lnSpc>
                 <a:spcPct val="130000"/>
               </a:lnSpc>
-              <a:defRPr sz="1200">
-                <a:solidFill>
-                  <a:srgbClr val="D2C8B4"/>
-                </a:solidFill>
-              </a:defRPr>
-            </a:pPr>
-            <a:r>
-              <a:t>연평균 8.6% 초고속 성장 중인 글로벌 웰니스 이코노미(약 9,500조 원). 글로벌 VIP 고객층은 단순 휴식을 넘어 '생체 데이터를 기반으로 내 몸을 리셋하는 처방형 스파'에 지갑을 열고 있습니다.</a:t>
+              <a:defRPr sz="1150">
+                <a:solidFill>
+                  <a:srgbClr val="52463C"/>
+                </a:solidFill>
+              </a:defRPr>
+            </a:pPr>
+            <a:r>
+              <a:t>1894년 이제마의 『동의수세보원』 해부생리학과 생체 데이터를 결합하여 간·폐·비·신의 장부 용량을 정밀 진단합니다.</a:t>
+            </a:r>
+            <a:br/>
+            <a:br/>
+            <a:r>
+              <a:t>✨ 해결: 오직 내 몸의 장부 편차에만 유효한 최고급 100% 순수 에센셜 오일과 맞춤 수온(온열탕 vs 쿨링탕)을 처방하여 부작용을 원천 차단합니다.</a:t>
             </a:r>
           </a:p>
         </p:txBody>
@@ -5508,8 +6985,8 @@
         </p:nvSpPr>
         <p:spPr>
           <a:xfrm>
-            <a:off x="4480560" y="1554480"/>
-            <a:ext cx="6949440" cy="2194560"/>
+            <a:off x="4343400" y="1554480"/>
+            <a:ext cx="3383280" cy="4663440"/>
           </a:xfrm>
           <a:prstGeom prst="roundRect">
             <a:avLst/>
@@ -5519,7 +6996,7 @@
           </a:solidFill>
           <a:ln w="15240">
             <a:solidFill>
-              <a:srgbClr val="C9A876"/>
+              <a:srgbClr val="A37F48"/>
             </a:solidFill>
           </a:ln>
         </p:spPr>
@@ -5553,8 +7030,8 @@
         </p:nvSpPr>
         <p:spPr>
           <a:xfrm>
-            <a:off x="4663440" y="1737360"/>
-            <a:ext cx="6583680" cy="1828800"/>
+            <a:off x="4526280" y="1783080"/>
+            <a:ext cx="3017520" cy="4206240"/>
           </a:xfrm>
           <a:prstGeom prst="rect">
             <a:avLst/>
@@ -5569,16 +7046,16 @@
           <a:p>
             <a:pPr>
               <a:spcAft>
-                <a:spcPts val="600"/>
+                <a:spcPts val="1200"/>
               </a:spcAft>
-              <a:defRPr sz="1600" b="1">
-                <a:solidFill>
-                  <a:srgbClr val="241E19"/>
-                </a:solidFill>
-              </a:defRPr>
-            </a:pPr>
-            <a:r>
-              <a:t>스파 패러다임의 3단계 진화</a:t>
+              <a:defRPr sz="1500" b="1">
+                <a:solidFill>
+                  <a:srgbClr val="A37F48"/>
+                </a:solidFill>
+              </a:defRPr>
+            </a:pPr>
+            <a:r>
+              <a:t>02. 3중 융합 세포 단위 리셋 (스파+단식+섭생)</a:t>
             </a:r>
           </a:p>
           <a:p>
@@ -5586,22 +7063,19 @@
               <a:lnSpc>
                 <a:spcPct val="130000"/>
               </a:lnSpc>
-              <a:defRPr sz="1200">
+              <a:defRPr sz="1150">
                 <a:solidFill>
                   <a:srgbClr val="52463C"/>
                 </a:solidFill>
               </a:defRPr>
             </a:pPr>
             <a:r>
-              <a:t>• 1세대 (휴식형): 서양식 스웨디시, 단순 근육 이완 (차별화 한계)</a:t>
+              <a:t>80분 이원화 바디 테라피(한의 수기 지압 + 순수 오일 림프 드레나쥐)와 12시간 단식(자가포식)을 결합합니다.</a:t>
             </a:r>
             <a:br/>
-            <a:r>
-              <a:t>• 2세대 (시설/메디컬형): 5성급 리조트 하드웨어 및 의료 시술 결합 (고비용/부작용 리스크)</a:t>
-            </a:r>
             <a:br/>
             <a:r>
-              <a:t>• 👑 3세대 (초개인화 처방형): 생체 데이터 기반 사상체질 맞춤 신체 리셋 (사상체질 스파)</a:t>
+              <a:t>✨ 해결: 18:00~06:00 단식으로 세포 내 찌꺼기를 청소하고, 기상 직후 4대 체질 맞춤 영양 미역국으로 장부를 완벽하게 영양 재건합니다.</a:t>
             </a:r>
           </a:p>
         </p:txBody>
@@ -5614,18 +7088,18 @@
         </p:nvSpPr>
         <p:spPr>
           <a:xfrm>
-            <a:off x="4480560" y="4023360"/>
-            <a:ext cx="6949440" cy="2194560"/>
+            <a:off x="7955280" y="1554480"/>
+            <a:ext cx="3383280" cy="4663440"/>
           </a:xfrm>
           <a:prstGeom prst="roundRect">
             <a:avLst/>
           </a:prstGeom>
           <a:solidFill>
-            <a:srgbClr val="F8F5EE"/>
+            <a:srgbClr val="FFFFFF"/>
           </a:solidFill>
           <a:ln w="15240">
             <a:solidFill>
-              <a:srgbClr val="C9A876"/>
+              <a:srgbClr val="1E5037"/>
             </a:solidFill>
           </a:ln>
         </p:spPr>
@@ -5659,8 +7133,8 @@
         </p:nvSpPr>
         <p:spPr>
           <a:xfrm>
-            <a:off x="4663440" y="4206240"/>
-            <a:ext cx="6583680" cy="1828800"/>
+            <a:off x="8138160" y="1783080"/>
+            <a:ext cx="3017520" cy="4206240"/>
           </a:xfrm>
           <a:prstGeom prst="rect">
             <a:avLst/>
@@ -5675,16 +7149,16 @@
           <a:p>
             <a:pPr>
               <a:spcAft>
-                <a:spcPts val="600"/>
+                <a:spcPts val="1200"/>
               </a:spcAft>
-              <a:defRPr sz="1600" b="1">
-                <a:solidFill>
-                  <a:srgbClr val="A37F48"/>
-                </a:solidFill>
-              </a:defRPr>
-            </a:pPr>
-            <a:r>
-              <a:t>인도 아유르베다(3도샤) 대비 사상체질의 비교 우위</a:t>
+              <a:defRPr sz="1500" b="1">
+                <a:solidFill>
+                  <a:srgbClr val="1E5037"/>
+                </a:solidFill>
+              </a:defRPr>
+            </a:pPr>
+            <a:r>
+              <a:t>03. 평생 지속 가능한 바이오 LTV 라이프스타일</a:t>
             </a:r>
           </a:p>
           <a:p>
@@ -5692,18 +7166,19 @@
               <a:lnSpc>
                 <a:spcPct val="130000"/>
               </a:lnSpc>
-              <a:defRPr sz="1200">
+              <a:defRPr sz="1150">
                 <a:solidFill>
                   <a:srgbClr val="52463C"/>
                 </a:solidFill>
               </a:defRPr>
             </a:pPr>
             <a:r>
-              <a:t>• 아유르베다: 3도샤(바타/피타/카파) 에너지의 철학적 분류 및 중금속 약재 안전성 논란</a:t>
+              <a:t>1회성 스파 방문을 넘어 DTC 유전자 분석 및 장내 미생물(마이크로바이옴) 키트를 연동합니다.</a:t>
             </a:r>
             <a:br/>
-            <a:r>
-              <a:t>• 사상체질 스파: 간·폐·비·신 장부대소 해부생리학적 균형점 + 최고급 순수 에센셜 오일과 12시간 단식으로 부작용 0% 실현</a:t>
+            <a:br/>
+            <a:r>
+              <a:t>✨ 해결: 일상 복귀 후에도 모바일 웹 처방전과 월간 맞춤 오일 정기구독(LRP)을 통해 체질 섭생을 평생 습관화하여 재발을 방지합니다.</a:t>
             </a:r>
           </a:p>
         </p:txBody>
@@ -5799,7 +7274,7 @@
               </a:defRPr>
             </a:pPr>
             <a:r>
-              <a:t>K-PREMIUM WELLNESS SPA 2026</a:t>
+              <a:t>ROOT CAUSE MATCHING</a:t>
             </a:r>
           </a:p>
         </p:txBody>
@@ -5834,7 +7309,7 @@
               </a:defRPr>
             </a:pPr>
             <a:r>
-              <a:t>4대 사상체질 심층 처방 매트릭스</a:t>
+              <a:t>체질별 4대 고질적 병리 문제 &amp; 1:1 맞춤 해결 프로토콜</a:t>
             </a:r>
           </a:p>
         </p:txBody>
@@ -5908,9 +7383,9 @@
           <a:p>
             <a:pPr>
               <a:spcAft>
-                <a:spcPts val="1000"/>
+                <a:spcPts val="800"/>
               </a:spcAft>
-              <a:defRPr sz="1500" b="1">
+              <a:defRPr sz="1450" b="1">
                 <a:solidFill>
                   <a:srgbClr val="A37F48"/>
                 </a:solidFill>
@@ -5925,30 +7400,39 @@
               <a:lnSpc>
                 <a:spcPct val="125000"/>
               </a:lnSpc>
-              <a:defRPr sz="1100">
+              <a:defRPr sz="1050">
                 <a:solidFill>
                   <a:srgbClr val="241E19"/>
                 </a:solidFill>
               </a:defRPr>
             </a:pPr>
             <a:r>
-              <a:t>• 장부 특성: 간 기능 왕성, 폐/기관지 허약</a:t>
+              <a:t>🚨 고질적 문제:</a:t>
             </a:r>
             <a:br/>
             <a:r>
-              <a:t>• 취약 증상: 목 답답함, 피부 건조, 림프 정체</a:t>
+              <a:t>• 폐/호흡기 건조 및 림프 노폐물 정체</a:t>
             </a:r>
             <a:br/>
             <a:r>
-              <a:t>• 오일 처방: 유칼립투스, 이지에어, 샌달우드</a:t>
+              <a:t>• 비만 및 심혈관 대사 정체 경향</a:t>
             </a:r>
             <a:br/>
-            <a:r>
-              <a:t>• 맞춤 식단: 소고기 양지 들깨 미역국 + 율무밥</a:t>
-            </a:r>
             <a:br/>
             <a:r>
-              <a:t>• 의전 세팅: 황색 가운 + 우측 4지 은반지</a:t>
+              <a:t>💡 사상체질 스파 해법:</a:t>
+            </a:r>
+            <a:br/>
+            <a:r>
+              <a:t>• 디톡스 림프 배농 &amp; 에어 스팀 스파</a:t>
+            </a:r>
+            <a:br/>
+            <a:r>
+              <a:t>• 유칼립투스, 이지에어, 샌달우드 오일</a:t>
+            </a:r>
+            <a:br/>
+            <a:r>
+              <a:t>• 소고기 양지 들깨 미역국 + 우측 4지 은반지</a:t>
             </a:r>
           </a:p>
         </p:txBody>
@@ -6022,9 +7506,9 @@
           <a:p>
             <a:pPr>
               <a:spcAft>
-                <a:spcPts val="1000"/>
+                <a:spcPts val="800"/>
               </a:spcAft>
-              <a:defRPr sz="1500" b="1">
+              <a:defRPr sz="1450" b="1">
                 <a:solidFill>
                   <a:srgbClr val="1E5037"/>
                 </a:solidFill>
@@ -6039,30 +7523,39 @@
               <a:lnSpc>
                 <a:spcPct val="125000"/>
               </a:lnSpc>
-              <a:defRPr sz="1100">
+              <a:defRPr sz="1050">
                 <a:solidFill>
                   <a:srgbClr val="241E19"/>
                 </a:solidFill>
               </a:defRPr>
             </a:pPr>
             <a:r>
-              <a:t>• 장부 특성: 소화기 열 많음, 신장 음기 허약</a:t>
+              <a:t>🚨 고질적 문제:</a:t>
             </a:r>
             <a:br/>
             <a:r>
-              <a:t>• 취약 증상: 상체 열감, 두통, 가슴 답답, 불면</a:t>
+              <a:t>• 상체 열감, 두통, 가슴 답답, 불면증</a:t>
             </a:r>
             <a:br/>
             <a:r>
-              <a:t>• 오일 처방: 페퍼민트, 라벤더, 세레니티</a:t>
+              <a:t>• 신장 음기 고갈 및 급격한 감정 기복</a:t>
             </a:r>
             <a:br/>
-            <a:r>
-              <a:t>• 맞춤 식단: 돼지고기 수육 / 조개 미역국</a:t>
-            </a:r>
             <a:br/>
             <a:r>
-              <a:t>• 의전 세팅: 청색 가운 + 좌측 2지 은반지</a:t>
+              <a:t>💡 사상체질 스파 해법:</a:t>
+            </a:r>
+            <a:br/>
+            <a:r>
+              <a:t>• 38.5℃ 쿨링 하이드로 탄산 스파</a:t>
+            </a:r>
+            <a:br/>
+            <a:r>
+              <a:t>• 페퍼민트, 라벤더, 세레니티 뇌파 진정</a:t>
+            </a:r>
+            <a:br/>
+            <a:r>
+              <a:t>• 돼지고기 수육 / 조개 미역국 + 좌측 2지 은반지</a:t>
             </a:r>
           </a:p>
         </p:txBody>
@@ -6136,9 +7629,9 @@
           <a:p>
             <a:pPr>
               <a:spcAft>
-                <a:spcPts val="1000"/>
+                <a:spcPts val="800"/>
               </a:spcAft>
-              <a:defRPr sz="1500" b="1">
+              <a:defRPr sz="1450" b="1">
                 <a:solidFill>
                   <a:srgbClr val="A37F48"/>
                 </a:solidFill>
@@ -6153,30 +7646,39 @@
               <a:lnSpc>
                 <a:spcPct val="125000"/>
               </a:lnSpc>
-              <a:defRPr sz="1100">
+              <a:defRPr sz="1050">
                 <a:solidFill>
                   <a:srgbClr val="241E19"/>
                 </a:solidFill>
               </a:defRPr>
             </a:pPr>
             <a:r>
-              <a:t>• 장부 특성: 신장 기능 튼튼, 비위 차고 약함</a:t>
+              <a:t>🚨 고질적 문제:</a:t>
             </a:r>
             <a:br/>
             <a:r>
-              <a:t>• 취약 증상: 수족냉증, 만성 소화불량, 피로</a:t>
+              <a:t>• 수족냉증, 위장 냉증, 만성 소화불량</a:t>
             </a:r>
             <a:br/>
             <a:r>
-              <a:t>• 오일 처방: 온가드, 진저, 시나몬, 오렌지</a:t>
+              <a:t>• 자율신경 예민 및 만성 무기력/피로</a:t>
             </a:r>
             <a:br/>
-            <a:r>
-              <a:t>• 맞춤 식단: 닭가슴살 황기 보양 미역국</a:t>
-            </a:r>
             <a:br/>
             <a:r>
-              <a:t>• 의전 세팅: 백색 가운 + 우측 3지 은반지</a:t>
+              <a:t>💡 사상체질 스파 해법:</a:t>
+            </a:r>
+            <a:br/>
+            <a:r>
+              <a:t>• 41℃ 한방 온열 족욕 + 42~45℃ 온열 챔버</a:t>
+            </a:r>
+            <a:br/>
+            <a:r>
+              <a:t>• 진저, 온가드, 시나몬 심부 체온 1℃ 상승</a:t>
+            </a:r>
+            <a:br/>
+            <a:r>
+              <a:t>• 닭가슴살 황기 보양 미역국 + 우측 3지 은반지</a:t>
             </a:r>
           </a:p>
         </p:txBody>
@@ -6250,9 +7752,9 @@
           <a:p>
             <a:pPr>
               <a:spcAft>
-                <a:spcPts val="1000"/>
+                <a:spcPts val="800"/>
               </a:spcAft>
-              <a:defRPr sz="1500" b="1">
+              <a:defRPr sz="1450" b="1">
                 <a:solidFill>
                   <a:srgbClr val="1E5037"/>
                 </a:solidFill>
@@ -6267,30 +7769,39 @@
               <a:lnSpc>
                 <a:spcPct val="125000"/>
               </a:lnSpc>
-              <a:defRPr sz="1100">
+              <a:defRPr sz="1050">
                 <a:solidFill>
                   <a:srgbClr val="241E19"/>
                 </a:solidFill>
               </a:defRPr>
             </a:pPr>
             <a:r>
-              <a:t>• 장부 특성: 폐 기능 강함, 간 해독/하체 허약</a:t>
+              <a:t>🚨 고질적 문제:</a:t>
             </a:r>
             <a:br/>
             <a:r>
-              <a:t>• 취약 증상: 상기증, 목덜미 뻣뻣, 하지 무력</a:t>
+              <a:t>• 기운 상기(上氣), 목덜미 강직</a:t>
             </a:r>
             <a:br/>
             <a:r>
-              <a:t>• 오일 처방: 베티버, 프랑킨센스, 레몬</a:t>
+              <a:t>• 간 해독력 저하 및 하체 무력감</a:t>
             </a:r>
             <a:br/>
-            <a:r>
-              <a:t>• 맞춤 식단: 완도산 전복 홍합 맑은 해물 미역국</a:t>
-            </a:r>
             <a:br/>
             <a:r>
-              <a:t>• 의전 세팅: 적색 가운 + 좌측 4지 은반지</a:t>
+              <a:t>💡 사상체질 스파 해법:</a:t>
+            </a:r>
+            <a:br/>
+            <a:r>
+              <a:t>• 단전 호흡 태극선법 기체조(그라운딩)</a:t>
+            </a:r>
+            <a:br/>
+            <a:r>
+              <a:t>• 베티버, 프랑킨센스 기운 하강 오일</a:t>
+            </a:r>
+            <a:br/>
+            <a:r>
+              <a:t>• 완도산 전복 홍합 맑은 해물 미역국 + 좌측 4지 은반지</a:t>
             </a:r>
           </a:p>
         </p:txBody>
@@ -6421,7 +7932,7 @@
               </a:defRPr>
             </a:pPr>
             <a:r>
-              <a:t>10대 시그니처 테라피 가이드 (Part 1: Themes 01 ~ 05)</a:t>
+              <a:t>Executive Summary : 사상체질 스파 4대 핵심 축</a:t>
             </a:r>
           </a:p>
         </p:txBody>
@@ -6435,7 +7946,7 @@
         <p:spPr>
           <a:xfrm>
             <a:off x="731520" y="1554480"/>
-            <a:ext cx="10728655" cy="804672"/>
+            <a:ext cx="5120640" cy="2103120"/>
           </a:xfrm>
           <a:prstGeom prst="roundRect">
             <a:avLst/>
@@ -6479,8 +7990,8 @@
         </p:nvSpPr>
         <p:spPr>
           <a:xfrm>
-            <a:off x="914400" y="1664208"/>
-            <a:ext cx="10332720" cy="594360"/>
+            <a:off x="960120" y="1737360"/>
+            <a:ext cx="4663440" cy="1737360"/>
           </a:xfrm>
           <a:prstGeom prst="rect">
             <a:avLst/>
@@ -6494,14 +8005,32 @@
           <a:lstStyle/>
           <a:p>
             <a:pPr>
+              <a:spcAft>
+                <a:spcPts val="800"/>
+              </a:spcAft>
+              <a:defRPr sz="1600" b="1">
+                <a:solidFill>
+                  <a:srgbClr val="1E5037"/>
+                </a:solidFill>
+              </a:defRPr>
+            </a:pPr>
+            <a:r>
+              <a:t>01. 사상체질 의학 과학화</a:t>
+            </a:r>
+          </a:p>
+          <a:p>
+            <a:pPr>
+              <a:lnSpc>
+                <a:spcPct val="120000"/>
+              </a:lnSpc>
               <a:defRPr sz="1200">
                 <a:solidFill>
-                  <a:srgbClr val="241E19"/>
-                </a:solidFill>
-              </a:defRPr>
-            </a:pPr>
-            <a:r>
-              <a:t>01. 웰컴 오리엔테이션  |  프라이빗 다실 1:1 상담 및 4대 체질 맞춤 웰컴 티(소음 38℃ 대추계피차 ~ 소양 상온 구기자차) 제공</a:t>
+                  <a:srgbClr val="52463C"/>
+                </a:solidFill>
+              </a:defRPr>
+            </a:pPr>
+            <a:r>
+              <a:t>1894년 이제마 『동의수세보원』 장부대소(臟腑大小) 원리와 인바디/뇌파/산화질소 데이터의 완벽한 융합</a:t>
             </a:r>
           </a:p>
         </p:txBody>
@@ -6514,8 +8043,8 @@
         </p:nvSpPr>
         <p:spPr>
           <a:xfrm>
-            <a:off x="731520" y="2487168"/>
-            <a:ext cx="10728655" cy="804672"/>
+            <a:off x="6126480" y="1554480"/>
+            <a:ext cx="5120640" cy="2103120"/>
           </a:xfrm>
           <a:prstGeom prst="roundRect">
             <a:avLst/>
@@ -6559,8 +8088,8 @@
         </p:nvSpPr>
         <p:spPr>
           <a:xfrm>
-            <a:off x="914400" y="2596896"/>
-            <a:ext cx="10332720" cy="594360"/>
+            <a:off x="6355080" y="1737360"/>
+            <a:ext cx="4663440" cy="1737360"/>
           </a:xfrm>
           <a:prstGeom prst="rect">
             <a:avLst/>
@@ -6574,14 +8103,32 @@
           <a:lstStyle/>
           <a:p>
             <a:pPr>
+              <a:spcAft>
+                <a:spcPts val="800"/>
+              </a:spcAft>
+              <a:defRPr sz="1600" b="1">
+                <a:solidFill>
+                  <a:srgbClr val="A37F48"/>
+                </a:solidFill>
+              </a:defRPr>
+            </a:pPr>
+            <a:r>
+              <a:t>02. 10대 시그니처 테라피</a:t>
+            </a:r>
+          </a:p>
+          <a:p>
+            <a:pPr>
+              <a:lnSpc>
+                <a:spcPct val="120000"/>
+              </a:lnSpc>
               <a:defRPr sz="1200">
                 <a:solidFill>
-                  <a:srgbClr val="241E19"/>
-                </a:solidFill>
-              </a:defRPr>
-            </a:pPr>
-            <a:r>
-              <a:t>02. 20분 맞춤 약재 족욕  |  두한족열(頭寒足熱) 순환 개방. 온열탕(41℃ 당귀/생강) vs 쿨링탕(38.5℃ 박하/결명자) + 순수 에센셜 오일</a:t>
+                  <a:srgbClr val="52463C"/>
+                </a:solidFill>
+              </a:defRPr>
+            </a:pPr>
+            <a:r>
+              <a:t>20분 약재 족욕, 은반지 의전, 80분 이원화 바디(한의 수기+순수 오일), 1시간 심부 온열, 태극선법 기체조</a:t>
             </a:r>
           </a:p>
         </p:txBody>
@@ -6594,8 +8141,8 @@
         </p:nvSpPr>
         <p:spPr>
           <a:xfrm>
-            <a:off x="731520" y="3419856"/>
-            <a:ext cx="10728655" cy="804672"/>
+            <a:off x="731520" y="3931920"/>
+            <a:ext cx="5120640" cy="2103120"/>
           </a:xfrm>
           <a:prstGeom prst="roundRect">
             <a:avLst/>
@@ -6639,8 +8186,8 @@
         </p:nvSpPr>
         <p:spPr>
           <a:xfrm>
-            <a:off x="914400" y="3529584"/>
-            <a:ext cx="10332720" cy="594360"/>
+            <a:off x="960120" y="4114800"/>
+            <a:ext cx="4663440" cy="1737360"/>
           </a:xfrm>
           <a:prstGeom prst="rect">
             <a:avLst/>
@@ -6654,14 +8201,32 @@
           <a:lstStyle/>
           <a:p>
             <a:pPr>
+              <a:spcAft>
+                <a:spcPts val="800"/>
+              </a:spcAft>
+              <a:defRPr sz="1600" b="1">
+                <a:solidFill>
+                  <a:srgbClr val="1E5037"/>
+                </a:solidFill>
+              </a:defRPr>
+            </a:pPr>
+            <a:r>
+              <a:t>03. 12시간 단식 &amp; 맞춤 섭생</a:t>
+            </a:r>
+          </a:p>
+          <a:p>
+            <a:pPr>
+              <a:lnSpc>
+                <a:spcPct val="120000"/>
+              </a:lnSpc>
               <a:defRPr sz="1200">
                 <a:solidFill>
-                  <a:srgbClr val="241E19"/>
-                </a:solidFill>
-              </a:defRPr>
-            </a:pPr>
-            <a:r>
-              <a:t>03. 에너지 테라피 &amp; 은반지  |  사상체질 경락별 은반지(Eun-banji) 착용 및 4대 조화 가운을 통한 스태프 비언어 맞춤 의전 시스템</a:t>
+                  <a:srgbClr val="52463C"/>
+                </a:solidFill>
+              </a:defRPr>
+            </a:pPr>
+            <a:r>
+              <a:t>18:00~06:00 단식을 통한 자가포식(Autophagy) 활성화 및 기상 후 4대 체질 맞춤 영양 미역국 조식</a:t>
             </a:r>
           </a:p>
         </p:txBody>
@@ -6674,8 +8239,8 @@
         </p:nvSpPr>
         <p:spPr>
           <a:xfrm>
-            <a:off x="731520" y="4352544"/>
-            <a:ext cx="10728655" cy="804672"/>
+            <a:off x="6126480" y="3931920"/>
+            <a:ext cx="5120640" cy="2103120"/>
           </a:xfrm>
           <a:prstGeom prst="roundRect">
             <a:avLst/>
@@ -6719,8 +8284,8 @@
         </p:nvSpPr>
         <p:spPr>
           <a:xfrm>
-            <a:off x="914400" y="4462272"/>
-            <a:ext cx="10332720" cy="594360"/>
+            <a:off x="6355080" y="4114800"/>
+            <a:ext cx="4663440" cy="1737360"/>
           </a:xfrm>
           <a:prstGeom prst="rect">
             <a:avLst/>
@@ -6734,94 +8299,32 @@
           <a:lstStyle/>
           <a:p>
             <a:pPr>
+              <a:spcAft>
+                <a:spcPts val="800"/>
+              </a:spcAft>
+              <a:defRPr sz="1600" b="1">
+                <a:solidFill>
+                  <a:srgbClr val="A37F48"/>
+                </a:solidFill>
+              </a:defRPr>
+            </a:pPr>
+            <a:r>
+              <a:t>04. VIP 평생 LTV 모델</a:t>
+            </a:r>
+          </a:p>
+          <a:p>
+            <a:pPr>
+              <a:lnSpc>
+                <a:spcPct val="120000"/>
+              </a:lnSpc>
               <a:defRPr sz="1200">
                 <a:solidFill>
-                  <a:srgbClr val="241E19"/>
-                </a:solidFill>
-              </a:defRPr>
-            </a:pPr>
-            <a:r>
-              <a:t>04. 푸드 테라피 (12h 단식)  |  저녁 18:00~익일 06:00 12시간 단식(자가포식) 후 기상 직후 4대 체질 맞춤 영양 미역국 조식 정식 제공</a:t>
-            </a:r>
-          </a:p>
-        </p:txBody>
-      </p:sp>
-      <p:sp>
-        <p:nvSpPr>
-          <p:cNvPr id="13" name="Rounded Rectangle 12"/>
-          <p:cNvSpPr/>
-          <p:nvPr/>
-        </p:nvSpPr>
-        <p:spPr>
-          <a:xfrm>
-            <a:off x="731520" y="5285232"/>
-            <a:ext cx="10728655" cy="804672"/>
-          </a:xfrm>
-          <a:prstGeom prst="roundRect">
-            <a:avLst/>
-          </a:prstGeom>
-          <a:solidFill>
-            <a:srgbClr val="FFFFFF"/>
-          </a:solidFill>
-          <a:ln w="15240">
-            <a:solidFill>
-              <a:srgbClr val="C9A876"/>
-            </a:solidFill>
-          </a:ln>
-        </p:spPr>
-        <p:style>
-          <a:lnRef idx="1">
-            <a:schemeClr val="accent1"/>
-          </a:lnRef>
-          <a:fillRef idx="3">
-            <a:schemeClr val="accent1"/>
-          </a:fillRef>
-          <a:effectRef idx="2">
-            <a:schemeClr val="accent1"/>
-          </a:effectRef>
-          <a:fontRef idx="minor">
-            <a:schemeClr val="lt1"/>
-          </a:fontRef>
-        </p:style>
-        <p:txBody>
-          <a:bodyPr rtlCol="0" anchor="ctr"/>
-          <a:lstStyle/>
-          <a:p>
-            <a:pPr algn="ctr"/>
-          </a:p>
-        </p:txBody>
-      </p:sp>
-      <p:sp>
-        <p:nvSpPr>
-          <p:cNvPr id="14" name="TextBox 13"/>
-          <p:cNvSpPr txBox="1"/>
-          <p:nvPr/>
-        </p:nvSpPr>
-        <p:spPr>
-          <a:xfrm>
-            <a:off x="914400" y="5394960"/>
-            <a:ext cx="10332720" cy="594360"/>
-          </a:xfrm>
-          <a:prstGeom prst="rect">
-            <a:avLst/>
-          </a:prstGeom>
-          <a:noFill/>
-        </p:spPr>
-        <p:txBody>
-          <a:bodyPr wrap="square">
-            <a:spAutoFit/>
-          </a:bodyPr>
-          <a:lstStyle/>
-          <a:p>
-            <a:pPr>
-              <a:defRPr sz="1200">
-                <a:solidFill>
-                  <a:srgbClr val="241E19"/>
-                </a:solidFill>
-              </a:defRPr>
-            </a:pPr>
-            <a:r>
-              <a:t>05. 80분 이원화 바디 테라피  |  1단계 한의학 경락 수기 지압(30분)으로 순환로 개방 + 2단계 최고급 100% 순수 에센셜 오일 림프 드레나쥐(50분)</a:t>
+                  <a:srgbClr val="52463C"/>
+                </a:solidFill>
+              </a:defRPr>
+            </a:pPr>
+            <a:r>
+              <a:t>DTC 유전자 및 마이크로바이옴 검사 연동, 7일 후 1:1 바이오 리포트, 월간 맞춤 오일 정기구독(LRP) 생태계</a:t>
             </a:r>
           </a:p>
         </p:txBody>
@@ -6952,7 +8455,7 @@
               </a:defRPr>
             </a:pPr>
             <a:r>
-              <a:t>10대 시그니처 테라피 가이드 (Part 2: Themes 06 ~ 10)</a:t>
+              <a:t>글로벌 웰니스 시장(GWI)과 3세대 처방형 스파의 급부상</a:t>
             </a:r>
           </a:p>
         </p:txBody>
@@ -6966,7 +8469,120 @@
         <p:spPr>
           <a:xfrm>
             <a:off x="731520" y="1554480"/>
-            <a:ext cx="10728655" cy="804672"/>
+            <a:ext cx="3474720" cy="4663440"/>
+          </a:xfrm>
+          <a:prstGeom prst="roundRect">
+            <a:avLst/>
+          </a:prstGeom>
+          <a:solidFill>
+            <a:srgbClr val="1A3328"/>
+          </a:solidFill>
+          <a:ln w="15240">
+            <a:solidFill>
+              <a:srgbClr val="C9A876"/>
+            </a:solidFill>
+          </a:ln>
+        </p:spPr>
+        <p:style>
+          <a:lnRef idx="1">
+            <a:schemeClr val="accent1"/>
+          </a:lnRef>
+          <a:fillRef idx="3">
+            <a:schemeClr val="accent1"/>
+          </a:fillRef>
+          <a:effectRef idx="2">
+            <a:schemeClr val="accent1"/>
+          </a:effectRef>
+          <a:fontRef idx="minor">
+            <a:schemeClr val="lt1"/>
+          </a:fontRef>
+        </p:style>
+        <p:txBody>
+          <a:bodyPr rtlCol="0" anchor="ctr"/>
+          <a:lstStyle/>
+          <a:p>
+            <a:pPr algn="ctr"/>
+          </a:p>
+        </p:txBody>
+      </p:sp>
+      <p:sp>
+        <p:nvSpPr>
+          <p:cNvPr id="6" name="TextBox 5"/>
+          <p:cNvSpPr txBox="1"/>
+          <p:nvPr/>
+        </p:nvSpPr>
+        <p:spPr>
+          <a:xfrm>
+            <a:off x="914400" y="1828800"/>
+            <a:ext cx="3108960" cy="4114800"/>
+          </a:xfrm>
+          <a:prstGeom prst="rect">
+            <a:avLst/>
+          </a:prstGeom>
+          <a:noFill/>
+        </p:spPr>
+        <p:txBody>
+          <a:bodyPr wrap="square">
+            <a:spAutoFit/>
+          </a:bodyPr>
+          <a:lstStyle/>
+          <a:p>
+            <a:pPr>
+              <a:spcAft>
+                <a:spcPts val="1200"/>
+              </a:spcAft>
+              <a:defRPr sz="1100" b="1">
+                <a:solidFill>
+                  <a:srgbClr val="C9A876"/>
+                </a:solidFill>
+              </a:defRPr>
+            </a:pPr>
+            <a:r>
+              <a:t>GLOBAL WELLNESS 2026</a:t>
+            </a:r>
+          </a:p>
+          <a:p>
+            <a:pPr>
+              <a:spcAft>
+                <a:spcPts val="800"/>
+              </a:spcAft>
+              <a:defRPr sz="3200" b="1">
+                <a:solidFill>
+                  <a:srgbClr val="FFFFFF"/>
+                </a:solidFill>
+              </a:defRPr>
+            </a:pPr>
+            <a:r>
+              <a:t>$7.0 Trillion</a:t>
+            </a:r>
+          </a:p>
+          <a:p>
+            <a:pPr>
+              <a:lnSpc>
+                <a:spcPct val="130000"/>
+              </a:lnSpc>
+              <a:defRPr sz="1200">
+                <a:solidFill>
+                  <a:srgbClr val="D2C8B4"/>
+                </a:solidFill>
+              </a:defRPr>
+            </a:pPr>
+            <a:r>
+              <a:t>연평균 8.6% 초고속 성장 중인 글로벌 웰니스 이코노미(약 9,500조 원). 글로벌 VIP 고객층은 단순 휴식을 넘어 '생체 데이터를 기반으로 내 몸을 리셋하는 처방형 스파'에 지갑을 열고 있습니다.</a:t>
+            </a:r>
+          </a:p>
+        </p:txBody>
+      </p:sp>
+      <p:sp>
+        <p:nvSpPr>
+          <p:cNvPr id="7" name="Rounded Rectangle 6"/>
+          <p:cNvSpPr/>
+          <p:nvPr/>
+        </p:nvSpPr>
+        <p:spPr>
+          <a:xfrm>
+            <a:off x="4480560" y="1554480"/>
+            <a:ext cx="6949440" cy="2194560"/>
           </a:xfrm>
           <a:prstGeom prst="roundRect">
             <a:avLst/>
@@ -7004,14 +8620,14 @@
       </p:sp>
       <p:sp>
         <p:nvSpPr>
-          <p:cNvPr id="6" name="TextBox 5"/>
+          <p:cNvPr id="8" name="TextBox 7"/>
           <p:cNvSpPr txBox="1"/>
           <p:nvPr/>
         </p:nvSpPr>
         <p:spPr>
           <a:xfrm>
-            <a:off x="914400" y="1664208"/>
-            <a:ext cx="10332720" cy="594360"/>
+            <a:off x="4663440" y="1737360"/>
+            <a:ext cx="6583680" cy="1828800"/>
           </a:xfrm>
           <a:prstGeom prst="rect">
             <a:avLst/>
@@ -7025,34 +8641,60 @@
           <a:lstStyle/>
           <a:p>
             <a:pPr>
+              <a:spcAft>
+                <a:spcPts val="600"/>
+              </a:spcAft>
+              <a:defRPr sz="1600" b="1">
+                <a:solidFill>
+                  <a:srgbClr val="241E19"/>
+                </a:solidFill>
+              </a:defRPr>
+            </a:pPr>
+            <a:r>
+              <a:t>스파 패러다임의 3단계 진화</a:t>
+            </a:r>
+          </a:p>
+          <a:p>
+            <a:pPr>
+              <a:lnSpc>
+                <a:spcPct val="130000"/>
+              </a:lnSpc>
               <a:defRPr sz="1200">
                 <a:solidFill>
-                  <a:srgbClr val="241E19"/>
-                </a:solidFill>
-              </a:defRPr>
-            </a:pPr>
-            <a:r>
-              <a:t>06. 티 테라피 &amp; 침묵 명상  |  무형문화재 장인 도자기 전통 다기 우림 시연 및 30분 무언 침묵 명상 (부교감 신경 활성도 40% 상승)</a:t>
-            </a:r>
-          </a:p>
-        </p:txBody>
-      </p:sp>
-      <p:sp>
-        <p:nvSpPr>
-          <p:cNvPr id="7" name="Rounded Rectangle 6"/>
+                  <a:srgbClr val="52463C"/>
+                </a:solidFill>
+              </a:defRPr>
+            </a:pPr>
+            <a:r>
+              <a:t>• 1세대 (휴식형): 서양식 스웨디시, 단순 근육 이완 (차별화 한계)</a:t>
+            </a:r>
+            <a:br/>
+            <a:r>
+              <a:t>• 2세대 (시설/메디컬형): 5성급 리조트 하드웨어 및 의료 시술 결합 (고비용/부작용 리스크)</a:t>
+            </a:r>
+            <a:br/>
+            <a:r>
+              <a:t>• 👑 3세대 (초개인화 처방형): 생체 데이터 기반 사상체질 맞춤 신체 리셋 (사상체질 스파)</a:t>
+            </a:r>
+          </a:p>
+        </p:txBody>
+      </p:sp>
+      <p:sp>
+        <p:nvSpPr>
+          <p:cNvPr id="9" name="Rounded Rectangle 8"/>
           <p:cNvSpPr/>
           <p:nvPr/>
         </p:nvSpPr>
         <p:spPr>
           <a:xfrm>
-            <a:off x="731520" y="2487168"/>
-            <a:ext cx="10728655" cy="804672"/>
+            <a:off x="4480560" y="4023360"/>
+            <a:ext cx="6949440" cy="2194560"/>
           </a:xfrm>
           <a:prstGeom prst="roundRect">
             <a:avLst/>
           </a:prstGeom>
           <a:solidFill>
-            <a:srgbClr val="FFFFFF"/>
+            <a:srgbClr val="F8F5EE"/>
           </a:solidFill>
           <a:ln w="15240">
             <a:solidFill>
@@ -7084,14 +8726,14 @@
       </p:sp>
       <p:sp>
         <p:nvSpPr>
-          <p:cNvPr id="8" name="TextBox 7"/>
+          <p:cNvPr id="10" name="TextBox 9"/>
           <p:cNvSpPr txBox="1"/>
           <p:nvPr/>
         </p:nvSpPr>
         <p:spPr>
           <a:xfrm>
-            <a:off x="914400" y="2596896"/>
-            <a:ext cx="10332720" cy="594360"/>
+            <a:off x="4663440" y="4206240"/>
+            <a:ext cx="6583680" cy="1828800"/>
           </a:xfrm>
           <a:prstGeom prst="rect">
             <a:avLst/>
@@ -7105,254 +8747,36 @@
           <a:lstStyle/>
           <a:p>
             <a:pPr>
+              <a:spcAft>
+                <a:spcPts val="600"/>
+              </a:spcAft>
+              <a:defRPr sz="1600" b="1">
+                <a:solidFill>
+                  <a:srgbClr val="A37F48"/>
+                </a:solidFill>
+              </a:defRPr>
+            </a:pPr>
+            <a:r>
+              <a:t>인도 아유르베다(3도샤) 대비 사상체질의 비교 우위</a:t>
+            </a:r>
+          </a:p>
+          <a:p>
+            <a:pPr>
+              <a:lnSpc>
+                <a:spcPct val="130000"/>
+              </a:lnSpc>
               <a:defRPr sz="1200">
                 <a:solidFill>
-                  <a:srgbClr val="241E19"/>
-                </a:solidFill>
-              </a:defRPr>
-            </a:pPr>
-            <a:r>
-              <a:t>07. 수(水) 테라피 (산화질소)  |  고농도 산화질소(NO) 수 1.5L 정량 음용을 통한 혈관 확장 및 15분 전신 고압 나노 미스트 챔버 입실</a:t>
-            </a:r>
-          </a:p>
-        </p:txBody>
-      </p:sp>
-      <p:sp>
-        <p:nvSpPr>
-          <p:cNvPr id="9" name="Rounded Rectangle 8"/>
-          <p:cNvSpPr/>
-          <p:nvPr/>
-        </p:nvSpPr>
-        <p:spPr>
-          <a:xfrm>
-            <a:off x="731520" y="3419856"/>
-            <a:ext cx="10728655" cy="804672"/>
-          </a:xfrm>
-          <a:prstGeom prst="roundRect">
-            <a:avLst/>
-          </a:prstGeom>
-          <a:solidFill>
-            <a:srgbClr val="FFFFFF"/>
-          </a:solidFill>
-          <a:ln w="15240">
-            <a:solidFill>
-              <a:srgbClr val="C9A876"/>
-            </a:solidFill>
-          </a:ln>
-        </p:spPr>
-        <p:style>
-          <a:lnRef idx="1">
-            <a:schemeClr val="accent1"/>
-          </a:lnRef>
-          <a:fillRef idx="3">
-            <a:schemeClr val="accent1"/>
-          </a:fillRef>
-          <a:effectRef idx="2">
-            <a:schemeClr val="accent1"/>
-          </a:effectRef>
-          <a:fontRef idx="minor">
-            <a:schemeClr val="lt1"/>
-          </a:fontRef>
-        </p:style>
-        <p:txBody>
-          <a:bodyPr rtlCol="0" anchor="ctr"/>
-          <a:lstStyle/>
-          <a:p>
-            <a:pPr algn="ctr"/>
-          </a:p>
-        </p:txBody>
-      </p:sp>
-      <p:sp>
-        <p:nvSpPr>
-          <p:cNvPr id="10" name="TextBox 9"/>
-          <p:cNvSpPr txBox="1"/>
-          <p:nvPr/>
-        </p:nvSpPr>
-        <p:spPr>
-          <a:xfrm>
-            <a:off x="914400" y="3529584"/>
-            <a:ext cx="10332720" cy="594360"/>
-          </a:xfrm>
-          <a:prstGeom prst="rect">
-            <a:avLst/>
-          </a:prstGeom>
-          <a:noFill/>
-        </p:spPr>
-        <p:txBody>
-          <a:bodyPr wrap="square">
-            <a:spAutoFit/>
-          </a:bodyPr>
-          <a:lstStyle/>
-          <a:p>
-            <a:pPr>
-              <a:defRPr sz="1200">
-                <a:solidFill>
-                  <a:srgbClr val="241E19"/>
-                </a:solidFill>
-              </a:defRPr>
-            </a:pPr>
-            <a:r>
-              <a:t>08. 온열 테라피 (체온 1℃ 상승)  |  척추 전용 온열 오일 도포 후 42~45℃ 원적외선 챔버 1시간 입실 (심부 체온 1℃ 상승, 면역 NK세포 5배 증대)</a:t>
-            </a:r>
-          </a:p>
-        </p:txBody>
-      </p:sp>
-      <p:sp>
-        <p:nvSpPr>
-          <p:cNvPr id="11" name="Rounded Rectangle 10"/>
-          <p:cNvSpPr/>
-          <p:nvPr/>
-        </p:nvSpPr>
-        <p:spPr>
-          <a:xfrm>
-            <a:off x="731520" y="4352544"/>
-            <a:ext cx="10728655" cy="804672"/>
-          </a:xfrm>
-          <a:prstGeom prst="roundRect">
-            <a:avLst/>
-          </a:prstGeom>
-          <a:solidFill>
-            <a:srgbClr val="FFFFFF"/>
-          </a:solidFill>
-          <a:ln w="15240">
-            <a:solidFill>
-              <a:srgbClr val="C9A876"/>
-            </a:solidFill>
-          </a:ln>
-        </p:spPr>
-        <p:style>
-          <a:lnRef idx="1">
-            <a:schemeClr val="accent1"/>
-          </a:lnRef>
-          <a:fillRef idx="3">
-            <a:schemeClr val="accent1"/>
-          </a:fillRef>
-          <a:effectRef idx="2">
-            <a:schemeClr val="accent1"/>
-          </a:effectRef>
-          <a:fontRef idx="minor">
-            <a:schemeClr val="lt1"/>
-          </a:fontRef>
-        </p:style>
-        <p:txBody>
-          <a:bodyPr rtlCol="0" anchor="ctr"/>
-          <a:lstStyle/>
-          <a:p>
-            <a:pPr algn="ctr"/>
-          </a:p>
-        </p:txBody>
-      </p:sp>
-      <p:sp>
-        <p:nvSpPr>
-          <p:cNvPr id="12" name="TextBox 11"/>
-          <p:cNvSpPr txBox="1"/>
-          <p:nvPr/>
-        </p:nvSpPr>
-        <p:spPr>
-          <a:xfrm>
-            <a:off x="914400" y="4462272"/>
-            <a:ext cx="10332720" cy="594360"/>
-          </a:xfrm>
-          <a:prstGeom prst="rect">
-            <a:avLst/>
-          </a:prstGeom>
-          <a:noFill/>
-        </p:spPr>
-        <p:txBody>
-          <a:bodyPr wrap="square">
-            <a:spAutoFit/>
-          </a:bodyPr>
-          <a:lstStyle/>
-          <a:p>
-            <a:pPr>
-              <a:defRPr sz="1200">
-                <a:solidFill>
-                  <a:srgbClr val="241E19"/>
-                </a:solidFill>
-              </a:defRPr>
-            </a:pPr>
-            <a:r>
-              <a:t>09. 전통 기체조 (태극선법)  |  서양식 필라테스를 배제하고 단전 호흡으로 탁기를 배출하며 기(氣)의 자연스러운 흐름을 복원하는 태극선법 8초식</a:t>
-            </a:r>
-          </a:p>
-        </p:txBody>
-      </p:sp>
-      <p:sp>
-        <p:nvSpPr>
-          <p:cNvPr id="13" name="Rounded Rectangle 12"/>
-          <p:cNvSpPr/>
-          <p:nvPr/>
-        </p:nvSpPr>
-        <p:spPr>
-          <a:xfrm>
-            <a:off x="731520" y="5285232"/>
-            <a:ext cx="10728655" cy="804672"/>
-          </a:xfrm>
-          <a:prstGeom prst="roundRect">
-            <a:avLst/>
-          </a:prstGeom>
-          <a:solidFill>
-            <a:srgbClr val="FFFFFF"/>
-          </a:solidFill>
-          <a:ln w="15240">
-            <a:solidFill>
-              <a:srgbClr val="C9A876"/>
-            </a:solidFill>
-          </a:ln>
-        </p:spPr>
-        <p:style>
-          <a:lnRef idx="1">
-            <a:schemeClr val="accent1"/>
-          </a:lnRef>
-          <a:fillRef idx="3">
-            <a:schemeClr val="accent1"/>
-          </a:fillRef>
-          <a:effectRef idx="2">
-            <a:schemeClr val="accent1"/>
-          </a:effectRef>
-          <a:fontRef idx="minor">
-            <a:schemeClr val="lt1"/>
-          </a:fontRef>
-        </p:style>
-        <p:txBody>
-          <a:bodyPr rtlCol="0" anchor="ctr"/>
-          <a:lstStyle/>
-          <a:p>
-            <a:pPr algn="ctr"/>
-          </a:p>
-        </p:txBody>
-      </p:sp>
-      <p:sp>
-        <p:nvSpPr>
-          <p:cNvPr id="14" name="TextBox 13"/>
-          <p:cNvSpPr txBox="1"/>
-          <p:nvPr/>
-        </p:nvSpPr>
-        <p:spPr>
-          <a:xfrm>
-            <a:off x="914400" y="5394960"/>
-            <a:ext cx="10332720" cy="594360"/>
-          </a:xfrm>
-          <a:prstGeom prst="rect">
-            <a:avLst/>
-          </a:prstGeom>
-          <a:noFill/>
-        </p:spPr>
-        <p:txBody>
-          <a:bodyPr wrap="square">
-            <a:spAutoFit/>
-          </a:bodyPr>
-          <a:lstStyle/>
-          <a:p>
-            <a:pPr>
-              <a:defRPr sz="1200">
-                <a:solidFill>
-                  <a:srgbClr val="241E19"/>
-                </a:solidFill>
-              </a:defRPr>
-            </a:pPr>
-            <a:r>
-              <a:t>10. 멘탈 관리 (한국 정통 고요 명상)  |  서양식 싱잉볼을 배제하고 한국 전통 사찰과 선도(仙道)의 고요한 침묵 명상으로 뇌 피로도 70% 감소</a:t>
+                  <a:srgbClr val="52463C"/>
+                </a:solidFill>
+              </a:defRPr>
+            </a:pPr>
+            <a:r>
+              <a:t>• 아유르베다: 3도샤(바타/피타/카파) 에너지의 철학적 분류 및 중금속 약재 안전성 논란</a:t>
+            </a:r>
+            <a:br/>
+            <a:r>
+              <a:t>• 사상체질 스파: 간·폐·비·신 장부대소 해부생리학적 균형점 + 최고급 순수 에센셜 오일과 12시간 단식으로 부작용 0% 실현</a:t>
             </a:r>
           </a:p>
         </p:txBody>
@@ -7483,7 +8907,7 @@
               </a:defRPr>
             </a:pPr>
             <a:r>
-              <a:t>슈리베다식 푸드 테라피 : 12시간 단식 &amp; 4대 체질 미역국</a:t>
+              <a:t>핵심 의학 철학 : 1894년 이제마의 동의수세보원</a:t>
             </a:r>
           </a:p>
         </p:txBody>
@@ -7498,6 +8922,116 @@
           <a:xfrm>
             <a:off x="731520" y="1554480"/>
             <a:ext cx="5120640" cy="4663440"/>
+          </a:xfrm>
+          <a:prstGeom prst="roundRect">
+            <a:avLst/>
+          </a:prstGeom>
+          <a:solidFill>
+            <a:srgbClr val="FFFFFF"/>
+          </a:solidFill>
+          <a:ln w="15240">
+            <a:solidFill>
+              <a:srgbClr val="C9A876"/>
+            </a:solidFill>
+          </a:ln>
+        </p:spPr>
+        <p:style>
+          <a:lnRef idx="1">
+            <a:schemeClr val="accent1"/>
+          </a:lnRef>
+          <a:fillRef idx="3">
+            <a:schemeClr val="accent1"/>
+          </a:fillRef>
+          <a:effectRef idx="2">
+            <a:schemeClr val="accent1"/>
+          </a:effectRef>
+          <a:fontRef idx="minor">
+            <a:schemeClr val="lt1"/>
+          </a:fontRef>
+        </p:style>
+        <p:txBody>
+          <a:bodyPr rtlCol="0" anchor="ctr"/>
+          <a:lstStyle/>
+          <a:p>
+            <a:pPr algn="ctr"/>
+          </a:p>
+        </p:txBody>
+      </p:sp>
+      <p:sp>
+        <p:nvSpPr>
+          <p:cNvPr id="6" name="TextBox 5"/>
+          <p:cNvSpPr txBox="1"/>
+          <p:nvPr/>
+        </p:nvSpPr>
+        <p:spPr>
+          <a:xfrm>
+            <a:off x="1005840" y="1828800"/>
+            <a:ext cx="4572000" cy="4114800"/>
+          </a:xfrm>
+          <a:prstGeom prst="rect">
+            <a:avLst/>
+          </a:prstGeom>
+          <a:noFill/>
+        </p:spPr>
+        <p:txBody>
+          <a:bodyPr wrap="square">
+            <a:spAutoFit/>
+          </a:bodyPr>
+          <a:lstStyle/>
+          <a:p>
+            <a:pPr>
+              <a:spcAft>
+                <a:spcPts val="1000"/>
+              </a:spcAft>
+              <a:defRPr sz="1800" b="1">
+                <a:solidFill>
+                  <a:srgbClr val="241E19"/>
+                </a:solidFill>
+              </a:defRPr>
+            </a:pPr>
+            <a:r>
+              <a:t>장부대소(臟腑大小)의 의학적 실체</a:t>
+            </a:r>
+          </a:p>
+          <a:p>
+            <a:pPr>
+              <a:lnSpc>
+                <a:spcPct val="135000"/>
+              </a:lnSpc>
+              <a:defRPr sz="1250">
+                <a:solidFill>
+                  <a:srgbClr val="52463C"/>
+                </a:solidFill>
+              </a:defRPr>
+            </a:pPr>
+            <a:r>
+              <a:t>• 1894년 조선 실학자 이제마 선생 집대성</a:t>
+            </a:r>
+            <a:br/>
+            <a:r>
+              <a:t>• 인간을 획일적이지 않은 4가지 독자적 생명체로 해석</a:t>
+            </a:r>
+            <a:br/>
+            <a:r>
+              <a:t>• 간(肝)·폐(肺)·비(脾)·신(腎) 장기 용량의 생리적 편차 규명</a:t>
+            </a:r>
+            <a:br/>
+            <a:r>
+              <a:t>• 장부 편차에 따라 자율신경계와 영양 대사 경로가 완전히 상이함</a:t>
+            </a:r>
+          </a:p>
+        </p:txBody>
+      </p:sp>
+      <p:sp>
+        <p:nvSpPr>
+          <p:cNvPr id="7" name="Rounded Rectangle 6"/>
+          <p:cNvSpPr/>
+          <p:nvPr/>
+        </p:nvSpPr>
+        <p:spPr>
+          <a:xfrm>
+            <a:off x="6217920" y="1554480"/>
+            <a:ext cx="5212080" cy="4663440"/>
           </a:xfrm>
           <a:prstGeom prst="roundRect">
             <a:avLst/>
@@ -7535,14 +9069,14 @@
       </p:sp>
       <p:sp>
         <p:nvSpPr>
-          <p:cNvPr id="6" name="TextBox 5"/>
+          <p:cNvPr id="8" name="TextBox 7"/>
           <p:cNvSpPr txBox="1"/>
           <p:nvPr/>
         </p:nvSpPr>
         <p:spPr>
           <a:xfrm>
-            <a:off x="1005840" y="1828800"/>
-            <a:ext cx="4572000" cy="4114800"/>
+            <a:off x="6492240" y="1828800"/>
+            <a:ext cx="4663440" cy="4114800"/>
           </a:xfrm>
           <a:prstGeom prst="rect">
             <a:avLst/>
@@ -7557,16 +9091,16 @@
           <a:p>
             <a:pPr>
               <a:spcAft>
-                <a:spcPts val="1200"/>
+                <a:spcPts val="1000"/>
               </a:spcAft>
-              <a:defRPr sz="1700" b="1">
+              <a:defRPr sz="1800" b="1">
                 <a:solidFill>
                   <a:srgbClr val="C9A876"/>
                 </a:solidFill>
               </a:defRPr>
             </a:pPr>
             <a:r>
-              <a:t>12시간 단식 자가포식(Autophagy) 프로토콜</a:t>
+              <a:t>현대 바이오 사이언스와의 융합</a:t>
             </a:r>
           </a:p>
           <a:p>
@@ -7574,174 +9108,30 @@
               <a:lnSpc>
                 <a:spcPct val="135000"/>
               </a:lnSpc>
-              <a:defRPr sz="1200">
+              <a:defRPr sz="1250">
                 <a:solidFill>
                   <a:srgbClr val="DCD7C8"/>
                 </a:solidFill>
               </a:defRPr>
             </a:pPr>
             <a:r>
-              <a:t>• 18:00 저녁 약선 식사 종료 및 12시간 단식 돌입</a:t>
+              <a:t>• 전통 한의학의 경험론을 넘어 현대 생체 데이터와 융합</a:t>
             </a:r>
             <a:br/>
             <a:r>
-              <a:t>• 20:00 산화질소(NO) 수 음용 &amp; 30분 침묵 명상</a:t>
+              <a:t>• InBody 770 세포외수분비율 및 림프 부종 정밀 측정</a:t>
             </a:r>
             <a:br/>
             <a:r>
-              <a:t>• 06:00 12시간 단식 완료 ➔ 기상 직후 미온수 &amp; 체질 주스</a:t>
+              <a:t>• EEG 뇌파 분석을 통한 High-Beta파 교감신경 긴장도 평가</a:t>
             </a:r>
             <a:br/>
             <a:r>
-              <a:t>• 07:30 4대 체질 맞춤 영양 미역국 조식 정식 제공</a:t>
+              <a:t>• 타액 산화질소(NO) 스트립을 통한 혈관 탄력도 진단</a:t>
             </a:r>
             <a:br/>
-            <a:br/>
-            <a:r>
-              <a:t>💡 자가포식 효과: 12시간 동안 소화기를 완전히 쉬게 함으로써 세포 내 손상된 단백질과 노폐물을 청소하고 장내 미생물 환경을 리셋합니다.</a:t>
-            </a:r>
-          </a:p>
-        </p:txBody>
-      </p:sp>
-      <p:sp>
-        <p:nvSpPr>
-          <p:cNvPr id="7" name="Rounded Rectangle 6"/>
-          <p:cNvSpPr/>
-          <p:nvPr/>
-        </p:nvSpPr>
-        <p:spPr>
-          <a:xfrm>
-            <a:off x="6217920" y="1554480"/>
-            <a:ext cx="5212080" cy="4663440"/>
-          </a:xfrm>
-          <a:prstGeom prst="roundRect">
-            <a:avLst/>
-          </a:prstGeom>
-          <a:solidFill>
-            <a:srgbClr val="FFFFFF"/>
-          </a:solidFill>
-          <a:ln w="15240">
-            <a:solidFill>
-              <a:srgbClr val="C9A876"/>
-            </a:solidFill>
-          </a:ln>
-        </p:spPr>
-        <p:style>
-          <a:lnRef idx="1">
-            <a:schemeClr val="accent1"/>
-          </a:lnRef>
-          <a:fillRef idx="3">
-            <a:schemeClr val="accent1"/>
-          </a:fillRef>
-          <a:effectRef idx="2">
-            <a:schemeClr val="accent1"/>
-          </a:effectRef>
-          <a:fontRef idx="minor">
-            <a:schemeClr val="lt1"/>
-          </a:fontRef>
-        </p:style>
-        <p:txBody>
-          <a:bodyPr rtlCol="0" anchor="ctr"/>
-          <a:lstStyle/>
-          <a:p>
-            <a:pPr algn="ctr"/>
-          </a:p>
-        </p:txBody>
-      </p:sp>
-      <p:sp>
-        <p:nvSpPr>
-          <p:cNvPr id="8" name="TextBox 7"/>
-          <p:cNvSpPr txBox="1"/>
-          <p:nvPr/>
-        </p:nvSpPr>
-        <p:spPr>
-          <a:xfrm>
-            <a:off x="6492240" y="1828800"/>
-            <a:ext cx="4663440" cy="4114800"/>
-          </a:xfrm>
-          <a:prstGeom prst="rect">
-            <a:avLst/>
-          </a:prstGeom>
-          <a:noFill/>
-        </p:spPr>
-        <p:txBody>
-          <a:bodyPr wrap="square">
-            <a:spAutoFit/>
-          </a:bodyPr>
-          <a:lstStyle/>
-          <a:p>
-            <a:pPr>
-              <a:spcAft>
-                <a:spcPts val="1200"/>
-              </a:spcAft>
-              <a:defRPr sz="1700" b="1">
-                <a:solidFill>
-                  <a:srgbClr val="241E19"/>
-                </a:solidFill>
-              </a:defRPr>
-            </a:pPr>
-            <a:r>
-              <a:t>4대 체질 맞춤 프리미엄 미역국 조식</a:t>
-            </a:r>
-          </a:p>
-          <a:p>
-            <a:pPr>
-              <a:spcAft>
-                <a:spcPts val="600"/>
-              </a:spcAft>
-              <a:defRPr sz="1150">
-                <a:solidFill>
-                  <a:srgbClr val="52463C"/>
-                </a:solidFill>
-              </a:defRPr>
-            </a:pPr>
-            <a:r>
-              <a:t>• 태음인: 소고기 양지 들깨 미역국 + 율무밥 (폐/기관지 윤활 &amp; 고단백)</a:t>
-            </a:r>
-          </a:p>
-          <a:p>
-            <a:pPr>
-              <a:spcAft>
-                <a:spcPts val="600"/>
-              </a:spcAft>
-              <a:defRPr sz="1150">
-                <a:solidFill>
-                  <a:srgbClr val="52463C"/>
-                </a:solidFill>
-              </a:defRPr>
-            </a:pPr>
-            <a:r>
-              <a:t>• 소양인: 맑은 돼지고기 수육 미역국 or 조개 미역국 + 보리밥 (소화기 열 해독)</a:t>
-            </a:r>
-          </a:p>
-          <a:p>
-            <a:pPr>
-              <a:spcAft>
-                <a:spcPts val="600"/>
-              </a:spcAft>
-              <a:defRPr sz="1150">
-                <a:solidFill>
-                  <a:srgbClr val="52463C"/>
-                </a:solidFill>
-              </a:defRPr>
-            </a:pPr>
-            <a:r>
-              <a:t>• 소음인: 닭가슴살 황기 보양 미역국 + 찹쌀밥 (위장 보온 &amp; 기력 증진)</a:t>
-            </a:r>
-          </a:p>
-          <a:p>
-            <a:pPr>
-              <a:spcAft>
-                <a:spcPts val="600"/>
-              </a:spcAft>
-              <a:defRPr sz="1150">
-                <a:solidFill>
-                  <a:srgbClr val="52463C"/>
-                </a:solidFill>
-              </a:defRPr>
-            </a:pPr>
-            <a:r>
-              <a:t>• 태양인: 완도산 전복 홍합 맑은 해물 미역국 + 메밀죽 (간 해독 &amp; 하체 강화)</a:t>
+            <a:r>
+              <a:t>• 최고급 100% 순수 에센셜 오일과 12시간 단식 섭생 처방</a:t>
             </a:r>
           </a:p>
         </p:txBody>
@@ -7872,7 +9262,7 @@
               </a:defRPr>
             </a:pPr>
             <a:r>
-              <a:t>데이터 기반 4단계 정밀 분석 및 체질 확정 시스템</a:t>
+              <a:t>4대 사상체질 심층 처방 매트릭스</a:t>
             </a:r>
           </a:p>
         </p:txBody>
@@ -7896,7 +9286,7 @@
           </a:solidFill>
           <a:ln w="15240">
             <a:solidFill>
-              <a:srgbClr val="C9A876"/>
+              <a:srgbClr val="A37F48"/>
             </a:solidFill>
           </a:ln>
         </p:spPr>
@@ -7945,52 +9335,48 @@
           <a:lstStyle/>
           <a:p>
             <a:pPr>
-              <a:defRPr sz="1300" b="1">
-                <a:solidFill>
-                  <a:srgbClr val="A37F48"/>
-                </a:solidFill>
-              </a:defRPr>
-            </a:pPr>
-            <a:r>
-              <a:t>STEP 01</a:t>
-            </a:r>
-          </a:p>
-          <a:p>
-            <a:pPr>
               <a:spcAft>
                 <a:spcPts val="1000"/>
               </a:spcAft>
-              <a:defRPr sz="1400" b="1">
-                <a:solidFill>
-                  <a:srgbClr val="241E19"/>
-                </a:solidFill>
-              </a:defRPr>
-            </a:pPr>
-            <a:r>
-              <a:t>기초 생체 &amp; 병력 문진표</a:t>
+              <a:defRPr sz="1500" b="1">
+                <a:solidFill>
+                  <a:srgbClr val="A37F48"/>
+                </a:solidFill>
+              </a:defRPr>
+            </a:pPr>
+            <a:r>
+              <a:t>태음인 (肝大肺小)</a:t>
             </a:r>
           </a:p>
           <a:p>
             <a:pPr>
               <a:lnSpc>
-                <a:spcPct val="130000"/>
+                <a:spcPct val="125000"/>
               </a:lnSpc>
               <a:defRPr sz="1100">
                 <a:solidFill>
-                  <a:srgbClr val="52463C"/>
-                </a:solidFill>
-              </a:defRPr>
-            </a:pPr>
-            <a:r>
-              <a:t>• 혈압, 공복 혈당, 가족력(심혈관/암)</a:t>
+                  <a:srgbClr val="241E19"/>
+                </a:solidFill>
+              </a:defRPr>
+            </a:pPr>
+            <a:r>
+              <a:t>• 장부 특성: 간 기능 왕성, 폐/기관지 허약</a:t>
             </a:r>
             <a:br/>
             <a:r>
-              <a:t>• 담낭 절제 등 주요 수술력 기록</a:t>
+              <a:t>• 취약 증상: 목 답답함, 피부 건조, 림프 정체</a:t>
             </a:r>
             <a:br/>
             <a:r>
-              <a:t>• 개인별 알레르기 인자 전방위 분석</a:t>
+              <a:t>• 오일 처방: 유칼립투스, 이지에어, 샌달우드</a:t>
+            </a:r>
+            <a:br/>
+            <a:r>
+              <a:t>• 맞춤 식단: 소고기 양지 들깨 미역국 + 율무밥</a:t>
+            </a:r>
+            <a:br/>
+            <a:r>
+              <a:t>• 의전 세팅: 황색 가운 + 우측 4지 은반지</a:t>
             </a:r>
           </a:p>
         </p:txBody>
@@ -8014,7 +9400,7 @@
           </a:solidFill>
           <a:ln w="15240">
             <a:solidFill>
-              <a:srgbClr val="C9A876"/>
+              <a:srgbClr val="1E5037"/>
             </a:solidFill>
           </a:ln>
         </p:spPr>
@@ -8063,52 +9449,48 @@
           <a:lstStyle/>
           <a:p>
             <a:pPr>
-              <a:defRPr sz="1300" b="1">
-                <a:solidFill>
-                  <a:srgbClr val="A37F48"/>
-                </a:solidFill>
-              </a:defRPr>
-            </a:pPr>
-            <a:r>
-              <a:t>STEP 02</a:t>
-            </a:r>
-          </a:p>
-          <a:p>
-            <a:pPr>
               <a:spcAft>
                 <a:spcPts val="1000"/>
               </a:spcAft>
-              <a:defRPr sz="1400" b="1">
-                <a:solidFill>
-                  <a:srgbClr val="241E19"/>
-                </a:solidFill>
-              </a:defRPr>
-            </a:pPr>
-            <a:r>
-              <a:t>인바디 &amp; 양자/뇌파(EEG)</a:t>
+              <a:defRPr sz="1500" b="1">
+                <a:solidFill>
+                  <a:srgbClr val="1E5037"/>
+                </a:solidFill>
+              </a:defRPr>
+            </a:pPr>
+            <a:r>
+              <a:t>소양인 (脾大腎小)</a:t>
             </a:r>
           </a:p>
           <a:p>
             <a:pPr>
               <a:lnSpc>
-                <a:spcPct val="130000"/>
+                <a:spcPct val="125000"/>
               </a:lnSpc>
               <a:defRPr sz="1100">
                 <a:solidFill>
-                  <a:srgbClr val="52463C"/>
-                </a:solidFill>
-              </a:defRPr>
-            </a:pPr>
-            <a:r>
-              <a:t>• InBody 770 체수분율 &amp; 림프 정체</a:t>
+                  <a:srgbClr val="241E19"/>
+                </a:solidFill>
+              </a:defRPr>
+            </a:pPr>
+            <a:r>
+              <a:t>• 장부 특성: 소화기 열 많음, 신장 음기 허약</a:t>
             </a:r>
             <a:br/>
             <a:r>
-              <a:t>• 장부 에너지 과부하/결핍 판독</a:t>
+              <a:t>• 취약 증상: 상체 열감, 두통, 가슴 답답, 불면</a:t>
             </a:r>
             <a:br/>
             <a:r>
-              <a:t>• High-Beta파 68% 뇌 피로 지수 측정</a:t>
+              <a:t>• 오일 처방: 페퍼민트, 라벤더, 세레니티</a:t>
+            </a:r>
+            <a:br/>
+            <a:r>
+              <a:t>• 맞춤 식단: 돼지고기 수육 / 조개 미역국</a:t>
+            </a:r>
+            <a:br/>
+            <a:r>
+              <a:t>• 의전 세팅: 청색 가운 + 좌측 2지 은반지</a:t>
             </a:r>
           </a:p>
         </p:txBody>
@@ -8132,7 +9514,7 @@
           </a:solidFill>
           <a:ln w="15240">
             <a:solidFill>
-              <a:srgbClr val="C9A876"/>
+              <a:srgbClr val="A37F48"/>
             </a:solidFill>
           </a:ln>
         </p:spPr>
@@ -8181,52 +9563,48 @@
           <a:lstStyle/>
           <a:p>
             <a:pPr>
-              <a:defRPr sz="1300" b="1">
-                <a:solidFill>
-                  <a:srgbClr val="A37F48"/>
-                </a:solidFill>
-              </a:defRPr>
-            </a:pPr>
-            <a:r>
-              <a:t>STEP 03</a:t>
-            </a:r>
-          </a:p>
-          <a:p>
-            <a:pPr>
               <a:spcAft>
                 <a:spcPts val="1000"/>
               </a:spcAft>
-              <a:defRPr sz="1400" b="1">
-                <a:solidFill>
-                  <a:srgbClr val="241E19"/>
-                </a:solidFill>
-              </a:defRPr>
-            </a:pPr>
-            <a:r>
-              <a:t>산화질소(NO) 관리</a:t>
+              <a:defRPr sz="1500" b="1">
+                <a:solidFill>
+                  <a:srgbClr val="A37F48"/>
+                </a:solidFill>
+              </a:defRPr>
+            </a:pPr>
+            <a:r>
+              <a:t>소음인 (腎大脾小)</a:t>
             </a:r>
           </a:p>
           <a:p>
             <a:pPr>
               <a:lnSpc>
-                <a:spcPct val="130000"/>
+                <a:spcPct val="125000"/>
               </a:lnSpc>
               <a:defRPr sz="1100">
                 <a:solidFill>
-                  <a:srgbClr val="52463C"/>
-                </a:solidFill>
-              </a:defRPr>
-            </a:pPr>
-            <a:r>
-              <a:t>• 타액 NO 산화질소 스트립 판독</a:t>
+                  <a:srgbClr val="241E19"/>
+                </a:solidFill>
+              </a:defRPr>
+            </a:pPr>
+            <a:r>
+              <a:t>• 장부 특성: 신장 기능 튼튼, 비위 차고 약함</a:t>
             </a:r>
             <a:br/>
             <a:r>
-              <a:t>• 혈관 탄성도 측정 및 결핍 진단</a:t>
+              <a:t>• 취약 증상: 수족냉증, 만성 소화불량, 피로</a:t>
             </a:r>
             <a:br/>
             <a:r>
-              <a:t>• 1일 1.5L 음용 &amp; 나노 미스트 처방</a:t>
+              <a:t>• 오일 처방: 온가드, 진저, 시나몬, 오렌지</a:t>
+            </a:r>
+            <a:br/>
+            <a:r>
+              <a:t>• 맞춤 식단: 닭가슴살 황기 보양 미역국</a:t>
+            </a:r>
+            <a:br/>
+            <a:r>
+              <a:t>• 의전 세팅: 백색 가운 + 우측 3지 은반지</a:t>
             </a:r>
           </a:p>
         </p:txBody>
@@ -8250,7 +9628,7 @@
           </a:solidFill>
           <a:ln w="15240">
             <a:solidFill>
-              <a:srgbClr val="C9A876"/>
+              <a:srgbClr val="1E5037"/>
             </a:solidFill>
           </a:ln>
         </p:spPr>
@@ -8299,52 +9677,48 @@
           <a:lstStyle/>
           <a:p>
             <a:pPr>
-              <a:defRPr sz="1300" b="1">
-                <a:solidFill>
-                  <a:srgbClr val="A37F48"/>
-                </a:solidFill>
-              </a:defRPr>
-            </a:pPr>
-            <a:r>
-              <a:t>STEP 04</a:t>
-            </a:r>
-          </a:p>
-          <a:p>
-            <a:pPr>
               <a:spcAft>
                 <a:spcPts val="1000"/>
               </a:spcAft>
-              <a:defRPr sz="1400" b="1">
-                <a:solidFill>
-                  <a:srgbClr val="241E19"/>
-                </a:solidFill>
-              </a:defRPr>
-            </a:pPr>
-            <a:r>
-              <a:t>사상체질 최종 확정</a:t>
+              <a:defRPr sz="1500" b="1">
+                <a:solidFill>
+                  <a:srgbClr val="1E5037"/>
+                </a:solidFill>
+              </a:defRPr>
+            </a:pPr>
+            <a:r>
+              <a:t>태양인 (肺大肝小)</a:t>
             </a:r>
           </a:p>
           <a:p>
             <a:pPr>
               <a:lnSpc>
-                <a:spcPct val="130000"/>
+                <a:spcPct val="125000"/>
               </a:lnSpc>
               <a:defRPr sz="1100">
                 <a:solidFill>
-                  <a:srgbClr val="52463C"/>
-                </a:solidFill>
-              </a:defRPr>
-            </a:pPr>
-            <a:r>
-              <a:t>• 태음/소양/소음/태양 장부 확정</a:t>
+                  <a:srgbClr val="241E19"/>
+                </a:solidFill>
+              </a:defRPr>
+            </a:pPr>
+            <a:r>
+              <a:t>• 장부 특성: 폐 기능 강함, 간 해독/하체 허약</a:t>
             </a:r>
             <a:br/>
             <a:r>
-              <a:t>• 1:1 맞춤 VIP 웹 처방전 발행</a:t>
+              <a:t>• 취약 증상: 상기증, 목덜미 뻣뻣, 하지 무력</a:t>
             </a:r>
             <a:br/>
             <a:r>
-              <a:t>• 은반지 착용 및 4대 컬러 가운 배정</a:t>
+              <a:t>• 오일 처방: 베티버, 프랑킨센스, 레몬</a:t>
+            </a:r>
+            <a:br/>
+            <a:r>
+              <a:t>• 맞춤 식단: 완도산 전복 홍합 맑은 해물 미역국</a:t>
+            </a:r>
+            <a:br/>
+            <a:r>
+              <a:t>• 의전 세팅: 적색 가운 + 좌측 4지 은반지</a:t>
             </a:r>
           </a:p>
         </p:txBody>
@@ -8475,7 +9849,7 @@
               </a:defRPr>
             </a:pPr>
             <a:r>
-              <a:t>VIP 맞춤형 4대 체류 프로그램 (Stay Programs)</a:t>
+              <a:t>10대 시그니처 테라피 가이드 (Part 1: Themes 01 ~ 05)</a:t>
             </a:r>
           </a:p>
         </p:txBody>
@@ -8489,7 +9863,7 @@
         <p:spPr>
           <a:xfrm>
             <a:off x="731520" y="1554480"/>
-            <a:ext cx="5120640" cy="2103120"/>
+            <a:ext cx="10728655" cy="804672"/>
           </a:xfrm>
           <a:prstGeom prst="roundRect">
             <a:avLst/>
@@ -8533,8 +9907,8 @@
         </p:nvSpPr>
         <p:spPr>
           <a:xfrm>
-            <a:off x="960120" y="1737360"/>
-            <a:ext cx="4663440" cy="1737360"/>
+            <a:off x="914400" y="1664208"/>
+            <a:ext cx="10332720" cy="594360"/>
           </a:xfrm>
           <a:prstGeom prst="rect">
             <a:avLst/>
@@ -8548,40 +9922,14 @@
           <a:lstStyle/>
           <a:p>
             <a:pPr>
-              <a:spcAft>
-                <a:spcPts val="600"/>
-              </a:spcAft>
-              <a:defRPr sz="1600" b="1">
-                <a:solidFill>
-                  <a:srgbClr val="A37F48"/>
-                </a:solidFill>
-              </a:defRPr>
-            </a:pPr>
-            <a:r>
-              <a:t>2박 3일 (단기 리프레시)</a:t>
-            </a:r>
-          </a:p>
-          <a:p>
-            <a:pPr>
-              <a:lnSpc>
-                <a:spcPct val="120000"/>
-              </a:lnSpc>
-              <a:defRPr sz="1100">
-                <a:solidFill>
-                  <a:srgbClr val="52463C"/>
-                </a:solidFill>
-              </a:defRPr>
-            </a:pPr>
-            <a:r>
-              <a:t>• 대상: 주말 힐링 VIP, 비즈니스 출장객</a:t>
-            </a:r>
-            <a:br/>
-            <a:r>
-              <a:t>• 플로우: 진단 ➔ 족욕 ➔ 80분 바디 ➔ 12h 단식 ➔ 태극선법 ➔ 나노 미스트</a:t>
-            </a:r>
-            <a:br/>
-            <a:r>
-              <a:t>• 효과: 뇌 피로 70% 감소, 근육 긴장 완화, 숙면 유도</a:t>
+              <a:defRPr sz="1200">
+                <a:solidFill>
+                  <a:srgbClr val="241E19"/>
+                </a:solidFill>
+              </a:defRPr>
+            </a:pPr>
+            <a:r>
+              <a:t>01. 웰컴 오리엔테이션  |  프라이빗 다실 1:1 상담 및 4대 체질 맞춤 웰컴 티(소음 38℃ 대추계피차 ~ 소양 상온 구기자차) 제공</a:t>
             </a:r>
           </a:p>
         </p:txBody>
@@ -8594,8 +9942,8 @@
         </p:nvSpPr>
         <p:spPr>
           <a:xfrm>
-            <a:off x="6126480" y="1554480"/>
-            <a:ext cx="5120640" cy="2103120"/>
+            <a:off x="731520" y="2487168"/>
+            <a:ext cx="10728655" cy="804672"/>
           </a:xfrm>
           <a:prstGeom prst="roundRect">
             <a:avLst/>
@@ -8639,8 +9987,8 @@
         </p:nvSpPr>
         <p:spPr>
           <a:xfrm>
-            <a:off x="6355080" y="1737360"/>
-            <a:ext cx="4663440" cy="1737360"/>
+            <a:off x="914400" y="2596896"/>
+            <a:ext cx="10332720" cy="594360"/>
           </a:xfrm>
           <a:prstGeom prst="rect">
             <a:avLst/>
@@ -8654,40 +10002,14 @@
           <a:lstStyle/>
           <a:p>
             <a:pPr>
-              <a:spcAft>
-                <a:spcPts val="600"/>
-              </a:spcAft>
-              <a:defRPr sz="1600" b="1">
-                <a:solidFill>
-                  <a:srgbClr val="A37F48"/>
-                </a:solidFill>
-              </a:defRPr>
-            </a:pPr>
-            <a:r>
-              <a:t>5박 6일 (중기 디톡스)</a:t>
-            </a:r>
-          </a:p>
-          <a:p>
-            <a:pPr>
-              <a:lnSpc>
-                <a:spcPct val="120000"/>
-              </a:lnSpc>
-              <a:defRPr sz="1100">
-                <a:solidFill>
-                  <a:srgbClr val="52463C"/>
-                </a:solidFill>
-              </a:defRPr>
-            </a:pPr>
-            <a:r>
-              <a:t>• 대상: 만성 피로 및 림프 부종 보유자</a:t>
-            </a:r>
-            <a:br/>
-            <a:r>
-              <a:t>• 플로우: 1~3일 림프 배농 &amp; 온열(체온 1℃ 상승) ➔ 4~6일 마이크로바이옴 &amp; 기체조</a:t>
-            </a:r>
-            <a:br/>
-            <a:r>
-              <a:t>• 효과: 림프 정체 85% 개선, 안색 정화, 활력 복원</a:t>
+              <a:defRPr sz="1200">
+                <a:solidFill>
+                  <a:srgbClr val="241E19"/>
+                </a:solidFill>
+              </a:defRPr>
+            </a:pPr>
+            <a:r>
+              <a:t>02. 20분 맞춤 약재 족욕  |  두한족열(頭寒足熱) 순환 개방. 온열탕(41℃ 당귀/생강) vs 쿨링탕(38.5℃ 박하/결명자) + 순수 에센셜 오일</a:t>
             </a:r>
           </a:p>
         </p:txBody>
@@ -8700,8 +10022,8 @@
         </p:nvSpPr>
         <p:spPr>
           <a:xfrm>
-            <a:off x="731520" y="3931920"/>
-            <a:ext cx="5120640" cy="2103120"/>
+            <a:off x="731520" y="3419856"/>
+            <a:ext cx="10728655" cy="804672"/>
           </a:xfrm>
           <a:prstGeom prst="roundRect">
             <a:avLst/>
@@ -8745,8 +10067,8 @@
         </p:nvSpPr>
         <p:spPr>
           <a:xfrm>
-            <a:off x="960120" y="4114800"/>
-            <a:ext cx="4663440" cy="1737360"/>
+            <a:off x="914400" y="3529584"/>
+            <a:ext cx="10332720" cy="594360"/>
           </a:xfrm>
           <a:prstGeom prst="rect">
             <a:avLst/>
@@ -8760,40 +10082,14 @@
           <a:lstStyle/>
           <a:p>
             <a:pPr>
-              <a:spcAft>
-                <a:spcPts val="600"/>
-              </a:spcAft>
-              <a:defRPr sz="1600" b="1">
-                <a:solidFill>
-                  <a:srgbClr val="A37F48"/>
-                </a:solidFill>
-              </a:defRPr>
-            </a:pPr>
-            <a:r>
-              <a:t>15박 16일 (장기 리셋)</a:t>
-            </a:r>
-          </a:p>
-          <a:p>
-            <a:pPr>
-              <a:lnSpc>
-                <a:spcPct val="120000"/>
-              </a:lnSpc>
-              <a:defRPr sz="1100">
-                <a:solidFill>
-                  <a:srgbClr val="52463C"/>
-                </a:solidFill>
-              </a:defRPr>
-            </a:pPr>
-            <a:r>
-              <a:t>• 대상: 대사증후군 개선 희망 기업 최고경영진</a:t>
-            </a:r>
-            <a:br/>
-            <a:r>
-              <a:t>• 플로우: DTC 유전자 검사 ➔ 10대 테마 매일 순환 ➔ 1:1 라이프스타일 매뉴얼북</a:t>
-            </a:r>
-            <a:br/>
-            <a:r>
-              <a:t>• 효과: 면역 나이 5년 리셋, 평생 섭생 습관 정착</a:t>
+              <a:defRPr sz="1200">
+                <a:solidFill>
+                  <a:srgbClr val="241E19"/>
+                </a:solidFill>
+              </a:defRPr>
+            </a:pPr>
+            <a:r>
+              <a:t>03. 에너지 테라피 &amp; 은반지  |  사상체질 경락별 은반지(Eun-banji) 착용 및 4대 조화 가운을 통한 스태프 비언어 맞춤 의전 시스템</a:t>
             </a:r>
           </a:p>
         </p:txBody>
@@ -8806,8 +10102,8 @@
         </p:nvSpPr>
         <p:spPr>
           <a:xfrm>
-            <a:off x="6126480" y="3931920"/>
-            <a:ext cx="5120640" cy="2103120"/>
+            <a:off x="731520" y="4352544"/>
+            <a:ext cx="10728655" cy="804672"/>
           </a:xfrm>
           <a:prstGeom prst="roundRect">
             <a:avLst/>
@@ -8851,8 +10147,8 @@
         </p:nvSpPr>
         <p:spPr>
           <a:xfrm>
-            <a:off x="6355080" y="4114800"/>
-            <a:ext cx="4663440" cy="1737360"/>
+            <a:off x="914400" y="4462272"/>
+            <a:ext cx="10332720" cy="594360"/>
           </a:xfrm>
           <a:prstGeom prst="rect">
             <a:avLst/>
@@ -8866,40 +10162,94 @@
           <a:lstStyle/>
           <a:p>
             <a:pPr>
-              <a:spcAft>
-                <a:spcPts val="600"/>
-              </a:spcAft>
-              <a:defRPr sz="1600" b="1">
-                <a:solidFill>
-                  <a:srgbClr val="A37F48"/>
-                </a:solidFill>
-              </a:defRPr>
-            </a:pPr>
-            <a:r>
-              <a:t>1개월 (특수 집중 케어)</a:t>
-            </a:r>
-          </a:p>
-          <a:p>
-            <a:pPr>
-              <a:lnSpc>
-                <a:spcPct val="120000"/>
-              </a:lnSpc>
-              <a:defRPr sz="1100">
-                <a:solidFill>
-                  <a:srgbClr val="52463C"/>
-                </a:solidFill>
-              </a:defRPr>
-            </a:pPr>
-            <a:r>
-              <a:t>• 대상: 수술 후 회복기 고객, 고령 시니어 VIP</a:t>
-            </a:r>
-            <a:br/>
-            <a:r>
-              <a:t>• 플로우: 37.5℃ 무자극 족욕 ➔ 프랑킨센스 세포 진정 ➔ 면역 NK세포 증대</a:t>
-            </a:r>
-            <a:br/>
-            <a:r>
-              <a:t>• 시설: 프라이빗 단독 빌라 및 메디컬 스파 룸 배정</a:t>
+              <a:defRPr sz="1200">
+                <a:solidFill>
+                  <a:srgbClr val="241E19"/>
+                </a:solidFill>
+              </a:defRPr>
+            </a:pPr>
+            <a:r>
+              <a:t>04. 푸드 테라피 (12h 단식)  |  저녁 18:00~익일 06:00 12시간 단식(자가포식) 후 기상 직후 4대 체질 맞춤 영양 미역국 조식 정식 제공</a:t>
+            </a:r>
+          </a:p>
+        </p:txBody>
+      </p:sp>
+      <p:sp>
+        <p:nvSpPr>
+          <p:cNvPr id="13" name="Rounded Rectangle 12"/>
+          <p:cNvSpPr/>
+          <p:nvPr/>
+        </p:nvSpPr>
+        <p:spPr>
+          <a:xfrm>
+            <a:off x="731520" y="5285232"/>
+            <a:ext cx="10728655" cy="804672"/>
+          </a:xfrm>
+          <a:prstGeom prst="roundRect">
+            <a:avLst/>
+          </a:prstGeom>
+          <a:solidFill>
+            <a:srgbClr val="FFFFFF"/>
+          </a:solidFill>
+          <a:ln w="15240">
+            <a:solidFill>
+              <a:srgbClr val="C9A876"/>
+            </a:solidFill>
+          </a:ln>
+        </p:spPr>
+        <p:style>
+          <a:lnRef idx="1">
+            <a:schemeClr val="accent1"/>
+          </a:lnRef>
+          <a:fillRef idx="3">
+            <a:schemeClr val="accent1"/>
+          </a:fillRef>
+          <a:effectRef idx="2">
+            <a:schemeClr val="accent1"/>
+          </a:effectRef>
+          <a:fontRef idx="minor">
+            <a:schemeClr val="lt1"/>
+          </a:fontRef>
+        </p:style>
+        <p:txBody>
+          <a:bodyPr rtlCol="0" anchor="ctr"/>
+          <a:lstStyle/>
+          <a:p>
+            <a:pPr algn="ctr"/>
+          </a:p>
+        </p:txBody>
+      </p:sp>
+      <p:sp>
+        <p:nvSpPr>
+          <p:cNvPr id="14" name="TextBox 13"/>
+          <p:cNvSpPr txBox="1"/>
+          <p:nvPr/>
+        </p:nvSpPr>
+        <p:spPr>
+          <a:xfrm>
+            <a:off x="914400" y="5394960"/>
+            <a:ext cx="10332720" cy="594360"/>
+          </a:xfrm>
+          <a:prstGeom prst="rect">
+            <a:avLst/>
+          </a:prstGeom>
+          <a:noFill/>
+        </p:spPr>
+        <p:txBody>
+          <a:bodyPr wrap="square">
+            <a:spAutoFit/>
+          </a:bodyPr>
+          <a:lstStyle/>
+          <a:p>
+            <a:pPr>
+              <a:defRPr sz="1200">
+                <a:solidFill>
+                  <a:srgbClr val="241E19"/>
+                </a:solidFill>
+              </a:defRPr>
+            </a:pPr>
+            <a:r>
+              <a:t>05. 80분 이원화 바디 테라피  |  1단계 한의학 경락 수기 지압(30분)으로 순환로 개방 + 2단계 최고급 100% 순수 에센셜 오일 림프 드레나쥐(50분)</a:t>
             </a:r>
           </a:p>
         </p:txBody>

--- a/sasang-spa/사상체질_프리미엄_스파_프로젝트_제안서_발표자료.pptx
+++ b/sasang-spa/사상체질_프리미엄_스파_프로젝트_제안서_발표자료.pptx
@@ -15,12 +15,6 @@
     <p:sldId id="263" r:id="rId14"/>
     <p:sldId id="264" r:id="rId15"/>
     <p:sldId id="265" r:id="rId16"/>
-    <p:sldId id="266" r:id="rId17"/>
-    <p:sldId id="267" r:id="rId18"/>
-    <p:sldId id="268" r:id="rId19"/>
-    <p:sldId id="269" r:id="rId20"/>
-    <p:sldId id="270" r:id="rId21"/>
-    <p:sldId id="271" r:id="rId22"/>
   </p:sldIdLst>
   <p:sldSz cx="12191695" cy="6858000" type="screen4x3"/>
   <p:notesSz cx="6858000" cy="9144000"/>
@@ -3118,7 +3112,7 @@
             <a:avLst/>
           </a:prstGeom>
           <a:solidFill>
-            <a:srgbClr val="1A3328"/>
+            <a:srgbClr val="0E1F18"/>
           </a:solidFill>
           <a:ln>
             <a:noFill/>
@@ -3197,8 +3191,8 @@
         </p:nvSpPr>
         <p:spPr>
           <a:xfrm>
-            <a:off x="1097280" y="1371600"/>
-            <a:ext cx="9966960" cy="4114800"/>
+            <a:off x="1097280" y="1188720"/>
+            <a:ext cx="9966960" cy="4389120"/>
           </a:xfrm>
           <a:prstGeom prst="rect">
             <a:avLst/>
@@ -3243,7 +3237,7 @@
           <a:p>
             <a:pPr>
               <a:spcAft>
-                <a:spcPts val="2800"/>
+                <a:spcPts val="2400"/>
               </a:spcAft>
               <a:defRPr sz="1600">
                 <a:solidFill>
@@ -3252,23 +3246,42 @@
               </a:defRPr>
             </a:pPr>
             <a:r>
-              <a:t>현대인의 고질적 불균형을 근본적으로 치유하는 1:1 맞춤 신체 리셋 솔루션</a:t>
-            </a:r>
-          </a:p>
-          <a:p>
-            <a:pPr>
-              <a:defRPr sz="1200">
-                <a:solidFill>
-                  <a:srgbClr val="DCD2BE"/>
-                </a:solidFill>
-              </a:defRPr>
-            </a:pPr>
-            <a:r>
-              <a:t>• 총괄 디렉터: 유정근 (웰니스 총괄 / 전담 테라피스트 | 010-4728-9917 | ryujean77@gmail.com)</a:t>
+              <a:t>한국 고유의 사상체질 의학 × 최고급 100% 순수 에센셜 오일 × 현대 바이오 데이터 융합</a:t>
+            </a:r>
+          </a:p>
+          <a:p>
+            <a:pPr>
+              <a:spcAft>
+                <a:spcPts val="2000"/>
+              </a:spcAft>
+              <a:defRPr sz="1300">
+                <a:solidFill>
+                  <a:srgbClr val="E6DCC8"/>
+                </a:solidFill>
+              </a:defRPr>
+            </a:pPr>
+            <a:r>
+              <a:t>👑 현대인의 고질적 불균형을 해결하는 1:1 맞춤 신체 리셋 솔루션 기획제안서</a:t>
+            </a:r>
+          </a:p>
+          <a:p>
+            <a:pPr>
+              <a:defRPr sz="1100">
+                <a:solidFill>
+                  <a:srgbClr val="BEB4A0"/>
+                </a:solidFill>
+              </a:defRPr>
+            </a:pPr>
+            <a:r>
+              <a:t>• 총괄 디렉터: 유정근 (010-4728-9917 | ryujean77@gmail.com)</a:t>
             </a:r>
             <a:br/>
             <a:r>
-              <a:t>• 학술/의학 총괄: 임동구 박사 (식품공학박사 / Dr.Yim's 체질연구소장 | 010-2323-4662 | ydoko@daum.net)</a:t>
+              <a:t>• 학술/의학 총괄: 임동구 식품공학박사 (010-2323-4662 | ydoko@daum.net)</a:t>
+            </a:r>
+            <a:br/>
+            <a:r>
+              <a:t>• 공식 온라인 웹 포털: https://ryujean77.github.io/ryujean-slides/sasang-spa/</a:t>
             </a:r>
           </a:p>
         </p:txBody>
@@ -3306,2903 +3319,7 @@
             <a:avLst/>
           </a:prstGeom>
           <a:solidFill>
-            <a:srgbClr val="FDFBF7"/>
-          </a:solidFill>
-          <a:ln>
-            <a:noFill/>
-          </a:ln>
-        </p:spPr>
-        <p:style>
-          <a:lnRef idx="1">
-            <a:schemeClr val="accent1"/>
-          </a:lnRef>
-          <a:fillRef idx="3">
-            <a:schemeClr val="accent1"/>
-          </a:fillRef>
-          <a:effectRef idx="2">
-            <a:schemeClr val="accent1"/>
-          </a:effectRef>
-          <a:fontRef idx="minor">
-            <a:schemeClr val="lt1"/>
-          </a:fontRef>
-        </p:style>
-        <p:txBody>
-          <a:bodyPr rtlCol="0" anchor="ctr"/>
-          <a:lstStyle/>
-          <a:p>
-            <a:pPr algn="ctr"/>
-          </a:p>
-        </p:txBody>
-      </p:sp>
-      <p:sp>
-        <p:nvSpPr>
-          <p:cNvPr id="3" name="TextBox 2"/>
-          <p:cNvSpPr txBox="1"/>
-          <p:nvPr/>
-        </p:nvSpPr>
-        <p:spPr>
-          <a:xfrm>
-            <a:off x="731520" y="411480"/>
-            <a:ext cx="10515600" cy="365760"/>
-          </a:xfrm>
-          <a:prstGeom prst="rect">
-            <a:avLst/>
-          </a:prstGeom>
-          <a:noFill/>
-        </p:spPr>
-        <p:txBody>
-          <a:bodyPr wrap="square">
-            <a:spAutoFit/>
-          </a:bodyPr>
-          <a:lstStyle/>
-          <a:p>
-            <a:pPr>
-              <a:defRPr sz="1000" b="1">
-                <a:solidFill>
-                  <a:srgbClr val="A37F48"/>
-                </a:solidFill>
-              </a:defRPr>
-            </a:pPr>
-            <a:r>
-              <a:t>K-PREMIUM WELLNESS SPA 2026</a:t>
-            </a:r>
-          </a:p>
-        </p:txBody>
-      </p:sp>
-      <p:sp>
-        <p:nvSpPr>
-          <p:cNvPr id="4" name="TextBox 3"/>
-          <p:cNvSpPr txBox="1"/>
-          <p:nvPr/>
-        </p:nvSpPr>
-        <p:spPr>
-          <a:xfrm>
-            <a:off x="731520" y="685800"/>
-            <a:ext cx="10515600" cy="731520"/>
-          </a:xfrm>
-          <a:prstGeom prst="rect">
-            <a:avLst/>
-          </a:prstGeom>
-          <a:noFill/>
-        </p:spPr>
-        <p:txBody>
-          <a:bodyPr wrap="square">
-            <a:spAutoFit/>
-          </a:bodyPr>
-          <a:lstStyle/>
-          <a:p>
-            <a:pPr>
-              <a:defRPr sz="2200" b="1">
-                <a:solidFill>
-                  <a:srgbClr val="241E19"/>
-                </a:solidFill>
-              </a:defRPr>
-            </a:pPr>
-            <a:r>
-              <a:t>10대 시그니처 테라피 가이드 (Part 2: Themes 06 ~ 10)</a:t>
-            </a:r>
-          </a:p>
-        </p:txBody>
-      </p:sp>
-      <p:sp>
-        <p:nvSpPr>
-          <p:cNvPr id="5" name="Rounded Rectangle 4"/>
-          <p:cNvSpPr/>
-          <p:nvPr/>
-        </p:nvSpPr>
-        <p:spPr>
-          <a:xfrm>
-            <a:off x="731520" y="1554480"/>
-            <a:ext cx="10728655" cy="804672"/>
-          </a:xfrm>
-          <a:prstGeom prst="roundRect">
-            <a:avLst/>
-          </a:prstGeom>
-          <a:solidFill>
-            <a:srgbClr val="FFFFFF"/>
-          </a:solidFill>
-          <a:ln w="15240">
-            <a:solidFill>
-              <a:srgbClr val="C9A876"/>
-            </a:solidFill>
-          </a:ln>
-        </p:spPr>
-        <p:style>
-          <a:lnRef idx="1">
-            <a:schemeClr val="accent1"/>
-          </a:lnRef>
-          <a:fillRef idx="3">
-            <a:schemeClr val="accent1"/>
-          </a:fillRef>
-          <a:effectRef idx="2">
-            <a:schemeClr val="accent1"/>
-          </a:effectRef>
-          <a:fontRef idx="minor">
-            <a:schemeClr val="lt1"/>
-          </a:fontRef>
-        </p:style>
-        <p:txBody>
-          <a:bodyPr rtlCol="0" anchor="ctr"/>
-          <a:lstStyle/>
-          <a:p>
-            <a:pPr algn="ctr"/>
-          </a:p>
-        </p:txBody>
-      </p:sp>
-      <p:sp>
-        <p:nvSpPr>
-          <p:cNvPr id="6" name="TextBox 5"/>
-          <p:cNvSpPr txBox="1"/>
-          <p:nvPr/>
-        </p:nvSpPr>
-        <p:spPr>
-          <a:xfrm>
-            <a:off x="914400" y="1664208"/>
-            <a:ext cx="10332720" cy="594360"/>
-          </a:xfrm>
-          <a:prstGeom prst="rect">
-            <a:avLst/>
-          </a:prstGeom>
-          <a:noFill/>
-        </p:spPr>
-        <p:txBody>
-          <a:bodyPr wrap="square">
-            <a:spAutoFit/>
-          </a:bodyPr>
-          <a:lstStyle/>
-          <a:p>
-            <a:pPr>
-              <a:defRPr sz="1200">
-                <a:solidFill>
-                  <a:srgbClr val="241E19"/>
-                </a:solidFill>
-              </a:defRPr>
-            </a:pPr>
-            <a:r>
-              <a:t>06. 티 테라피 &amp; 침묵 명상  |  무형문화재 장인 도자기 전통 다기 우림 시연 및 30분 무언 침묵 명상 (부교감 신경 활성도 40% 상승)</a:t>
-            </a:r>
-          </a:p>
-        </p:txBody>
-      </p:sp>
-      <p:sp>
-        <p:nvSpPr>
-          <p:cNvPr id="7" name="Rounded Rectangle 6"/>
-          <p:cNvSpPr/>
-          <p:nvPr/>
-        </p:nvSpPr>
-        <p:spPr>
-          <a:xfrm>
-            <a:off x="731520" y="2487168"/>
-            <a:ext cx="10728655" cy="804672"/>
-          </a:xfrm>
-          <a:prstGeom prst="roundRect">
-            <a:avLst/>
-          </a:prstGeom>
-          <a:solidFill>
-            <a:srgbClr val="FFFFFF"/>
-          </a:solidFill>
-          <a:ln w="15240">
-            <a:solidFill>
-              <a:srgbClr val="C9A876"/>
-            </a:solidFill>
-          </a:ln>
-        </p:spPr>
-        <p:style>
-          <a:lnRef idx="1">
-            <a:schemeClr val="accent1"/>
-          </a:lnRef>
-          <a:fillRef idx="3">
-            <a:schemeClr val="accent1"/>
-          </a:fillRef>
-          <a:effectRef idx="2">
-            <a:schemeClr val="accent1"/>
-          </a:effectRef>
-          <a:fontRef idx="minor">
-            <a:schemeClr val="lt1"/>
-          </a:fontRef>
-        </p:style>
-        <p:txBody>
-          <a:bodyPr rtlCol="0" anchor="ctr"/>
-          <a:lstStyle/>
-          <a:p>
-            <a:pPr algn="ctr"/>
-          </a:p>
-        </p:txBody>
-      </p:sp>
-      <p:sp>
-        <p:nvSpPr>
-          <p:cNvPr id="8" name="TextBox 7"/>
-          <p:cNvSpPr txBox="1"/>
-          <p:nvPr/>
-        </p:nvSpPr>
-        <p:spPr>
-          <a:xfrm>
-            <a:off x="914400" y="2596896"/>
-            <a:ext cx="10332720" cy="594360"/>
-          </a:xfrm>
-          <a:prstGeom prst="rect">
-            <a:avLst/>
-          </a:prstGeom>
-          <a:noFill/>
-        </p:spPr>
-        <p:txBody>
-          <a:bodyPr wrap="square">
-            <a:spAutoFit/>
-          </a:bodyPr>
-          <a:lstStyle/>
-          <a:p>
-            <a:pPr>
-              <a:defRPr sz="1200">
-                <a:solidFill>
-                  <a:srgbClr val="241E19"/>
-                </a:solidFill>
-              </a:defRPr>
-            </a:pPr>
-            <a:r>
-              <a:t>07. 수(水) 테라피 (산화질소)  |  고농도 산화질소(NO) 수 1.5L 정량 음용을 통한 혈관 확장 및 15분 전신 고압 나노 미스트 챔버 입실</a:t>
-            </a:r>
-          </a:p>
-        </p:txBody>
-      </p:sp>
-      <p:sp>
-        <p:nvSpPr>
-          <p:cNvPr id="9" name="Rounded Rectangle 8"/>
-          <p:cNvSpPr/>
-          <p:nvPr/>
-        </p:nvSpPr>
-        <p:spPr>
-          <a:xfrm>
-            <a:off x="731520" y="3419856"/>
-            <a:ext cx="10728655" cy="804672"/>
-          </a:xfrm>
-          <a:prstGeom prst="roundRect">
-            <a:avLst/>
-          </a:prstGeom>
-          <a:solidFill>
-            <a:srgbClr val="FFFFFF"/>
-          </a:solidFill>
-          <a:ln w="15240">
-            <a:solidFill>
-              <a:srgbClr val="C9A876"/>
-            </a:solidFill>
-          </a:ln>
-        </p:spPr>
-        <p:style>
-          <a:lnRef idx="1">
-            <a:schemeClr val="accent1"/>
-          </a:lnRef>
-          <a:fillRef idx="3">
-            <a:schemeClr val="accent1"/>
-          </a:fillRef>
-          <a:effectRef idx="2">
-            <a:schemeClr val="accent1"/>
-          </a:effectRef>
-          <a:fontRef idx="minor">
-            <a:schemeClr val="lt1"/>
-          </a:fontRef>
-        </p:style>
-        <p:txBody>
-          <a:bodyPr rtlCol="0" anchor="ctr"/>
-          <a:lstStyle/>
-          <a:p>
-            <a:pPr algn="ctr"/>
-          </a:p>
-        </p:txBody>
-      </p:sp>
-      <p:sp>
-        <p:nvSpPr>
-          <p:cNvPr id="10" name="TextBox 9"/>
-          <p:cNvSpPr txBox="1"/>
-          <p:nvPr/>
-        </p:nvSpPr>
-        <p:spPr>
-          <a:xfrm>
-            <a:off x="914400" y="3529584"/>
-            <a:ext cx="10332720" cy="594360"/>
-          </a:xfrm>
-          <a:prstGeom prst="rect">
-            <a:avLst/>
-          </a:prstGeom>
-          <a:noFill/>
-        </p:spPr>
-        <p:txBody>
-          <a:bodyPr wrap="square">
-            <a:spAutoFit/>
-          </a:bodyPr>
-          <a:lstStyle/>
-          <a:p>
-            <a:pPr>
-              <a:defRPr sz="1200">
-                <a:solidFill>
-                  <a:srgbClr val="241E19"/>
-                </a:solidFill>
-              </a:defRPr>
-            </a:pPr>
-            <a:r>
-              <a:t>08. 온열 테라피 (체온 1℃ 상승)  |  척추 전용 온열 오일 도포 후 42~45℃ 원적외선 챔버 1시간 입실 (심부 체온 1℃ 상승, 면역 NK세포 5배 증대)</a:t>
-            </a:r>
-          </a:p>
-        </p:txBody>
-      </p:sp>
-      <p:sp>
-        <p:nvSpPr>
-          <p:cNvPr id="11" name="Rounded Rectangle 10"/>
-          <p:cNvSpPr/>
-          <p:nvPr/>
-        </p:nvSpPr>
-        <p:spPr>
-          <a:xfrm>
-            <a:off x="731520" y="4352544"/>
-            <a:ext cx="10728655" cy="804672"/>
-          </a:xfrm>
-          <a:prstGeom prst="roundRect">
-            <a:avLst/>
-          </a:prstGeom>
-          <a:solidFill>
-            <a:srgbClr val="FFFFFF"/>
-          </a:solidFill>
-          <a:ln w="15240">
-            <a:solidFill>
-              <a:srgbClr val="C9A876"/>
-            </a:solidFill>
-          </a:ln>
-        </p:spPr>
-        <p:style>
-          <a:lnRef idx="1">
-            <a:schemeClr val="accent1"/>
-          </a:lnRef>
-          <a:fillRef idx="3">
-            <a:schemeClr val="accent1"/>
-          </a:fillRef>
-          <a:effectRef idx="2">
-            <a:schemeClr val="accent1"/>
-          </a:effectRef>
-          <a:fontRef idx="minor">
-            <a:schemeClr val="lt1"/>
-          </a:fontRef>
-        </p:style>
-        <p:txBody>
-          <a:bodyPr rtlCol="0" anchor="ctr"/>
-          <a:lstStyle/>
-          <a:p>
-            <a:pPr algn="ctr"/>
-          </a:p>
-        </p:txBody>
-      </p:sp>
-      <p:sp>
-        <p:nvSpPr>
-          <p:cNvPr id="12" name="TextBox 11"/>
-          <p:cNvSpPr txBox="1"/>
-          <p:nvPr/>
-        </p:nvSpPr>
-        <p:spPr>
-          <a:xfrm>
-            <a:off x="914400" y="4462272"/>
-            <a:ext cx="10332720" cy="594360"/>
-          </a:xfrm>
-          <a:prstGeom prst="rect">
-            <a:avLst/>
-          </a:prstGeom>
-          <a:noFill/>
-        </p:spPr>
-        <p:txBody>
-          <a:bodyPr wrap="square">
-            <a:spAutoFit/>
-          </a:bodyPr>
-          <a:lstStyle/>
-          <a:p>
-            <a:pPr>
-              <a:defRPr sz="1200">
-                <a:solidFill>
-                  <a:srgbClr val="241E19"/>
-                </a:solidFill>
-              </a:defRPr>
-            </a:pPr>
-            <a:r>
-              <a:t>09. 전통 기체조 (태극선법)  |  서양식 필라테스를 배제하고 단전 호흡으로 탁기를 배출하며 기(氣)의 자연스러운 흐름을 복원하는 태극선법 8초식</a:t>
-            </a:r>
-          </a:p>
-        </p:txBody>
-      </p:sp>
-      <p:sp>
-        <p:nvSpPr>
-          <p:cNvPr id="13" name="Rounded Rectangle 12"/>
-          <p:cNvSpPr/>
-          <p:nvPr/>
-        </p:nvSpPr>
-        <p:spPr>
-          <a:xfrm>
-            <a:off x="731520" y="5285232"/>
-            <a:ext cx="10728655" cy="804672"/>
-          </a:xfrm>
-          <a:prstGeom prst="roundRect">
-            <a:avLst/>
-          </a:prstGeom>
-          <a:solidFill>
-            <a:srgbClr val="FFFFFF"/>
-          </a:solidFill>
-          <a:ln w="15240">
-            <a:solidFill>
-              <a:srgbClr val="C9A876"/>
-            </a:solidFill>
-          </a:ln>
-        </p:spPr>
-        <p:style>
-          <a:lnRef idx="1">
-            <a:schemeClr val="accent1"/>
-          </a:lnRef>
-          <a:fillRef idx="3">
-            <a:schemeClr val="accent1"/>
-          </a:fillRef>
-          <a:effectRef idx="2">
-            <a:schemeClr val="accent1"/>
-          </a:effectRef>
-          <a:fontRef idx="minor">
-            <a:schemeClr val="lt1"/>
-          </a:fontRef>
-        </p:style>
-        <p:txBody>
-          <a:bodyPr rtlCol="0" anchor="ctr"/>
-          <a:lstStyle/>
-          <a:p>
-            <a:pPr algn="ctr"/>
-          </a:p>
-        </p:txBody>
-      </p:sp>
-      <p:sp>
-        <p:nvSpPr>
-          <p:cNvPr id="14" name="TextBox 13"/>
-          <p:cNvSpPr txBox="1"/>
-          <p:nvPr/>
-        </p:nvSpPr>
-        <p:spPr>
-          <a:xfrm>
-            <a:off x="914400" y="5394960"/>
-            <a:ext cx="10332720" cy="594360"/>
-          </a:xfrm>
-          <a:prstGeom prst="rect">
-            <a:avLst/>
-          </a:prstGeom>
-          <a:noFill/>
-        </p:spPr>
-        <p:txBody>
-          <a:bodyPr wrap="square">
-            <a:spAutoFit/>
-          </a:bodyPr>
-          <a:lstStyle/>
-          <a:p>
-            <a:pPr>
-              <a:defRPr sz="1200">
-                <a:solidFill>
-                  <a:srgbClr val="241E19"/>
-                </a:solidFill>
-              </a:defRPr>
-            </a:pPr>
-            <a:r>
-              <a:t>10. 멘탈 관리 (한국 정통 고요 명상)  |  서양식 싱잉볼을 배제하고 한국 전통 사찰과 선도(仙道)의 고요한 침묵 명상으로 뇌 피로도 70% 감소</a:t>
-            </a:r>
-          </a:p>
-        </p:txBody>
-      </p:sp>
-    </p:spTree>
-  </p:cSld>
-  <p:clrMapOvr>
-    <a:masterClrMapping/>
-  </p:clrMapOvr>
-</p:sld>
-</file>
-
-<file path=ppt/slides/slide11.xml><?xml version="1.0" encoding="utf-8"?>
-<p:sld xmlns:a="http://schemas.openxmlformats.org/drawingml/2006/main" xmlns:p="http://schemas.openxmlformats.org/presentationml/2006/main" xmlns:r="http://schemas.openxmlformats.org/officeDocument/2006/relationships">
-  <p:cSld>
-    <p:spTree>
-      <p:nvGrpSpPr>
-        <p:cNvPr id="1" name=""/>
-        <p:cNvGrpSpPr/>
-        <p:nvPr/>
-      </p:nvGrpSpPr>
-      <p:grpSpPr/>
-      <p:sp>
-        <p:nvSpPr>
-          <p:cNvPr id="2" name="Rectangle 1"/>
-          <p:cNvSpPr/>
-          <p:nvPr/>
-        </p:nvSpPr>
-        <p:spPr>
-          <a:xfrm>
-            <a:off x="0" y="0"/>
-            <a:ext cx="12191695" cy="6858000"/>
-          </a:xfrm>
-          <a:prstGeom prst="rect">
-            <a:avLst/>
-          </a:prstGeom>
-          <a:solidFill>
-            <a:srgbClr val="FDFBF7"/>
-          </a:solidFill>
-          <a:ln>
-            <a:noFill/>
-          </a:ln>
-        </p:spPr>
-        <p:style>
-          <a:lnRef idx="1">
-            <a:schemeClr val="accent1"/>
-          </a:lnRef>
-          <a:fillRef idx="3">
-            <a:schemeClr val="accent1"/>
-          </a:fillRef>
-          <a:effectRef idx="2">
-            <a:schemeClr val="accent1"/>
-          </a:effectRef>
-          <a:fontRef idx="minor">
-            <a:schemeClr val="lt1"/>
-          </a:fontRef>
-        </p:style>
-        <p:txBody>
-          <a:bodyPr rtlCol="0" anchor="ctr"/>
-          <a:lstStyle/>
-          <a:p>
-            <a:pPr algn="ctr"/>
-          </a:p>
-        </p:txBody>
-      </p:sp>
-      <p:sp>
-        <p:nvSpPr>
-          <p:cNvPr id="3" name="TextBox 2"/>
-          <p:cNvSpPr txBox="1"/>
-          <p:nvPr/>
-        </p:nvSpPr>
-        <p:spPr>
-          <a:xfrm>
-            <a:off x="731520" y="411480"/>
-            <a:ext cx="10515600" cy="365760"/>
-          </a:xfrm>
-          <a:prstGeom prst="rect">
-            <a:avLst/>
-          </a:prstGeom>
-          <a:noFill/>
-        </p:spPr>
-        <p:txBody>
-          <a:bodyPr wrap="square">
-            <a:spAutoFit/>
-          </a:bodyPr>
-          <a:lstStyle/>
-          <a:p>
-            <a:pPr>
-              <a:defRPr sz="1000" b="1">
-                <a:solidFill>
-                  <a:srgbClr val="A37F48"/>
-                </a:solidFill>
-              </a:defRPr>
-            </a:pPr>
-            <a:r>
-              <a:t>K-PREMIUM WELLNESS SPA 2026</a:t>
-            </a:r>
-          </a:p>
-        </p:txBody>
-      </p:sp>
-      <p:sp>
-        <p:nvSpPr>
-          <p:cNvPr id="4" name="TextBox 3"/>
-          <p:cNvSpPr txBox="1"/>
-          <p:nvPr/>
-        </p:nvSpPr>
-        <p:spPr>
-          <a:xfrm>
-            <a:off x="731520" y="685800"/>
-            <a:ext cx="10515600" cy="731520"/>
-          </a:xfrm>
-          <a:prstGeom prst="rect">
-            <a:avLst/>
-          </a:prstGeom>
-          <a:noFill/>
-        </p:spPr>
-        <p:txBody>
-          <a:bodyPr wrap="square">
-            <a:spAutoFit/>
-          </a:bodyPr>
-          <a:lstStyle/>
-          <a:p>
-            <a:pPr>
-              <a:defRPr sz="2200" b="1">
-                <a:solidFill>
-                  <a:srgbClr val="241E19"/>
-                </a:solidFill>
-              </a:defRPr>
-            </a:pPr>
-            <a:r>
-              <a:t>슈리베다식 푸드 테라피 : 12시간 단식 &amp; 4대 체질 미역국</a:t>
-            </a:r>
-          </a:p>
-        </p:txBody>
-      </p:sp>
-      <p:sp>
-        <p:nvSpPr>
-          <p:cNvPr id="5" name="Rounded Rectangle 4"/>
-          <p:cNvSpPr/>
-          <p:nvPr/>
-        </p:nvSpPr>
-        <p:spPr>
-          <a:xfrm>
-            <a:off x="731520" y="1554480"/>
-            <a:ext cx="5120640" cy="4663440"/>
-          </a:xfrm>
-          <a:prstGeom prst="roundRect">
-            <a:avLst/>
-          </a:prstGeom>
-          <a:solidFill>
-            <a:srgbClr val="1A3328"/>
-          </a:solidFill>
-          <a:ln w="15240">
-            <a:solidFill>
-              <a:srgbClr val="C9A876"/>
-            </a:solidFill>
-          </a:ln>
-        </p:spPr>
-        <p:style>
-          <a:lnRef idx="1">
-            <a:schemeClr val="accent1"/>
-          </a:lnRef>
-          <a:fillRef idx="3">
-            <a:schemeClr val="accent1"/>
-          </a:fillRef>
-          <a:effectRef idx="2">
-            <a:schemeClr val="accent1"/>
-          </a:effectRef>
-          <a:fontRef idx="minor">
-            <a:schemeClr val="lt1"/>
-          </a:fontRef>
-        </p:style>
-        <p:txBody>
-          <a:bodyPr rtlCol="0" anchor="ctr"/>
-          <a:lstStyle/>
-          <a:p>
-            <a:pPr algn="ctr"/>
-          </a:p>
-        </p:txBody>
-      </p:sp>
-      <p:sp>
-        <p:nvSpPr>
-          <p:cNvPr id="6" name="TextBox 5"/>
-          <p:cNvSpPr txBox="1"/>
-          <p:nvPr/>
-        </p:nvSpPr>
-        <p:spPr>
-          <a:xfrm>
-            <a:off x="1005840" y="1828800"/>
-            <a:ext cx="4572000" cy="4114800"/>
-          </a:xfrm>
-          <a:prstGeom prst="rect">
-            <a:avLst/>
-          </a:prstGeom>
-          <a:noFill/>
-        </p:spPr>
-        <p:txBody>
-          <a:bodyPr wrap="square">
-            <a:spAutoFit/>
-          </a:bodyPr>
-          <a:lstStyle/>
-          <a:p>
-            <a:pPr>
-              <a:spcAft>
-                <a:spcPts val="1200"/>
-              </a:spcAft>
-              <a:defRPr sz="1700" b="1">
-                <a:solidFill>
-                  <a:srgbClr val="C9A876"/>
-                </a:solidFill>
-              </a:defRPr>
-            </a:pPr>
-            <a:r>
-              <a:t>12시간 단식 자가포식(Autophagy) 프로토콜</a:t>
-            </a:r>
-          </a:p>
-          <a:p>
-            <a:pPr>
-              <a:lnSpc>
-                <a:spcPct val="135000"/>
-              </a:lnSpc>
-              <a:defRPr sz="1200">
-                <a:solidFill>
-                  <a:srgbClr val="DCD7C8"/>
-                </a:solidFill>
-              </a:defRPr>
-            </a:pPr>
-            <a:r>
-              <a:t>• 18:00 저녁 약선 식사 종료 및 12시간 단식 돌입</a:t>
-            </a:r>
-            <a:br/>
-            <a:r>
-              <a:t>• 20:00 산화질소(NO) 수 음용 &amp; 30분 침묵 명상</a:t>
-            </a:r>
-            <a:br/>
-            <a:r>
-              <a:t>• 06:00 12시간 단식 완료 ➔ 기상 직후 미온수 &amp; 체질 주스</a:t>
-            </a:r>
-            <a:br/>
-            <a:r>
-              <a:t>• 07:30 4대 체질 맞춤 영양 미역국 조식 정식 제공</a:t>
-            </a:r>
-            <a:br/>
-            <a:br/>
-            <a:r>
-              <a:t>💡 자가포식 효과: 12시간 동안 소화기를 완전히 쉬게 함으로써 세포 내 손상된 단백질과 노폐물을 청소하고 장내 미생물 환경을 리셋합니다.</a:t>
-            </a:r>
-          </a:p>
-        </p:txBody>
-      </p:sp>
-      <p:sp>
-        <p:nvSpPr>
-          <p:cNvPr id="7" name="Rounded Rectangle 6"/>
-          <p:cNvSpPr/>
-          <p:nvPr/>
-        </p:nvSpPr>
-        <p:spPr>
-          <a:xfrm>
-            <a:off x="6217920" y="1554480"/>
-            <a:ext cx="5212080" cy="4663440"/>
-          </a:xfrm>
-          <a:prstGeom prst="roundRect">
-            <a:avLst/>
-          </a:prstGeom>
-          <a:solidFill>
-            <a:srgbClr val="FFFFFF"/>
-          </a:solidFill>
-          <a:ln w="15240">
-            <a:solidFill>
-              <a:srgbClr val="C9A876"/>
-            </a:solidFill>
-          </a:ln>
-        </p:spPr>
-        <p:style>
-          <a:lnRef idx="1">
-            <a:schemeClr val="accent1"/>
-          </a:lnRef>
-          <a:fillRef idx="3">
-            <a:schemeClr val="accent1"/>
-          </a:fillRef>
-          <a:effectRef idx="2">
-            <a:schemeClr val="accent1"/>
-          </a:effectRef>
-          <a:fontRef idx="minor">
-            <a:schemeClr val="lt1"/>
-          </a:fontRef>
-        </p:style>
-        <p:txBody>
-          <a:bodyPr rtlCol="0" anchor="ctr"/>
-          <a:lstStyle/>
-          <a:p>
-            <a:pPr algn="ctr"/>
-          </a:p>
-        </p:txBody>
-      </p:sp>
-      <p:sp>
-        <p:nvSpPr>
-          <p:cNvPr id="8" name="TextBox 7"/>
-          <p:cNvSpPr txBox="1"/>
-          <p:nvPr/>
-        </p:nvSpPr>
-        <p:spPr>
-          <a:xfrm>
-            <a:off x="6492240" y="1828800"/>
-            <a:ext cx="4663440" cy="4114800"/>
-          </a:xfrm>
-          <a:prstGeom prst="rect">
-            <a:avLst/>
-          </a:prstGeom>
-          <a:noFill/>
-        </p:spPr>
-        <p:txBody>
-          <a:bodyPr wrap="square">
-            <a:spAutoFit/>
-          </a:bodyPr>
-          <a:lstStyle/>
-          <a:p>
-            <a:pPr>
-              <a:spcAft>
-                <a:spcPts val="1200"/>
-              </a:spcAft>
-              <a:defRPr sz="1700" b="1">
-                <a:solidFill>
-                  <a:srgbClr val="241E19"/>
-                </a:solidFill>
-              </a:defRPr>
-            </a:pPr>
-            <a:r>
-              <a:t>4대 체질 맞춤 프리미엄 미역국 조식</a:t>
-            </a:r>
-          </a:p>
-          <a:p>
-            <a:pPr>
-              <a:spcAft>
-                <a:spcPts val="600"/>
-              </a:spcAft>
-              <a:defRPr sz="1150">
-                <a:solidFill>
-                  <a:srgbClr val="52463C"/>
-                </a:solidFill>
-              </a:defRPr>
-            </a:pPr>
-            <a:r>
-              <a:t>• 태음인: 소고기 양지 들깨 미역국 + 율무밥 (폐/기관지 윤활 &amp; 고단백)</a:t>
-            </a:r>
-          </a:p>
-          <a:p>
-            <a:pPr>
-              <a:spcAft>
-                <a:spcPts val="600"/>
-              </a:spcAft>
-              <a:defRPr sz="1150">
-                <a:solidFill>
-                  <a:srgbClr val="52463C"/>
-                </a:solidFill>
-              </a:defRPr>
-            </a:pPr>
-            <a:r>
-              <a:t>• 소양인: 맑은 돼지고기 수육 미역국 or 조개 미역국 + 보리밥 (소화기 열 해독)</a:t>
-            </a:r>
-          </a:p>
-          <a:p>
-            <a:pPr>
-              <a:spcAft>
-                <a:spcPts val="600"/>
-              </a:spcAft>
-              <a:defRPr sz="1150">
-                <a:solidFill>
-                  <a:srgbClr val="52463C"/>
-                </a:solidFill>
-              </a:defRPr>
-            </a:pPr>
-            <a:r>
-              <a:t>• 소음인: 닭가슴살 황기 보양 미역국 + 찹쌀밥 (위장 보온 &amp; 기력 증진)</a:t>
-            </a:r>
-          </a:p>
-          <a:p>
-            <a:pPr>
-              <a:spcAft>
-                <a:spcPts val="600"/>
-              </a:spcAft>
-              <a:defRPr sz="1150">
-                <a:solidFill>
-                  <a:srgbClr val="52463C"/>
-                </a:solidFill>
-              </a:defRPr>
-            </a:pPr>
-            <a:r>
-              <a:t>• 태양인: 완도산 전복 홍합 맑은 해물 미역국 + 메밀죽 (간 해독 &amp; 하체 강화)</a:t>
-            </a:r>
-          </a:p>
-        </p:txBody>
-      </p:sp>
-    </p:spTree>
-  </p:cSld>
-  <p:clrMapOvr>
-    <a:masterClrMapping/>
-  </p:clrMapOvr>
-</p:sld>
-</file>
-
-<file path=ppt/slides/slide12.xml><?xml version="1.0" encoding="utf-8"?>
-<p:sld xmlns:a="http://schemas.openxmlformats.org/drawingml/2006/main" xmlns:p="http://schemas.openxmlformats.org/presentationml/2006/main" xmlns:r="http://schemas.openxmlformats.org/officeDocument/2006/relationships">
-  <p:cSld>
-    <p:spTree>
-      <p:nvGrpSpPr>
-        <p:cNvPr id="1" name=""/>
-        <p:cNvGrpSpPr/>
-        <p:nvPr/>
-      </p:nvGrpSpPr>
-      <p:grpSpPr/>
-      <p:sp>
-        <p:nvSpPr>
-          <p:cNvPr id="2" name="Rectangle 1"/>
-          <p:cNvSpPr/>
-          <p:nvPr/>
-        </p:nvSpPr>
-        <p:spPr>
-          <a:xfrm>
-            <a:off x="0" y="0"/>
-            <a:ext cx="12191695" cy="6858000"/>
-          </a:xfrm>
-          <a:prstGeom prst="rect">
-            <a:avLst/>
-          </a:prstGeom>
-          <a:solidFill>
-            <a:srgbClr val="FDFBF7"/>
-          </a:solidFill>
-          <a:ln>
-            <a:noFill/>
-          </a:ln>
-        </p:spPr>
-        <p:style>
-          <a:lnRef idx="1">
-            <a:schemeClr val="accent1"/>
-          </a:lnRef>
-          <a:fillRef idx="3">
-            <a:schemeClr val="accent1"/>
-          </a:fillRef>
-          <a:effectRef idx="2">
-            <a:schemeClr val="accent1"/>
-          </a:effectRef>
-          <a:fontRef idx="minor">
-            <a:schemeClr val="lt1"/>
-          </a:fontRef>
-        </p:style>
-        <p:txBody>
-          <a:bodyPr rtlCol="0" anchor="ctr"/>
-          <a:lstStyle/>
-          <a:p>
-            <a:pPr algn="ctr"/>
-          </a:p>
-        </p:txBody>
-      </p:sp>
-      <p:sp>
-        <p:nvSpPr>
-          <p:cNvPr id="3" name="TextBox 2"/>
-          <p:cNvSpPr txBox="1"/>
-          <p:nvPr/>
-        </p:nvSpPr>
-        <p:spPr>
-          <a:xfrm>
-            <a:off x="731520" y="411480"/>
-            <a:ext cx="10515600" cy="365760"/>
-          </a:xfrm>
-          <a:prstGeom prst="rect">
-            <a:avLst/>
-          </a:prstGeom>
-          <a:noFill/>
-        </p:spPr>
-        <p:txBody>
-          <a:bodyPr wrap="square">
-            <a:spAutoFit/>
-          </a:bodyPr>
-          <a:lstStyle/>
-          <a:p>
-            <a:pPr>
-              <a:defRPr sz="1000" b="1">
-                <a:solidFill>
-                  <a:srgbClr val="A37F48"/>
-                </a:solidFill>
-              </a:defRPr>
-            </a:pPr>
-            <a:r>
-              <a:t>K-PREMIUM WELLNESS SPA 2026</a:t>
-            </a:r>
-          </a:p>
-        </p:txBody>
-      </p:sp>
-      <p:sp>
-        <p:nvSpPr>
-          <p:cNvPr id="4" name="TextBox 3"/>
-          <p:cNvSpPr txBox="1"/>
-          <p:nvPr/>
-        </p:nvSpPr>
-        <p:spPr>
-          <a:xfrm>
-            <a:off x="731520" y="685800"/>
-            <a:ext cx="10515600" cy="731520"/>
-          </a:xfrm>
-          <a:prstGeom prst="rect">
-            <a:avLst/>
-          </a:prstGeom>
-          <a:noFill/>
-        </p:spPr>
-        <p:txBody>
-          <a:bodyPr wrap="square">
-            <a:spAutoFit/>
-          </a:bodyPr>
-          <a:lstStyle/>
-          <a:p>
-            <a:pPr>
-              <a:defRPr sz="2200" b="1">
-                <a:solidFill>
-                  <a:srgbClr val="241E19"/>
-                </a:solidFill>
-              </a:defRPr>
-            </a:pPr>
-            <a:r>
-              <a:t>데이터 기반 4단계 정밀 분석 및 체질 확정 시스템</a:t>
-            </a:r>
-          </a:p>
-        </p:txBody>
-      </p:sp>
-      <p:sp>
-        <p:nvSpPr>
-          <p:cNvPr id="5" name="Rounded Rectangle 4"/>
-          <p:cNvSpPr/>
-          <p:nvPr/>
-        </p:nvSpPr>
-        <p:spPr>
-          <a:xfrm>
-            <a:off x="731520" y="1554480"/>
-            <a:ext cx="2560320" cy="4663440"/>
-          </a:xfrm>
-          <a:prstGeom prst="roundRect">
-            <a:avLst/>
-          </a:prstGeom>
-          <a:solidFill>
-            <a:srgbClr val="FFFFFF"/>
-          </a:solidFill>
-          <a:ln w="15240">
-            <a:solidFill>
-              <a:srgbClr val="C9A876"/>
-            </a:solidFill>
-          </a:ln>
-        </p:spPr>
-        <p:style>
-          <a:lnRef idx="1">
-            <a:schemeClr val="accent1"/>
-          </a:lnRef>
-          <a:fillRef idx="3">
-            <a:schemeClr val="accent1"/>
-          </a:fillRef>
-          <a:effectRef idx="2">
-            <a:schemeClr val="accent1"/>
-          </a:effectRef>
-          <a:fontRef idx="minor">
-            <a:schemeClr val="lt1"/>
-          </a:fontRef>
-        </p:style>
-        <p:txBody>
-          <a:bodyPr rtlCol="0" anchor="ctr"/>
-          <a:lstStyle/>
-          <a:p>
-            <a:pPr algn="ctr"/>
-          </a:p>
-        </p:txBody>
-      </p:sp>
-      <p:sp>
-        <p:nvSpPr>
-          <p:cNvPr id="6" name="TextBox 5"/>
-          <p:cNvSpPr txBox="1"/>
-          <p:nvPr/>
-        </p:nvSpPr>
-        <p:spPr>
-          <a:xfrm>
-            <a:off x="868680" y="1737360"/>
-            <a:ext cx="2286000" cy="4297680"/>
-          </a:xfrm>
-          <a:prstGeom prst="rect">
-            <a:avLst/>
-          </a:prstGeom>
-          <a:noFill/>
-        </p:spPr>
-        <p:txBody>
-          <a:bodyPr wrap="square">
-            <a:spAutoFit/>
-          </a:bodyPr>
-          <a:lstStyle/>
-          <a:p>
-            <a:pPr>
-              <a:defRPr sz="1300" b="1">
-                <a:solidFill>
-                  <a:srgbClr val="A37F48"/>
-                </a:solidFill>
-              </a:defRPr>
-            </a:pPr>
-            <a:r>
-              <a:t>STEP 01</a:t>
-            </a:r>
-          </a:p>
-          <a:p>
-            <a:pPr>
-              <a:spcAft>
-                <a:spcPts val="1000"/>
-              </a:spcAft>
-              <a:defRPr sz="1400" b="1">
-                <a:solidFill>
-                  <a:srgbClr val="241E19"/>
-                </a:solidFill>
-              </a:defRPr>
-            </a:pPr>
-            <a:r>
-              <a:t>기초 생체 &amp; 병력 문진표</a:t>
-            </a:r>
-          </a:p>
-          <a:p>
-            <a:pPr>
-              <a:lnSpc>
-                <a:spcPct val="130000"/>
-              </a:lnSpc>
-              <a:defRPr sz="1100">
-                <a:solidFill>
-                  <a:srgbClr val="52463C"/>
-                </a:solidFill>
-              </a:defRPr>
-            </a:pPr>
-            <a:r>
-              <a:t>• 혈압, 공복 혈당, 가족력(심혈관/암)</a:t>
-            </a:r>
-            <a:br/>
-            <a:r>
-              <a:t>• 담낭 절제 등 주요 수술력 기록</a:t>
-            </a:r>
-            <a:br/>
-            <a:r>
-              <a:t>• 개인별 알레르기 인자 전방위 분석</a:t>
-            </a:r>
-          </a:p>
-        </p:txBody>
-      </p:sp>
-      <p:sp>
-        <p:nvSpPr>
-          <p:cNvPr id="7" name="Rounded Rectangle 6"/>
-          <p:cNvSpPr/>
-          <p:nvPr/>
-        </p:nvSpPr>
-        <p:spPr>
-          <a:xfrm>
-            <a:off x="3429000" y="1554480"/>
-            <a:ext cx="2560320" cy="4663440"/>
-          </a:xfrm>
-          <a:prstGeom prst="roundRect">
-            <a:avLst/>
-          </a:prstGeom>
-          <a:solidFill>
-            <a:srgbClr val="FFFFFF"/>
-          </a:solidFill>
-          <a:ln w="15240">
-            <a:solidFill>
-              <a:srgbClr val="C9A876"/>
-            </a:solidFill>
-          </a:ln>
-        </p:spPr>
-        <p:style>
-          <a:lnRef idx="1">
-            <a:schemeClr val="accent1"/>
-          </a:lnRef>
-          <a:fillRef idx="3">
-            <a:schemeClr val="accent1"/>
-          </a:fillRef>
-          <a:effectRef idx="2">
-            <a:schemeClr val="accent1"/>
-          </a:effectRef>
-          <a:fontRef idx="minor">
-            <a:schemeClr val="lt1"/>
-          </a:fontRef>
-        </p:style>
-        <p:txBody>
-          <a:bodyPr rtlCol="0" anchor="ctr"/>
-          <a:lstStyle/>
-          <a:p>
-            <a:pPr algn="ctr"/>
-          </a:p>
-        </p:txBody>
-      </p:sp>
-      <p:sp>
-        <p:nvSpPr>
-          <p:cNvPr id="8" name="TextBox 7"/>
-          <p:cNvSpPr txBox="1"/>
-          <p:nvPr/>
-        </p:nvSpPr>
-        <p:spPr>
-          <a:xfrm>
-            <a:off x="3566160" y="1737360"/>
-            <a:ext cx="2286000" cy="4297680"/>
-          </a:xfrm>
-          <a:prstGeom prst="rect">
-            <a:avLst/>
-          </a:prstGeom>
-          <a:noFill/>
-        </p:spPr>
-        <p:txBody>
-          <a:bodyPr wrap="square">
-            <a:spAutoFit/>
-          </a:bodyPr>
-          <a:lstStyle/>
-          <a:p>
-            <a:pPr>
-              <a:defRPr sz="1300" b="1">
-                <a:solidFill>
-                  <a:srgbClr val="A37F48"/>
-                </a:solidFill>
-              </a:defRPr>
-            </a:pPr>
-            <a:r>
-              <a:t>STEP 02</a:t>
-            </a:r>
-          </a:p>
-          <a:p>
-            <a:pPr>
-              <a:spcAft>
-                <a:spcPts val="1000"/>
-              </a:spcAft>
-              <a:defRPr sz="1400" b="1">
-                <a:solidFill>
-                  <a:srgbClr val="241E19"/>
-                </a:solidFill>
-              </a:defRPr>
-            </a:pPr>
-            <a:r>
-              <a:t>인바디 &amp; 양자/뇌파(EEG)</a:t>
-            </a:r>
-          </a:p>
-          <a:p>
-            <a:pPr>
-              <a:lnSpc>
-                <a:spcPct val="130000"/>
-              </a:lnSpc>
-              <a:defRPr sz="1100">
-                <a:solidFill>
-                  <a:srgbClr val="52463C"/>
-                </a:solidFill>
-              </a:defRPr>
-            </a:pPr>
-            <a:r>
-              <a:t>• InBody 770 체수분율 &amp; 림프 정체</a:t>
-            </a:r>
-            <a:br/>
-            <a:r>
-              <a:t>• 장부 에너지 과부하/결핍 판독</a:t>
-            </a:r>
-            <a:br/>
-            <a:r>
-              <a:t>• High-Beta파 68% 뇌 피로 지수 측정</a:t>
-            </a:r>
-          </a:p>
-        </p:txBody>
-      </p:sp>
-      <p:sp>
-        <p:nvSpPr>
-          <p:cNvPr id="9" name="Rounded Rectangle 8"/>
-          <p:cNvSpPr/>
-          <p:nvPr/>
-        </p:nvSpPr>
-        <p:spPr>
-          <a:xfrm>
-            <a:off x="6126480" y="1554480"/>
-            <a:ext cx="2560320" cy="4663440"/>
-          </a:xfrm>
-          <a:prstGeom prst="roundRect">
-            <a:avLst/>
-          </a:prstGeom>
-          <a:solidFill>
-            <a:srgbClr val="FFFFFF"/>
-          </a:solidFill>
-          <a:ln w="15240">
-            <a:solidFill>
-              <a:srgbClr val="C9A876"/>
-            </a:solidFill>
-          </a:ln>
-        </p:spPr>
-        <p:style>
-          <a:lnRef idx="1">
-            <a:schemeClr val="accent1"/>
-          </a:lnRef>
-          <a:fillRef idx="3">
-            <a:schemeClr val="accent1"/>
-          </a:fillRef>
-          <a:effectRef idx="2">
-            <a:schemeClr val="accent1"/>
-          </a:effectRef>
-          <a:fontRef idx="minor">
-            <a:schemeClr val="lt1"/>
-          </a:fontRef>
-        </p:style>
-        <p:txBody>
-          <a:bodyPr rtlCol="0" anchor="ctr"/>
-          <a:lstStyle/>
-          <a:p>
-            <a:pPr algn="ctr"/>
-          </a:p>
-        </p:txBody>
-      </p:sp>
-      <p:sp>
-        <p:nvSpPr>
-          <p:cNvPr id="10" name="TextBox 9"/>
-          <p:cNvSpPr txBox="1"/>
-          <p:nvPr/>
-        </p:nvSpPr>
-        <p:spPr>
-          <a:xfrm>
-            <a:off x="6263640" y="1737360"/>
-            <a:ext cx="2286000" cy="4297680"/>
-          </a:xfrm>
-          <a:prstGeom prst="rect">
-            <a:avLst/>
-          </a:prstGeom>
-          <a:noFill/>
-        </p:spPr>
-        <p:txBody>
-          <a:bodyPr wrap="square">
-            <a:spAutoFit/>
-          </a:bodyPr>
-          <a:lstStyle/>
-          <a:p>
-            <a:pPr>
-              <a:defRPr sz="1300" b="1">
-                <a:solidFill>
-                  <a:srgbClr val="A37F48"/>
-                </a:solidFill>
-              </a:defRPr>
-            </a:pPr>
-            <a:r>
-              <a:t>STEP 03</a:t>
-            </a:r>
-          </a:p>
-          <a:p>
-            <a:pPr>
-              <a:spcAft>
-                <a:spcPts val="1000"/>
-              </a:spcAft>
-              <a:defRPr sz="1400" b="1">
-                <a:solidFill>
-                  <a:srgbClr val="241E19"/>
-                </a:solidFill>
-              </a:defRPr>
-            </a:pPr>
-            <a:r>
-              <a:t>산화질소(NO) 관리</a:t>
-            </a:r>
-          </a:p>
-          <a:p>
-            <a:pPr>
-              <a:lnSpc>
-                <a:spcPct val="130000"/>
-              </a:lnSpc>
-              <a:defRPr sz="1100">
-                <a:solidFill>
-                  <a:srgbClr val="52463C"/>
-                </a:solidFill>
-              </a:defRPr>
-            </a:pPr>
-            <a:r>
-              <a:t>• 타액 NO 산화질소 스트립 판독</a:t>
-            </a:r>
-            <a:br/>
-            <a:r>
-              <a:t>• 혈관 탄성도 측정 및 결핍 진단</a:t>
-            </a:r>
-            <a:br/>
-            <a:r>
-              <a:t>• 1일 1.5L 음용 &amp; 나노 미스트 처방</a:t>
-            </a:r>
-          </a:p>
-        </p:txBody>
-      </p:sp>
-      <p:sp>
-        <p:nvSpPr>
-          <p:cNvPr id="11" name="Rounded Rectangle 10"/>
-          <p:cNvSpPr/>
-          <p:nvPr/>
-        </p:nvSpPr>
-        <p:spPr>
-          <a:xfrm>
-            <a:off x="8823960" y="1554480"/>
-            <a:ext cx="2560320" cy="4663440"/>
-          </a:xfrm>
-          <a:prstGeom prst="roundRect">
-            <a:avLst/>
-          </a:prstGeom>
-          <a:solidFill>
-            <a:srgbClr val="FFFFFF"/>
-          </a:solidFill>
-          <a:ln w="15240">
-            <a:solidFill>
-              <a:srgbClr val="C9A876"/>
-            </a:solidFill>
-          </a:ln>
-        </p:spPr>
-        <p:style>
-          <a:lnRef idx="1">
-            <a:schemeClr val="accent1"/>
-          </a:lnRef>
-          <a:fillRef idx="3">
-            <a:schemeClr val="accent1"/>
-          </a:fillRef>
-          <a:effectRef idx="2">
-            <a:schemeClr val="accent1"/>
-          </a:effectRef>
-          <a:fontRef idx="minor">
-            <a:schemeClr val="lt1"/>
-          </a:fontRef>
-        </p:style>
-        <p:txBody>
-          <a:bodyPr rtlCol="0" anchor="ctr"/>
-          <a:lstStyle/>
-          <a:p>
-            <a:pPr algn="ctr"/>
-          </a:p>
-        </p:txBody>
-      </p:sp>
-      <p:sp>
-        <p:nvSpPr>
-          <p:cNvPr id="12" name="TextBox 11"/>
-          <p:cNvSpPr txBox="1"/>
-          <p:nvPr/>
-        </p:nvSpPr>
-        <p:spPr>
-          <a:xfrm>
-            <a:off x="8961120" y="1737360"/>
-            <a:ext cx="2286000" cy="4297680"/>
-          </a:xfrm>
-          <a:prstGeom prst="rect">
-            <a:avLst/>
-          </a:prstGeom>
-          <a:noFill/>
-        </p:spPr>
-        <p:txBody>
-          <a:bodyPr wrap="square">
-            <a:spAutoFit/>
-          </a:bodyPr>
-          <a:lstStyle/>
-          <a:p>
-            <a:pPr>
-              <a:defRPr sz="1300" b="1">
-                <a:solidFill>
-                  <a:srgbClr val="A37F48"/>
-                </a:solidFill>
-              </a:defRPr>
-            </a:pPr>
-            <a:r>
-              <a:t>STEP 04</a:t>
-            </a:r>
-          </a:p>
-          <a:p>
-            <a:pPr>
-              <a:spcAft>
-                <a:spcPts val="1000"/>
-              </a:spcAft>
-              <a:defRPr sz="1400" b="1">
-                <a:solidFill>
-                  <a:srgbClr val="241E19"/>
-                </a:solidFill>
-              </a:defRPr>
-            </a:pPr>
-            <a:r>
-              <a:t>사상체질 최종 확정</a:t>
-            </a:r>
-          </a:p>
-          <a:p>
-            <a:pPr>
-              <a:lnSpc>
-                <a:spcPct val="130000"/>
-              </a:lnSpc>
-              <a:defRPr sz="1100">
-                <a:solidFill>
-                  <a:srgbClr val="52463C"/>
-                </a:solidFill>
-              </a:defRPr>
-            </a:pPr>
-            <a:r>
-              <a:t>• 태음/소양/소음/태양 장부 확정</a:t>
-            </a:r>
-            <a:br/>
-            <a:r>
-              <a:t>• 1:1 맞춤 VIP 웹 처방전 발행</a:t>
-            </a:r>
-            <a:br/>
-            <a:r>
-              <a:t>• 은반지 착용 및 4대 컬러 가운 배정</a:t>
-            </a:r>
-          </a:p>
-        </p:txBody>
-      </p:sp>
-    </p:spTree>
-  </p:cSld>
-  <p:clrMapOvr>
-    <a:masterClrMapping/>
-  </p:clrMapOvr>
-</p:sld>
-</file>
-
-<file path=ppt/slides/slide13.xml><?xml version="1.0" encoding="utf-8"?>
-<p:sld xmlns:a="http://schemas.openxmlformats.org/drawingml/2006/main" xmlns:p="http://schemas.openxmlformats.org/presentationml/2006/main" xmlns:r="http://schemas.openxmlformats.org/officeDocument/2006/relationships">
-  <p:cSld>
-    <p:spTree>
-      <p:nvGrpSpPr>
-        <p:cNvPr id="1" name=""/>
-        <p:cNvGrpSpPr/>
-        <p:nvPr/>
-      </p:nvGrpSpPr>
-      <p:grpSpPr/>
-      <p:sp>
-        <p:nvSpPr>
-          <p:cNvPr id="2" name="Rectangle 1"/>
-          <p:cNvSpPr/>
-          <p:nvPr/>
-        </p:nvSpPr>
-        <p:spPr>
-          <a:xfrm>
-            <a:off x="0" y="0"/>
-            <a:ext cx="12191695" cy="6858000"/>
-          </a:xfrm>
-          <a:prstGeom prst="rect">
-            <a:avLst/>
-          </a:prstGeom>
-          <a:solidFill>
-            <a:srgbClr val="FDFBF7"/>
-          </a:solidFill>
-          <a:ln>
-            <a:noFill/>
-          </a:ln>
-        </p:spPr>
-        <p:style>
-          <a:lnRef idx="1">
-            <a:schemeClr val="accent1"/>
-          </a:lnRef>
-          <a:fillRef idx="3">
-            <a:schemeClr val="accent1"/>
-          </a:fillRef>
-          <a:effectRef idx="2">
-            <a:schemeClr val="accent1"/>
-          </a:effectRef>
-          <a:fontRef idx="minor">
-            <a:schemeClr val="lt1"/>
-          </a:fontRef>
-        </p:style>
-        <p:txBody>
-          <a:bodyPr rtlCol="0" anchor="ctr"/>
-          <a:lstStyle/>
-          <a:p>
-            <a:pPr algn="ctr"/>
-          </a:p>
-        </p:txBody>
-      </p:sp>
-      <p:sp>
-        <p:nvSpPr>
-          <p:cNvPr id="3" name="TextBox 2"/>
-          <p:cNvSpPr txBox="1"/>
-          <p:nvPr/>
-        </p:nvSpPr>
-        <p:spPr>
-          <a:xfrm>
-            <a:off x="731520" y="411480"/>
-            <a:ext cx="10515600" cy="365760"/>
-          </a:xfrm>
-          <a:prstGeom prst="rect">
-            <a:avLst/>
-          </a:prstGeom>
-          <a:noFill/>
-        </p:spPr>
-        <p:txBody>
-          <a:bodyPr wrap="square">
-            <a:spAutoFit/>
-          </a:bodyPr>
-          <a:lstStyle/>
-          <a:p>
-            <a:pPr>
-              <a:defRPr sz="1000" b="1">
-                <a:solidFill>
-                  <a:srgbClr val="A37F48"/>
-                </a:solidFill>
-              </a:defRPr>
-            </a:pPr>
-            <a:r>
-              <a:t>K-PREMIUM WELLNESS SPA 2026</a:t>
-            </a:r>
-          </a:p>
-        </p:txBody>
-      </p:sp>
-      <p:sp>
-        <p:nvSpPr>
-          <p:cNvPr id="4" name="TextBox 3"/>
-          <p:cNvSpPr txBox="1"/>
-          <p:nvPr/>
-        </p:nvSpPr>
-        <p:spPr>
-          <a:xfrm>
-            <a:off x="731520" y="685800"/>
-            <a:ext cx="10515600" cy="731520"/>
-          </a:xfrm>
-          <a:prstGeom prst="rect">
-            <a:avLst/>
-          </a:prstGeom>
-          <a:noFill/>
-        </p:spPr>
-        <p:txBody>
-          <a:bodyPr wrap="square">
-            <a:spAutoFit/>
-          </a:bodyPr>
-          <a:lstStyle/>
-          <a:p>
-            <a:pPr>
-              <a:defRPr sz="2200" b="1">
-                <a:solidFill>
-                  <a:srgbClr val="241E19"/>
-                </a:solidFill>
-              </a:defRPr>
-            </a:pPr>
-            <a:r>
-              <a:t>VIP 맞춤형 4대 체류 프로그램 (Stay Programs)</a:t>
-            </a:r>
-          </a:p>
-        </p:txBody>
-      </p:sp>
-      <p:sp>
-        <p:nvSpPr>
-          <p:cNvPr id="5" name="Rounded Rectangle 4"/>
-          <p:cNvSpPr/>
-          <p:nvPr/>
-        </p:nvSpPr>
-        <p:spPr>
-          <a:xfrm>
-            <a:off x="731520" y="1554480"/>
-            <a:ext cx="5120640" cy="2103120"/>
-          </a:xfrm>
-          <a:prstGeom prst="roundRect">
-            <a:avLst/>
-          </a:prstGeom>
-          <a:solidFill>
-            <a:srgbClr val="FFFFFF"/>
-          </a:solidFill>
-          <a:ln w="15240">
-            <a:solidFill>
-              <a:srgbClr val="C9A876"/>
-            </a:solidFill>
-          </a:ln>
-        </p:spPr>
-        <p:style>
-          <a:lnRef idx="1">
-            <a:schemeClr val="accent1"/>
-          </a:lnRef>
-          <a:fillRef idx="3">
-            <a:schemeClr val="accent1"/>
-          </a:fillRef>
-          <a:effectRef idx="2">
-            <a:schemeClr val="accent1"/>
-          </a:effectRef>
-          <a:fontRef idx="minor">
-            <a:schemeClr val="lt1"/>
-          </a:fontRef>
-        </p:style>
-        <p:txBody>
-          <a:bodyPr rtlCol="0" anchor="ctr"/>
-          <a:lstStyle/>
-          <a:p>
-            <a:pPr algn="ctr"/>
-          </a:p>
-        </p:txBody>
-      </p:sp>
-      <p:sp>
-        <p:nvSpPr>
-          <p:cNvPr id="6" name="TextBox 5"/>
-          <p:cNvSpPr txBox="1"/>
-          <p:nvPr/>
-        </p:nvSpPr>
-        <p:spPr>
-          <a:xfrm>
-            <a:off x="960120" y="1737360"/>
-            <a:ext cx="4663440" cy="1737360"/>
-          </a:xfrm>
-          <a:prstGeom prst="rect">
-            <a:avLst/>
-          </a:prstGeom>
-          <a:noFill/>
-        </p:spPr>
-        <p:txBody>
-          <a:bodyPr wrap="square">
-            <a:spAutoFit/>
-          </a:bodyPr>
-          <a:lstStyle/>
-          <a:p>
-            <a:pPr>
-              <a:spcAft>
-                <a:spcPts val="600"/>
-              </a:spcAft>
-              <a:defRPr sz="1600" b="1">
-                <a:solidFill>
-                  <a:srgbClr val="A37F48"/>
-                </a:solidFill>
-              </a:defRPr>
-            </a:pPr>
-            <a:r>
-              <a:t>2박 3일 (단기 리프레시)</a:t>
-            </a:r>
-          </a:p>
-          <a:p>
-            <a:pPr>
-              <a:lnSpc>
-                <a:spcPct val="120000"/>
-              </a:lnSpc>
-              <a:defRPr sz="1100">
-                <a:solidFill>
-                  <a:srgbClr val="52463C"/>
-                </a:solidFill>
-              </a:defRPr>
-            </a:pPr>
-            <a:r>
-              <a:t>• 대상: 주말 힐링 VIP, 비즈니스 출장객</a:t>
-            </a:r>
-            <a:br/>
-            <a:r>
-              <a:t>• 플로우: 진단 ➔ 족욕 ➔ 80분 바디 ➔ 12h 단식 ➔ 태극선법 ➔ 나노 미스트</a:t>
-            </a:r>
-            <a:br/>
-            <a:r>
-              <a:t>• 효과: 뇌 피로 70% 감소, 근육 긴장 완화, 숙면 유도</a:t>
-            </a:r>
-          </a:p>
-        </p:txBody>
-      </p:sp>
-      <p:sp>
-        <p:nvSpPr>
-          <p:cNvPr id="7" name="Rounded Rectangle 6"/>
-          <p:cNvSpPr/>
-          <p:nvPr/>
-        </p:nvSpPr>
-        <p:spPr>
-          <a:xfrm>
-            <a:off x="6126480" y="1554480"/>
-            <a:ext cx="5120640" cy="2103120"/>
-          </a:xfrm>
-          <a:prstGeom prst="roundRect">
-            <a:avLst/>
-          </a:prstGeom>
-          <a:solidFill>
-            <a:srgbClr val="FFFFFF"/>
-          </a:solidFill>
-          <a:ln w="15240">
-            <a:solidFill>
-              <a:srgbClr val="C9A876"/>
-            </a:solidFill>
-          </a:ln>
-        </p:spPr>
-        <p:style>
-          <a:lnRef idx="1">
-            <a:schemeClr val="accent1"/>
-          </a:lnRef>
-          <a:fillRef idx="3">
-            <a:schemeClr val="accent1"/>
-          </a:fillRef>
-          <a:effectRef idx="2">
-            <a:schemeClr val="accent1"/>
-          </a:effectRef>
-          <a:fontRef idx="minor">
-            <a:schemeClr val="lt1"/>
-          </a:fontRef>
-        </p:style>
-        <p:txBody>
-          <a:bodyPr rtlCol="0" anchor="ctr"/>
-          <a:lstStyle/>
-          <a:p>
-            <a:pPr algn="ctr"/>
-          </a:p>
-        </p:txBody>
-      </p:sp>
-      <p:sp>
-        <p:nvSpPr>
-          <p:cNvPr id="8" name="TextBox 7"/>
-          <p:cNvSpPr txBox="1"/>
-          <p:nvPr/>
-        </p:nvSpPr>
-        <p:spPr>
-          <a:xfrm>
-            <a:off x="6355080" y="1737360"/>
-            <a:ext cx="4663440" cy="1737360"/>
-          </a:xfrm>
-          <a:prstGeom prst="rect">
-            <a:avLst/>
-          </a:prstGeom>
-          <a:noFill/>
-        </p:spPr>
-        <p:txBody>
-          <a:bodyPr wrap="square">
-            <a:spAutoFit/>
-          </a:bodyPr>
-          <a:lstStyle/>
-          <a:p>
-            <a:pPr>
-              <a:spcAft>
-                <a:spcPts val="600"/>
-              </a:spcAft>
-              <a:defRPr sz="1600" b="1">
-                <a:solidFill>
-                  <a:srgbClr val="A37F48"/>
-                </a:solidFill>
-              </a:defRPr>
-            </a:pPr>
-            <a:r>
-              <a:t>5박 6일 (중기 디톡스)</a:t>
-            </a:r>
-          </a:p>
-          <a:p>
-            <a:pPr>
-              <a:lnSpc>
-                <a:spcPct val="120000"/>
-              </a:lnSpc>
-              <a:defRPr sz="1100">
-                <a:solidFill>
-                  <a:srgbClr val="52463C"/>
-                </a:solidFill>
-              </a:defRPr>
-            </a:pPr>
-            <a:r>
-              <a:t>• 대상: 만성 피로 및 림프 부종 보유자</a:t>
-            </a:r>
-            <a:br/>
-            <a:r>
-              <a:t>• 플로우: 1~3일 림프 배농 &amp; 온열(체온 1℃ 상승) ➔ 4~6일 마이크로바이옴 &amp; 기체조</a:t>
-            </a:r>
-            <a:br/>
-            <a:r>
-              <a:t>• 효과: 림프 정체 85% 개선, 안색 정화, 활력 복원</a:t>
-            </a:r>
-          </a:p>
-        </p:txBody>
-      </p:sp>
-      <p:sp>
-        <p:nvSpPr>
-          <p:cNvPr id="9" name="Rounded Rectangle 8"/>
-          <p:cNvSpPr/>
-          <p:nvPr/>
-        </p:nvSpPr>
-        <p:spPr>
-          <a:xfrm>
-            <a:off x="731520" y="3931920"/>
-            <a:ext cx="5120640" cy="2103120"/>
-          </a:xfrm>
-          <a:prstGeom prst="roundRect">
-            <a:avLst/>
-          </a:prstGeom>
-          <a:solidFill>
-            <a:srgbClr val="FFFFFF"/>
-          </a:solidFill>
-          <a:ln w="15240">
-            <a:solidFill>
-              <a:srgbClr val="C9A876"/>
-            </a:solidFill>
-          </a:ln>
-        </p:spPr>
-        <p:style>
-          <a:lnRef idx="1">
-            <a:schemeClr val="accent1"/>
-          </a:lnRef>
-          <a:fillRef idx="3">
-            <a:schemeClr val="accent1"/>
-          </a:fillRef>
-          <a:effectRef idx="2">
-            <a:schemeClr val="accent1"/>
-          </a:effectRef>
-          <a:fontRef idx="minor">
-            <a:schemeClr val="lt1"/>
-          </a:fontRef>
-        </p:style>
-        <p:txBody>
-          <a:bodyPr rtlCol="0" anchor="ctr"/>
-          <a:lstStyle/>
-          <a:p>
-            <a:pPr algn="ctr"/>
-          </a:p>
-        </p:txBody>
-      </p:sp>
-      <p:sp>
-        <p:nvSpPr>
-          <p:cNvPr id="10" name="TextBox 9"/>
-          <p:cNvSpPr txBox="1"/>
-          <p:nvPr/>
-        </p:nvSpPr>
-        <p:spPr>
-          <a:xfrm>
-            <a:off x="960120" y="4114800"/>
-            <a:ext cx="4663440" cy="1737360"/>
-          </a:xfrm>
-          <a:prstGeom prst="rect">
-            <a:avLst/>
-          </a:prstGeom>
-          <a:noFill/>
-        </p:spPr>
-        <p:txBody>
-          <a:bodyPr wrap="square">
-            <a:spAutoFit/>
-          </a:bodyPr>
-          <a:lstStyle/>
-          <a:p>
-            <a:pPr>
-              <a:spcAft>
-                <a:spcPts val="600"/>
-              </a:spcAft>
-              <a:defRPr sz="1600" b="1">
-                <a:solidFill>
-                  <a:srgbClr val="A37F48"/>
-                </a:solidFill>
-              </a:defRPr>
-            </a:pPr>
-            <a:r>
-              <a:t>15박 16일 (장기 리셋)</a:t>
-            </a:r>
-          </a:p>
-          <a:p>
-            <a:pPr>
-              <a:lnSpc>
-                <a:spcPct val="120000"/>
-              </a:lnSpc>
-              <a:defRPr sz="1100">
-                <a:solidFill>
-                  <a:srgbClr val="52463C"/>
-                </a:solidFill>
-              </a:defRPr>
-            </a:pPr>
-            <a:r>
-              <a:t>• 대상: 대사증후군 개선 희망 기업 최고경영진</a:t>
-            </a:r>
-            <a:br/>
-            <a:r>
-              <a:t>• 플로우: DTC 유전자 검사 ➔ 10대 테마 매일 순환 ➔ 1:1 라이프스타일 매뉴얼북</a:t>
-            </a:r>
-            <a:br/>
-            <a:r>
-              <a:t>• 효과: 면역 나이 5년 리셋, 평생 섭생 습관 정착</a:t>
-            </a:r>
-          </a:p>
-        </p:txBody>
-      </p:sp>
-      <p:sp>
-        <p:nvSpPr>
-          <p:cNvPr id="11" name="Rounded Rectangle 10"/>
-          <p:cNvSpPr/>
-          <p:nvPr/>
-        </p:nvSpPr>
-        <p:spPr>
-          <a:xfrm>
-            <a:off x="6126480" y="3931920"/>
-            <a:ext cx="5120640" cy="2103120"/>
-          </a:xfrm>
-          <a:prstGeom prst="roundRect">
-            <a:avLst/>
-          </a:prstGeom>
-          <a:solidFill>
-            <a:srgbClr val="FFFFFF"/>
-          </a:solidFill>
-          <a:ln w="15240">
-            <a:solidFill>
-              <a:srgbClr val="C9A876"/>
-            </a:solidFill>
-          </a:ln>
-        </p:spPr>
-        <p:style>
-          <a:lnRef idx="1">
-            <a:schemeClr val="accent1"/>
-          </a:lnRef>
-          <a:fillRef idx="3">
-            <a:schemeClr val="accent1"/>
-          </a:fillRef>
-          <a:effectRef idx="2">
-            <a:schemeClr val="accent1"/>
-          </a:effectRef>
-          <a:fontRef idx="minor">
-            <a:schemeClr val="lt1"/>
-          </a:fontRef>
-        </p:style>
-        <p:txBody>
-          <a:bodyPr rtlCol="0" anchor="ctr"/>
-          <a:lstStyle/>
-          <a:p>
-            <a:pPr algn="ctr"/>
-          </a:p>
-        </p:txBody>
-      </p:sp>
-      <p:sp>
-        <p:nvSpPr>
-          <p:cNvPr id="12" name="TextBox 11"/>
-          <p:cNvSpPr txBox="1"/>
-          <p:nvPr/>
-        </p:nvSpPr>
-        <p:spPr>
-          <a:xfrm>
-            <a:off x="6355080" y="4114800"/>
-            <a:ext cx="4663440" cy="1737360"/>
-          </a:xfrm>
-          <a:prstGeom prst="rect">
-            <a:avLst/>
-          </a:prstGeom>
-          <a:noFill/>
-        </p:spPr>
-        <p:txBody>
-          <a:bodyPr wrap="square">
-            <a:spAutoFit/>
-          </a:bodyPr>
-          <a:lstStyle/>
-          <a:p>
-            <a:pPr>
-              <a:spcAft>
-                <a:spcPts val="600"/>
-              </a:spcAft>
-              <a:defRPr sz="1600" b="1">
-                <a:solidFill>
-                  <a:srgbClr val="A37F48"/>
-                </a:solidFill>
-              </a:defRPr>
-            </a:pPr>
-            <a:r>
-              <a:t>1개월 (특수 집중 케어)</a:t>
-            </a:r>
-          </a:p>
-          <a:p>
-            <a:pPr>
-              <a:lnSpc>
-                <a:spcPct val="120000"/>
-              </a:lnSpc>
-              <a:defRPr sz="1100">
-                <a:solidFill>
-                  <a:srgbClr val="52463C"/>
-                </a:solidFill>
-              </a:defRPr>
-            </a:pPr>
-            <a:r>
-              <a:t>• 대상: 수술 후 회복기 고객, 고령 시니어 VIP</a:t>
-            </a:r>
-            <a:br/>
-            <a:r>
-              <a:t>• 플로우: 37.5℃ 무자극 족욕 ➔ 프랑킨센스 세포 진정 ➔ 면역 NK세포 증대</a:t>
-            </a:r>
-            <a:br/>
-            <a:r>
-              <a:t>• 시설: 프라이빗 단독 빌라 및 메디컬 스파 룸 배정</a:t>
-            </a:r>
-          </a:p>
-        </p:txBody>
-      </p:sp>
-    </p:spTree>
-  </p:cSld>
-  <p:clrMapOvr>
-    <a:masterClrMapping/>
-  </p:clrMapOvr>
-</p:sld>
-</file>
-
-<file path=ppt/slides/slide14.xml><?xml version="1.0" encoding="utf-8"?>
-<p:sld xmlns:a="http://schemas.openxmlformats.org/drawingml/2006/main" xmlns:p="http://schemas.openxmlformats.org/presentationml/2006/main" xmlns:r="http://schemas.openxmlformats.org/officeDocument/2006/relationships">
-  <p:cSld>
-    <p:spTree>
-      <p:nvGrpSpPr>
-        <p:cNvPr id="1" name=""/>
-        <p:cNvGrpSpPr/>
-        <p:nvPr/>
-      </p:nvGrpSpPr>
-      <p:grpSpPr/>
-      <p:sp>
-        <p:nvSpPr>
-          <p:cNvPr id="2" name="Rectangle 1"/>
-          <p:cNvSpPr/>
-          <p:nvPr/>
-        </p:nvSpPr>
-        <p:spPr>
-          <a:xfrm>
-            <a:off x="0" y="0"/>
-            <a:ext cx="12191695" cy="6858000"/>
-          </a:xfrm>
-          <a:prstGeom prst="rect">
-            <a:avLst/>
-          </a:prstGeom>
-          <a:solidFill>
-            <a:srgbClr val="FDFBF7"/>
-          </a:solidFill>
-          <a:ln>
-            <a:noFill/>
-          </a:ln>
-        </p:spPr>
-        <p:style>
-          <a:lnRef idx="1">
-            <a:schemeClr val="accent1"/>
-          </a:lnRef>
-          <a:fillRef idx="3">
-            <a:schemeClr val="accent1"/>
-          </a:fillRef>
-          <a:effectRef idx="2">
-            <a:schemeClr val="accent1"/>
-          </a:effectRef>
-          <a:fontRef idx="minor">
-            <a:schemeClr val="lt1"/>
-          </a:fontRef>
-        </p:style>
-        <p:txBody>
-          <a:bodyPr rtlCol="0" anchor="ctr"/>
-          <a:lstStyle/>
-          <a:p>
-            <a:pPr algn="ctr"/>
-          </a:p>
-        </p:txBody>
-      </p:sp>
-      <p:sp>
-        <p:nvSpPr>
-          <p:cNvPr id="3" name="TextBox 2"/>
-          <p:cNvSpPr txBox="1"/>
-          <p:nvPr/>
-        </p:nvSpPr>
-        <p:spPr>
-          <a:xfrm>
-            <a:off x="731520" y="411480"/>
-            <a:ext cx="10515600" cy="365760"/>
-          </a:xfrm>
-          <a:prstGeom prst="rect">
-            <a:avLst/>
-          </a:prstGeom>
-          <a:noFill/>
-        </p:spPr>
-        <p:txBody>
-          <a:bodyPr wrap="square">
-            <a:spAutoFit/>
-          </a:bodyPr>
-          <a:lstStyle/>
-          <a:p>
-            <a:pPr>
-              <a:defRPr sz="1000" b="1">
-                <a:solidFill>
-                  <a:srgbClr val="A37F48"/>
-                </a:solidFill>
-              </a:defRPr>
-            </a:pPr>
-            <a:r>
-              <a:t>K-PREMIUM WELLNESS SPA 2026</a:t>
-            </a:r>
-          </a:p>
-        </p:txBody>
-      </p:sp>
-      <p:sp>
-        <p:nvSpPr>
-          <p:cNvPr id="4" name="TextBox 3"/>
-          <p:cNvSpPr txBox="1"/>
-          <p:nvPr/>
-        </p:nvSpPr>
-        <p:spPr>
-          <a:xfrm>
-            <a:off x="731520" y="685800"/>
-            <a:ext cx="10515600" cy="731520"/>
-          </a:xfrm>
-          <a:prstGeom prst="rect">
-            <a:avLst/>
-          </a:prstGeom>
-          <a:noFill/>
-        </p:spPr>
-        <p:txBody>
-          <a:bodyPr wrap="square">
-            <a:spAutoFit/>
-          </a:bodyPr>
-          <a:lstStyle/>
-          <a:p>
-            <a:pPr>
-              <a:defRPr sz="2200" b="1">
-                <a:solidFill>
-                  <a:srgbClr val="241E19"/>
-                </a:solidFill>
-              </a:defRPr>
-            </a:pPr>
-            <a:r>
-              <a:t>VIP 멤버십 &amp; 바이오 LTV 비즈니스 모델</a:t>
-            </a:r>
-          </a:p>
-        </p:txBody>
-      </p:sp>
-      <p:sp>
-        <p:nvSpPr>
-          <p:cNvPr id="5" name="Rounded Rectangle 4"/>
-          <p:cNvSpPr/>
-          <p:nvPr/>
-        </p:nvSpPr>
-        <p:spPr>
-          <a:xfrm>
-            <a:off x="731520" y="1554480"/>
-            <a:ext cx="3383280" cy="4663440"/>
-          </a:xfrm>
-          <a:prstGeom prst="roundRect">
-            <a:avLst/>
-          </a:prstGeom>
-          <a:solidFill>
-            <a:srgbClr val="F8F5EE"/>
-          </a:solidFill>
-          <a:ln w="15240">
-            <a:solidFill>
-              <a:srgbClr val="C9A876"/>
-            </a:solidFill>
-          </a:ln>
-        </p:spPr>
-        <p:style>
-          <a:lnRef idx="1">
-            <a:schemeClr val="accent1"/>
-          </a:lnRef>
-          <a:fillRef idx="3">
-            <a:schemeClr val="accent1"/>
-          </a:fillRef>
-          <a:effectRef idx="2">
-            <a:schemeClr val="accent1"/>
-          </a:effectRef>
-          <a:fontRef idx="minor">
-            <a:schemeClr val="lt1"/>
-          </a:fontRef>
-        </p:style>
-        <p:txBody>
-          <a:bodyPr rtlCol="0" anchor="ctr"/>
-          <a:lstStyle/>
-          <a:p>
-            <a:pPr algn="ctr"/>
-          </a:p>
-        </p:txBody>
-      </p:sp>
-      <p:sp>
-        <p:nvSpPr>
-          <p:cNvPr id="6" name="TextBox 5"/>
-          <p:cNvSpPr txBox="1"/>
-          <p:nvPr/>
-        </p:nvSpPr>
-        <p:spPr>
-          <a:xfrm>
-            <a:off x="914400" y="1828800"/>
-            <a:ext cx="3017520" cy="4114800"/>
-          </a:xfrm>
-          <a:prstGeom prst="rect">
-            <a:avLst/>
-          </a:prstGeom>
-          <a:noFill/>
-        </p:spPr>
-        <p:txBody>
-          <a:bodyPr wrap="square">
-            <a:spAutoFit/>
-          </a:bodyPr>
-          <a:lstStyle/>
-          <a:p>
-            <a:pPr>
-              <a:spcAft>
-                <a:spcPts val="1400"/>
-              </a:spcAft>
-              <a:defRPr sz="1600" b="1">
-                <a:solidFill>
-                  <a:srgbClr val="1E5037"/>
-                </a:solidFill>
-              </a:defRPr>
-            </a:pPr>
-            <a:r>
-              <a:t>Step 01. 스파 방문 &amp; 키트 채취</a:t>
-            </a:r>
-          </a:p>
-          <a:p>
-            <a:pPr>
-              <a:lnSpc>
-                <a:spcPct val="135000"/>
-              </a:lnSpc>
-              <a:defRPr sz="1200">
-                <a:solidFill>
-                  <a:srgbClr val="52463C"/>
-                </a:solidFill>
-              </a:defRPr>
-            </a:pPr>
-            <a:r>
-              <a:t>스파 체크인 시 타액 및 장내 미생물(마이크로바이옴) 키트를 채취하여 전문 분석 기관에 실시간 의뢰.</a:t>
-            </a:r>
-          </a:p>
-        </p:txBody>
-      </p:sp>
-      <p:sp>
-        <p:nvSpPr>
-          <p:cNvPr id="7" name="Rounded Rectangle 6"/>
-          <p:cNvSpPr/>
-          <p:nvPr/>
-        </p:nvSpPr>
-        <p:spPr>
-          <a:xfrm>
-            <a:off x="4343400" y="1554480"/>
-            <a:ext cx="3383280" cy="4663440"/>
-          </a:xfrm>
-          <a:prstGeom prst="roundRect">
-            <a:avLst/>
-          </a:prstGeom>
-          <a:solidFill>
-            <a:srgbClr val="F8F5EE"/>
-          </a:solidFill>
-          <a:ln w="15240">
-            <a:solidFill>
-              <a:srgbClr val="C9A876"/>
-            </a:solidFill>
-          </a:ln>
-        </p:spPr>
-        <p:style>
-          <a:lnRef idx="1">
-            <a:schemeClr val="accent1"/>
-          </a:lnRef>
-          <a:fillRef idx="3">
-            <a:schemeClr val="accent1"/>
-          </a:fillRef>
-          <a:effectRef idx="2">
-            <a:schemeClr val="accent1"/>
-          </a:effectRef>
-          <a:fontRef idx="minor">
-            <a:schemeClr val="lt1"/>
-          </a:fontRef>
-        </p:style>
-        <p:txBody>
-          <a:bodyPr rtlCol="0" anchor="ctr"/>
-          <a:lstStyle/>
-          <a:p>
-            <a:pPr algn="ctr"/>
-          </a:p>
-        </p:txBody>
-      </p:sp>
-      <p:sp>
-        <p:nvSpPr>
-          <p:cNvPr id="8" name="TextBox 7"/>
-          <p:cNvSpPr txBox="1"/>
-          <p:nvPr/>
-        </p:nvSpPr>
-        <p:spPr>
-          <a:xfrm>
-            <a:off x="4526280" y="1828800"/>
-            <a:ext cx="3017520" cy="4114800"/>
-          </a:xfrm>
-          <a:prstGeom prst="rect">
-            <a:avLst/>
-          </a:prstGeom>
-          <a:noFill/>
-        </p:spPr>
-        <p:txBody>
-          <a:bodyPr wrap="square">
-            <a:spAutoFit/>
-          </a:bodyPr>
-          <a:lstStyle/>
-          <a:p>
-            <a:pPr>
-              <a:spcAft>
-                <a:spcPts val="1400"/>
-              </a:spcAft>
-              <a:defRPr sz="1600" b="1">
-                <a:solidFill>
-                  <a:srgbClr val="1E5037"/>
-                </a:solidFill>
-              </a:defRPr>
-            </a:pPr>
-            <a:r>
-              <a:t>Step 02. 모바일 바이오 리포트</a:t>
-            </a:r>
-          </a:p>
-          <a:p>
-            <a:pPr>
-              <a:lnSpc>
-                <a:spcPct val="135000"/>
-              </a:lnSpc>
-              <a:defRPr sz="1200">
-                <a:solidFill>
-                  <a:srgbClr val="52463C"/>
-                </a:solidFill>
-              </a:defRPr>
-            </a:pPr>
-            <a:r>
-              <a:t>7일 후 전용 모바일 웹으로 초개인화 유전체 &amp; 장내 균총 분석 리포트 및 식음 가이드라인 발행.</a:t>
-            </a:r>
-          </a:p>
-        </p:txBody>
-      </p:sp>
-      <p:sp>
-        <p:nvSpPr>
-          <p:cNvPr id="9" name="Rounded Rectangle 8"/>
-          <p:cNvSpPr/>
-          <p:nvPr/>
-        </p:nvSpPr>
-        <p:spPr>
-          <a:xfrm>
-            <a:off x="7955280" y="1554480"/>
-            <a:ext cx="3383280" cy="4663440"/>
-          </a:xfrm>
-          <a:prstGeom prst="roundRect">
-            <a:avLst/>
-          </a:prstGeom>
-          <a:solidFill>
-            <a:srgbClr val="F8F5EE"/>
-          </a:solidFill>
-          <a:ln w="15240">
-            <a:solidFill>
-              <a:srgbClr val="C9A876"/>
-            </a:solidFill>
-          </a:ln>
-        </p:spPr>
-        <p:style>
-          <a:lnRef idx="1">
-            <a:schemeClr val="accent1"/>
-          </a:lnRef>
-          <a:fillRef idx="3">
-            <a:schemeClr val="accent1"/>
-          </a:fillRef>
-          <a:effectRef idx="2">
-            <a:schemeClr val="accent1"/>
-          </a:effectRef>
-          <a:fontRef idx="minor">
-            <a:schemeClr val="lt1"/>
-          </a:fontRef>
-        </p:style>
-        <p:txBody>
-          <a:bodyPr rtlCol="0" anchor="ctr"/>
-          <a:lstStyle/>
-          <a:p>
-            <a:pPr algn="ctr"/>
-          </a:p>
-        </p:txBody>
-      </p:sp>
-      <p:sp>
-        <p:nvSpPr>
-          <p:cNvPr id="10" name="TextBox 9"/>
-          <p:cNvSpPr txBox="1"/>
-          <p:nvPr/>
-        </p:nvSpPr>
-        <p:spPr>
-          <a:xfrm>
-            <a:off x="8138160" y="1828800"/>
-            <a:ext cx="3017520" cy="4114800"/>
-          </a:xfrm>
-          <a:prstGeom prst="rect">
-            <a:avLst/>
-          </a:prstGeom>
-          <a:noFill/>
-        </p:spPr>
-        <p:txBody>
-          <a:bodyPr wrap="square">
-            <a:spAutoFit/>
-          </a:bodyPr>
-          <a:lstStyle/>
-          <a:p>
-            <a:pPr>
-              <a:spcAft>
-                <a:spcPts val="1400"/>
-              </a:spcAft>
-              <a:defRPr sz="1600" b="1">
-                <a:solidFill>
-                  <a:srgbClr val="1E5037"/>
-                </a:solidFill>
-              </a:defRPr>
-            </a:pPr>
-            <a:r>
-              <a:t>Step 03. 월간 맞춤 오일 정기구독(LRP)</a:t>
-            </a:r>
-          </a:p>
-          <a:p>
-            <a:pPr>
-              <a:lnSpc>
-                <a:spcPct val="135000"/>
-              </a:lnSpc>
-              <a:defRPr sz="1200">
-                <a:solidFill>
-                  <a:srgbClr val="52463C"/>
-                </a:solidFill>
-              </a:defRPr>
-            </a:pPr>
-            <a:r>
-              <a:t>일상 복귀 후에도 체질 맞춤 최고급 100% 순수 에센셜 오일과 섭생 제품을 매월 정기 배송하는 고수익 구독 모델.</a:t>
-            </a:r>
-          </a:p>
-        </p:txBody>
-      </p:sp>
-    </p:spTree>
-  </p:cSld>
-  <p:clrMapOvr>
-    <a:masterClrMapping/>
-  </p:clrMapOvr>
-</p:sld>
-</file>
-
-<file path=ppt/slides/slide15.xml><?xml version="1.0" encoding="utf-8"?>
-<p:sld xmlns:a="http://schemas.openxmlformats.org/drawingml/2006/main" xmlns:p="http://schemas.openxmlformats.org/presentationml/2006/main" xmlns:r="http://schemas.openxmlformats.org/officeDocument/2006/relationships">
-  <p:cSld>
-    <p:spTree>
-      <p:nvGrpSpPr>
-        <p:cNvPr id="1" name=""/>
-        <p:cNvGrpSpPr/>
-        <p:nvPr/>
-      </p:nvGrpSpPr>
-      <p:grpSpPr/>
-      <p:sp>
-        <p:nvSpPr>
-          <p:cNvPr id="2" name="Rectangle 1"/>
-          <p:cNvSpPr/>
-          <p:nvPr/>
-        </p:nvSpPr>
-        <p:spPr>
-          <a:xfrm>
-            <a:off x="0" y="0"/>
-            <a:ext cx="12191695" cy="6858000"/>
-          </a:xfrm>
-          <a:prstGeom prst="rect">
-            <a:avLst/>
-          </a:prstGeom>
-          <a:solidFill>
-            <a:srgbClr val="FDFBF7"/>
-          </a:solidFill>
-          <a:ln>
-            <a:noFill/>
-          </a:ln>
-        </p:spPr>
-        <p:style>
-          <a:lnRef idx="1">
-            <a:schemeClr val="accent1"/>
-          </a:lnRef>
-          <a:fillRef idx="3">
-            <a:schemeClr val="accent1"/>
-          </a:fillRef>
-          <a:effectRef idx="2">
-            <a:schemeClr val="accent1"/>
-          </a:effectRef>
-          <a:fontRef idx="minor">
-            <a:schemeClr val="lt1"/>
-          </a:fontRef>
-        </p:style>
-        <p:txBody>
-          <a:bodyPr rtlCol="0" anchor="ctr"/>
-          <a:lstStyle/>
-          <a:p>
-            <a:pPr algn="ctr"/>
-          </a:p>
-        </p:txBody>
-      </p:sp>
-      <p:sp>
-        <p:nvSpPr>
-          <p:cNvPr id="3" name="TextBox 2"/>
-          <p:cNvSpPr txBox="1"/>
-          <p:nvPr/>
-        </p:nvSpPr>
-        <p:spPr>
-          <a:xfrm>
-            <a:off x="731520" y="411480"/>
-            <a:ext cx="10515600" cy="365760"/>
-          </a:xfrm>
-          <a:prstGeom prst="rect">
-            <a:avLst/>
-          </a:prstGeom>
-          <a:noFill/>
-        </p:spPr>
-        <p:txBody>
-          <a:bodyPr wrap="square">
-            <a:spAutoFit/>
-          </a:bodyPr>
-          <a:lstStyle/>
-          <a:p>
-            <a:pPr>
-              <a:defRPr sz="1000" b="1">
-                <a:solidFill>
-                  <a:srgbClr val="A37F48"/>
-                </a:solidFill>
-              </a:defRPr>
-            </a:pPr>
-            <a:r>
-              <a:t>K-PREMIUM WELLNESS SPA 2026</a:t>
-            </a:r>
-          </a:p>
-        </p:txBody>
-      </p:sp>
-      <p:sp>
-        <p:nvSpPr>
-          <p:cNvPr id="4" name="TextBox 3"/>
-          <p:cNvSpPr txBox="1"/>
-          <p:nvPr/>
-        </p:nvSpPr>
-        <p:spPr>
-          <a:xfrm>
-            <a:off x="731520" y="685800"/>
-            <a:ext cx="10515600" cy="731520"/>
-          </a:xfrm>
-          <a:prstGeom prst="rect">
-            <a:avLst/>
-          </a:prstGeom>
-          <a:noFill/>
-        </p:spPr>
-        <p:txBody>
-          <a:bodyPr wrap="square">
-            <a:spAutoFit/>
-          </a:bodyPr>
-          <a:lstStyle/>
-          <a:p>
-            <a:pPr>
-              <a:defRPr sz="2200" b="1">
-                <a:solidFill>
-                  <a:srgbClr val="241E19"/>
-                </a:solidFill>
-              </a:defRPr>
-            </a:pPr>
-            <a:r>
-              <a:t>총괄 연구진 및 디렉터 프로필</a:t>
-            </a:r>
-          </a:p>
-        </p:txBody>
-      </p:sp>
-      <p:sp>
-        <p:nvSpPr>
-          <p:cNvPr id="5" name="Rounded Rectangle 4"/>
-          <p:cNvSpPr/>
-          <p:nvPr/>
-        </p:nvSpPr>
-        <p:spPr>
-          <a:xfrm>
-            <a:off x="731520" y="1554480"/>
-            <a:ext cx="5120640" cy="4663440"/>
-          </a:xfrm>
-          <a:prstGeom prst="roundRect">
-            <a:avLst/>
-          </a:prstGeom>
-          <a:solidFill>
-            <a:srgbClr val="FFFFFF"/>
-          </a:solidFill>
-          <a:ln w="15240">
-            <a:solidFill>
-              <a:srgbClr val="C9A876"/>
-            </a:solidFill>
-          </a:ln>
-        </p:spPr>
-        <p:style>
-          <a:lnRef idx="1">
-            <a:schemeClr val="accent1"/>
-          </a:lnRef>
-          <a:fillRef idx="3">
-            <a:schemeClr val="accent1"/>
-          </a:fillRef>
-          <a:effectRef idx="2">
-            <a:schemeClr val="accent1"/>
-          </a:effectRef>
-          <a:fontRef idx="minor">
-            <a:schemeClr val="lt1"/>
-          </a:fontRef>
-        </p:style>
-        <p:txBody>
-          <a:bodyPr rtlCol="0" anchor="ctr"/>
-          <a:lstStyle/>
-          <a:p>
-            <a:pPr algn="ctr"/>
-          </a:p>
-        </p:txBody>
-      </p:sp>
-      <p:sp>
-        <p:nvSpPr>
-          <p:cNvPr id="6" name="TextBox 5"/>
-          <p:cNvSpPr txBox="1"/>
-          <p:nvPr/>
-        </p:nvSpPr>
-        <p:spPr>
-          <a:xfrm>
-            <a:off x="1005840" y="1828800"/>
-            <a:ext cx="4572000" cy="4114800"/>
-          </a:xfrm>
-          <a:prstGeom prst="rect">
-            <a:avLst/>
-          </a:prstGeom>
-          <a:noFill/>
-        </p:spPr>
-        <p:txBody>
-          <a:bodyPr wrap="square">
-            <a:spAutoFit/>
-          </a:bodyPr>
-          <a:lstStyle/>
-          <a:p>
-            <a:pPr>
-              <a:defRPr sz="1100" b="1">
-                <a:solidFill>
-                  <a:srgbClr val="A37F48"/>
-                </a:solidFill>
-              </a:defRPr>
-            </a:pPr>
-            <a:r>
-              <a:t>WELLNESS MASTER DIRECTOR</a:t>
-            </a:r>
-          </a:p>
-          <a:p>
-            <a:pPr>
-              <a:spcAft>
-                <a:spcPts val="1000"/>
-              </a:spcAft>
-              <a:defRPr sz="2400" b="1">
-                <a:solidFill>
-                  <a:srgbClr val="241E19"/>
-                </a:solidFill>
-              </a:defRPr>
-            </a:pPr>
-            <a:r>
-              <a:t>유정근 (Ryu Jean)</a:t>
-            </a:r>
-          </a:p>
-          <a:p>
-            <a:pPr>
-              <a:lnSpc>
-                <a:spcPct val="130000"/>
-              </a:lnSpc>
-              <a:defRPr sz="1200">
-                <a:solidFill>
-                  <a:srgbClr val="52463C"/>
-                </a:solidFill>
-              </a:defRPr>
-            </a:pPr>
-            <a:r>
-              <a:t>• 웰니스 총괄 디렉터 / 전담 테라피스트</a:t>
-            </a:r>
-            <a:br/>
-            <a:r>
-              <a:t>• 사상체질 10대 시그니처 테라피 의전 설계</a:t>
-            </a:r>
-            <a:br/>
-            <a:r>
-              <a:t>• 글로벌 호텔/리조트 파트너십 및 브랜드 총괄</a:t>
-            </a:r>
-            <a:br/>
-            <a:r>
-              <a:t>• 1:1 VIP 프라이빗 컨설팅 및 트리트먼트 마스터</a:t>
-            </a:r>
-            <a:br/>
-            <a:br/>
-            <a:r>
-              <a:t>📞 연락처: 010-4728-9917</a:t>
-            </a:r>
-            <a:br/>
-            <a:r>
-              <a:t>✉️ 이메일: ryujean77@gmail.com</a:t>
-            </a:r>
-          </a:p>
-        </p:txBody>
-      </p:sp>
-      <p:sp>
-        <p:nvSpPr>
-          <p:cNvPr id="7" name="Rounded Rectangle 6"/>
-          <p:cNvSpPr/>
-          <p:nvPr/>
-        </p:nvSpPr>
-        <p:spPr>
-          <a:xfrm>
-            <a:off x="6217920" y="1554480"/>
-            <a:ext cx="5212080" cy="4663440"/>
-          </a:xfrm>
-          <a:prstGeom prst="roundRect">
-            <a:avLst/>
-          </a:prstGeom>
-          <a:solidFill>
-            <a:srgbClr val="FFFFFF"/>
-          </a:solidFill>
-          <a:ln w="15240">
-            <a:solidFill>
-              <a:srgbClr val="C9A876"/>
-            </a:solidFill>
-          </a:ln>
-        </p:spPr>
-        <p:style>
-          <a:lnRef idx="1">
-            <a:schemeClr val="accent1"/>
-          </a:lnRef>
-          <a:fillRef idx="3">
-            <a:schemeClr val="accent1"/>
-          </a:fillRef>
-          <a:effectRef idx="2">
-            <a:schemeClr val="accent1"/>
-          </a:effectRef>
-          <a:fontRef idx="minor">
-            <a:schemeClr val="lt1"/>
-          </a:fontRef>
-        </p:style>
-        <p:txBody>
-          <a:bodyPr rtlCol="0" anchor="ctr"/>
-          <a:lstStyle/>
-          <a:p>
-            <a:pPr algn="ctr"/>
-          </a:p>
-        </p:txBody>
-      </p:sp>
-      <p:sp>
-        <p:nvSpPr>
-          <p:cNvPr id="8" name="TextBox 7"/>
-          <p:cNvSpPr txBox="1"/>
-          <p:nvPr/>
-        </p:nvSpPr>
-        <p:spPr>
-          <a:xfrm>
-            <a:off x="6492240" y="1828800"/>
-            <a:ext cx="4663440" cy="4114800"/>
-          </a:xfrm>
-          <a:prstGeom prst="rect">
-            <a:avLst/>
-          </a:prstGeom>
-          <a:noFill/>
-        </p:spPr>
-        <p:txBody>
-          <a:bodyPr wrap="square">
-            <a:spAutoFit/>
-          </a:bodyPr>
-          <a:lstStyle/>
-          <a:p>
-            <a:pPr>
-              <a:defRPr sz="1100" b="1">
-                <a:solidFill>
-                  <a:srgbClr val="A37F48"/>
-                </a:solidFill>
-              </a:defRPr>
-            </a:pPr>
-            <a:r>
-              <a:t>ACADEMIC &amp; MEDICAL DIRECTOR</a:t>
-            </a:r>
-          </a:p>
-          <a:p>
-            <a:pPr>
-              <a:spcAft>
-                <a:spcPts val="1000"/>
-              </a:spcAft>
-              <a:defRPr sz="2400" b="1">
-                <a:solidFill>
-                  <a:srgbClr val="241E19"/>
-                </a:solidFill>
-              </a:defRPr>
-            </a:pPr>
-            <a:r>
-              <a:t>임동구 박사 (Dr. Dong-Ku Yim)</a:t>
-            </a:r>
-          </a:p>
-          <a:p>
-            <a:pPr>
-              <a:lnSpc>
-                <a:spcPct val="130000"/>
-              </a:lnSpc>
-              <a:defRPr sz="1200">
-                <a:solidFill>
-                  <a:srgbClr val="52463C"/>
-                </a:solidFill>
-              </a:defRPr>
-            </a:pPr>
-            <a:r>
-              <a:t>• 식품공학박사 / Dr.Yim's 체질라이프스타일 연구소장</a:t>
-            </a:r>
-            <a:br/>
-            <a:r>
-              <a:t>• 사상체질 의학의 식품공학적 섭생 연구 권위자</a:t>
-            </a:r>
-            <a:br/>
-            <a:r>
-              <a:t>• 4대 체질 맞춤 미역국 &amp; 아로마 배합비 감수</a:t>
-            </a:r>
-            <a:br/>
-            <a:r>
-              <a:t>• 현대 생체 데이터 분석 및 체질 확정 알고리즘 구축</a:t>
-            </a:r>
-            <a:br/>
-            <a:br/>
-            <a:r>
-              <a:t>📞 연락처: 010-2323-4662</a:t>
-            </a:r>
-            <a:br/>
-            <a:r>
-              <a:t>✉️ 이메일: ydoko@daum.net</a:t>
-            </a:r>
-          </a:p>
-        </p:txBody>
-      </p:sp>
-    </p:spTree>
-  </p:cSld>
-  <p:clrMapOvr>
-    <a:masterClrMapping/>
-  </p:clrMapOvr>
-</p:sld>
-</file>
-
-<file path=ppt/slides/slide16.xml><?xml version="1.0" encoding="utf-8"?>
-<p:sld xmlns:a="http://schemas.openxmlformats.org/drawingml/2006/main" xmlns:p="http://schemas.openxmlformats.org/presentationml/2006/main" xmlns:r="http://schemas.openxmlformats.org/officeDocument/2006/relationships">
-  <p:cSld>
-    <p:spTree>
-      <p:nvGrpSpPr>
-        <p:cNvPr id="1" name=""/>
-        <p:cNvGrpSpPr/>
-        <p:nvPr/>
-      </p:nvGrpSpPr>
-      <p:grpSpPr/>
-      <p:sp>
-        <p:nvSpPr>
-          <p:cNvPr id="2" name="Rectangle 1"/>
-          <p:cNvSpPr/>
-          <p:nvPr/>
-        </p:nvSpPr>
-        <p:spPr>
-          <a:xfrm>
-            <a:off x="0" y="0"/>
-            <a:ext cx="12191695" cy="6858000"/>
-          </a:xfrm>
-          <a:prstGeom prst="rect">
-            <a:avLst/>
-          </a:prstGeom>
-          <a:solidFill>
-            <a:srgbClr val="1A3328"/>
+            <a:srgbClr val="0E1F18"/>
           </a:solidFill>
           <a:ln>
             <a:noFill/>
@@ -6366,95 +3483,23 @@
       </p:sp>
       <p:sp>
         <p:nvSpPr>
-          <p:cNvPr id="3" name="TextBox 2"/>
-          <p:cNvSpPr txBox="1"/>
-          <p:nvPr/>
-        </p:nvSpPr>
-        <p:spPr>
-          <a:xfrm>
-            <a:off x="731520" y="411480"/>
-            <a:ext cx="10515600" cy="365760"/>
+          <p:cNvPr id="3" name="Rectangle 2"/>
+          <p:cNvSpPr/>
+          <p:nvPr/>
+        </p:nvSpPr>
+        <p:spPr>
+          <a:xfrm>
+            <a:off x="0" y="0"/>
+            <a:ext cx="12191695" cy="411480"/>
           </a:xfrm>
           <a:prstGeom prst="rect">
             <a:avLst/>
           </a:prstGeom>
-          <a:noFill/>
-        </p:spPr>
-        <p:txBody>
-          <a:bodyPr wrap="square">
-            <a:spAutoFit/>
-          </a:bodyPr>
-          <a:lstStyle/>
-          <a:p>
-            <a:pPr>
-              <a:defRPr sz="1000" b="1">
-                <a:solidFill>
-                  <a:srgbClr val="A37F48"/>
-                </a:solidFill>
-              </a:defRPr>
-            </a:pPr>
-            <a:r>
-              <a:t>THE PROBLEM</a:t>
-            </a:r>
-          </a:p>
-        </p:txBody>
-      </p:sp>
-      <p:sp>
-        <p:nvSpPr>
-          <p:cNvPr id="4" name="TextBox 3"/>
-          <p:cNvSpPr txBox="1"/>
-          <p:nvPr/>
-        </p:nvSpPr>
-        <p:spPr>
-          <a:xfrm>
-            <a:off x="731520" y="685800"/>
-            <a:ext cx="10515600" cy="731520"/>
-          </a:xfrm>
-          <a:prstGeom prst="rect">
-            <a:avLst/>
-          </a:prstGeom>
-          <a:noFill/>
-        </p:spPr>
-        <p:txBody>
-          <a:bodyPr wrap="square">
-            <a:spAutoFit/>
-          </a:bodyPr>
-          <a:lstStyle/>
-          <a:p>
-            <a:pPr>
-              <a:defRPr sz="2200" b="1">
-                <a:solidFill>
-                  <a:srgbClr val="241E19"/>
-                </a:solidFill>
-              </a:defRPr>
-            </a:pPr>
-            <a:r>
-              <a:t>Problem Statement : 기존 일반 스파와 디톡스의 3대 치명적 한계</a:t>
-            </a:r>
-          </a:p>
-        </p:txBody>
-      </p:sp>
-      <p:sp>
-        <p:nvSpPr>
-          <p:cNvPr id="5" name="Rounded Rectangle 4"/>
-          <p:cNvSpPr/>
-          <p:nvPr/>
-        </p:nvSpPr>
-        <p:spPr>
-          <a:xfrm>
-            <a:off x="731520" y="1554480"/>
-            <a:ext cx="3383280" cy="4663440"/>
-          </a:xfrm>
-          <a:prstGeom prst="roundRect">
-            <a:avLst/>
-          </a:prstGeom>
           <a:solidFill>
-            <a:srgbClr val="FFFFFF"/>
+            <a:srgbClr val="241E19"/>
           </a:solidFill>
-          <a:ln w="15240">
-            <a:solidFill>
-              <a:srgbClr val="A02D2D"/>
-            </a:solidFill>
+          <a:ln>
+            <a:noFill/>
           </a:ln>
         </p:spPr>
         <p:style>
@@ -6481,14 +3526,14 @@
       </p:sp>
       <p:sp>
         <p:nvSpPr>
-          <p:cNvPr id="6" name="TextBox 5"/>
+          <p:cNvPr id="4" name="TextBox 3"/>
           <p:cNvSpPr txBox="1"/>
           <p:nvPr/>
         </p:nvSpPr>
         <p:spPr>
           <a:xfrm>
-            <a:off x="914400" y="1783080"/>
-            <a:ext cx="3017520" cy="4206240"/>
+            <a:off x="731520" y="73152"/>
+            <a:ext cx="10728655" cy="274320"/>
           </a:xfrm>
           <a:prstGeom prst="rect">
             <a:avLst/>
@@ -6496,67 +3541,44 @@
           <a:noFill/>
         </p:spPr>
         <p:txBody>
-          <a:bodyPr wrap="square">
+          <a:bodyPr wrap="none">
             <a:spAutoFit/>
           </a:bodyPr>
           <a:lstStyle/>
           <a:p>
             <a:pPr>
-              <a:spcAft>
-                <a:spcPts val="1200"/>
-              </a:spcAft>
-              <a:defRPr sz="1500" b="1">
-                <a:solidFill>
-                  <a:srgbClr val="A02D2D"/>
-                </a:solidFill>
-              </a:defRPr>
-            </a:pPr>
-            <a:r>
-              <a:t>01. 획일적 처방의 부작용 ('One-Size-Fits-All')</a:t>
-            </a:r>
-          </a:p>
-          <a:p>
-            <a:pPr>
-              <a:lnSpc>
-                <a:spcPct val="130000"/>
-              </a:lnSpc>
-              <a:defRPr sz="1150">
-                <a:solidFill>
-                  <a:srgbClr val="52463C"/>
-                </a:solidFill>
-              </a:defRPr>
-            </a:pPr>
-            <a:r>
-              <a:t>기존 스파는 '만인에게 좋은 것'이라는 잘못된 전제로 라벤더/페퍼민트/온열 사우나를 획일 적용합니다.</a:t>
-            </a:r>
-            <a:br/>
-            <a:br/>
-            <a:r>
-              <a:t>⚠️ 위험성: 열이 많은 사람에게 온열 사우나나 진저 오일을 쓰면 두통·안구충혈·불면이 악화되고, 몸이 찬 사람에게 찬 탄산스파나 페퍼민트를 쓰면 극심한 냉증과 복통을 유발합니다.</a:t>
-            </a:r>
-          </a:p>
-        </p:txBody>
-      </p:sp>
-      <p:sp>
-        <p:nvSpPr>
-          <p:cNvPr id="7" name="Rounded Rectangle 6"/>
+              <a:defRPr sz="900" b="1">
+                <a:solidFill>
+                  <a:srgbClr val="C8B9A0"/>
+                </a:solidFill>
+              </a:defRPr>
+            </a:pPr>
+            <a:r>
+              <a:t>SASANG SPA BOUTIQUE  |  K-WELLNESS HERITAGE &amp; BIOTECH  |  VIP DIRECTORS: 010-4728-9917</a:t>
+            </a:r>
+          </a:p>
+        </p:txBody>
+      </p:sp>
+      <p:sp>
+        <p:nvSpPr>
+          <p:cNvPr id="5" name="Rounded Rectangle 4"/>
           <p:cNvSpPr/>
           <p:nvPr/>
         </p:nvSpPr>
         <p:spPr>
           <a:xfrm>
-            <a:off x="4343400" y="1554480"/>
-            <a:ext cx="3383280" cy="4663440"/>
+            <a:off x="731520" y="621792"/>
+            <a:ext cx="2011680" cy="256032"/>
           </a:xfrm>
           <a:prstGeom prst="roundRect">
             <a:avLst/>
           </a:prstGeom>
           <a:solidFill>
-            <a:srgbClr val="FFFFFF"/>
+            <a:srgbClr val="F8F5EE"/>
           </a:solidFill>
-          <a:ln w="15240">
+          <a:ln w="12700">
             <a:solidFill>
-              <a:srgbClr val="A02D2D"/>
+              <a:srgbClr val="C9A876"/>
             </a:solidFill>
           </a:ln>
         </p:spPr>
@@ -6584,14 +3606,14 @@
       </p:sp>
       <p:sp>
         <p:nvSpPr>
-          <p:cNvPr id="8" name="TextBox 7"/>
+          <p:cNvPr id="6" name="TextBox 5"/>
           <p:cNvSpPr txBox="1"/>
           <p:nvPr/>
         </p:nvSpPr>
         <p:spPr>
           <a:xfrm>
-            <a:off x="4526280" y="1783080"/>
-            <a:ext cx="3017520" cy="4206240"/>
+            <a:off x="777240" y="603504"/>
+            <a:ext cx="1920240" cy="274320"/>
           </a:xfrm>
           <a:prstGeom prst="rect">
             <a:avLst/>
@@ -6599,67 +3621,79 @@
           <a:noFill/>
         </p:spPr>
         <p:txBody>
-          <a:bodyPr wrap="square">
+          <a:bodyPr wrap="none">
             <a:spAutoFit/>
           </a:bodyPr>
           <a:lstStyle/>
           <a:p>
-            <a:pPr>
-              <a:spcAft>
-                <a:spcPts val="1200"/>
-              </a:spcAft>
-              <a:defRPr sz="1500" b="1">
-                <a:solidFill>
-                  <a:srgbClr val="A02D2D"/>
-                </a:solidFill>
-              </a:defRPr>
-            </a:pPr>
-            <a:r>
-              <a:t>02. 1회성 마사지의 한계 (Temporary Relief)</a:t>
-            </a:r>
-          </a:p>
-          <a:p>
-            <a:pPr>
-              <a:lnSpc>
-                <a:spcPct val="130000"/>
-              </a:lnSpc>
-              <a:defRPr sz="1150">
-                <a:solidFill>
-                  <a:srgbClr val="52463C"/>
-                </a:solidFill>
-              </a:defRPr>
-            </a:pPr>
-            <a:r>
-              <a:t>단순 근육 이완 마사지는 피부와 표층 근육만 일시적으로 만져줄 뿐, 체내 장부의 불균형과 심부 노폐물 정체를 해결하지 못합니다.</a:t>
-            </a:r>
-            <a:br/>
-            <a:br/>
-            <a:r>
-              <a:t>⚠️ 한계: 스파를 받은 당일 밤만 잠시 편안할 뿐, 다음 날 아침이면 만성 피로와 뻐근함이 100% 원상복귀되는 악순환이 반복됩니다.</a:t>
-            </a:r>
-          </a:p>
-        </p:txBody>
-      </p:sp>
-      <p:sp>
-        <p:nvSpPr>
-          <p:cNvPr id="9" name="Rounded Rectangle 8"/>
+            <a:pPr algn="ctr">
+              <a:defRPr sz="900" b="1">
+                <a:solidFill>
+                  <a:srgbClr val="A37F48"/>
+                </a:solidFill>
+              </a:defRPr>
+            </a:pPr>
+            <a:r>
+              <a:t>THE PROBLEM</a:t>
+            </a:r>
+          </a:p>
+        </p:txBody>
+      </p:sp>
+      <p:sp>
+        <p:nvSpPr>
+          <p:cNvPr id="7" name="TextBox 6"/>
+          <p:cNvSpPr txBox="1"/>
+          <p:nvPr/>
+        </p:nvSpPr>
+        <p:spPr>
+          <a:xfrm>
+            <a:off x="2926080" y="530352"/>
+            <a:ext cx="8503920" cy="548640"/>
+          </a:xfrm>
+          <a:prstGeom prst="rect">
+            <a:avLst/>
+          </a:prstGeom>
+          <a:noFill/>
+        </p:spPr>
+        <p:txBody>
+          <a:bodyPr wrap="none">
+            <a:spAutoFit/>
+          </a:bodyPr>
+          <a:lstStyle/>
+          <a:p>
+            <a:pPr>
+              <a:defRPr sz="2000" b="1">
+                <a:solidFill>
+                  <a:srgbClr val="241E19"/>
+                </a:solidFill>
+              </a:defRPr>
+            </a:pPr>
+            <a:r>
+              <a:t>Problem Statement : 기존 스파와 디톡스의 3대 치명적 한계</a:t>
+            </a:r>
+          </a:p>
+        </p:txBody>
+      </p:sp>
+      <p:sp>
+        <p:nvSpPr>
+          <p:cNvPr id="8" name="Rounded Rectangle 7"/>
           <p:cNvSpPr/>
           <p:nvPr/>
         </p:nvSpPr>
         <p:spPr>
           <a:xfrm>
-            <a:off x="7955280" y="1554480"/>
-            <a:ext cx="3383280" cy="4663440"/>
+            <a:off x="731520" y="1280160"/>
+            <a:ext cx="3383280" cy="5120640"/>
           </a:xfrm>
           <a:prstGeom prst="roundRect">
             <a:avLst/>
           </a:prstGeom>
           <a:solidFill>
-            <a:srgbClr val="FFFFFF"/>
+            <a:srgbClr val="FEF2F2"/>
           </a:solidFill>
           <a:ln w="15240">
             <a:solidFill>
-              <a:srgbClr val="A02D2D"/>
+              <a:srgbClr val="F87171"/>
             </a:solidFill>
           </a:ln>
         </p:spPr>
@@ -6687,14 +3721,14 @@
       </p:sp>
       <p:sp>
         <p:nvSpPr>
-          <p:cNvPr id="10" name="TextBox 9"/>
+          <p:cNvPr id="9" name="TextBox 8"/>
           <p:cNvSpPr txBox="1"/>
           <p:nvPr/>
         </p:nvSpPr>
         <p:spPr>
           <a:xfrm>
-            <a:off x="8138160" y="1783080"/>
-            <a:ext cx="3017520" cy="4206240"/>
+            <a:off x="914400" y="1463040"/>
+            <a:ext cx="3017520" cy="4754880"/>
           </a:xfrm>
           <a:prstGeom prst="rect">
             <a:avLst/>
@@ -6706,6 +3740,21 @@
             <a:spAutoFit/>
           </a:bodyPr>
           <a:lstStyle/>
+          <a:p>
+            <a:pPr>
+              <a:spcAft>
+                <a:spcPts val="600"/>
+              </a:spcAft>
+              <a:defRPr sz="1100" b="1">
+                <a:solidFill>
+                  <a:srgbClr val="B91C1C"/>
+                </a:solidFill>
+              </a:defRPr>
+            </a:pPr>
+            <a:r>
+              <a:t>PROBLEM 01</a:t>
+            </a:r>
+          </a:p>
           <a:p>
             <a:pPr>
               <a:spcAft>
@@ -6713,12 +3762,12 @@
               </a:spcAft>
               <a:defRPr sz="1500" b="1">
                 <a:solidFill>
-                  <a:srgbClr val="A02D2D"/>
-                </a:solidFill>
-              </a:defRPr>
-            </a:pPr>
-            <a:r>
-              <a:t>03. 무분별한 디톡스의 역효과 (Blind Detox)</a:t>
+                  <a:srgbClr val="241E19"/>
+                </a:solidFill>
+              </a:defRPr>
+            </a:pPr>
+            <a:r>
+              <a:t>획일적 처방의 부작용 ('One-Size-Fits-All')</a:t>
             </a:r>
           </a:p>
           <a:p>
@@ -6726,19 +3775,255 @@
               <a:lnSpc>
                 <a:spcPct val="130000"/>
               </a:lnSpc>
-              <a:defRPr sz="1150">
+              <a:defRPr sz="1100">
                 <a:solidFill>
                   <a:srgbClr val="52463C"/>
                 </a:solidFill>
               </a:defRPr>
             </a:pPr>
             <a:r>
-              <a:t>체질을 무시한 유행성 디톡스 주스(케일/오이 등 찬 성질)나 무작정 굶는 단식은 소화기 장부를 심각하게 훼손합니다.</a:t>
+              <a:t>기존 스파는 '만인에게 좋은 것'이라는 전제로 라벤더/페퍼민트/온열 사우나를 획일 적용합니다.</a:t>
             </a:r>
             <a:br/>
             <a:br/>
             <a:r>
-              <a:t>⚠️ 피해: 비위가 약하고 몸이 찬 소음인에게 찬 녹즙은 위장 마비를 일으키고, 고단백 육류 과다는 태양인의 간 해독력을 파괴합니다.</a:t>
+              <a:t>⚠️ 위험성: 열이 많은 사람에게 고온 사우나나 진저 오일을 쓰면 두통·상열감·불면이 악화되고, 몸이 찬 사람에게 찬 탄산스파나 페퍼민트를 쓰면 극심한 냉증과 복통을 유발합니다.</a:t>
+            </a:r>
+          </a:p>
+        </p:txBody>
+      </p:sp>
+      <p:sp>
+        <p:nvSpPr>
+          <p:cNvPr id="10" name="Rounded Rectangle 9"/>
+          <p:cNvSpPr/>
+          <p:nvPr/>
+        </p:nvSpPr>
+        <p:spPr>
+          <a:xfrm>
+            <a:off x="4343400" y="1280160"/>
+            <a:ext cx="3383280" cy="5120640"/>
+          </a:xfrm>
+          <a:prstGeom prst="roundRect">
+            <a:avLst/>
+          </a:prstGeom>
+          <a:solidFill>
+            <a:srgbClr val="FEF2F2"/>
+          </a:solidFill>
+          <a:ln w="15240">
+            <a:solidFill>
+              <a:srgbClr val="F87171"/>
+            </a:solidFill>
+          </a:ln>
+        </p:spPr>
+        <p:style>
+          <a:lnRef idx="1">
+            <a:schemeClr val="accent1"/>
+          </a:lnRef>
+          <a:fillRef idx="3">
+            <a:schemeClr val="accent1"/>
+          </a:fillRef>
+          <a:effectRef idx="2">
+            <a:schemeClr val="accent1"/>
+          </a:effectRef>
+          <a:fontRef idx="minor">
+            <a:schemeClr val="lt1"/>
+          </a:fontRef>
+        </p:style>
+        <p:txBody>
+          <a:bodyPr rtlCol="0" anchor="ctr"/>
+          <a:lstStyle/>
+          <a:p>
+            <a:pPr algn="ctr"/>
+          </a:p>
+        </p:txBody>
+      </p:sp>
+      <p:sp>
+        <p:nvSpPr>
+          <p:cNvPr id="11" name="TextBox 10"/>
+          <p:cNvSpPr txBox="1"/>
+          <p:nvPr/>
+        </p:nvSpPr>
+        <p:spPr>
+          <a:xfrm>
+            <a:off x="4526280" y="1463040"/>
+            <a:ext cx="3017520" cy="4754880"/>
+          </a:xfrm>
+          <a:prstGeom prst="rect">
+            <a:avLst/>
+          </a:prstGeom>
+          <a:noFill/>
+        </p:spPr>
+        <p:txBody>
+          <a:bodyPr wrap="square">
+            <a:spAutoFit/>
+          </a:bodyPr>
+          <a:lstStyle/>
+          <a:p>
+            <a:pPr>
+              <a:spcAft>
+                <a:spcPts val="600"/>
+              </a:spcAft>
+              <a:defRPr sz="1100" b="1">
+                <a:solidFill>
+                  <a:srgbClr val="B91C1C"/>
+                </a:solidFill>
+              </a:defRPr>
+            </a:pPr>
+            <a:r>
+              <a:t>PROBLEM 02</a:t>
+            </a:r>
+          </a:p>
+          <a:p>
+            <a:pPr>
+              <a:spcAft>
+                <a:spcPts val="1200"/>
+              </a:spcAft>
+              <a:defRPr sz="1500" b="1">
+                <a:solidFill>
+                  <a:srgbClr val="241E19"/>
+                </a:solidFill>
+              </a:defRPr>
+            </a:pPr>
+            <a:r>
+              <a:t>1회성 마사지의 한계 (Temporary Relief)</a:t>
+            </a:r>
+          </a:p>
+          <a:p>
+            <a:pPr>
+              <a:lnSpc>
+                <a:spcPct val="130000"/>
+              </a:lnSpc>
+              <a:defRPr sz="1100">
+                <a:solidFill>
+                  <a:srgbClr val="52463C"/>
+                </a:solidFill>
+              </a:defRPr>
+            </a:pPr>
+            <a:r>
+              <a:t>단순 오일 마사지는 표층 근육만 일시적으로 만져줄 뿐, 체내 장부(간·폐·비·신)의 대사 불균형과 심부 노폐물 정체를 해결하지 못합니다.</a:t>
+            </a:r>
+            <a:br/>
+            <a:br/>
+            <a:r>
+              <a:t>⚠️ 한계: 스파 당일 밤만 잠시 편안할 뿐, 다음 날 아침이면 피로와 뻐근함이 100% 원상복귀되는 악순환이 반복됩니다.</a:t>
+            </a:r>
+          </a:p>
+        </p:txBody>
+      </p:sp>
+      <p:sp>
+        <p:nvSpPr>
+          <p:cNvPr id="12" name="Rounded Rectangle 11"/>
+          <p:cNvSpPr/>
+          <p:nvPr/>
+        </p:nvSpPr>
+        <p:spPr>
+          <a:xfrm>
+            <a:off x="7955280" y="1280160"/>
+            <a:ext cx="3383280" cy="5120640"/>
+          </a:xfrm>
+          <a:prstGeom prst="roundRect">
+            <a:avLst/>
+          </a:prstGeom>
+          <a:solidFill>
+            <a:srgbClr val="FEF2F2"/>
+          </a:solidFill>
+          <a:ln w="15240">
+            <a:solidFill>
+              <a:srgbClr val="F87171"/>
+            </a:solidFill>
+          </a:ln>
+        </p:spPr>
+        <p:style>
+          <a:lnRef idx="1">
+            <a:schemeClr val="accent1"/>
+          </a:lnRef>
+          <a:fillRef idx="3">
+            <a:schemeClr val="accent1"/>
+          </a:fillRef>
+          <a:effectRef idx="2">
+            <a:schemeClr val="accent1"/>
+          </a:effectRef>
+          <a:fontRef idx="minor">
+            <a:schemeClr val="lt1"/>
+          </a:fontRef>
+        </p:style>
+        <p:txBody>
+          <a:bodyPr rtlCol="0" anchor="ctr"/>
+          <a:lstStyle/>
+          <a:p>
+            <a:pPr algn="ctr"/>
+          </a:p>
+        </p:txBody>
+      </p:sp>
+      <p:sp>
+        <p:nvSpPr>
+          <p:cNvPr id="13" name="TextBox 12"/>
+          <p:cNvSpPr txBox="1"/>
+          <p:nvPr/>
+        </p:nvSpPr>
+        <p:spPr>
+          <a:xfrm>
+            <a:off x="8138160" y="1463040"/>
+            <a:ext cx="3017520" cy="4754880"/>
+          </a:xfrm>
+          <a:prstGeom prst="rect">
+            <a:avLst/>
+          </a:prstGeom>
+          <a:noFill/>
+        </p:spPr>
+        <p:txBody>
+          <a:bodyPr wrap="square">
+            <a:spAutoFit/>
+          </a:bodyPr>
+          <a:lstStyle/>
+          <a:p>
+            <a:pPr>
+              <a:spcAft>
+                <a:spcPts val="600"/>
+              </a:spcAft>
+              <a:defRPr sz="1100" b="1">
+                <a:solidFill>
+                  <a:srgbClr val="B91C1C"/>
+                </a:solidFill>
+              </a:defRPr>
+            </a:pPr>
+            <a:r>
+              <a:t>PROBLEM 03</a:t>
+            </a:r>
+          </a:p>
+          <a:p>
+            <a:pPr>
+              <a:spcAft>
+                <a:spcPts val="1200"/>
+              </a:spcAft>
+              <a:defRPr sz="1500" b="1">
+                <a:solidFill>
+                  <a:srgbClr val="241E19"/>
+                </a:solidFill>
+              </a:defRPr>
+            </a:pPr>
+            <a:r>
+              <a:t>무분별한 디톡스의 역효과 (Blind Detox)</a:t>
+            </a:r>
+          </a:p>
+          <a:p>
+            <a:pPr>
+              <a:lnSpc>
+                <a:spcPct val="130000"/>
+              </a:lnSpc>
+              <a:defRPr sz="1100">
+                <a:solidFill>
+                  <a:srgbClr val="52463C"/>
+                </a:solidFill>
+              </a:defRPr>
+            </a:pPr>
+            <a:r>
+              <a:t>체질을 무시한 유행성 디톡스 주스(케일/오이 등 찬 성질)나 무작정 굶는 단식은 소화기 장부를 심각하게 훼손합니다.</a:t>
+            </a:r>
+            <a:br/>
+            <a:br/>
+            <a:r>
+              <a:t>⚠️ 피해: 비위가 찬 소음인에게 찬 녹즙은 위장 마비를 일으키고, 고단백 육류 과다는 태양인의 간 해독력을 파괴합니다.</a:t>
             </a:r>
           </a:p>
         </p:txBody>
@@ -6806,95 +4091,23 @@
       </p:sp>
       <p:sp>
         <p:nvSpPr>
-          <p:cNvPr id="3" name="TextBox 2"/>
-          <p:cNvSpPr txBox="1"/>
-          <p:nvPr/>
-        </p:nvSpPr>
-        <p:spPr>
-          <a:xfrm>
-            <a:off x="731520" y="411480"/>
-            <a:ext cx="10515600" cy="365760"/>
+          <p:cNvPr id="3" name="Rectangle 2"/>
+          <p:cNvSpPr/>
+          <p:nvPr/>
+        </p:nvSpPr>
+        <p:spPr>
+          <a:xfrm>
+            <a:off x="0" y="0"/>
+            <a:ext cx="12191695" cy="411480"/>
           </a:xfrm>
           <a:prstGeom prst="rect">
             <a:avLst/>
           </a:prstGeom>
-          <a:noFill/>
-        </p:spPr>
-        <p:txBody>
-          <a:bodyPr wrap="square">
-            <a:spAutoFit/>
-          </a:bodyPr>
-          <a:lstStyle/>
-          <a:p>
-            <a:pPr>
-              <a:defRPr sz="1000" b="1">
-                <a:solidFill>
-                  <a:srgbClr val="A37F48"/>
-                </a:solidFill>
-              </a:defRPr>
-            </a:pPr>
-            <a:r>
-              <a:t>THE SOLUTION</a:t>
-            </a:r>
-          </a:p>
-        </p:txBody>
-      </p:sp>
-      <p:sp>
-        <p:nvSpPr>
-          <p:cNvPr id="4" name="TextBox 3"/>
-          <p:cNvSpPr txBox="1"/>
-          <p:nvPr/>
-        </p:nvSpPr>
-        <p:spPr>
-          <a:xfrm>
-            <a:off x="731520" y="685800"/>
-            <a:ext cx="10515600" cy="731520"/>
-          </a:xfrm>
-          <a:prstGeom prst="rect">
-            <a:avLst/>
-          </a:prstGeom>
-          <a:noFill/>
-        </p:spPr>
-        <p:txBody>
-          <a:bodyPr wrap="square">
-            <a:spAutoFit/>
-          </a:bodyPr>
-          <a:lstStyle/>
-          <a:p>
-            <a:pPr>
-              <a:defRPr sz="2200" b="1">
-                <a:solidFill>
-                  <a:srgbClr val="241E19"/>
-                </a:solidFill>
-              </a:defRPr>
-            </a:pPr>
-            <a:r>
-              <a:t>Our Solution : 사상체질 스파가 제시하는 3대 근본 해결책</a:t>
-            </a:r>
-          </a:p>
-        </p:txBody>
-      </p:sp>
-      <p:sp>
-        <p:nvSpPr>
-          <p:cNvPr id="5" name="Rounded Rectangle 4"/>
-          <p:cNvSpPr/>
-          <p:nvPr/>
-        </p:nvSpPr>
-        <p:spPr>
-          <a:xfrm>
-            <a:off x="731520" y="1554480"/>
-            <a:ext cx="3383280" cy="4663440"/>
-          </a:xfrm>
-          <a:prstGeom prst="roundRect">
-            <a:avLst/>
-          </a:prstGeom>
           <a:solidFill>
-            <a:srgbClr val="FFFFFF"/>
+            <a:srgbClr val="241E19"/>
           </a:solidFill>
-          <a:ln w="15240">
-            <a:solidFill>
-              <a:srgbClr val="1E5037"/>
-            </a:solidFill>
+          <a:ln>
+            <a:noFill/>
           </a:ln>
         </p:spPr>
         <p:style>
@@ -6921,14 +4134,14 @@
       </p:sp>
       <p:sp>
         <p:nvSpPr>
-          <p:cNvPr id="6" name="TextBox 5"/>
+          <p:cNvPr id="4" name="TextBox 3"/>
           <p:cNvSpPr txBox="1"/>
           <p:nvPr/>
         </p:nvSpPr>
         <p:spPr>
           <a:xfrm>
-            <a:off x="914400" y="1783080"/>
-            <a:ext cx="3017520" cy="4206240"/>
+            <a:off x="731520" y="73152"/>
+            <a:ext cx="10728655" cy="274320"/>
           </a:xfrm>
           <a:prstGeom prst="rect">
             <a:avLst/>
@@ -6936,67 +4149,44 @@
           <a:noFill/>
         </p:spPr>
         <p:txBody>
-          <a:bodyPr wrap="square">
+          <a:bodyPr wrap="none">
             <a:spAutoFit/>
           </a:bodyPr>
           <a:lstStyle/>
           <a:p>
             <a:pPr>
-              <a:spcAft>
-                <a:spcPts val="1200"/>
-              </a:spcAft>
-              <a:defRPr sz="1500" b="1">
-                <a:solidFill>
-                  <a:srgbClr val="1E5037"/>
-                </a:solidFill>
-              </a:defRPr>
-            </a:pPr>
-            <a:r>
-              <a:t>01. 장부대소 기반 0% 부작용 초개인화</a:t>
-            </a:r>
-          </a:p>
-          <a:p>
-            <a:pPr>
-              <a:lnSpc>
-                <a:spcPct val="130000"/>
-              </a:lnSpc>
-              <a:defRPr sz="1150">
-                <a:solidFill>
-                  <a:srgbClr val="52463C"/>
-                </a:solidFill>
-              </a:defRPr>
-            </a:pPr>
-            <a:r>
-              <a:t>1894년 이제마의 『동의수세보원』 해부생리학과 생체 데이터를 결합하여 간·폐·비·신의 장부 용량을 정밀 진단합니다.</a:t>
-            </a:r>
-            <a:br/>
-            <a:br/>
-            <a:r>
-              <a:t>✨ 해결: 오직 내 몸의 장부 편차에만 유효한 최고급 100% 순수 에센셜 오일과 맞춤 수온(온열탕 vs 쿨링탕)을 처방하여 부작용을 원천 차단합니다.</a:t>
-            </a:r>
-          </a:p>
-        </p:txBody>
-      </p:sp>
-      <p:sp>
-        <p:nvSpPr>
-          <p:cNvPr id="7" name="Rounded Rectangle 6"/>
+              <a:defRPr sz="900" b="1">
+                <a:solidFill>
+                  <a:srgbClr val="C8B9A0"/>
+                </a:solidFill>
+              </a:defRPr>
+            </a:pPr>
+            <a:r>
+              <a:t>SASANG SPA BOUTIQUE  |  K-WELLNESS HERITAGE &amp; BIOTECH  |  VIP DIRECTORS: 010-4728-9917</a:t>
+            </a:r>
+          </a:p>
+        </p:txBody>
+      </p:sp>
+      <p:sp>
+        <p:nvSpPr>
+          <p:cNvPr id="5" name="Rounded Rectangle 4"/>
           <p:cNvSpPr/>
           <p:nvPr/>
         </p:nvSpPr>
         <p:spPr>
           <a:xfrm>
-            <a:off x="4343400" y="1554480"/>
-            <a:ext cx="3383280" cy="4663440"/>
+            <a:off x="731520" y="621792"/>
+            <a:ext cx="2011680" cy="256032"/>
           </a:xfrm>
           <a:prstGeom prst="roundRect">
             <a:avLst/>
           </a:prstGeom>
           <a:solidFill>
-            <a:srgbClr val="FFFFFF"/>
+            <a:srgbClr val="F8F5EE"/>
           </a:solidFill>
-          <a:ln w="15240">
+          <a:ln w="12700">
             <a:solidFill>
-              <a:srgbClr val="A37F48"/>
+              <a:srgbClr val="C9A876"/>
             </a:solidFill>
           </a:ln>
         </p:spPr>
@@ -7024,14 +4214,14 @@
       </p:sp>
       <p:sp>
         <p:nvSpPr>
-          <p:cNvPr id="8" name="TextBox 7"/>
+          <p:cNvPr id="6" name="TextBox 5"/>
           <p:cNvSpPr txBox="1"/>
           <p:nvPr/>
         </p:nvSpPr>
         <p:spPr>
           <a:xfrm>
-            <a:off x="4526280" y="1783080"/>
-            <a:ext cx="3017520" cy="4206240"/>
+            <a:off x="777240" y="603504"/>
+            <a:ext cx="1920240" cy="274320"/>
           </a:xfrm>
           <a:prstGeom prst="rect">
             <a:avLst/>
@@ -7039,67 +4229,79 @@
           <a:noFill/>
         </p:spPr>
         <p:txBody>
-          <a:bodyPr wrap="square">
+          <a:bodyPr wrap="none">
             <a:spAutoFit/>
           </a:bodyPr>
           <a:lstStyle/>
           <a:p>
-            <a:pPr>
-              <a:spcAft>
-                <a:spcPts val="1200"/>
-              </a:spcAft>
-              <a:defRPr sz="1500" b="1">
+            <a:pPr algn="ctr">
+              <a:defRPr sz="900" b="1">
                 <a:solidFill>
                   <a:srgbClr val="A37F48"/>
                 </a:solidFill>
               </a:defRPr>
             </a:pPr>
             <a:r>
-              <a:t>02. 3중 융합 세포 단위 리셋 (스파+단식+섭생)</a:t>
-            </a:r>
-          </a:p>
-          <a:p>
-            <a:pPr>
-              <a:lnSpc>
-                <a:spcPct val="130000"/>
-              </a:lnSpc>
-              <a:defRPr sz="1150">
-                <a:solidFill>
-                  <a:srgbClr val="52463C"/>
-                </a:solidFill>
-              </a:defRPr>
-            </a:pPr>
-            <a:r>
-              <a:t>80분 이원화 바디 테라피(한의 수기 지압 + 순수 오일 림프 드레나쥐)와 12시간 단식(자가포식)을 결합합니다.</a:t>
-            </a:r>
-            <a:br/>
-            <a:br/>
-            <a:r>
-              <a:t>✨ 해결: 18:00~06:00 단식으로 세포 내 찌꺼기를 청소하고, 기상 직후 4대 체질 맞춤 영양 미역국으로 장부를 완벽하게 영양 재건합니다.</a:t>
-            </a:r>
-          </a:p>
-        </p:txBody>
-      </p:sp>
-      <p:sp>
-        <p:nvSpPr>
-          <p:cNvPr id="9" name="Rounded Rectangle 8"/>
+              <a:t>THE SOLUTION</a:t>
+            </a:r>
+          </a:p>
+        </p:txBody>
+      </p:sp>
+      <p:sp>
+        <p:nvSpPr>
+          <p:cNvPr id="7" name="TextBox 6"/>
+          <p:cNvSpPr txBox="1"/>
+          <p:nvPr/>
+        </p:nvSpPr>
+        <p:spPr>
+          <a:xfrm>
+            <a:off x="2926080" y="530352"/>
+            <a:ext cx="8503920" cy="548640"/>
+          </a:xfrm>
+          <a:prstGeom prst="rect">
+            <a:avLst/>
+          </a:prstGeom>
+          <a:noFill/>
+        </p:spPr>
+        <p:txBody>
+          <a:bodyPr wrap="none">
+            <a:spAutoFit/>
+          </a:bodyPr>
+          <a:lstStyle/>
+          <a:p>
+            <a:pPr>
+              <a:defRPr sz="2000" b="1">
+                <a:solidFill>
+                  <a:srgbClr val="241E19"/>
+                </a:solidFill>
+              </a:defRPr>
+            </a:pPr>
+            <a:r>
+              <a:t>Our Solution : 사상체질 스파가 제시하는 3대 근본 해결책</a:t>
+            </a:r>
+          </a:p>
+        </p:txBody>
+      </p:sp>
+      <p:sp>
+        <p:nvSpPr>
+          <p:cNvPr id="8" name="Rounded Rectangle 7"/>
           <p:cNvSpPr/>
           <p:nvPr/>
         </p:nvSpPr>
         <p:spPr>
           <a:xfrm>
-            <a:off x="7955280" y="1554480"/>
-            <a:ext cx="3383280" cy="4663440"/>
+            <a:off x="731520" y="1280160"/>
+            <a:ext cx="3383280" cy="5120640"/>
           </a:xfrm>
           <a:prstGeom prst="roundRect">
             <a:avLst/>
           </a:prstGeom>
           <a:solidFill>
-            <a:srgbClr val="FFFFFF"/>
+            <a:srgbClr val="ECFDF5"/>
           </a:solidFill>
           <a:ln w="15240">
             <a:solidFill>
-              <a:srgbClr val="1E5037"/>
+              <a:srgbClr val="34D399"/>
             </a:solidFill>
           </a:ln>
         </p:spPr>
@@ -7127,14 +4329,14 @@
       </p:sp>
       <p:sp>
         <p:nvSpPr>
-          <p:cNvPr id="10" name="TextBox 9"/>
+          <p:cNvPr id="9" name="TextBox 8"/>
           <p:cNvSpPr txBox="1"/>
           <p:nvPr/>
         </p:nvSpPr>
         <p:spPr>
           <a:xfrm>
-            <a:off x="8138160" y="1783080"/>
-            <a:ext cx="3017520" cy="4206240"/>
+            <a:off x="914400" y="1463040"/>
+            <a:ext cx="3017520" cy="4754880"/>
           </a:xfrm>
           <a:prstGeom prst="rect">
             <a:avLst/>
@@ -7146,6 +4348,21 @@
             <a:spAutoFit/>
           </a:bodyPr>
           <a:lstStyle/>
+          <a:p>
+            <a:pPr>
+              <a:spcAft>
+                <a:spcPts val="600"/>
+              </a:spcAft>
+              <a:defRPr sz="1100" b="1">
+                <a:solidFill>
+                  <a:srgbClr val="1E5A3C"/>
+                </a:solidFill>
+              </a:defRPr>
+            </a:pPr>
+            <a:r>
+              <a:t>SOLUTION 01</a:t>
+            </a:r>
+          </a:p>
           <a:p>
             <a:pPr>
               <a:spcAft>
@@ -7153,12 +4370,12 @@
               </a:spcAft>
               <a:defRPr sz="1500" b="1">
                 <a:solidFill>
-                  <a:srgbClr val="1E5037"/>
-                </a:solidFill>
-              </a:defRPr>
-            </a:pPr>
-            <a:r>
-              <a:t>03. 평생 지속 가능한 바이오 LTV 라이프스타일</a:t>
+                  <a:srgbClr val="241E19"/>
+                </a:solidFill>
+              </a:defRPr>
+            </a:pPr>
+            <a:r>
+              <a:t>장부대소 기반 0% 부작용 초개인화</a:t>
             </a:r>
           </a:p>
           <a:p>
@@ -7166,19 +4383,255 @@
               <a:lnSpc>
                 <a:spcPct val="130000"/>
               </a:lnSpc>
-              <a:defRPr sz="1150">
+              <a:defRPr sz="1100">
                 <a:solidFill>
                   <a:srgbClr val="52463C"/>
                 </a:solidFill>
               </a:defRPr>
             </a:pPr>
             <a:r>
-              <a:t>1회성 스파 방문을 넘어 DTC 유전자 분석 및 장내 미생물(마이크로바이옴) 키트를 연동합니다.</a:t>
+              <a:t>1894년 이제마의 해부생리학과 생체 데이터를 결합하여 간·폐·비·신의 장부 용량을 정밀 진단합니다.</a:t>
             </a:r>
             <a:br/>
             <a:br/>
             <a:r>
-              <a:t>✨ 해결: 일상 복귀 후에도 모바일 웹 처방전과 월간 맞춤 오일 정기구독(LRP)을 통해 체질 섭생을 평생 습관화하여 재발을 방지합니다.</a:t>
+              <a:t>✨ 해결: 오직 내 몸의 장부 편차에만 유효한 최고급 100% 순수 에센셜 오일과 맞춤 수온(41℃ 온열탕 vs 38.5℃ 쿨링탕)을 처방하여 부작용을 원천 차단합니다.</a:t>
+            </a:r>
+          </a:p>
+        </p:txBody>
+      </p:sp>
+      <p:sp>
+        <p:nvSpPr>
+          <p:cNvPr id="10" name="Rounded Rectangle 9"/>
+          <p:cNvSpPr/>
+          <p:nvPr/>
+        </p:nvSpPr>
+        <p:spPr>
+          <a:xfrm>
+            <a:off x="4343400" y="1280160"/>
+            <a:ext cx="3383280" cy="5120640"/>
+          </a:xfrm>
+          <a:prstGeom prst="roundRect">
+            <a:avLst/>
+          </a:prstGeom>
+          <a:solidFill>
+            <a:srgbClr val="ECFDF5"/>
+          </a:solidFill>
+          <a:ln w="15240">
+            <a:solidFill>
+              <a:srgbClr val="34D399"/>
+            </a:solidFill>
+          </a:ln>
+        </p:spPr>
+        <p:style>
+          <a:lnRef idx="1">
+            <a:schemeClr val="accent1"/>
+          </a:lnRef>
+          <a:fillRef idx="3">
+            <a:schemeClr val="accent1"/>
+          </a:fillRef>
+          <a:effectRef idx="2">
+            <a:schemeClr val="accent1"/>
+          </a:effectRef>
+          <a:fontRef idx="minor">
+            <a:schemeClr val="lt1"/>
+          </a:fontRef>
+        </p:style>
+        <p:txBody>
+          <a:bodyPr rtlCol="0" anchor="ctr"/>
+          <a:lstStyle/>
+          <a:p>
+            <a:pPr algn="ctr"/>
+          </a:p>
+        </p:txBody>
+      </p:sp>
+      <p:sp>
+        <p:nvSpPr>
+          <p:cNvPr id="11" name="TextBox 10"/>
+          <p:cNvSpPr txBox="1"/>
+          <p:nvPr/>
+        </p:nvSpPr>
+        <p:spPr>
+          <a:xfrm>
+            <a:off x="4526280" y="1463040"/>
+            <a:ext cx="3017520" cy="4754880"/>
+          </a:xfrm>
+          <a:prstGeom prst="rect">
+            <a:avLst/>
+          </a:prstGeom>
+          <a:noFill/>
+        </p:spPr>
+        <p:txBody>
+          <a:bodyPr wrap="square">
+            <a:spAutoFit/>
+          </a:bodyPr>
+          <a:lstStyle/>
+          <a:p>
+            <a:pPr>
+              <a:spcAft>
+                <a:spcPts val="600"/>
+              </a:spcAft>
+              <a:defRPr sz="1100" b="1">
+                <a:solidFill>
+                  <a:srgbClr val="1E5A3C"/>
+                </a:solidFill>
+              </a:defRPr>
+            </a:pPr>
+            <a:r>
+              <a:t>SOLUTION 02</a:t>
+            </a:r>
+          </a:p>
+          <a:p>
+            <a:pPr>
+              <a:spcAft>
+                <a:spcPts val="1200"/>
+              </a:spcAft>
+              <a:defRPr sz="1500" b="1">
+                <a:solidFill>
+                  <a:srgbClr val="241E19"/>
+                </a:solidFill>
+              </a:defRPr>
+            </a:pPr>
+            <a:r>
+              <a:t>3중 융합 신체 리셋 (스파+단식+섭생)</a:t>
+            </a:r>
+          </a:p>
+          <a:p>
+            <a:pPr>
+              <a:lnSpc>
+                <a:spcPct val="130000"/>
+              </a:lnSpc>
+              <a:defRPr sz="1100">
+                <a:solidFill>
+                  <a:srgbClr val="52463C"/>
+                </a:solidFill>
+              </a:defRPr>
+            </a:pPr>
+            <a:r>
+              <a:t>80분 이원화 바디 테라피(수기 지압+순수 오일 림프 드레나쥐)와 저녁 18:00~익일 06:00 12시간 단식(자가포식)을 결합합니다.</a:t>
+            </a:r>
+            <a:br/>
+            <a:br/>
+            <a:r>
+              <a:t>✨ 해결: 단식으로 세포 내 찌꺼기를 청소하고, 기상 직후 4대 체질 맞춤 영양 미역국 조식으로 장부를 완벽히 영양 재건합니다.</a:t>
+            </a:r>
+          </a:p>
+        </p:txBody>
+      </p:sp>
+      <p:sp>
+        <p:nvSpPr>
+          <p:cNvPr id="12" name="Rounded Rectangle 11"/>
+          <p:cNvSpPr/>
+          <p:nvPr/>
+        </p:nvSpPr>
+        <p:spPr>
+          <a:xfrm>
+            <a:off x="7955280" y="1280160"/>
+            <a:ext cx="3383280" cy="5120640"/>
+          </a:xfrm>
+          <a:prstGeom prst="roundRect">
+            <a:avLst/>
+          </a:prstGeom>
+          <a:solidFill>
+            <a:srgbClr val="ECFDF5"/>
+          </a:solidFill>
+          <a:ln w="15240">
+            <a:solidFill>
+              <a:srgbClr val="34D399"/>
+            </a:solidFill>
+          </a:ln>
+        </p:spPr>
+        <p:style>
+          <a:lnRef idx="1">
+            <a:schemeClr val="accent1"/>
+          </a:lnRef>
+          <a:fillRef idx="3">
+            <a:schemeClr val="accent1"/>
+          </a:fillRef>
+          <a:effectRef idx="2">
+            <a:schemeClr val="accent1"/>
+          </a:effectRef>
+          <a:fontRef idx="minor">
+            <a:schemeClr val="lt1"/>
+          </a:fontRef>
+        </p:style>
+        <p:txBody>
+          <a:bodyPr rtlCol="0" anchor="ctr"/>
+          <a:lstStyle/>
+          <a:p>
+            <a:pPr algn="ctr"/>
+          </a:p>
+        </p:txBody>
+      </p:sp>
+      <p:sp>
+        <p:nvSpPr>
+          <p:cNvPr id="13" name="TextBox 12"/>
+          <p:cNvSpPr txBox="1"/>
+          <p:nvPr/>
+        </p:nvSpPr>
+        <p:spPr>
+          <a:xfrm>
+            <a:off x="8138160" y="1463040"/>
+            <a:ext cx="3017520" cy="4754880"/>
+          </a:xfrm>
+          <a:prstGeom prst="rect">
+            <a:avLst/>
+          </a:prstGeom>
+          <a:noFill/>
+        </p:spPr>
+        <p:txBody>
+          <a:bodyPr wrap="square">
+            <a:spAutoFit/>
+          </a:bodyPr>
+          <a:lstStyle/>
+          <a:p>
+            <a:pPr>
+              <a:spcAft>
+                <a:spcPts val="600"/>
+              </a:spcAft>
+              <a:defRPr sz="1100" b="1">
+                <a:solidFill>
+                  <a:srgbClr val="1E5A3C"/>
+                </a:solidFill>
+              </a:defRPr>
+            </a:pPr>
+            <a:r>
+              <a:t>SOLUTION 03</a:t>
+            </a:r>
+          </a:p>
+          <a:p>
+            <a:pPr>
+              <a:spcAft>
+                <a:spcPts val="1200"/>
+              </a:spcAft>
+              <a:defRPr sz="1500" b="1">
+                <a:solidFill>
+                  <a:srgbClr val="241E19"/>
+                </a:solidFill>
+              </a:defRPr>
+            </a:pPr>
+            <a:r>
+              <a:t>평생 지속 가능한 바이오 LTV 라이프스타일</a:t>
+            </a:r>
+          </a:p>
+          <a:p>
+            <a:pPr>
+              <a:lnSpc>
+                <a:spcPct val="130000"/>
+              </a:lnSpc>
+              <a:defRPr sz="1100">
+                <a:solidFill>
+                  <a:srgbClr val="52463C"/>
+                </a:solidFill>
+              </a:defRPr>
+            </a:pPr>
+            <a:r>
+              <a:t>1회성 방문을 넘어 DTC 유전자 분석 및 장내 미생물(마이크로바이옴) 키트를 연동하여 1:1 모바일 바이오 리포트를 발행합니다.</a:t>
+            </a:r>
+            <a:br/>
+            <a:br/>
+            <a:r>
+              <a:t>✨ 해결: 일상 복귀 후에도 모바일 웹 처방전과 월간 맞춤 오일 정기구독(LRP)을 통해 체질 섭생을 평생 습관화합니다.</a:t>
             </a:r>
           </a:p>
         </p:txBody>
@@ -7246,14 +4699,57 @@
       </p:sp>
       <p:sp>
         <p:nvSpPr>
-          <p:cNvPr id="3" name="TextBox 2"/>
+          <p:cNvPr id="3" name="Rectangle 2"/>
+          <p:cNvSpPr/>
+          <p:nvPr/>
+        </p:nvSpPr>
+        <p:spPr>
+          <a:xfrm>
+            <a:off x="0" y="0"/>
+            <a:ext cx="12191695" cy="411480"/>
+          </a:xfrm>
+          <a:prstGeom prst="rect">
+            <a:avLst/>
+          </a:prstGeom>
+          <a:solidFill>
+            <a:srgbClr val="241E19"/>
+          </a:solidFill>
+          <a:ln>
+            <a:noFill/>
+          </a:ln>
+        </p:spPr>
+        <p:style>
+          <a:lnRef idx="1">
+            <a:schemeClr val="accent1"/>
+          </a:lnRef>
+          <a:fillRef idx="3">
+            <a:schemeClr val="accent1"/>
+          </a:fillRef>
+          <a:effectRef idx="2">
+            <a:schemeClr val="accent1"/>
+          </a:effectRef>
+          <a:fontRef idx="minor">
+            <a:schemeClr val="lt1"/>
+          </a:fontRef>
+        </p:style>
+        <p:txBody>
+          <a:bodyPr rtlCol="0" anchor="ctr"/>
+          <a:lstStyle/>
+          <a:p>
+            <a:pPr algn="ctr"/>
+          </a:p>
+        </p:txBody>
+      </p:sp>
+      <p:sp>
+        <p:nvSpPr>
+          <p:cNvPr id="4" name="TextBox 3"/>
           <p:cNvSpPr txBox="1"/>
           <p:nvPr/>
         </p:nvSpPr>
         <p:spPr>
           <a:xfrm>
-            <a:off x="731520" y="411480"/>
-            <a:ext cx="10515600" cy="365760"/>
+            <a:off x="731520" y="73152"/>
+            <a:ext cx="10728655" cy="274320"/>
           </a:xfrm>
           <a:prstGeom prst="rect">
             <a:avLst/>
@@ -7261,34 +4757,79 @@
           <a:noFill/>
         </p:spPr>
         <p:txBody>
-          <a:bodyPr wrap="square">
+          <a:bodyPr wrap="none">
             <a:spAutoFit/>
           </a:bodyPr>
           <a:lstStyle/>
           <a:p>
             <a:pPr>
-              <a:defRPr sz="1000" b="1">
-                <a:solidFill>
-                  <a:srgbClr val="A37F48"/>
-                </a:solidFill>
-              </a:defRPr>
-            </a:pPr>
-            <a:r>
-              <a:t>ROOT CAUSE MATCHING</a:t>
-            </a:r>
-          </a:p>
-        </p:txBody>
-      </p:sp>
-      <p:sp>
-        <p:nvSpPr>
-          <p:cNvPr id="4" name="TextBox 3"/>
+              <a:defRPr sz="900" b="1">
+                <a:solidFill>
+                  <a:srgbClr val="C8B9A0"/>
+                </a:solidFill>
+              </a:defRPr>
+            </a:pPr>
+            <a:r>
+              <a:t>SASANG SPA BOUTIQUE  |  K-WELLNESS HERITAGE &amp; BIOTECH  |  VIP DIRECTORS: 010-4728-9917</a:t>
+            </a:r>
+          </a:p>
+        </p:txBody>
+      </p:sp>
+      <p:sp>
+        <p:nvSpPr>
+          <p:cNvPr id="5" name="Rounded Rectangle 4"/>
+          <p:cNvSpPr/>
+          <p:nvPr/>
+        </p:nvSpPr>
+        <p:spPr>
+          <a:xfrm>
+            <a:off x="731520" y="621792"/>
+            <a:ext cx="2011680" cy="256032"/>
+          </a:xfrm>
+          <a:prstGeom prst="roundRect">
+            <a:avLst/>
+          </a:prstGeom>
+          <a:solidFill>
+            <a:srgbClr val="F8F5EE"/>
+          </a:solidFill>
+          <a:ln w="12700">
+            <a:solidFill>
+              <a:srgbClr val="C9A876"/>
+            </a:solidFill>
+          </a:ln>
+        </p:spPr>
+        <p:style>
+          <a:lnRef idx="1">
+            <a:schemeClr val="accent1"/>
+          </a:lnRef>
+          <a:fillRef idx="3">
+            <a:schemeClr val="accent1"/>
+          </a:fillRef>
+          <a:effectRef idx="2">
+            <a:schemeClr val="accent1"/>
+          </a:effectRef>
+          <a:fontRef idx="minor">
+            <a:schemeClr val="lt1"/>
+          </a:fontRef>
+        </p:style>
+        <p:txBody>
+          <a:bodyPr rtlCol="0" anchor="ctr"/>
+          <a:lstStyle/>
+          <a:p>
+            <a:pPr algn="ctr"/>
+          </a:p>
+        </p:txBody>
+      </p:sp>
+      <p:sp>
+        <p:nvSpPr>
+          <p:cNvPr id="6" name="TextBox 5"/>
           <p:cNvSpPr txBox="1"/>
           <p:nvPr/>
         </p:nvSpPr>
         <p:spPr>
           <a:xfrm>
-            <a:off x="731520" y="685800"/>
-            <a:ext cx="10515600" cy="731520"/>
+            <a:off x="777240" y="603504"/>
+            <a:ext cx="1920240" cy="274320"/>
           </a:xfrm>
           <a:prstGeom prst="rect">
             <a:avLst/>
@@ -7296,34 +4837,69 @@
           <a:noFill/>
         </p:spPr>
         <p:txBody>
-          <a:bodyPr wrap="square">
+          <a:bodyPr wrap="none">
             <a:spAutoFit/>
           </a:bodyPr>
           <a:lstStyle/>
           <a:p>
-            <a:pPr>
-              <a:defRPr sz="2200" b="1">
+            <a:pPr algn="ctr">
+              <a:defRPr sz="900" b="1">
+                <a:solidFill>
+                  <a:srgbClr val="A37F48"/>
+                </a:solidFill>
+              </a:defRPr>
+            </a:pPr>
+            <a:r>
+              <a:t>FOUR BODY TYPES</a:t>
+            </a:r>
+          </a:p>
+        </p:txBody>
+      </p:sp>
+      <p:sp>
+        <p:nvSpPr>
+          <p:cNvPr id="7" name="TextBox 6"/>
+          <p:cNvSpPr txBox="1"/>
+          <p:nvPr/>
+        </p:nvSpPr>
+        <p:spPr>
+          <a:xfrm>
+            <a:off x="2926080" y="530352"/>
+            <a:ext cx="8503920" cy="548640"/>
+          </a:xfrm>
+          <a:prstGeom prst="rect">
+            <a:avLst/>
+          </a:prstGeom>
+          <a:noFill/>
+        </p:spPr>
+        <p:txBody>
+          <a:bodyPr wrap="none">
+            <a:spAutoFit/>
+          </a:bodyPr>
+          <a:lstStyle/>
+          <a:p>
+            <a:pPr>
+              <a:defRPr sz="2000" b="1">
                 <a:solidFill>
                   <a:srgbClr val="241E19"/>
                 </a:solidFill>
               </a:defRPr>
             </a:pPr>
             <a:r>
-              <a:t>체질별 4대 고질적 병리 문제 &amp; 1:1 맞춤 해결 프로토콜</a:t>
-            </a:r>
-          </a:p>
-        </p:txBody>
-      </p:sp>
-      <p:sp>
-        <p:nvSpPr>
-          <p:cNvPr id="5" name="Rounded Rectangle 4"/>
+              <a:t>4대 사상체질 심층 처방 매트릭스 (Four Constitutions)</a:t>
+            </a:r>
+          </a:p>
+        </p:txBody>
+      </p:sp>
+      <p:sp>
+        <p:nvSpPr>
+          <p:cNvPr id="8" name="Rounded Rectangle 7"/>
           <p:cNvSpPr/>
           <p:nvPr/>
         </p:nvSpPr>
         <p:spPr>
           <a:xfrm>
-            <a:off x="731520" y="1554480"/>
-            <a:ext cx="2560320" cy="4663440"/>
+            <a:off x="731520" y="1280160"/>
+            <a:ext cx="2560320" cy="5120640"/>
           </a:xfrm>
           <a:prstGeom prst="roundRect">
             <a:avLst/>
@@ -7361,14 +4937,14 @@
       </p:sp>
       <p:sp>
         <p:nvSpPr>
-          <p:cNvPr id="6" name="TextBox 5"/>
+          <p:cNvPr id="9" name="TextBox 8"/>
           <p:cNvSpPr txBox="1"/>
           <p:nvPr/>
         </p:nvSpPr>
         <p:spPr>
           <a:xfrm>
-            <a:off x="868680" y="1737360"/>
-            <a:ext cx="2286000" cy="4297680"/>
+            <a:off x="868680" y="1417320"/>
+            <a:ext cx="2286000" cy="4846320"/>
           </a:xfrm>
           <a:prstGeom prst="rect">
             <a:avLst/>
@@ -7382,17 +4958,29 @@
           <a:lstStyle/>
           <a:p>
             <a:pPr>
+              <a:defRPr sz="1400" b="1">
+                <a:solidFill>
+                  <a:srgbClr val="A37F48"/>
+                </a:solidFill>
+              </a:defRPr>
+            </a:pPr>
+            <a:r>
+              <a:t>태음인 (肝大肺小)</a:t>
+            </a:r>
+          </a:p>
+          <a:p>
+            <a:pPr>
               <a:spcAft>
                 <a:spcPts val="800"/>
               </a:spcAft>
-              <a:defRPr sz="1450" b="1">
+              <a:defRPr sz="950">
                 <a:solidFill>
                   <a:srgbClr val="A37F48"/>
                 </a:solidFill>
               </a:defRPr>
             </a:pPr>
             <a:r>
-              <a:t>태음인 (肝大肺小)</a:t>
+              <a:t>간 기능 강함 / 폐·기관지 허약</a:t>
             </a:r>
           </a:p>
           <a:p>
@@ -7400,27 +4988,19 @@
               <a:lnSpc>
                 <a:spcPct val="125000"/>
               </a:lnSpc>
-              <a:defRPr sz="1050">
+              <a:defRPr sz="1000">
                 <a:solidFill>
                   <a:srgbClr val="241E19"/>
                 </a:solidFill>
               </a:defRPr>
             </a:pPr>
             <a:r>
-              <a:t>🚨 고질적 문제:</a:t>
-            </a:r>
-            <a:br/>
-            <a:r>
-              <a:t>• 폐/호흡기 건조 및 림프 노폐물 정체</a:t>
-            </a:r>
-            <a:br/>
-            <a:r>
-              <a:t>• 비만 및 심혈관 대사 정체 경향</a:t>
+              <a:t>🚨 고질 문제: 노폐물/림프 정체, 기관지 건조, 부종</a:t>
             </a:r>
             <a:br/>
             <a:br/>
             <a:r>
-              <a:t>💡 사상체질 스파 해법:</a:t>
+              <a:t>💡 스파 해법:</a:t>
             </a:r>
             <a:br/>
             <a:r>
@@ -7432,21 +5012,25 @@
             </a:r>
             <a:br/>
             <a:r>
-              <a:t>• 소고기 양지 들깨 미역국 + 우측 4지 은반지</a:t>
-            </a:r>
-          </a:p>
-        </p:txBody>
-      </p:sp>
-      <p:sp>
-        <p:nvSpPr>
-          <p:cNvPr id="7" name="Rounded Rectangle 6"/>
+              <a:t>• 소고기 양지 들깨 미역국 + 율무밥</a:t>
+            </a:r>
+            <a:br/>
+            <a:r>
+              <a:t>• 황색 가운 / 우측 4지 은반지 의전</a:t>
+            </a:r>
+          </a:p>
+        </p:txBody>
+      </p:sp>
+      <p:sp>
+        <p:nvSpPr>
+          <p:cNvPr id="10" name="Rounded Rectangle 9"/>
           <p:cNvSpPr/>
           <p:nvPr/>
         </p:nvSpPr>
         <p:spPr>
           <a:xfrm>
-            <a:off x="3429000" y="1554480"/>
-            <a:ext cx="2560320" cy="4663440"/>
+            <a:off x="3429000" y="1280160"/>
+            <a:ext cx="2560320" cy="5120640"/>
           </a:xfrm>
           <a:prstGeom prst="roundRect">
             <a:avLst/>
@@ -7456,7 +5040,7 @@
           </a:solidFill>
           <a:ln w="15240">
             <a:solidFill>
-              <a:srgbClr val="1E5037"/>
+              <a:srgbClr val="1E5A3C"/>
             </a:solidFill>
           </a:ln>
         </p:spPr>
@@ -7484,14 +5068,14 @@
       </p:sp>
       <p:sp>
         <p:nvSpPr>
-          <p:cNvPr id="8" name="TextBox 7"/>
+          <p:cNvPr id="11" name="TextBox 10"/>
           <p:cNvSpPr txBox="1"/>
           <p:nvPr/>
         </p:nvSpPr>
         <p:spPr>
           <a:xfrm>
-            <a:off x="3566160" y="1737360"/>
-            <a:ext cx="2286000" cy="4297680"/>
+            <a:off x="3566160" y="1417320"/>
+            <a:ext cx="2286000" cy="4846320"/>
           </a:xfrm>
           <a:prstGeom prst="rect">
             <a:avLst/>
@@ -7505,17 +5089,29 @@
           <a:lstStyle/>
           <a:p>
             <a:pPr>
+              <a:defRPr sz="1400" b="1">
+                <a:solidFill>
+                  <a:srgbClr val="1E5A3C"/>
+                </a:solidFill>
+              </a:defRPr>
+            </a:pPr>
+            <a:r>
+              <a:t>소양인 (脾大腎小)</a:t>
+            </a:r>
+          </a:p>
+          <a:p>
+            <a:pPr>
               <a:spcAft>
                 <a:spcPts val="800"/>
               </a:spcAft>
-              <a:defRPr sz="1450" b="1">
-                <a:solidFill>
-                  <a:srgbClr val="1E5037"/>
-                </a:solidFill>
-              </a:defRPr>
-            </a:pPr>
-            <a:r>
-              <a:t>소양인 (脾大腎小)</a:t>
+              <a:defRPr sz="950">
+                <a:solidFill>
+                  <a:srgbClr val="A37F48"/>
+                </a:solidFill>
+              </a:defRPr>
+            </a:pPr>
+            <a:r>
+              <a:t>소화기 열 많음 / 신장 음기 허약</a:t>
             </a:r>
           </a:p>
           <a:p>
@@ -7523,27 +5119,19 @@
               <a:lnSpc>
                 <a:spcPct val="125000"/>
               </a:lnSpc>
-              <a:defRPr sz="1050">
+              <a:defRPr sz="1000">
                 <a:solidFill>
                   <a:srgbClr val="241E19"/>
                 </a:solidFill>
               </a:defRPr>
             </a:pPr>
             <a:r>
-              <a:t>🚨 고질적 문제:</a:t>
-            </a:r>
-            <a:br/>
-            <a:r>
-              <a:t>• 상체 열감, 두통, 가슴 답답, 불면증</a:t>
-            </a:r>
-            <a:br/>
-            <a:r>
-              <a:t>• 신장 음기 고갈 및 급격한 감정 기복</a:t>
+              <a:t>🚨 고질 문제: 상열감, 편두통, 가슴 답답, 불면증</a:t>
             </a:r>
             <a:br/>
             <a:br/>
             <a:r>
-              <a:t>💡 사상체질 스파 해법:</a:t>
+              <a:t>💡 스파 해법:</a:t>
             </a:r>
             <a:br/>
             <a:r>
@@ -7555,21 +5143,25 @@
             </a:r>
             <a:br/>
             <a:r>
-              <a:t>• 돼지고기 수육 / 조개 미역국 + 좌측 2지 은반지</a:t>
-            </a:r>
-          </a:p>
-        </p:txBody>
-      </p:sp>
-      <p:sp>
-        <p:nvSpPr>
-          <p:cNvPr id="9" name="Rounded Rectangle 8"/>
+              <a:t>• 돼지고기 수육 / 조개 미역국 + 보리밥</a:t>
+            </a:r>
+            <a:br/>
+            <a:r>
+              <a:t>• 청색 가운 / 좌측 2지 은반지 의전</a:t>
+            </a:r>
+          </a:p>
+        </p:txBody>
+      </p:sp>
+      <p:sp>
+        <p:nvSpPr>
+          <p:cNvPr id="12" name="Rounded Rectangle 11"/>
           <p:cNvSpPr/>
           <p:nvPr/>
         </p:nvSpPr>
         <p:spPr>
           <a:xfrm>
-            <a:off x="6126480" y="1554480"/>
-            <a:ext cx="2560320" cy="4663440"/>
+            <a:off x="6126480" y="1280160"/>
+            <a:ext cx="2560320" cy="5120640"/>
           </a:xfrm>
           <a:prstGeom prst="roundRect">
             <a:avLst/>
@@ -7607,14 +5199,14 @@
       </p:sp>
       <p:sp>
         <p:nvSpPr>
-          <p:cNvPr id="10" name="TextBox 9"/>
+          <p:cNvPr id="13" name="TextBox 12"/>
           <p:cNvSpPr txBox="1"/>
           <p:nvPr/>
         </p:nvSpPr>
         <p:spPr>
           <a:xfrm>
-            <a:off x="6263640" y="1737360"/>
-            <a:ext cx="2286000" cy="4297680"/>
+            <a:off x="6263640" y="1417320"/>
+            <a:ext cx="2286000" cy="4846320"/>
           </a:xfrm>
           <a:prstGeom prst="rect">
             <a:avLst/>
@@ -7628,17 +5220,29 @@
           <a:lstStyle/>
           <a:p>
             <a:pPr>
+              <a:defRPr sz="1400" b="1">
+                <a:solidFill>
+                  <a:srgbClr val="A37F48"/>
+                </a:solidFill>
+              </a:defRPr>
+            </a:pPr>
+            <a:r>
+              <a:t>소음인 (腎大脾小)</a:t>
+            </a:r>
+          </a:p>
+          <a:p>
+            <a:pPr>
               <a:spcAft>
                 <a:spcPts val="800"/>
               </a:spcAft>
-              <a:defRPr sz="1450" b="1">
+              <a:defRPr sz="950">
                 <a:solidFill>
                   <a:srgbClr val="A37F48"/>
                 </a:solidFill>
               </a:defRPr>
             </a:pPr>
             <a:r>
-              <a:t>소음인 (腎大脾小)</a:t>
+              <a:t>신장 기능 튼튼 / 비위 차고 약함</a:t>
             </a:r>
           </a:p>
           <a:p>
@@ -7646,53 +5250,49 @@
               <a:lnSpc>
                 <a:spcPct val="125000"/>
               </a:lnSpc>
-              <a:defRPr sz="1050">
+              <a:defRPr sz="1000">
                 <a:solidFill>
                   <a:srgbClr val="241E19"/>
                 </a:solidFill>
               </a:defRPr>
             </a:pPr>
             <a:r>
-              <a:t>🚨 고질적 문제:</a:t>
-            </a:r>
-            <a:br/>
-            <a:r>
-              <a:t>• 수족냉증, 위장 냉증, 만성 소화불량</a:t>
-            </a:r>
-            <a:br/>
-            <a:r>
-              <a:t>• 자율신경 예민 및 만성 무기력/피로</a:t>
+              <a:t>🚨 고질 문제: 수족냉증, 위장 냉증, 만성 소화불량</a:t>
             </a:r>
             <a:br/>
             <a:br/>
             <a:r>
-              <a:t>💡 사상체질 스파 해법:</a:t>
+              <a:t>💡 스파 해법:</a:t>
             </a:r>
             <a:br/>
             <a:r>
-              <a:t>• 41℃ 한방 온열 족욕 + 42~45℃ 온열 챔버</a:t>
+              <a:t>• 41℃ 온열 족욕 + 1시간 온열 챔버(체온 1℃ 상승)</a:t>
             </a:r>
             <a:br/>
             <a:r>
-              <a:t>• 진저, 온가드, 시나몬 심부 체온 1℃ 상승</a:t>
+              <a:t>• 진저, 온가드, 시나몬 코어 웜업</a:t>
             </a:r>
             <a:br/>
             <a:r>
-              <a:t>• 닭가슴살 황기 보양 미역국 + 우측 3지 은반지</a:t>
-            </a:r>
-          </a:p>
-        </p:txBody>
-      </p:sp>
-      <p:sp>
-        <p:nvSpPr>
-          <p:cNvPr id="11" name="Rounded Rectangle 10"/>
+              <a:t>• 닭가슴살 황기 보양 미역국 + 찹쌀밥</a:t>
+            </a:r>
+            <a:br/>
+            <a:r>
+              <a:t>• 백색 가운 / 우측 3지 은반지 의전</a:t>
+            </a:r>
+          </a:p>
+        </p:txBody>
+      </p:sp>
+      <p:sp>
+        <p:nvSpPr>
+          <p:cNvPr id="14" name="Rounded Rectangle 13"/>
           <p:cNvSpPr/>
           <p:nvPr/>
         </p:nvSpPr>
         <p:spPr>
           <a:xfrm>
-            <a:off x="8823960" y="1554480"/>
-            <a:ext cx="2560320" cy="4663440"/>
+            <a:off x="8823960" y="1280160"/>
+            <a:ext cx="2560320" cy="5120640"/>
           </a:xfrm>
           <a:prstGeom prst="roundRect">
             <a:avLst/>
@@ -7702,7 +5302,7 @@
           </a:solidFill>
           <a:ln w="15240">
             <a:solidFill>
-              <a:srgbClr val="1E5037"/>
+              <a:srgbClr val="1E5A3C"/>
             </a:solidFill>
           </a:ln>
         </p:spPr>
@@ -7730,14 +5330,14 @@
       </p:sp>
       <p:sp>
         <p:nvSpPr>
-          <p:cNvPr id="12" name="TextBox 11"/>
+          <p:cNvPr id="15" name="TextBox 14"/>
           <p:cNvSpPr txBox="1"/>
           <p:nvPr/>
         </p:nvSpPr>
         <p:spPr>
           <a:xfrm>
-            <a:off x="8961120" y="1737360"/>
-            <a:ext cx="2286000" cy="4297680"/>
+            <a:off x="8961120" y="1417320"/>
+            <a:ext cx="2286000" cy="4846320"/>
           </a:xfrm>
           <a:prstGeom prst="rect">
             <a:avLst/>
@@ -7751,17 +5351,29 @@
           <a:lstStyle/>
           <a:p>
             <a:pPr>
+              <a:defRPr sz="1400" b="1">
+                <a:solidFill>
+                  <a:srgbClr val="1E5A3C"/>
+                </a:solidFill>
+              </a:defRPr>
+            </a:pPr>
+            <a:r>
+              <a:t>태양인 (肺大肝小)</a:t>
+            </a:r>
+          </a:p>
+          <a:p>
+            <a:pPr>
               <a:spcAft>
                 <a:spcPts val="800"/>
               </a:spcAft>
-              <a:defRPr sz="1450" b="1">
-                <a:solidFill>
-                  <a:srgbClr val="1E5037"/>
-                </a:solidFill>
-              </a:defRPr>
-            </a:pPr>
-            <a:r>
-              <a:t>태양인 (肺大肝小)</a:t>
+              <a:defRPr sz="950">
+                <a:solidFill>
+                  <a:srgbClr val="A37F48"/>
+                </a:solidFill>
+              </a:defRPr>
+            </a:pPr>
+            <a:r>
+              <a:t>폐 기능 강함 / 간 해독·하체 허약</a:t>
             </a:r>
           </a:p>
           <a:p>
@@ -7769,27 +5381,19 @@
               <a:lnSpc>
                 <a:spcPct val="125000"/>
               </a:lnSpc>
-              <a:defRPr sz="1050">
+              <a:defRPr sz="1000">
                 <a:solidFill>
                   <a:srgbClr val="241E19"/>
                 </a:solidFill>
               </a:defRPr>
             </a:pPr>
             <a:r>
-              <a:t>🚨 고질적 문제:</a:t>
-            </a:r>
-            <a:br/>
-            <a:r>
-              <a:t>• 기운 상기(上氣), 목덜미 강직</a:t>
-            </a:r>
-            <a:br/>
-            <a:r>
-              <a:t>• 간 해독력 저하 및 하체 무력감</a:t>
+              <a:t>🚨 고질 문제: 기운 상기증, 목덜미 강직, 하지 무력</a:t>
             </a:r>
             <a:br/>
             <a:br/>
             <a:r>
-              <a:t>💡 사상체질 스파 해법:</a:t>
+              <a:t>💡 스파 해법:</a:t>
             </a:r>
             <a:br/>
             <a:r>
@@ -7801,7 +5405,11 @@
             </a:r>
             <a:br/>
             <a:r>
-              <a:t>• 완도산 전복 홍합 맑은 해물 미역국 + 좌측 4지 은반지</a:t>
+              <a:t>• 완도산 전복 홍합 맑은 해물 미역국 + 메밀죽</a:t>
+            </a:r>
+            <a:br/>
+            <a:r>
+              <a:t>• 적색 가운 / 좌측 4지 은반지 의전</a:t>
             </a:r>
           </a:p>
         </p:txBody>
@@ -7869,14 +5477,57 @@
       </p:sp>
       <p:sp>
         <p:nvSpPr>
-          <p:cNvPr id="3" name="TextBox 2"/>
+          <p:cNvPr id="3" name="Rectangle 2"/>
+          <p:cNvSpPr/>
+          <p:nvPr/>
+        </p:nvSpPr>
+        <p:spPr>
+          <a:xfrm>
+            <a:off x="0" y="0"/>
+            <a:ext cx="12191695" cy="411480"/>
+          </a:xfrm>
+          <a:prstGeom prst="rect">
+            <a:avLst/>
+          </a:prstGeom>
+          <a:solidFill>
+            <a:srgbClr val="241E19"/>
+          </a:solidFill>
+          <a:ln>
+            <a:noFill/>
+          </a:ln>
+        </p:spPr>
+        <p:style>
+          <a:lnRef idx="1">
+            <a:schemeClr val="accent1"/>
+          </a:lnRef>
+          <a:fillRef idx="3">
+            <a:schemeClr val="accent1"/>
+          </a:fillRef>
+          <a:effectRef idx="2">
+            <a:schemeClr val="accent1"/>
+          </a:effectRef>
+          <a:fontRef idx="minor">
+            <a:schemeClr val="lt1"/>
+          </a:fontRef>
+        </p:style>
+        <p:txBody>
+          <a:bodyPr rtlCol="0" anchor="ctr"/>
+          <a:lstStyle/>
+          <a:p>
+            <a:pPr algn="ctr"/>
+          </a:p>
+        </p:txBody>
+      </p:sp>
+      <p:sp>
+        <p:nvSpPr>
+          <p:cNvPr id="4" name="TextBox 3"/>
           <p:cNvSpPr txBox="1"/>
           <p:nvPr/>
         </p:nvSpPr>
         <p:spPr>
           <a:xfrm>
-            <a:off x="731520" y="411480"/>
-            <a:ext cx="10515600" cy="365760"/>
+            <a:off x="731520" y="73152"/>
+            <a:ext cx="10728655" cy="274320"/>
           </a:xfrm>
           <a:prstGeom prst="rect">
             <a:avLst/>
@@ -7884,34 +5535,79 @@
           <a:noFill/>
         </p:spPr>
         <p:txBody>
-          <a:bodyPr wrap="square">
+          <a:bodyPr wrap="none">
             <a:spAutoFit/>
           </a:bodyPr>
           <a:lstStyle/>
           <a:p>
             <a:pPr>
-              <a:defRPr sz="1000" b="1">
-                <a:solidFill>
-                  <a:srgbClr val="A37F48"/>
-                </a:solidFill>
-              </a:defRPr>
-            </a:pPr>
-            <a:r>
-              <a:t>K-PREMIUM WELLNESS SPA 2026</a:t>
-            </a:r>
-          </a:p>
-        </p:txBody>
-      </p:sp>
-      <p:sp>
-        <p:nvSpPr>
-          <p:cNvPr id="4" name="TextBox 3"/>
+              <a:defRPr sz="900" b="1">
+                <a:solidFill>
+                  <a:srgbClr val="C8B9A0"/>
+                </a:solidFill>
+              </a:defRPr>
+            </a:pPr>
+            <a:r>
+              <a:t>SASANG SPA BOUTIQUE  |  K-WELLNESS HERITAGE &amp; BIOTECH  |  VIP DIRECTORS: 010-4728-9917</a:t>
+            </a:r>
+          </a:p>
+        </p:txBody>
+      </p:sp>
+      <p:sp>
+        <p:nvSpPr>
+          <p:cNvPr id="5" name="Rounded Rectangle 4"/>
+          <p:cNvSpPr/>
+          <p:nvPr/>
+        </p:nvSpPr>
+        <p:spPr>
+          <a:xfrm>
+            <a:off x="731520" y="621792"/>
+            <a:ext cx="2011680" cy="256032"/>
+          </a:xfrm>
+          <a:prstGeom prst="roundRect">
+            <a:avLst/>
+          </a:prstGeom>
+          <a:solidFill>
+            <a:srgbClr val="F8F5EE"/>
+          </a:solidFill>
+          <a:ln w="12700">
+            <a:solidFill>
+              <a:srgbClr val="C9A876"/>
+            </a:solidFill>
+          </a:ln>
+        </p:spPr>
+        <p:style>
+          <a:lnRef idx="1">
+            <a:schemeClr val="accent1"/>
+          </a:lnRef>
+          <a:fillRef idx="3">
+            <a:schemeClr val="accent1"/>
+          </a:fillRef>
+          <a:effectRef idx="2">
+            <a:schemeClr val="accent1"/>
+          </a:effectRef>
+          <a:fontRef idx="minor">
+            <a:schemeClr val="lt1"/>
+          </a:fontRef>
+        </p:style>
+        <p:txBody>
+          <a:bodyPr rtlCol="0" anchor="ctr"/>
+          <a:lstStyle/>
+          <a:p>
+            <a:pPr algn="ctr"/>
+          </a:p>
+        </p:txBody>
+      </p:sp>
+      <p:sp>
+        <p:nvSpPr>
+          <p:cNvPr id="6" name="TextBox 5"/>
           <p:cNvSpPr txBox="1"/>
           <p:nvPr/>
         </p:nvSpPr>
         <p:spPr>
           <a:xfrm>
-            <a:off x="731520" y="685800"/>
-            <a:ext cx="10515600" cy="731520"/>
+            <a:off x="777240" y="603504"/>
+            <a:ext cx="1920240" cy="274320"/>
           </a:xfrm>
           <a:prstGeom prst="rect">
             <a:avLst/>
@@ -7919,34 +5615,69 @@
           <a:noFill/>
         </p:spPr>
         <p:txBody>
-          <a:bodyPr wrap="square">
+          <a:bodyPr wrap="none">
             <a:spAutoFit/>
           </a:bodyPr>
           <a:lstStyle/>
           <a:p>
-            <a:pPr>
-              <a:defRPr sz="2200" b="1">
+            <a:pPr algn="ctr">
+              <a:defRPr sz="900" b="1">
+                <a:solidFill>
+                  <a:srgbClr val="A37F48"/>
+                </a:solidFill>
+              </a:defRPr>
+            </a:pPr>
+            <a:r>
+              <a:t>TREATMENT CATALOG</a:t>
+            </a:r>
+          </a:p>
+        </p:txBody>
+      </p:sp>
+      <p:sp>
+        <p:nvSpPr>
+          <p:cNvPr id="7" name="TextBox 6"/>
+          <p:cNvSpPr txBox="1"/>
+          <p:nvPr/>
+        </p:nvSpPr>
+        <p:spPr>
+          <a:xfrm>
+            <a:off x="2926080" y="530352"/>
+            <a:ext cx="8503920" cy="548640"/>
+          </a:xfrm>
+          <a:prstGeom prst="rect">
+            <a:avLst/>
+          </a:prstGeom>
+          <a:noFill/>
+        </p:spPr>
+        <p:txBody>
+          <a:bodyPr wrap="none">
+            <a:spAutoFit/>
+          </a:bodyPr>
+          <a:lstStyle/>
+          <a:p>
+            <a:pPr>
+              <a:defRPr sz="2000" b="1">
                 <a:solidFill>
                   <a:srgbClr val="241E19"/>
                 </a:solidFill>
               </a:defRPr>
             </a:pPr>
             <a:r>
-              <a:t>Executive Summary : 사상체질 스파 4대 핵심 축</a:t>
-            </a:r>
-          </a:p>
-        </p:txBody>
-      </p:sp>
-      <p:sp>
-        <p:nvSpPr>
-          <p:cNvPr id="5" name="Rounded Rectangle 4"/>
+              <a:t>10대 시그니처 테라피 트리트먼트 카탈로그</a:t>
+            </a:r>
+          </a:p>
+        </p:txBody>
+      </p:sp>
+      <p:sp>
+        <p:nvSpPr>
+          <p:cNvPr id="8" name="Rounded Rectangle 7"/>
           <p:cNvSpPr/>
           <p:nvPr/>
         </p:nvSpPr>
         <p:spPr>
           <a:xfrm>
-            <a:off x="731520" y="1554480"/>
-            <a:ext cx="5120640" cy="2103120"/>
+            <a:off x="731520" y="1371600"/>
+            <a:ext cx="2057400" cy="2331720"/>
           </a:xfrm>
           <a:prstGeom prst="roundRect">
             <a:avLst/>
@@ -7984,14 +5715,14 @@
       </p:sp>
       <p:sp>
         <p:nvSpPr>
-          <p:cNvPr id="6" name="TextBox 5"/>
+          <p:cNvPr id="9" name="TextBox 8"/>
           <p:cNvSpPr txBox="1"/>
           <p:nvPr/>
         </p:nvSpPr>
         <p:spPr>
           <a:xfrm>
-            <a:off x="960120" y="1737360"/>
-            <a:ext cx="4663440" cy="1737360"/>
+            <a:off x="841248" y="1481328"/>
+            <a:ext cx="1828800" cy="2103120"/>
           </a:xfrm>
           <a:prstGeom prst="rect">
             <a:avLst/>
@@ -8006,16 +5737,31 @@
           <a:p>
             <a:pPr>
               <a:spcAft>
-                <a:spcPts val="800"/>
+                <a:spcPts val="400"/>
               </a:spcAft>
-              <a:defRPr sz="1600" b="1">
-                <a:solidFill>
-                  <a:srgbClr val="1E5037"/>
-                </a:solidFill>
-              </a:defRPr>
-            </a:pPr>
-            <a:r>
-              <a:t>01. 사상체질 의학 과학화</a:t>
+              <a:defRPr sz="1000" b="1">
+                <a:solidFill>
+                  <a:srgbClr val="A37F48"/>
+                </a:solidFill>
+              </a:defRPr>
+            </a:pPr>
+            <a:r>
+              <a:t>THEME 01</a:t>
+            </a:r>
+          </a:p>
+          <a:p>
+            <a:pPr>
+              <a:spcAft>
+                <a:spcPts val="600"/>
+              </a:spcAft>
+              <a:defRPr sz="1200" b="1">
+                <a:solidFill>
+                  <a:srgbClr val="241E19"/>
+                </a:solidFill>
+              </a:defRPr>
+            </a:pPr>
+            <a:r>
+              <a:t>웰컴 오리엔테이션</a:t>
             </a:r>
           </a:p>
           <a:p>
@@ -8023,28 +5769,28 @@
               <a:lnSpc>
                 <a:spcPct val="120000"/>
               </a:lnSpc>
-              <a:defRPr sz="1200">
+              <a:defRPr sz="950">
                 <a:solidFill>
                   <a:srgbClr val="52463C"/>
                 </a:solidFill>
               </a:defRPr>
             </a:pPr>
             <a:r>
-              <a:t>1894년 이제마 『동의수세보원』 장부대소(臟腑大小) 원리와 인바디/뇌파/산화질소 데이터의 완벽한 융합</a:t>
-            </a:r>
-          </a:p>
-        </p:txBody>
-      </p:sp>
-      <p:sp>
-        <p:nvSpPr>
-          <p:cNvPr id="7" name="Rounded Rectangle 6"/>
+              <a:t>다실 1:1 상담 및 체질별 맞춤 웰컴 티 음용</a:t>
+            </a:r>
+          </a:p>
+        </p:txBody>
+      </p:sp>
+      <p:sp>
+        <p:nvSpPr>
+          <p:cNvPr id="10" name="Rounded Rectangle 9"/>
           <p:cNvSpPr/>
           <p:nvPr/>
         </p:nvSpPr>
         <p:spPr>
           <a:xfrm>
-            <a:off x="6126480" y="1554480"/>
-            <a:ext cx="5120640" cy="2103120"/>
+            <a:off x="2907791" y="1371600"/>
+            <a:ext cx="2057400" cy="2331720"/>
           </a:xfrm>
           <a:prstGeom prst="roundRect">
             <a:avLst/>
@@ -8082,14 +5828,14 @@
       </p:sp>
       <p:sp>
         <p:nvSpPr>
-          <p:cNvPr id="8" name="TextBox 7"/>
+          <p:cNvPr id="11" name="TextBox 10"/>
           <p:cNvSpPr txBox="1"/>
           <p:nvPr/>
         </p:nvSpPr>
         <p:spPr>
           <a:xfrm>
-            <a:off x="6355080" y="1737360"/>
-            <a:ext cx="4663440" cy="1737360"/>
+            <a:off x="3017519" y="1481328"/>
+            <a:ext cx="1828800" cy="2103120"/>
           </a:xfrm>
           <a:prstGeom prst="rect">
             <a:avLst/>
@@ -8104,16 +5850,31 @@
           <a:p>
             <a:pPr>
               <a:spcAft>
-                <a:spcPts val="800"/>
+                <a:spcPts val="400"/>
               </a:spcAft>
-              <a:defRPr sz="1600" b="1">
+              <a:defRPr sz="1000" b="1">
                 <a:solidFill>
                   <a:srgbClr val="A37F48"/>
                 </a:solidFill>
               </a:defRPr>
             </a:pPr>
             <a:r>
-              <a:t>02. 10대 시그니처 테라피</a:t>
+              <a:t>THEME 02</a:t>
+            </a:r>
+          </a:p>
+          <a:p>
+            <a:pPr>
+              <a:spcAft>
+                <a:spcPts val="600"/>
+              </a:spcAft>
+              <a:defRPr sz="1200" b="1">
+                <a:solidFill>
+                  <a:srgbClr val="241E19"/>
+                </a:solidFill>
+              </a:defRPr>
+            </a:pPr>
+            <a:r>
+              <a:t>20분 맞춤 약재 족욕</a:t>
             </a:r>
           </a:p>
           <a:p>
@@ -8121,28 +5882,28 @@
               <a:lnSpc>
                 <a:spcPct val="120000"/>
               </a:lnSpc>
-              <a:defRPr sz="1200">
+              <a:defRPr sz="950">
                 <a:solidFill>
                   <a:srgbClr val="52463C"/>
                 </a:solidFill>
               </a:defRPr>
             </a:pPr>
             <a:r>
-              <a:t>20분 약재 족욕, 은반지 의전, 80분 이원화 바디(한의 수기+순수 오일), 1시간 심부 온열, 태극선법 기체조</a:t>
-            </a:r>
-          </a:p>
-        </p:txBody>
-      </p:sp>
-      <p:sp>
-        <p:nvSpPr>
-          <p:cNvPr id="9" name="Rounded Rectangle 8"/>
+              <a:t>두한족열 순환. 41℃ 온열탕 vs 38.5℃ 쿨링탕</a:t>
+            </a:r>
+          </a:p>
+        </p:txBody>
+      </p:sp>
+      <p:sp>
+        <p:nvSpPr>
+          <p:cNvPr id="12" name="Rounded Rectangle 11"/>
           <p:cNvSpPr/>
           <p:nvPr/>
         </p:nvSpPr>
         <p:spPr>
           <a:xfrm>
-            <a:off x="731520" y="3931920"/>
-            <a:ext cx="5120640" cy="2103120"/>
+            <a:off x="5084064" y="1371600"/>
+            <a:ext cx="2057400" cy="2331720"/>
           </a:xfrm>
           <a:prstGeom prst="roundRect">
             <a:avLst/>
@@ -8180,14 +5941,14 @@
       </p:sp>
       <p:sp>
         <p:nvSpPr>
-          <p:cNvPr id="10" name="TextBox 9"/>
+          <p:cNvPr id="13" name="TextBox 12"/>
           <p:cNvSpPr txBox="1"/>
           <p:nvPr/>
         </p:nvSpPr>
         <p:spPr>
           <a:xfrm>
-            <a:off x="960120" y="4114800"/>
-            <a:ext cx="4663440" cy="1737360"/>
+            <a:off x="5193792" y="1481328"/>
+            <a:ext cx="1828800" cy="2103120"/>
           </a:xfrm>
           <a:prstGeom prst="rect">
             <a:avLst/>
@@ -8202,16 +5963,31 @@
           <a:p>
             <a:pPr>
               <a:spcAft>
-                <a:spcPts val="800"/>
+                <a:spcPts val="400"/>
               </a:spcAft>
-              <a:defRPr sz="1600" b="1">
-                <a:solidFill>
-                  <a:srgbClr val="1E5037"/>
-                </a:solidFill>
-              </a:defRPr>
-            </a:pPr>
-            <a:r>
-              <a:t>03. 12시간 단식 &amp; 맞춤 섭생</a:t>
+              <a:defRPr sz="1000" b="1">
+                <a:solidFill>
+                  <a:srgbClr val="A37F48"/>
+                </a:solidFill>
+              </a:defRPr>
+            </a:pPr>
+            <a:r>
+              <a:t>THEME 03</a:t>
+            </a:r>
+          </a:p>
+          <a:p>
+            <a:pPr>
+              <a:spcAft>
+                <a:spcPts val="600"/>
+              </a:spcAft>
+              <a:defRPr sz="1200" b="1">
+                <a:solidFill>
+                  <a:srgbClr val="241E19"/>
+                </a:solidFill>
+              </a:defRPr>
+            </a:pPr>
+            <a:r>
+              <a:t>에너지 &amp; 은반지 의전</a:t>
             </a:r>
           </a:p>
           <a:p>
@@ -8219,28 +5995,28 @@
               <a:lnSpc>
                 <a:spcPct val="120000"/>
               </a:lnSpc>
-              <a:defRPr sz="1200">
+              <a:defRPr sz="950">
                 <a:solidFill>
                   <a:srgbClr val="52463C"/>
                 </a:solidFill>
               </a:defRPr>
             </a:pPr>
             <a:r>
-              <a:t>18:00~06:00 단식을 통한 자가포식(Autophagy) 활성화 및 기상 후 4대 체질 맞춤 영양 미역국 조식</a:t>
-            </a:r>
-          </a:p>
-        </p:txBody>
-      </p:sp>
-      <p:sp>
-        <p:nvSpPr>
-          <p:cNvPr id="11" name="Rounded Rectangle 10"/>
+              <a:t>경락별 은반지 착용 및 4대 컬러 가운 비언어 의전</a:t>
+            </a:r>
+          </a:p>
+        </p:txBody>
+      </p:sp>
+      <p:sp>
+        <p:nvSpPr>
+          <p:cNvPr id="14" name="Rounded Rectangle 13"/>
           <p:cNvSpPr/>
           <p:nvPr/>
         </p:nvSpPr>
         <p:spPr>
           <a:xfrm>
-            <a:off x="6126480" y="3931920"/>
-            <a:ext cx="5120640" cy="2103120"/>
+            <a:off x="7260336" y="1371600"/>
+            <a:ext cx="2057400" cy="2331720"/>
           </a:xfrm>
           <a:prstGeom prst="roundRect">
             <a:avLst/>
@@ -8278,14 +6054,14 @@
       </p:sp>
       <p:sp>
         <p:nvSpPr>
-          <p:cNvPr id="12" name="TextBox 11"/>
+          <p:cNvPr id="15" name="TextBox 14"/>
           <p:cNvSpPr txBox="1"/>
           <p:nvPr/>
         </p:nvSpPr>
         <p:spPr>
           <a:xfrm>
-            <a:off x="6355080" y="4114800"/>
-            <a:ext cx="4663440" cy="1737360"/>
+            <a:off x="7370064" y="1481328"/>
+            <a:ext cx="1828800" cy="2103120"/>
           </a:xfrm>
           <a:prstGeom prst="rect">
             <a:avLst/>
@@ -8300,16 +6076,31 @@
           <a:p>
             <a:pPr>
               <a:spcAft>
-                <a:spcPts val="800"/>
+                <a:spcPts val="400"/>
               </a:spcAft>
-              <a:defRPr sz="1600" b="1">
+              <a:defRPr sz="1000" b="1">
                 <a:solidFill>
                   <a:srgbClr val="A37F48"/>
                 </a:solidFill>
               </a:defRPr>
             </a:pPr>
             <a:r>
-              <a:t>04. VIP 평생 LTV 모델</a:t>
+              <a:t>THEME 04</a:t>
+            </a:r>
+          </a:p>
+          <a:p>
+            <a:pPr>
+              <a:spcAft>
+                <a:spcPts val="600"/>
+              </a:spcAft>
+              <a:defRPr sz="1200" b="1">
+                <a:solidFill>
+                  <a:srgbClr val="241E19"/>
+                </a:solidFill>
+              </a:defRPr>
+            </a:pPr>
+            <a:r>
+              <a:t>12h 단식 &amp; 미역국</a:t>
             </a:r>
           </a:p>
           <a:p>
@@ -8317,14 +6108,692 @@
               <a:lnSpc>
                 <a:spcPct val="120000"/>
               </a:lnSpc>
-              <a:defRPr sz="1200">
+              <a:defRPr sz="950">
                 <a:solidFill>
                   <a:srgbClr val="52463C"/>
                 </a:solidFill>
               </a:defRPr>
             </a:pPr>
             <a:r>
-              <a:t>DTC 유전자 및 마이크로바이옴 검사 연동, 7일 후 1:1 바이오 리포트, 월간 맞춤 오일 정기구독(LRP) 생태계</a:t>
+              <a:t>18:00~06:00 자가포식 해독 + 4대 체질 맞춤 미역국</a:t>
+            </a:r>
+          </a:p>
+        </p:txBody>
+      </p:sp>
+      <p:sp>
+        <p:nvSpPr>
+          <p:cNvPr id="16" name="Rounded Rectangle 15"/>
+          <p:cNvSpPr/>
+          <p:nvPr/>
+        </p:nvSpPr>
+        <p:spPr>
+          <a:xfrm>
+            <a:off x="9436608" y="1371600"/>
+            <a:ext cx="2057400" cy="2331720"/>
+          </a:xfrm>
+          <a:prstGeom prst="roundRect">
+            <a:avLst/>
+          </a:prstGeom>
+          <a:solidFill>
+            <a:srgbClr val="FFFFFF"/>
+          </a:solidFill>
+          <a:ln w="15240">
+            <a:solidFill>
+              <a:srgbClr val="C9A876"/>
+            </a:solidFill>
+          </a:ln>
+        </p:spPr>
+        <p:style>
+          <a:lnRef idx="1">
+            <a:schemeClr val="accent1"/>
+          </a:lnRef>
+          <a:fillRef idx="3">
+            <a:schemeClr val="accent1"/>
+          </a:fillRef>
+          <a:effectRef idx="2">
+            <a:schemeClr val="accent1"/>
+          </a:effectRef>
+          <a:fontRef idx="minor">
+            <a:schemeClr val="lt1"/>
+          </a:fontRef>
+        </p:style>
+        <p:txBody>
+          <a:bodyPr rtlCol="0" anchor="ctr"/>
+          <a:lstStyle/>
+          <a:p>
+            <a:pPr algn="ctr"/>
+          </a:p>
+        </p:txBody>
+      </p:sp>
+      <p:sp>
+        <p:nvSpPr>
+          <p:cNvPr id="17" name="TextBox 16"/>
+          <p:cNvSpPr txBox="1"/>
+          <p:nvPr/>
+        </p:nvSpPr>
+        <p:spPr>
+          <a:xfrm>
+            <a:off x="9546336" y="1481328"/>
+            <a:ext cx="1828800" cy="2103120"/>
+          </a:xfrm>
+          <a:prstGeom prst="rect">
+            <a:avLst/>
+          </a:prstGeom>
+          <a:noFill/>
+        </p:spPr>
+        <p:txBody>
+          <a:bodyPr wrap="square">
+            <a:spAutoFit/>
+          </a:bodyPr>
+          <a:lstStyle/>
+          <a:p>
+            <a:pPr>
+              <a:spcAft>
+                <a:spcPts val="400"/>
+              </a:spcAft>
+              <a:defRPr sz="1000" b="1">
+                <a:solidFill>
+                  <a:srgbClr val="A37F48"/>
+                </a:solidFill>
+              </a:defRPr>
+            </a:pPr>
+            <a:r>
+              <a:t>THEME 05</a:t>
+            </a:r>
+          </a:p>
+          <a:p>
+            <a:pPr>
+              <a:spcAft>
+                <a:spcPts val="600"/>
+              </a:spcAft>
+              <a:defRPr sz="1200" b="1">
+                <a:solidFill>
+                  <a:srgbClr val="241E19"/>
+                </a:solidFill>
+              </a:defRPr>
+            </a:pPr>
+            <a:r>
+              <a:t>80분 이원화 바디</a:t>
+            </a:r>
+          </a:p>
+          <a:p>
+            <a:pPr>
+              <a:lnSpc>
+                <a:spcPct val="120000"/>
+              </a:lnSpc>
+              <a:defRPr sz="950">
+                <a:solidFill>
+                  <a:srgbClr val="52463C"/>
+                </a:solidFill>
+              </a:defRPr>
+            </a:pPr>
+            <a:r>
+              <a:t>한의 수기 지압(30분) + 순수 에센셜 오일(50분)</a:t>
+            </a:r>
+          </a:p>
+        </p:txBody>
+      </p:sp>
+      <p:sp>
+        <p:nvSpPr>
+          <p:cNvPr id="18" name="Rounded Rectangle 17"/>
+          <p:cNvSpPr/>
+          <p:nvPr/>
+        </p:nvSpPr>
+        <p:spPr>
+          <a:xfrm>
+            <a:off x="731520" y="3886200"/>
+            <a:ext cx="2057400" cy="2331720"/>
+          </a:xfrm>
+          <a:prstGeom prst="roundRect">
+            <a:avLst/>
+          </a:prstGeom>
+          <a:solidFill>
+            <a:srgbClr val="FFFFFF"/>
+          </a:solidFill>
+          <a:ln w="15240">
+            <a:solidFill>
+              <a:srgbClr val="C9A876"/>
+            </a:solidFill>
+          </a:ln>
+        </p:spPr>
+        <p:style>
+          <a:lnRef idx="1">
+            <a:schemeClr val="accent1"/>
+          </a:lnRef>
+          <a:fillRef idx="3">
+            <a:schemeClr val="accent1"/>
+          </a:fillRef>
+          <a:effectRef idx="2">
+            <a:schemeClr val="accent1"/>
+          </a:effectRef>
+          <a:fontRef idx="minor">
+            <a:schemeClr val="lt1"/>
+          </a:fontRef>
+        </p:style>
+        <p:txBody>
+          <a:bodyPr rtlCol="0" anchor="ctr"/>
+          <a:lstStyle/>
+          <a:p>
+            <a:pPr algn="ctr"/>
+          </a:p>
+        </p:txBody>
+      </p:sp>
+      <p:sp>
+        <p:nvSpPr>
+          <p:cNvPr id="19" name="TextBox 18"/>
+          <p:cNvSpPr txBox="1"/>
+          <p:nvPr/>
+        </p:nvSpPr>
+        <p:spPr>
+          <a:xfrm>
+            <a:off x="841248" y="3995928"/>
+            <a:ext cx="1828800" cy="2103120"/>
+          </a:xfrm>
+          <a:prstGeom prst="rect">
+            <a:avLst/>
+          </a:prstGeom>
+          <a:noFill/>
+        </p:spPr>
+        <p:txBody>
+          <a:bodyPr wrap="square">
+            <a:spAutoFit/>
+          </a:bodyPr>
+          <a:lstStyle/>
+          <a:p>
+            <a:pPr>
+              <a:spcAft>
+                <a:spcPts val="400"/>
+              </a:spcAft>
+              <a:defRPr sz="1000" b="1">
+                <a:solidFill>
+                  <a:srgbClr val="A37F48"/>
+                </a:solidFill>
+              </a:defRPr>
+            </a:pPr>
+            <a:r>
+              <a:t>THEME 06</a:t>
+            </a:r>
+          </a:p>
+          <a:p>
+            <a:pPr>
+              <a:spcAft>
+                <a:spcPts val="600"/>
+              </a:spcAft>
+              <a:defRPr sz="1200" b="1">
+                <a:solidFill>
+                  <a:srgbClr val="241E19"/>
+                </a:solidFill>
+              </a:defRPr>
+            </a:pPr>
+            <a:r>
+              <a:t>티 &amp; 30분 침묵 명상</a:t>
+            </a:r>
+          </a:p>
+          <a:p>
+            <a:pPr>
+              <a:lnSpc>
+                <a:spcPct val="120000"/>
+              </a:lnSpc>
+              <a:defRPr sz="950">
+                <a:solidFill>
+                  <a:srgbClr val="52463C"/>
+                </a:solidFill>
+              </a:defRPr>
+            </a:pPr>
+            <a:r>
+              <a:t>장인 도자기 다기 시연 &amp; 무언 침묵 명상(부교감 40%)</a:t>
+            </a:r>
+          </a:p>
+        </p:txBody>
+      </p:sp>
+      <p:sp>
+        <p:nvSpPr>
+          <p:cNvPr id="20" name="Rounded Rectangle 19"/>
+          <p:cNvSpPr/>
+          <p:nvPr/>
+        </p:nvSpPr>
+        <p:spPr>
+          <a:xfrm>
+            <a:off x="2907791" y="3886200"/>
+            <a:ext cx="2057400" cy="2331720"/>
+          </a:xfrm>
+          <a:prstGeom prst="roundRect">
+            <a:avLst/>
+          </a:prstGeom>
+          <a:solidFill>
+            <a:srgbClr val="FFFFFF"/>
+          </a:solidFill>
+          <a:ln w="15240">
+            <a:solidFill>
+              <a:srgbClr val="C9A876"/>
+            </a:solidFill>
+          </a:ln>
+        </p:spPr>
+        <p:style>
+          <a:lnRef idx="1">
+            <a:schemeClr val="accent1"/>
+          </a:lnRef>
+          <a:fillRef idx="3">
+            <a:schemeClr val="accent1"/>
+          </a:fillRef>
+          <a:effectRef idx="2">
+            <a:schemeClr val="accent1"/>
+          </a:effectRef>
+          <a:fontRef idx="minor">
+            <a:schemeClr val="lt1"/>
+          </a:fontRef>
+        </p:style>
+        <p:txBody>
+          <a:bodyPr rtlCol="0" anchor="ctr"/>
+          <a:lstStyle/>
+          <a:p>
+            <a:pPr algn="ctr"/>
+          </a:p>
+        </p:txBody>
+      </p:sp>
+      <p:sp>
+        <p:nvSpPr>
+          <p:cNvPr id="21" name="TextBox 20"/>
+          <p:cNvSpPr txBox="1"/>
+          <p:nvPr/>
+        </p:nvSpPr>
+        <p:spPr>
+          <a:xfrm>
+            <a:off x="3017519" y="3995928"/>
+            <a:ext cx="1828800" cy="2103120"/>
+          </a:xfrm>
+          <a:prstGeom prst="rect">
+            <a:avLst/>
+          </a:prstGeom>
+          <a:noFill/>
+        </p:spPr>
+        <p:txBody>
+          <a:bodyPr wrap="square">
+            <a:spAutoFit/>
+          </a:bodyPr>
+          <a:lstStyle/>
+          <a:p>
+            <a:pPr>
+              <a:spcAft>
+                <a:spcPts val="400"/>
+              </a:spcAft>
+              <a:defRPr sz="1000" b="1">
+                <a:solidFill>
+                  <a:srgbClr val="A37F48"/>
+                </a:solidFill>
+              </a:defRPr>
+            </a:pPr>
+            <a:r>
+              <a:t>THEME 07</a:t>
+            </a:r>
+          </a:p>
+          <a:p>
+            <a:pPr>
+              <a:spcAft>
+                <a:spcPts val="600"/>
+              </a:spcAft>
+              <a:defRPr sz="1200" b="1">
+                <a:solidFill>
+                  <a:srgbClr val="241E19"/>
+                </a:solidFill>
+              </a:defRPr>
+            </a:pPr>
+            <a:r>
+              <a:t>수(水) 산화질소 테라피</a:t>
+            </a:r>
+          </a:p>
+          <a:p>
+            <a:pPr>
+              <a:lnSpc>
+                <a:spcPct val="120000"/>
+              </a:lnSpc>
+              <a:defRPr sz="950">
+                <a:solidFill>
+                  <a:srgbClr val="52463C"/>
+                </a:solidFill>
+              </a:defRPr>
+            </a:pPr>
+            <a:r>
+              <a:t>NO 수 1.5L 음용 및 15분 전신 나노 미스트 챔버</a:t>
+            </a:r>
+          </a:p>
+        </p:txBody>
+      </p:sp>
+      <p:sp>
+        <p:nvSpPr>
+          <p:cNvPr id="22" name="Rounded Rectangle 21"/>
+          <p:cNvSpPr/>
+          <p:nvPr/>
+        </p:nvSpPr>
+        <p:spPr>
+          <a:xfrm>
+            <a:off x="5084064" y="3886200"/>
+            <a:ext cx="2057400" cy="2331720"/>
+          </a:xfrm>
+          <a:prstGeom prst="roundRect">
+            <a:avLst/>
+          </a:prstGeom>
+          <a:solidFill>
+            <a:srgbClr val="FFFFFF"/>
+          </a:solidFill>
+          <a:ln w="15240">
+            <a:solidFill>
+              <a:srgbClr val="C9A876"/>
+            </a:solidFill>
+          </a:ln>
+        </p:spPr>
+        <p:style>
+          <a:lnRef idx="1">
+            <a:schemeClr val="accent1"/>
+          </a:lnRef>
+          <a:fillRef idx="3">
+            <a:schemeClr val="accent1"/>
+          </a:fillRef>
+          <a:effectRef idx="2">
+            <a:schemeClr val="accent1"/>
+          </a:effectRef>
+          <a:fontRef idx="minor">
+            <a:schemeClr val="lt1"/>
+          </a:fontRef>
+        </p:style>
+        <p:txBody>
+          <a:bodyPr rtlCol="0" anchor="ctr"/>
+          <a:lstStyle/>
+          <a:p>
+            <a:pPr algn="ctr"/>
+          </a:p>
+        </p:txBody>
+      </p:sp>
+      <p:sp>
+        <p:nvSpPr>
+          <p:cNvPr id="23" name="TextBox 22"/>
+          <p:cNvSpPr txBox="1"/>
+          <p:nvPr/>
+        </p:nvSpPr>
+        <p:spPr>
+          <a:xfrm>
+            <a:off x="5193792" y="3995928"/>
+            <a:ext cx="1828800" cy="2103120"/>
+          </a:xfrm>
+          <a:prstGeom prst="rect">
+            <a:avLst/>
+          </a:prstGeom>
+          <a:noFill/>
+        </p:spPr>
+        <p:txBody>
+          <a:bodyPr wrap="square">
+            <a:spAutoFit/>
+          </a:bodyPr>
+          <a:lstStyle/>
+          <a:p>
+            <a:pPr>
+              <a:spcAft>
+                <a:spcPts val="400"/>
+              </a:spcAft>
+              <a:defRPr sz="1000" b="1">
+                <a:solidFill>
+                  <a:srgbClr val="A37F48"/>
+                </a:solidFill>
+              </a:defRPr>
+            </a:pPr>
+            <a:r>
+              <a:t>THEME 08</a:t>
+            </a:r>
+          </a:p>
+          <a:p>
+            <a:pPr>
+              <a:spcAft>
+                <a:spcPts val="600"/>
+              </a:spcAft>
+              <a:defRPr sz="1200" b="1">
+                <a:solidFill>
+                  <a:srgbClr val="241E19"/>
+                </a:solidFill>
+              </a:defRPr>
+            </a:pPr>
+            <a:r>
+              <a:t>온열 테라피 (체온 1℃↑)</a:t>
+            </a:r>
+          </a:p>
+          <a:p>
+            <a:pPr>
+              <a:lnSpc>
+                <a:spcPct val="120000"/>
+              </a:lnSpc>
+              <a:defRPr sz="950">
+                <a:solidFill>
+                  <a:srgbClr val="52463C"/>
+                </a:solidFill>
+              </a:defRPr>
+            </a:pPr>
+            <a:r>
+              <a:t>42~45℃ 1시간 원적외선 챔버 (면역 NK세포 5배)</a:t>
+            </a:r>
+          </a:p>
+        </p:txBody>
+      </p:sp>
+      <p:sp>
+        <p:nvSpPr>
+          <p:cNvPr id="24" name="Rounded Rectangle 23"/>
+          <p:cNvSpPr/>
+          <p:nvPr/>
+        </p:nvSpPr>
+        <p:spPr>
+          <a:xfrm>
+            <a:off x="7260336" y="3886200"/>
+            <a:ext cx="2057400" cy="2331720"/>
+          </a:xfrm>
+          <a:prstGeom prst="roundRect">
+            <a:avLst/>
+          </a:prstGeom>
+          <a:solidFill>
+            <a:srgbClr val="FFFFFF"/>
+          </a:solidFill>
+          <a:ln w="15240">
+            <a:solidFill>
+              <a:srgbClr val="C9A876"/>
+            </a:solidFill>
+          </a:ln>
+        </p:spPr>
+        <p:style>
+          <a:lnRef idx="1">
+            <a:schemeClr val="accent1"/>
+          </a:lnRef>
+          <a:fillRef idx="3">
+            <a:schemeClr val="accent1"/>
+          </a:fillRef>
+          <a:effectRef idx="2">
+            <a:schemeClr val="accent1"/>
+          </a:effectRef>
+          <a:fontRef idx="minor">
+            <a:schemeClr val="lt1"/>
+          </a:fontRef>
+        </p:style>
+        <p:txBody>
+          <a:bodyPr rtlCol="0" anchor="ctr"/>
+          <a:lstStyle/>
+          <a:p>
+            <a:pPr algn="ctr"/>
+          </a:p>
+        </p:txBody>
+      </p:sp>
+      <p:sp>
+        <p:nvSpPr>
+          <p:cNvPr id="25" name="TextBox 24"/>
+          <p:cNvSpPr txBox="1"/>
+          <p:nvPr/>
+        </p:nvSpPr>
+        <p:spPr>
+          <a:xfrm>
+            <a:off x="7370064" y="3995928"/>
+            <a:ext cx="1828800" cy="2103120"/>
+          </a:xfrm>
+          <a:prstGeom prst="rect">
+            <a:avLst/>
+          </a:prstGeom>
+          <a:noFill/>
+        </p:spPr>
+        <p:txBody>
+          <a:bodyPr wrap="square">
+            <a:spAutoFit/>
+          </a:bodyPr>
+          <a:lstStyle/>
+          <a:p>
+            <a:pPr>
+              <a:spcAft>
+                <a:spcPts val="400"/>
+              </a:spcAft>
+              <a:defRPr sz="1000" b="1">
+                <a:solidFill>
+                  <a:srgbClr val="A37F48"/>
+                </a:solidFill>
+              </a:defRPr>
+            </a:pPr>
+            <a:r>
+              <a:t>THEME 09</a:t>
+            </a:r>
+          </a:p>
+          <a:p>
+            <a:pPr>
+              <a:spcAft>
+                <a:spcPts val="600"/>
+              </a:spcAft>
+              <a:defRPr sz="1200" b="1">
+                <a:solidFill>
+                  <a:srgbClr val="241E19"/>
+                </a:solidFill>
+              </a:defRPr>
+            </a:pPr>
+            <a:r>
+              <a:t>전통 기체조: 태극선법</a:t>
+            </a:r>
+          </a:p>
+          <a:p>
+            <a:pPr>
+              <a:lnSpc>
+                <a:spcPct val="120000"/>
+              </a:lnSpc>
+              <a:defRPr sz="950">
+                <a:solidFill>
+                  <a:srgbClr val="52463C"/>
+                </a:solidFill>
+              </a:defRPr>
+            </a:pPr>
+            <a:r>
+              <a:t>단전 호흡 탁기 배출 &amp; 태극선법 8초식 동적 기혈 순환</a:t>
+            </a:r>
+          </a:p>
+        </p:txBody>
+      </p:sp>
+      <p:sp>
+        <p:nvSpPr>
+          <p:cNvPr id="26" name="Rounded Rectangle 25"/>
+          <p:cNvSpPr/>
+          <p:nvPr/>
+        </p:nvSpPr>
+        <p:spPr>
+          <a:xfrm>
+            <a:off x="9436608" y="3886200"/>
+            <a:ext cx="2057400" cy="2331720"/>
+          </a:xfrm>
+          <a:prstGeom prst="roundRect">
+            <a:avLst/>
+          </a:prstGeom>
+          <a:solidFill>
+            <a:srgbClr val="FFFFFF"/>
+          </a:solidFill>
+          <a:ln w="15240">
+            <a:solidFill>
+              <a:srgbClr val="C9A876"/>
+            </a:solidFill>
+          </a:ln>
+        </p:spPr>
+        <p:style>
+          <a:lnRef idx="1">
+            <a:schemeClr val="accent1"/>
+          </a:lnRef>
+          <a:fillRef idx="3">
+            <a:schemeClr val="accent1"/>
+          </a:fillRef>
+          <a:effectRef idx="2">
+            <a:schemeClr val="accent1"/>
+          </a:effectRef>
+          <a:fontRef idx="minor">
+            <a:schemeClr val="lt1"/>
+          </a:fontRef>
+        </p:style>
+        <p:txBody>
+          <a:bodyPr rtlCol="0" anchor="ctr"/>
+          <a:lstStyle/>
+          <a:p>
+            <a:pPr algn="ctr"/>
+          </a:p>
+        </p:txBody>
+      </p:sp>
+      <p:sp>
+        <p:nvSpPr>
+          <p:cNvPr id="27" name="TextBox 26"/>
+          <p:cNvSpPr txBox="1"/>
+          <p:nvPr/>
+        </p:nvSpPr>
+        <p:spPr>
+          <a:xfrm>
+            <a:off x="9546336" y="3995928"/>
+            <a:ext cx="1828800" cy="2103120"/>
+          </a:xfrm>
+          <a:prstGeom prst="rect">
+            <a:avLst/>
+          </a:prstGeom>
+          <a:noFill/>
+        </p:spPr>
+        <p:txBody>
+          <a:bodyPr wrap="square">
+            <a:spAutoFit/>
+          </a:bodyPr>
+          <a:lstStyle/>
+          <a:p>
+            <a:pPr>
+              <a:spcAft>
+                <a:spcPts val="400"/>
+              </a:spcAft>
+              <a:defRPr sz="1000" b="1">
+                <a:solidFill>
+                  <a:srgbClr val="A37F48"/>
+                </a:solidFill>
+              </a:defRPr>
+            </a:pPr>
+            <a:r>
+              <a:t>THEME 10</a:t>
+            </a:r>
+          </a:p>
+          <a:p>
+            <a:pPr>
+              <a:spcAft>
+                <a:spcPts val="600"/>
+              </a:spcAft>
+              <a:defRPr sz="1200" b="1">
+                <a:solidFill>
+                  <a:srgbClr val="241E19"/>
+                </a:solidFill>
+              </a:defRPr>
+            </a:pPr>
+            <a:r>
+              <a:t>멘탈: 정통 고요 명상</a:t>
+            </a:r>
+          </a:p>
+          <a:p>
+            <a:pPr>
+              <a:lnSpc>
+                <a:spcPct val="120000"/>
+              </a:lnSpc>
+              <a:defRPr sz="950">
+                <a:solidFill>
+                  <a:srgbClr val="52463C"/>
+                </a:solidFill>
+              </a:defRPr>
+            </a:pPr>
+            <a:r>
+              <a:t>사찰/선도 침묵 명상으로 뇌 피로도 70% 감소</a:t>
             </a:r>
           </a:p>
         </p:txBody>
@@ -8392,14 +6861,57 @@
       </p:sp>
       <p:sp>
         <p:nvSpPr>
-          <p:cNvPr id="3" name="TextBox 2"/>
+          <p:cNvPr id="3" name="Rectangle 2"/>
+          <p:cNvSpPr/>
+          <p:nvPr/>
+        </p:nvSpPr>
+        <p:spPr>
+          <a:xfrm>
+            <a:off x="0" y="0"/>
+            <a:ext cx="12191695" cy="411480"/>
+          </a:xfrm>
+          <a:prstGeom prst="rect">
+            <a:avLst/>
+          </a:prstGeom>
+          <a:solidFill>
+            <a:srgbClr val="241E19"/>
+          </a:solidFill>
+          <a:ln>
+            <a:noFill/>
+          </a:ln>
+        </p:spPr>
+        <p:style>
+          <a:lnRef idx="1">
+            <a:schemeClr val="accent1"/>
+          </a:lnRef>
+          <a:fillRef idx="3">
+            <a:schemeClr val="accent1"/>
+          </a:fillRef>
+          <a:effectRef idx="2">
+            <a:schemeClr val="accent1"/>
+          </a:effectRef>
+          <a:fontRef idx="minor">
+            <a:schemeClr val="lt1"/>
+          </a:fontRef>
+        </p:style>
+        <p:txBody>
+          <a:bodyPr rtlCol="0" anchor="ctr"/>
+          <a:lstStyle/>
+          <a:p>
+            <a:pPr algn="ctr"/>
+          </a:p>
+        </p:txBody>
+      </p:sp>
+      <p:sp>
+        <p:nvSpPr>
+          <p:cNvPr id="4" name="TextBox 3"/>
           <p:cNvSpPr txBox="1"/>
           <p:nvPr/>
         </p:nvSpPr>
         <p:spPr>
           <a:xfrm>
-            <a:off x="731520" y="411480"/>
-            <a:ext cx="10515600" cy="365760"/>
+            <a:off x="731520" y="73152"/>
+            <a:ext cx="10728655" cy="274320"/>
           </a:xfrm>
           <a:prstGeom prst="rect">
             <a:avLst/>
@@ -8407,34 +6919,79 @@
           <a:noFill/>
         </p:spPr>
         <p:txBody>
-          <a:bodyPr wrap="square">
+          <a:bodyPr wrap="none">
             <a:spAutoFit/>
           </a:bodyPr>
           <a:lstStyle/>
           <a:p>
             <a:pPr>
-              <a:defRPr sz="1000" b="1">
-                <a:solidFill>
-                  <a:srgbClr val="A37F48"/>
-                </a:solidFill>
-              </a:defRPr>
-            </a:pPr>
-            <a:r>
-              <a:t>K-PREMIUM WELLNESS SPA 2026</a:t>
-            </a:r>
-          </a:p>
-        </p:txBody>
-      </p:sp>
-      <p:sp>
-        <p:nvSpPr>
-          <p:cNvPr id="4" name="TextBox 3"/>
+              <a:defRPr sz="900" b="1">
+                <a:solidFill>
+                  <a:srgbClr val="C8B9A0"/>
+                </a:solidFill>
+              </a:defRPr>
+            </a:pPr>
+            <a:r>
+              <a:t>SASANG SPA BOUTIQUE  |  K-WELLNESS HERITAGE &amp; BIOTECH  |  VIP DIRECTORS: 010-4728-9917</a:t>
+            </a:r>
+          </a:p>
+        </p:txBody>
+      </p:sp>
+      <p:sp>
+        <p:nvSpPr>
+          <p:cNvPr id="5" name="Rounded Rectangle 4"/>
+          <p:cNvSpPr/>
+          <p:nvPr/>
+        </p:nvSpPr>
+        <p:spPr>
+          <a:xfrm>
+            <a:off x="731520" y="621792"/>
+            <a:ext cx="2011680" cy="256032"/>
+          </a:xfrm>
+          <a:prstGeom prst="roundRect">
+            <a:avLst/>
+          </a:prstGeom>
+          <a:solidFill>
+            <a:srgbClr val="F8F5EE"/>
+          </a:solidFill>
+          <a:ln w="12700">
+            <a:solidFill>
+              <a:srgbClr val="C9A876"/>
+            </a:solidFill>
+          </a:ln>
+        </p:spPr>
+        <p:style>
+          <a:lnRef idx="1">
+            <a:schemeClr val="accent1"/>
+          </a:lnRef>
+          <a:fillRef idx="3">
+            <a:schemeClr val="accent1"/>
+          </a:fillRef>
+          <a:effectRef idx="2">
+            <a:schemeClr val="accent1"/>
+          </a:effectRef>
+          <a:fontRef idx="minor">
+            <a:schemeClr val="lt1"/>
+          </a:fontRef>
+        </p:style>
+        <p:txBody>
+          <a:bodyPr rtlCol="0" anchor="ctr"/>
+          <a:lstStyle/>
+          <a:p>
+            <a:pPr algn="ctr"/>
+          </a:p>
+        </p:txBody>
+      </p:sp>
+      <p:sp>
+        <p:nvSpPr>
+          <p:cNvPr id="6" name="TextBox 5"/>
           <p:cNvSpPr txBox="1"/>
           <p:nvPr/>
         </p:nvSpPr>
         <p:spPr>
           <a:xfrm>
-            <a:off x="731520" y="685800"/>
-            <a:ext cx="10515600" cy="731520"/>
+            <a:off x="777240" y="603504"/>
+            <a:ext cx="1920240" cy="274320"/>
           </a:xfrm>
           <a:prstGeom prst="rect">
             <a:avLst/>
@@ -8442,34 +6999,69 @@
           <a:noFill/>
         </p:spPr>
         <p:txBody>
-          <a:bodyPr wrap="square">
+          <a:bodyPr wrap="none">
             <a:spAutoFit/>
           </a:bodyPr>
           <a:lstStyle/>
           <a:p>
-            <a:pPr>
-              <a:defRPr sz="2200" b="1">
+            <a:pPr algn="ctr">
+              <a:defRPr sz="900" b="1">
+                <a:solidFill>
+                  <a:srgbClr val="A37F48"/>
+                </a:solidFill>
+              </a:defRPr>
+            </a:pPr>
+            <a:r>
+              <a:t>SHRIVEDA FOOD CARE</a:t>
+            </a:r>
+          </a:p>
+        </p:txBody>
+      </p:sp>
+      <p:sp>
+        <p:nvSpPr>
+          <p:cNvPr id="7" name="TextBox 6"/>
+          <p:cNvSpPr txBox="1"/>
+          <p:nvPr/>
+        </p:nvSpPr>
+        <p:spPr>
+          <a:xfrm>
+            <a:off x="2926080" y="530352"/>
+            <a:ext cx="8503920" cy="548640"/>
+          </a:xfrm>
+          <a:prstGeom prst="rect">
+            <a:avLst/>
+          </a:prstGeom>
+          <a:noFill/>
+        </p:spPr>
+        <p:txBody>
+          <a:bodyPr wrap="none">
+            <a:spAutoFit/>
+          </a:bodyPr>
+          <a:lstStyle/>
+          <a:p>
+            <a:pPr>
+              <a:defRPr sz="2000" b="1">
                 <a:solidFill>
                   <a:srgbClr val="241E19"/>
                 </a:solidFill>
               </a:defRPr>
             </a:pPr>
             <a:r>
-              <a:t>글로벌 웰니스 시장(GWI)과 3세대 처방형 스파의 급부상</a:t>
-            </a:r>
-          </a:p>
-        </p:txBody>
-      </p:sp>
-      <p:sp>
-        <p:nvSpPr>
-          <p:cNvPr id="5" name="Rounded Rectangle 4"/>
+              <a:t>슈리베다식 푸드 테라피 : 12시간 단식 &amp; 4대 체질 미역국</a:t>
+            </a:r>
+          </a:p>
+        </p:txBody>
+      </p:sp>
+      <p:sp>
+        <p:nvSpPr>
+          <p:cNvPr id="8" name="Rounded Rectangle 7"/>
           <p:cNvSpPr/>
           <p:nvPr/>
         </p:nvSpPr>
         <p:spPr>
           <a:xfrm>
-            <a:off x="731520" y="1554480"/>
-            <a:ext cx="3474720" cy="4663440"/>
+            <a:off x="731520" y="1280160"/>
+            <a:ext cx="5120640" cy="5120640"/>
           </a:xfrm>
           <a:prstGeom prst="roundRect">
             <a:avLst/>
@@ -8507,14 +7099,14 @@
       </p:sp>
       <p:sp>
         <p:nvSpPr>
-          <p:cNvPr id="6" name="TextBox 5"/>
+          <p:cNvPr id="9" name="TextBox 8"/>
           <p:cNvSpPr txBox="1"/>
           <p:nvPr/>
         </p:nvSpPr>
         <p:spPr>
           <a:xfrm>
-            <a:off x="914400" y="1828800"/>
-            <a:ext cx="3108960" cy="4114800"/>
+            <a:off x="1005840" y="1554480"/>
+            <a:ext cx="4572000" cy="4572000"/>
           </a:xfrm>
           <a:prstGeom prst="rect">
             <a:avLst/>
@@ -8531,58 +7123,60 @@
               <a:spcAft>
                 <a:spcPts val="1200"/>
               </a:spcAft>
-              <a:defRPr sz="1100" b="1">
+              <a:defRPr sz="1600" b="1">
                 <a:solidFill>
                   <a:srgbClr val="C9A876"/>
                 </a:solidFill>
               </a:defRPr>
             </a:pPr>
             <a:r>
-              <a:t>GLOBAL WELLNESS 2026</a:t>
-            </a:r>
-          </a:p>
-          <a:p>
-            <a:pPr>
-              <a:spcAft>
-                <a:spcPts val="800"/>
-              </a:spcAft>
-              <a:defRPr sz="3200" b="1">
-                <a:solidFill>
-                  <a:srgbClr val="FFFFFF"/>
-                </a:solidFill>
-              </a:defRPr>
-            </a:pPr>
-            <a:r>
-              <a:t>$7.0 Trillion</a:t>
+              <a:t>12시간 단식 자가포식(Autophagy) 프로토콜</a:t>
             </a:r>
           </a:p>
           <a:p>
             <a:pPr>
               <a:lnSpc>
-                <a:spcPct val="130000"/>
+                <a:spcPct val="135000"/>
               </a:lnSpc>
               <a:defRPr sz="1200">
                 <a:solidFill>
-                  <a:srgbClr val="D2C8B4"/>
-                </a:solidFill>
-              </a:defRPr>
-            </a:pPr>
-            <a:r>
-              <a:t>연평균 8.6% 초고속 성장 중인 글로벌 웰니스 이코노미(약 9,500조 원). 글로벌 VIP 고객층은 단순 휴식을 넘어 '생체 데이터를 기반으로 내 몸을 리셋하는 처방형 스파'에 지갑을 열고 있습니다.</a:t>
-            </a:r>
-          </a:p>
-        </p:txBody>
-      </p:sp>
-      <p:sp>
-        <p:nvSpPr>
-          <p:cNvPr id="7" name="Rounded Rectangle 6"/>
+                  <a:srgbClr val="DCD7C8"/>
+                </a:solidFill>
+              </a:defRPr>
+            </a:pPr>
+            <a:r>
+              <a:t>• 18:00 저녁 약선 식사 종료 및 12시간 단식 돌입</a:t>
+            </a:r>
+            <a:br/>
+            <a:r>
+              <a:t>• 20:00 산화질소(NO) 수 음용 &amp; 30분 침묵 명상</a:t>
+            </a:r>
+            <a:br/>
+            <a:r>
+              <a:t>• 06:00 12시간 단식 완료 ➔ 기상 직후 미온수 &amp; 체질 주스</a:t>
+            </a:r>
+            <a:br/>
+            <a:r>
+              <a:t>• 07:30 4대 체질 맞춤 영양 미역국 조식 정식 제공</a:t>
+            </a:r>
+            <a:br/>
+            <a:br/>
+            <a:r>
+              <a:t>💡 자가포식 메커니즘: 소화기를 12시간 동안 완전히 쉬게 함으로써 세포 내 손상된 단백질과 노폐물을 스스로 분해 청소하고 장내 환경을 리셋합니다.</a:t>
+            </a:r>
+          </a:p>
+        </p:txBody>
+      </p:sp>
+      <p:sp>
+        <p:nvSpPr>
+          <p:cNvPr id="10" name="Rounded Rectangle 9"/>
           <p:cNvSpPr/>
           <p:nvPr/>
         </p:nvSpPr>
         <p:spPr>
           <a:xfrm>
-            <a:off x="4480560" y="1554480"/>
-            <a:ext cx="6949440" cy="2194560"/>
+            <a:off x="6217920" y="1280160"/>
+            <a:ext cx="5212080" cy="5120640"/>
           </a:xfrm>
           <a:prstGeom prst="roundRect">
             <a:avLst/>
@@ -8620,14 +7214,14 @@
       </p:sp>
       <p:sp>
         <p:nvSpPr>
-          <p:cNvPr id="8" name="TextBox 7"/>
+          <p:cNvPr id="11" name="TextBox 10"/>
           <p:cNvSpPr txBox="1"/>
           <p:nvPr/>
         </p:nvSpPr>
         <p:spPr>
           <a:xfrm>
-            <a:off x="4663440" y="1737360"/>
-            <a:ext cx="6583680" cy="1828800"/>
+            <a:off x="6492240" y="1554480"/>
+            <a:ext cx="4663440" cy="4572000"/>
           </a:xfrm>
           <a:prstGeom prst="rect">
             <a:avLst/>
@@ -8642,7 +7236,7 @@
           <a:p>
             <a:pPr>
               <a:spcAft>
-                <a:spcPts val="600"/>
+                <a:spcPts val="1200"/>
               </a:spcAft>
               <a:defRPr sz="1600" b="1">
                 <a:solidFill>
@@ -8651,132 +7245,83 @@
               </a:defRPr>
             </a:pPr>
             <a:r>
-              <a:t>스파 패러다임의 3단계 진화</a:t>
-            </a:r>
-          </a:p>
-          <a:p>
-            <a:pPr>
-              <a:lnSpc>
-                <a:spcPct val="130000"/>
-              </a:lnSpc>
-              <a:defRPr sz="1200">
+              <a:t>4대 체질 맞춤 프리미엄 미역국 조식</a:t>
+            </a:r>
+          </a:p>
+          <a:p>
+            <a:pPr>
+              <a:spcAft>
+                <a:spcPts val="800"/>
+              </a:spcAft>
+              <a:defRPr sz="1150">
                 <a:solidFill>
                   <a:srgbClr val="52463C"/>
                 </a:solidFill>
               </a:defRPr>
             </a:pPr>
             <a:r>
-              <a:t>• 1세대 (휴식형): 서양식 스웨디시, 단순 근육 이완 (차별화 한계)</a:t>
+              <a:t>• 태음인: 소고기 양지 들깨 미역국 + 율무밥</a:t>
             </a:r>
             <a:br/>
             <a:r>
-              <a:t>• 2세대 (시설/메디컬형): 5성급 리조트 하드웨어 및 의료 시술 결합 (고비용/부작용 리스크)</a:t>
+              <a:t>(폐/기관지 윤활 &amp; 고단백 세포 보양)</a:t>
+            </a:r>
+          </a:p>
+          <a:p>
+            <a:pPr>
+              <a:spcAft>
+                <a:spcPts val="800"/>
+              </a:spcAft>
+              <a:defRPr sz="1150">
+                <a:solidFill>
+                  <a:srgbClr val="52463C"/>
+                </a:solidFill>
+              </a:defRPr>
+            </a:pPr>
+            <a:r>
+              <a:t>• 소양인: 돼지고기 수육 미역국 or 맑은 조개 미역국 + 보리밥</a:t>
             </a:r>
             <a:br/>
             <a:r>
-              <a:t>• 👑 3세대 (초개인화 처방형): 생체 데이터 기반 사상체질 맞춤 신체 리셋 (사상체질 스파)</a:t>
-            </a:r>
-          </a:p>
-        </p:txBody>
-      </p:sp>
-      <p:sp>
-        <p:nvSpPr>
-          <p:cNvPr id="9" name="Rounded Rectangle 8"/>
-          <p:cNvSpPr/>
-          <p:nvPr/>
-        </p:nvSpPr>
-        <p:spPr>
-          <a:xfrm>
-            <a:off x="4480560" y="4023360"/>
-            <a:ext cx="6949440" cy="2194560"/>
-          </a:xfrm>
-          <a:prstGeom prst="roundRect">
-            <a:avLst/>
-          </a:prstGeom>
-          <a:solidFill>
-            <a:srgbClr val="F8F5EE"/>
-          </a:solidFill>
-          <a:ln w="15240">
-            <a:solidFill>
-              <a:srgbClr val="C9A876"/>
-            </a:solidFill>
-          </a:ln>
-        </p:spPr>
-        <p:style>
-          <a:lnRef idx="1">
-            <a:schemeClr val="accent1"/>
-          </a:lnRef>
-          <a:fillRef idx="3">
-            <a:schemeClr val="accent1"/>
-          </a:fillRef>
-          <a:effectRef idx="2">
-            <a:schemeClr val="accent1"/>
-          </a:effectRef>
-          <a:fontRef idx="minor">
-            <a:schemeClr val="lt1"/>
-          </a:fontRef>
-        </p:style>
-        <p:txBody>
-          <a:bodyPr rtlCol="0" anchor="ctr"/>
-          <a:lstStyle/>
-          <a:p>
-            <a:pPr algn="ctr"/>
-          </a:p>
-        </p:txBody>
-      </p:sp>
-      <p:sp>
-        <p:nvSpPr>
-          <p:cNvPr id="10" name="TextBox 9"/>
-          <p:cNvSpPr txBox="1"/>
-          <p:nvPr/>
-        </p:nvSpPr>
-        <p:spPr>
-          <a:xfrm>
-            <a:off x="4663440" y="4206240"/>
-            <a:ext cx="6583680" cy="1828800"/>
-          </a:xfrm>
-          <a:prstGeom prst="rect">
-            <a:avLst/>
-          </a:prstGeom>
-          <a:noFill/>
-        </p:spPr>
-        <p:txBody>
-          <a:bodyPr wrap="square">
-            <a:spAutoFit/>
-          </a:bodyPr>
-          <a:lstStyle/>
+              <a:t>(소화기 열 해독 &amp; 신장 음기 보강)</a:t>
+            </a:r>
+          </a:p>
           <a:p>
             <a:pPr>
               <a:spcAft>
-                <a:spcPts val="600"/>
+                <a:spcPts val="800"/>
               </a:spcAft>
-              <a:defRPr sz="1600" b="1">
-                <a:solidFill>
-                  <a:srgbClr val="A37F48"/>
-                </a:solidFill>
-              </a:defRPr>
-            </a:pPr>
-            <a:r>
-              <a:t>인도 아유르베다(3도샤) 대비 사상체질의 비교 우위</a:t>
-            </a:r>
-          </a:p>
-          <a:p>
-            <a:pPr>
-              <a:lnSpc>
-                <a:spcPct val="130000"/>
-              </a:lnSpc>
-              <a:defRPr sz="1200">
+              <a:defRPr sz="1150">
                 <a:solidFill>
                   <a:srgbClr val="52463C"/>
                 </a:solidFill>
               </a:defRPr>
             </a:pPr>
             <a:r>
-              <a:t>• 아유르베다: 3도샤(바타/피타/카파) 에너지의 철학적 분류 및 중금속 약재 안전성 논란</a:t>
+              <a:t>• 소음인: 닭가슴살 황기 보양 미역국 + 찹쌀밥</a:t>
             </a:r>
             <a:br/>
             <a:r>
-              <a:t>• 사상체질 스파: 간·폐·비·신 장부대소 해부생리학적 균형점 + 최고급 순수 에센셜 오일과 12시간 단식으로 부작용 0% 실현</a:t>
+              <a:t>(위장 심부 보온 &amp; 기력 증진)</a:t>
+            </a:r>
+          </a:p>
+          <a:p>
+            <a:pPr>
+              <a:spcAft>
+                <a:spcPts val="800"/>
+              </a:spcAft>
+              <a:defRPr sz="1150">
+                <a:solidFill>
+                  <a:srgbClr val="52463C"/>
+                </a:solidFill>
+              </a:defRPr>
+            </a:pPr>
+            <a:r>
+              <a:t>• 태양인: 완도산 전복 홍합 맑은 해물 미역국 + 메밀죽</a:t>
+            </a:r>
+            <a:br/>
+            <a:r>
+              <a:t>(간 해독 지원 &amp; 하체 기운 강화)</a:t>
             </a:r>
           </a:p>
         </p:txBody>
@@ -8844,14 +7389,57 @@
       </p:sp>
       <p:sp>
         <p:nvSpPr>
-          <p:cNvPr id="3" name="TextBox 2"/>
+          <p:cNvPr id="3" name="Rectangle 2"/>
+          <p:cNvSpPr/>
+          <p:nvPr/>
+        </p:nvSpPr>
+        <p:spPr>
+          <a:xfrm>
+            <a:off x="0" y="0"/>
+            <a:ext cx="12191695" cy="411480"/>
+          </a:xfrm>
+          <a:prstGeom prst="rect">
+            <a:avLst/>
+          </a:prstGeom>
+          <a:solidFill>
+            <a:srgbClr val="241E19"/>
+          </a:solidFill>
+          <a:ln>
+            <a:noFill/>
+          </a:ln>
+        </p:spPr>
+        <p:style>
+          <a:lnRef idx="1">
+            <a:schemeClr val="accent1"/>
+          </a:lnRef>
+          <a:fillRef idx="3">
+            <a:schemeClr val="accent1"/>
+          </a:fillRef>
+          <a:effectRef idx="2">
+            <a:schemeClr val="accent1"/>
+          </a:effectRef>
+          <a:fontRef idx="minor">
+            <a:schemeClr val="lt1"/>
+          </a:fontRef>
+        </p:style>
+        <p:txBody>
+          <a:bodyPr rtlCol="0" anchor="ctr"/>
+          <a:lstStyle/>
+          <a:p>
+            <a:pPr algn="ctr"/>
+          </a:p>
+        </p:txBody>
+      </p:sp>
+      <p:sp>
+        <p:nvSpPr>
+          <p:cNvPr id="4" name="TextBox 3"/>
           <p:cNvSpPr txBox="1"/>
           <p:nvPr/>
         </p:nvSpPr>
         <p:spPr>
           <a:xfrm>
-            <a:off x="731520" y="411480"/>
-            <a:ext cx="10515600" cy="365760"/>
+            <a:off x="731520" y="73152"/>
+            <a:ext cx="10728655" cy="274320"/>
           </a:xfrm>
           <a:prstGeom prst="rect">
             <a:avLst/>
@@ -8859,34 +7447,79 @@
           <a:noFill/>
         </p:spPr>
         <p:txBody>
-          <a:bodyPr wrap="square">
+          <a:bodyPr wrap="none">
             <a:spAutoFit/>
           </a:bodyPr>
           <a:lstStyle/>
           <a:p>
             <a:pPr>
-              <a:defRPr sz="1000" b="1">
-                <a:solidFill>
-                  <a:srgbClr val="A37F48"/>
-                </a:solidFill>
-              </a:defRPr>
-            </a:pPr>
-            <a:r>
-              <a:t>K-PREMIUM WELLNESS SPA 2026</a:t>
-            </a:r>
-          </a:p>
-        </p:txBody>
-      </p:sp>
-      <p:sp>
-        <p:nvSpPr>
-          <p:cNvPr id="4" name="TextBox 3"/>
+              <a:defRPr sz="900" b="1">
+                <a:solidFill>
+                  <a:srgbClr val="C8B9A0"/>
+                </a:solidFill>
+              </a:defRPr>
+            </a:pPr>
+            <a:r>
+              <a:t>SASANG SPA BOUTIQUE  |  K-WELLNESS HERITAGE &amp; BIOTECH  |  VIP DIRECTORS: 010-4728-9917</a:t>
+            </a:r>
+          </a:p>
+        </p:txBody>
+      </p:sp>
+      <p:sp>
+        <p:nvSpPr>
+          <p:cNvPr id="5" name="Rounded Rectangle 4"/>
+          <p:cNvSpPr/>
+          <p:nvPr/>
+        </p:nvSpPr>
+        <p:spPr>
+          <a:xfrm>
+            <a:off x="731520" y="621792"/>
+            <a:ext cx="2011680" cy="256032"/>
+          </a:xfrm>
+          <a:prstGeom prst="roundRect">
+            <a:avLst/>
+          </a:prstGeom>
+          <a:solidFill>
+            <a:srgbClr val="F8F5EE"/>
+          </a:solidFill>
+          <a:ln w="12700">
+            <a:solidFill>
+              <a:srgbClr val="C9A876"/>
+            </a:solidFill>
+          </a:ln>
+        </p:spPr>
+        <p:style>
+          <a:lnRef idx="1">
+            <a:schemeClr val="accent1"/>
+          </a:lnRef>
+          <a:fillRef idx="3">
+            <a:schemeClr val="accent1"/>
+          </a:fillRef>
+          <a:effectRef idx="2">
+            <a:schemeClr val="accent1"/>
+          </a:effectRef>
+          <a:fontRef idx="minor">
+            <a:schemeClr val="lt1"/>
+          </a:fontRef>
+        </p:style>
+        <p:txBody>
+          <a:bodyPr rtlCol="0" anchor="ctr"/>
+          <a:lstStyle/>
+          <a:p>
+            <a:pPr algn="ctr"/>
+          </a:p>
+        </p:txBody>
+      </p:sp>
+      <p:sp>
+        <p:nvSpPr>
+          <p:cNvPr id="6" name="TextBox 5"/>
           <p:cNvSpPr txBox="1"/>
           <p:nvPr/>
         </p:nvSpPr>
         <p:spPr>
           <a:xfrm>
-            <a:off x="731520" y="685800"/>
-            <a:ext cx="10515600" cy="731520"/>
+            <a:off x="777240" y="603504"/>
+            <a:ext cx="1920240" cy="274320"/>
           </a:xfrm>
           <a:prstGeom prst="rect">
             <a:avLst/>
@@ -8894,34 +7527,69 @@
           <a:noFill/>
         </p:spPr>
         <p:txBody>
-          <a:bodyPr wrap="square">
+          <a:bodyPr wrap="none">
             <a:spAutoFit/>
           </a:bodyPr>
           <a:lstStyle/>
           <a:p>
-            <a:pPr>
-              <a:defRPr sz="2200" b="1">
+            <a:pPr algn="ctr">
+              <a:defRPr sz="900" b="1">
+                <a:solidFill>
+                  <a:srgbClr val="A37F48"/>
+                </a:solidFill>
+              </a:defRPr>
+            </a:pPr>
+            <a:r>
+              <a:t>SCIENTIFIC DIAGNOSIS</a:t>
+            </a:r>
+          </a:p>
+        </p:txBody>
+      </p:sp>
+      <p:sp>
+        <p:nvSpPr>
+          <p:cNvPr id="7" name="TextBox 6"/>
+          <p:cNvSpPr txBox="1"/>
+          <p:nvPr/>
+        </p:nvSpPr>
+        <p:spPr>
+          <a:xfrm>
+            <a:off x="2926080" y="530352"/>
+            <a:ext cx="8503920" cy="548640"/>
+          </a:xfrm>
+          <a:prstGeom prst="rect">
+            <a:avLst/>
+          </a:prstGeom>
+          <a:noFill/>
+        </p:spPr>
+        <p:txBody>
+          <a:bodyPr wrap="none">
+            <a:spAutoFit/>
+          </a:bodyPr>
+          <a:lstStyle/>
+          <a:p>
+            <a:pPr>
+              <a:defRPr sz="2000" b="1">
                 <a:solidFill>
                   <a:srgbClr val="241E19"/>
                 </a:solidFill>
               </a:defRPr>
             </a:pPr>
             <a:r>
-              <a:t>핵심 의학 철학 : 1894년 이제마의 동의수세보원</a:t>
-            </a:r>
-          </a:p>
-        </p:txBody>
-      </p:sp>
-      <p:sp>
-        <p:nvSpPr>
-          <p:cNvPr id="5" name="Rounded Rectangle 4"/>
+              <a:t>데이터 기반 4단계 정밀 분석 및 체질 확정 시스템</a:t>
+            </a:r>
+          </a:p>
+        </p:txBody>
+      </p:sp>
+      <p:sp>
+        <p:nvSpPr>
+          <p:cNvPr id="8" name="Rounded Rectangle 7"/>
           <p:cNvSpPr/>
           <p:nvPr/>
         </p:nvSpPr>
         <p:spPr>
           <a:xfrm>
-            <a:off x="731520" y="1554480"/>
-            <a:ext cx="5120640" cy="4663440"/>
+            <a:off x="731520" y="1280160"/>
+            <a:ext cx="2560320" cy="5120640"/>
           </a:xfrm>
           <a:prstGeom prst="roundRect">
             <a:avLst/>
@@ -8959,14 +7627,14 @@
       </p:sp>
       <p:sp>
         <p:nvSpPr>
-          <p:cNvPr id="6" name="TextBox 5"/>
+          <p:cNvPr id="9" name="TextBox 8"/>
           <p:cNvSpPr txBox="1"/>
           <p:nvPr/>
         </p:nvSpPr>
         <p:spPr>
           <a:xfrm>
-            <a:off x="1005840" y="1828800"/>
-            <a:ext cx="4572000" cy="4114800"/>
+            <a:off x="868680" y="1463040"/>
+            <a:ext cx="2286000" cy="4754880"/>
           </a:xfrm>
           <a:prstGeom prst="rect">
             <a:avLst/>
@@ -8980,64 +7648,72 @@
           <a:lstStyle/>
           <a:p>
             <a:pPr>
+              <a:defRPr sz="1300" b="1">
+                <a:solidFill>
+                  <a:srgbClr val="A37F48"/>
+                </a:solidFill>
+              </a:defRPr>
+            </a:pPr>
+            <a:r>
+              <a:t>STEP 01</a:t>
+            </a:r>
+          </a:p>
+          <a:p>
+            <a:pPr>
               <a:spcAft>
                 <a:spcPts val="1000"/>
               </a:spcAft>
-              <a:defRPr sz="1800" b="1">
+              <a:defRPr sz="1400" b="1">
                 <a:solidFill>
                   <a:srgbClr val="241E19"/>
                 </a:solidFill>
               </a:defRPr>
             </a:pPr>
             <a:r>
-              <a:t>장부대소(臟腑大小)의 의학적 실체</a:t>
+              <a:t>기초 생체 &amp; 병력 문진표</a:t>
             </a:r>
           </a:p>
           <a:p>
             <a:pPr>
               <a:lnSpc>
-                <a:spcPct val="135000"/>
+                <a:spcPct val="130000"/>
               </a:lnSpc>
-              <a:defRPr sz="1250">
+              <a:defRPr sz="1100">
                 <a:solidFill>
                   <a:srgbClr val="52463C"/>
                 </a:solidFill>
               </a:defRPr>
             </a:pPr>
             <a:r>
-              <a:t>• 1894년 조선 실학자 이제마 선생 집대성</a:t>
+              <a:t>• 혈압, 공복 혈당, 가족력(심혈관/암)</a:t>
             </a:r>
             <a:br/>
             <a:r>
-              <a:t>• 인간을 획일적이지 않은 4가지 독자적 생명체로 해석</a:t>
+              <a:t>• 담낭 절제 등 주요 수술력 기록</a:t>
             </a:r>
             <a:br/>
             <a:r>
-              <a:t>• 간(肝)·폐(肺)·비(脾)·신(腎) 장기 용량의 생리적 편차 규명</a:t>
-            </a:r>
-            <a:br/>
-            <a:r>
-              <a:t>• 장부 편차에 따라 자율신경계와 영양 대사 경로가 완전히 상이함</a:t>
-            </a:r>
-          </a:p>
-        </p:txBody>
-      </p:sp>
-      <p:sp>
-        <p:nvSpPr>
-          <p:cNvPr id="7" name="Rounded Rectangle 6"/>
+              <a:t>• 개인별 알레르기 인자 전방위 분석</a:t>
+            </a:r>
+          </a:p>
+        </p:txBody>
+      </p:sp>
+      <p:sp>
+        <p:nvSpPr>
+          <p:cNvPr id="10" name="Rounded Rectangle 9"/>
           <p:cNvSpPr/>
           <p:nvPr/>
         </p:nvSpPr>
         <p:spPr>
           <a:xfrm>
-            <a:off x="6217920" y="1554480"/>
-            <a:ext cx="5212080" cy="4663440"/>
+            <a:off x="3429000" y="1280160"/>
+            <a:ext cx="2560320" cy="5120640"/>
           </a:xfrm>
           <a:prstGeom prst="roundRect">
             <a:avLst/>
           </a:prstGeom>
           <a:solidFill>
-            <a:srgbClr val="1A3328"/>
+            <a:srgbClr val="FFFFFF"/>
           </a:solidFill>
           <a:ln w="15240">
             <a:solidFill>
@@ -9069,14 +7745,14 @@
       </p:sp>
       <p:sp>
         <p:nvSpPr>
-          <p:cNvPr id="8" name="TextBox 7"/>
+          <p:cNvPr id="11" name="TextBox 10"/>
           <p:cNvSpPr txBox="1"/>
           <p:nvPr/>
         </p:nvSpPr>
         <p:spPr>
           <a:xfrm>
-            <a:off x="6492240" y="1828800"/>
-            <a:ext cx="4663440" cy="4114800"/>
+            <a:off x="3566160" y="1463040"/>
+            <a:ext cx="2286000" cy="4754880"/>
           </a:xfrm>
           <a:prstGeom prst="rect">
             <a:avLst/>
@@ -9090,48 +7766,288 @@
           <a:lstStyle/>
           <a:p>
             <a:pPr>
+              <a:defRPr sz="1300" b="1">
+                <a:solidFill>
+                  <a:srgbClr val="A37F48"/>
+                </a:solidFill>
+              </a:defRPr>
+            </a:pPr>
+            <a:r>
+              <a:t>STEP 02</a:t>
+            </a:r>
+          </a:p>
+          <a:p>
+            <a:pPr>
               <a:spcAft>
                 <a:spcPts val="1000"/>
               </a:spcAft>
-              <a:defRPr sz="1800" b="1">
-                <a:solidFill>
-                  <a:srgbClr val="C9A876"/>
-                </a:solidFill>
-              </a:defRPr>
-            </a:pPr>
-            <a:r>
-              <a:t>현대 바이오 사이언스와의 융합</a:t>
+              <a:defRPr sz="1400" b="1">
+                <a:solidFill>
+                  <a:srgbClr val="241E19"/>
+                </a:solidFill>
+              </a:defRPr>
+            </a:pPr>
+            <a:r>
+              <a:t>인바디 &amp; 양자/뇌파(EEG)</a:t>
             </a:r>
           </a:p>
           <a:p>
             <a:pPr>
               <a:lnSpc>
-                <a:spcPct val="135000"/>
+                <a:spcPct val="130000"/>
               </a:lnSpc>
-              <a:defRPr sz="1250">
-                <a:solidFill>
-                  <a:srgbClr val="DCD7C8"/>
-                </a:solidFill>
-              </a:defRPr>
-            </a:pPr>
-            <a:r>
-              <a:t>• 전통 한의학의 경험론을 넘어 현대 생체 데이터와 융합</a:t>
+              <a:defRPr sz="1100">
+                <a:solidFill>
+                  <a:srgbClr val="52463C"/>
+                </a:solidFill>
+              </a:defRPr>
+            </a:pPr>
+            <a:r>
+              <a:t>• InBody 770 체수분율 &amp; 림프 정체</a:t>
             </a:r>
             <a:br/>
             <a:r>
-              <a:t>• InBody 770 세포외수분비율 및 림프 부종 정밀 측정</a:t>
+              <a:t>• 장부 에너지 과부하/결핍 판독</a:t>
             </a:r>
             <a:br/>
             <a:r>
-              <a:t>• EEG 뇌파 분석을 통한 High-Beta파 교감신경 긴장도 평가</a:t>
+              <a:t>• High-Beta파 68% 뇌 피로 지수 측정</a:t>
+            </a:r>
+          </a:p>
+        </p:txBody>
+      </p:sp>
+      <p:sp>
+        <p:nvSpPr>
+          <p:cNvPr id="12" name="Rounded Rectangle 11"/>
+          <p:cNvSpPr/>
+          <p:nvPr/>
+        </p:nvSpPr>
+        <p:spPr>
+          <a:xfrm>
+            <a:off x="6126480" y="1280160"/>
+            <a:ext cx="2560320" cy="5120640"/>
+          </a:xfrm>
+          <a:prstGeom prst="roundRect">
+            <a:avLst/>
+          </a:prstGeom>
+          <a:solidFill>
+            <a:srgbClr val="FFFFFF"/>
+          </a:solidFill>
+          <a:ln w="15240">
+            <a:solidFill>
+              <a:srgbClr val="C9A876"/>
+            </a:solidFill>
+          </a:ln>
+        </p:spPr>
+        <p:style>
+          <a:lnRef idx="1">
+            <a:schemeClr val="accent1"/>
+          </a:lnRef>
+          <a:fillRef idx="3">
+            <a:schemeClr val="accent1"/>
+          </a:fillRef>
+          <a:effectRef idx="2">
+            <a:schemeClr val="accent1"/>
+          </a:effectRef>
+          <a:fontRef idx="minor">
+            <a:schemeClr val="lt1"/>
+          </a:fontRef>
+        </p:style>
+        <p:txBody>
+          <a:bodyPr rtlCol="0" anchor="ctr"/>
+          <a:lstStyle/>
+          <a:p>
+            <a:pPr algn="ctr"/>
+          </a:p>
+        </p:txBody>
+      </p:sp>
+      <p:sp>
+        <p:nvSpPr>
+          <p:cNvPr id="13" name="TextBox 12"/>
+          <p:cNvSpPr txBox="1"/>
+          <p:nvPr/>
+        </p:nvSpPr>
+        <p:spPr>
+          <a:xfrm>
+            <a:off x="6263640" y="1463040"/>
+            <a:ext cx="2286000" cy="4754880"/>
+          </a:xfrm>
+          <a:prstGeom prst="rect">
+            <a:avLst/>
+          </a:prstGeom>
+          <a:noFill/>
+        </p:spPr>
+        <p:txBody>
+          <a:bodyPr wrap="square">
+            <a:spAutoFit/>
+          </a:bodyPr>
+          <a:lstStyle/>
+          <a:p>
+            <a:pPr>
+              <a:defRPr sz="1300" b="1">
+                <a:solidFill>
+                  <a:srgbClr val="A37F48"/>
+                </a:solidFill>
+              </a:defRPr>
+            </a:pPr>
+            <a:r>
+              <a:t>STEP 03</a:t>
+            </a:r>
+          </a:p>
+          <a:p>
+            <a:pPr>
+              <a:spcAft>
+                <a:spcPts val="1000"/>
+              </a:spcAft>
+              <a:defRPr sz="1400" b="1">
+                <a:solidFill>
+                  <a:srgbClr val="241E19"/>
+                </a:solidFill>
+              </a:defRPr>
+            </a:pPr>
+            <a:r>
+              <a:t>산화질소(NO) 관리</a:t>
+            </a:r>
+          </a:p>
+          <a:p>
+            <a:pPr>
+              <a:lnSpc>
+                <a:spcPct val="130000"/>
+              </a:lnSpc>
+              <a:defRPr sz="1100">
+                <a:solidFill>
+                  <a:srgbClr val="52463C"/>
+                </a:solidFill>
+              </a:defRPr>
+            </a:pPr>
+            <a:r>
+              <a:t>• 타액 NO 산화질소 스트립 판독</a:t>
             </a:r>
             <a:br/>
             <a:r>
-              <a:t>• 타액 산화질소(NO) 스트립을 통한 혈관 탄력도 진단</a:t>
+              <a:t>• 혈관 탄성도 측정 및 결핍 진단</a:t>
             </a:r>
             <a:br/>
             <a:r>
-              <a:t>• 최고급 100% 순수 에센셜 오일과 12시간 단식 섭생 처방</a:t>
+              <a:t>• 1일 1.5L 음용 &amp; 나노 미스트 처방</a:t>
+            </a:r>
+          </a:p>
+        </p:txBody>
+      </p:sp>
+      <p:sp>
+        <p:nvSpPr>
+          <p:cNvPr id="14" name="Rounded Rectangle 13"/>
+          <p:cNvSpPr/>
+          <p:nvPr/>
+        </p:nvSpPr>
+        <p:spPr>
+          <a:xfrm>
+            <a:off x="8823960" y="1280160"/>
+            <a:ext cx="2560320" cy="5120640"/>
+          </a:xfrm>
+          <a:prstGeom prst="roundRect">
+            <a:avLst/>
+          </a:prstGeom>
+          <a:solidFill>
+            <a:srgbClr val="FFFFFF"/>
+          </a:solidFill>
+          <a:ln w="15240">
+            <a:solidFill>
+              <a:srgbClr val="C9A876"/>
+            </a:solidFill>
+          </a:ln>
+        </p:spPr>
+        <p:style>
+          <a:lnRef idx="1">
+            <a:schemeClr val="accent1"/>
+          </a:lnRef>
+          <a:fillRef idx="3">
+            <a:schemeClr val="accent1"/>
+          </a:fillRef>
+          <a:effectRef idx="2">
+            <a:schemeClr val="accent1"/>
+          </a:effectRef>
+          <a:fontRef idx="minor">
+            <a:schemeClr val="lt1"/>
+          </a:fontRef>
+        </p:style>
+        <p:txBody>
+          <a:bodyPr rtlCol="0" anchor="ctr"/>
+          <a:lstStyle/>
+          <a:p>
+            <a:pPr algn="ctr"/>
+          </a:p>
+        </p:txBody>
+      </p:sp>
+      <p:sp>
+        <p:nvSpPr>
+          <p:cNvPr id="15" name="TextBox 14"/>
+          <p:cNvSpPr txBox="1"/>
+          <p:nvPr/>
+        </p:nvSpPr>
+        <p:spPr>
+          <a:xfrm>
+            <a:off x="8961120" y="1463040"/>
+            <a:ext cx="2286000" cy="4754880"/>
+          </a:xfrm>
+          <a:prstGeom prst="rect">
+            <a:avLst/>
+          </a:prstGeom>
+          <a:noFill/>
+        </p:spPr>
+        <p:txBody>
+          <a:bodyPr wrap="square">
+            <a:spAutoFit/>
+          </a:bodyPr>
+          <a:lstStyle/>
+          <a:p>
+            <a:pPr>
+              <a:defRPr sz="1300" b="1">
+                <a:solidFill>
+                  <a:srgbClr val="A37F48"/>
+                </a:solidFill>
+              </a:defRPr>
+            </a:pPr>
+            <a:r>
+              <a:t>STEP 04</a:t>
+            </a:r>
+          </a:p>
+          <a:p>
+            <a:pPr>
+              <a:spcAft>
+                <a:spcPts val="1000"/>
+              </a:spcAft>
+              <a:defRPr sz="1400" b="1">
+                <a:solidFill>
+                  <a:srgbClr val="241E19"/>
+                </a:solidFill>
+              </a:defRPr>
+            </a:pPr>
+            <a:r>
+              <a:t>사상체질 최종 확정</a:t>
+            </a:r>
+          </a:p>
+          <a:p>
+            <a:pPr>
+              <a:lnSpc>
+                <a:spcPct val="130000"/>
+              </a:lnSpc>
+              <a:defRPr sz="1100">
+                <a:solidFill>
+                  <a:srgbClr val="52463C"/>
+                </a:solidFill>
+              </a:defRPr>
+            </a:pPr>
+            <a:r>
+              <a:t>• 태음/소양/소음/태양 장부 확정</a:t>
+            </a:r>
+            <a:br/>
+            <a:r>
+              <a:t>• 1:1 맞춤 VIP 웹 처방전 발행</a:t>
+            </a:r>
+            <a:br/>
+            <a:r>
+              <a:t>• 은반지 착용 및 4대 컬러 가운 배정</a:t>
             </a:r>
           </a:p>
         </p:txBody>
@@ -9199,14 +8115,57 @@
       </p:sp>
       <p:sp>
         <p:nvSpPr>
-          <p:cNvPr id="3" name="TextBox 2"/>
+          <p:cNvPr id="3" name="Rectangle 2"/>
+          <p:cNvSpPr/>
+          <p:nvPr/>
+        </p:nvSpPr>
+        <p:spPr>
+          <a:xfrm>
+            <a:off x="0" y="0"/>
+            <a:ext cx="12191695" cy="411480"/>
+          </a:xfrm>
+          <a:prstGeom prst="rect">
+            <a:avLst/>
+          </a:prstGeom>
+          <a:solidFill>
+            <a:srgbClr val="241E19"/>
+          </a:solidFill>
+          <a:ln>
+            <a:noFill/>
+          </a:ln>
+        </p:spPr>
+        <p:style>
+          <a:lnRef idx="1">
+            <a:schemeClr val="accent1"/>
+          </a:lnRef>
+          <a:fillRef idx="3">
+            <a:schemeClr val="accent1"/>
+          </a:fillRef>
+          <a:effectRef idx="2">
+            <a:schemeClr val="accent1"/>
+          </a:effectRef>
+          <a:fontRef idx="minor">
+            <a:schemeClr val="lt1"/>
+          </a:fontRef>
+        </p:style>
+        <p:txBody>
+          <a:bodyPr rtlCol="0" anchor="ctr"/>
+          <a:lstStyle/>
+          <a:p>
+            <a:pPr algn="ctr"/>
+          </a:p>
+        </p:txBody>
+      </p:sp>
+      <p:sp>
+        <p:nvSpPr>
+          <p:cNvPr id="4" name="TextBox 3"/>
           <p:cNvSpPr txBox="1"/>
           <p:nvPr/>
         </p:nvSpPr>
         <p:spPr>
           <a:xfrm>
-            <a:off x="731520" y="411480"/>
-            <a:ext cx="10515600" cy="365760"/>
+            <a:off x="731520" y="73152"/>
+            <a:ext cx="10728655" cy="274320"/>
           </a:xfrm>
           <a:prstGeom prst="rect">
             <a:avLst/>
@@ -9214,34 +8173,79 @@
           <a:noFill/>
         </p:spPr>
         <p:txBody>
-          <a:bodyPr wrap="square">
+          <a:bodyPr wrap="none">
             <a:spAutoFit/>
           </a:bodyPr>
           <a:lstStyle/>
           <a:p>
             <a:pPr>
-              <a:defRPr sz="1000" b="1">
-                <a:solidFill>
-                  <a:srgbClr val="A37F48"/>
-                </a:solidFill>
-              </a:defRPr>
-            </a:pPr>
-            <a:r>
-              <a:t>K-PREMIUM WELLNESS SPA 2026</a:t>
-            </a:r>
-          </a:p>
-        </p:txBody>
-      </p:sp>
-      <p:sp>
-        <p:nvSpPr>
-          <p:cNvPr id="4" name="TextBox 3"/>
+              <a:defRPr sz="900" b="1">
+                <a:solidFill>
+                  <a:srgbClr val="C8B9A0"/>
+                </a:solidFill>
+              </a:defRPr>
+            </a:pPr>
+            <a:r>
+              <a:t>SASANG SPA BOUTIQUE  |  K-WELLNESS HERITAGE &amp; BIOTECH  |  VIP DIRECTORS: 010-4728-9917</a:t>
+            </a:r>
+          </a:p>
+        </p:txBody>
+      </p:sp>
+      <p:sp>
+        <p:nvSpPr>
+          <p:cNvPr id="5" name="Rounded Rectangle 4"/>
+          <p:cNvSpPr/>
+          <p:nvPr/>
+        </p:nvSpPr>
+        <p:spPr>
+          <a:xfrm>
+            <a:off x="731520" y="621792"/>
+            <a:ext cx="2011680" cy="256032"/>
+          </a:xfrm>
+          <a:prstGeom prst="roundRect">
+            <a:avLst/>
+          </a:prstGeom>
+          <a:solidFill>
+            <a:srgbClr val="F8F5EE"/>
+          </a:solidFill>
+          <a:ln w="12700">
+            <a:solidFill>
+              <a:srgbClr val="C9A876"/>
+            </a:solidFill>
+          </a:ln>
+        </p:spPr>
+        <p:style>
+          <a:lnRef idx="1">
+            <a:schemeClr val="accent1"/>
+          </a:lnRef>
+          <a:fillRef idx="3">
+            <a:schemeClr val="accent1"/>
+          </a:fillRef>
+          <a:effectRef idx="2">
+            <a:schemeClr val="accent1"/>
+          </a:effectRef>
+          <a:fontRef idx="minor">
+            <a:schemeClr val="lt1"/>
+          </a:fontRef>
+        </p:style>
+        <p:txBody>
+          <a:bodyPr rtlCol="0" anchor="ctr"/>
+          <a:lstStyle/>
+          <a:p>
+            <a:pPr algn="ctr"/>
+          </a:p>
+        </p:txBody>
+      </p:sp>
+      <p:sp>
+        <p:nvSpPr>
+          <p:cNvPr id="6" name="TextBox 5"/>
           <p:cNvSpPr txBox="1"/>
           <p:nvPr/>
         </p:nvSpPr>
         <p:spPr>
           <a:xfrm>
-            <a:off x="731520" y="685800"/>
-            <a:ext cx="10515600" cy="731520"/>
+            <a:off x="777240" y="603504"/>
+            <a:ext cx="1920240" cy="274320"/>
           </a:xfrm>
           <a:prstGeom prst="rect">
             <a:avLst/>
@@ -9249,34 +8253,69 @@
           <a:noFill/>
         </p:spPr>
         <p:txBody>
-          <a:bodyPr wrap="square">
+          <a:bodyPr wrap="none">
             <a:spAutoFit/>
           </a:bodyPr>
           <a:lstStyle/>
           <a:p>
-            <a:pPr>
-              <a:defRPr sz="2200" b="1">
+            <a:pPr algn="ctr">
+              <a:defRPr sz="900" b="1">
+                <a:solidFill>
+                  <a:srgbClr val="A37F48"/>
+                </a:solidFill>
+              </a:defRPr>
+            </a:pPr>
+            <a:r>
+              <a:t>EXCLUSIVE RETREATS</a:t>
+            </a:r>
+          </a:p>
+        </p:txBody>
+      </p:sp>
+      <p:sp>
+        <p:nvSpPr>
+          <p:cNvPr id="7" name="TextBox 6"/>
+          <p:cNvSpPr txBox="1"/>
+          <p:nvPr/>
+        </p:nvSpPr>
+        <p:spPr>
+          <a:xfrm>
+            <a:off x="2926080" y="530352"/>
+            <a:ext cx="8503920" cy="548640"/>
+          </a:xfrm>
+          <a:prstGeom prst="rect">
+            <a:avLst/>
+          </a:prstGeom>
+          <a:noFill/>
+        </p:spPr>
+        <p:txBody>
+          <a:bodyPr wrap="none">
+            <a:spAutoFit/>
+          </a:bodyPr>
+          <a:lstStyle/>
+          <a:p>
+            <a:pPr>
+              <a:defRPr sz="2000" b="1">
                 <a:solidFill>
                   <a:srgbClr val="241E19"/>
                 </a:solidFill>
               </a:defRPr>
             </a:pPr>
             <a:r>
-              <a:t>4대 사상체질 심층 처방 매트릭스</a:t>
-            </a:r>
-          </a:p>
-        </p:txBody>
-      </p:sp>
-      <p:sp>
-        <p:nvSpPr>
-          <p:cNvPr id="5" name="Rounded Rectangle 4"/>
+              <a:t>VIP 맞춤형 4대 체류 프로그램 (Stay Programs)</a:t>
+            </a:r>
+          </a:p>
+        </p:txBody>
+      </p:sp>
+      <p:sp>
+        <p:nvSpPr>
+          <p:cNvPr id="8" name="Rounded Rectangle 7"/>
           <p:cNvSpPr/>
           <p:nvPr/>
         </p:nvSpPr>
         <p:spPr>
           <a:xfrm>
-            <a:off x="731520" y="1554480"/>
-            <a:ext cx="2560320" cy="4663440"/>
+            <a:off x="731520" y="1280160"/>
+            <a:ext cx="5120640" cy="2377440"/>
           </a:xfrm>
           <a:prstGeom prst="roundRect">
             <a:avLst/>
@@ -9286,7 +8325,7 @@
           </a:solidFill>
           <a:ln w="15240">
             <a:solidFill>
-              <a:srgbClr val="A37F48"/>
+              <a:srgbClr val="C9A876"/>
             </a:solidFill>
           </a:ln>
         </p:spPr>
@@ -9314,14 +8353,14 @@
       </p:sp>
       <p:sp>
         <p:nvSpPr>
-          <p:cNvPr id="6" name="TextBox 5"/>
+          <p:cNvPr id="9" name="TextBox 8"/>
           <p:cNvSpPr txBox="1"/>
           <p:nvPr/>
         </p:nvSpPr>
         <p:spPr>
           <a:xfrm>
-            <a:off x="868680" y="1737360"/>
-            <a:ext cx="2286000" cy="4297680"/>
+            <a:off x="960120" y="1463040"/>
+            <a:ext cx="4663440" cy="2011680"/>
           </a:xfrm>
           <a:prstGeom prst="rect">
             <a:avLst/>
@@ -9336,61 +8375,53 @@
           <a:p>
             <a:pPr>
               <a:spcAft>
-                <a:spcPts val="1000"/>
+                <a:spcPts val="600"/>
               </a:spcAft>
-              <a:defRPr sz="1500" b="1">
+              <a:defRPr sz="1600" b="1">
                 <a:solidFill>
                   <a:srgbClr val="A37F48"/>
                 </a:solidFill>
               </a:defRPr>
             </a:pPr>
             <a:r>
-              <a:t>태음인 (肝大肺小)</a:t>
+              <a:t>2박 3일 (단기 리프레시)</a:t>
             </a:r>
           </a:p>
           <a:p>
             <a:pPr>
               <a:lnSpc>
-                <a:spcPct val="125000"/>
+                <a:spcPct val="120000"/>
               </a:lnSpc>
               <a:defRPr sz="1100">
                 <a:solidFill>
-                  <a:srgbClr val="241E19"/>
-                </a:solidFill>
-              </a:defRPr>
-            </a:pPr>
-            <a:r>
-              <a:t>• 장부 특성: 간 기능 왕성, 폐/기관지 허약</a:t>
+                  <a:srgbClr val="52463C"/>
+                </a:solidFill>
+              </a:defRPr>
+            </a:pPr>
+            <a:r>
+              <a:t>• 대상: 주말 힐링 VIP, 비즈니스 출장객</a:t>
             </a:r>
             <a:br/>
             <a:r>
-              <a:t>• 취약 증상: 목 답답함, 피부 건조, 림프 정체</a:t>
+              <a:t>• 플로우: 진단 ➔ 족욕 ➔ 80분 바디 ➔ 12h 단식 ➔ 태극선법 ➔ 나노 미스트</a:t>
             </a:r>
             <a:br/>
             <a:r>
-              <a:t>• 오일 처방: 유칼립투스, 이지에어, 샌달우드</a:t>
-            </a:r>
-            <a:br/>
-            <a:r>
-              <a:t>• 맞춤 식단: 소고기 양지 들깨 미역국 + 율무밥</a:t>
-            </a:r>
-            <a:br/>
-            <a:r>
-              <a:t>• 의전 세팅: 황색 가운 + 우측 4지 은반지</a:t>
-            </a:r>
-          </a:p>
-        </p:txBody>
-      </p:sp>
-      <p:sp>
-        <p:nvSpPr>
-          <p:cNvPr id="7" name="Rounded Rectangle 6"/>
+              <a:t>• 효과: 뇌 피로 70% 감소, 근육 긴장 완화, 숙면 유도</a:t>
+            </a:r>
+          </a:p>
+        </p:txBody>
+      </p:sp>
+      <p:sp>
+        <p:nvSpPr>
+          <p:cNvPr id="10" name="Rounded Rectangle 9"/>
           <p:cNvSpPr/>
           <p:nvPr/>
         </p:nvSpPr>
         <p:spPr>
           <a:xfrm>
-            <a:off x="3429000" y="1554480"/>
-            <a:ext cx="2560320" cy="4663440"/>
+            <a:off x="6126480" y="1280160"/>
+            <a:ext cx="5120640" cy="2377440"/>
           </a:xfrm>
           <a:prstGeom prst="roundRect">
             <a:avLst/>
@@ -9400,7 +8431,7 @@
           </a:solidFill>
           <a:ln w="15240">
             <a:solidFill>
-              <a:srgbClr val="1E5037"/>
+              <a:srgbClr val="C9A876"/>
             </a:solidFill>
           </a:ln>
         </p:spPr>
@@ -9428,14 +8459,14 @@
       </p:sp>
       <p:sp>
         <p:nvSpPr>
-          <p:cNvPr id="8" name="TextBox 7"/>
+          <p:cNvPr id="11" name="TextBox 10"/>
           <p:cNvSpPr txBox="1"/>
           <p:nvPr/>
         </p:nvSpPr>
         <p:spPr>
           <a:xfrm>
-            <a:off x="3566160" y="1737360"/>
-            <a:ext cx="2286000" cy="4297680"/>
+            <a:off x="6355080" y="1463040"/>
+            <a:ext cx="4663440" cy="2011680"/>
           </a:xfrm>
           <a:prstGeom prst="rect">
             <a:avLst/>
@@ -9450,61 +8481,53 @@
           <a:p>
             <a:pPr>
               <a:spcAft>
-                <a:spcPts val="1000"/>
+                <a:spcPts val="600"/>
               </a:spcAft>
-              <a:defRPr sz="1500" b="1">
-                <a:solidFill>
-                  <a:srgbClr val="1E5037"/>
-                </a:solidFill>
-              </a:defRPr>
-            </a:pPr>
-            <a:r>
-              <a:t>소양인 (脾大腎小)</a:t>
+              <a:defRPr sz="1600" b="1">
+                <a:solidFill>
+                  <a:srgbClr val="A37F48"/>
+                </a:solidFill>
+              </a:defRPr>
+            </a:pPr>
+            <a:r>
+              <a:t>5박 6일 (중기 디톡스)</a:t>
             </a:r>
           </a:p>
           <a:p>
             <a:pPr>
               <a:lnSpc>
-                <a:spcPct val="125000"/>
+                <a:spcPct val="120000"/>
               </a:lnSpc>
               <a:defRPr sz="1100">
                 <a:solidFill>
-                  <a:srgbClr val="241E19"/>
-                </a:solidFill>
-              </a:defRPr>
-            </a:pPr>
-            <a:r>
-              <a:t>• 장부 특성: 소화기 열 많음, 신장 음기 허약</a:t>
+                  <a:srgbClr val="52463C"/>
+                </a:solidFill>
+              </a:defRPr>
+            </a:pPr>
+            <a:r>
+              <a:t>• 대상: 만성 피로 및 림프 부종 보유자</a:t>
             </a:r>
             <a:br/>
             <a:r>
-              <a:t>• 취약 증상: 상체 열감, 두통, 가슴 답답, 불면</a:t>
+              <a:t>• 플로우: 1~3일 림프 배농 &amp; 온열(체온 1℃ 상승) ➔ 4~6일 마이크로바이옴 &amp; 기체조</a:t>
             </a:r>
             <a:br/>
             <a:r>
-              <a:t>• 오일 처방: 페퍼민트, 라벤더, 세레니티</a:t>
-            </a:r>
-            <a:br/>
-            <a:r>
-              <a:t>• 맞춤 식단: 돼지고기 수육 / 조개 미역국</a:t>
-            </a:r>
-            <a:br/>
-            <a:r>
-              <a:t>• 의전 세팅: 청색 가운 + 좌측 2지 은반지</a:t>
-            </a:r>
-          </a:p>
-        </p:txBody>
-      </p:sp>
-      <p:sp>
-        <p:nvSpPr>
-          <p:cNvPr id="9" name="Rounded Rectangle 8"/>
+              <a:t>• 효과: 림프 정체 85% 개선, 안색 정화, 활력 복원</a:t>
+            </a:r>
+          </a:p>
+        </p:txBody>
+      </p:sp>
+      <p:sp>
+        <p:nvSpPr>
+          <p:cNvPr id="12" name="Rounded Rectangle 11"/>
           <p:cNvSpPr/>
           <p:nvPr/>
         </p:nvSpPr>
         <p:spPr>
           <a:xfrm>
-            <a:off x="6126480" y="1554480"/>
-            <a:ext cx="2560320" cy="4663440"/>
+            <a:off x="731520" y="3886200"/>
+            <a:ext cx="5120640" cy="2377440"/>
           </a:xfrm>
           <a:prstGeom prst="roundRect">
             <a:avLst/>
@@ -9514,7 +8537,7 @@
           </a:solidFill>
           <a:ln w="15240">
             <a:solidFill>
-              <a:srgbClr val="A37F48"/>
+              <a:srgbClr val="C9A876"/>
             </a:solidFill>
           </a:ln>
         </p:spPr>
@@ -9542,14 +8565,14 @@
       </p:sp>
       <p:sp>
         <p:nvSpPr>
-          <p:cNvPr id="10" name="TextBox 9"/>
+          <p:cNvPr id="13" name="TextBox 12"/>
           <p:cNvSpPr txBox="1"/>
           <p:nvPr/>
         </p:nvSpPr>
         <p:spPr>
           <a:xfrm>
-            <a:off x="6263640" y="1737360"/>
-            <a:ext cx="2286000" cy="4297680"/>
+            <a:off x="960120" y="4069080"/>
+            <a:ext cx="4663440" cy="2011680"/>
           </a:xfrm>
           <a:prstGeom prst="rect">
             <a:avLst/>
@@ -9564,61 +8587,53 @@
           <a:p>
             <a:pPr>
               <a:spcAft>
-                <a:spcPts val="1000"/>
+                <a:spcPts val="600"/>
               </a:spcAft>
-              <a:defRPr sz="1500" b="1">
+              <a:defRPr sz="1600" b="1">
                 <a:solidFill>
                   <a:srgbClr val="A37F48"/>
                 </a:solidFill>
               </a:defRPr>
             </a:pPr>
             <a:r>
-              <a:t>소음인 (腎大脾小)</a:t>
+              <a:t>15박 16일 (장기 리셋)</a:t>
             </a:r>
           </a:p>
           <a:p>
             <a:pPr>
               <a:lnSpc>
-                <a:spcPct val="125000"/>
+                <a:spcPct val="120000"/>
               </a:lnSpc>
               <a:defRPr sz="1100">
                 <a:solidFill>
-                  <a:srgbClr val="241E19"/>
-                </a:solidFill>
-              </a:defRPr>
-            </a:pPr>
-            <a:r>
-              <a:t>• 장부 특성: 신장 기능 튼튼, 비위 차고 약함</a:t>
+                  <a:srgbClr val="52463C"/>
+                </a:solidFill>
+              </a:defRPr>
+            </a:pPr>
+            <a:r>
+              <a:t>• 대상: 대사증후군 개선 희망 기업 최고경영진</a:t>
             </a:r>
             <a:br/>
             <a:r>
-              <a:t>• 취약 증상: 수족냉증, 만성 소화불량, 피로</a:t>
+              <a:t>• 플로우: DTC 유전자 검사 ➔ 10대 테마 매일 순환 ➔ 1:1 라이프스타일 매뉴얼북</a:t>
             </a:r>
             <a:br/>
             <a:r>
-              <a:t>• 오일 처방: 온가드, 진저, 시나몬, 오렌지</a:t>
-            </a:r>
-            <a:br/>
-            <a:r>
-              <a:t>• 맞춤 식단: 닭가슴살 황기 보양 미역국</a:t>
-            </a:r>
-            <a:br/>
-            <a:r>
-              <a:t>• 의전 세팅: 백색 가운 + 우측 3지 은반지</a:t>
-            </a:r>
-          </a:p>
-        </p:txBody>
-      </p:sp>
-      <p:sp>
-        <p:nvSpPr>
-          <p:cNvPr id="11" name="Rounded Rectangle 10"/>
+              <a:t>• 효과: 면역 나이 5년 리셋, 평생 섭생 습관 정착</a:t>
+            </a:r>
+          </a:p>
+        </p:txBody>
+      </p:sp>
+      <p:sp>
+        <p:nvSpPr>
+          <p:cNvPr id="14" name="Rounded Rectangle 13"/>
           <p:cNvSpPr/>
           <p:nvPr/>
         </p:nvSpPr>
         <p:spPr>
           <a:xfrm>
-            <a:off x="8823960" y="1554480"/>
-            <a:ext cx="2560320" cy="4663440"/>
+            <a:off x="6126480" y="3886200"/>
+            <a:ext cx="5120640" cy="2377440"/>
           </a:xfrm>
           <a:prstGeom prst="roundRect">
             <a:avLst/>
@@ -9628,7 +8643,7 @@
           </a:solidFill>
           <a:ln w="15240">
             <a:solidFill>
-              <a:srgbClr val="1E5037"/>
+              <a:srgbClr val="C9A876"/>
             </a:solidFill>
           </a:ln>
         </p:spPr>
@@ -9656,14 +8671,14 @@
       </p:sp>
       <p:sp>
         <p:nvSpPr>
-          <p:cNvPr id="12" name="TextBox 11"/>
+          <p:cNvPr id="15" name="TextBox 14"/>
           <p:cNvSpPr txBox="1"/>
           <p:nvPr/>
         </p:nvSpPr>
         <p:spPr>
           <a:xfrm>
-            <a:off x="8961120" y="1737360"/>
-            <a:ext cx="2286000" cy="4297680"/>
+            <a:off x="6355080" y="4069080"/>
+            <a:ext cx="4663440" cy="2011680"/>
           </a:xfrm>
           <a:prstGeom prst="rect">
             <a:avLst/>
@@ -9678,47 +8693,39 @@
           <a:p>
             <a:pPr>
               <a:spcAft>
-                <a:spcPts val="1000"/>
+                <a:spcPts val="600"/>
               </a:spcAft>
-              <a:defRPr sz="1500" b="1">
-                <a:solidFill>
-                  <a:srgbClr val="1E5037"/>
-                </a:solidFill>
-              </a:defRPr>
-            </a:pPr>
-            <a:r>
-              <a:t>태양인 (肺大肝小)</a:t>
+              <a:defRPr sz="1600" b="1">
+                <a:solidFill>
+                  <a:srgbClr val="A37F48"/>
+                </a:solidFill>
+              </a:defRPr>
+            </a:pPr>
+            <a:r>
+              <a:t>1개월 (특수 집중 케어)</a:t>
             </a:r>
           </a:p>
           <a:p>
             <a:pPr>
               <a:lnSpc>
-                <a:spcPct val="125000"/>
+                <a:spcPct val="120000"/>
               </a:lnSpc>
               <a:defRPr sz="1100">
                 <a:solidFill>
-                  <a:srgbClr val="241E19"/>
-                </a:solidFill>
-              </a:defRPr>
-            </a:pPr>
-            <a:r>
-              <a:t>• 장부 특성: 폐 기능 강함, 간 해독/하체 허약</a:t>
+                  <a:srgbClr val="52463C"/>
+                </a:solidFill>
+              </a:defRPr>
+            </a:pPr>
+            <a:r>
+              <a:t>• 대상: 수술 후 회복기 고객, 고령 시니어 VIP</a:t>
             </a:r>
             <a:br/>
             <a:r>
-              <a:t>• 취약 증상: 상기증, 목덜미 뻣뻣, 하지 무력</a:t>
+              <a:t>• 플로우: 37.5℃ 무자극 족욕 ➔ 프랑킨센스 세포 진정 ➔ 면역 NK세포 증대</a:t>
             </a:r>
             <a:br/>
             <a:r>
-              <a:t>• 오일 처방: 베티버, 프랑킨센스, 레몬</a:t>
-            </a:r>
-            <a:br/>
-            <a:r>
-              <a:t>• 맞춤 식단: 완도산 전복 홍합 맑은 해물 미역국</a:t>
-            </a:r>
-            <a:br/>
-            <a:r>
-              <a:t>• 의전 세팅: 적색 가운 + 좌측 4지 은반지</a:t>
+              <a:t>• 시설: 프라이빗 단독 빌라 및 메디컬 스파 룸 배정</a:t>
             </a:r>
           </a:p>
         </p:txBody>
@@ -9786,14 +8793,57 @@
       </p:sp>
       <p:sp>
         <p:nvSpPr>
-          <p:cNvPr id="3" name="TextBox 2"/>
+          <p:cNvPr id="3" name="Rectangle 2"/>
+          <p:cNvSpPr/>
+          <p:nvPr/>
+        </p:nvSpPr>
+        <p:spPr>
+          <a:xfrm>
+            <a:off x="0" y="0"/>
+            <a:ext cx="12191695" cy="411480"/>
+          </a:xfrm>
+          <a:prstGeom prst="rect">
+            <a:avLst/>
+          </a:prstGeom>
+          <a:solidFill>
+            <a:srgbClr val="241E19"/>
+          </a:solidFill>
+          <a:ln>
+            <a:noFill/>
+          </a:ln>
+        </p:spPr>
+        <p:style>
+          <a:lnRef idx="1">
+            <a:schemeClr val="accent1"/>
+          </a:lnRef>
+          <a:fillRef idx="3">
+            <a:schemeClr val="accent1"/>
+          </a:fillRef>
+          <a:effectRef idx="2">
+            <a:schemeClr val="accent1"/>
+          </a:effectRef>
+          <a:fontRef idx="minor">
+            <a:schemeClr val="lt1"/>
+          </a:fontRef>
+        </p:style>
+        <p:txBody>
+          <a:bodyPr rtlCol="0" anchor="ctr"/>
+          <a:lstStyle/>
+          <a:p>
+            <a:pPr algn="ctr"/>
+          </a:p>
+        </p:txBody>
+      </p:sp>
+      <p:sp>
+        <p:nvSpPr>
+          <p:cNvPr id="4" name="TextBox 3"/>
           <p:cNvSpPr txBox="1"/>
           <p:nvPr/>
         </p:nvSpPr>
         <p:spPr>
           <a:xfrm>
-            <a:off x="731520" y="411480"/>
-            <a:ext cx="10515600" cy="365760"/>
+            <a:off x="731520" y="73152"/>
+            <a:ext cx="10728655" cy="274320"/>
           </a:xfrm>
           <a:prstGeom prst="rect">
             <a:avLst/>
@@ -9801,34 +8851,79 @@
           <a:noFill/>
         </p:spPr>
         <p:txBody>
-          <a:bodyPr wrap="square">
+          <a:bodyPr wrap="none">
             <a:spAutoFit/>
           </a:bodyPr>
           <a:lstStyle/>
           <a:p>
             <a:pPr>
-              <a:defRPr sz="1000" b="1">
-                <a:solidFill>
-                  <a:srgbClr val="A37F48"/>
-                </a:solidFill>
-              </a:defRPr>
-            </a:pPr>
-            <a:r>
-              <a:t>K-PREMIUM WELLNESS SPA 2026</a:t>
-            </a:r>
-          </a:p>
-        </p:txBody>
-      </p:sp>
-      <p:sp>
-        <p:nvSpPr>
-          <p:cNvPr id="4" name="TextBox 3"/>
+              <a:defRPr sz="900" b="1">
+                <a:solidFill>
+                  <a:srgbClr val="C8B9A0"/>
+                </a:solidFill>
+              </a:defRPr>
+            </a:pPr>
+            <a:r>
+              <a:t>SASANG SPA BOUTIQUE  |  K-WELLNESS HERITAGE &amp; BIOTECH  |  VIP DIRECTORS: 010-4728-9917</a:t>
+            </a:r>
+          </a:p>
+        </p:txBody>
+      </p:sp>
+      <p:sp>
+        <p:nvSpPr>
+          <p:cNvPr id="5" name="Rounded Rectangle 4"/>
+          <p:cNvSpPr/>
+          <p:nvPr/>
+        </p:nvSpPr>
+        <p:spPr>
+          <a:xfrm>
+            <a:off x="731520" y="621792"/>
+            <a:ext cx="2011680" cy="256032"/>
+          </a:xfrm>
+          <a:prstGeom prst="roundRect">
+            <a:avLst/>
+          </a:prstGeom>
+          <a:solidFill>
+            <a:srgbClr val="F8F5EE"/>
+          </a:solidFill>
+          <a:ln w="12700">
+            <a:solidFill>
+              <a:srgbClr val="C9A876"/>
+            </a:solidFill>
+          </a:ln>
+        </p:spPr>
+        <p:style>
+          <a:lnRef idx="1">
+            <a:schemeClr val="accent1"/>
+          </a:lnRef>
+          <a:fillRef idx="3">
+            <a:schemeClr val="accent1"/>
+          </a:fillRef>
+          <a:effectRef idx="2">
+            <a:schemeClr val="accent1"/>
+          </a:effectRef>
+          <a:fontRef idx="minor">
+            <a:schemeClr val="lt1"/>
+          </a:fontRef>
+        </p:style>
+        <p:txBody>
+          <a:bodyPr rtlCol="0" anchor="ctr"/>
+          <a:lstStyle/>
+          <a:p>
+            <a:pPr algn="ctr"/>
+          </a:p>
+        </p:txBody>
+      </p:sp>
+      <p:sp>
+        <p:nvSpPr>
+          <p:cNvPr id="6" name="TextBox 5"/>
           <p:cNvSpPr txBox="1"/>
           <p:nvPr/>
         </p:nvSpPr>
         <p:spPr>
           <a:xfrm>
-            <a:off x="731520" y="685800"/>
-            <a:ext cx="10515600" cy="731520"/>
+            <a:off x="777240" y="603504"/>
+            <a:ext cx="1920240" cy="274320"/>
           </a:xfrm>
           <a:prstGeom prst="rect">
             <a:avLst/>
@@ -9836,34 +8931,69 @@
           <a:noFill/>
         </p:spPr>
         <p:txBody>
-          <a:bodyPr wrap="square">
+          <a:bodyPr wrap="none">
             <a:spAutoFit/>
           </a:bodyPr>
           <a:lstStyle/>
           <a:p>
-            <a:pPr>
-              <a:defRPr sz="2200" b="1">
+            <a:pPr algn="ctr">
+              <a:defRPr sz="900" b="1">
+                <a:solidFill>
+                  <a:srgbClr val="A37F48"/>
+                </a:solidFill>
+              </a:defRPr>
+            </a:pPr>
+            <a:r>
+              <a:t>OUR DIRECTORS</a:t>
+            </a:r>
+          </a:p>
+        </p:txBody>
+      </p:sp>
+      <p:sp>
+        <p:nvSpPr>
+          <p:cNvPr id="7" name="TextBox 6"/>
+          <p:cNvSpPr txBox="1"/>
+          <p:nvPr/>
+        </p:nvSpPr>
+        <p:spPr>
+          <a:xfrm>
+            <a:off x="2926080" y="530352"/>
+            <a:ext cx="8503920" cy="548640"/>
+          </a:xfrm>
+          <a:prstGeom prst="rect">
+            <a:avLst/>
+          </a:prstGeom>
+          <a:noFill/>
+        </p:spPr>
+        <p:txBody>
+          <a:bodyPr wrap="none">
+            <a:spAutoFit/>
+          </a:bodyPr>
+          <a:lstStyle/>
+          <a:p>
+            <a:pPr>
+              <a:defRPr sz="2000" b="1">
                 <a:solidFill>
                   <a:srgbClr val="241E19"/>
                 </a:solidFill>
               </a:defRPr>
             </a:pPr>
             <a:r>
-              <a:t>10대 시그니처 테라피 가이드 (Part 1: Themes 01 ~ 05)</a:t>
-            </a:r>
-          </a:p>
-        </p:txBody>
-      </p:sp>
-      <p:sp>
-        <p:nvSpPr>
-          <p:cNvPr id="5" name="Rounded Rectangle 4"/>
+              <a:t>총괄 연구진 및 디렉터 프로필 (Master Directors)</a:t>
+            </a:r>
+          </a:p>
+        </p:txBody>
+      </p:sp>
+      <p:sp>
+        <p:nvSpPr>
+          <p:cNvPr id="8" name="Rounded Rectangle 7"/>
           <p:cNvSpPr/>
           <p:nvPr/>
         </p:nvSpPr>
         <p:spPr>
           <a:xfrm>
-            <a:off x="731520" y="1554480"/>
-            <a:ext cx="10728655" cy="804672"/>
+            <a:off x="731520" y="1280160"/>
+            <a:ext cx="5120640" cy="5120640"/>
           </a:xfrm>
           <a:prstGeom prst="roundRect">
             <a:avLst/>
@@ -9901,14 +9031,14 @@
       </p:sp>
       <p:sp>
         <p:nvSpPr>
-          <p:cNvPr id="6" name="TextBox 5"/>
+          <p:cNvPr id="9" name="TextBox 8"/>
           <p:cNvSpPr txBox="1"/>
           <p:nvPr/>
         </p:nvSpPr>
         <p:spPr>
           <a:xfrm>
-            <a:off x="914400" y="1664208"/>
-            <a:ext cx="10332720" cy="594360"/>
+            <a:off x="1005840" y="1554480"/>
+            <a:ext cx="4572000" cy="4572000"/>
           </a:xfrm>
           <a:prstGeom prst="rect">
             <a:avLst/>
@@ -9922,28 +9052,79 @@
           <a:lstStyle/>
           <a:p>
             <a:pPr>
+              <a:defRPr sz="1100" b="1">
+                <a:solidFill>
+                  <a:srgbClr val="A37F48"/>
+                </a:solidFill>
+              </a:defRPr>
+            </a:pPr>
+            <a:r>
+              <a:t>WELLNESS MASTER DIRECTOR</a:t>
+            </a:r>
+          </a:p>
+          <a:p>
+            <a:pPr>
+              <a:spcAft>
+                <a:spcPts val="1000"/>
+              </a:spcAft>
+              <a:defRPr sz="2400" b="1">
+                <a:solidFill>
+                  <a:srgbClr val="241E19"/>
+                </a:solidFill>
+              </a:defRPr>
+            </a:pPr>
+            <a:r>
+              <a:t>유정근 (Ryu Jean)</a:t>
+            </a:r>
+          </a:p>
+          <a:p>
+            <a:pPr>
+              <a:lnSpc>
+                <a:spcPct val="130000"/>
+              </a:lnSpc>
               <a:defRPr sz="1200">
                 <a:solidFill>
-                  <a:srgbClr val="241E19"/>
-                </a:solidFill>
-              </a:defRPr>
-            </a:pPr>
-            <a:r>
-              <a:t>01. 웰컴 오리엔테이션  |  프라이빗 다실 1:1 상담 및 4대 체질 맞춤 웰컴 티(소음 38℃ 대추계피차 ~ 소양 상온 구기자차) 제공</a:t>
-            </a:r>
-          </a:p>
-        </p:txBody>
-      </p:sp>
-      <p:sp>
-        <p:nvSpPr>
-          <p:cNvPr id="7" name="Rounded Rectangle 6"/>
+                  <a:srgbClr val="52463C"/>
+                </a:solidFill>
+              </a:defRPr>
+            </a:pPr>
+            <a:r>
+              <a:t>• 웰니스 총괄 디렉터 / 전담 테라피스트</a:t>
+            </a:r>
+            <a:br/>
+            <a:r>
+              <a:t>• 사상체질 10대 시그니처 테라피 의전 설계</a:t>
+            </a:r>
+            <a:br/>
+            <a:r>
+              <a:t>• 글로벌 호텔/리조트 파트너십 및 브랜드 총괄</a:t>
+            </a:r>
+            <a:br/>
+            <a:r>
+              <a:t>• 1:1 VIP 프라이빗 컨설팅 및 트리트먼트 마스터</a:t>
+            </a:r>
+            <a:br/>
+            <a:br/>
+            <a:r>
+              <a:t>📞 연락처: 010-4728-9917</a:t>
+            </a:r>
+            <a:br/>
+            <a:r>
+              <a:t>✉️ 이메일: ryujean77@gmail.com</a:t>
+            </a:r>
+          </a:p>
+        </p:txBody>
+      </p:sp>
+      <p:sp>
+        <p:nvSpPr>
+          <p:cNvPr id="10" name="Rounded Rectangle 9"/>
           <p:cNvSpPr/>
           <p:nvPr/>
         </p:nvSpPr>
         <p:spPr>
           <a:xfrm>
-            <a:off x="731520" y="2487168"/>
-            <a:ext cx="10728655" cy="804672"/>
+            <a:off x="6217920" y="1280160"/>
+            <a:ext cx="5212080" cy="5120640"/>
           </a:xfrm>
           <a:prstGeom prst="roundRect">
             <a:avLst/>
@@ -9981,14 +9162,14 @@
       </p:sp>
       <p:sp>
         <p:nvSpPr>
-          <p:cNvPr id="8" name="TextBox 7"/>
+          <p:cNvPr id="11" name="TextBox 10"/>
           <p:cNvSpPr txBox="1"/>
           <p:nvPr/>
         </p:nvSpPr>
         <p:spPr>
           <a:xfrm>
-            <a:off x="914400" y="2596896"/>
-            <a:ext cx="10332720" cy="594360"/>
+            <a:off x="6492240" y="1554480"/>
+            <a:ext cx="4663440" cy="4572000"/>
           </a:xfrm>
           <a:prstGeom prst="rect">
             <a:avLst/>
@@ -10002,254 +9183,65 @@
           <a:lstStyle/>
           <a:p>
             <a:pPr>
+              <a:defRPr sz="1100" b="1">
+                <a:solidFill>
+                  <a:srgbClr val="A37F48"/>
+                </a:solidFill>
+              </a:defRPr>
+            </a:pPr>
+            <a:r>
+              <a:t>ACADEMIC &amp; MEDICAL DIRECTOR</a:t>
+            </a:r>
+          </a:p>
+          <a:p>
+            <a:pPr>
+              <a:spcAft>
+                <a:spcPts val="1000"/>
+              </a:spcAft>
+              <a:defRPr sz="2400" b="1">
+                <a:solidFill>
+                  <a:srgbClr val="241E19"/>
+                </a:solidFill>
+              </a:defRPr>
+            </a:pPr>
+            <a:r>
+              <a:t>임동구 박사 (Dr. Dong-Ku Yim)</a:t>
+            </a:r>
+          </a:p>
+          <a:p>
+            <a:pPr>
+              <a:lnSpc>
+                <a:spcPct val="130000"/>
+              </a:lnSpc>
               <a:defRPr sz="1200">
                 <a:solidFill>
-                  <a:srgbClr val="241E19"/>
-                </a:solidFill>
-              </a:defRPr>
-            </a:pPr>
-            <a:r>
-              <a:t>02. 20분 맞춤 약재 족욕  |  두한족열(頭寒足熱) 순환 개방. 온열탕(41℃ 당귀/생강) vs 쿨링탕(38.5℃ 박하/결명자) + 순수 에센셜 오일</a:t>
-            </a:r>
-          </a:p>
-        </p:txBody>
-      </p:sp>
-      <p:sp>
-        <p:nvSpPr>
-          <p:cNvPr id="9" name="Rounded Rectangle 8"/>
-          <p:cNvSpPr/>
-          <p:nvPr/>
-        </p:nvSpPr>
-        <p:spPr>
-          <a:xfrm>
-            <a:off x="731520" y="3419856"/>
-            <a:ext cx="10728655" cy="804672"/>
-          </a:xfrm>
-          <a:prstGeom prst="roundRect">
-            <a:avLst/>
-          </a:prstGeom>
-          <a:solidFill>
-            <a:srgbClr val="FFFFFF"/>
-          </a:solidFill>
-          <a:ln w="15240">
-            <a:solidFill>
-              <a:srgbClr val="C9A876"/>
-            </a:solidFill>
-          </a:ln>
-        </p:spPr>
-        <p:style>
-          <a:lnRef idx="1">
-            <a:schemeClr val="accent1"/>
-          </a:lnRef>
-          <a:fillRef idx="3">
-            <a:schemeClr val="accent1"/>
-          </a:fillRef>
-          <a:effectRef idx="2">
-            <a:schemeClr val="accent1"/>
-          </a:effectRef>
-          <a:fontRef idx="minor">
-            <a:schemeClr val="lt1"/>
-          </a:fontRef>
-        </p:style>
-        <p:txBody>
-          <a:bodyPr rtlCol="0" anchor="ctr"/>
-          <a:lstStyle/>
-          <a:p>
-            <a:pPr algn="ctr"/>
-          </a:p>
-        </p:txBody>
-      </p:sp>
-      <p:sp>
-        <p:nvSpPr>
-          <p:cNvPr id="10" name="TextBox 9"/>
-          <p:cNvSpPr txBox="1"/>
-          <p:nvPr/>
-        </p:nvSpPr>
-        <p:spPr>
-          <a:xfrm>
-            <a:off x="914400" y="3529584"/>
-            <a:ext cx="10332720" cy="594360"/>
-          </a:xfrm>
-          <a:prstGeom prst="rect">
-            <a:avLst/>
-          </a:prstGeom>
-          <a:noFill/>
-        </p:spPr>
-        <p:txBody>
-          <a:bodyPr wrap="square">
-            <a:spAutoFit/>
-          </a:bodyPr>
-          <a:lstStyle/>
-          <a:p>
-            <a:pPr>
-              <a:defRPr sz="1200">
-                <a:solidFill>
-                  <a:srgbClr val="241E19"/>
-                </a:solidFill>
-              </a:defRPr>
-            </a:pPr>
-            <a:r>
-              <a:t>03. 에너지 테라피 &amp; 은반지  |  사상체질 경락별 은반지(Eun-banji) 착용 및 4대 조화 가운을 통한 스태프 비언어 맞춤 의전 시스템</a:t>
-            </a:r>
-          </a:p>
-        </p:txBody>
-      </p:sp>
-      <p:sp>
-        <p:nvSpPr>
-          <p:cNvPr id="11" name="Rounded Rectangle 10"/>
-          <p:cNvSpPr/>
-          <p:nvPr/>
-        </p:nvSpPr>
-        <p:spPr>
-          <a:xfrm>
-            <a:off x="731520" y="4352544"/>
-            <a:ext cx="10728655" cy="804672"/>
-          </a:xfrm>
-          <a:prstGeom prst="roundRect">
-            <a:avLst/>
-          </a:prstGeom>
-          <a:solidFill>
-            <a:srgbClr val="FFFFFF"/>
-          </a:solidFill>
-          <a:ln w="15240">
-            <a:solidFill>
-              <a:srgbClr val="C9A876"/>
-            </a:solidFill>
-          </a:ln>
-        </p:spPr>
-        <p:style>
-          <a:lnRef idx="1">
-            <a:schemeClr val="accent1"/>
-          </a:lnRef>
-          <a:fillRef idx="3">
-            <a:schemeClr val="accent1"/>
-          </a:fillRef>
-          <a:effectRef idx="2">
-            <a:schemeClr val="accent1"/>
-          </a:effectRef>
-          <a:fontRef idx="minor">
-            <a:schemeClr val="lt1"/>
-          </a:fontRef>
-        </p:style>
-        <p:txBody>
-          <a:bodyPr rtlCol="0" anchor="ctr"/>
-          <a:lstStyle/>
-          <a:p>
-            <a:pPr algn="ctr"/>
-          </a:p>
-        </p:txBody>
-      </p:sp>
-      <p:sp>
-        <p:nvSpPr>
-          <p:cNvPr id="12" name="TextBox 11"/>
-          <p:cNvSpPr txBox="1"/>
-          <p:nvPr/>
-        </p:nvSpPr>
-        <p:spPr>
-          <a:xfrm>
-            <a:off x="914400" y="4462272"/>
-            <a:ext cx="10332720" cy="594360"/>
-          </a:xfrm>
-          <a:prstGeom prst="rect">
-            <a:avLst/>
-          </a:prstGeom>
-          <a:noFill/>
-        </p:spPr>
-        <p:txBody>
-          <a:bodyPr wrap="square">
-            <a:spAutoFit/>
-          </a:bodyPr>
-          <a:lstStyle/>
-          <a:p>
-            <a:pPr>
-              <a:defRPr sz="1200">
-                <a:solidFill>
-                  <a:srgbClr val="241E19"/>
-                </a:solidFill>
-              </a:defRPr>
-            </a:pPr>
-            <a:r>
-              <a:t>04. 푸드 테라피 (12h 단식)  |  저녁 18:00~익일 06:00 12시간 단식(자가포식) 후 기상 직후 4대 체질 맞춤 영양 미역국 조식 정식 제공</a:t>
-            </a:r>
-          </a:p>
-        </p:txBody>
-      </p:sp>
-      <p:sp>
-        <p:nvSpPr>
-          <p:cNvPr id="13" name="Rounded Rectangle 12"/>
-          <p:cNvSpPr/>
-          <p:nvPr/>
-        </p:nvSpPr>
-        <p:spPr>
-          <a:xfrm>
-            <a:off x="731520" y="5285232"/>
-            <a:ext cx="10728655" cy="804672"/>
-          </a:xfrm>
-          <a:prstGeom prst="roundRect">
-            <a:avLst/>
-          </a:prstGeom>
-          <a:solidFill>
-            <a:srgbClr val="FFFFFF"/>
-          </a:solidFill>
-          <a:ln w="15240">
-            <a:solidFill>
-              <a:srgbClr val="C9A876"/>
-            </a:solidFill>
-          </a:ln>
-        </p:spPr>
-        <p:style>
-          <a:lnRef idx="1">
-            <a:schemeClr val="accent1"/>
-          </a:lnRef>
-          <a:fillRef idx="3">
-            <a:schemeClr val="accent1"/>
-          </a:fillRef>
-          <a:effectRef idx="2">
-            <a:schemeClr val="accent1"/>
-          </a:effectRef>
-          <a:fontRef idx="minor">
-            <a:schemeClr val="lt1"/>
-          </a:fontRef>
-        </p:style>
-        <p:txBody>
-          <a:bodyPr rtlCol="0" anchor="ctr"/>
-          <a:lstStyle/>
-          <a:p>
-            <a:pPr algn="ctr"/>
-          </a:p>
-        </p:txBody>
-      </p:sp>
-      <p:sp>
-        <p:nvSpPr>
-          <p:cNvPr id="14" name="TextBox 13"/>
-          <p:cNvSpPr txBox="1"/>
-          <p:nvPr/>
-        </p:nvSpPr>
-        <p:spPr>
-          <a:xfrm>
-            <a:off x="914400" y="5394960"/>
-            <a:ext cx="10332720" cy="594360"/>
-          </a:xfrm>
-          <a:prstGeom prst="rect">
-            <a:avLst/>
-          </a:prstGeom>
-          <a:noFill/>
-        </p:spPr>
-        <p:txBody>
-          <a:bodyPr wrap="square">
-            <a:spAutoFit/>
-          </a:bodyPr>
-          <a:lstStyle/>
-          <a:p>
-            <a:pPr>
-              <a:defRPr sz="1200">
-                <a:solidFill>
-                  <a:srgbClr val="241E19"/>
-                </a:solidFill>
-              </a:defRPr>
-            </a:pPr>
-            <a:r>
-              <a:t>05. 80분 이원화 바디 테라피  |  1단계 한의학 경락 수기 지압(30분)으로 순환로 개방 + 2단계 최고급 100% 순수 에센셜 오일 림프 드레나쥐(50분)</a:t>
+                  <a:srgbClr val="52463C"/>
+                </a:solidFill>
+              </a:defRPr>
+            </a:pPr>
+            <a:r>
+              <a:t>• 식품공학박사 / Dr.Yim's 체질라이프스타일 연구소장</a:t>
+            </a:r>
+            <a:br/>
+            <a:r>
+              <a:t>• 사상체질 의학의 식품공학적 섭생 연구 권위자</a:t>
+            </a:r>
+            <a:br/>
+            <a:r>
+              <a:t>• 4대 체질 맞춤 미역국 &amp; 아로마 배합비 감수</a:t>
+            </a:r>
+            <a:br/>
+            <a:r>
+              <a:t>• 현대 생체 데이터 분석 및 체질 확정 알고리즘 구축</a:t>
+            </a:r>
+            <a:br/>
+            <a:br/>
+            <a:r>
+              <a:t>📞 연락처: 010-2323-4662</a:t>
+            </a:r>
+            <a:br/>
+            <a:r>
+              <a:t>✉️ 이메일: ydoko@daum.net</a:t>
             </a:r>
           </a:p>
         </p:txBody>

--- a/sasang-spa/사상체질_프리미엄_스파_프로젝트_제안서_발표자료.pptx
+++ b/sasang-spa/사상체질_프리미엄_스파_프로젝트_제안서_발표자료.pptx
@@ -14,7 +14,6 @@
     <p:sldId id="262" r:id="rId13"/>
     <p:sldId id="263" r:id="rId14"/>
     <p:sldId id="264" r:id="rId15"/>
-    <p:sldId id="265" r:id="rId16"/>
   </p:sldIdLst>
   <p:sldSz cx="12191695" cy="6858000" type="screen4x3"/>
   <p:notesSz cx="6858000" cy="9144000"/>
@@ -3112,7 +3111,7 @@
             <a:avLst/>
           </a:prstGeom>
           <a:solidFill>
-            <a:srgbClr val="0E1F18"/>
+            <a:srgbClr val="0F2019"/>
           </a:solidFill>
           <a:ln>
             <a:noFill/>
@@ -3148,8 +3147,8 @@
         </p:nvSpPr>
         <p:spPr>
           <a:xfrm>
-            <a:off x="548640" y="548640"/>
-            <a:ext cx="11094415" cy="5760720"/>
+            <a:off x="640080" y="640080"/>
+            <a:ext cx="10911535" cy="5577840"/>
           </a:xfrm>
           <a:prstGeom prst="rect">
             <a:avLst/>
@@ -3157,7 +3156,7 @@
           <a:noFill/>
           <a:ln w="19050">
             <a:solidFill>
-              <a:srgbClr val="C9A876"/>
+              <a:srgbClr val="C29B62"/>
             </a:solidFill>
           </a:ln>
         </p:spPr>
@@ -3191,8 +3190,8 @@
         </p:nvSpPr>
         <p:spPr>
           <a:xfrm>
-            <a:off x="1097280" y="1188720"/>
-            <a:ext cx="9966960" cy="4389120"/>
+            <a:off x="1188720" y="1097280"/>
+            <a:ext cx="9784080" cy="4663440"/>
           </a:xfrm>
           <a:prstGeom prst="rect">
             <a:avLst/>
@@ -3207,46 +3206,31 @@
           <a:p>
             <a:pPr>
               <a:spcAft>
-                <a:spcPts val="1400"/>
+                <a:spcPts val="1000"/>
               </a:spcAft>
-              <a:defRPr sz="1200" b="1">
-                <a:solidFill>
-                  <a:srgbClr val="C9A876"/>
-                </a:solidFill>
-              </a:defRPr>
-            </a:pPr>
-            <a:r>
-              <a:t>THE WISDOM OF SASANG CONSTITUTION BOUTIQUE SPA</a:t>
+              <a:defRPr sz="1300" b="1">
+                <a:solidFill>
+                  <a:srgbClr val="C29B62"/>
+                </a:solidFill>
+              </a:defRPr>
+            </a:pPr>
+            <a:r>
+              <a:t>2026 / 27  K-WELLNESS RETREAT</a:t>
             </a:r>
           </a:p>
           <a:p>
             <a:pPr>
               <a:spcAft>
-                <a:spcPts val="1200"/>
+                <a:spcPts val="600"/>
               </a:spcAft>
-              <a:defRPr sz="3600" b="1">
+              <a:defRPr sz="4000" b="1">
                 <a:solidFill>
                   <a:srgbClr val="FFFFFF"/>
                 </a:solidFill>
               </a:defRPr>
             </a:pPr>
             <a:r>
-              <a:t>사상체질 기반 프리미엄 웰니스 스파</a:t>
-            </a:r>
-          </a:p>
-          <a:p>
-            <a:pPr>
-              <a:spcAft>
-                <a:spcPts val="2400"/>
-              </a:spcAft>
-              <a:defRPr sz="1600">
-                <a:solidFill>
-                  <a:srgbClr val="C9A876"/>
-                </a:solidFill>
-              </a:defRPr>
-            </a:pPr>
-            <a:r>
-              <a:t>한국 고유의 사상체질 의학 × 최고급 100% 순수 에센셜 오일 × 현대 바이오 데이터 융합</a:t>
+              <a:t>Sasang-Kuren</a:t>
             </a:r>
           </a:p>
           <a:p>
@@ -3254,168 +3238,56 @@
               <a:spcAft>
                 <a:spcPts val="2000"/>
               </a:spcAft>
+              <a:defRPr sz="1800">
+                <a:solidFill>
+                  <a:srgbClr val="C29B62"/>
+                </a:solidFill>
+              </a:defRPr>
+            </a:pPr>
+            <a:r>
+              <a:t>Medizin  ·  Regeneration  ·  Retreat</a:t>
+            </a:r>
+          </a:p>
+          <a:p>
+            <a:pPr>
+              <a:lnSpc>
+                <a:spcPct val="130000"/>
+              </a:lnSpc>
+              <a:spcAft>
+                <a:spcPts val="2600"/>
+              </a:spcAft>
               <a:defRPr sz="1300">
                 <a:solidFill>
-                  <a:srgbClr val="E6DCC8"/>
-                </a:solidFill>
-              </a:defRPr>
-            </a:pPr>
-            <a:r>
-              <a:t>👑 현대인의 고질적 불균형을 해결하는 1:1 맞춤 신체 리셋 솔루션 기획제안서</a:t>
-            </a:r>
-          </a:p>
-          <a:p>
-            <a:pPr>
-              <a:defRPr sz="1100">
-                <a:solidFill>
-                  <a:srgbClr val="BEB4A0"/>
-                </a:solidFill>
-              </a:defRPr>
-            </a:pPr>
-            <a:r>
-              <a:t>• 총괄 디렉터: 유정근 (010-4728-9917 | ryujean77@gmail.com)</a:t>
+                  <a:srgbClr val="E1DACD"/>
+                </a:solidFill>
+              </a:defRPr>
+            </a:pPr>
+            <a:r>
+              <a:t>한국 고유의 사상체질 의학이 완성한 정통 메디컬 쿠어(Kur) 프로그램</a:t>
             </a:r>
             <a:br/>
             <a:r>
-              <a:t>• 학술/의학 총괄: 임동구 식품공학박사 (010-2323-4662 | ydoko@daum.net)</a:t>
+              <a:t>현대인의 만성 질환과 불균형을 해결하는 1:1 맞춤 신체 리셋 솔루션</a:t>
+            </a:r>
+          </a:p>
+          <a:p>
+            <a:pPr>
+              <a:defRPr sz="1050">
+                <a:solidFill>
+                  <a:srgbClr val="B4AA9B"/>
+                </a:solidFill>
+              </a:defRPr>
+            </a:pPr>
+            <a:r>
+              <a:t>• 총괄 디렉터: 유정근 (웰니스 총괄 / 전담 테라피스트 | 010-4728-9917)</a:t>
             </a:r>
             <a:br/>
             <a:r>
-              <a:t>• 공식 온라인 웹 포털: https://ryujean77.github.io/ryujean-slides/sasang-spa/</a:t>
-            </a:r>
-          </a:p>
-        </p:txBody>
-      </p:sp>
-    </p:spTree>
-  </p:cSld>
-  <p:clrMapOvr>
-    <a:masterClrMapping/>
-  </p:clrMapOvr>
-</p:sld>
-</file>
-
-<file path=ppt/slides/slide10.xml><?xml version="1.0" encoding="utf-8"?>
-<p:sld xmlns:a="http://schemas.openxmlformats.org/drawingml/2006/main" xmlns:p="http://schemas.openxmlformats.org/presentationml/2006/main" xmlns:r="http://schemas.openxmlformats.org/officeDocument/2006/relationships">
-  <p:cSld>
-    <p:spTree>
-      <p:nvGrpSpPr>
-        <p:cNvPr id="1" name=""/>
-        <p:cNvGrpSpPr/>
-        <p:nvPr/>
-      </p:nvGrpSpPr>
-      <p:grpSpPr/>
-      <p:sp>
-        <p:nvSpPr>
-          <p:cNvPr id="2" name="Rectangle 1"/>
-          <p:cNvSpPr/>
-          <p:nvPr/>
-        </p:nvSpPr>
-        <p:spPr>
-          <a:xfrm>
-            <a:off x="0" y="0"/>
-            <a:ext cx="12191695" cy="6858000"/>
-          </a:xfrm>
-          <a:prstGeom prst="rect">
-            <a:avLst/>
-          </a:prstGeom>
-          <a:solidFill>
-            <a:srgbClr val="0E1F18"/>
-          </a:solidFill>
-          <a:ln>
-            <a:noFill/>
-          </a:ln>
-        </p:spPr>
-        <p:style>
-          <a:lnRef idx="1">
-            <a:schemeClr val="accent1"/>
-          </a:lnRef>
-          <a:fillRef idx="3">
-            <a:schemeClr val="accent1"/>
-          </a:fillRef>
-          <a:effectRef idx="2">
-            <a:schemeClr val="accent1"/>
-          </a:effectRef>
-          <a:fontRef idx="minor">
-            <a:schemeClr val="lt1"/>
-          </a:fontRef>
-        </p:style>
-        <p:txBody>
-          <a:bodyPr rtlCol="0" anchor="ctr"/>
-          <a:lstStyle/>
-          <a:p>
-            <a:pPr algn="ctr"/>
-          </a:p>
-        </p:txBody>
-      </p:sp>
-      <p:sp>
-        <p:nvSpPr>
-          <p:cNvPr id="3" name="TextBox 2"/>
-          <p:cNvSpPr txBox="1"/>
-          <p:nvPr/>
-        </p:nvSpPr>
-        <p:spPr>
-          <a:xfrm>
-            <a:off x="1371600" y="1828800"/>
-            <a:ext cx="9448495" cy="3657600"/>
-          </a:xfrm>
-          <a:prstGeom prst="rect">
-            <a:avLst/>
-          </a:prstGeom>
-          <a:noFill/>
-        </p:spPr>
-        <p:txBody>
-          <a:bodyPr wrap="square">
-            <a:spAutoFit/>
-          </a:bodyPr>
-          <a:lstStyle/>
-          <a:p>
-            <a:pPr algn="ctr">
-              <a:spcAft>
-                <a:spcPts val="1400"/>
-              </a:spcAft>
-              <a:defRPr sz="1300" b="1">
-                <a:solidFill>
-                  <a:srgbClr val="C9A876"/>
-                </a:solidFill>
-              </a:defRPr>
-            </a:pPr>
-            <a:r>
-              <a:t>K-PREMIUM WELLNESS MASTER PLAN</a:t>
-            </a:r>
-          </a:p>
-          <a:p>
-            <a:pPr algn="ctr">
-              <a:spcAft>
-                <a:spcPts val="2000"/>
-              </a:spcAft>
-              <a:defRPr sz="3200" b="1">
-                <a:solidFill>
-                  <a:srgbClr val="FFFFFF"/>
-                </a:solidFill>
-              </a:defRPr>
-            </a:pPr>
-            <a:r>
-              <a:t>가장 한국적인 사상체질 의학이</a:t>
+              <a:t>• 학술/의학 총괄: 임동구 식품공학박사 (Dr.Yim's 체질라이프스타일 연구소장 | 010-2323-4662)</a:t>
             </a:r>
             <a:br/>
             <a:r>
-              <a:t>가장 세계적인 럭셔리 스파가 됩니다</a:t>
-            </a:r>
-          </a:p>
-          <a:p>
-            <a:pPr algn="ctr">
-              <a:defRPr sz="1400">
-                <a:solidFill>
-                  <a:srgbClr val="C9A876"/>
-                </a:solidFill>
-              </a:defRPr>
-            </a:pPr>
-            <a:r>
-              <a:t>공식 웹 포털 실시간 확인: https://ryujean77.github.io/ryujean-slides/sasang-spa/</a:t>
-            </a:r>
-            <a:br/>
-            <a:r>
-              <a:t>문의: 유정근 총괄 디렉터 (010-4728-9917 | ryujean77@gmail.com)</a:t>
+              <a:t>• 온라인 웹 포털: https://ryujean77.github.io/ryujean-slides/sasang-spa/</a:t>
             </a:r>
           </a:p>
         </p:txBody>
@@ -3453,7 +3325,7 @@
             <a:avLst/>
           </a:prstGeom>
           <a:solidFill>
-            <a:srgbClr val="FDFBF7"/>
+            <a:srgbClr val="FAF8F3"/>
           </a:solidFill>
           <a:ln>
             <a:noFill/>
@@ -3483,20 +3355,90 @@
       </p:sp>
       <p:sp>
         <p:nvSpPr>
-          <p:cNvPr id="3" name="Rectangle 2"/>
+          <p:cNvPr id="3" name="TextBox 2"/>
+          <p:cNvSpPr txBox="1"/>
+          <p:nvPr/>
+        </p:nvSpPr>
+        <p:spPr>
+          <a:xfrm>
+            <a:off x="731520" y="365760"/>
+            <a:ext cx="10728655" cy="320040"/>
+          </a:xfrm>
+          <a:prstGeom prst="rect">
+            <a:avLst/>
+          </a:prstGeom>
+          <a:noFill/>
+        </p:spPr>
+        <p:txBody>
+          <a:bodyPr wrap="none">
+            <a:spAutoFit/>
+          </a:bodyPr>
+          <a:lstStyle/>
+          <a:p>
+            <a:pPr>
+              <a:defRPr sz="950" b="1">
+                <a:solidFill>
+                  <a:srgbClr val="94723E"/>
+                </a:solidFill>
+              </a:defRPr>
+            </a:pPr>
+            <a:r>
+              <a:t>2026/27 SASANG-KUREN : MEDIZIN · REGENERATION · RETREAT</a:t>
+            </a:r>
+          </a:p>
+        </p:txBody>
+      </p:sp>
+      <p:sp>
+        <p:nvSpPr>
+          <p:cNvPr id="4" name="TextBox 3"/>
+          <p:cNvSpPr txBox="1"/>
+          <p:nvPr/>
+        </p:nvSpPr>
+        <p:spPr>
+          <a:xfrm>
+            <a:off x="731520" y="640080"/>
+            <a:ext cx="10728655" cy="640080"/>
+          </a:xfrm>
+          <a:prstGeom prst="rect">
+            <a:avLst/>
+          </a:prstGeom>
+          <a:noFill/>
+        </p:spPr>
+        <p:txBody>
+          <a:bodyPr wrap="none">
+            <a:spAutoFit/>
+          </a:bodyPr>
+          <a:lstStyle/>
+          <a:p>
+            <a:pPr>
+              <a:defRPr sz="2100" b="1">
+                <a:solidFill>
+                  <a:srgbClr val="26201C"/>
+                </a:solidFill>
+              </a:defRPr>
+            </a:pPr>
+            <a:r>
+              <a:t>Mein neues Ich : 사상체질 스파의 4대 품질 기준 (Qualitätsmerkmale)</a:t>
+            </a:r>
+          </a:p>
+        </p:txBody>
+      </p:sp>
+      <p:sp>
+        <p:nvSpPr>
+          <p:cNvPr id="5" name="Rectangle 4"/>
           <p:cNvSpPr/>
           <p:nvPr/>
         </p:nvSpPr>
         <p:spPr>
           <a:xfrm>
-            <a:off x="0" y="0"/>
-            <a:ext cx="12191695" cy="411480"/>
+            <a:off x="731520" y="1280160"/>
+            <a:ext cx="2286000" cy="22860"/>
           </a:xfrm>
           <a:prstGeom prst="rect">
             <a:avLst/>
           </a:prstGeom>
           <a:solidFill>
-            <a:srgbClr val="241E19"/>
+            <a:srgbClr val="C29B62"/>
           </a:solidFill>
           <a:ln>
             <a:noFill/>
@@ -3526,59 +3468,24 @@
       </p:sp>
       <p:sp>
         <p:nvSpPr>
-          <p:cNvPr id="4" name="TextBox 3"/>
-          <p:cNvSpPr txBox="1"/>
-          <p:nvPr/>
-        </p:nvSpPr>
-        <p:spPr>
-          <a:xfrm>
-            <a:off x="731520" y="73152"/>
-            <a:ext cx="10728655" cy="274320"/>
-          </a:xfrm>
-          <a:prstGeom prst="rect">
-            <a:avLst/>
-          </a:prstGeom>
-          <a:noFill/>
-        </p:spPr>
-        <p:txBody>
-          <a:bodyPr wrap="none">
-            <a:spAutoFit/>
-          </a:bodyPr>
-          <a:lstStyle/>
-          <a:p>
-            <a:pPr>
-              <a:defRPr sz="900" b="1">
-                <a:solidFill>
-                  <a:srgbClr val="C8B9A0"/>
-                </a:solidFill>
-              </a:defRPr>
-            </a:pPr>
-            <a:r>
-              <a:t>SASANG SPA BOUTIQUE  |  K-WELLNESS HERITAGE &amp; BIOTECH  |  VIP DIRECTORS: 010-4728-9917</a:t>
-            </a:r>
-          </a:p>
-        </p:txBody>
-      </p:sp>
-      <p:sp>
-        <p:nvSpPr>
-          <p:cNvPr id="5" name="Rounded Rectangle 4"/>
+          <p:cNvPr id="6" name="Rectangle 5"/>
           <p:cNvSpPr/>
           <p:nvPr/>
         </p:nvSpPr>
         <p:spPr>
           <a:xfrm>
-            <a:off x="731520" y="621792"/>
-            <a:ext cx="2011680" cy="256032"/>
-          </a:xfrm>
-          <a:prstGeom prst="roundRect">
+            <a:off x="731520" y="1508760"/>
+            <a:ext cx="5120640" cy="2148840"/>
+          </a:xfrm>
+          <a:prstGeom prst="rect">
             <a:avLst/>
           </a:prstGeom>
           <a:solidFill>
-            <a:srgbClr val="F8F5EE"/>
+            <a:srgbClr val="FFFFFF"/>
           </a:solidFill>
           <a:ln w="12700">
             <a:solidFill>
-              <a:srgbClr val="C9A876"/>
+              <a:srgbClr val="C29B62"/>
             </a:solidFill>
           </a:ln>
         </p:spPr>
@@ -3606,14 +3513,14 @@
       </p:sp>
       <p:sp>
         <p:nvSpPr>
-          <p:cNvPr id="6" name="TextBox 5"/>
+          <p:cNvPr id="7" name="TextBox 6"/>
           <p:cNvSpPr txBox="1"/>
           <p:nvPr/>
         </p:nvSpPr>
         <p:spPr>
           <a:xfrm>
-            <a:off x="777240" y="603504"/>
-            <a:ext cx="1920240" cy="274320"/>
+            <a:off x="960120" y="1691640"/>
+            <a:ext cx="4663440" cy="1783080"/>
           </a:xfrm>
           <a:prstGeom prst="rect">
             <a:avLst/>
@@ -3621,79 +3528,62 @@
           <a:noFill/>
         </p:spPr>
         <p:txBody>
-          <a:bodyPr wrap="none">
+          <a:bodyPr wrap="square">
             <a:spAutoFit/>
           </a:bodyPr>
           <a:lstStyle/>
           <a:p>
-            <a:pPr algn="ctr">
-              <a:defRPr sz="900" b="1">
-                <a:solidFill>
-                  <a:srgbClr val="A37F48"/>
-                </a:solidFill>
-              </a:defRPr>
-            </a:pPr>
-            <a:r>
-              <a:t>THE PROBLEM</a:t>
-            </a:r>
-          </a:p>
-        </p:txBody>
-      </p:sp>
-      <p:sp>
-        <p:nvSpPr>
-          <p:cNvPr id="7" name="TextBox 6"/>
-          <p:cNvSpPr txBox="1"/>
-          <p:nvPr/>
-        </p:nvSpPr>
-        <p:spPr>
-          <a:xfrm>
-            <a:off x="2926080" y="530352"/>
-            <a:ext cx="8503920" cy="548640"/>
-          </a:xfrm>
-          <a:prstGeom prst="rect">
-            <a:avLst/>
-          </a:prstGeom>
-          <a:noFill/>
-        </p:spPr>
-        <p:txBody>
-          <a:bodyPr wrap="none">
-            <a:spAutoFit/>
-          </a:bodyPr>
-          <a:lstStyle/>
-          <a:p>
-            <a:pPr>
-              <a:defRPr sz="2000" b="1">
-                <a:solidFill>
-                  <a:srgbClr val="241E19"/>
-                </a:solidFill>
-              </a:defRPr>
-            </a:pPr>
-            <a:r>
-              <a:t>Problem Statement : 기존 스파와 디톡스의 3대 치명적 한계</a:t>
-            </a:r>
-          </a:p>
-        </p:txBody>
-      </p:sp>
-      <p:sp>
-        <p:nvSpPr>
-          <p:cNvPr id="8" name="Rounded Rectangle 7"/>
+            <a:pPr>
+              <a:spcAft>
+                <a:spcPts val="800"/>
+              </a:spcAft>
+              <a:defRPr sz="1400" b="1">
+                <a:solidFill>
+                  <a:srgbClr val="1C362B"/>
+                </a:solidFill>
+              </a:defRPr>
+            </a:pPr>
+            <a:r>
+              <a:t>01. Fachkundige Begleitung (전문가 1:1 동행)</a:t>
+            </a:r>
+          </a:p>
+          <a:p>
+            <a:pPr>
+              <a:lnSpc>
+                <a:spcPct val="130000"/>
+              </a:lnSpc>
+              <a:defRPr sz="1150">
+                <a:solidFill>
+                  <a:srgbClr val="5F5750"/>
+                </a:solidFill>
+              </a:defRPr>
+            </a:pPr>
+            <a:r>
+              <a:t>임동구 식품공학박사의 사상체질 의학 이론과 유정근 총괄 디렉터의 VIP 전담 테라피스트 1:1 배정으로 치료 효과 극대화.</a:t>
+            </a:r>
+          </a:p>
+        </p:txBody>
+      </p:sp>
+      <p:sp>
+        <p:nvSpPr>
+          <p:cNvPr id="8" name="Rectangle 7"/>
           <p:cNvSpPr/>
           <p:nvPr/>
         </p:nvSpPr>
         <p:spPr>
           <a:xfrm>
-            <a:off x="731520" y="1280160"/>
-            <a:ext cx="3383280" cy="5120640"/>
-          </a:xfrm>
-          <a:prstGeom prst="roundRect">
+            <a:off x="6126480" y="1508760"/>
+            <a:ext cx="5120640" cy="2148840"/>
+          </a:xfrm>
+          <a:prstGeom prst="rect">
             <a:avLst/>
           </a:prstGeom>
           <a:solidFill>
-            <a:srgbClr val="FEF2F2"/>
+            <a:srgbClr val="FFFFFF"/>
           </a:solidFill>
-          <a:ln w="15240">
+          <a:ln w="12700">
             <a:solidFill>
-              <a:srgbClr val="F87171"/>
+              <a:srgbClr val="C29B62"/>
             </a:solidFill>
           </a:ln>
         </p:spPr>
@@ -3727,8 +3617,8 @@
         </p:nvSpPr>
         <p:spPr>
           <a:xfrm>
-            <a:off x="914400" y="1463040"/>
-            <a:ext cx="3017520" cy="4754880"/>
+            <a:off x="6355080" y="1691640"/>
+            <a:ext cx="4663440" cy="1783080"/>
           </a:xfrm>
           <a:prstGeom prst="rect">
             <a:avLst/>
@@ -3743,31 +3633,16 @@
           <a:p>
             <a:pPr>
               <a:spcAft>
-                <a:spcPts val="600"/>
+                <a:spcPts val="800"/>
               </a:spcAft>
-              <a:defRPr sz="1100" b="1">
-                <a:solidFill>
-                  <a:srgbClr val="B91C1C"/>
-                </a:solidFill>
-              </a:defRPr>
-            </a:pPr>
-            <a:r>
-              <a:t>PROBLEM 01</a:t>
-            </a:r>
-          </a:p>
-          <a:p>
-            <a:pPr>
-              <a:spcAft>
-                <a:spcPts val="1200"/>
-              </a:spcAft>
-              <a:defRPr sz="1500" b="1">
-                <a:solidFill>
-                  <a:srgbClr val="241E19"/>
-                </a:solidFill>
-              </a:defRPr>
-            </a:pPr>
-            <a:r>
-              <a:t>획일적 처방의 부작용 ('One-Size-Fits-All')</a:t>
+              <a:defRPr sz="1400" b="1">
+                <a:solidFill>
+                  <a:srgbClr val="1C362B"/>
+                </a:solidFill>
+              </a:defRPr>
+            </a:pPr>
+            <a:r>
+              <a:t>02. Individuelle Betreuung (소수 정예 프라이빗)</a:t>
             </a:r>
           </a:p>
           <a:p>
@@ -3775,43 +3650,38 @@
               <a:lnSpc>
                 <a:spcPct val="130000"/>
               </a:lnSpc>
-              <a:defRPr sz="1100">
-                <a:solidFill>
-                  <a:srgbClr val="52463C"/>
-                </a:solidFill>
-              </a:defRPr>
-            </a:pPr>
-            <a:r>
-              <a:t>기존 스파는 '만인에게 좋은 것'이라는 전제로 라벤더/페퍼민트/온열 사우나를 획일 적용합니다.</a:t>
-            </a:r>
-            <a:br/>
-            <a:br/>
-            <a:r>
-              <a:t>⚠️ 위험성: 열이 많은 사람에게 고온 사우나나 진저 오일을 쓰면 두통·상열감·불면이 악화되고, 몸이 찬 사람에게 찬 탄산스파나 페퍼민트를 쓰면 극심한 냉증과 복통을 유발합니다.</a:t>
-            </a:r>
-          </a:p>
-        </p:txBody>
-      </p:sp>
-      <p:sp>
-        <p:nvSpPr>
-          <p:cNvPr id="10" name="Rounded Rectangle 9"/>
+              <a:defRPr sz="1150">
+                <a:solidFill>
+                  <a:srgbClr val="5F5750"/>
+                </a:solidFill>
+              </a:defRPr>
+            </a:pPr>
+            <a:r>
+              <a:t>대형 스파의 번잡함을 배제하고 프라이빗 스위트룸에서 고객의 장부 편차에 맞춘 100% 비언어(은반지/가운) 의전 제공.</a:t>
+            </a:r>
+          </a:p>
+        </p:txBody>
+      </p:sp>
+      <p:sp>
+        <p:nvSpPr>
+          <p:cNvPr id="10" name="Rectangle 9"/>
           <p:cNvSpPr/>
           <p:nvPr/>
         </p:nvSpPr>
         <p:spPr>
           <a:xfrm>
-            <a:off x="4343400" y="1280160"/>
-            <a:ext cx="3383280" cy="5120640"/>
-          </a:xfrm>
-          <a:prstGeom prst="roundRect">
+            <a:off x="731520" y="3931920"/>
+            <a:ext cx="5120640" cy="2148840"/>
+          </a:xfrm>
+          <a:prstGeom prst="rect">
             <a:avLst/>
           </a:prstGeom>
           <a:solidFill>
-            <a:srgbClr val="FEF2F2"/>
+            <a:srgbClr val="FFFFFF"/>
           </a:solidFill>
-          <a:ln w="15240">
+          <a:ln w="12700">
             <a:solidFill>
-              <a:srgbClr val="F87171"/>
+              <a:srgbClr val="C29B62"/>
             </a:solidFill>
           </a:ln>
         </p:spPr>
@@ -3845,8 +3715,8 @@
         </p:nvSpPr>
         <p:spPr>
           <a:xfrm>
-            <a:off x="4526280" y="1463040"/>
-            <a:ext cx="3017520" cy="4754880"/>
+            <a:off x="960120" y="4114800"/>
+            <a:ext cx="4663440" cy="1783080"/>
           </a:xfrm>
           <a:prstGeom prst="rect">
             <a:avLst/>
@@ -3861,31 +3731,16 @@
           <a:p>
             <a:pPr>
               <a:spcAft>
-                <a:spcPts val="600"/>
+                <a:spcPts val="800"/>
               </a:spcAft>
-              <a:defRPr sz="1100" b="1">
-                <a:solidFill>
-                  <a:srgbClr val="B91C1C"/>
-                </a:solidFill>
-              </a:defRPr>
-            </a:pPr>
-            <a:r>
-              <a:t>PROBLEM 02</a:t>
-            </a:r>
-          </a:p>
-          <a:p>
-            <a:pPr>
-              <a:spcAft>
-                <a:spcPts val="1200"/>
-              </a:spcAft>
-              <a:defRPr sz="1500" b="1">
-                <a:solidFill>
-                  <a:srgbClr val="241E19"/>
-                </a:solidFill>
-              </a:defRPr>
-            </a:pPr>
-            <a:r>
-              <a:t>1회성 마사지의 한계 (Temporary Relief)</a:t>
+              <a:defRPr sz="1400" b="1">
+                <a:solidFill>
+                  <a:srgbClr val="1C362B"/>
+                </a:solidFill>
+              </a:defRPr>
+            </a:pPr>
+            <a:r>
+              <a:t>03. Bewegung &amp; Meditation (기체조 &amp; 침묵 명상)</a:t>
             </a:r>
           </a:p>
           <a:p>
@@ -3893,43 +3748,38 @@
               <a:lnSpc>
                 <a:spcPct val="130000"/>
               </a:lnSpc>
-              <a:defRPr sz="1100">
-                <a:solidFill>
-                  <a:srgbClr val="52463C"/>
-                </a:solidFill>
-              </a:defRPr>
-            </a:pPr>
-            <a:r>
-              <a:t>단순 오일 마사지는 표층 근육만 일시적으로 만져줄 뿐, 체내 장부(간·폐·비·신)의 대사 불균형과 심부 노폐물 정체를 해결하지 못합니다.</a:t>
-            </a:r>
-            <a:br/>
-            <a:br/>
-            <a:r>
-              <a:t>⚠️ 한계: 스파 당일 밤만 잠시 편안할 뿐, 다음 날 아침이면 피로와 뻐근함이 100% 원상복귀되는 악순환이 반복됩니다.</a:t>
-            </a:r>
-          </a:p>
-        </p:txBody>
-      </p:sp>
-      <p:sp>
-        <p:nvSpPr>
-          <p:cNvPr id="12" name="Rounded Rectangle 11"/>
+              <a:defRPr sz="1150">
+                <a:solidFill>
+                  <a:srgbClr val="5F5750"/>
+                </a:solidFill>
+              </a:defRPr>
+            </a:pPr>
+            <a:r>
+              <a:t>서양식 격렬한 운동 대신 단전 호흡으로 탁기를 배출하는 태극선법 8초식과 사찰/선도의 30분 고요 침묵 명상 융합.</a:t>
+            </a:r>
+          </a:p>
+        </p:txBody>
+      </p:sp>
+      <p:sp>
+        <p:nvSpPr>
+          <p:cNvPr id="12" name="Rectangle 11"/>
           <p:cNvSpPr/>
           <p:nvPr/>
         </p:nvSpPr>
         <p:spPr>
           <a:xfrm>
-            <a:off x="7955280" y="1280160"/>
-            <a:ext cx="3383280" cy="5120640"/>
-          </a:xfrm>
-          <a:prstGeom prst="roundRect">
+            <a:off x="6126480" y="3931920"/>
+            <a:ext cx="5120640" cy="2148840"/>
+          </a:xfrm>
+          <a:prstGeom prst="rect">
             <a:avLst/>
           </a:prstGeom>
           <a:solidFill>
-            <a:srgbClr val="FEF2F2"/>
+            <a:srgbClr val="FFFFFF"/>
           </a:solidFill>
-          <a:ln w="15240">
+          <a:ln w="12700">
             <a:solidFill>
-              <a:srgbClr val="F87171"/>
+              <a:srgbClr val="C29B62"/>
             </a:solidFill>
           </a:ln>
         </p:spPr>
@@ -3963,8 +3813,8 @@
         </p:nvSpPr>
         <p:spPr>
           <a:xfrm>
-            <a:off x="8138160" y="1463040"/>
-            <a:ext cx="3017520" cy="4754880"/>
+            <a:off x="6355080" y="4114800"/>
+            <a:ext cx="4663440" cy="1783080"/>
           </a:xfrm>
           <a:prstGeom prst="rect">
             <a:avLst/>
@@ -3979,31 +3829,16 @@
           <a:p>
             <a:pPr>
               <a:spcAft>
-                <a:spcPts val="600"/>
+                <a:spcPts val="800"/>
               </a:spcAft>
-              <a:defRPr sz="1100" b="1">
-                <a:solidFill>
-                  <a:srgbClr val="B91C1C"/>
-                </a:solidFill>
-              </a:defRPr>
-            </a:pPr>
-            <a:r>
-              <a:t>PROBLEM 03</a:t>
-            </a:r>
-          </a:p>
-          <a:p>
-            <a:pPr>
-              <a:spcAft>
-                <a:spcPts val="1200"/>
-              </a:spcAft>
-              <a:defRPr sz="1500" b="1">
-                <a:solidFill>
-                  <a:srgbClr val="241E19"/>
-                </a:solidFill>
-              </a:defRPr>
-            </a:pPr>
-            <a:r>
-              <a:t>무분별한 디톡스의 역효과 (Blind Detox)</a:t>
+              <a:defRPr sz="1400" b="1">
+                <a:solidFill>
+                  <a:srgbClr val="1C362B"/>
+                </a:solidFill>
+              </a:defRPr>
+            </a:pPr>
+            <a:r>
+              <a:t>04. Bio-Sasang Cuisine (유기농 체질 맞춤 섭생)</a:t>
             </a:r>
           </a:p>
           <a:p>
@@ -4011,19 +3846,14 @@
               <a:lnSpc>
                 <a:spcPct val="130000"/>
               </a:lnSpc>
-              <a:defRPr sz="1100">
-                <a:solidFill>
-                  <a:srgbClr val="52463C"/>
-                </a:solidFill>
-              </a:defRPr>
-            </a:pPr>
-            <a:r>
-              <a:t>체질을 무시한 유행성 디톡스 주스(케일/오이 등 찬 성질)나 무작정 굶는 단식은 소화기 장부를 심각하게 훼손합니다.</a:t>
-            </a:r>
-            <a:br/>
-            <a:br/>
-            <a:r>
-              <a:t>⚠️ 피해: 비위가 찬 소음인에게 찬 녹즙은 위장 마비를 일으키고, 고단백 육류 과다는 태양인의 간 해독력을 파괴합니다.</a:t>
+              <a:defRPr sz="1150">
+                <a:solidFill>
+                  <a:srgbClr val="5F5750"/>
+                </a:solidFill>
+              </a:defRPr>
+            </a:pPr>
+            <a:r>
+              <a:t>18:00~06:00 12시간 단식(자가포식)과 기상 직후 4대 체질 맞춤 영양 미역국(소고기/돼지고기/닭가슴살/전복) 정식 공급.</a:t>
             </a:r>
           </a:p>
         </p:txBody>
@@ -4061,7 +3891,7 @@
             <a:avLst/>
           </a:prstGeom>
           <a:solidFill>
-            <a:srgbClr val="FDFBF7"/>
+            <a:srgbClr val="FAF8F3"/>
           </a:solidFill>
           <a:ln>
             <a:noFill/>
@@ -4091,20 +3921,90 @@
       </p:sp>
       <p:sp>
         <p:nvSpPr>
-          <p:cNvPr id="3" name="Rectangle 2"/>
+          <p:cNvPr id="3" name="TextBox 2"/>
+          <p:cNvSpPr txBox="1"/>
+          <p:nvPr/>
+        </p:nvSpPr>
+        <p:spPr>
+          <a:xfrm>
+            <a:off x="731520" y="365760"/>
+            <a:ext cx="10728655" cy="320040"/>
+          </a:xfrm>
+          <a:prstGeom prst="rect">
+            <a:avLst/>
+          </a:prstGeom>
+          <a:noFill/>
+        </p:spPr>
+        <p:txBody>
+          <a:bodyPr wrap="none">
+            <a:spAutoFit/>
+          </a:bodyPr>
+          <a:lstStyle/>
+          <a:p>
+            <a:pPr>
+              <a:defRPr sz="950" b="1">
+                <a:solidFill>
+                  <a:srgbClr val="94723E"/>
+                </a:solidFill>
+              </a:defRPr>
+            </a:pPr>
+            <a:r>
+              <a:t>THE PROBLEM</a:t>
+            </a:r>
+          </a:p>
+        </p:txBody>
+      </p:sp>
+      <p:sp>
+        <p:nvSpPr>
+          <p:cNvPr id="4" name="TextBox 3"/>
+          <p:cNvSpPr txBox="1"/>
+          <p:nvPr/>
+        </p:nvSpPr>
+        <p:spPr>
+          <a:xfrm>
+            <a:off x="731520" y="640080"/>
+            <a:ext cx="10728655" cy="640080"/>
+          </a:xfrm>
+          <a:prstGeom prst="rect">
+            <a:avLst/>
+          </a:prstGeom>
+          <a:noFill/>
+        </p:spPr>
+        <p:txBody>
+          <a:bodyPr wrap="none">
+            <a:spAutoFit/>
+          </a:bodyPr>
+          <a:lstStyle/>
+          <a:p>
+            <a:pPr>
+              <a:defRPr sz="2100" b="1">
+                <a:solidFill>
+                  <a:srgbClr val="26201C"/>
+                </a:solidFill>
+              </a:defRPr>
+            </a:pPr>
+            <a:r>
+              <a:t>Die Entstehung von Ungleichgewicht : 현대인이 겪는 3대 고질적 문제</a:t>
+            </a:r>
+          </a:p>
+        </p:txBody>
+      </p:sp>
+      <p:sp>
+        <p:nvSpPr>
+          <p:cNvPr id="5" name="Rectangle 4"/>
           <p:cNvSpPr/>
           <p:nvPr/>
         </p:nvSpPr>
         <p:spPr>
           <a:xfrm>
-            <a:off x="0" y="0"/>
-            <a:ext cx="12191695" cy="411480"/>
+            <a:off x="731520" y="1280160"/>
+            <a:ext cx="2286000" cy="22860"/>
           </a:xfrm>
           <a:prstGeom prst="rect">
             <a:avLst/>
           </a:prstGeom>
           <a:solidFill>
-            <a:srgbClr val="241E19"/>
+            <a:srgbClr val="C29B62"/>
           </a:solidFill>
           <a:ln>
             <a:noFill/>
@@ -4134,59 +4034,24 @@
       </p:sp>
       <p:sp>
         <p:nvSpPr>
-          <p:cNvPr id="4" name="TextBox 3"/>
-          <p:cNvSpPr txBox="1"/>
-          <p:nvPr/>
-        </p:nvSpPr>
-        <p:spPr>
-          <a:xfrm>
-            <a:off x="731520" y="73152"/>
-            <a:ext cx="10728655" cy="274320"/>
-          </a:xfrm>
-          <a:prstGeom prst="rect">
-            <a:avLst/>
-          </a:prstGeom>
-          <a:noFill/>
-        </p:spPr>
-        <p:txBody>
-          <a:bodyPr wrap="none">
-            <a:spAutoFit/>
-          </a:bodyPr>
-          <a:lstStyle/>
-          <a:p>
-            <a:pPr>
-              <a:defRPr sz="900" b="1">
-                <a:solidFill>
-                  <a:srgbClr val="C8B9A0"/>
-                </a:solidFill>
-              </a:defRPr>
-            </a:pPr>
-            <a:r>
-              <a:t>SASANG SPA BOUTIQUE  |  K-WELLNESS HERITAGE &amp; BIOTECH  |  VIP DIRECTORS: 010-4728-9917</a:t>
-            </a:r>
-          </a:p>
-        </p:txBody>
-      </p:sp>
-      <p:sp>
-        <p:nvSpPr>
-          <p:cNvPr id="5" name="Rounded Rectangle 4"/>
+          <p:cNvPr id="6" name="Rectangle 5"/>
           <p:cNvSpPr/>
           <p:nvPr/>
         </p:nvSpPr>
         <p:spPr>
           <a:xfrm>
-            <a:off x="731520" y="621792"/>
-            <a:ext cx="2011680" cy="256032"/>
-          </a:xfrm>
-          <a:prstGeom prst="roundRect">
+            <a:off x="731520" y="1508760"/>
+            <a:ext cx="3383280" cy="4846320"/>
+          </a:xfrm>
+          <a:prstGeom prst="rect">
             <a:avLst/>
           </a:prstGeom>
           <a:solidFill>
-            <a:srgbClr val="F8F5EE"/>
+            <a:srgbClr val="FDF2F2"/>
           </a:solidFill>
           <a:ln w="12700">
             <a:solidFill>
-              <a:srgbClr val="C9A876"/>
+              <a:srgbClr val="EF4444"/>
             </a:solidFill>
           </a:ln>
         </p:spPr>
@@ -4214,14 +4079,14 @@
       </p:sp>
       <p:sp>
         <p:nvSpPr>
-          <p:cNvPr id="6" name="TextBox 5"/>
+          <p:cNvPr id="7" name="TextBox 6"/>
           <p:cNvSpPr txBox="1"/>
           <p:nvPr/>
         </p:nvSpPr>
         <p:spPr>
           <a:xfrm>
-            <a:off x="777240" y="603504"/>
-            <a:ext cx="1920240" cy="274320"/>
+            <a:off x="914400" y="1691640"/>
+            <a:ext cx="3017520" cy="4480560"/>
           </a:xfrm>
           <a:prstGeom prst="rect">
             <a:avLst/>
@@ -4229,79 +4094,82 @@
           <a:noFill/>
         </p:spPr>
         <p:txBody>
-          <a:bodyPr wrap="none">
+          <a:bodyPr wrap="square">
             <a:spAutoFit/>
           </a:bodyPr>
           <a:lstStyle/>
           <a:p>
-            <a:pPr algn="ctr">
-              <a:defRPr sz="900" b="1">
-                <a:solidFill>
-                  <a:srgbClr val="A37F48"/>
-                </a:solidFill>
-              </a:defRPr>
-            </a:pPr>
-            <a:r>
-              <a:t>THE SOLUTION</a:t>
-            </a:r>
-          </a:p>
-        </p:txBody>
-      </p:sp>
-      <p:sp>
-        <p:nvSpPr>
-          <p:cNvPr id="7" name="TextBox 6"/>
-          <p:cNvSpPr txBox="1"/>
-          <p:nvPr/>
-        </p:nvSpPr>
-        <p:spPr>
-          <a:xfrm>
-            <a:off x="2926080" y="530352"/>
-            <a:ext cx="8503920" cy="548640"/>
-          </a:xfrm>
-          <a:prstGeom prst="rect">
-            <a:avLst/>
-          </a:prstGeom>
-          <a:noFill/>
-        </p:spPr>
-        <p:txBody>
-          <a:bodyPr wrap="none">
-            <a:spAutoFit/>
-          </a:bodyPr>
-          <a:lstStyle/>
-          <a:p>
-            <a:pPr>
-              <a:defRPr sz="2000" b="1">
-                <a:solidFill>
-                  <a:srgbClr val="241E19"/>
-                </a:solidFill>
-              </a:defRPr>
-            </a:pPr>
-            <a:r>
-              <a:t>Our Solution : 사상체질 스파가 제시하는 3대 근본 해결책</a:t>
-            </a:r>
-          </a:p>
-        </p:txBody>
-      </p:sp>
-      <p:sp>
-        <p:nvSpPr>
-          <p:cNvPr id="8" name="Rounded Rectangle 7"/>
+            <a:pPr>
+              <a:spcAft>
+                <a:spcPts val="600"/>
+              </a:spcAft>
+              <a:defRPr sz="1100" b="1">
+                <a:solidFill>
+                  <a:srgbClr val="B91C1C"/>
+                </a:solidFill>
+              </a:defRPr>
+            </a:pPr>
+            <a:r>
+              <a:t>PROBLEM 01</a:t>
+            </a:r>
+          </a:p>
+          <a:p>
+            <a:pPr>
+              <a:spcAft>
+                <a:spcPts val="1000"/>
+              </a:spcAft>
+              <a:defRPr sz="1400" b="1">
+                <a:solidFill>
+                  <a:srgbClr val="26201C"/>
+                </a:solidFill>
+              </a:defRPr>
+            </a:pPr>
+            <a:r>
+              <a:t>획일적 처방의 부작용 ('One-Size-Fits-All')</a:t>
+            </a:r>
+          </a:p>
+          <a:p>
+            <a:pPr>
+              <a:lnSpc>
+                <a:spcPct val="130000"/>
+              </a:lnSpc>
+              <a:defRPr sz="1050">
+                <a:solidFill>
+                  <a:srgbClr val="5F5750"/>
+                </a:solidFill>
+              </a:defRPr>
+            </a:pPr>
+            <a:r>
+              <a:t>기존 스파는 '만인에게 좋은 것'이라는 전제로 라벤더/페퍼민트/온열 사우나를 획일 적용합니다.</a:t>
+            </a:r>
+            <a:br/>
+            <a:br/>
+            <a:r>
+              <a:t>⚠️ 위험성: 열이 많은 사람에게 고온 사우나나 진저 오일을 쓰면 두통·상열감·불면이 악화되고, 몸이 찬 사람에게 찬 탄산스파나 페퍼민트를 쓰면 극심한 냉증과 복통을 유발합니다.</a:t>
+            </a:r>
+          </a:p>
+        </p:txBody>
+      </p:sp>
+      <p:sp>
+        <p:nvSpPr>
+          <p:cNvPr id="8" name="Rectangle 7"/>
           <p:cNvSpPr/>
           <p:nvPr/>
         </p:nvSpPr>
         <p:spPr>
           <a:xfrm>
-            <a:off x="731520" y="1280160"/>
-            <a:ext cx="3383280" cy="5120640"/>
-          </a:xfrm>
-          <a:prstGeom prst="roundRect">
+            <a:off x="4343400" y="1508760"/>
+            <a:ext cx="3383280" cy="4846320"/>
+          </a:xfrm>
+          <a:prstGeom prst="rect">
             <a:avLst/>
           </a:prstGeom>
           <a:solidFill>
-            <a:srgbClr val="ECFDF5"/>
+            <a:srgbClr val="FDF2F2"/>
           </a:solidFill>
-          <a:ln w="15240">
+          <a:ln w="12700">
             <a:solidFill>
-              <a:srgbClr val="34D399"/>
+              <a:srgbClr val="EF4444"/>
             </a:solidFill>
           </a:ln>
         </p:spPr>
@@ -4335,8 +4203,8 @@
         </p:nvSpPr>
         <p:spPr>
           <a:xfrm>
-            <a:off x="914400" y="1463040"/>
-            <a:ext cx="3017520" cy="4754880"/>
+            <a:off x="4526280" y="1691640"/>
+            <a:ext cx="3017520" cy="4480560"/>
           </a:xfrm>
           <a:prstGeom prst="rect">
             <a:avLst/>
@@ -4355,27 +4223,27 @@
               </a:spcAft>
               <a:defRPr sz="1100" b="1">
                 <a:solidFill>
-                  <a:srgbClr val="1E5A3C"/>
-                </a:solidFill>
-              </a:defRPr>
-            </a:pPr>
-            <a:r>
-              <a:t>SOLUTION 01</a:t>
+                  <a:srgbClr val="B91C1C"/>
+                </a:solidFill>
+              </a:defRPr>
+            </a:pPr>
+            <a:r>
+              <a:t>PROBLEM 02</a:t>
             </a:r>
           </a:p>
           <a:p>
             <a:pPr>
               <a:spcAft>
-                <a:spcPts val="1200"/>
+                <a:spcPts val="1000"/>
               </a:spcAft>
-              <a:defRPr sz="1500" b="1">
-                <a:solidFill>
-                  <a:srgbClr val="241E19"/>
-                </a:solidFill>
-              </a:defRPr>
-            </a:pPr>
-            <a:r>
-              <a:t>장부대소 기반 0% 부작용 초개인화</a:t>
+              <a:defRPr sz="1400" b="1">
+                <a:solidFill>
+                  <a:srgbClr val="26201C"/>
+                </a:solidFill>
+              </a:defRPr>
+            </a:pPr>
+            <a:r>
+              <a:t>1회성 마사지의 한계 (Temporary Relief)</a:t>
             </a:r>
           </a:p>
           <a:p>
@@ -4383,43 +4251,43 @@
               <a:lnSpc>
                 <a:spcPct val="130000"/>
               </a:lnSpc>
-              <a:defRPr sz="1100">
-                <a:solidFill>
-                  <a:srgbClr val="52463C"/>
-                </a:solidFill>
-              </a:defRPr>
-            </a:pPr>
-            <a:r>
-              <a:t>1894년 이제마의 해부생리학과 생체 데이터를 결합하여 간·폐·비·신의 장부 용량을 정밀 진단합니다.</a:t>
+              <a:defRPr sz="1050">
+                <a:solidFill>
+                  <a:srgbClr val="5F5750"/>
+                </a:solidFill>
+              </a:defRPr>
+            </a:pPr>
+            <a:r>
+              <a:t>단순 오일 마사지는 표층 근육만 일시적으로 만져줄 뿐, 체내 장부(간·폐·비·신)의 대사 불균형과 심부 노폐물 정체를 해결하지 못합니다.</a:t>
             </a:r>
             <a:br/>
             <a:br/>
             <a:r>
-              <a:t>✨ 해결: 오직 내 몸의 장부 편차에만 유효한 최고급 100% 순수 에센셜 오일과 맞춤 수온(41℃ 온열탕 vs 38.5℃ 쿨링탕)을 처방하여 부작용을 원천 차단합니다.</a:t>
-            </a:r>
-          </a:p>
-        </p:txBody>
-      </p:sp>
-      <p:sp>
-        <p:nvSpPr>
-          <p:cNvPr id="10" name="Rounded Rectangle 9"/>
+              <a:t>⚠️ 한계: 스파 당일 밤만 잠시 편안할 뿐, 다음 날 아침이면 피로와 뻐근함이 100% 원상복귀되는 악순환이 반복됩니다.</a:t>
+            </a:r>
+          </a:p>
+        </p:txBody>
+      </p:sp>
+      <p:sp>
+        <p:nvSpPr>
+          <p:cNvPr id="10" name="Rectangle 9"/>
           <p:cNvSpPr/>
           <p:nvPr/>
         </p:nvSpPr>
         <p:spPr>
           <a:xfrm>
-            <a:off x="4343400" y="1280160"/>
-            <a:ext cx="3383280" cy="5120640"/>
-          </a:xfrm>
-          <a:prstGeom prst="roundRect">
+            <a:off x="7955280" y="1508760"/>
+            <a:ext cx="3383280" cy="4846320"/>
+          </a:xfrm>
+          <a:prstGeom prst="rect">
             <a:avLst/>
           </a:prstGeom>
           <a:solidFill>
-            <a:srgbClr val="ECFDF5"/>
+            <a:srgbClr val="FDF2F2"/>
           </a:solidFill>
-          <a:ln w="15240">
+          <a:ln w="12700">
             <a:solidFill>
-              <a:srgbClr val="34D399"/>
+              <a:srgbClr val="EF4444"/>
             </a:solidFill>
           </a:ln>
         </p:spPr>
@@ -4453,8 +4321,8 @@
         </p:nvSpPr>
         <p:spPr>
           <a:xfrm>
-            <a:off x="4526280" y="1463040"/>
-            <a:ext cx="3017520" cy="4754880"/>
+            <a:off x="8138160" y="1691640"/>
+            <a:ext cx="3017520" cy="4480560"/>
           </a:xfrm>
           <a:prstGeom prst="rect">
             <a:avLst/>
@@ -4473,27 +4341,27 @@
               </a:spcAft>
               <a:defRPr sz="1100" b="1">
                 <a:solidFill>
-                  <a:srgbClr val="1E5A3C"/>
-                </a:solidFill>
-              </a:defRPr>
-            </a:pPr>
-            <a:r>
-              <a:t>SOLUTION 02</a:t>
+                  <a:srgbClr val="B91C1C"/>
+                </a:solidFill>
+              </a:defRPr>
+            </a:pPr>
+            <a:r>
+              <a:t>PROBLEM 03</a:t>
             </a:r>
           </a:p>
           <a:p>
             <a:pPr>
               <a:spcAft>
-                <a:spcPts val="1200"/>
+                <a:spcPts val="1000"/>
               </a:spcAft>
-              <a:defRPr sz="1500" b="1">
-                <a:solidFill>
-                  <a:srgbClr val="241E19"/>
-                </a:solidFill>
-              </a:defRPr>
-            </a:pPr>
-            <a:r>
-              <a:t>3중 융합 신체 리셋 (스파+단식+섭생)</a:t>
+              <a:defRPr sz="1400" b="1">
+                <a:solidFill>
+                  <a:srgbClr val="26201C"/>
+                </a:solidFill>
+              </a:defRPr>
+            </a:pPr>
+            <a:r>
+              <a:t>무분별한 디톡스의 역효과 (Blind Detox)</a:t>
             </a:r>
           </a:p>
           <a:p>
@@ -4501,137 +4369,19 @@
               <a:lnSpc>
                 <a:spcPct val="130000"/>
               </a:lnSpc>
-              <a:defRPr sz="1100">
-                <a:solidFill>
-                  <a:srgbClr val="52463C"/>
-                </a:solidFill>
-              </a:defRPr>
-            </a:pPr>
-            <a:r>
-              <a:t>80분 이원화 바디 테라피(수기 지압+순수 오일 림프 드레나쥐)와 저녁 18:00~익일 06:00 12시간 단식(자가포식)을 결합합니다.</a:t>
+              <a:defRPr sz="1050">
+                <a:solidFill>
+                  <a:srgbClr val="5F5750"/>
+                </a:solidFill>
+              </a:defRPr>
+            </a:pPr>
+            <a:r>
+              <a:t>체질을 무시한 유행성 디톡스 주스(케일/오이 등 찬 성질)나 무작정 굶는 단식은 소화기 장부를 심각하게 훼손합니다.</a:t>
             </a:r>
             <a:br/>
             <a:br/>
             <a:r>
-              <a:t>✨ 해결: 단식으로 세포 내 찌꺼기를 청소하고, 기상 직후 4대 체질 맞춤 영양 미역국 조식으로 장부를 완벽히 영양 재건합니다.</a:t>
-            </a:r>
-          </a:p>
-        </p:txBody>
-      </p:sp>
-      <p:sp>
-        <p:nvSpPr>
-          <p:cNvPr id="12" name="Rounded Rectangle 11"/>
-          <p:cNvSpPr/>
-          <p:nvPr/>
-        </p:nvSpPr>
-        <p:spPr>
-          <a:xfrm>
-            <a:off x="7955280" y="1280160"/>
-            <a:ext cx="3383280" cy="5120640"/>
-          </a:xfrm>
-          <a:prstGeom prst="roundRect">
-            <a:avLst/>
-          </a:prstGeom>
-          <a:solidFill>
-            <a:srgbClr val="ECFDF5"/>
-          </a:solidFill>
-          <a:ln w="15240">
-            <a:solidFill>
-              <a:srgbClr val="34D399"/>
-            </a:solidFill>
-          </a:ln>
-        </p:spPr>
-        <p:style>
-          <a:lnRef idx="1">
-            <a:schemeClr val="accent1"/>
-          </a:lnRef>
-          <a:fillRef idx="3">
-            <a:schemeClr val="accent1"/>
-          </a:fillRef>
-          <a:effectRef idx="2">
-            <a:schemeClr val="accent1"/>
-          </a:effectRef>
-          <a:fontRef idx="minor">
-            <a:schemeClr val="lt1"/>
-          </a:fontRef>
-        </p:style>
-        <p:txBody>
-          <a:bodyPr rtlCol="0" anchor="ctr"/>
-          <a:lstStyle/>
-          <a:p>
-            <a:pPr algn="ctr"/>
-          </a:p>
-        </p:txBody>
-      </p:sp>
-      <p:sp>
-        <p:nvSpPr>
-          <p:cNvPr id="13" name="TextBox 12"/>
-          <p:cNvSpPr txBox="1"/>
-          <p:nvPr/>
-        </p:nvSpPr>
-        <p:spPr>
-          <a:xfrm>
-            <a:off x="8138160" y="1463040"/>
-            <a:ext cx="3017520" cy="4754880"/>
-          </a:xfrm>
-          <a:prstGeom prst="rect">
-            <a:avLst/>
-          </a:prstGeom>
-          <a:noFill/>
-        </p:spPr>
-        <p:txBody>
-          <a:bodyPr wrap="square">
-            <a:spAutoFit/>
-          </a:bodyPr>
-          <a:lstStyle/>
-          <a:p>
-            <a:pPr>
-              <a:spcAft>
-                <a:spcPts val="600"/>
-              </a:spcAft>
-              <a:defRPr sz="1100" b="1">
-                <a:solidFill>
-                  <a:srgbClr val="1E5A3C"/>
-                </a:solidFill>
-              </a:defRPr>
-            </a:pPr>
-            <a:r>
-              <a:t>SOLUTION 03</a:t>
-            </a:r>
-          </a:p>
-          <a:p>
-            <a:pPr>
-              <a:spcAft>
-                <a:spcPts val="1200"/>
-              </a:spcAft>
-              <a:defRPr sz="1500" b="1">
-                <a:solidFill>
-                  <a:srgbClr val="241E19"/>
-                </a:solidFill>
-              </a:defRPr>
-            </a:pPr>
-            <a:r>
-              <a:t>평생 지속 가능한 바이오 LTV 라이프스타일</a:t>
-            </a:r>
-          </a:p>
-          <a:p>
-            <a:pPr>
-              <a:lnSpc>
-                <a:spcPct val="130000"/>
-              </a:lnSpc>
-              <a:defRPr sz="1100">
-                <a:solidFill>
-                  <a:srgbClr val="52463C"/>
-                </a:solidFill>
-              </a:defRPr>
-            </a:pPr>
-            <a:r>
-              <a:t>1회성 방문을 넘어 DTC 유전자 분석 및 장내 미생물(마이크로바이옴) 키트를 연동하여 1:1 모바일 바이오 리포트를 발행합니다.</a:t>
-            </a:r>
-            <a:br/>
-            <a:br/>
-            <a:r>
-              <a:t>✨ 해결: 일상 복귀 후에도 모바일 웹 처방전과 월간 맞춤 오일 정기구독(LRP)을 통해 체질 섭생을 평생 습관화합니다.</a:t>
+              <a:t>⚠️ 피해: 비위가 찬 소음인에게 찬 녹즙은 위장 마비를 일으키고, 고단백 육류 과다는 태양인의 간 해독력을 파괴합니다.</a:t>
             </a:r>
           </a:p>
         </p:txBody>
@@ -4669,7 +4419,7 @@
             <a:avLst/>
           </a:prstGeom>
           <a:solidFill>
-            <a:srgbClr val="FDFBF7"/>
+            <a:srgbClr val="FAF8F3"/>
           </a:solidFill>
           <a:ln>
             <a:noFill/>
@@ -4699,20 +4449,90 @@
       </p:sp>
       <p:sp>
         <p:nvSpPr>
-          <p:cNvPr id="3" name="Rectangle 2"/>
+          <p:cNvPr id="3" name="TextBox 2"/>
+          <p:cNvSpPr txBox="1"/>
+          <p:nvPr/>
+        </p:nvSpPr>
+        <p:spPr>
+          <a:xfrm>
+            <a:off x="731520" y="365760"/>
+            <a:ext cx="10728655" cy="320040"/>
+          </a:xfrm>
+          <a:prstGeom prst="rect">
+            <a:avLst/>
+          </a:prstGeom>
+          <a:noFill/>
+        </p:spPr>
+        <p:txBody>
+          <a:bodyPr wrap="none">
+            <a:spAutoFit/>
+          </a:bodyPr>
+          <a:lstStyle/>
+          <a:p>
+            <a:pPr>
+              <a:defRPr sz="950" b="1">
+                <a:solidFill>
+                  <a:srgbClr val="94723E"/>
+                </a:solidFill>
+              </a:defRPr>
+            </a:pPr>
+            <a:r>
+              <a:t>THE SOLUTION</a:t>
+            </a:r>
+          </a:p>
+        </p:txBody>
+      </p:sp>
+      <p:sp>
+        <p:nvSpPr>
+          <p:cNvPr id="4" name="TextBox 3"/>
+          <p:cNvSpPr txBox="1"/>
+          <p:nvPr/>
+        </p:nvSpPr>
+        <p:spPr>
+          <a:xfrm>
+            <a:off x="731520" y="640080"/>
+            <a:ext cx="10728655" cy="640080"/>
+          </a:xfrm>
+          <a:prstGeom prst="rect">
+            <a:avLst/>
+          </a:prstGeom>
+          <a:noFill/>
+        </p:spPr>
+        <p:txBody>
+          <a:bodyPr wrap="none">
+            <a:spAutoFit/>
+          </a:bodyPr>
+          <a:lstStyle/>
+          <a:p>
+            <a:pPr>
+              <a:defRPr sz="2100" b="1">
+                <a:solidFill>
+                  <a:srgbClr val="26201C"/>
+                </a:solidFill>
+              </a:defRPr>
+            </a:pPr>
+            <a:r>
+              <a:t>Ganzheitlich heilen : 사상체질 스파가 제시하는 3대 근본 해결책</a:t>
+            </a:r>
+          </a:p>
+        </p:txBody>
+      </p:sp>
+      <p:sp>
+        <p:nvSpPr>
+          <p:cNvPr id="5" name="Rectangle 4"/>
           <p:cNvSpPr/>
           <p:nvPr/>
         </p:nvSpPr>
         <p:spPr>
           <a:xfrm>
-            <a:off x="0" y="0"/>
-            <a:ext cx="12191695" cy="411480"/>
+            <a:off x="731520" y="1280160"/>
+            <a:ext cx="2286000" cy="22860"/>
           </a:xfrm>
           <a:prstGeom prst="rect">
             <a:avLst/>
           </a:prstGeom>
           <a:solidFill>
-            <a:srgbClr val="241E19"/>
+            <a:srgbClr val="C29B62"/>
           </a:solidFill>
           <a:ln>
             <a:noFill/>
@@ -4742,59 +4562,24 @@
       </p:sp>
       <p:sp>
         <p:nvSpPr>
-          <p:cNvPr id="4" name="TextBox 3"/>
-          <p:cNvSpPr txBox="1"/>
-          <p:nvPr/>
-        </p:nvSpPr>
-        <p:spPr>
-          <a:xfrm>
-            <a:off x="731520" y="73152"/>
-            <a:ext cx="10728655" cy="274320"/>
-          </a:xfrm>
-          <a:prstGeom prst="rect">
-            <a:avLst/>
-          </a:prstGeom>
-          <a:noFill/>
-        </p:spPr>
-        <p:txBody>
-          <a:bodyPr wrap="none">
-            <a:spAutoFit/>
-          </a:bodyPr>
-          <a:lstStyle/>
-          <a:p>
-            <a:pPr>
-              <a:defRPr sz="900" b="1">
-                <a:solidFill>
-                  <a:srgbClr val="C8B9A0"/>
-                </a:solidFill>
-              </a:defRPr>
-            </a:pPr>
-            <a:r>
-              <a:t>SASANG SPA BOUTIQUE  |  K-WELLNESS HERITAGE &amp; BIOTECH  |  VIP DIRECTORS: 010-4728-9917</a:t>
-            </a:r>
-          </a:p>
-        </p:txBody>
-      </p:sp>
-      <p:sp>
-        <p:nvSpPr>
-          <p:cNvPr id="5" name="Rounded Rectangle 4"/>
+          <p:cNvPr id="6" name="Rectangle 5"/>
           <p:cNvSpPr/>
           <p:nvPr/>
         </p:nvSpPr>
         <p:spPr>
           <a:xfrm>
-            <a:off x="731520" y="621792"/>
-            <a:ext cx="2011680" cy="256032"/>
-          </a:xfrm>
-          <a:prstGeom prst="roundRect">
+            <a:off x="731520" y="1508760"/>
+            <a:ext cx="3383280" cy="4846320"/>
+          </a:xfrm>
+          <a:prstGeom prst="rect">
             <a:avLst/>
           </a:prstGeom>
           <a:solidFill>
-            <a:srgbClr val="F8F5EE"/>
+            <a:srgbClr val="F0F9F4"/>
           </a:solidFill>
           <a:ln w="12700">
             <a:solidFill>
-              <a:srgbClr val="C9A876"/>
+              <a:srgbClr val="1C362B"/>
             </a:solidFill>
           </a:ln>
         </p:spPr>
@@ -4822,14 +4607,14 @@
       </p:sp>
       <p:sp>
         <p:nvSpPr>
-          <p:cNvPr id="6" name="TextBox 5"/>
+          <p:cNvPr id="7" name="TextBox 6"/>
           <p:cNvSpPr txBox="1"/>
           <p:nvPr/>
         </p:nvSpPr>
         <p:spPr>
           <a:xfrm>
-            <a:off x="777240" y="603504"/>
-            <a:ext cx="1920240" cy="274320"/>
+            <a:off x="914400" y="1691640"/>
+            <a:ext cx="3017520" cy="4480560"/>
           </a:xfrm>
           <a:prstGeom prst="rect">
             <a:avLst/>
@@ -4837,79 +4622,82 @@
           <a:noFill/>
         </p:spPr>
         <p:txBody>
-          <a:bodyPr wrap="none">
+          <a:bodyPr wrap="square">
             <a:spAutoFit/>
           </a:bodyPr>
           <a:lstStyle/>
           <a:p>
-            <a:pPr algn="ctr">
-              <a:defRPr sz="900" b="1">
-                <a:solidFill>
-                  <a:srgbClr val="A37F48"/>
-                </a:solidFill>
-              </a:defRPr>
-            </a:pPr>
-            <a:r>
-              <a:t>FOUR BODY TYPES</a:t>
-            </a:r>
-          </a:p>
-        </p:txBody>
-      </p:sp>
-      <p:sp>
-        <p:nvSpPr>
-          <p:cNvPr id="7" name="TextBox 6"/>
-          <p:cNvSpPr txBox="1"/>
-          <p:nvPr/>
-        </p:nvSpPr>
-        <p:spPr>
-          <a:xfrm>
-            <a:off x="2926080" y="530352"/>
-            <a:ext cx="8503920" cy="548640"/>
-          </a:xfrm>
-          <a:prstGeom prst="rect">
-            <a:avLst/>
-          </a:prstGeom>
-          <a:noFill/>
-        </p:spPr>
-        <p:txBody>
-          <a:bodyPr wrap="none">
-            <a:spAutoFit/>
-          </a:bodyPr>
-          <a:lstStyle/>
-          <a:p>
-            <a:pPr>
-              <a:defRPr sz="2000" b="1">
-                <a:solidFill>
-                  <a:srgbClr val="241E19"/>
-                </a:solidFill>
-              </a:defRPr>
-            </a:pPr>
-            <a:r>
-              <a:t>4대 사상체질 심층 처방 매트릭스 (Four Constitutions)</a:t>
-            </a:r>
-          </a:p>
-        </p:txBody>
-      </p:sp>
-      <p:sp>
-        <p:nvSpPr>
-          <p:cNvPr id="8" name="Rounded Rectangle 7"/>
+            <a:pPr>
+              <a:spcAft>
+                <a:spcPts val="600"/>
+              </a:spcAft>
+              <a:defRPr sz="1100" b="1">
+                <a:solidFill>
+                  <a:srgbClr val="1C362B"/>
+                </a:solidFill>
+              </a:defRPr>
+            </a:pPr>
+            <a:r>
+              <a:t>SOLUTION 01</a:t>
+            </a:r>
+          </a:p>
+          <a:p>
+            <a:pPr>
+              <a:spcAft>
+                <a:spcPts val="1000"/>
+              </a:spcAft>
+              <a:defRPr sz="1400" b="1">
+                <a:solidFill>
+                  <a:srgbClr val="26201C"/>
+                </a:solidFill>
+              </a:defRPr>
+            </a:pPr>
+            <a:r>
+              <a:t>장부대소 기반 0% 부작용 초개인화</a:t>
+            </a:r>
+          </a:p>
+          <a:p>
+            <a:pPr>
+              <a:lnSpc>
+                <a:spcPct val="130000"/>
+              </a:lnSpc>
+              <a:defRPr sz="1050">
+                <a:solidFill>
+                  <a:srgbClr val="5F5750"/>
+                </a:solidFill>
+              </a:defRPr>
+            </a:pPr>
+            <a:r>
+              <a:t>1894년 이제마의 해부생리학과 생체 데이터를 결합하여 간·폐·비·신의 장부 용량을 정밀 진단합니다.</a:t>
+            </a:r>
+            <a:br/>
+            <a:br/>
+            <a:r>
+              <a:t>✨ 해결: 오직 내 몸의 장부 편차에만 유효한 최고급 100% 순수 에센셜 오일과 맞춤 수온(41℃ 온열탕 vs 38.5℃ 쿨링탕)을 처방하여 부작용을 원천 차단합니다.</a:t>
+            </a:r>
+          </a:p>
+        </p:txBody>
+      </p:sp>
+      <p:sp>
+        <p:nvSpPr>
+          <p:cNvPr id="8" name="Rectangle 7"/>
           <p:cNvSpPr/>
           <p:nvPr/>
         </p:nvSpPr>
         <p:spPr>
           <a:xfrm>
-            <a:off x="731520" y="1280160"/>
-            <a:ext cx="2560320" cy="5120640"/>
-          </a:xfrm>
-          <a:prstGeom prst="roundRect">
+            <a:off x="4343400" y="1508760"/>
+            <a:ext cx="3383280" cy="4846320"/>
+          </a:xfrm>
+          <a:prstGeom prst="rect">
             <a:avLst/>
           </a:prstGeom>
           <a:solidFill>
-            <a:srgbClr val="FFFFFF"/>
+            <a:srgbClr val="F0F9F4"/>
           </a:solidFill>
-          <a:ln w="15240">
+          <a:ln w="12700">
             <a:solidFill>
-              <a:srgbClr val="A37F48"/>
+              <a:srgbClr val="1C362B"/>
             </a:solidFill>
           </a:ln>
         </p:spPr>
@@ -4943,8 +4731,8 @@
         </p:nvSpPr>
         <p:spPr>
           <a:xfrm>
-            <a:off x="868680" y="1417320"/>
-            <a:ext cx="2286000" cy="4846320"/>
+            <a:off x="4526280" y="1691640"/>
+            <a:ext cx="3017520" cy="4480560"/>
           </a:xfrm>
           <a:prstGeom prst="rect">
             <a:avLst/>
@@ -4958,89 +4746,76 @@
           <a:lstStyle/>
           <a:p>
             <a:pPr>
+              <a:spcAft>
+                <a:spcPts val="600"/>
+              </a:spcAft>
+              <a:defRPr sz="1100" b="1">
+                <a:solidFill>
+                  <a:srgbClr val="1C362B"/>
+                </a:solidFill>
+              </a:defRPr>
+            </a:pPr>
+            <a:r>
+              <a:t>SOLUTION 02</a:t>
+            </a:r>
+          </a:p>
+          <a:p>
+            <a:pPr>
+              <a:spcAft>
+                <a:spcPts val="1000"/>
+              </a:spcAft>
               <a:defRPr sz="1400" b="1">
                 <a:solidFill>
-                  <a:srgbClr val="A37F48"/>
-                </a:solidFill>
-              </a:defRPr>
-            </a:pPr>
-            <a:r>
-              <a:t>태음인 (肝大肺小)</a:t>
-            </a:r>
-          </a:p>
-          <a:p>
-            <a:pPr>
-              <a:spcAft>
-                <a:spcPts val="800"/>
-              </a:spcAft>
-              <a:defRPr sz="950">
-                <a:solidFill>
-                  <a:srgbClr val="A37F48"/>
-                </a:solidFill>
-              </a:defRPr>
-            </a:pPr>
-            <a:r>
-              <a:t>간 기능 강함 / 폐·기관지 허약</a:t>
+                  <a:srgbClr val="26201C"/>
+                </a:solidFill>
+              </a:defRPr>
+            </a:pPr>
+            <a:r>
+              <a:t>3중 융합 신체 리셋 (스파+단식+섭생)</a:t>
             </a:r>
           </a:p>
           <a:p>
             <a:pPr>
               <a:lnSpc>
-                <a:spcPct val="125000"/>
+                <a:spcPct val="130000"/>
               </a:lnSpc>
-              <a:defRPr sz="1000">
-                <a:solidFill>
-                  <a:srgbClr val="241E19"/>
-                </a:solidFill>
-              </a:defRPr>
-            </a:pPr>
-            <a:r>
-              <a:t>🚨 고질 문제: 노폐물/림프 정체, 기관지 건조, 부종</a:t>
+              <a:defRPr sz="1050">
+                <a:solidFill>
+                  <a:srgbClr val="5F5750"/>
+                </a:solidFill>
+              </a:defRPr>
+            </a:pPr>
+            <a:r>
+              <a:t>80분 이원화 바디 테라피(수기 지압+순수 오일 림프 드레나쥐)와 저녁 18:00~익일 06:00 12시간 단식(자가포식)을 결합합니다.</a:t>
             </a:r>
             <a:br/>
             <a:br/>
             <a:r>
-              <a:t>💡 스파 해법:</a:t>
-            </a:r>
-            <a:br/>
-            <a:r>
-              <a:t>• 디톡스 림프 배농 &amp; 에어 스팀 스파</a:t>
-            </a:r>
-            <a:br/>
-            <a:r>
-              <a:t>• 유칼립투스, 이지에어, 샌달우드 오일</a:t>
-            </a:r>
-            <a:br/>
-            <a:r>
-              <a:t>• 소고기 양지 들깨 미역국 + 율무밥</a:t>
-            </a:r>
-            <a:br/>
-            <a:r>
-              <a:t>• 황색 가운 / 우측 4지 은반지 의전</a:t>
-            </a:r>
-          </a:p>
-        </p:txBody>
-      </p:sp>
-      <p:sp>
-        <p:nvSpPr>
-          <p:cNvPr id="10" name="Rounded Rectangle 9"/>
+              <a:t>✨ 해결: 단식으로 세포 내 찌꺼기를 청소하고, 기상 직후 4대 체질 맞춤 영양 미역국 조식으로 장부를 완벽히 영양 재건합니다.</a:t>
+            </a:r>
+          </a:p>
+        </p:txBody>
+      </p:sp>
+      <p:sp>
+        <p:nvSpPr>
+          <p:cNvPr id="10" name="Rectangle 9"/>
           <p:cNvSpPr/>
           <p:nvPr/>
         </p:nvSpPr>
         <p:spPr>
           <a:xfrm>
-            <a:off x="3429000" y="1280160"/>
-            <a:ext cx="2560320" cy="5120640"/>
-          </a:xfrm>
-          <a:prstGeom prst="roundRect">
+            <a:off x="7955280" y="1508760"/>
+            <a:ext cx="3383280" cy="4846320"/>
+          </a:xfrm>
+          <a:prstGeom prst="rect">
             <a:avLst/>
           </a:prstGeom>
           <a:solidFill>
-            <a:srgbClr val="FFFFFF"/>
+            <a:srgbClr val="F0F9F4"/>
           </a:solidFill>
-          <a:ln w="15240">
+          <a:ln w="12700">
             <a:solidFill>
-              <a:srgbClr val="1E5A3C"/>
+              <a:srgbClr val="1C362B"/>
             </a:solidFill>
           </a:ln>
         </p:spPr>
@@ -5074,8 +4849,8 @@
         </p:nvSpPr>
         <p:spPr>
           <a:xfrm>
-            <a:off x="3566160" y="1417320"/>
-            <a:ext cx="2286000" cy="4846320"/>
+            <a:off x="8138160" y="1691640"/>
+            <a:ext cx="3017520" cy="4480560"/>
           </a:xfrm>
           <a:prstGeom prst="rect">
             <a:avLst/>
@@ -5089,327 +4864,52 @@
           <a:lstStyle/>
           <a:p>
             <a:pPr>
+              <a:spcAft>
+                <a:spcPts val="600"/>
+              </a:spcAft>
+              <a:defRPr sz="1100" b="1">
+                <a:solidFill>
+                  <a:srgbClr val="1C362B"/>
+                </a:solidFill>
+              </a:defRPr>
+            </a:pPr>
+            <a:r>
+              <a:t>SOLUTION 03</a:t>
+            </a:r>
+          </a:p>
+          <a:p>
+            <a:pPr>
+              <a:spcAft>
+                <a:spcPts val="1000"/>
+              </a:spcAft>
               <a:defRPr sz="1400" b="1">
                 <a:solidFill>
-                  <a:srgbClr val="1E5A3C"/>
-                </a:solidFill>
-              </a:defRPr>
-            </a:pPr>
-            <a:r>
-              <a:t>소양인 (脾大腎小)</a:t>
-            </a:r>
-          </a:p>
-          <a:p>
-            <a:pPr>
-              <a:spcAft>
-                <a:spcPts val="800"/>
-              </a:spcAft>
-              <a:defRPr sz="950">
-                <a:solidFill>
-                  <a:srgbClr val="A37F48"/>
-                </a:solidFill>
-              </a:defRPr>
-            </a:pPr>
-            <a:r>
-              <a:t>소화기 열 많음 / 신장 음기 허약</a:t>
+                  <a:srgbClr val="26201C"/>
+                </a:solidFill>
+              </a:defRPr>
+            </a:pPr>
+            <a:r>
+              <a:t>평생 지속 가능한 바이오 LTV 라이프스타일</a:t>
             </a:r>
           </a:p>
           <a:p>
             <a:pPr>
               <a:lnSpc>
-                <a:spcPct val="125000"/>
+                <a:spcPct val="130000"/>
               </a:lnSpc>
-              <a:defRPr sz="1000">
-                <a:solidFill>
-                  <a:srgbClr val="241E19"/>
-                </a:solidFill>
-              </a:defRPr>
-            </a:pPr>
-            <a:r>
-              <a:t>🚨 고질 문제: 상열감, 편두통, 가슴 답답, 불면증</a:t>
+              <a:defRPr sz="1050">
+                <a:solidFill>
+                  <a:srgbClr val="5F5750"/>
+                </a:solidFill>
+              </a:defRPr>
+            </a:pPr>
+            <a:r>
+              <a:t>1회성 방문을 넘어 DTC 유전자 분석 및 장내 미생물(마이크로바이옴) 키트를 연동하여 1:1 모바일 바이오 리포트를 발행합니다.</a:t>
             </a:r>
             <a:br/>
             <a:br/>
             <a:r>
-              <a:t>💡 스파 해법:</a:t>
-            </a:r>
-            <a:br/>
-            <a:r>
-              <a:t>• 38.5℃ 쿨링 하이드로 탄산 스파</a:t>
-            </a:r>
-            <a:br/>
-            <a:r>
-              <a:t>• 페퍼민트, 라벤더, 세레니티 뇌파 진정</a:t>
-            </a:r>
-            <a:br/>
-            <a:r>
-              <a:t>• 돼지고기 수육 / 조개 미역국 + 보리밥</a:t>
-            </a:r>
-            <a:br/>
-            <a:r>
-              <a:t>• 청색 가운 / 좌측 2지 은반지 의전</a:t>
-            </a:r>
-          </a:p>
-        </p:txBody>
-      </p:sp>
-      <p:sp>
-        <p:nvSpPr>
-          <p:cNvPr id="12" name="Rounded Rectangle 11"/>
-          <p:cNvSpPr/>
-          <p:nvPr/>
-        </p:nvSpPr>
-        <p:spPr>
-          <a:xfrm>
-            <a:off x="6126480" y="1280160"/>
-            <a:ext cx="2560320" cy="5120640"/>
-          </a:xfrm>
-          <a:prstGeom prst="roundRect">
-            <a:avLst/>
-          </a:prstGeom>
-          <a:solidFill>
-            <a:srgbClr val="FFFFFF"/>
-          </a:solidFill>
-          <a:ln w="15240">
-            <a:solidFill>
-              <a:srgbClr val="A37F48"/>
-            </a:solidFill>
-          </a:ln>
-        </p:spPr>
-        <p:style>
-          <a:lnRef idx="1">
-            <a:schemeClr val="accent1"/>
-          </a:lnRef>
-          <a:fillRef idx="3">
-            <a:schemeClr val="accent1"/>
-          </a:fillRef>
-          <a:effectRef idx="2">
-            <a:schemeClr val="accent1"/>
-          </a:effectRef>
-          <a:fontRef idx="minor">
-            <a:schemeClr val="lt1"/>
-          </a:fontRef>
-        </p:style>
-        <p:txBody>
-          <a:bodyPr rtlCol="0" anchor="ctr"/>
-          <a:lstStyle/>
-          <a:p>
-            <a:pPr algn="ctr"/>
-          </a:p>
-        </p:txBody>
-      </p:sp>
-      <p:sp>
-        <p:nvSpPr>
-          <p:cNvPr id="13" name="TextBox 12"/>
-          <p:cNvSpPr txBox="1"/>
-          <p:nvPr/>
-        </p:nvSpPr>
-        <p:spPr>
-          <a:xfrm>
-            <a:off x="6263640" y="1417320"/>
-            <a:ext cx="2286000" cy="4846320"/>
-          </a:xfrm>
-          <a:prstGeom prst="rect">
-            <a:avLst/>
-          </a:prstGeom>
-          <a:noFill/>
-        </p:spPr>
-        <p:txBody>
-          <a:bodyPr wrap="square">
-            <a:spAutoFit/>
-          </a:bodyPr>
-          <a:lstStyle/>
-          <a:p>
-            <a:pPr>
-              <a:defRPr sz="1400" b="1">
-                <a:solidFill>
-                  <a:srgbClr val="A37F48"/>
-                </a:solidFill>
-              </a:defRPr>
-            </a:pPr>
-            <a:r>
-              <a:t>소음인 (腎大脾小)</a:t>
-            </a:r>
-          </a:p>
-          <a:p>
-            <a:pPr>
-              <a:spcAft>
-                <a:spcPts val="800"/>
-              </a:spcAft>
-              <a:defRPr sz="950">
-                <a:solidFill>
-                  <a:srgbClr val="A37F48"/>
-                </a:solidFill>
-              </a:defRPr>
-            </a:pPr>
-            <a:r>
-              <a:t>신장 기능 튼튼 / 비위 차고 약함</a:t>
-            </a:r>
-          </a:p>
-          <a:p>
-            <a:pPr>
-              <a:lnSpc>
-                <a:spcPct val="125000"/>
-              </a:lnSpc>
-              <a:defRPr sz="1000">
-                <a:solidFill>
-                  <a:srgbClr val="241E19"/>
-                </a:solidFill>
-              </a:defRPr>
-            </a:pPr>
-            <a:r>
-              <a:t>🚨 고질 문제: 수족냉증, 위장 냉증, 만성 소화불량</a:t>
-            </a:r>
-            <a:br/>
-            <a:br/>
-            <a:r>
-              <a:t>💡 스파 해법:</a:t>
-            </a:r>
-            <a:br/>
-            <a:r>
-              <a:t>• 41℃ 온열 족욕 + 1시간 온열 챔버(체온 1℃ 상승)</a:t>
-            </a:r>
-            <a:br/>
-            <a:r>
-              <a:t>• 진저, 온가드, 시나몬 코어 웜업</a:t>
-            </a:r>
-            <a:br/>
-            <a:r>
-              <a:t>• 닭가슴살 황기 보양 미역국 + 찹쌀밥</a:t>
-            </a:r>
-            <a:br/>
-            <a:r>
-              <a:t>• 백색 가운 / 우측 3지 은반지 의전</a:t>
-            </a:r>
-          </a:p>
-        </p:txBody>
-      </p:sp>
-      <p:sp>
-        <p:nvSpPr>
-          <p:cNvPr id="14" name="Rounded Rectangle 13"/>
-          <p:cNvSpPr/>
-          <p:nvPr/>
-        </p:nvSpPr>
-        <p:spPr>
-          <a:xfrm>
-            <a:off x="8823960" y="1280160"/>
-            <a:ext cx="2560320" cy="5120640"/>
-          </a:xfrm>
-          <a:prstGeom prst="roundRect">
-            <a:avLst/>
-          </a:prstGeom>
-          <a:solidFill>
-            <a:srgbClr val="FFFFFF"/>
-          </a:solidFill>
-          <a:ln w="15240">
-            <a:solidFill>
-              <a:srgbClr val="1E5A3C"/>
-            </a:solidFill>
-          </a:ln>
-        </p:spPr>
-        <p:style>
-          <a:lnRef idx="1">
-            <a:schemeClr val="accent1"/>
-          </a:lnRef>
-          <a:fillRef idx="3">
-            <a:schemeClr val="accent1"/>
-          </a:fillRef>
-          <a:effectRef idx="2">
-            <a:schemeClr val="accent1"/>
-          </a:effectRef>
-          <a:fontRef idx="minor">
-            <a:schemeClr val="lt1"/>
-          </a:fontRef>
-        </p:style>
-        <p:txBody>
-          <a:bodyPr rtlCol="0" anchor="ctr"/>
-          <a:lstStyle/>
-          <a:p>
-            <a:pPr algn="ctr"/>
-          </a:p>
-        </p:txBody>
-      </p:sp>
-      <p:sp>
-        <p:nvSpPr>
-          <p:cNvPr id="15" name="TextBox 14"/>
-          <p:cNvSpPr txBox="1"/>
-          <p:nvPr/>
-        </p:nvSpPr>
-        <p:spPr>
-          <a:xfrm>
-            <a:off x="8961120" y="1417320"/>
-            <a:ext cx="2286000" cy="4846320"/>
-          </a:xfrm>
-          <a:prstGeom prst="rect">
-            <a:avLst/>
-          </a:prstGeom>
-          <a:noFill/>
-        </p:spPr>
-        <p:txBody>
-          <a:bodyPr wrap="square">
-            <a:spAutoFit/>
-          </a:bodyPr>
-          <a:lstStyle/>
-          <a:p>
-            <a:pPr>
-              <a:defRPr sz="1400" b="1">
-                <a:solidFill>
-                  <a:srgbClr val="1E5A3C"/>
-                </a:solidFill>
-              </a:defRPr>
-            </a:pPr>
-            <a:r>
-              <a:t>태양인 (肺大肝小)</a:t>
-            </a:r>
-          </a:p>
-          <a:p>
-            <a:pPr>
-              <a:spcAft>
-                <a:spcPts val="800"/>
-              </a:spcAft>
-              <a:defRPr sz="950">
-                <a:solidFill>
-                  <a:srgbClr val="A37F48"/>
-                </a:solidFill>
-              </a:defRPr>
-            </a:pPr>
-            <a:r>
-              <a:t>폐 기능 강함 / 간 해독·하체 허약</a:t>
-            </a:r>
-          </a:p>
-          <a:p>
-            <a:pPr>
-              <a:lnSpc>
-                <a:spcPct val="125000"/>
-              </a:lnSpc>
-              <a:defRPr sz="1000">
-                <a:solidFill>
-                  <a:srgbClr val="241E19"/>
-                </a:solidFill>
-              </a:defRPr>
-            </a:pPr>
-            <a:r>
-              <a:t>🚨 고질 문제: 기운 상기증, 목덜미 강직, 하지 무력</a:t>
-            </a:r>
-            <a:br/>
-            <a:br/>
-            <a:r>
-              <a:t>💡 스파 해법:</a:t>
-            </a:r>
-            <a:br/>
-            <a:r>
-              <a:t>• 단전 호흡 태극선법 기체조(그라운딩)</a:t>
-            </a:r>
-            <a:br/>
-            <a:r>
-              <a:t>• 베티버, 프랑킨센스 기운 하강 오일</a:t>
-            </a:r>
-            <a:br/>
-            <a:r>
-              <a:t>• 완도산 전복 홍합 맑은 해물 미역국 + 메밀죽</a:t>
-            </a:r>
-            <a:br/>
-            <a:r>
-              <a:t>• 적색 가운 / 좌측 4지 은반지 의전</a:t>
+              <a:t>✨ 해결: 일상 복귀 후에도 모바일 웹 처방전과 월간 맞춤 오일 정기구독(LRP)을 통해 체질 섭생을 평생 습관화합니다.</a:t>
             </a:r>
           </a:p>
         </p:txBody>
@@ -5447,7 +4947,7 @@
             <a:avLst/>
           </a:prstGeom>
           <a:solidFill>
-            <a:srgbClr val="FDFBF7"/>
+            <a:srgbClr val="FAF8F3"/>
           </a:solidFill>
           <a:ln>
             <a:noFill/>
@@ -5477,20 +4977,90 @@
       </p:sp>
       <p:sp>
         <p:nvSpPr>
-          <p:cNvPr id="3" name="Rectangle 2"/>
+          <p:cNvPr id="3" name="TextBox 2"/>
+          <p:cNvSpPr txBox="1"/>
+          <p:nvPr/>
+        </p:nvSpPr>
+        <p:spPr>
+          <a:xfrm>
+            <a:off x="731520" y="365760"/>
+            <a:ext cx="10728655" cy="320040"/>
+          </a:xfrm>
+          <a:prstGeom prst="rect">
+            <a:avLst/>
+          </a:prstGeom>
+          <a:noFill/>
+        </p:spPr>
+        <p:txBody>
+          <a:bodyPr wrap="none">
+            <a:spAutoFit/>
+          </a:bodyPr>
+          <a:lstStyle/>
+          <a:p>
+            <a:pPr>
+              <a:defRPr sz="950" b="1">
+                <a:solidFill>
+                  <a:srgbClr val="94723E"/>
+                </a:solidFill>
+              </a:defRPr>
+            </a:pPr>
+            <a:r>
+              <a:t>PROGRAMS AT A GLANCE</a:t>
+            </a:r>
+          </a:p>
+        </p:txBody>
+      </p:sp>
+      <p:sp>
+        <p:nvSpPr>
+          <p:cNvPr id="4" name="TextBox 3"/>
+          <p:cNvSpPr txBox="1"/>
+          <p:nvPr/>
+        </p:nvSpPr>
+        <p:spPr>
+          <a:xfrm>
+            <a:off x="731520" y="640080"/>
+            <a:ext cx="10728655" cy="640080"/>
+          </a:xfrm>
+          <a:prstGeom prst="rect">
+            <a:avLst/>
+          </a:prstGeom>
+          <a:noFill/>
+        </p:spPr>
+        <p:txBody>
+          <a:bodyPr wrap="none">
+            <a:spAutoFit/>
+          </a:bodyPr>
+          <a:lstStyle/>
+          <a:p>
+            <a:pPr>
+              <a:defRPr sz="2100" b="1">
+                <a:solidFill>
+                  <a:srgbClr val="26201C"/>
+                </a:solidFill>
+              </a:defRPr>
+            </a:pPr>
+            <a:r>
+              <a:t>Sasang-Kuren im Überblick : 6대 메디컬 쿠어 프로그램 총람</a:t>
+            </a:r>
+          </a:p>
+        </p:txBody>
+      </p:sp>
+      <p:sp>
+        <p:nvSpPr>
+          <p:cNvPr id="5" name="Rectangle 4"/>
           <p:cNvSpPr/>
           <p:nvPr/>
         </p:nvSpPr>
         <p:spPr>
           <a:xfrm>
-            <a:off x="0" y="0"/>
-            <a:ext cx="12191695" cy="411480"/>
+            <a:off x="731520" y="1280160"/>
+            <a:ext cx="2286000" cy="22860"/>
           </a:xfrm>
           <a:prstGeom prst="rect">
             <a:avLst/>
           </a:prstGeom>
           <a:solidFill>
-            <a:srgbClr val="241E19"/>
+            <a:srgbClr val="C29B62"/>
           </a:solidFill>
           <a:ln>
             <a:noFill/>
@@ -5520,59 +5090,24 @@
       </p:sp>
       <p:sp>
         <p:nvSpPr>
-          <p:cNvPr id="4" name="TextBox 3"/>
-          <p:cNvSpPr txBox="1"/>
-          <p:nvPr/>
-        </p:nvSpPr>
-        <p:spPr>
-          <a:xfrm>
-            <a:off x="731520" y="73152"/>
-            <a:ext cx="10728655" cy="274320"/>
-          </a:xfrm>
-          <a:prstGeom prst="rect">
-            <a:avLst/>
-          </a:prstGeom>
-          <a:noFill/>
-        </p:spPr>
-        <p:txBody>
-          <a:bodyPr wrap="none">
-            <a:spAutoFit/>
-          </a:bodyPr>
-          <a:lstStyle/>
-          <a:p>
-            <a:pPr>
-              <a:defRPr sz="900" b="1">
-                <a:solidFill>
-                  <a:srgbClr val="C8B9A0"/>
-                </a:solidFill>
-              </a:defRPr>
-            </a:pPr>
-            <a:r>
-              <a:t>SASANG SPA BOUTIQUE  |  K-WELLNESS HERITAGE &amp; BIOTECH  |  VIP DIRECTORS: 010-4728-9917</a:t>
-            </a:r>
-          </a:p>
-        </p:txBody>
-      </p:sp>
-      <p:sp>
-        <p:nvSpPr>
-          <p:cNvPr id="5" name="Rounded Rectangle 4"/>
+          <p:cNvPr id="6" name="Rectangle 5"/>
           <p:cNvSpPr/>
           <p:nvPr/>
         </p:nvSpPr>
         <p:spPr>
           <a:xfrm>
-            <a:off x="731520" y="621792"/>
-            <a:ext cx="2011680" cy="256032"/>
-          </a:xfrm>
-          <a:prstGeom prst="roundRect">
+            <a:off x="731520" y="1508760"/>
+            <a:ext cx="5120640" cy="1417320"/>
+          </a:xfrm>
+          <a:prstGeom prst="rect">
             <a:avLst/>
           </a:prstGeom>
           <a:solidFill>
-            <a:srgbClr val="F8F5EE"/>
+            <a:srgbClr val="FFFFFF"/>
           </a:solidFill>
           <a:ln w="12700">
             <a:solidFill>
-              <a:srgbClr val="C9A876"/>
+              <a:srgbClr val="C29B62"/>
             </a:solidFill>
           </a:ln>
         </p:spPr>
@@ -5600,14 +5135,14 @@
       </p:sp>
       <p:sp>
         <p:nvSpPr>
-          <p:cNvPr id="6" name="TextBox 5"/>
+          <p:cNvPr id="7" name="TextBox 6"/>
           <p:cNvSpPr txBox="1"/>
           <p:nvPr/>
         </p:nvSpPr>
         <p:spPr>
           <a:xfrm>
-            <a:off x="777240" y="603504"/>
-            <a:ext cx="1920240" cy="274320"/>
+            <a:off x="914400" y="1618488"/>
+            <a:ext cx="4754880" cy="1188720"/>
           </a:xfrm>
           <a:prstGeom prst="rect">
             <a:avLst/>
@@ -5615,79 +5150,71 @@
           <a:noFill/>
         </p:spPr>
         <p:txBody>
-          <a:bodyPr wrap="none">
+          <a:bodyPr wrap="square">
             <a:spAutoFit/>
           </a:bodyPr>
           <a:lstStyle/>
           <a:p>
-            <a:pPr algn="ctr">
-              <a:defRPr sz="900" b="1">
-                <a:solidFill>
-                  <a:srgbClr val="A37F48"/>
-                </a:solidFill>
-              </a:defRPr>
-            </a:pPr>
-            <a:r>
-              <a:t>TREATMENT CATALOG</a:t>
-            </a:r>
-          </a:p>
-        </p:txBody>
-      </p:sp>
-      <p:sp>
-        <p:nvSpPr>
-          <p:cNvPr id="7" name="TextBox 6"/>
-          <p:cNvSpPr txBox="1"/>
-          <p:nvPr/>
-        </p:nvSpPr>
-        <p:spPr>
-          <a:xfrm>
-            <a:off x="2926080" y="530352"/>
-            <a:ext cx="8503920" cy="548640"/>
-          </a:xfrm>
-          <a:prstGeom prst="rect">
-            <a:avLst/>
-          </a:prstGeom>
-          <a:noFill/>
-        </p:spPr>
-        <p:txBody>
-          <a:bodyPr wrap="none">
-            <a:spAutoFit/>
-          </a:bodyPr>
-          <a:lstStyle/>
-          <a:p>
-            <a:pPr>
-              <a:defRPr sz="2000" b="1">
-                <a:solidFill>
-                  <a:srgbClr val="241E19"/>
-                </a:solidFill>
-              </a:defRPr>
-            </a:pPr>
-            <a:r>
-              <a:t>10대 시그니처 테라피 트리트먼트 카탈로그</a:t>
-            </a:r>
-          </a:p>
-        </p:txBody>
-      </p:sp>
-      <p:sp>
-        <p:nvSpPr>
-          <p:cNvPr id="8" name="Rounded Rectangle 7"/>
+            <a:pPr>
+              <a:defRPr sz="1300" b="1">
+                <a:solidFill>
+                  <a:srgbClr val="94723E"/>
+                </a:solidFill>
+              </a:defRPr>
+            </a:pPr>
+            <a:r>
+              <a:t>01. Sasang-ResetMed (15/16박)</a:t>
+            </a:r>
+          </a:p>
+          <a:p>
+            <a:pPr>
+              <a:spcAft>
+                <a:spcPts val="200"/>
+              </a:spcAft>
+              <a:defRPr sz="1100" b="1">
+                <a:solidFill>
+                  <a:srgbClr val="26201C"/>
+                </a:solidFill>
+              </a:defRPr>
+            </a:pPr>
+            <a:r>
+              <a:t>클래식 사상체질 전신 재건 쿠어</a:t>
+            </a:r>
+          </a:p>
+          <a:p>
+            <a:pPr>
+              <a:defRPr sz="950">
+                <a:solidFill>
+                  <a:srgbClr val="5F5750"/>
+                </a:solidFill>
+              </a:defRPr>
+            </a:pPr>
+            <a:r>
+              <a:t>DTC 유전자 검사 + 10대 테마 매일 3단계 순환 + 1:1 라이프스타일 매뉴얼북 발행 (면역 나이 5년 리셋)</a:t>
+            </a:r>
+          </a:p>
+        </p:txBody>
+      </p:sp>
+      <p:sp>
+        <p:nvSpPr>
+          <p:cNvPr id="8" name="Rectangle 7"/>
           <p:cNvSpPr/>
           <p:nvPr/>
         </p:nvSpPr>
         <p:spPr>
           <a:xfrm>
-            <a:off x="731520" y="1371600"/>
-            <a:ext cx="2057400" cy="2331720"/>
-          </a:xfrm>
-          <a:prstGeom prst="roundRect">
+            <a:off x="6126480" y="1508760"/>
+            <a:ext cx="5120640" cy="1417320"/>
+          </a:xfrm>
+          <a:prstGeom prst="rect">
             <a:avLst/>
           </a:prstGeom>
           <a:solidFill>
             <a:srgbClr val="FFFFFF"/>
           </a:solidFill>
-          <a:ln w="15240">
+          <a:ln w="12700">
             <a:solidFill>
-              <a:srgbClr val="C9A876"/>
+              <a:srgbClr val="C29B62"/>
             </a:solidFill>
           </a:ln>
         </p:spPr>
@@ -5721,8 +5248,8 @@
         </p:nvSpPr>
         <p:spPr>
           <a:xfrm>
-            <a:off x="841248" y="1481328"/>
-            <a:ext cx="1828800" cy="2103120"/>
+            <a:off x="6309360" y="1618488"/>
+            <a:ext cx="4754880" cy="1188720"/>
           </a:xfrm>
           <a:prstGeom prst="rect">
             <a:avLst/>
@@ -5736,71 +5263,65 @@
           <a:lstStyle/>
           <a:p>
             <a:pPr>
+              <a:defRPr sz="1300" b="1">
+                <a:solidFill>
+                  <a:srgbClr val="94723E"/>
+                </a:solidFill>
+              </a:defRPr>
+            </a:pPr>
+            <a:r>
+              <a:t>02. SvasthaMed (5/6박)</a:t>
+            </a:r>
+          </a:p>
+          <a:p>
+            <a:pPr>
               <a:spcAft>
-                <a:spcPts val="400"/>
+                <a:spcPts val="200"/>
               </a:spcAft>
-              <a:defRPr sz="1000" b="1">
-                <a:solidFill>
-                  <a:srgbClr val="A37F48"/>
-                </a:solidFill>
-              </a:defRPr>
-            </a:pPr>
-            <a:r>
-              <a:t>THEME 01</a:t>
-            </a:r>
-          </a:p>
-          <a:p>
-            <a:pPr>
-              <a:spcAft>
-                <a:spcPts val="600"/>
-              </a:spcAft>
-              <a:defRPr sz="1200" b="1">
-                <a:solidFill>
-                  <a:srgbClr val="241E19"/>
-                </a:solidFill>
-              </a:defRPr>
-            </a:pPr>
-            <a:r>
-              <a:t>웰컴 오리엔테이션</a:t>
-            </a:r>
-          </a:p>
-          <a:p>
-            <a:pPr>
-              <a:lnSpc>
-                <a:spcPct val="120000"/>
-              </a:lnSpc>
+              <a:defRPr sz="1100" b="1">
+                <a:solidFill>
+                  <a:srgbClr val="26201C"/>
+                </a:solidFill>
+              </a:defRPr>
+            </a:pPr>
+            <a:r>
+              <a:t>1:1 집중 디톡스 &amp; 림프 배농 쿠어</a:t>
+            </a:r>
+          </a:p>
+          <a:p>
+            <a:pPr>
               <a:defRPr sz="950">
                 <a:solidFill>
-                  <a:srgbClr val="52463C"/>
-                </a:solidFill>
-              </a:defRPr>
-            </a:pPr>
-            <a:r>
-              <a:t>다실 1:1 상담 및 체질별 맞춤 웰컴 티 음용</a:t>
-            </a:r>
-          </a:p>
-        </p:txBody>
-      </p:sp>
-      <p:sp>
-        <p:nvSpPr>
-          <p:cNvPr id="10" name="Rounded Rectangle 9"/>
+                  <a:srgbClr val="5F5750"/>
+                </a:solidFill>
+              </a:defRPr>
+            </a:pPr>
+            <a:r>
+              <a:t>1~3일 림프 배농 &amp; 온열 챔버(체온 1℃ 상승) ➔ 4~6일 마이크로바이옴 검사 &amp; 태극선법 (부종 85% 개선)</a:t>
+            </a:r>
+          </a:p>
+        </p:txBody>
+      </p:sp>
+      <p:sp>
+        <p:nvSpPr>
+          <p:cNvPr id="10" name="Rectangle 9"/>
           <p:cNvSpPr/>
           <p:nvPr/>
         </p:nvSpPr>
         <p:spPr>
           <a:xfrm>
-            <a:off x="2907791" y="1371600"/>
-            <a:ext cx="2057400" cy="2331720"/>
-          </a:xfrm>
-          <a:prstGeom prst="roundRect">
+            <a:off x="731520" y="3108960"/>
+            <a:ext cx="5120640" cy="1417320"/>
+          </a:xfrm>
+          <a:prstGeom prst="rect">
             <a:avLst/>
           </a:prstGeom>
           <a:solidFill>
             <a:srgbClr val="FFFFFF"/>
           </a:solidFill>
-          <a:ln w="15240">
+          <a:ln w="12700">
             <a:solidFill>
-              <a:srgbClr val="C9A876"/>
+              <a:srgbClr val="C29B62"/>
             </a:solidFill>
           </a:ln>
         </p:spPr>
@@ -5834,8 +5355,8 @@
         </p:nvSpPr>
         <p:spPr>
           <a:xfrm>
-            <a:off x="3017519" y="1481328"/>
-            <a:ext cx="1828800" cy="2103120"/>
+            <a:off x="914400" y="3218688"/>
+            <a:ext cx="4754880" cy="1188720"/>
           </a:xfrm>
           <a:prstGeom prst="rect">
             <a:avLst/>
@@ -5849,71 +5370,65 @@
           <a:lstStyle/>
           <a:p>
             <a:pPr>
+              <a:defRPr sz="1300" b="1">
+                <a:solidFill>
+                  <a:srgbClr val="94723E"/>
+                </a:solidFill>
+              </a:defRPr>
+            </a:pPr>
+            <a:r>
+              <a:t>03. BalaMental (5/6박)</a:t>
+            </a:r>
+          </a:p>
+          <a:p>
+            <a:pPr>
               <a:spcAft>
-                <a:spcPts val="400"/>
+                <a:spcPts val="200"/>
               </a:spcAft>
-              <a:defRPr sz="1000" b="1">
-                <a:solidFill>
-                  <a:srgbClr val="A37F48"/>
-                </a:solidFill>
-              </a:defRPr>
-            </a:pPr>
-            <a:r>
-              <a:t>THEME 02</a:t>
-            </a:r>
-          </a:p>
-          <a:p>
-            <a:pPr>
-              <a:spcAft>
-                <a:spcPts val="600"/>
-              </a:spcAft>
-              <a:defRPr sz="1200" b="1">
-                <a:solidFill>
-                  <a:srgbClr val="241E19"/>
-                </a:solidFill>
-              </a:defRPr>
-            </a:pPr>
-            <a:r>
-              <a:t>20분 맞춤 약재 족욕</a:t>
-            </a:r>
-          </a:p>
-          <a:p>
-            <a:pPr>
-              <a:lnSpc>
-                <a:spcPct val="120000"/>
-              </a:lnSpc>
+              <a:defRPr sz="1100" b="1">
+                <a:solidFill>
+                  <a:srgbClr val="26201C"/>
+                </a:solidFill>
+              </a:defRPr>
+            </a:pPr>
+            <a:r>
+              <a:t>스트레스 해소 &amp; 자율신경 회복 쿠어</a:t>
+            </a:r>
+          </a:p>
+          <a:p>
+            <a:pPr>
               <a:defRPr sz="950">
                 <a:solidFill>
-                  <a:srgbClr val="52463C"/>
-                </a:solidFill>
-              </a:defRPr>
-            </a:pPr>
-            <a:r>
-              <a:t>두한족열 순환. 41℃ 온열탕 vs 38.5℃ 쿨링탕</a:t>
-            </a:r>
-          </a:p>
-        </p:txBody>
-      </p:sp>
-      <p:sp>
-        <p:nvSpPr>
-          <p:cNvPr id="12" name="Rounded Rectangle 11"/>
+                  <a:srgbClr val="5F5750"/>
+                </a:solidFill>
+              </a:defRPr>
+            </a:pPr>
+            <a:r>
+              <a:t>High-Beta파 뇌 피로 해소, 30분 전통 다기 침묵 명상, 프랑킨센스 뇌파 안정화 (뇌 피로도 70% 감소)</a:t>
+            </a:r>
+          </a:p>
+        </p:txBody>
+      </p:sp>
+      <p:sp>
+        <p:nvSpPr>
+          <p:cNvPr id="12" name="Rectangle 11"/>
           <p:cNvSpPr/>
           <p:nvPr/>
         </p:nvSpPr>
         <p:spPr>
           <a:xfrm>
-            <a:off x="5084064" y="1371600"/>
-            <a:ext cx="2057400" cy="2331720"/>
-          </a:xfrm>
-          <a:prstGeom prst="roundRect">
+            <a:off x="6126480" y="3108960"/>
+            <a:ext cx="5120640" cy="1417320"/>
+          </a:xfrm>
+          <a:prstGeom prst="rect">
             <a:avLst/>
           </a:prstGeom>
           <a:solidFill>
             <a:srgbClr val="FFFFFF"/>
           </a:solidFill>
-          <a:ln w="15240">
+          <a:ln w="12700">
             <a:solidFill>
-              <a:srgbClr val="C9A876"/>
+              <a:srgbClr val="C29B62"/>
             </a:solidFill>
           </a:ln>
         </p:spPr>
@@ -5947,8 +5462,8 @@
         </p:nvSpPr>
         <p:spPr>
           <a:xfrm>
-            <a:off x="5193792" y="1481328"/>
-            <a:ext cx="1828800" cy="2103120"/>
+            <a:off x="6309360" y="3218688"/>
+            <a:ext cx="4754880" cy="1188720"/>
           </a:xfrm>
           <a:prstGeom prst="rect">
             <a:avLst/>
@@ -5962,71 +5477,65 @@
           <a:lstStyle/>
           <a:p>
             <a:pPr>
+              <a:defRPr sz="1300" b="1">
+                <a:solidFill>
+                  <a:srgbClr val="94723E"/>
+                </a:solidFill>
+              </a:defRPr>
+            </a:pPr>
+            <a:r>
+              <a:t>04. SasangDetox (5/6박)</a:t>
+            </a:r>
+          </a:p>
+          <a:p>
+            <a:pPr>
               <a:spcAft>
-                <a:spcPts val="400"/>
+                <a:spcPts val="200"/>
               </a:spcAft>
-              <a:defRPr sz="1000" b="1">
-                <a:solidFill>
-                  <a:srgbClr val="A37F48"/>
-                </a:solidFill>
-              </a:defRPr>
-            </a:pPr>
-            <a:r>
-              <a:t>THEME 03</a:t>
-            </a:r>
-          </a:p>
-          <a:p>
-            <a:pPr>
-              <a:spcAft>
-                <a:spcPts val="600"/>
-              </a:spcAft>
-              <a:defRPr sz="1200" b="1">
-                <a:solidFill>
-                  <a:srgbClr val="241E19"/>
-                </a:solidFill>
-              </a:defRPr>
-            </a:pPr>
-            <a:r>
-              <a:t>에너지 &amp; 은반지 의전</a:t>
-            </a:r>
-          </a:p>
-          <a:p>
-            <a:pPr>
-              <a:lnSpc>
-                <a:spcPct val="120000"/>
-              </a:lnSpc>
+              <a:defRPr sz="1100" b="1">
+                <a:solidFill>
+                  <a:srgbClr val="26201C"/>
+                </a:solidFill>
+              </a:defRPr>
+            </a:pPr>
+            <a:r>
+              <a:t>12시간 단식 &amp; 세포 자가포식 쿠어</a:t>
+            </a:r>
+          </a:p>
+          <a:p>
+            <a:pPr>
               <a:defRPr sz="950">
                 <a:solidFill>
-                  <a:srgbClr val="52463C"/>
-                </a:solidFill>
-              </a:defRPr>
-            </a:pPr>
-            <a:r>
-              <a:t>경락별 은반지 착용 및 4대 컬러 가운 비언어 의전</a:t>
-            </a:r>
-          </a:p>
-        </p:txBody>
-      </p:sp>
-      <p:sp>
-        <p:nvSpPr>
-          <p:cNvPr id="14" name="Rounded Rectangle 13"/>
+                  <a:srgbClr val="5F5750"/>
+                </a:solidFill>
+              </a:defRPr>
+            </a:pPr>
+            <a:r>
+              <a:t>18:00~06:00 12h 단식으로 손상 단백질 분해 청소 + 기상 직후 4대 맞춤 영양 미역국 공급</a:t>
+            </a:r>
+          </a:p>
+        </p:txBody>
+      </p:sp>
+      <p:sp>
+        <p:nvSpPr>
+          <p:cNvPr id="14" name="Rectangle 13"/>
           <p:cNvSpPr/>
           <p:nvPr/>
         </p:nvSpPr>
         <p:spPr>
           <a:xfrm>
-            <a:off x="7260336" y="1371600"/>
-            <a:ext cx="2057400" cy="2331720"/>
-          </a:xfrm>
-          <a:prstGeom prst="roundRect">
+            <a:off x="731520" y="4709160"/>
+            <a:ext cx="5120640" cy="1417320"/>
+          </a:xfrm>
+          <a:prstGeom prst="rect">
             <a:avLst/>
           </a:prstGeom>
           <a:solidFill>
             <a:srgbClr val="FFFFFF"/>
           </a:solidFill>
-          <a:ln w="15240">
+          <a:ln w="12700">
             <a:solidFill>
-              <a:srgbClr val="C9A876"/>
+              <a:srgbClr val="C29B62"/>
             </a:solidFill>
           </a:ln>
         </p:spPr>
@@ -6060,8 +5569,8 @@
         </p:nvSpPr>
         <p:spPr>
           <a:xfrm>
-            <a:off x="7370064" y="1481328"/>
-            <a:ext cx="1828800" cy="2103120"/>
+            <a:off x="914400" y="4818888"/>
+            <a:ext cx="4754880" cy="1188720"/>
           </a:xfrm>
           <a:prstGeom prst="rect">
             <a:avLst/>
@@ -6075,71 +5584,65 @@
           <a:lstStyle/>
           <a:p>
             <a:pPr>
+              <a:defRPr sz="1300" b="1">
+                <a:solidFill>
+                  <a:srgbClr val="94723E"/>
+                </a:solidFill>
+              </a:defRPr>
+            </a:pPr>
+            <a:r>
+              <a:t>05. PhysioSasang (5/6박)</a:t>
+            </a:r>
+          </a:p>
+          <a:p>
+            <a:pPr>
               <a:spcAft>
-                <a:spcPts val="400"/>
+                <a:spcPts val="200"/>
               </a:spcAft>
-              <a:defRPr sz="1000" b="1">
-                <a:solidFill>
-                  <a:srgbClr val="A37F48"/>
-                </a:solidFill>
-              </a:defRPr>
-            </a:pPr>
-            <a:r>
-              <a:t>THEME 04</a:t>
-            </a:r>
-          </a:p>
-          <a:p>
-            <a:pPr>
-              <a:spcAft>
-                <a:spcPts val="600"/>
-              </a:spcAft>
-              <a:defRPr sz="1200" b="1">
-                <a:solidFill>
-                  <a:srgbClr val="241E19"/>
-                </a:solidFill>
-              </a:defRPr>
-            </a:pPr>
-            <a:r>
-              <a:t>12h 단식 &amp; 미역국</a:t>
-            </a:r>
-          </a:p>
-          <a:p>
-            <a:pPr>
-              <a:lnSpc>
-                <a:spcPct val="120000"/>
-              </a:lnSpc>
+              <a:defRPr sz="1100" b="1">
+                <a:solidFill>
+                  <a:srgbClr val="26201C"/>
+                </a:solidFill>
+              </a:defRPr>
+            </a:pPr>
+            <a:r>
+              <a:t>근골격계 &amp; 척추 온열 이원화 쿠어</a:t>
+            </a:r>
+          </a:p>
+          <a:p>
+            <a:pPr>
               <a:defRPr sz="950">
                 <a:solidFill>
-                  <a:srgbClr val="52463C"/>
-                </a:solidFill>
-              </a:defRPr>
-            </a:pPr>
-            <a:r>
-              <a:t>18:00~06:00 자가포식 해독 + 4대 체질 맞춤 미역국</a:t>
-            </a:r>
-          </a:p>
-        </p:txBody>
-      </p:sp>
-      <p:sp>
-        <p:nvSpPr>
-          <p:cNvPr id="16" name="Rounded Rectangle 15"/>
+                  <a:srgbClr val="5F5750"/>
+                </a:solidFill>
+              </a:defRPr>
+            </a:pPr>
+            <a:r>
+              <a:t>1단계 30분 한의 수기 지압으로 기혈 순환로 개방 + 2단계 50분 최고급 순수 에센셜 오일 림프 드레나쥐</a:t>
+            </a:r>
+          </a:p>
+        </p:txBody>
+      </p:sp>
+      <p:sp>
+        <p:nvSpPr>
+          <p:cNvPr id="16" name="Rectangle 15"/>
           <p:cNvSpPr/>
           <p:nvPr/>
         </p:nvSpPr>
         <p:spPr>
           <a:xfrm>
-            <a:off x="9436608" y="1371600"/>
-            <a:ext cx="2057400" cy="2331720"/>
-          </a:xfrm>
-          <a:prstGeom prst="roundRect">
+            <a:off x="6126480" y="4709160"/>
+            <a:ext cx="5120640" cy="1417320"/>
+          </a:xfrm>
+          <a:prstGeom prst="rect">
             <a:avLst/>
           </a:prstGeom>
           <a:solidFill>
             <a:srgbClr val="FFFFFF"/>
           </a:solidFill>
-          <a:ln w="15240">
+          <a:ln w="12700">
             <a:solidFill>
-              <a:srgbClr val="C9A876"/>
+              <a:srgbClr val="C29B62"/>
             </a:solidFill>
           </a:ln>
         </p:spPr>
@@ -6173,8 +5676,8 @@
         </p:nvSpPr>
         <p:spPr>
           <a:xfrm>
-            <a:off x="9546336" y="1481328"/>
-            <a:ext cx="1828800" cy="2103120"/>
+            <a:off x="6309360" y="4818888"/>
+            <a:ext cx="4754880" cy="1188720"/>
           </a:xfrm>
           <a:prstGeom prst="rect">
             <a:avLst/>
@@ -6188,612 +5691,41 @@
           <a:lstStyle/>
           <a:p>
             <a:pPr>
+              <a:defRPr sz="1300" b="1">
+                <a:solidFill>
+                  <a:srgbClr val="94723E"/>
+                </a:solidFill>
+              </a:defRPr>
+            </a:pPr>
+            <a:r>
+              <a:t>06. SasangWellMed (2/3박)</a:t>
+            </a:r>
+          </a:p>
+          <a:p>
+            <a:pPr>
               <a:spcAft>
-                <a:spcPts val="400"/>
+                <a:spcPts val="200"/>
               </a:spcAft>
-              <a:defRPr sz="1000" b="1">
-                <a:solidFill>
-                  <a:srgbClr val="A37F48"/>
-                </a:solidFill>
-              </a:defRPr>
-            </a:pPr>
-            <a:r>
-              <a:t>THEME 05</a:t>
-            </a:r>
-          </a:p>
-          <a:p>
-            <a:pPr>
-              <a:spcAft>
-                <a:spcPts val="600"/>
-              </a:spcAft>
-              <a:defRPr sz="1200" b="1">
-                <a:solidFill>
-                  <a:srgbClr val="241E19"/>
-                </a:solidFill>
-              </a:defRPr>
-            </a:pPr>
-            <a:r>
-              <a:t>80분 이원화 바디</a:t>
-            </a:r>
-          </a:p>
-          <a:p>
-            <a:pPr>
-              <a:lnSpc>
-                <a:spcPct val="120000"/>
-              </a:lnSpc>
+              <a:defRPr sz="1100" b="1">
+                <a:solidFill>
+                  <a:srgbClr val="26201C"/>
+                </a:solidFill>
+              </a:defRPr>
+            </a:pPr>
+            <a:r>
+              <a:t>주말 힐링 &amp; 긴급 생체 리프레시</a:t>
+            </a:r>
+          </a:p>
+          <a:p>
+            <a:pPr>
               <a:defRPr sz="950">
                 <a:solidFill>
-                  <a:srgbClr val="52463C"/>
-                </a:solidFill>
-              </a:defRPr>
-            </a:pPr>
-            <a:r>
-              <a:t>한의 수기 지압(30분) + 순수 에센셜 오일(50분)</a:t>
-            </a:r>
-          </a:p>
-        </p:txBody>
-      </p:sp>
-      <p:sp>
-        <p:nvSpPr>
-          <p:cNvPr id="18" name="Rounded Rectangle 17"/>
-          <p:cNvSpPr/>
-          <p:nvPr/>
-        </p:nvSpPr>
-        <p:spPr>
-          <a:xfrm>
-            <a:off x="731520" y="3886200"/>
-            <a:ext cx="2057400" cy="2331720"/>
-          </a:xfrm>
-          <a:prstGeom prst="roundRect">
-            <a:avLst/>
-          </a:prstGeom>
-          <a:solidFill>
-            <a:srgbClr val="FFFFFF"/>
-          </a:solidFill>
-          <a:ln w="15240">
-            <a:solidFill>
-              <a:srgbClr val="C9A876"/>
-            </a:solidFill>
-          </a:ln>
-        </p:spPr>
-        <p:style>
-          <a:lnRef idx="1">
-            <a:schemeClr val="accent1"/>
-          </a:lnRef>
-          <a:fillRef idx="3">
-            <a:schemeClr val="accent1"/>
-          </a:fillRef>
-          <a:effectRef idx="2">
-            <a:schemeClr val="accent1"/>
-          </a:effectRef>
-          <a:fontRef idx="minor">
-            <a:schemeClr val="lt1"/>
-          </a:fontRef>
-        </p:style>
-        <p:txBody>
-          <a:bodyPr rtlCol="0" anchor="ctr"/>
-          <a:lstStyle/>
-          <a:p>
-            <a:pPr algn="ctr"/>
-          </a:p>
-        </p:txBody>
-      </p:sp>
-      <p:sp>
-        <p:nvSpPr>
-          <p:cNvPr id="19" name="TextBox 18"/>
-          <p:cNvSpPr txBox="1"/>
-          <p:nvPr/>
-        </p:nvSpPr>
-        <p:spPr>
-          <a:xfrm>
-            <a:off x="841248" y="3995928"/>
-            <a:ext cx="1828800" cy="2103120"/>
-          </a:xfrm>
-          <a:prstGeom prst="rect">
-            <a:avLst/>
-          </a:prstGeom>
-          <a:noFill/>
-        </p:spPr>
-        <p:txBody>
-          <a:bodyPr wrap="square">
-            <a:spAutoFit/>
-          </a:bodyPr>
-          <a:lstStyle/>
-          <a:p>
-            <a:pPr>
-              <a:spcAft>
-                <a:spcPts val="400"/>
-              </a:spcAft>
-              <a:defRPr sz="1000" b="1">
-                <a:solidFill>
-                  <a:srgbClr val="A37F48"/>
-                </a:solidFill>
-              </a:defRPr>
-            </a:pPr>
-            <a:r>
-              <a:t>THEME 06</a:t>
-            </a:r>
-          </a:p>
-          <a:p>
-            <a:pPr>
-              <a:spcAft>
-                <a:spcPts val="600"/>
-              </a:spcAft>
-              <a:defRPr sz="1200" b="1">
-                <a:solidFill>
-                  <a:srgbClr val="241E19"/>
-                </a:solidFill>
-              </a:defRPr>
-            </a:pPr>
-            <a:r>
-              <a:t>티 &amp; 30분 침묵 명상</a:t>
-            </a:r>
-          </a:p>
-          <a:p>
-            <a:pPr>
-              <a:lnSpc>
-                <a:spcPct val="120000"/>
-              </a:lnSpc>
-              <a:defRPr sz="950">
-                <a:solidFill>
-                  <a:srgbClr val="52463C"/>
-                </a:solidFill>
-              </a:defRPr>
-            </a:pPr>
-            <a:r>
-              <a:t>장인 도자기 다기 시연 &amp; 무언 침묵 명상(부교감 40%)</a:t>
-            </a:r>
-          </a:p>
-        </p:txBody>
-      </p:sp>
-      <p:sp>
-        <p:nvSpPr>
-          <p:cNvPr id="20" name="Rounded Rectangle 19"/>
-          <p:cNvSpPr/>
-          <p:nvPr/>
-        </p:nvSpPr>
-        <p:spPr>
-          <a:xfrm>
-            <a:off x="2907791" y="3886200"/>
-            <a:ext cx="2057400" cy="2331720"/>
-          </a:xfrm>
-          <a:prstGeom prst="roundRect">
-            <a:avLst/>
-          </a:prstGeom>
-          <a:solidFill>
-            <a:srgbClr val="FFFFFF"/>
-          </a:solidFill>
-          <a:ln w="15240">
-            <a:solidFill>
-              <a:srgbClr val="C9A876"/>
-            </a:solidFill>
-          </a:ln>
-        </p:spPr>
-        <p:style>
-          <a:lnRef idx="1">
-            <a:schemeClr val="accent1"/>
-          </a:lnRef>
-          <a:fillRef idx="3">
-            <a:schemeClr val="accent1"/>
-          </a:fillRef>
-          <a:effectRef idx="2">
-            <a:schemeClr val="accent1"/>
-          </a:effectRef>
-          <a:fontRef idx="minor">
-            <a:schemeClr val="lt1"/>
-          </a:fontRef>
-        </p:style>
-        <p:txBody>
-          <a:bodyPr rtlCol="0" anchor="ctr"/>
-          <a:lstStyle/>
-          <a:p>
-            <a:pPr algn="ctr"/>
-          </a:p>
-        </p:txBody>
-      </p:sp>
-      <p:sp>
-        <p:nvSpPr>
-          <p:cNvPr id="21" name="TextBox 20"/>
-          <p:cNvSpPr txBox="1"/>
-          <p:nvPr/>
-        </p:nvSpPr>
-        <p:spPr>
-          <a:xfrm>
-            <a:off x="3017519" y="3995928"/>
-            <a:ext cx="1828800" cy="2103120"/>
-          </a:xfrm>
-          <a:prstGeom prst="rect">
-            <a:avLst/>
-          </a:prstGeom>
-          <a:noFill/>
-        </p:spPr>
-        <p:txBody>
-          <a:bodyPr wrap="square">
-            <a:spAutoFit/>
-          </a:bodyPr>
-          <a:lstStyle/>
-          <a:p>
-            <a:pPr>
-              <a:spcAft>
-                <a:spcPts val="400"/>
-              </a:spcAft>
-              <a:defRPr sz="1000" b="1">
-                <a:solidFill>
-                  <a:srgbClr val="A37F48"/>
-                </a:solidFill>
-              </a:defRPr>
-            </a:pPr>
-            <a:r>
-              <a:t>THEME 07</a:t>
-            </a:r>
-          </a:p>
-          <a:p>
-            <a:pPr>
-              <a:spcAft>
-                <a:spcPts val="600"/>
-              </a:spcAft>
-              <a:defRPr sz="1200" b="1">
-                <a:solidFill>
-                  <a:srgbClr val="241E19"/>
-                </a:solidFill>
-              </a:defRPr>
-            </a:pPr>
-            <a:r>
-              <a:t>수(水) 산화질소 테라피</a:t>
-            </a:r>
-          </a:p>
-          <a:p>
-            <a:pPr>
-              <a:lnSpc>
-                <a:spcPct val="120000"/>
-              </a:lnSpc>
-              <a:defRPr sz="950">
-                <a:solidFill>
-                  <a:srgbClr val="52463C"/>
-                </a:solidFill>
-              </a:defRPr>
-            </a:pPr>
-            <a:r>
-              <a:t>NO 수 1.5L 음용 및 15분 전신 나노 미스트 챔버</a:t>
-            </a:r>
-          </a:p>
-        </p:txBody>
-      </p:sp>
-      <p:sp>
-        <p:nvSpPr>
-          <p:cNvPr id="22" name="Rounded Rectangle 21"/>
-          <p:cNvSpPr/>
-          <p:nvPr/>
-        </p:nvSpPr>
-        <p:spPr>
-          <a:xfrm>
-            <a:off x="5084064" y="3886200"/>
-            <a:ext cx="2057400" cy="2331720"/>
-          </a:xfrm>
-          <a:prstGeom prst="roundRect">
-            <a:avLst/>
-          </a:prstGeom>
-          <a:solidFill>
-            <a:srgbClr val="FFFFFF"/>
-          </a:solidFill>
-          <a:ln w="15240">
-            <a:solidFill>
-              <a:srgbClr val="C9A876"/>
-            </a:solidFill>
-          </a:ln>
-        </p:spPr>
-        <p:style>
-          <a:lnRef idx="1">
-            <a:schemeClr val="accent1"/>
-          </a:lnRef>
-          <a:fillRef idx="3">
-            <a:schemeClr val="accent1"/>
-          </a:fillRef>
-          <a:effectRef idx="2">
-            <a:schemeClr val="accent1"/>
-          </a:effectRef>
-          <a:fontRef idx="minor">
-            <a:schemeClr val="lt1"/>
-          </a:fontRef>
-        </p:style>
-        <p:txBody>
-          <a:bodyPr rtlCol="0" anchor="ctr"/>
-          <a:lstStyle/>
-          <a:p>
-            <a:pPr algn="ctr"/>
-          </a:p>
-        </p:txBody>
-      </p:sp>
-      <p:sp>
-        <p:nvSpPr>
-          <p:cNvPr id="23" name="TextBox 22"/>
-          <p:cNvSpPr txBox="1"/>
-          <p:nvPr/>
-        </p:nvSpPr>
-        <p:spPr>
-          <a:xfrm>
-            <a:off x="5193792" y="3995928"/>
-            <a:ext cx="1828800" cy="2103120"/>
-          </a:xfrm>
-          <a:prstGeom prst="rect">
-            <a:avLst/>
-          </a:prstGeom>
-          <a:noFill/>
-        </p:spPr>
-        <p:txBody>
-          <a:bodyPr wrap="square">
-            <a:spAutoFit/>
-          </a:bodyPr>
-          <a:lstStyle/>
-          <a:p>
-            <a:pPr>
-              <a:spcAft>
-                <a:spcPts val="400"/>
-              </a:spcAft>
-              <a:defRPr sz="1000" b="1">
-                <a:solidFill>
-                  <a:srgbClr val="A37F48"/>
-                </a:solidFill>
-              </a:defRPr>
-            </a:pPr>
-            <a:r>
-              <a:t>THEME 08</a:t>
-            </a:r>
-          </a:p>
-          <a:p>
-            <a:pPr>
-              <a:spcAft>
-                <a:spcPts val="600"/>
-              </a:spcAft>
-              <a:defRPr sz="1200" b="1">
-                <a:solidFill>
-                  <a:srgbClr val="241E19"/>
-                </a:solidFill>
-              </a:defRPr>
-            </a:pPr>
-            <a:r>
-              <a:t>온열 테라피 (체온 1℃↑)</a:t>
-            </a:r>
-          </a:p>
-          <a:p>
-            <a:pPr>
-              <a:lnSpc>
-                <a:spcPct val="120000"/>
-              </a:lnSpc>
-              <a:defRPr sz="950">
-                <a:solidFill>
-                  <a:srgbClr val="52463C"/>
-                </a:solidFill>
-              </a:defRPr>
-            </a:pPr>
-            <a:r>
-              <a:t>42~45℃ 1시간 원적외선 챔버 (면역 NK세포 5배)</a:t>
-            </a:r>
-          </a:p>
-        </p:txBody>
-      </p:sp>
-      <p:sp>
-        <p:nvSpPr>
-          <p:cNvPr id="24" name="Rounded Rectangle 23"/>
-          <p:cNvSpPr/>
-          <p:nvPr/>
-        </p:nvSpPr>
-        <p:spPr>
-          <a:xfrm>
-            <a:off x="7260336" y="3886200"/>
-            <a:ext cx="2057400" cy="2331720"/>
-          </a:xfrm>
-          <a:prstGeom prst="roundRect">
-            <a:avLst/>
-          </a:prstGeom>
-          <a:solidFill>
-            <a:srgbClr val="FFFFFF"/>
-          </a:solidFill>
-          <a:ln w="15240">
-            <a:solidFill>
-              <a:srgbClr val="C9A876"/>
-            </a:solidFill>
-          </a:ln>
-        </p:spPr>
-        <p:style>
-          <a:lnRef idx="1">
-            <a:schemeClr val="accent1"/>
-          </a:lnRef>
-          <a:fillRef idx="3">
-            <a:schemeClr val="accent1"/>
-          </a:fillRef>
-          <a:effectRef idx="2">
-            <a:schemeClr val="accent1"/>
-          </a:effectRef>
-          <a:fontRef idx="minor">
-            <a:schemeClr val="lt1"/>
-          </a:fontRef>
-        </p:style>
-        <p:txBody>
-          <a:bodyPr rtlCol="0" anchor="ctr"/>
-          <a:lstStyle/>
-          <a:p>
-            <a:pPr algn="ctr"/>
-          </a:p>
-        </p:txBody>
-      </p:sp>
-      <p:sp>
-        <p:nvSpPr>
-          <p:cNvPr id="25" name="TextBox 24"/>
-          <p:cNvSpPr txBox="1"/>
-          <p:nvPr/>
-        </p:nvSpPr>
-        <p:spPr>
-          <a:xfrm>
-            <a:off x="7370064" y="3995928"/>
-            <a:ext cx="1828800" cy="2103120"/>
-          </a:xfrm>
-          <a:prstGeom prst="rect">
-            <a:avLst/>
-          </a:prstGeom>
-          <a:noFill/>
-        </p:spPr>
-        <p:txBody>
-          <a:bodyPr wrap="square">
-            <a:spAutoFit/>
-          </a:bodyPr>
-          <a:lstStyle/>
-          <a:p>
-            <a:pPr>
-              <a:spcAft>
-                <a:spcPts val="400"/>
-              </a:spcAft>
-              <a:defRPr sz="1000" b="1">
-                <a:solidFill>
-                  <a:srgbClr val="A37F48"/>
-                </a:solidFill>
-              </a:defRPr>
-            </a:pPr>
-            <a:r>
-              <a:t>THEME 09</a:t>
-            </a:r>
-          </a:p>
-          <a:p>
-            <a:pPr>
-              <a:spcAft>
-                <a:spcPts val="600"/>
-              </a:spcAft>
-              <a:defRPr sz="1200" b="1">
-                <a:solidFill>
-                  <a:srgbClr val="241E19"/>
-                </a:solidFill>
-              </a:defRPr>
-            </a:pPr>
-            <a:r>
-              <a:t>전통 기체조: 태극선법</a:t>
-            </a:r>
-          </a:p>
-          <a:p>
-            <a:pPr>
-              <a:lnSpc>
-                <a:spcPct val="120000"/>
-              </a:lnSpc>
-              <a:defRPr sz="950">
-                <a:solidFill>
-                  <a:srgbClr val="52463C"/>
-                </a:solidFill>
-              </a:defRPr>
-            </a:pPr>
-            <a:r>
-              <a:t>단전 호흡 탁기 배출 &amp; 태극선법 8초식 동적 기혈 순환</a:t>
-            </a:r>
-          </a:p>
-        </p:txBody>
-      </p:sp>
-      <p:sp>
-        <p:nvSpPr>
-          <p:cNvPr id="26" name="Rounded Rectangle 25"/>
-          <p:cNvSpPr/>
-          <p:nvPr/>
-        </p:nvSpPr>
-        <p:spPr>
-          <a:xfrm>
-            <a:off x="9436608" y="3886200"/>
-            <a:ext cx="2057400" cy="2331720"/>
-          </a:xfrm>
-          <a:prstGeom prst="roundRect">
-            <a:avLst/>
-          </a:prstGeom>
-          <a:solidFill>
-            <a:srgbClr val="FFFFFF"/>
-          </a:solidFill>
-          <a:ln w="15240">
-            <a:solidFill>
-              <a:srgbClr val="C9A876"/>
-            </a:solidFill>
-          </a:ln>
-        </p:spPr>
-        <p:style>
-          <a:lnRef idx="1">
-            <a:schemeClr val="accent1"/>
-          </a:lnRef>
-          <a:fillRef idx="3">
-            <a:schemeClr val="accent1"/>
-          </a:fillRef>
-          <a:effectRef idx="2">
-            <a:schemeClr val="accent1"/>
-          </a:effectRef>
-          <a:fontRef idx="minor">
-            <a:schemeClr val="lt1"/>
-          </a:fontRef>
-        </p:style>
-        <p:txBody>
-          <a:bodyPr rtlCol="0" anchor="ctr"/>
-          <a:lstStyle/>
-          <a:p>
-            <a:pPr algn="ctr"/>
-          </a:p>
-        </p:txBody>
-      </p:sp>
-      <p:sp>
-        <p:nvSpPr>
-          <p:cNvPr id="27" name="TextBox 26"/>
-          <p:cNvSpPr txBox="1"/>
-          <p:nvPr/>
-        </p:nvSpPr>
-        <p:spPr>
-          <a:xfrm>
-            <a:off x="9546336" y="3995928"/>
-            <a:ext cx="1828800" cy="2103120"/>
-          </a:xfrm>
-          <a:prstGeom prst="rect">
-            <a:avLst/>
-          </a:prstGeom>
-          <a:noFill/>
-        </p:spPr>
-        <p:txBody>
-          <a:bodyPr wrap="square">
-            <a:spAutoFit/>
-          </a:bodyPr>
-          <a:lstStyle/>
-          <a:p>
-            <a:pPr>
-              <a:spcAft>
-                <a:spcPts val="400"/>
-              </a:spcAft>
-              <a:defRPr sz="1000" b="1">
-                <a:solidFill>
-                  <a:srgbClr val="A37F48"/>
-                </a:solidFill>
-              </a:defRPr>
-            </a:pPr>
-            <a:r>
-              <a:t>THEME 10</a:t>
-            </a:r>
-          </a:p>
-          <a:p>
-            <a:pPr>
-              <a:spcAft>
-                <a:spcPts val="600"/>
-              </a:spcAft>
-              <a:defRPr sz="1200" b="1">
-                <a:solidFill>
-                  <a:srgbClr val="241E19"/>
-                </a:solidFill>
-              </a:defRPr>
-            </a:pPr>
-            <a:r>
-              <a:t>멘탈: 정통 고요 명상</a:t>
-            </a:r>
-          </a:p>
-          <a:p>
-            <a:pPr>
-              <a:lnSpc>
-                <a:spcPct val="120000"/>
-              </a:lnSpc>
-              <a:defRPr sz="950">
-                <a:solidFill>
-                  <a:srgbClr val="52463C"/>
-                </a:solidFill>
-              </a:defRPr>
-            </a:pPr>
-            <a:r>
-              <a:t>사찰/선도 침묵 명상으로 뇌 피로도 70% 감소</a:t>
+                  <a:srgbClr val="5F5750"/>
+                </a:solidFill>
+              </a:defRPr>
+            </a:pPr>
+            <a:r>
+              <a:t>단기 입소 VIP를 위한 문진 ➔ 족욕 ➔ 80분 바디 ➔ 12h 단식 ➔ 산화질소 나노 미스트 코어 리프레시</a:t>
             </a:r>
           </a:p>
         </p:txBody>
@@ -6831,7 +5763,7 @@
             <a:avLst/>
           </a:prstGeom>
           <a:solidFill>
-            <a:srgbClr val="FDFBF7"/>
+            <a:srgbClr val="FAF8F3"/>
           </a:solidFill>
           <a:ln>
             <a:noFill/>
@@ -6861,20 +5793,90 @@
       </p:sp>
       <p:sp>
         <p:nvSpPr>
-          <p:cNvPr id="3" name="Rectangle 2"/>
+          <p:cNvPr id="3" name="TextBox 2"/>
+          <p:cNvSpPr txBox="1"/>
+          <p:nvPr/>
+        </p:nvSpPr>
+        <p:spPr>
+          <a:xfrm>
+            <a:off x="731520" y="365760"/>
+            <a:ext cx="10728655" cy="320040"/>
+          </a:xfrm>
+          <a:prstGeom prst="rect">
+            <a:avLst/>
+          </a:prstGeom>
+          <a:noFill/>
+        </p:spPr>
+        <p:txBody>
+          <a:bodyPr wrap="none">
+            <a:spAutoFit/>
+          </a:bodyPr>
+          <a:lstStyle/>
+          <a:p>
+            <a:pPr>
+              <a:defRPr sz="950" b="1">
+                <a:solidFill>
+                  <a:srgbClr val="94723E"/>
+                </a:solidFill>
+              </a:defRPr>
+            </a:pPr>
+            <a:r>
+              <a:t>FOUR CONSTITUTIONS</a:t>
+            </a:r>
+          </a:p>
+        </p:txBody>
+      </p:sp>
+      <p:sp>
+        <p:nvSpPr>
+          <p:cNvPr id="4" name="TextBox 3"/>
+          <p:cNvSpPr txBox="1"/>
+          <p:nvPr/>
+        </p:nvSpPr>
+        <p:spPr>
+          <a:xfrm>
+            <a:off x="731520" y="640080"/>
+            <a:ext cx="10728655" cy="640080"/>
+          </a:xfrm>
+          <a:prstGeom prst="rect">
+            <a:avLst/>
+          </a:prstGeom>
+          <a:noFill/>
+        </p:spPr>
+        <p:txBody>
+          <a:bodyPr wrap="none">
+            <a:spAutoFit/>
+          </a:bodyPr>
+          <a:lstStyle/>
+          <a:p>
+            <a:pPr>
+              <a:defRPr sz="2100" b="1">
+                <a:solidFill>
+                  <a:srgbClr val="26201C"/>
+                </a:solidFill>
+              </a:defRPr>
+            </a:pPr>
+            <a:r>
+              <a:t>Die Vier Konstitutionstypen : 4대 사상체질 심층 가이드</a:t>
+            </a:r>
+          </a:p>
+        </p:txBody>
+      </p:sp>
+      <p:sp>
+        <p:nvSpPr>
+          <p:cNvPr id="5" name="Rectangle 4"/>
           <p:cNvSpPr/>
           <p:nvPr/>
         </p:nvSpPr>
         <p:spPr>
           <a:xfrm>
-            <a:off x="0" y="0"/>
-            <a:ext cx="12191695" cy="411480"/>
+            <a:off x="731520" y="1280160"/>
+            <a:ext cx="2286000" cy="22860"/>
           </a:xfrm>
           <a:prstGeom prst="rect">
             <a:avLst/>
           </a:prstGeom>
           <a:solidFill>
-            <a:srgbClr val="241E19"/>
+            <a:srgbClr val="C29B62"/>
           </a:solidFill>
           <a:ln>
             <a:noFill/>
@@ -6904,59 +5906,24 @@
       </p:sp>
       <p:sp>
         <p:nvSpPr>
-          <p:cNvPr id="4" name="TextBox 3"/>
-          <p:cNvSpPr txBox="1"/>
-          <p:nvPr/>
-        </p:nvSpPr>
-        <p:spPr>
-          <a:xfrm>
-            <a:off x="731520" y="73152"/>
-            <a:ext cx="10728655" cy="274320"/>
-          </a:xfrm>
-          <a:prstGeom prst="rect">
-            <a:avLst/>
-          </a:prstGeom>
-          <a:noFill/>
-        </p:spPr>
-        <p:txBody>
-          <a:bodyPr wrap="none">
-            <a:spAutoFit/>
-          </a:bodyPr>
-          <a:lstStyle/>
-          <a:p>
-            <a:pPr>
-              <a:defRPr sz="900" b="1">
-                <a:solidFill>
-                  <a:srgbClr val="C8B9A0"/>
-                </a:solidFill>
-              </a:defRPr>
-            </a:pPr>
-            <a:r>
-              <a:t>SASANG SPA BOUTIQUE  |  K-WELLNESS HERITAGE &amp; BIOTECH  |  VIP DIRECTORS: 010-4728-9917</a:t>
-            </a:r>
-          </a:p>
-        </p:txBody>
-      </p:sp>
-      <p:sp>
-        <p:nvSpPr>
-          <p:cNvPr id="5" name="Rounded Rectangle 4"/>
+          <p:cNvPr id="6" name="Rectangle 5"/>
           <p:cNvSpPr/>
           <p:nvPr/>
         </p:nvSpPr>
         <p:spPr>
           <a:xfrm>
-            <a:off x="731520" y="621792"/>
-            <a:ext cx="2011680" cy="256032"/>
-          </a:xfrm>
-          <a:prstGeom prst="roundRect">
+            <a:off x="731520" y="1508760"/>
+            <a:ext cx="2560320" cy="4846320"/>
+          </a:xfrm>
+          <a:prstGeom prst="rect">
             <a:avLst/>
           </a:prstGeom>
           <a:solidFill>
-            <a:srgbClr val="F8F5EE"/>
+            <a:srgbClr val="FFFFFF"/>
           </a:solidFill>
           <a:ln w="12700">
             <a:solidFill>
-              <a:srgbClr val="C9A876"/>
+              <a:srgbClr val="94723E"/>
             </a:solidFill>
           </a:ln>
         </p:spPr>
@@ -6984,14 +5951,14 @@
       </p:sp>
       <p:sp>
         <p:nvSpPr>
-          <p:cNvPr id="6" name="TextBox 5"/>
+          <p:cNvPr id="7" name="TextBox 6"/>
           <p:cNvSpPr txBox="1"/>
           <p:nvPr/>
         </p:nvSpPr>
         <p:spPr>
           <a:xfrm>
-            <a:off x="777240" y="603504"/>
-            <a:ext cx="1920240" cy="274320"/>
+            <a:off x="868680" y="1645920"/>
+            <a:ext cx="2286000" cy="4572000"/>
           </a:xfrm>
           <a:prstGeom prst="rect">
             <a:avLst/>
@@ -6999,79 +5966,90 @@
           <a:noFill/>
         </p:spPr>
         <p:txBody>
-          <a:bodyPr wrap="none">
+          <a:bodyPr wrap="square">
             <a:spAutoFit/>
           </a:bodyPr>
           <a:lstStyle/>
           <a:p>
-            <a:pPr algn="ctr">
-              <a:defRPr sz="900" b="1">
-                <a:solidFill>
-                  <a:srgbClr val="A37F48"/>
-                </a:solidFill>
-              </a:defRPr>
-            </a:pPr>
-            <a:r>
-              <a:t>SHRIVEDA FOOD CARE</a:t>
-            </a:r>
-          </a:p>
-        </p:txBody>
-      </p:sp>
-      <p:sp>
-        <p:nvSpPr>
-          <p:cNvPr id="7" name="TextBox 6"/>
-          <p:cNvSpPr txBox="1"/>
-          <p:nvPr/>
-        </p:nvSpPr>
-        <p:spPr>
-          <a:xfrm>
-            <a:off x="2926080" y="530352"/>
-            <a:ext cx="8503920" cy="548640"/>
-          </a:xfrm>
-          <a:prstGeom prst="rect">
-            <a:avLst/>
-          </a:prstGeom>
-          <a:noFill/>
-        </p:spPr>
-        <p:txBody>
-          <a:bodyPr wrap="none">
-            <a:spAutoFit/>
-          </a:bodyPr>
-          <a:lstStyle/>
-          <a:p>
-            <a:pPr>
-              <a:defRPr sz="2000" b="1">
-                <a:solidFill>
-                  <a:srgbClr val="241E19"/>
-                </a:solidFill>
-              </a:defRPr>
-            </a:pPr>
-            <a:r>
-              <a:t>슈리베다식 푸드 테라피 : 12시간 단식 &amp; 4대 체질 미역국</a:t>
-            </a:r>
-          </a:p>
-        </p:txBody>
-      </p:sp>
-      <p:sp>
-        <p:nvSpPr>
-          <p:cNvPr id="8" name="Rounded Rectangle 7"/>
+            <a:pPr>
+              <a:defRPr sz="1400" b="1">
+                <a:solidFill>
+                  <a:srgbClr val="94723E"/>
+                </a:solidFill>
+              </a:defRPr>
+            </a:pPr>
+            <a:r>
+              <a:t>Tae-eum (태음인)</a:t>
+            </a:r>
+          </a:p>
+          <a:p>
+            <a:pPr>
+              <a:spcAft>
+                <a:spcPts val="800"/>
+              </a:spcAft>
+              <a:defRPr sz="1000">
+                <a:solidFill>
+                  <a:srgbClr val="94723E"/>
+                </a:solidFill>
+              </a:defRPr>
+            </a:pPr>
+            <a:r>
+              <a:t>간대폐소 (肝大肺小)</a:t>
+            </a:r>
+          </a:p>
+          <a:p>
+            <a:pPr>
+              <a:lnSpc>
+                <a:spcPct val="125000"/>
+              </a:lnSpc>
+              <a:defRPr sz="1000">
+                <a:solidFill>
+                  <a:srgbClr val="26201C"/>
+                </a:solidFill>
+              </a:defRPr>
+            </a:pPr>
+            <a:r>
+              <a:t>• 장부 특성: 간 기능 강함, 폐/기관지 허약</a:t>
+            </a:r>
+            <a:br/>
+            <a:r>
+              <a:t>• 취약 증상: 림프 정체, 비만, 기관지 건조</a:t>
+            </a:r>
+            <a:br/>
+            <a:r>
+              <a:t>• 전용 오일: 유칼립투스, 샌달우드</a:t>
+            </a:r>
+            <a:br/>
+            <a:r>
+              <a:t>• 쿠어 식단: 소고기 양지 들깨 미역국 + 율무밥</a:t>
+            </a:r>
+            <a:br/>
+            <a:r>
+              <a:t>• 비언어 의전: 황색 가운 / 우측 4지 은반지</a:t>
+            </a:r>
+          </a:p>
+        </p:txBody>
+      </p:sp>
+      <p:sp>
+        <p:nvSpPr>
+          <p:cNvPr id="8" name="Rectangle 7"/>
           <p:cNvSpPr/>
           <p:nvPr/>
         </p:nvSpPr>
         <p:spPr>
           <a:xfrm>
-            <a:off x="731520" y="1280160"/>
-            <a:ext cx="5120640" cy="5120640"/>
-          </a:xfrm>
-          <a:prstGeom prst="roundRect">
+            <a:off x="3429000" y="1508760"/>
+            <a:ext cx="2560320" cy="4846320"/>
+          </a:xfrm>
+          <a:prstGeom prst="rect">
             <a:avLst/>
           </a:prstGeom>
           <a:solidFill>
-            <a:srgbClr val="1A3328"/>
+            <a:srgbClr val="FFFFFF"/>
           </a:solidFill>
-          <a:ln w="15240">
+          <a:ln w="12700">
             <a:solidFill>
-              <a:srgbClr val="C9A876"/>
+              <a:srgbClr val="1C362B"/>
             </a:solidFill>
           </a:ln>
         </p:spPr>
@@ -7105,8 +6083,8 @@
         </p:nvSpPr>
         <p:spPr>
           <a:xfrm>
-            <a:off x="1005840" y="1554480"/>
-            <a:ext cx="4572000" cy="4572000"/>
+            <a:off x="3566160" y="1645920"/>
+            <a:ext cx="2286000" cy="4572000"/>
           </a:xfrm>
           <a:prstGeom prst="rect">
             <a:avLst/>
@@ -7120,73 +6098,84 @@
           <a:lstStyle/>
           <a:p>
             <a:pPr>
+              <a:defRPr sz="1400" b="1">
+                <a:solidFill>
+                  <a:srgbClr val="1C362B"/>
+                </a:solidFill>
+              </a:defRPr>
+            </a:pPr>
+            <a:r>
+              <a:t>So-yang (소양인)</a:t>
+            </a:r>
+          </a:p>
+          <a:p>
+            <a:pPr>
               <a:spcAft>
-                <a:spcPts val="1200"/>
+                <a:spcPts val="800"/>
               </a:spcAft>
-              <a:defRPr sz="1600" b="1">
-                <a:solidFill>
-                  <a:srgbClr val="C9A876"/>
-                </a:solidFill>
-              </a:defRPr>
-            </a:pPr>
-            <a:r>
-              <a:t>12시간 단식 자가포식(Autophagy) 프로토콜</a:t>
+              <a:defRPr sz="1000">
+                <a:solidFill>
+                  <a:srgbClr val="94723E"/>
+                </a:solidFill>
+              </a:defRPr>
+            </a:pPr>
+            <a:r>
+              <a:t>비대신소 (脾大腎小)</a:t>
             </a:r>
           </a:p>
           <a:p>
             <a:pPr>
               <a:lnSpc>
-                <a:spcPct val="135000"/>
+                <a:spcPct val="125000"/>
               </a:lnSpc>
-              <a:defRPr sz="1200">
-                <a:solidFill>
-                  <a:srgbClr val="DCD7C8"/>
-                </a:solidFill>
-              </a:defRPr>
-            </a:pPr>
-            <a:r>
-              <a:t>• 18:00 저녁 약선 식사 종료 및 12시간 단식 돌입</a:t>
+              <a:defRPr sz="1000">
+                <a:solidFill>
+                  <a:srgbClr val="26201C"/>
+                </a:solidFill>
+              </a:defRPr>
+            </a:pPr>
+            <a:r>
+              <a:t>• 장부 특성: 소화기 열 많음, 신장 음기 허약</a:t>
             </a:r>
             <a:br/>
             <a:r>
-              <a:t>• 20:00 산화질소(NO) 수 음용 &amp; 30분 침묵 명상</a:t>
+              <a:t>• 취약 증상: 상열감, 편두통, 가슴 답답, 불면</a:t>
             </a:r>
             <a:br/>
             <a:r>
-              <a:t>• 06:00 12시간 단식 완료 ➔ 기상 직후 미온수 &amp; 체질 주스</a:t>
+              <a:t>• 전용 오일: 페퍼민트, 라벤더</a:t>
             </a:r>
             <a:br/>
             <a:r>
-              <a:t>• 07:30 4대 체질 맞춤 영양 미역국 조식 정식 제공</a:t>
+              <a:t>• 쿠어 식단: 돼지고기 수육 / 조개 미역국 + 보리밥</a:t>
             </a:r>
             <a:br/>
-            <a:br/>
-            <a:r>
-              <a:t>💡 자가포식 메커니즘: 소화기를 12시간 동안 완전히 쉬게 함으로써 세포 내 손상된 단백질과 노폐물을 스스로 분해 청소하고 장내 환경을 리셋합니다.</a:t>
-            </a:r>
-          </a:p>
-        </p:txBody>
-      </p:sp>
-      <p:sp>
-        <p:nvSpPr>
-          <p:cNvPr id="10" name="Rounded Rectangle 9"/>
+            <a:r>
+              <a:t>• 비언어 의전: 청색 가운 / 좌측 2지 은반지</a:t>
+            </a:r>
+          </a:p>
+        </p:txBody>
+      </p:sp>
+      <p:sp>
+        <p:nvSpPr>
+          <p:cNvPr id="10" name="Rectangle 9"/>
           <p:cNvSpPr/>
           <p:nvPr/>
         </p:nvSpPr>
         <p:spPr>
           <a:xfrm>
-            <a:off x="6217920" y="1280160"/>
-            <a:ext cx="5212080" cy="5120640"/>
-          </a:xfrm>
-          <a:prstGeom prst="roundRect">
+            <a:off x="6126480" y="1508760"/>
+            <a:ext cx="2560320" cy="4846320"/>
+          </a:xfrm>
+          <a:prstGeom prst="rect">
             <a:avLst/>
           </a:prstGeom>
           <a:solidFill>
             <a:srgbClr val="FFFFFF"/>
           </a:solidFill>
-          <a:ln w="15240">
+          <a:ln w="12700">
             <a:solidFill>
-              <a:srgbClr val="C9A876"/>
+              <a:srgbClr val="94723E"/>
             </a:solidFill>
           </a:ln>
         </p:spPr>
@@ -7220,8 +6209,8 @@
         </p:nvSpPr>
         <p:spPr>
           <a:xfrm>
-            <a:off x="6492240" y="1554480"/>
-            <a:ext cx="4663440" cy="4572000"/>
+            <a:off x="6263640" y="1645920"/>
+            <a:ext cx="2286000" cy="4572000"/>
           </a:xfrm>
           <a:prstGeom prst="rect">
             <a:avLst/>
@@ -7235,17 +6224,14 @@
           <a:lstStyle/>
           <a:p>
             <a:pPr>
-              <a:spcAft>
-                <a:spcPts val="1200"/>
-              </a:spcAft>
-              <a:defRPr sz="1600" b="1">
-                <a:solidFill>
-                  <a:srgbClr val="241E19"/>
-                </a:solidFill>
-              </a:defRPr>
-            </a:pPr>
-            <a:r>
-              <a:t>4대 체질 맞춤 프리미엄 미역국 조식</a:t>
+              <a:defRPr sz="1400" b="1">
+                <a:solidFill>
+                  <a:srgbClr val="94723E"/>
+                </a:solidFill>
+              </a:defRPr>
+            </a:pPr>
+            <a:r>
+              <a:t>So-eum (소음인)</a:t>
             </a:r>
           </a:p>
           <a:p>
@@ -7253,18 +6239,125 @@
               <a:spcAft>
                 <a:spcPts val="800"/>
               </a:spcAft>
-              <a:defRPr sz="1150">
-                <a:solidFill>
-                  <a:srgbClr val="52463C"/>
-                </a:solidFill>
-              </a:defRPr>
-            </a:pPr>
-            <a:r>
-              <a:t>• 태음인: 소고기 양지 들깨 미역국 + 율무밥</a:t>
+              <a:defRPr sz="1000">
+                <a:solidFill>
+                  <a:srgbClr val="94723E"/>
+                </a:solidFill>
+              </a:defRPr>
+            </a:pPr>
+            <a:r>
+              <a:t>신대비소 (腎大脾小)</a:t>
+            </a:r>
+          </a:p>
+          <a:p>
+            <a:pPr>
+              <a:lnSpc>
+                <a:spcPct val="125000"/>
+              </a:lnSpc>
+              <a:defRPr sz="1000">
+                <a:solidFill>
+                  <a:srgbClr val="26201C"/>
+                </a:solidFill>
+              </a:defRPr>
+            </a:pPr>
+            <a:r>
+              <a:t>• 장부 특성: 신장 기능 튼튼, 비위 차고 약함</a:t>
             </a:r>
             <a:br/>
             <a:r>
-              <a:t>(폐/기관지 윤활 &amp; 고단백 세포 보양)</a:t>
+              <a:t>• 취약 증상: 수족냉증, 만성 소화불량, 피로</a:t>
+            </a:r>
+            <a:br/>
+            <a:r>
+              <a:t>• 전용 오일: 진저, 온가드, 시나몬</a:t>
+            </a:r>
+            <a:br/>
+            <a:r>
+              <a:t>• 쿠어 식단: 닭가슴살 황기 보양 미역국 + 찹쌀밥</a:t>
+            </a:r>
+            <a:br/>
+            <a:r>
+              <a:t>• 비언어 의전: 백색 가운 / 우측 3지 은반지</a:t>
+            </a:r>
+          </a:p>
+        </p:txBody>
+      </p:sp>
+      <p:sp>
+        <p:nvSpPr>
+          <p:cNvPr id="12" name="Rectangle 11"/>
+          <p:cNvSpPr/>
+          <p:nvPr/>
+        </p:nvSpPr>
+        <p:spPr>
+          <a:xfrm>
+            <a:off x="8823960" y="1508760"/>
+            <a:ext cx="2560320" cy="4846320"/>
+          </a:xfrm>
+          <a:prstGeom prst="rect">
+            <a:avLst/>
+          </a:prstGeom>
+          <a:solidFill>
+            <a:srgbClr val="FFFFFF"/>
+          </a:solidFill>
+          <a:ln w="12700">
+            <a:solidFill>
+              <a:srgbClr val="1C362B"/>
+            </a:solidFill>
+          </a:ln>
+        </p:spPr>
+        <p:style>
+          <a:lnRef idx="1">
+            <a:schemeClr val="accent1"/>
+          </a:lnRef>
+          <a:fillRef idx="3">
+            <a:schemeClr val="accent1"/>
+          </a:fillRef>
+          <a:effectRef idx="2">
+            <a:schemeClr val="accent1"/>
+          </a:effectRef>
+          <a:fontRef idx="minor">
+            <a:schemeClr val="lt1"/>
+          </a:fontRef>
+        </p:style>
+        <p:txBody>
+          <a:bodyPr rtlCol="0" anchor="ctr"/>
+          <a:lstStyle/>
+          <a:p>
+            <a:pPr algn="ctr"/>
+          </a:p>
+        </p:txBody>
+      </p:sp>
+      <p:sp>
+        <p:nvSpPr>
+          <p:cNvPr id="13" name="TextBox 12"/>
+          <p:cNvSpPr txBox="1"/>
+          <p:nvPr/>
+        </p:nvSpPr>
+        <p:spPr>
+          <a:xfrm>
+            <a:off x="8961120" y="1645920"/>
+            <a:ext cx="2286000" cy="4572000"/>
+          </a:xfrm>
+          <a:prstGeom prst="rect">
+            <a:avLst/>
+          </a:prstGeom>
+          <a:noFill/>
+        </p:spPr>
+        <p:txBody>
+          <a:bodyPr wrap="square">
+            <a:spAutoFit/>
+          </a:bodyPr>
+          <a:lstStyle/>
+          <a:p>
+            <a:pPr>
+              <a:defRPr sz="1400" b="1">
+                <a:solidFill>
+                  <a:srgbClr val="1C362B"/>
+                </a:solidFill>
+              </a:defRPr>
+            </a:pPr>
+            <a:r>
+              <a:t>Tae-yang (태양인)</a:t>
             </a:r>
           </a:p>
           <a:p>
@@ -7272,56 +6365,45 @@
               <a:spcAft>
                 <a:spcPts val="800"/>
               </a:spcAft>
-              <a:defRPr sz="1150">
-                <a:solidFill>
-                  <a:srgbClr val="52463C"/>
-                </a:solidFill>
-              </a:defRPr>
-            </a:pPr>
-            <a:r>
-              <a:t>• 소양인: 돼지고기 수육 미역국 or 맑은 조개 미역국 + 보리밥</a:t>
+              <a:defRPr sz="1000">
+                <a:solidFill>
+                  <a:srgbClr val="94723E"/>
+                </a:solidFill>
+              </a:defRPr>
+            </a:pPr>
+            <a:r>
+              <a:t>폐대간소 (肺大肝小)</a:t>
+            </a:r>
+          </a:p>
+          <a:p>
+            <a:pPr>
+              <a:lnSpc>
+                <a:spcPct val="125000"/>
+              </a:lnSpc>
+              <a:defRPr sz="1000">
+                <a:solidFill>
+                  <a:srgbClr val="26201C"/>
+                </a:solidFill>
+              </a:defRPr>
+            </a:pPr>
+            <a:r>
+              <a:t>• 장부 특성: 폐 기능 강함, 간 해독/하체 허약</a:t>
             </a:r>
             <a:br/>
             <a:r>
-              <a:t>(소화기 열 해독 &amp; 신장 음기 보강)</a:t>
-            </a:r>
-          </a:p>
-          <a:p>
-            <a:pPr>
-              <a:spcAft>
-                <a:spcPts val="800"/>
-              </a:spcAft>
-              <a:defRPr sz="1150">
-                <a:solidFill>
-                  <a:srgbClr val="52463C"/>
-                </a:solidFill>
-              </a:defRPr>
-            </a:pPr>
-            <a:r>
-              <a:t>• 소음인: 닭가슴살 황기 보양 미역국 + 찹쌀밥</a:t>
+              <a:t>• 취약 증상: 상기증, 목덜미 강직, 하지 무력</a:t>
             </a:r>
             <a:br/>
             <a:r>
-              <a:t>(위장 심부 보온 &amp; 기력 증진)</a:t>
-            </a:r>
-          </a:p>
-          <a:p>
-            <a:pPr>
-              <a:spcAft>
-                <a:spcPts val="800"/>
-              </a:spcAft>
-              <a:defRPr sz="1150">
-                <a:solidFill>
-                  <a:srgbClr val="52463C"/>
-                </a:solidFill>
-              </a:defRPr>
-            </a:pPr>
-            <a:r>
-              <a:t>• 태양인: 완도산 전복 홍합 맑은 해물 미역국 + 메밀죽</a:t>
+              <a:t>• 전용 오일: 베티버, 프랑킨센스</a:t>
             </a:r>
             <a:br/>
             <a:r>
-              <a:t>(간 해독 지원 &amp; 하체 기운 강화)</a:t>
+              <a:t>• 쿠어 식단: 완도산 전복 홍합 해물 미역국 + 메밀죽</a:t>
+            </a:r>
+            <a:br/>
+            <a:r>
+              <a:t>• 비언어 의전: 적색 가운 / 좌측 4지 은반지</a:t>
             </a:r>
           </a:p>
         </p:txBody>
@@ -7359,7 +6441,7 @@
             <a:avLst/>
           </a:prstGeom>
           <a:solidFill>
-            <a:srgbClr val="FDFBF7"/>
+            <a:srgbClr val="FAF8F3"/>
           </a:solidFill>
           <a:ln>
             <a:noFill/>
@@ -7389,20 +6471,90 @@
       </p:sp>
       <p:sp>
         <p:nvSpPr>
-          <p:cNvPr id="3" name="Rectangle 2"/>
+          <p:cNvPr id="3" name="TextBox 2"/>
+          <p:cNvSpPr txBox="1"/>
+          <p:nvPr/>
+        </p:nvSpPr>
+        <p:spPr>
+          <a:xfrm>
+            <a:off x="731520" y="365760"/>
+            <a:ext cx="10728655" cy="320040"/>
+          </a:xfrm>
+          <a:prstGeom prst="rect">
+            <a:avLst/>
+          </a:prstGeom>
+          <a:noFill/>
+        </p:spPr>
+        <p:txBody>
+          <a:bodyPr wrap="none">
+            <a:spAutoFit/>
+          </a:bodyPr>
+          <a:lstStyle/>
+          <a:p>
+            <a:pPr>
+              <a:defRPr sz="950" b="1">
+                <a:solidFill>
+                  <a:srgbClr val="94723E"/>
+                </a:solidFill>
+              </a:defRPr>
+            </a:pPr>
+            <a:r>
+              <a:t>SIGNATURE TREATMENTS</a:t>
+            </a:r>
+          </a:p>
+        </p:txBody>
+      </p:sp>
+      <p:sp>
+        <p:nvSpPr>
+          <p:cNvPr id="4" name="TextBox 3"/>
+          <p:cNvSpPr txBox="1"/>
+          <p:nvPr/>
+        </p:nvSpPr>
+        <p:spPr>
+          <a:xfrm>
+            <a:off x="731520" y="640080"/>
+            <a:ext cx="10728655" cy="640080"/>
+          </a:xfrm>
+          <a:prstGeom prst="rect">
+            <a:avLst/>
+          </a:prstGeom>
+          <a:noFill/>
+        </p:spPr>
+        <p:txBody>
+          <a:bodyPr wrap="none">
+            <a:spAutoFit/>
+          </a:bodyPr>
+          <a:lstStyle/>
+          <a:p>
+            <a:pPr>
+              <a:defRPr sz="2100" b="1">
+                <a:solidFill>
+                  <a:srgbClr val="26201C"/>
+                </a:solidFill>
+              </a:defRPr>
+            </a:pPr>
+            <a:r>
+              <a:t>Die 10 Kur-Therapien : 사상체질 10대 시그니처 테라피</a:t>
+            </a:r>
+          </a:p>
+        </p:txBody>
+      </p:sp>
+      <p:sp>
+        <p:nvSpPr>
+          <p:cNvPr id="5" name="Rectangle 4"/>
           <p:cNvSpPr/>
           <p:nvPr/>
         </p:nvSpPr>
         <p:spPr>
           <a:xfrm>
-            <a:off x="0" y="0"/>
-            <a:ext cx="12191695" cy="411480"/>
+            <a:off x="731520" y="1280160"/>
+            <a:ext cx="2286000" cy="22860"/>
           </a:xfrm>
           <a:prstGeom prst="rect">
             <a:avLst/>
           </a:prstGeom>
           <a:solidFill>
-            <a:srgbClr val="241E19"/>
+            <a:srgbClr val="C29B62"/>
           </a:solidFill>
           <a:ln>
             <a:noFill/>
@@ -7432,59 +6584,24 @@
       </p:sp>
       <p:sp>
         <p:nvSpPr>
-          <p:cNvPr id="4" name="TextBox 3"/>
-          <p:cNvSpPr txBox="1"/>
-          <p:nvPr/>
-        </p:nvSpPr>
-        <p:spPr>
-          <a:xfrm>
-            <a:off x="731520" y="73152"/>
-            <a:ext cx="10728655" cy="274320"/>
-          </a:xfrm>
-          <a:prstGeom prst="rect">
-            <a:avLst/>
-          </a:prstGeom>
-          <a:noFill/>
-        </p:spPr>
-        <p:txBody>
-          <a:bodyPr wrap="none">
-            <a:spAutoFit/>
-          </a:bodyPr>
-          <a:lstStyle/>
-          <a:p>
-            <a:pPr>
-              <a:defRPr sz="900" b="1">
-                <a:solidFill>
-                  <a:srgbClr val="C8B9A0"/>
-                </a:solidFill>
-              </a:defRPr>
-            </a:pPr>
-            <a:r>
-              <a:t>SASANG SPA BOUTIQUE  |  K-WELLNESS HERITAGE &amp; BIOTECH  |  VIP DIRECTORS: 010-4728-9917</a:t>
-            </a:r>
-          </a:p>
-        </p:txBody>
-      </p:sp>
-      <p:sp>
-        <p:nvSpPr>
-          <p:cNvPr id="5" name="Rounded Rectangle 4"/>
+          <p:cNvPr id="6" name="Rectangle 5"/>
           <p:cNvSpPr/>
           <p:nvPr/>
         </p:nvSpPr>
         <p:spPr>
           <a:xfrm>
-            <a:off x="731520" y="621792"/>
-            <a:ext cx="2011680" cy="256032"/>
-          </a:xfrm>
-          <a:prstGeom prst="roundRect">
+            <a:off x="731520" y="1508760"/>
+            <a:ext cx="2057400" cy="2240280"/>
+          </a:xfrm>
+          <a:prstGeom prst="rect">
             <a:avLst/>
           </a:prstGeom>
           <a:solidFill>
-            <a:srgbClr val="F8F5EE"/>
+            <a:srgbClr val="FFFFFF"/>
           </a:solidFill>
           <a:ln w="12700">
             <a:solidFill>
-              <a:srgbClr val="C9A876"/>
+              <a:srgbClr val="C29B62"/>
             </a:solidFill>
           </a:ln>
         </p:spPr>
@@ -7512,14 +6629,14 @@
       </p:sp>
       <p:sp>
         <p:nvSpPr>
-          <p:cNvPr id="6" name="TextBox 5"/>
+          <p:cNvPr id="7" name="TextBox 6"/>
           <p:cNvSpPr txBox="1"/>
           <p:nvPr/>
         </p:nvSpPr>
         <p:spPr>
           <a:xfrm>
-            <a:off x="777240" y="603504"/>
-            <a:ext cx="1920240" cy="274320"/>
+            <a:off x="841248" y="1618488"/>
+            <a:ext cx="1828800" cy="2011680"/>
           </a:xfrm>
           <a:prstGeom prst="rect">
             <a:avLst/>
@@ -7527,79 +6644,77 @@
           <a:noFill/>
         </p:spPr>
         <p:txBody>
-          <a:bodyPr wrap="none">
+          <a:bodyPr wrap="square">
             <a:spAutoFit/>
           </a:bodyPr>
           <a:lstStyle/>
           <a:p>
-            <a:pPr algn="ctr">
-              <a:defRPr sz="900" b="1">
-                <a:solidFill>
-                  <a:srgbClr val="A37F48"/>
-                </a:solidFill>
-              </a:defRPr>
-            </a:pPr>
-            <a:r>
-              <a:t>SCIENTIFIC DIAGNOSIS</a:t>
-            </a:r>
-          </a:p>
-        </p:txBody>
-      </p:sp>
-      <p:sp>
-        <p:nvSpPr>
-          <p:cNvPr id="7" name="TextBox 6"/>
-          <p:cNvSpPr txBox="1"/>
-          <p:nvPr/>
-        </p:nvSpPr>
-        <p:spPr>
-          <a:xfrm>
-            <a:off x="2926080" y="530352"/>
-            <a:ext cx="8503920" cy="548640"/>
-          </a:xfrm>
-          <a:prstGeom prst="rect">
-            <a:avLst/>
-          </a:prstGeom>
-          <a:noFill/>
-        </p:spPr>
-        <p:txBody>
-          <a:bodyPr wrap="none">
-            <a:spAutoFit/>
-          </a:bodyPr>
-          <a:lstStyle/>
-          <a:p>
-            <a:pPr>
-              <a:defRPr sz="2000" b="1">
-                <a:solidFill>
-                  <a:srgbClr val="241E19"/>
-                </a:solidFill>
-              </a:defRPr>
-            </a:pPr>
-            <a:r>
-              <a:t>데이터 기반 4단계 정밀 분석 및 체질 확정 시스템</a:t>
-            </a:r>
-          </a:p>
-        </p:txBody>
-      </p:sp>
-      <p:sp>
-        <p:nvSpPr>
-          <p:cNvPr id="8" name="Rounded Rectangle 7"/>
+            <a:pPr>
+              <a:spcAft>
+                <a:spcPts val="300"/>
+              </a:spcAft>
+              <a:defRPr sz="950" b="1">
+                <a:solidFill>
+                  <a:srgbClr val="94723E"/>
+                </a:solidFill>
+              </a:defRPr>
+            </a:pPr>
+            <a:r>
+              <a:t>THERAPIE 01</a:t>
+            </a:r>
+          </a:p>
+          <a:p>
+            <a:pPr>
+              <a:spcAft>
+                <a:spcPts val="500"/>
+              </a:spcAft>
+              <a:defRPr sz="1150" b="1">
+                <a:solidFill>
+                  <a:srgbClr val="26201C"/>
+                </a:solidFill>
+              </a:defRPr>
+            </a:pPr>
+            <a:r>
+              <a:t>웰컴 오리엔테이션</a:t>
+            </a:r>
+          </a:p>
+          <a:p>
+            <a:pPr>
+              <a:lnSpc>
+                <a:spcPct val="120000"/>
+              </a:lnSpc>
+              <a:defRPr sz="950">
+                <a:solidFill>
+                  <a:srgbClr val="5F5750"/>
+                </a:solidFill>
+              </a:defRPr>
+            </a:pPr>
+            <a:r>
+              <a:t>다실 1:1 상담 및 체질별 맞춤 웰컴 티 음용</a:t>
+            </a:r>
+          </a:p>
+        </p:txBody>
+      </p:sp>
+      <p:sp>
+        <p:nvSpPr>
+          <p:cNvPr id="8" name="Rectangle 7"/>
           <p:cNvSpPr/>
           <p:nvPr/>
         </p:nvSpPr>
         <p:spPr>
           <a:xfrm>
-            <a:off x="731520" y="1280160"/>
-            <a:ext cx="2560320" cy="5120640"/>
-          </a:xfrm>
-          <a:prstGeom prst="roundRect">
+            <a:off x="2907791" y="1508760"/>
+            <a:ext cx="2057400" cy="2240280"/>
+          </a:xfrm>
+          <a:prstGeom prst="rect">
             <a:avLst/>
           </a:prstGeom>
           <a:solidFill>
             <a:srgbClr val="FFFFFF"/>
           </a:solidFill>
-          <a:ln w="15240">
+          <a:ln w="12700">
             <a:solidFill>
-              <a:srgbClr val="C9A876"/>
+              <a:srgbClr val="C29B62"/>
             </a:solidFill>
           </a:ln>
         </p:spPr>
@@ -7633,8 +6748,8 @@
         </p:nvSpPr>
         <p:spPr>
           <a:xfrm>
-            <a:off x="868680" y="1463040"/>
-            <a:ext cx="2286000" cy="4754880"/>
+            <a:off x="3017519" y="1618488"/>
+            <a:ext cx="1828800" cy="2011680"/>
           </a:xfrm>
           <a:prstGeom prst="rect">
             <a:avLst/>
@@ -7648,76 +6763,71 @@
           <a:lstStyle/>
           <a:p>
             <a:pPr>
-              <a:defRPr sz="1300" b="1">
-                <a:solidFill>
-                  <a:srgbClr val="A37F48"/>
-                </a:solidFill>
-              </a:defRPr>
-            </a:pPr>
-            <a:r>
-              <a:t>STEP 01</a:t>
-            </a:r>
-          </a:p>
-          <a:p>
-            <a:pPr>
               <a:spcAft>
-                <a:spcPts val="1000"/>
+                <a:spcPts val="300"/>
               </a:spcAft>
-              <a:defRPr sz="1400" b="1">
-                <a:solidFill>
-                  <a:srgbClr val="241E19"/>
-                </a:solidFill>
-              </a:defRPr>
-            </a:pPr>
-            <a:r>
-              <a:t>기초 생체 &amp; 병력 문진표</a:t>
+              <a:defRPr sz="950" b="1">
+                <a:solidFill>
+                  <a:srgbClr val="94723E"/>
+                </a:solidFill>
+              </a:defRPr>
+            </a:pPr>
+            <a:r>
+              <a:t>THERAPIE 02</a:t>
+            </a:r>
+          </a:p>
+          <a:p>
+            <a:pPr>
+              <a:spcAft>
+                <a:spcPts val="500"/>
+              </a:spcAft>
+              <a:defRPr sz="1150" b="1">
+                <a:solidFill>
+                  <a:srgbClr val="26201C"/>
+                </a:solidFill>
+              </a:defRPr>
+            </a:pPr>
+            <a:r>
+              <a:t>20분 맞춤 약재 족욕</a:t>
             </a:r>
           </a:p>
           <a:p>
             <a:pPr>
               <a:lnSpc>
-                <a:spcPct val="130000"/>
+                <a:spcPct val="120000"/>
               </a:lnSpc>
-              <a:defRPr sz="1100">
-                <a:solidFill>
-                  <a:srgbClr val="52463C"/>
-                </a:solidFill>
-              </a:defRPr>
-            </a:pPr>
-            <a:r>
-              <a:t>• 혈압, 공복 혈당, 가족력(심혈관/암)</a:t>
-            </a:r>
-            <a:br/>
-            <a:r>
-              <a:t>• 담낭 절제 등 주요 수술력 기록</a:t>
-            </a:r>
-            <a:br/>
-            <a:r>
-              <a:t>• 개인별 알레르기 인자 전방위 분석</a:t>
-            </a:r>
-          </a:p>
-        </p:txBody>
-      </p:sp>
-      <p:sp>
-        <p:nvSpPr>
-          <p:cNvPr id="10" name="Rounded Rectangle 9"/>
+              <a:defRPr sz="950">
+                <a:solidFill>
+                  <a:srgbClr val="5F5750"/>
+                </a:solidFill>
+              </a:defRPr>
+            </a:pPr>
+            <a:r>
+              <a:t>두한족열 순환. 41℃ 온열탕 vs 38.5℃ 쿨링탕</a:t>
+            </a:r>
+          </a:p>
+        </p:txBody>
+      </p:sp>
+      <p:sp>
+        <p:nvSpPr>
+          <p:cNvPr id="10" name="Rectangle 9"/>
           <p:cNvSpPr/>
           <p:nvPr/>
         </p:nvSpPr>
         <p:spPr>
           <a:xfrm>
-            <a:off x="3429000" y="1280160"/>
-            <a:ext cx="2560320" cy="5120640"/>
-          </a:xfrm>
-          <a:prstGeom prst="roundRect">
+            <a:off x="5084064" y="1508760"/>
+            <a:ext cx="2057400" cy="2240280"/>
+          </a:xfrm>
+          <a:prstGeom prst="rect">
             <a:avLst/>
           </a:prstGeom>
           <a:solidFill>
             <a:srgbClr val="FFFFFF"/>
           </a:solidFill>
-          <a:ln w="15240">
+          <a:ln w="12700">
             <a:solidFill>
-              <a:srgbClr val="C9A876"/>
+              <a:srgbClr val="C29B62"/>
             </a:solidFill>
           </a:ln>
         </p:spPr>
@@ -7751,8 +6861,8 @@
         </p:nvSpPr>
         <p:spPr>
           <a:xfrm>
-            <a:off x="3566160" y="1463040"/>
-            <a:ext cx="2286000" cy="4754880"/>
+            <a:off x="5193792" y="1618488"/>
+            <a:ext cx="1828800" cy="2011680"/>
           </a:xfrm>
           <a:prstGeom prst="rect">
             <a:avLst/>
@@ -7766,76 +6876,71 @@
           <a:lstStyle/>
           <a:p>
             <a:pPr>
-              <a:defRPr sz="1300" b="1">
-                <a:solidFill>
-                  <a:srgbClr val="A37F48"/>
-                </a:solidFill>
-              </a:defRPr>
-            </a:pPr>
-            <a:r>
-              <a:t>STEP 02</a:t>
-            </a:r>
-          </a:p>
-          <a:p>
-            <a:pPr>
               <a:spcAft>
-                <a:spcPts val="1000"/>
+                <a:spcPts val="300"/>
               </a:spcAft>
-              <a:defRPr sz="1400" b="1">
-                <a:solidFill>
-                  <a:srgbClr val="241E19"/>
-                </a:solidFill>
-              </a:defRPr>
-            </a:pPr>
-            <a:r>
-              <a:t>인바디 &amp; 양자/뇌파(EEG)</a:t>
+              <a:defRPr sz="950" b="1">
+                <a:solidFill>
+                  <a:srgbClr val="94723E"/>
+                </a:solidFill>
+              </a:defRPr>
+            </a:pPr>
+            <a:r>
+              <a:t>THERAPIE 03</a:t>
+            </a:r>
+          </a:p>
+          <a:p>
+            <a:pPr>
+              <a:spcAft>
+                <a:spcPts val="500"/>
+              </a:spcAft>
+              <a:defRPr sz="1150" b="1">
+                <a:solidFill>
+                  <a:srgbClr val="26201C"/>
+                </a:solidFill>
+              </a:defRPr>
+            </a:pPr>
+            <a:r>
+              <a:t>은반지 비언어 의전</a:t>
             </a:r>
           </a:p>
           <a:p>
             <a:pPr>
               <a:lnSpc>
-                <a:spcPct val="130000"/>
+                <a:spcPct val="120000"/>
               </a:lnSpc>
-              <a:defRPr sz="1100">
-                <a:solidFill>
-                  <a:srgbClr val="52463C"/>
-                </a:solidFill>
-              </a:defRPr>
-            </a:pPr>
-            <a:r>
-              <a:t>• InBody 770 체수분율 &amp; 림프 정체</a:t>
-            </a:r>
-            <a:br/>
-            <a:r>
-              <a:t>• 장부 에너지 과부하/결핍 판독</a:t>
-            </a:r>
-            <a:br/>
-            <a:r>
-              <a:t>• High-Beta파 68% 뇌 피로 지수 측정</a:t>
-            </a:r>
-          </a:p>
-        </p:txBody>
-      </p:sp>
-      <p:sp>
-        <p:nvSpPr>
-          <p:cNvPr id="12" name="Rounded Rectangle 11"/>
+              <a:defRPr sz="950">
+                <a:solidFill>
+                  <a:srgbClr val="5F5750"/>
+                </a:solidFill>
+              </a:defRPr>
+            </a:pPr>
+            <a:r>
+              <a:t>경락별 은반지 착용 및 4대 컬러 가운 비언어 의전</a:t>
+            </a:r>
+          </a:p>
+        </p:txBody>
+      </p:sp>
+      <p:sp>
+        <p:nvSpPr>
+          <p:cNvPr id="12" name="Rectangle 11"/>
           <p:cNvSpPr/>
           <p:nvPr/>
         </p:nvSpPr>
         <p:spPr>
           <a:xfrm>
-            <a:off x="6126480" y="1280160"/>
-            <a:ext cx="2560320" cy="5120640"/>
-          </a:xfrm>
-          <a:prstGeom prst="roundRect">
+            <a:off x="7260336" y="1508760"/>
+            <a:ext cx="2057400" cy="2240280"/>
+          </a:xfrm>
+          <a:prstGeom prst="rect">
             <a:avLst/>
           </a:prstGeom>
           <a:solidFill>
             <a:srgbClr val="FFFFFF"/>
           </a:solidFill>
-          <a:ln w="15240">
+          <a:ln w="12700">
             <a:solidFill>
-              <a:srgbClr val="C9A876"/>
+              <a:srgbClr val="C29B62"/>
             </a:solidFill>
           </a:ln>
         </p:spPr>
@@ -7869,8 +6974,8 @@
         </p:nvSpPr>
         <p:spPr>
           <a:xfrm>
-            <a:off x="6263640" y="1463040"/>
-            <a:ext cx="2286000" cy="4754880"/>
+            <a:off x="7370064" y="1618488"/>
+            <a:ext cx="1828800" cy="2011680"/>
           </a:xfrm>
           <a:prstGeom prst="rect">
             <a:avLst/>
@@ -7884,76 +6989,71 @@
           <a:lstStyle/>
           <a:p>
             <a:pPr>
-              <a:defRPr sz="1300" b="1">
-                <a:solidFill>
-                  <a:srgbClr val="A37F48"/>
-                </a:solidFill>
-              </a:defRPr>
-            </a:pPr>
-            <a:r>
-              <a:t>STEP 03</a:t>
-            </a:r>
-          </a:p>
-          <a:p>
-            <a:pPr>
               <a:spcAft>
-                <a:spcPts val="1000"/>
+                <a:spcPts val="300"/>
               </a:spcAft>
-              <a:defRPr sz="1400" b="1">
-                <a:solidFill>
-                  <a:srgbClr val="241E19"/>
-                </a:solidFill>
-              </a:defRPr>
-            </a:pPr>
-            <a:r>
-              <a:t>산화질소(NO) 관리</a:t>
+              <a:defRPr sz="950" b="1">
+                <a:solidFill>
+                  <a:srgbClr val="94723E"/>
+                </a:solidFill>
+              </a:defRPr>
+            </a:pPr>
+            <a:r>
+              <a:t>THERAPIE 04</a:t>
+            </a:r>
+          </a:p>
+          <a:p>
+            <a:pPr>
+              <a:spcAft>
+                <a:spcPts val="500"/>
+              </a:spcAft>
+              <a:defRPr sz="1150" b="1">
+                <a:solidFill>
+                  <a:srgbClr val="26201C"/>
+                </a:solidFill>
+              </a:defRPr>
+            </a:pPr>
+            <a:r>
+              <a:t>12h 단식 &amp; 미역국</a:t>
             </a:r>
           </a:p>
           <a:p>
             <a:pPr>
               <a:lnSpc>
-                <a:spcPct val="130000"/>
+                <a:spcPct val="120000"/>
               </a:lnSpc>
-              <a:defRPr sz="1100">
-                <a:solidFill>
-                  <a:srgbClr val="52463C"/>
-                </a:solidFill>
-              </a:defRPr>
-            </a:pPr>
-            <a:r>
-              <a:t>• 타액 NO 산화질소 스트립 판독</a:t>
-            </a:r>
-            <a:br/>
-            <a:r>
-              <a:t>• 혈관 탄성도 측정 및 결핍 진단</a:t>
-            </a:r>
-            <a:br/>
-            <a:r>
-              <a:t>• 1일 1.5L 음용 &amp; 나노 미스트 처방</a:t>
-            </a:r>
-          </a:p>
-        </p:txBody>
-      </p:sp>
-      <p:sp>
-        <p:nvSpPr>
-          <p:cNvPr id="14" name="Rounded Rectangle 13"/>
+              <a:defRPr sz="950">
+                <a:solidFill>
+                  <a:srgbClr val="5F5750"/>
+                </a:solidFill>
+              </a:defRPr>
+            </a:pPr>
+            <a:r>
+              <a:t>18:00~06:00 자가포식 해독 &amp; 4대 맞춤 미역국</a:t>
+            </a:r>
+          </a:p>
+        </p:txBody>
+      </p:sp>
+      <p:sp>
+        <p:nvSpPr>
+          <p:cNvPr id="14" name="Rectangle 13"/>
           <p:cNvSpPr/>
           <p:nvPr/>
         </p:nvSpPr>
         <p:spPr>
           <a:xfrm>
-            <a:off x="8823960" y="1280160"/>
-            <a:ext cx="2560320" cy="5120640"/>
-          </a:xfrm>
-          <a:prstGeom prst="roundRect">
+            <a:off x="9436608" y="1508760"/>
+            <a:ext cx="2057400" cy="2240280"/>
+          </a:xfrm>
+          <a:prstGeom prst="rect">
             <a:avLst/>
           </a:prstGeom>
           <a:solidFill>
             <a:srgbClr val="FFFFFF"/>
           </a:solidFill>
-          <a:ln w="15240">
+          <a:ln w="12700">
             <a:solidFill>
-              <a:srgbClr val="C9A876"/>
+              <a:srgbClr val="C29B62"/>
             </a:solidFill>
           </a:ln>
         </p:spPr>
@@ -7987,8 +7087,8 @@
         </p:nvSpPr>
         <p:spPr>
           <a:xfrm>
-            <a:off x="8961120" y="1463040"/>
-            <a:ext cx="2286000" cy="4754880"/>
+            <a:off x="9546336" y="1618488"/>
+            <a:ext cx="1828800" cy="2011680"/>
           </a:xfrm>
           <a:prstGeom prst="rect">
             <a:avLst/>
@@ -8002,52 +7102,612 @@
           <a:lstStyle/>
           <a:p>
             <a:pPr>
-              <a:defRPr sz="1300" b="1">
-                <a:solidFill>
-                  <a:srgbClr val="A37F48"/>
-                </a:solidFill>
-              </a:defRPr>
-            </a:pPr>
-            <a:r>
-              <a:t>STEP 04</a:t>
-            </a:r>
-          </a:p>
-          <a:p>
-            <a:pPr>
               <a:spcAft>
-                <a:spcPts val="1000"/>
+                <a:spcPts val="300"/>
               </a:spcAft>
-              <a:defRPr sz="1400" b="1">
-                <a:solidFill>
-                  <a:srgbClr val="241E19"/>
-                </a:solidFill>
-              </a:defRPr>
-            </a:pPr>
-            <a:r>
-              <a:t>사상체질 최종 확정</a:t>
+              <a:defRPr sz="950" b="1">
+                <a:solidFill>
+                  <a:srgbClr val="94723E"/>
+                </a:solidFill>
+              </a:defRPr>
+            </a:pPr>
+            <a:r>
+              <a:t>THERAPIE 05</a:t>
+            </a:r>
+          </a:p>
+          <a:p>
+            <a:pPr>
+              <a:spcAft>
+                <a:spcPts val="500"/>
+              </a:spcAft>
+              <a:defRPr sz="1150" b="1">
+                <a:solidFill>
+                  <a:srgbClr val="26201C"/>
+                </a:solidFill>
+              </a:defRPr>
+            </a:pPr>
+            <a:r>
+              <a:t>80분 이원화 바디</a:t>
             </a:r>
           </a:p>
           <a:p>
             <a:pPr>
               <a:lnSpc>
-                <a:spcPct val="130000"/>
+                <a:spcPct val="120000"/>
               </a:lnSpc>
-              <a:defRPr sz="1100">
-                <a:solidFill>
-                  <a:srgbClr val="52463C"/>
-                </a:solidFill>
-              </a:defRPr>
-            </a:pPr>
-            <a:r>
-              <a:t>• 태음/소양/소음/태양 장부 확정</a:t>
-            </a:r>
-            <a:br/>
-            <a:r>
-              <a:t>• 1:1 맞춤 VIP 웹 처방전 발행</a:t>
-            </a:r>
-            <a:br/>
-            <a:r>
-              <a:t>• 은반지 착용 및 4대 컬러 가운 배정</a:t>
+              <a:defRPr sz="950">
+                <a:solidFill>
+                  <a:srgbClr val="5F5750"/>
+                </a:solidFill>
+              </a:defRPr>
+            </a:pPr>
+            <a:r>
+              <a:t>한의 수기 지압(30분) + 순수 에센셜 오일(50분)</a:t>
+            </a:r>
+          </a:p>
+        </p:txBody>
+      </p:sp>
+      <p:sp>
+        <p:nvSpPr>
+          <p:cNvPr id="16" name="Rectangle 15"/>
+          <p:cNvSpPr/>
+          <p:nvPr/>
+        </p:nvSpPr>
+        <p:spPr>
+          <a:xfrm>
+            <a:off x="731520" y="3931920"/>
+            <a:ext cx="2057400" cy="2240280"/>
+          </a:xfrm>
+          <a:prstGeom prst="rect">
+            <a:avLst/>
+          </a:prstGeom>
+          <a:solidFill>
+            <a:srgbClr val="FFFFFF"/>
+          </a:solidFill>
+          <a:ln w="12700">
+            <a:solidFill>
+              <a:srgbClr val="C29B62"/>
+            </a:solidFill>
+          </a:ln>
+        </p:spPr>
+        <p:style>
+          <a:lnRef idx="1">
+            <a:schemeClr val="accent1"/>
+          </a:lnRef>
+          <a:fillRef idx="3">
+            <a:schemeClr val="accent1"/>
+          </a:fillRef>
+          <a:effectRef idx="2">
+            <a:schemeClr val="accent1"/>
+          </a:effectRef>
+          <a:fontRef idx="minor">
+            <a:schemeClr val="lt1"/>
+          </a:fontRef>
+        </p:style>
+        <p:txBody>
+          <a:bodyPr rtlCol="0" anchor="ctr"/>
+          <a:lstStyle/>
+          <a:p>
+            <a:pPr algn="ctr"/>
+          </a:p>
+        </p:txBody>
+      </p:sp>
+      <p:sp>
+        <p:nvSpPr>
+          <p:cNvPr id="17" name="TextBox 16"/>
+          <p:cNvSpPr txBox="1"/>
+          <p:nvPr/>
+        </p:nvSpPr>
+        <p:spPr>
+          <a:xfrm>
+            <a:off x="841248" y="4041648"/>
+            <a:ext cx="1828800" cy="2011680"/>
+          </a:xfrm>
+          <a:prstGeom prst="rect">
+            <a:avLst/>
+          </a:prstGeom>
+          <a:noFill/>
+        </p:spPr>
+        <p:txBody>
+          <a:bodyPr wrap="square">
+            <a:spAutoFit/>
+          </a:bodyPr>
+          <a:lstStyle/>
+          <a:p>
+            <a:pPr>
+              <a:spcAft>
+                <a:spcPts val="300"/>
+              </a:spcAft>
+              <a:defRPr sz="950" b="1">
+                <a:solidFill>
+                  <a:srgbClr val="94723E"/>
+                </a:solidFill>
+              </a:defRPr>
+            </a:pPr>
+            <a:r>
+              <a:t>THERAPIE 06</a:t>
+            </a:r>
+          </a:p>
+          <a:p>
+            <a:pPr>
+              <a:spcAft>
+                <a:spcPts val="500"/>
+              </a:spcAft>
+              <a:defRPr sz="1150" b="1">
+                <a:solidFill>
+                  <a:srgbClr val="26201C"/>
+                </a:solidFill>
+              </a:defRPr>
+            </a:pPr>
+            <a:r>
+              <a:t>티 &amp; 30분 침묵 명상</a:t>
+            </a:r>
+          </a:p>
+          <a:p>
+            <a:pPr>
+              <a:lnSpc>
+                <a:spcPct val="120000"/>
+              </a:lnSpc>
+              <a:defRPr sz="950">
+                <a:solidFill>
+                  <a:srgbClr val="5F5750"/>
+                </a:solidFill>
+              </a:defRPr>
+            </a:pPr>
+            <a:r>
+              <a:t>장인 도자기 다기 시연 &amp; 무언 침묵 명상(부교감 40%)</a:t>
+            </a:r>
+          </a:p>
+        </p:txBody>
+      </p:sp>
+      <p:sp>
+        <p:nvSpPr>
+          <p:cNvPr id="18" name="Rectangle 17"/>
+          <p:cNvSpPr/>
+          <p:nvPr/>
+        </p:nvSpPr>
+        <p:spPr>
+          <a:xfrm>
+            <a:off x="2907791" y="3931920"/>
+            <a:ext cx="2057400" cy="2240280"/>
+          </a:xfrm>
+          <a:prstGeom prst="rect">
+            <a:avLst/>
+          </a:prstGeom>
+          <a:solidFill>
+            <a:srgbClr val="FFFFFF"/>
+          </a:solidFill>
+          <a:ln w="12700">
+            <a:solidFill>
+              <a:srgbClr val="C29B62"/>
+            </a:solidFill>
+          </a:ln>
+        </p:spPr>
+        <p:style>
+          <a:lnRef idx="1">
+            <a:schemeClr val="accent1"/>
+          </a:lnRef>
+          <a:fillRef idx="3">
+            <a:schemeClr val="accent1"/>
+          </a:fillRef>
+          <a:effectRef idx="2">
+            <a:schemeClr val="accent1"/>
+          </a:effectRef>
+          <a:fontRef idx="minor">
+            <a:schemeClr val="lt1"/>
+          </a:fontRef>
+        </p:style>
+        <p:txBody>
+          <a:bodyPr rtlCol="0" anchor="ctr"/>
+          <a:lstStyle/>
+          <a:p>
+            <a:pPr algn="ctr"/>
+          </a:p>
+        </p:txBody>
+      </p:sp>
+      <p:sp>
+        <p:nvSpPr>
+          <p:cNvPr id="19" name="TextBox 18"/>
+          <p:cNvSpPr txBox="1"/>
+          <p:nvPr/>
+        </p:nvSpPr>
+        <p:spPr>
+          <a:xfrm>
+            <a:off x="3017519" y="4041648"/>
+            <a:ext cx="1828800" cy="2011680"/>
+          </a:xfrm>
+          <a:prstGeom prst="rect">
+            <a:avLst/>
+          </a:prstGeom>
+          <a:noFill/>
+        </p:spPr>
+        <p:txBody>
+          <a:bodyPr wrap="square">
+            <a:spAutoFit/>
+          </a:bodyPr>
+          <a:lstStyle/>
+          <a:p>
+            <a:pPr>
+              <a:spcAft>
+                <a:spcPts val="300"/>
+              </a:spcAft>
+              <a:defRPr sz="950" b="1">
+                <a:solidFill>
+                  <a:srgbClr val="94723E"/>
+                </a:solidFill>
+              </a:defRPr>
+            </a:pPr>
+            <a:r>
+              <a:t>THERAPIE 07</a:t>
+            </a:r>
+          </a:p>
+          <a:p>
+            <a:pPr>
+              <a:spcAft>
+                <a:spcPts val="500"/>
+              </a:spcAft>
+              <a:defRPr sz="1150" b="1">
+                <a:solidFill>
+                  <a:srgbClr val="26201C"/>
+                </a:solidFill>
+              </a:defRPr>
+            </a:pPr>
+            <a:r>
+              <a:t>수(水) 산화질소 테라피</a:t>
+            </a:r>
+          </a:p>
+          <a:p>
+            <a:pPr>
+              <a:lnSpc>
+                <a:spcPct val="120000"/>
+              </a:lnSpc>
+              <a:defRPr sz="950">
+                <a:solidFill>
+                  <a:srgbClr val="5F5750"/>
+                </a:solidFill>
+              </a:defRPr>
+            </a:pPr>
+            <a:r>
+              <a:t>NO 수 1.5L 음용 및 15분 전신 나노 미스트 챔버</a:t>
+            </a:r>
+          </a:p>
+        </p:txBody>
+      </p:sp>
+      <p:sp>
+        <p:nvSpPr>
+          <p:cNvPr id="20" name="Rectangle 19"/>
+          <p:cNvSpPr/>
+          <p:nvPr/>
+        </p:nvSpPr>
+        <p:spPr>
+          <a:xfrm>
+            <a:off x="5084064" y="3931920"/>
+            <a:ext cx="2057400" cy="2240280"/>
+          </a:xfrm>
+          <a:prstGeom prst="rect">
+            <a:avLst/>
+          </a:prstGeom>
+          <a:solidFill>
+            <a:srgbClr val="FFFFFF"/>
+          </a:solidFill>
+          <a:ln w="12700">
+            <a:solidFill>
+              <a:srgbClr val="C29B62"/>
+            </a:solidFill>
+          </a:ln>
+        </p:spPr>
+        <p:style>
+          <a:lnRef idx="1">
+            <a:schemeClr val="accent1"/>
+          </a:lnRef>
+          <a:fillRef idx="3">
+            <a:schemeClr val="accent1"/>
+          </a:fillRef>
+          <a:effectRef idx="2">
+            <a:schemeClr val="accent1"/>
+          </a:effectRef>
+          <a:fontRef idx="minor">
+            <a:schemeClr val="lt1"/>
+          </a:fontRef>
+        </p:style>
+        <p:txBody>
+          <a:bodyPr rtlCol="0" anchor="ctr"/>
+          <a:lstStyle/>
+          <a:p>
+            <a:pPr algn="ctr"/>
+          </a:p>
+        </p:txBody>
+      </p:sp>
+      <p:sp>
+        <p:nvSpPr>
+          <p:cNvPr id="21" name="TextBox 20"/>
+          <p:cNvSpPr txBox="1"/>
+          <p:nvPr/>
+        </p:nvSpPr>
+        <p:spPr>
+          <a:xfrm>
+            <a:off x="5193792" y="4041648"/>
+            <a:ext cx="1828800" cy="2011680"/>
+          </a:xfrm>
+          <a:prstGeom prst="rect">
+            <a:avLst/>
+          </a:prstGeom>
+          <a:noFill/>
+        </p:spPr>
+        <p:txBody>
+          <a:bodyPr wrap="square">
+            <a:spAutoFit/>
+          </a:bodyPr>
+          <a:lstStyle/>
+          <a:p>
+            <a:pPr>
+              <a:spcAft>
+                <a:spcPts val="300"/>
+              </a:spcAft>
+              <a:defRPr sz="950" b="1">
+                <a:solidFill>
+                  <a:srgbClr val="94723E"/>
+                </a:solidFill>
+              </a:defRPr>
+            </a:pPr>
+            <a:r>
+              <a:t>THERAPIE 08</a:t>
+            </a:r>
+          </a:p>
+          <a:p>
+            <a:pPr>
+              <a:spcAft>
+                <a:spcPts val="500"/>
+              </a:spcAft>
+              <a:defRPr sz="1150" b="1">
+                <a:solidFill>
+                  <a:srgbClr val="26201C"/>
+                </a:solidFill>
+              </a:defRPr>
+            </a:pPr>
+            <a:r>
+              <a:t>온열 테라피 (체온 1℃↑)</a:t>
+            </a:r>
+          </a:p>
+          <a:p>
+            <a:pPr>
+              <a:lnSpc>
+                <a:spcPct val="120000"/>
+              </a:lnSpc>
+              <a:defRPr sz="950">
+                <a:solidFill>
+                  <a:srgbClr val="5F5750"/>
+                </a:solidFill>
+              </a:defRPr>
+            </a:pPr>
+            <a:r>
+              <a:t>42~45℃ 1시간 원적외선 챔버 (면역 NK세포 5배)</a:t>
+            </a:r>
+          </a:p>
+        </p:txBody>
+      </p:sp>
+      <p:sp>
+        <p:nvSpPr>
+          <p:cNvPr id="22" name="Rectangle 21"/>
+          <p:cNvSpPr/>
+          <p:nvPr/>
+        </p:nvSpPr>
+        <p:spPr>
+          <a:xfrm>
+            <a:off x="7260336" y="3931920"/>
+            <a:ext cx="2057400" cy="2240280"/>
+          </a:xfrm>
+          <a:prstGeom prst="rect">
+            <a:avLst/>
+          </a:prstGeom>
+          <a:solidFill>
+            <a:srgbClr val="FFFFFF"/>
+          </a:solidFill>
+          <a:ln w="12700">
+            <a:solidFill>
+              <a:srgbClr val="C29B62"/>
+            </a:solidFill>
+          </a:ln>
+        </p:spPr>
+        <p:style>
+          <a:lnRef idx="1">
+            <a:schemeClr val="accent1"/>
+          </a:lnRef>
+          <a:fillRef idx="3">
+            <a:schemeClr val="accent1"/>
+          </a:fillRef>
+          <a:effectRef idx="2">
+            <a:schemeClr val="accent1"/>
+          </a:effectRef>
+          <a:fontRef idx="minor">
+            <a:schemeClr val="lt1"/>
+          </a:fontRef>
+        </p:style>
+        <p:txBody>
+          <a:bodyPr rtlCol="0" anchor="ctr"/>
+          <a:lstStyle/>
+          <a:p>
+            <a:pPr algn="ctr"/>
+          </a:p>
+        </p:txBody>
+      </p:sp>
+      <p:sp>
+        <p:nvSpPr>
+          <p:cNvPr id="23" name="TextBox 22"/>
+          <p:cNvSpPr txBox="1"/>
+          <p:nvPr/>
+        </p:nvSpPr>
+        <p:spPr>
+          <a:xfrm>
+            <a:off x="7370064" y="4041648"/>
+            <a:ext cx="1828800" cy="2011680"/>
+          </a:xfrm>
+          <a:prstGeom prst="rect">
+            <a:avLst/>
+          </a:prstGeom>
+          <a:noFill/>
+        </p:spPr>
+        <p:txBody>
+          <a:bodyPr wrap="square">
+            <a:spAutoFit/>
+          </a:bodyPr>
+          <a:lstStyle/>
+          <a:p>
+            <a:pPr>
+              <a:spcAft>
+                <a:spcPts val="300"/>
+              </a:spcAft>
+              <a:defRPr sz="950" b="1">
+                <a:solidFill>
+                  <a:srgbClr val="94723E"/>
+                </a:solidFill>
+              </a:defRPr>
+            </a:pPr>
+            <a:r>
+              <a:t>THERAPIE 09</a:t>
+            </a:r>
+          </a:p>
+          <a:p>
+            <a:pPr>
+              <a:spcAft>
+                <a:spcPts val="500"/>
+              </a:spcAft>
+              <a:defRPr sz="1150" b="1">
+                <a:solidFill>
+                  <a:srgbClr val="26201C"/>
+                </a:solidFill>
+              </a:defRPr>
+            </a:pPr>
+            <a:r>
+              <a:t>전통 기체조: 태극선법</a:t>
+            </a:r>
+          </a:p>
+          <a:p>
+            <a:pPr>
+              <a:lnSpc>
+                <a:spcPct val="120000"/>
+              </a:lnSpc>
+              <a:defRPr sz="950">
+                <a:solidFill>
+                  <a:srgbClr val="5F5750"/>
+                </a:solidFill>
+              </a:defRPr>
+            </a:pPr>
+            <a:r>
+              <a:t>단전 호흡 탁기 배출 &amp; 태극선법 8초식 동적 기혈 순환</a:t>
+            </a:r>
+          </a:p>
+        </p:txBody>
+      </p:sp>
+      <p:sp>
+        <p:nvSpPr>
+          <p:cNvPr id="24" name="Rectangle 23"/>
+          <p:cNvSpPr/>
+          <p:nvPr/>
+        </p:nvSpPr>
+        <p:spPr>
+          <a:xfrm>
+            <a:off x="9436608" y="3931920"/>
+            <a:ext cx="2057400" cy="2240280"/>
+          </a:xfrm>
+          <a:prstGeom prst="rect">
+            <a:avLst/>
+          </a:prstGeom>
+          <a:solidFill>
+            <a:srgbClr val="FFFFFF"/>
+          </a:solidFill>
+          <a:ln w="12700">
+            <a:solidFill>
+              <a:srgbClr val="C29B62"/>
+            </a:solidFill>
+          </a:ln>
+        </p:spPr>
+        <p:style>
+          <a:lnRef idx="1">
+            <a:schemeClr val="accent1"/>
+          </a:lnRef>
+          <a:fillRef idx="3">
+            <a:schemeClr val="accent1"/>
+          </a:fillRef>
+          <a:effectRef idx="2">
+            <a:schemeClr val="accent1"/>
+          </a:effectRef>
+          <a:fontRef idx="minor">
+            <a:schemeClr val="lt1"/>
+          </a:fontRef>
+        </p:style>
+        <p:txBody>
+          <a:bodyPr rtlCol="0" anchor="ctr"/>
+          <a:lstStyle/>
+          <a:p>
+            <a:pPr algn="ctr"/>
+          </a:p>
+        </p:txBody>
+      </p:sp>
+      <p:sp>
+        <p:nvSpPr>
+          <p:cNvPr id="25" name="TextBox 24"/>
+          <p:cNvSpPr txBox="1"/>
+          <p:nvPr/>
+        </p:nvSpPr>
+        <p:spPr>
+          <a:xfrm>
+            <a:off x="9546336" y="4041648"/>
+            <a:ext cx="1828800" cy="2011680"/>
+          </a:xfrm>
+          <a:prstGeom prst="rect">
+            <a:avLst/>
+          </a:prstGeom>
+          <a:noFill/>
+        </p:spPr>
+        <p:txBody>
+          <a:bodyPr wrap="square">
+            <a:spAutoFit/>
+          </a:bodyPr>
+          <a:lstStyle/>
+          <a:p>
+            <a:pPr>
+              <a:spcAft>
+                <a:spcPts val="300"/>
+              </a:spcAft>
+              <a:defRPr sz="950" b="1">
+                <a:solidFill>
+                  <a:srgbClr val="94723E"/>
+                </a:solidFill>
+              </a:defRPr>
+            </a:pPr>
+            <a:r>
+              <a:t>THERAPIE 10</a:t>
+            </a:r>
+          </a:p>
+          <a:p>
+            <a:pPr>
+              <a:spcAft>
+                <a:spcPts val="500"/>
+              </a:spcAft>
+              <a:defRPr sz="1150" b="1">
+                <a:solidFill>
+                  <a:srgbClr val="26201C"/>
+                </a:solidFill>
+              </a:defRPr>
+            </a:pPr>
+            <a:r>
+              <a:t>멘탈: 정통 고요 명상</a:t>
+            </a:r>
+          </a:p>
+          <a:p>
+            <a:pPr>
+              <a:lnSpc>
+                <a:spcPct val="120000"/>
+              </a:lnSpc>
+              <a:defRPr sz="950">
+                <a:solidFill>
+                  <a:srgbClr val="5F5750"/>
+                </a:solidFill>
+              </a:defRPr>
+            </a:pPr>
+            <a:r>
+              <a:t>사찰/선도 침묵 명상으로 뇌 피로도 70% 감소</a:t>
             </a:r>
           </a:p>
         </p:txBody>
@@ -8085,7 +7745,7 @@
             <a:avLst/>
           </a:prstGeom>
           <a:solidFill>
-            <a:srgbClr val="FDFBF7"/>
+            <a:srgbClr val="FAF8F3"/>
           </a:solidFill>
           <a:ln>
             <a:noFill/>
@@ -8115,20 +7775,90 @@
       </p:sp>
       <p:sp>
         <p:nvSpPr>
-          <p:cNvPr id="3" name="Rectangle 2"/>
+          <p:cNvPr id="3" name="TextBox 2"/>
+          <p:cNvSpPr txBox="1"/>
+          <p:nvPr/>
+        </p:nvSpPr>
+        <p:spPr>
+          <a:xfrm>
+            <a:off x="731520" y="365760"/>
+            <a:ext cx="10728655" cy="320040"/>
+          </a:xfrm>
+          <a:prstGeom prst="rect">
+            <a:avLst/>
+          </a:prstGeom>
+          <a:noFill/>
+        </p:spPr>
+        <p:txBody>
+          <a:bodyPr wrap="none">
+            <a:spAutoFit/>
+          </a:bodyPr>
+          <a:lstStyle/>
+          <a:p>
+            <a:pPr>
+              <a:defRPr sz="950" b="1">
+                <a:solidFill>
+                  <a:srgbClr val="94723E"/>
+                </a:solidFill>
+              </a:defRPr>
+            </a:pPr>
+            <a:r>
+              <a:t>EXPERTS &amp; TEAM</a:t>
+            </a:r>
+          </a:p>
+        </p:txBody>
+      </p:sp>
+      <p:sp>
+        <p:nvSpPr>
+          <p:cNvPr id="4" name="TextBox 3"/>
+          <p:cNvSpPr txBox="1"/>
+          <p:nvPr/>
+        </p:nvSpPr>
+        <p:spPr>
+          <a:xfrm>
+            <a:off x="731520" y="640080"/>
+            <a:ext cx="10728655" cy="640080"/>
+          </a:xfrm>
+          <a:prstGeom prst="rect">
+            <a:avLst/>
+          </a:prstGeom>
+          <a:noFill/>
+        </p:spPr>
+        <p:txBody>
+          <a:bodyPr wrap="none">
+            <a:spAutoFit/>
+          </a:bodyPr>
+          <a:lstStyle/>
+          <a:p>
+            <a:pPr>
+              <a:defRPr sz="2100" b="1">
+                <a:solidFill>
+                  <a:srgbClr val="26201C"/>
+                </a:solidFill>
+              </a:defRPr>
+            </a:pPr>
+            <a:r>
+              <a:t>Experten &amp; Leitung : 총괄 연구진 및 디렉터 프로필</a:t>
+            </a:r>
+          </a:p>
+        </p:txBody>
+      </p:sp>
+      <p:sp>
+        <p:nvSpPr>
+          <p:cNvPr id="5" name="Rectangle 4"/>
           <p:cNvSpPr/>
           <p:nvPr/>
         </p:nvSpPr>
         <p:spPr>
           <a:xfrm>
-            <a:off x="0" y="0"/>
-            <a:ext cx="12191695" cy="411480"/>
+            <a:off x="731520" y="1280160"/>
+            <a:ext cx="2286000" cy="22860"/>
           </a:xfrm>
           <a:prstGeom prst="rect">
             <a:avLst/>
           </a:prstGeom>
           <a:solidFill>
-            <a:srgbClr val="241E19"/>
+            <a:srgbClr val="C29B62"/>
           </a:solidFill>
           <a:ln>
             <a:noFill/>
@@ -8158,59 +7888,24 @@
       </p:sp>
       <p:sp>
         <p:nvSpPr>
-          <p:cNvPr id="4" name="TextBox 3"/>
-          <p:cNvSpPr txBox="1"/>
-          <p:nvPr/>
-        </p:nvSpPr>
-        <p:spPr>
-          <a:xfrm>
-            <a:off x="731520" y="73152"/>
-            <a:ext cx="10728655" cy="274320"/>
-          </a:xfrm>
-          <a:prstGeom prst="rect">
-            <a:avLst/>
-          </a:prstGeom>
-          <a:noFill/>
-        </p:spPr>
-        <p:txBody>
-          <a:bodyPr wrap="none">
-            <a:spAutoFit/>
-          </a:bodyPr>
-          <a:lstStyle/>
-          <a:p>
-            <a:pPr>
-              <a:defRPr sz="900" b="1">
-                <a:solidFill>
-                  <a:srgbClr val="C8B9A0"/>
-                </a:solidFill>
-              </a:defRPr>
-            </a:pPr>
-            <a:r>
-              <a:t>SASANG SPA BOUTIQUE  |  K-WELLNESS HERITAGE &amp; BIOTECH  |  VIP DIRECTORS: 010-4728-9917</a:t>
-            </a:r>
-          </a:p>
-        </p:txBody>
-      </p:sp>
-      <p:sp>
-        <p:nvSpPr>
-          <p:cNvPr id="5" name="Rounded Rectangle 4"/>
+          <p:cNvPr id="6" name="Rectangle 5"/>
           <p:cNvSpPr/>
           <p:nvPr/>
         </p:nvSpPr>
         <p:spPr>
           <a:xfrm>
-            <a:off x="731520" y="621792"/>
-            <a:ext cx="2011680" cy="256032"/>
-          </a:xfrm>
-          <a:prstGeom prst="roundRect">
+            <a:off x="731520" y="1508760"/>
+            <a:ext cx="5120640" cy="4846320"/>
+          </a:xfrm>
+          <a:prstGeom prst="rect">
             <a:avLst/>
           </a:prstGeom>
           <a:solidFill>
-            <a:srgbClr val="F8F5EE"/>
+            <a:srgbClr val="FFFFFF"/>
           </a:solidFill>
           <a:ln w="12700">
             <a:solidFill>
-              <a:srgbClr val="C9A876"/>
+              <a:srgbClr val="C29B62"/>
             </a:solidFill>
           </a:ln>
         </p:spPr>
@@ -8238,14 +7933,14 @@
       </p:sp>
       <p:sp>
         <p:nvSpPr>
-          <p:cNvPr id="6" name="TextBox 5"/>
+          <p:cNvPr id="7" name="TextBox 6"/>
           <p:cNvSpPr txBox="1"/>
           <p:nvPr/>
         </p:nvSpPr>
         <p:spPr>
           <a:xfrm>
-            <a:off x="777240" y="603504"/>
-            <a:ext cx="1920240" cy="274320"/>
+            <a:off x="1005840" y="1737360"/>
+            <a:ext cx="4572000" cy="4389120"/>
           </a:xfrm>
           <a:prstGeom prst="rect">
             <a:avLst/>
@@ -8253,79 +7948,95 @@
           <a:noFill/>
         </p:spPr>
         <p:txBody>
-          <a:bodyPr wrap="none">
+          <a:bodyPr wrap="square">
             <a:spAutoFit/>
           </a:bodyPr>
           <a:lstStyle/>
           <a:p>
-            <a:pPr algn="ctr">
-              <a:defRPr sz="900" b="1">
-                <a:solidFill>
-                  <a:srgbClr val="A37F48"/>
-                </a:solidFill>
-              </a:defRPr>
-            </a:pPr>
-            <a:r>
-              <a:t>EXCLUSIVE RETREATS</a:t>
-            </a:r>
-          </a:p>
-        </p:txBody>
-      </p:sp>
-      <p:sp>
-        <p:nvSpPr>
-          <p:cNvPr id="7" name="TextBox 6"/>
-          <p:cNvSpPr txBox="1"/>
-          <p:nvPr/>
-        </p:nvSpPr>
-        <p:spPr>
-          <a:xfrm>
-            <a:off x="2926080" y="530352"/>
-            <a:ext cx="8503920" cy="548640"/>
-          </a:xfrm>
-          <a:prstGeom prst="rect">
-            <a:avLst/>
-          </a:prstGeom>
-          <a:noFill/>
-        </p:spPr>
-        <p:txBody>
-          <a:bodyPr wrap="none">
-            <a:spAutoFit/>
-          </a:bodyPr>
-          <a:lstStyle/>
-          <a:p>
-            <a:pPr>
-              <a:defRPr sz="2000" b="1">
-                <a:solidFill>
-                  <a:srgbClr val="241E19"/>
-                </a:solidFill>
-              </a:defRPr>
-            </a:pPr>
-            <a:r>
-              <a:t>VIP 맞춤형 4대 체류 프로그램 (Stay Programs)</a:t>
-            </a:r>
-          </a:p>
-        </p:txBody>
-      </p:sp>
-      <p:sp>
-        <p:nvSpPr>
-          <p:cNvPr id="8" name="Rounded Rectangle 7"/>
+            <a:pPr>
+              <a:defRPr sz="1100" b="1">
+                <a:solidFill>
+                  <a:srgbClr val="94723E"/>
+                </a:solidFill>
+              </a:defRPr>
+            </a:pPr>
+            <a:r>
+              <a:t>WELLNESS MASTER DIRECTOR</a:t>
+            </a:r>
+          </a:p>
+          <a:p>
+            <a:pPr>
+              <a:spcAft>
+                <a:spcPts val="1000"/>
+              </a:spcAft>
+              <a:defRPr sz="2400" b="1">
+                <a:solidFill>
+                  <a:srgbClr val="26201C"/>
+                </a:solidFill>
+              </a:defRPr>
+            </a:pPr>
+            <a:r>
+              <a:t>유정근 (Ryu Jean)</a:t>
+            </a:r>
+          </a:p>
+          <a:p>
+            <a:pPr>
+              <a:lnSpc>
+                <a:spcPct val="130000"/>
+              </a:lnSpc>
+              <a:defRPr sz="1200">
+                <a:solidFill>
+                  <a:srgbClr val="5F5750"/>
+                </a:solidFill>
+              </a:defRPr>
+            </a:pPr>
+            <a:r>
+              <a:t>• 웰니스 총괄 디렉터 / 전담 테라피스트</a:t>
+            </a:r>
+            <a:br/>
+            <a:r>
+              <a:t>• 사상체질 10대 시그니처 테라피 의전 설계</a:t>
+            </a:r>
+            <a:br/>
+            <a:r>
+              <a:t>• 글로벌 호텔/리조트 파트너십 및 브랜드 총괄</a:t>
+            </a:r>
+            <a:br/>
+            <a:r>
+              <a:t>• 1:1 VIP 프라이빗 컨설팅 및 트리트먼트 마스터</a:t>
+            </a:r>
+            <a:br/>
+            <a:br/>
+            <a:r>
+              <a:t>📞 연락처: 010-4728-9917</a:t>
+            </a:r>
+            <a:br/>
+            <a:r>
+              <a:t>✉️ 이메일: ryujean77@gmail.com</a:t>
+            </a:r>
+          </a:p>
+        </p:txBody>
+      </p:sp>
+      <p:sp>
+        <p:nvSpPr>
+          <p:cNvPr id="8" name="Rectangle 7"/>
           <p:cNvSpPr/>
           <p:nvPr/>
         </p:nvSpPr>
         <p:spPr>
           <a:xfrm>
-            <a:off x="731520" y="1280160"/>
-            <a:ext cx="5120640" cy="2377440"/>
-          </a:xfrm>
-          <a:prstGeom prst="roundRect">
+            <a:off x="6217920" y="1508760"/>
+            <a:ext cx="5212080" cy="4846320"/>
+          </a:xfrm>
+          <a:prstGeom prst="rect">
             <a:avLst/>
           </a:prstGeom>
           <a:solidFill>
             <a:srgbClr val="FFFFFF"/>
           </a:solidFill>
-          <a:ln w="15240">
+          <a:ln w="12700">
             <a:solidFill>
-              <a:srgbClr val="C9A876"/>
+              <a:srgbClr val="C29B62"/>
             </a:solidFill>
           </a:ln>
         </p:spPr>
@@ -8359,8 +8070,8 @@
         </p:nvSpPr>
         <p:spPr>
           <a:xfrm>
-            <a:off x="960120" y="1463040"/>
-            <a:ext cx="4663440" cy="2011680"/>
+            <a:off x="6492240" y="1737360"/>
+            <a:ext cx="4663440" cy="4389120"/>
           </a:xfrm>
           <a:prstGeom prst="rect">
             <a:avLst/>
@@ -8374,358 +8085,65 @@
           <a:lstStyle/>
           <a:p>
             <a:pPr>
+              <a:defRPr sz="1100" b="1">
+                <a:solidFill>
+                  <a:srgbClr val="94723E"/>
+                </a:solidFill>
+              </a:defRPr>
+            </a:pPr>
+            <a:r>
+              <a:t>ACADEMIC &amp; MEDICAL DIRECTOR</a:t>
+            </a:r>
+          </a:p>
+          <a:p>
+            <a:pPr>
               <a:spcAft>
-                <a:spcPts val="600"/>
+                <a:spcPts val="1000"/>
               </a:spcAft>
-              <a:defRPr sz="1600" b="1">
-                <a:solidFill>
-                  <a:srgbClr val="A37F48"/>
-                </a:solidFill>
-              </a:defRPr>
-            </a:pPr>
-            <a:r>
-              <a:t>2박 3일 (단기 리프레시)</a:t>
+              <a:defRPr sz="2400" b="1">
+                <a:solidFill>
+                  <a:srgbClr val="26201C"/>
+                </a:solidFill>
+              </a:defRPr>
+            </a:pPr>
+            <a:r>
+              <a:t>임동구 박사 (Dr. Dong-Ku Yim)</a:t>
             </a:r>
           </a:p>
           <a:p>
             <a:pPr>
               <a:lnSpc>
-                <a:spcPct val="120000"/>
+                <a:spcPct val="130000"/>
               </a:lnSpc>
-              <a:defRPr sz="1100">
-                <a:solidFill>
-                  <a:srgbClr val="52463C"/>
-                </a:solidFill>
-              </a:defRPr>
-            </a:pPr>
-            <a:r>
-              <a:t>• 대상: 주말 힐링 VIP, 비즈니스 출장객</a:t>
+              <a:defRPr sz="1200">
+                <a:solidFill>
+                  <a:srgbClr val="5F5750"/>
+                </a:solidFill>
+              </a:defRPr>
+            </a:pPr>
+            <a:r>
+              <a:t>• 식품공학박사 / Dr.Yim's 체질라이프스타일 연구소장</a:t>
             </a:r>
             <a:br/>
             <a:r>
-              <a:t>• 플로우: 진단 ➔ 족욕 ➔ 80분 바디 ➔ 12h 단식 ➔ 태극선법 ➔ 나노 미스트</a:t>
+              <a:t>• 사상체질 의학의 식품공학적 섭생 연구 권위자</a:t>
             </a:r>
             <a:br/>
             <a:r>
-              <a:t>• 효과: 뇌 피로 70% 감소, 근육 긴장 완화, 숙면 유도</a:t>
-            </a:r>
-          </a:p>
-        </p:txBody>
-      </p:sp>
-      <p:sp>
-        <p:nvSpPr>
-          <p:cNvPr id="10" name="Rounded Rectangle 9"/>
-          <p:cNvSpPr/>
-          <p:nvPr/>
-        </p:nvSpPr>
-        <p:spPr>
-          <a:xfrm>
-            <a:off x="6126480" y="1280160"/>
-            <a:ext cx="5120640" cy="2377440"/>
-          </a:xfrm>
-          <a:prstGeom prst="roundRect">
-            <a:avLst/>
-          </a:prstGeom>
-          <a:solidFill>
-            <a:srgbClr val="FFFFFF"/>
-          </a:solidFill>
-          <a:ln w="15240">
-            <a:solidFill>
-              <a:srgbClr val="C9A876"/>
-            </a:solidFill>
-          </a:ln>
-        </p:spPr>
-        <p:style>
-          <a:lnRef idx="1">
-            <a:schemeClr val="accent1"/>
-          </a:lnRef>
-          <a:fillRef idx="3">
-            <a:schemeClr val="accent1"/>
-          </a:fillRef>
-          <a:effectRef idx="2">
-            <a:schemeClr val="accent1"/>
-          </a:effectRef>
-          <a:fontRef idx="minor">
-            <a:schemeClr val="lt1"/>
-          </a:fontRef>
-        </p:style>
-        <p:txBody>
-          <a:bodyPr rtlCol="0" anchor="ctr"/>
-          <a:lstStyle/>
-          <a:p>
-            <a:pPr algn="ctr"/>
-          </a:p>
-        </p:txBody>
-      </p:sp>
-      <p:sp>
-        <p:nvSpPr>
-          <p:cNvPr id="11" name="TextBox 10"/>
-          <p:cNvSpPr txBox="1"/>
-          <p:nvPr/>
-        </p:nvSpPr>
-        <p:spPr>
-          <a:xfrm>
-            <a:off x="6355080" y="1463040"/>
-            <a:ext cx="4663440" cy="2011680"/>
-          </a:xfrm>
-          <a:prstGeom prst="rect">
-            <a:avLst/>
-          </a:prstGeom>
-          <a:noFill/>
-        </p:spPr>
-        <p:txBody>
-          <a:bodyPr wrap="square">
-            <a:spAutoFit/>
-          </a:bodyPr>
-          <a:lstStyle/>
-          <a:p>
-            <a:pPr>
-              <a:spcAft>
-                <a:spcPts val="600"/>
-              </a:spcAft>
-              <a:defRPr sz="1600" b="1">
-                <a:solidFill>
-                  <a:srgbClr val="A37F48"/>
-                </a:solidFill>
-              </a:defRPr>
-            </a:pPr>
-            <a:r>
-              <a:t>5박 6일 (중기 디톡스)</a:t>
-            </a:r>
-          </a:p>
-          <a:p>
-            <a:pPr>
-              <a:lnSpc>
-                <a:spcPct val="120000"/>
-              </a:lnSpc>
-              <a:defRPr sz="1100">
-                <a:solidFill>
-                  <a:srgbClr val="52463C"/>
-                </a:solidFill>
-              </a:defRPr>
-            </a:pPr>
-            <a:r>
-              <a:t>• 대상: 만성 피로 및 림프 부종 보유자</a:t>
+              <a:t>• 4대 체질 맞춤 미역국 &amp; 아로마 배합비 감수</a:t>
             </a:r>
             <a:br/>
             <a:r>
-              <a:t>• 플로우: 1~3일 림프 배농 &amp; 온열(체온 1℃ 상승) ➔ 4~6일 마이크로바이옴 &amp; 기체조</a:t>
+              <a:t>• 현대 생체 데이터 분석 및 체질 확정 알고리즘 구축</a:t>
             </a:r>
             <a:br/>
-            <a:r>
-              <a:t>• 효과: 림프 정체 85% 개선, 안색 정화, 활력 복원</a:t>
-            </a:r>
-          </a:p>
-        </p:txBody>
-      </p:sp>
-      <p:sp>
-        <p:nvSpPr>
-          <p:cNvPr id="12" name="Rounded Rectangle 11"/>
-          <p:cNvSpPr/>
-          <p:nvPr/>
-        </p:nvSpPr>
-        <p:spPr>
-          <a:xfrm>
-            <a:off x="731520" y="3886200"/>
-            <a:ext cx="5120640" cy="2377440"/>
-          </a:xfrm>
-          <a:prstGeom prst="roundRect">
-            <a:avLst/>
-          </a:prstGeom>
-          <a:solidFill>
-            <a:srgbClr val="FFFFFF"/>
-          </a:solidFill>
-          <a:ln w="15240">
-            <a:solidFill>
-              <a:srgbClr val="C9A876"/>
-            </a:solidFill>
-          </a:ln>
-        </p:spPr>
-        <p:style>
-          <a:lnRef idx="1">
-            <a:schemeClr val="accent1"/>
-          </a:lnRef>
-          <a:fillRef idx="3">
-            <a:schemeClr val="accent1"/>
-          </a:fillRef>
-          <a:effectRef idx="2">
-            <a:schemeClr val="accent1"/>
-          </a:effectRef>
-          <a:fontRef idx="minor">
-            <a:schemeClr val="lt1"/>
-          </a:fontRef>
-        </p:style>
-        <p:txBody>
-          <a:bodyPr rtlCol="0" anchor="ctr"/>
-          <a:lstStyle/>
-          <a:p>
-            <a:pPr algn="ctr"/>
-          </a:p>
-        </p:txBody>
-      </p:sp>
-      <p:sp>
-        <p:nvSpPr>
-          <p:cNvPr id="13" name="TextBox 12"/>
-          <p:cNvSpPr txBox="1"/>
-          <p:nvPr/>
-        </p:nvSpPr>
-        <p:spPr>
-          <a:xfrm>
-            <a:off x="960120" y="4069080"/>
-            <a:ext cx="4663440" cy="2011680"/>
-          </a:xfrm>
-          <a:prstGeom prst="rect">
-            <a:avLst/>
-          </a:prstGeom>
-          <a:noFill/>
-        </p:spPr>
-        <p:txBody>
-          <a:bodyPr wrap="square">
-            <a:spAutoFit/>
-          </a:bodyPr>
-          <a:lstStyle/>
-          <a:p>
-            <a:pPr>
-              <a:spcAft>
-                <a:spcPts val="600"/>
-              </a:spcAft>
-              <a:defRPr sz="1600" b="1">
-                <a:solidFill>
-                  <a:srgbClr val="A37F48"/>
-                </a:solidFill>
-              </a:defRPr>
-            </a:pPr>
-            <a:r>
-              <a:t>15박 16일 (장기 리셋)</a:t>
-            </a:r>
-          </a:p>
-          <a:p>
-            <a:pPr>
-              <a:lnSpc>
-                <a:spcPct val="120000"/>
-              </a:lnSpc>
-              <a:defRPr sz="1100">
-                <a:solidFill>
-                  <a:srgbClr val="52463C"/>
-                </a:solidFill>
-              </a:defRPr>
-            </a:pPr>
-            <a:r>
-              <a:t>• 대상: 대사증후군 개선 희망 기업 최고경영진</a:t>
-            </a:r>
             <a:br/>
             <a:r>
-              <a:t>• 플로우: DTC 유전자 검사 ➔ 10대 테마 매일 순환 ➔ 1:1 라이프스타일 매뉴얼북</a:t>
+              <a:t>📞 연락처: 010-2323-4662</a:t>
             </a:r>
             <a:br/>
             <a:r>
-              <a:t>• 효과: 면역 나이 5년 리셋, 평생 섭생 습관 정착</a:t>
-            </a:r>
-          </a:p>
-        </p:txBody>
-      </p:sp>
-      <p:sp>
-        <p:nvSpPr>
-          <p:cNvPr id="14" name="Rounded Rectangle 13"/>
-          <p:cNvSpPr/>
-          <p:nvPr/>
-        </p:nvSpPr>
-        <p:spPr>
-          <a:xfrm>
-            <a:off x="6126480" y="3886200"/>
-            <a:ext cx="5120640" cy="2377440"/>
-          </a:xfrm>
-          <a:prstGeom prst="roundRect">
-            <a:avLst/>
-          </a:prstGeom>
-          <a:solidFill>
-            <a:srgbClr val="FFFFFF"/>
-          </a:solidFill>
-          <a:ln w="15240">
-            <a:solidFill>
-              <a:srgbClr val="C9A876"/>
-            </a:solidFill>
-          </a:ln>
-        </p:spPr>
-        <p:style>
-          <a:lnRef idx="1">
-            <a:schemeClr val="accent1"/>
-          </a:lnRef>
-          <a:fillRef idx="3">
-            <a:schemeClr val="accent1"/>
-          </a:fillRef>
-          <a:effectRef idx="2">
-            <a:schemeClr val="accent1"/>
-          </a:effectRef>
-          <a:fontRef idx="minor">
-            <a:schemeClr val="lt1"/>
-          </a:fontRef>
-        </p:style>
-        <p:txBody>
-          <a:bodyPr rtlCol="0" anchor="ctr"/>
-          <a:lstStyle/>
-          <a:p>
-            <a:pPr algn="ctr"/>
-          </a:p>
-        </p:txBody>
-      </p:sp>
-      <p:sp>
-        <p:nvSpPr>
-          <p:cNvPr id="15" name="TextBox 14"/>
-          <p:cNvSpPr txBox="1"/>
-          <p:nvPr/>
-        </p:nvSpPr>
-        <p:spPr>
-          <a:xfrm>
-            <a:off x="6355080" y="4069080"/>
-            <a:ext cx="4663440" cy="2011680"/>
-          </a:xfrm>
-          <a:prstGeom prst="rect">
-            <a:avLst/>
-          </a:prstGeom>
-          <a:noFill/>
-        </p:spPr>
-        <p:txBody>
-          <a:bodyPr wrap="square">
-            <a:spAutoFit/>
-          </a:bodyPr>
-          <a:lstStyle/>
-          <a:p>
-            <a:pPr>
-              <a:spcAft>
-                <a:spcPts val="600"/>
-              </a:spcAft>
-              <a:defRPr sz="1600" b="1">
-                <a:solidFill>
-                  <a:srgbClr val="A37F48"/>
-                </a:solidFill>
-              </a:defRPr>
-            </a:pPr>
-            <a:r>
-              <a:t>1개월 (특수 집중 케어)</a:t>
-            </a:r>
-          </a:p>
-          <a:p>
-            <a:pPr>
-              <a:lnSpc>
-                <a:spcPct val="120000"/>
-              </a:lnSpc>
-              <a:defRPr sz="1100">
-                <a:solidFill>
-                  <a:srgbClr val="52463C"/>
-                </a:solidFill>
-              </a:defRPr>
-            </a:pPr>
-            <a:r>
-              <a:t>• 대상: 수술 후 회복기 고객, 고령 시니어 VIP</a:t>
-            </a:r>
-            <a:br/>
-            <a:r>
-              <a:t>• 플로우: 37.5℃ 무자극 족욕 ➔ 프랑킨센스 세포 진정 ➔ 면역 NK세포 증대</a:t>
-            </a:r>
-            <a:br/>
-            <a:r>
-              <a:t>• 시설: 프라이빗 단독 빌라 및 메디컬 스파 룸 배정</a:t>
+              <a:t>✉️ 이메일: ydoko@daum.net</a:t>
             </a:r>
           </a:p>
         </p:txBody>
@@ -8763,7 +8181,7 @@
             <a:avLst/>
           </a:prstGeom>
           <a:solidFill>
-            <a:srgbClr val="FDFBF7"/>
+            <a:srgbClr val="0F2019"/>
           </a:solidFill>
           <a:ln>
             <a:noFill/>
@@ -8799,17 +8217,17 @@
         </p:nvSpPr>
         <p:spPr>
           <a:xfrm>
-            <a:off x="0" y="0"/>
-            <a:ext cx="12191695" cy="411480"/>
-          </a:xfrm>
-          <a:prstGeom prst="rect">
-            <a:avLst/>
-          </a:prstGeom>
-          <a:solidFill>
-            <a:srgbClr val="241E19"/>
-          </a:solidFill>
-          <a:ln>
-            <a:noFill/>
+            <a:off x="640080" y="640080"/>
+            <a:ext cx="10911535" cy="5577840"/>
+          </a:xfrm>
+          <a:prstGeom prst="rect">
+            <a:avLst/>
+          </a:prstGeom>
+          <a:noFill/>
+          <a:ln w="19050">
+            <a:solidFill>
+              <a:srgbClr val="C29B62"/>
+            </a:solidFill>
           </a:ln>
         </p:spPr>
         <p:style>
@@ -8842,203 +8260,8 @@
         </p:nvSpPr>
         <p:spPr>
           <a:xfrm>
-            <a:off x="731520" y="73152"/>
-            <a:ext cx="10728655" cy="274320"/>
-          </a:xfrm>
-          <a:prstGeom prst="rect">
-            <a:avLst/>
-          </a:prstGeom>
-          <a:noFill/>
-        </p:spPr>
-        <p:txBody>
-          <a:bodyPr wrap="none">
-            <a:spAutoFit/>
-          </a:bodyPr>
-          <a:lstStyle/>
-          <a:p>
-            <a:pPr>
-              <a:defRPr sz="900" b="1">
-                <a:solidFill>
-                  <a:srgbClr val="C8B9A0"/>
-                </a:solidFill>
-              </a:defRPr>
-            </a:pPr>
-            <a:r>
-              <a:t>SASANG SPA BOUTIQUE  |  K-WELLNESS HERITAGE &amp; BIOTECH  |  VIP DIRECTORS: 010-4728-9917</a:t>
-            </a:r>
-          </a:p>
-        </p:txBody>
-      </p:sp>
-      <p:sp>
-        <p:nvSpPr>
-          <p:cNvPr id="5" name="Rounded Rectangle 4"/>
-          <p:cNvSpPr/>
-          <p:nvPr/>
-        </p:nvSpPr>
-        <p:spPr>
-          <a:xfrm>
-            <a:off x="731520" y="621792"/>
-            <a:ext cx="2011680" cy="256032"/>
-          </a:xfrm>
-          <a:prstGeom prst="roundRect">
-            <a:avLst/>
-          </a:prstGeom>
-          <a:solidFill>
-            <a:srgbClr val="F8F5EE"/>
-          </a:solidFill>
-          <a:ln w="12700">
-            <a:solidFill>
-              <a:srgbClr val="C9A876"/>
-            </a:solidFill>
-          </a:ln>
-        </p:spPr>
-        <p:style>
-          <a:lnRef idx="1">
-            <a:schemeClr val="accent1"/>
-          </a:lnRef>
-          <a:fillRef idx="3">
-            <a:schemeClr val="accent1"/>
-          </a:fillRef>
-          <a:effectRef idx="2">
-            <a:schemeClr val="accent1"/>
-          </a:effectRef>
-          <a:fontRef idx="minor">
-            <a:schemeClr val="lt1"/>
-          </a:fontRef>
-        </p:style>
-        <p:txBody>
-          <a:bodyPr rtlCol="0" anchor="ctr"/>
-          <a:lstStyle/>
-          <a:p>
-            <a:pPr algn="ctr"/>
-          </a:p>
-        </p:txBody>
-      </p:sp>
-      <p:sp>
-        <p:nvSpPr>
-          <p:cNvPr id="6" name="TextBox 5"/>
-          <p:cNvSpPr txBox="1"/>
-          <p:nvPr/>
-        </p:nvSpPr>
-        <p:spPr>
-          <a:xfrm>
-            <a:off x="777240" y="603504"/>
-            <a:ext cx="1920240" cy="274320"/>
-          </a:xfrm>
-          <a:prstGeom prst="rect">
-            <a:avLst/>
-          </a:prstGeom>
-          <a:noFill/>
-        </p:spPr>
-        <p:txBody>
-          <a:bodyPr wrap="none">
-            <a:spAutoFit/>
-          </a:bodyPr>
-          <a:lstStyle/>
-          <a:p>
-            <a:pPr algn="ctr">
-              <a:defRPr sz="900" b="1">
-                <a:solidFill>
-                  <a:srgbClr val="A37F48"/>
-                </a:solidFill>
-              </a:defRPr>
-            </a:pPr>
-            <a:r>
-              <a:t>OUR DIRECTORS</a:t>
-            </a:r>
-          </a:p>
-        </p:txBody>
-      </p:sp>
-      <p:sp>
-        <p:nvSpPr>
-          <p:cNvPr id="7" name="TextBox 6"/>
-          <p:cNvSpPr txBox="1"/>
-          <p:nvPr/>
-        </p:nvSpPr>
-        <p:spPr>
-          <a:xfrm>
-            <a:off x="2926080" y="530352"/>
-            <a:ext cx="8503920" cy="548640"/>
-          </a:xfrm>
-          <a:prstGeom prst="rect">
-            <a:avLst/>
-          </a:prstGeom>
-          <a:noFill/>
-        </p:spPr>
-        <p:txBody>
-          <a:bodyPr wrap="none">
-            <a:spAutoFit/>
-          </a:bodyPr>
-          <a:lstStyle/>
-          <a:p>
-            <a:pPr>
-              <a:defRPr sz="2000" b="1">
-                <a:solidFill>
-                  <a:srgbClr val="241E19"/>
-                </a:solidFill>
-              </a:defRPr>
-            </a:pPr>
-            <a:r>
-              <a:t>총괄 연구진 및 디렉터 프로필 (Master Directors)</a:t>
-            </a:r>
-          </a:p>
-        </p:txBody>
-      </p:sp>
-      <p:sp>
-        <p:nvSpPr>
-          <p:cNvPr id="8" name="Rounded Rectangle 7"/>
-          <p:cNvSpPr/>
-          <p:nvPr/>
-        </p:nvSpPr>
-        <p:spPr>
-          <a:xfrm>
-            <a:off x="731520" y="1280160"/>
-            <a:ext cx="5120640" cy="5120640"/>
-          </a:xfrm>
-          <a:prstGeom prst="roundRect">
-            <a:avLst/>
-          </a:prstGeom>
-          <a:solidFill>
-            <a:srgbClr val="FFFFFF"/>
-          </a:solidFill>
-          <a:ln w="15240">
-            <a:solidFill>
-              <a:srgbClr val="C9A876"/>
-            </a:solidFill>
-          </a:ln>
-        </p:spPr>
-        <p:style>
-          <a:lnRef idx="1">
-            <a:schemeClr val="accent1"/>
-          </a:lnRef>
-          <a:fillRef idx="3">
-            <a:schemeClr val="accent1"/>
-          </a:fillRef>
-          <a:effectRef idx="2">
-            <a:schemeClr val="accent1"/>
-          </a:effectRef>
-          <a:fontRef idx="minor">
-            <a:schemeClr val="lt1"/>
-          </a:fontRef>
-        </p:style>
-        <p:txBody>
-          <a:bodyPr rtlCol="0" anchor="ctr"/>
-          <a:lstStyle/>
-          <a:p>
-            <a:pPr algn="ctr"/>
-          </a:p>
-        </p:txBody>
-      </p:sp>
-      <p:sp>
-        <p:nvSpPr>
-          <p:cNvPr id="9" name="TextBox 8"/>
-          <p:cNvSpPr txBox="1"/>
-          <p:nvPr/>
-        </p:nvSpPr>
-        <p:spPr>
-          <a:xfrm>
-            <a:off x="1005840" y="1554480"/>
-            <a:ext cx="4572000" cy="4572000"/>
+            <a:off x="1371600" y="1828800"/>
+            <a:ext cx="9448495" cy="3657600"/>
           </a:xfrm>
           <a:prstGeom prst="rect">
             <a:avLst/>
@@ -9051,197 +8274,53 @@
           </a:bodyPr>
           <a:lstStyle/>
           <a:p>
-            <a:pPr>
-              <a:defRPr sz="1100" b="1">
-                <a:solidFill>
-                  <a:srgbClr val="A37F48"/>
-                </a:solidFill>
-              </a:defRPr>
-            </a:pPr>
-            <a:r>
-              <a:t>WELLNESS MASTER DIRECTOR</a:t>
-            </a:r>
-          </a:p>
-          <a:p>
-            <a:pPr>
+            <a:pPr algn="ctr">
               <a:spcAft>
-                <a:spcPts val="1000"/>
+                <a:spcPts val="1400"/>
               </a:spcAft>
-              <a:defRPr sz="2400" b="1">
-                <a:solidFill>
-                  <a:srgbClr val="241E19"/>
-                </a:solidFill>
-              </a:defRPr>
-            </a:pPr>
-            <a:r>
-              <a:t>유정근 (Ryu Jean)</a:t>
-            </a:r>
-          </a:p>
-          <a:p>
-            <a:pPr>
-              <a:lnSpc>
-                <a:spcPct val="130000"/>
-              </a:lnSpc>
-              <a:defRPr sz="1200">
-                <a:solidFill>
-                  <a:srgbClr val="52463C"/>
-                </a:solidFill>
-              </a:defRPr>
-            </a:pPr>
-            <a:r>
-              <a:t>• 웰니스 총괄 디렉터 / 전담 테라피스트</a:t>
+              <a:defRPr sz="1300" b="1">
+                <a:solidFill>
+                  <a:srgbClr val="C29B62"/>
+                </a:solidFill>
+              </a:defRPr>
+            </a:pPr>
+            <a:r>
+              <a:t>K-PREMIUM WELLNESS RETREAT 2026/27</a:t>
+            </a:r>
+          </a:p>
+          <a:p>
+            <a:pPr algn="ctr">
+              <a:spcAft>
+                <a:spcPts val="2000"/>
+              </a:spcAft>
+              <a:defRPr sz="3200" b="1">
+                <a:solidFill>
+                  <a:srgbClr val="FFFFFF"/>
+                </a:solidFill>
+              </a:defRPr>
+            </a:pPr>
+            <a:r>
+              <a:t>가장 한국적인 사상체질 의학이</a:t>
             </a:r>
             <a:br/>
             <a:r>
-              <a:t>• 사상체질 10대 시그니처 테라피 의전 설계</a:t>
+              <a:t>가장 세계적인 럭셔리 쿠어(Kur)가 됩니다</a:t>
+            </a:r>
+          </a:p>
+          <a:p>
+            <a:pPr algn="ctr">
+              <a:defRPr sz="1350">
+                <a:solidFill>
+                  <a:srgbClr val="C29B62"/>
+                </a:solidFill>
+              </a:defRPr>
+            </a:pPr>
+            <a:r>
+              <a:t>공식 웹 포털 실시간 확인: https://ryujean77.github.io/ryujean-slides/sasang-spa/</a:t>
             </a:r>
             <a:br/>
             <a:r>
-              <a:t>• 글로벌 호텔/리조트 파트너십 및 브랜드 총괄</a:t>
-            </a:r>
-            <a:br/>
-            <a:r>
-              <a:t>• 1:1 VIP 프라이빗 컨설팅 및 트리트먼트 마스터</a:t>
-            </a:r>
-            <a:br/>
-            <a:br/>
-            <a:r>
-              <a:t>📞 연락처: 010-4728-9917</a:t>
-            </a:r>
-            <a:br/>
-            <a:r>
-              <a:t>✉️ 이메일: ryujean77@gmail.com</a:t>
-            </a:r>
-          </a:p>
-        </p:txBody>
-      </p:sp>
-      <p:sp>
-        <p:nvSpPr>
-          <p:cNvPr id="10" name="Rounded Rectangle 9"/>
-          <p:cNvSpPr/>
-          <p:nvPr/>
-        </p:nvSpPr>
-        <p:spPr>
-          <a:xfrm>
-            <a:off x="6217920" y="1280160"/>
-            <a:ext cx="5212080" cy="5120640"/>
-          </a:xfrm>
-          <a:prstGeom prst="roundRect">
-            <a:avLst/>
-          </a:prstGeom>
-          <a:solidFill>
-            <a:srgbClr val="FFFFFF"/>
-          </a:solidFill>
-          <a:ln w="15240">
-            <a:solidFill>
-              <a:srgbClr val="C9A876"/>
-            </a:solidFill>
-          </a:ln>
-        </p:spPr>
-        <p:style>
-          <a:lnRef idx="1">
-            <a:schemeClr val="accent1"/>
-          </a:lnRef>
-          <a:fillRef idx="3">
-            <a:schemeClr val="accent1"/>
-          </a:fillRef>
-          <a:effectRef idx="2">
-            <a:schemeClr val="accent1"/>
-          </a:effectRef>
-          <a:fontRef idx="minor">
-            <a:schemeClr val="lt1"/>
-          </a:fontRef>
-        </p:style>
-        <p:txBody>
-          <a:bodyPr rtlCol="0" anchor="ctr"/>
-          <a:lstStyle/>
-          <a:p>
-            <a:pPr algn="ctr"/>
-          </a:p>
-        </p:txBody>
-      </p:sp>
-      <p:sp>
-        <p:nvSpPr>
-          <p:cNvPr id="11" name="TextBox 10"/>
-          <p:cNvSpPr txBox="1"/>
-          <p:nvPr/>
-        </p:nvSpPr>
-        <p:spPr>
-          <a:xfrm>
-            <a:off x="6492240" y="1554480"/>
-            <a:ext cx="4663440" cy="4572000"/>
-          </a:xfrm>
-          <a:prstGeom prst="rect">
-            <a:avLst/>
-          </a:prstGeom>
-          <a:noFill/>
-        </p:spPr>
-        <p:txBody>
-          <a:bodyPr wrap="square">
-            <a:spAutoFit/>
-          </a:bodyPr>
-          <a:lstStyle/>
-          <a:p>
-            <a:pPr>
-              <a:defRPr sz="1100" b="1">
-                <a:solidFill>
-                  <a:srgbClr val="A37F48"/>
-                </a:solidFill>
-              </a:defRPr>
-            </a:pPr>
-            <a:r>
-              <a:t>ACADEMIC &amp; MEDICAL DIRECTOR</a:t>
-            </a:r>
-          </a:p>
-          <a:p>
-            <a:pPr>
-              <a:spcAft>
-                <a:spcPts val="1000"/>
-              </a:spcAft>
-              <a:defRPr sz="2400" b="1">
-                <a:solidFill>
-                  <a:srgbClr val="241E19"/>
-                </a:solidFill>
-              </a:defRPr>
-            </a:pPr>
-            <a:r>
-              <a:t>임동구 박사 (Dr. Dong-Ku Yim)</a:t>
-            </a:r>
-          </a:p>
-          <a:p>
-            <a:pPr>
-              <a:lnSpc>
-                <a:spcPct val="130000"/>
-              </a:lnSpc>
-              <a:defRPr sz="1200">
-                <a:solidFill>
-                  <a:srgbClr val="52463C"/>
-                </a:solidFill>
-              </a:defRPr>
-            </a:pPr>
-            <a:r>
-              <a:t>• 식품공학박사 / Dr.Yim's 체질라이프스타일 연구소장</a:t>
-            </a:r>
-            <a:br/>
-            <a:r>
-              <a:t>• 사상체질 의학의 식품공학적 섭생 연구 권위자</a:t>
-            </a:r>
-            <a:br/>
-            <a:r>
-              <a:t>• 4대 체질 맞춤 미역국 &amp; 아로마 배합비 감수</a:t>
-            </a:r>
-            <a:br/>
-            <a:r>
-              <a:t>• 현대 생체 데이터 분석 및 체질 확정 알고리즘 구축</a:t>
-            </a:r>
-            <a:br/>
-            <a:br/>
-            <a:r>
-              <a:t>📞 연락처: 010-2323-4662</a:t>
-            </a:r>
-            <a:br/>
-            <a:r>
-              <a:t>✉️ 이메일: ydoko@daum.net</a:t>
+              <a:t>문의: 유정근 총괄 디렉터 (010-4728-9917 | ryujean77@gmail.com)</a:t>
             </a:r>
           </a:p>
         </p:txBody>

--- a/sasang-spa/사상체질_프리미엄_스파_프로젝트_제안서_발표자료.pptx
+++ b/sasang-spa/사상체질_프리미엄_스파_프로젝트_제안서_발표자료.pptx
@@ -14,6 +14,13 @@
     <p:sldId id="262" r:id="rId13"/>
     <p:sldId id="263" r:id="rId14"/>
     <p:sldId id="264" r:id="rId15"/>
+    <p:sldId id="265" r:id="rId16"/>
+    <p:sldId id="266" r:id="rId17"/>
+    <p:sldId id="267" r:id="rId18"/>
+    <p:sldId id="268" r:id="rId19"/>
+    <p:sldId id="269" r:id="rId20"/>
+    <p:sldId id="270" r:id="rId21"/>
+    <p:sldId id="271" r:id="rId22"/>
   </p:sldIdLst>
   <p:sldSz cx="12191695" cy="6858000" type="screen4x3"/>
   <p:notesSz cx="6858000" cy="9144000"/>
@@ -3111,7 +3118,7 @@
             <a:avLst/>
           </a:prstGeom>
           <a:solidFill>
-            <a:srgbClr val="0F2019"/>
+            <a:srgbClr val="0E1F18"/>
           </a:solidFill>
           <a:ln>
             <a:noFill/>
@@ -3156,7 +3163,7 @@
           <a:noFill/>
           <a:ln w="19050">
             <a:solidFill>
-              <a:srgbClr val="C29B62"/>
+              <a:srgbClr val="C9A876"/>
             </a:solidFill>
           </a:ln>
         </p:spPr>
@@ -3190,8 +3197,8 @@
         </p:nvSpPr>
         <p:spPr>
           <a:xfrm>
-            <a:off x="1188720" y="1097280"/>
-            <a:ext cx="9784080" cy="4663440"/>
+            <a:off x="1188720" y="1188720"/>
+            <a:ext cx="9784080" cy="4480560"/>
           </a:xfrm>
           <a:prstGeom prst="rect">
             <a:avLst/>
@@ -3206,16 +3213,1027 @@
           <a:p>
             <a:pPr>
               <a:spcAft>
-                <a:spcPts val="1000"/>
+                <a:spcPts val="1400"/>
               </a:spcAft>
-              <a:defRPr sz="1300" b="1">
-                <a:solidFill>
-                  <a:srgbClr val="C29B62"/>
-                </a:solidFill>
-              </a:defRPr>
-            </a:pPr>
-            <a:r>
-              <a:t>2026 / 27  K-WELLNESS RETREAT</a:t>
+              <a:defRPr sz="1200" b="1">
+                <a:solidFill>
+                  <a:srgbClr val="C9A876"/>
+                </a:solidFill>
+              </a:defRPr>
+            </a:pPr>
+            <a:r>
+              <a:t>THE WISDOM OF SASANG CONSTITUTION BOUTIQUE SPA</a:t>
+            </a:r>
+          </a:p>
+          <a:p>
+            <a:pPr>
+              <a:spcAft>
+                <a:spcPts val="1200"/>
+              </a:spcAft>
+              <a:defRPr sz="3600" b="1">
+                <a:solidFill>
+                  <a:srgbClr val="FFFFFF"/>
+                </a:solidFill>
+              </a:defRPr>
+            </a:pPr>
+            <a:r>
+              <a:t>사상체질 기반 프리미엄 웰니스 스파</a:t>
+            </a:r>
+          </a:p>
+          <a:p>
+            <a:pPr>
+              <a:spcAft>
+                <a:spcPts val="2200"/>
+              </a:spcAft>
+              <a:defRPr sz="1600">
+                <a:solidFill>
+                  <a:srgbClr val="C9A876"/>
+                </a:solidFill>
+              </a:defRPr>
+            </a:pPr>
+            <a:r>
+              <a:t>한국 고유의 사상체질 의학 × 최고급 100% 순수 에센셜 오일 × 현대 바이오 데이터 융합</a:t>
+            </a:r>
+          </a:p>
+          <a:p>
+            <a:pPr>
+              <a:spcAft>
+                <a:spcPts val="2000"/>
+              </a:spcAft>
+              <a:defRPr sz="1300">
+                <a:solidFill>
+                  <a:srgbClr val="E1DACD"/>
+                </a:solidFill>
+              </a:defRPr>
+            </a:pPr>
+            <a:r>
+              <a:t>👑 현대인의 고질적 불균형을 근본적으로 치유하는 1:1 맞춤 신체 리셋 솔루션 기획제안서</a:t>
+            </a:r>
+          </a:p>
+          <a:p>
+            <a:pPr>
+              <a:defRPr sz="1050">
+                <a:solidFill>
+                  <a:srgbClr val="B4AA9B"/>
+                </a:solidFill>
+              </a:defRPr>
+            </a:pPr>
+            <a:r>
+              <a:t>• 총괄 디렉터: 유정근 (010-4728-9917 | ryujean77@gmail.com)</a:t>
+            </a:r>
+            <a:br/>
+            <a:r>
+              <a:t>• 학술/의학 총괄: 임동구 식품공학박사 (010-2323-4662 | ydoko@daum.net)</a:t>
+            </a:r>
+            <a:br/>
+            <a:r>
+              <a:t>• 공식 온라인 웹 포털: https://ryujean77.github.io/ryujean-slides/sasang-spa/</a:t>
+            </a:r>
+          </a:p>
+        </p:txBody>
+      </p:sp>
+    </p:spTree>
+  </p:cSld>
+  <p:clrMapOvr>
+    <a:masterClrMapping/>
+  </p:clrMapOvr>
+</p:sld>
+</file>
+
+<file path=ppt/slides/slide10.xml><?xml version="1.0" encoding="utf-8"?>
+<p:sld xmlns:a="http://schemas.openxmlformats.org/drawingml/2006/main" xmlns:p="http://schemas.openxmlformats.org/presentationml/2006/main" xmlns:r="http://schemas.openxmlformats.org/officeDocument/2006/relationships">
+  <p:cSld>
+    <p:spTree>
+      <p:nvGrpSpPr>
+        <p:cNvPr id="1" name=""/>
+        <p:cNvGrpSpPr/>
+        <p:nvPr/>
+      </p:nvGrpSpPr>
+      <p:grpSpPr/>
+      <p:sp>
+        <p:nvSpPr>
+          <p:cNvPr id="2" name="Rectangle 1"/>
+          <p:cNvSpPr/>
+          <p:nvPr/>
+        </p:nvSpPr>
+        <p:spPr>
+          <a:xfrm>
+            <a:off x="0" y="0"/>
+            <a:ext cx="12191695" cy="6858000"/>
+          </a:xfrm>
+          <a:prstGeom prst="rect">
+            <a:avLst/>
+          </a:prstGeom>
+          <a:solidFill>
+            <a:srgbClr val="FDFBF7"/>
+          </a:solidFill>
+          <a:ln>
+            <a:noFill/>
+          </a:ln>
+        </p:spPr>
+        <p:style>
+          <a:lnRef idx="1">
+            <a:schemeClr val="accent1"/>
+          </a:lnRef>
+          <a:fillRef idx="3">
+            <a:schemeClr val="accent1"/>
+          </a:fillRef>
+          <a:effectRef idx="2">
+            <a:schemeClr val="accent1"/>
+          </a:effectRef>
+          <a:fontRef idx="minor">
+            <a:schemeClr val="lt1"/>
+          </a:fontRef>
+        </p:style>
+        <p:txBody>
+          <a:bodyPr rtlCol="0" anchor="ctr"/>
+          <a:lstStyle/>
+          <a:p>
+            <a:pPr algn="ctr"/>
+          </a:p>
+        </p:txBody>
+      </p:sp>
+      <p:sp>
+        <p:nvSpPr>
+          <p:cNvPr id="3" name="TextBox 2"/>
+          <p:cNvSpPr txBox="1"/>
+          <p:nvPr/>
+        </p:nvSpPr>
+        <p:spPr>
+          <a:xfrm>
+            <a:off x="731520" y="365760"/>
+            <a:ext cx="10728655" cy="320040"/>
+          </a:xfrm>
+          <a:prstGeom prst="rect">
+            <a:avLst/>
+          </a:prstGeom>
+          <a:noFill/>
+        </p:spPr>
+        <p:txBody>
+          <a:bodyPr wrap="none">
+            <a:spAutoFit/>
+          </a:bodyPr>
+          <a:lstStyle/>
+          <a:p>
+            <a:pPr>
+              <a:defRPr sz="1000" b="1">
+                <a:solidFill>
+                  <a:srgbClr val="A37F48"/>
+                </a:solidFill>
+              </a:defRPr>
+            </a:pPr>
+            <a:r>
+              <a:t>SIGNATURE TREATMENTS</a:t>
+            </a:r>
+          </a:p>
+        </p:txBody>
+      </p:sp>
+      <p:sp>
+        <p:nvSpPr>
+          <p:cNvPr id="4" name="TextBox 3"/>
+          <p:cNvSpPr txBox="1"/>
+          <p:nvPr/>
+        </p:nvSpPr>
+        <p:spPr>
+          <a:xfrm>
+            <a:off x="731520" y="640080"/>
+            <a:ext cx="10728655" cy="640080"/>
+          </a:xfrm>
+          <a:prstGeom prst="rect">
+            <a:avLst/>
+          </a:prstGeom>
+          <a:noFill/>
+        </p:spPr>
+        <p:txBody>
+          <a:bodyPr wrap="none">
+            <a:spAutoFit/>
+          </a:bodyPr>
+          <a:lstStyle/>
+          <a:p>
+            <a:pPr>
+              <a:defRPr sz="2100" b="1">
+                <a:solidFill>
+                  <a:srgbClr val="241E19"/>
+                </a:solidFill>
+              </a:defRPr>
+            </a:pPr>
+            <a:r>
+              <a:t>10대 시그니처 테라피 가이드 (Part 2: Themes 06 ~ 10)</a:t>
+            </a:r>
+          </a:p>
+        </p:txBody>
+      </p:sp>
+      <p:sp>
+        <p:nvSpPr>
+          <p:cNvPr id="5" name="Rectangle 4"/>
+          <p:cNvSpPr/>
+          <p:nvPr/>
+        </p:nvSpPr>
+        <p:spPr>
+          <a:xfrm>
+            <a:off x="731520" y="1261872"/>
+            <a:ext cx="2011680" cy="22860"/>
+          </a:xfrm>
+          <a:prstGeom prst="rect">
+            <a:avLst/>
+          </a:prstGeom>
+          <a:solidFill>
+            <a:srgbClr val="C9A876"/>
+          </a:solidFill>
+          <a:ln>
+            <a:noFill/>
+          </a:ln>
+        </p:spPr>
+        <p:style>
+          <a:lnRef idx="1">
+            <a:schemeClr val="accent1"/>
+          </a:lnRef>
+          <a:fillRef idx="3">
+            <a:schemeClr val="accent1"/>
+          </a:fillRef>
+          <a:effectRef idx="2">
+            <a:schemeClr val="accent1"/>
+          </a:effectRef>
+          <a:fontRef idx="minor">
+            <a:schemeClr val="lt1"/>
+          </a:fontRef>
+        </p:style>
+        <p:txBody>
+          <a:bodyPr rtlCol="0" anchor="ctr"/>
+          <a:lstStyle/>
+          <a:p>
+            <a:pPr algn="ctr"/>
+          </a:p>
+        </p:txBody>
+      </p:sp>
+      <p:sp>
+        <p:nvSpPr>
+          <p:cNvPr id="6" name="Rounded Rectangle 5"/>
+          <p:cNvSpPr/>
+          <p:nvPr/>
+        </p:nvSpPr>
+        <p:spPr>
+          <a:xfrm>
+            <a:off x="731520" y="1463040"/>
+            <a:ext cx="10728655" cy="822960"/>
+          </a:xfrm>
+          <a:prstGeom prst="roundRect">
+            <a:avLst/>
+          </a:prstGeom>
+          <a:solidFill>
+            <a:srgbClr val="FFFFFF"/>
+          </a:solidFill>
+          <a:ln w="13970">
+            <a:solidFill>
+              <a:srgbClr val="C9A876"/>
+            </a:solidFill>
+          </a:ln>
+        </p:spPr>
+        <p:style>
+          <a:lnRef idx="1">
+            <a:schemeClr val="accent1"/>
+          </a:lnRef>
+          <a:fillRef idx="3">
+            <a:schemeClr val="accent1"/>
+          </a:fillRef>
+          <a:effectRef idx="2">
+            <a:schemeClr val="accent1"/>
+          </a:effectRef>
+          <a:fontRef idx="minor">
+            <a:schemeClr val="lt1"/>
+          </a:fontRef>
+        </p:style>
+        <p:txBody>
+          <a:bodyPr rtlCol="0" anchor="ctr"/>
+          <a:lstStyle/>
+          <a:p>
+            <a:pPr algn="ctr"/>
+          </a:p>
+        </p:txBody>
+      </p:sp>
+      <p:sp>
+        <p:nvSpPr>
+          <p:cNvPr id="7" name="TextBox 6"/>
+          <p:cNvSpPr txBox="1"/>
+          <p:nvPr/>
+        </p:nvSpPr>
+        <p:spPr>
+          <a:xfrm>
+            <a:off x="914400" y="1572768"/>
+            <a:ext cx="10332720" cy="621792"/>
+          </a:xfrm>
+          <a:prstGeom prst="rect">
+            <a:avLst/>
+          </a:prstGeom>
+          <a:noFill/>
+        </p:spPr>
+        <p:txBody>
+          <a:bodyPr wrap="square">
+            <a:spAutoFit/>
+          </a:bodyPr>
+          <a:lstStyle/>
+          <a:p>
+            <a:pPr>
+              <a:defRPr sz="1200">
+                <a:solidFill>
+                  <a:srgbClr val="241E19"/>
+                </a:solidFill>
+              </a:defRPr>
+            </a:pPr>
+            <a:r>
+              <a:t>06. 티 테라피 &amp; 침묵 명상  |  무형문화재 장인 도자기 전통 다기 우림 시연 및 30분 무언 침묵 명상 (부교감 신경 활성도 40% 상승)</a:t>
+            </a:r>
+          </a:p>
+        </p:txBody>
+      </p:sp>
+      <p:sp>
+        <p:nvSpPr>
+          <p:cNvPr id="8" name="Rounded Rectangle 7"/>
+          <p:cNvSpPr/>
+          <p:nvPr/>
+        </p:nvSpPr>
+        <p:spPr>
+          <a:xfrm>
+            <a:off x="731520" y="2423160"/>
+            <a:ext cx="10728655" cy="822960"/>
+          </a:xfrm>
+          <a:prstGeom prst="roundRect">
+            <a:avLst/>
+          </a:prstGeom>
+          <a:solidFill>
+            <a:srgbClr val="FFFFFF"/>
+          </a:solidFill>
+          <a:ln w="13970">
+            <a:solidFill>
+              <a:srgbClr val="C9A876"/>
+            </a:solidFill>
+          </a:ln>
+        </p:spPr>
+        <p:style>
+          <a:lnRef idx="1">
+            <a:schemeClr val="accent1"/>
+          </a:lnRef>
+          <a:fillRef idx="3">
+            <a:schemeClr val="accent1"/>
+          </a:fillRef>
+          <a:effectRef idx="2">
+            <a:schemeClr val="accent1"/>
+          </a:effectRef>
+          <a:fontRef idx="minor">
+            <a:schemeClr val="lt1"/>
+          </a:fontRef>
+        </p:style>
+        <p:txBody>
+          <a:bodyPr rtlCol="0" anchor="ctr"/>
+          <a:lstStyle/>
+          <a:p>
+            <a:pPr algn="ctr"/>
+          </a:p>
+        </p:txBody>
+      </p:sp>
+      <p:sp>
+        <p:nvSpPr>
+          <p:cNvPr id="9" name="TextBox 8"/>
+          <p:cNvSpPr txBox="1"/>
+          <p:nvPr/>
+        </p:nvSpPr>
+        <p:spPr>
+          <a:xfrm>
+            <a:off x="914400" y="2532888"/>
+            <a:ext cx="10332720" cy="621792"/>
+          </a:xfrm>
+          <a:prstGeom prst="rect">
+            <a:avLst/>
+          </a:prstGeom>
+          <a:noFill/>
+        </p:spPr>
+        <p:txBody>
+          <a:bodyPr wrap="square">
+            <a:spAutoFit/>
+          </a:bodyPr>
+          <a:lstStyle/>
+          <a:p>
+            <a:pPr>
+              <a:defRPr sz="1200">
+                <a:solidFill>
+                  <a:srgbClr val="241E19"/>
+                </a:solidFill>
+              </a:defRPr>
+            </a:pPr>
+            <a:r>
+              <a:t>07. 수(水) 테라피 (산화질소)  |  고농도 산화질소(NO) 수 1.5L 정량 음용을 통한 혈관 확장 및 15분 전신 고압 나노 미스트 챔버 입실</a:t>
+            </a:r>
+          </a:p>
+        </p:txBody>
+      </p:sp>
+      <p:sp>
+        <p:nvSpPr>
+          <p:cNvPr id="10" name="Rounded Rectangle 9"/>
+          <p:cNvSpPr/>
+          <p:nvPr/>
+        </p:nvSpPr>
+        <p:spPr>
+          <a:xfrm>
+            <a:off x="731520" y="3383280"/>
+            <a:ext cx="10728655" cy="822960"/>
+          </a:xfrm>
+          <a:prstGeom prst="roundRect">
+            <a:avLst/>
+          </a:prstGeom>
+          <a:solidFill>
+            <a:srgbClr val="FFFFFF"/>
+          </a:solidFill>
+          <a:ln w="13970">
+            <a:solidFill>
+              <a:srgbClr val="C9A876"/>
+            </a:solidFill>
+          </a:ln>
+        </p:spPr>
+        <p:style>
+          <a:lnRef idx="1">
+            <a:schemeClr val="accent1"/>
+          </a:lnRef>
+          <a:fillRef idx="3">
+            <a:schemeClr val="accent1"/>
+          </a:fillRef>
+          <a:effectRef idx="2">
+            <a:schemeClr val="accent1"/>
+          </a:effectRef>
+          <a:fontRef idx="minor">
+            <a:schemeClr val="lt1"/>
+          </a:fontRef>
+        </p:style>
+        <p:txBody>
+          <a:bodyPr rtlCol="0" anchor="ctr"/>
+          <a:lstStyle/>
+          <a:p>
+            <a:pPr algn="ctr"/>
+          </a:p>
+        </p:txBody>
+      </p:sp>
+      <p:sp>
+        <p:nvSpPr>
+          <p:cNvPr id="11" name="TextBox 10"/>
+          <p:cNvSpPr txBox="1"/>
+          <p:nvPr/>
+        </p:nvSpPr>
+        <p:spPr>
+          <a:xfrm>
+            <a:off x="914400" y="3493008"/>
+            <a:ext cx="10332720" cy="621792"/>
+          </a:xfrm>
+          <a:prstGeom prst="rect">
+            <a:avLst/>
+          </a:prstGeom>
+          <a:noFill/>
+        </p:spPr>
+        <p:txBody>
+          <a:bodyPr wrap="square">
+            <a:spAutoFit/>
+          </a:bodyPr>
+          <a:lstStyle/>
+          <a:p>
+            <a:pPr>
+              <a:defRPr sz="1200">
+                <a:solidFill>
+                  <a:srgbClr val="241E19"/>
+                </a:solidFill>
+              </a:defRPr>
+            </a:pPr>
+            <a:r>
+              <a:t>08. 온열 테라피 (체온 1℃ 상승)  |  척추 전용 온열 오일 도포 후 42~45℃ 원적외선 챔버 1시간 입실 (심부 체온 1℃ 상승, 면역 NK세포 5배 증대)</a:t>
+            </a:r>
+          </a:p>
+        </p:txBody>
+      </p:sp>
+      <p:sp>
+        <p:nvSpPr>
+          <p:cNvPr id="12" name="Rounded Rectangle 11"/>
+          <p:cNvSpPr/>
+          <p:nvPr/>
+        </p:nvSpPr>
+        <p:spPr>
+          <a:xfrm>
+            <a:off x="731520" y="4343400"/>
+            <a:ext cx="10728655" cy="822960"/>
+          </a:xfrm>
+          <a:prstGeom prst="roundRect">
+            <a:avLst/>
+          </a:prstGeom>
+          <a:solidFill>
+            <a:srgbClr val="FFFFFF"/>
+          </a:solidFill>
+          <a:ln w="13970">
+            <a:solidFill>
+              <a:srgbClr val="C9A876"/>
+            </a:solidFill>
+          </a:ln>
+        </p:spPr>
+        <p:style>
+          <a:lnRef idx="1">
+            <a:schemeClr val="accent1"/>
+          </a:lnRef>
+          <a:fillRef idx="3">
+            <a:schemeClr val="accent1"/>
+          </a:fillRef>
+          <a:effectRef idx="2">
+            <a:schemeClr val="accent1"/>
+          </a:effectRef>
+          <a:fontRef idx="minor">
+            <a:schemeClr val="lt1"/>
+          </a:fontRef>
+        </p:style>
+        <p:txBody>
+          <a:bodyPr rtlCol="0" anchor="ctr"/>
+          <a:lstStyle/>
+          <a:p>
+            <a:pPr algn="ctr"/>
+          </a:p>
+        </p:txBody>
+      </p:sp>
+      <p:sp>
+        <p:nvSpPr>
+          <p:cNvPr id="13" name="TextBox 12"/>
+          <p:cNvSpPr txBox="1"/>
+          <p:nvPr/>
+        </p:nvSpPr>
+        <p:spPr>
+          <a:xfrm>
+            <a:off x="914400" y="4453128"/>
+            <a:ext cx="10332720" cy="621792"/>
+          </a:xfrm>
+          <a:prstGeom prst="rect">
+            <a:avLst/>
+          </a:prstGeom>
+          <a:noFill/>
+        </p:spPr>
+        <p:txBody>
+          <a:bodyPr wrap="square">
+            <a:spAutoFit/>
+          </a:bodyPr>
+          <a:lstStyle/>
+          <a:p>
+            <a:pPr>
+              <a:defRPr sz="1200">
+                <a:solidFill>
+                  <a:srgbClr val="241E19"/>
+                </a:solidFill>
+              </a:defRPr>
+            </a:pPr>
+            <a:r>
+              <a:t>09. 전통 기체조 (태극선법)  |  서양식 필라테스를 배제하고 단전 호흡으로 탁기를 배출하며 기(氣)의 자연스러운 흐름을 복원하는 태극선법 8초식</a:t>
+            </a:r>
+          </a:p>
+        </p:txBody>
+      </p:sp>
+      <p:sp>
+        <p:nvSpPr>
+          <p:cNvPr id="14" name="Rounded Rectangle 13"/>
+          <p:cNvSpPr/>
+          <p:nvPr/>
+        </p:nvSpPr>
+        <p:spPr>
+          <a:xfrm>
+            <a:off x="731520" y="5303520"/>
+            <a:ext cx="10728655" cy="822960"/>
+          </a:xfrm>
+          <a:prstGeom prst="roundRect">
+            <a:avLst/>
+          </a:prstGeom>
+          <a:solidFill>
+            <a:srgbClr val="FFFFFF"/>
+          </a:solidFill>
+          <a:ln w="13970">
+            <a:solidFill>
+              <a:srgbClr val="C9A876"/>
+            </a:solidFill>
+          </a:ln>
+        </p:spPr>
+        <p:style>
+          <a:lnRef idx="1">
+            <a:schemeClr val="accent1"/>
+          </a:lnRef>
+          <a:fillRef idx="3">
+            <a:schemeClr val="accent1"/>
+          </a:fillRef>
+          <a:effectRef idx="2">
+            <a:schemeClr val="accent1"/>
+          </a:effectRef>
+          <a:fontRef idx="minor">
+            <a:schemeClr val="lt1"/>
+          </a:fontRef>
+        </p:style>
+        <p:txBody>
+          <a:bodyPr rtlCol="0" anchor="ctr"/>
+          <a:lstStyle/>
+          <a:p>
+            <a:pPr algn="ctr"/>
+          </a:p>
+        </p:txBody>
+      </p:sp>
+      <p:sp>
+        <p:nvSpPr>
+          <p:cNvPr id="15" name="TextBox 14"/>
+          <p:cNvSpPr txBox="1"/>
+          <p:nvPr/>
+        </p:nvSpPr>
+        <p:spPr>
+          <a:xfrm>
+            <a:off x="914400" y="5413248"/>
+            <a:ext cx="10332720" cy="621792"/>
+          </a:xfrm>
+          <a:prstGeom prst="rect">
+            <a:avLst/>
+          </a:prstGeom>
+          <a:noFill/>
+        </p:spPr>
+        <p:txBody>
+          <a:bodyPr wrap="square">
+            <a:spAutoFit/>
+          </a:bodyPr>
+          <a:lstStyle/>
+          <a:p>
+            <a:pPr>
+              <a:defRPr sz="1200">
+                <a:solidFill>
+                  <a:srgbClr val="241E19"/>
+                </a:solidFill>
+              </a:defRPr>
+            </a:pPr>
+            <a:r>
+              <a:t>10. 멘탈 관리 (한국 정통 고요 명상)  |  서양식 싱잉볼을 배제하고 한국 전통 사찰과 선도(仙道)의 고요한 침묵 명상으로 뇌 피로도 70% 감소</a:t>
+            </a:r>
+          </a:p>
+        </p:txBody>
+      </p:sp>
+    </p:spTree>
+  </p:cSld>
+  <p:clrMapOvr>
+    <a:masterClrMapping/>
+  </p:clrMapOvr>
+</p:sld>
+</file>
+
+<file path=ppt/slides/slide11.xml><?xml version="1.0" encoding="utf-8"?>
+<p:sld xmlns:a="http://schemas.openxmlformats.org/drawingml/2006/main" xmlns:p="http://schemas.openxmlformats.org/presentationml/2006/main" xmlns:r="http://schemas.openxmlformats.org/officeDocument/2006/relationships">
+  <p:cSld>
+    <p:spTree>
+      <p:nvGrpSpPr>
+        <p:cNvPr id="1" name=""/>
+        <p:cNvGrpSpPr/>
+        <p:nvPr/>
+      </p:nvGrpSpPr>
+      <p:grpSpPr/>
+      <p:sp>
+        <p:nvSpPr>
+          <p:cNvPr id="2" name="Rectangle 1"/>
+          <p:cNvSpPr/>
+          <p:nvPr/>
+        </p:nvSpPr>
+        <p:spPr>
+          <a:xfrm>
+            <a:off x="0" y="0"/>
+            <a:ext cx="12191695" cy="6858000"/>
+          </a:xfrm>
+          <a:prstGeom prst="rect">
+            <a:avLst/>
+          </a:prstGeom>
+          <a:solidFill>
+            <a:srgbClr val="FDFBF7"/>
+          </a:solidFill>
+          <a:ln>
+            <a:noFill/>
+          </a:ln>
+        </p:spPr>
+        <p:style>
+          <a:lnRef idx="1">
+            <a:schemeClr val="accent1"/>
+          </a:lnRef>
+          <a:fillRef idx="3">
+            <a:schemeClr val="accent1"/>
+          </a:fillRef>
+          <a:effectRef idx="2">
+            <a:schemeClr val="accent1"/>
+          </a:effectRef>
+          <a:fontRef idx="minor">
+            <a:schemeClr val="lt1"/>
+          </a:fontRef>
+        </p:style>
+        <p:txBody>
+          <a:bodyPr rtlCol="0" anchor="ctr"/>
+          <a:lstStyle/>
+          <a:p>
+            <a:pPr algn="ctr"/>
+          </a:p>
+        </p:txBody>
+      </p:sp>
+      <p:sp>
+        <p:nvSpPr>
+          <p:cNvPr id="3" name="TextBox 2"/>
+          <p:cNvSpPr txBox="1"/>
+          <p:nvPr/>
+        </p:nvSpPr>
+        <p:spPr>
+          <a:xfrm>
+            <a:off x="731520" y="365760"/>
+            <a:ext cx="10728655" cy="320040"/>
+          </a:xfrm>
+          <a:prstGeom prst="rect">
+            <a:avLst/>
+          </a:prstGeom>
+          <a:noFill/>
+        </p:spPr>
+        <p:txBody>
+          <a:bodyPr wrap="none">
+            <a:spAutoFit/>
+          </a:bodyPr>
+          <a:lstStyle/>
+          <a:p>
+            <a:pPr>
+              <a:defRPr sz="1000" b="1">
+                <a:solidFill>
+                  <a:srgbClr val="A37F48"/>
+                </a:solidFill>
+              </a:defRPr>
+            </a:pPr>
+            <a:r>
+              <a:t>SHRIVEDA FOOD CARE</a:t>
+            </a:r>
+          </a:p>
+        </p:txBody>
+      </p:sp>
+      <p:sp>
+        <p:nvSpPr>
+          <p:cNvPr id="4" name="TextBox 3"/>
+          <p:cNvSpPr txBox="1"/>
+          <p:nvPr/>
+        </p:nvSpPr>
+        <p:spPr>
+          <a:xfrm>
+            <a:off x="731520" y="640080"/>
+            <a:ext cx="10728655" cy="640080"/>
+          </a:xfrm>
+          <a:prstGeom prst="rect">
+            <a:avLst/>
+          </a:prstGeom>
+          <a:noFill/>
+        </p:spPr>
+        <p:txBody>
+          <a:bodyPr wrap="none">
+            <a:spAutoFit/>
+          </a:bodyPr>
+          <a:lstStyle/>
+          <a:p>
+            <a:pPr>
+              <a:defRPr sz="2100" b="1">
+                <a:solidFill>
+                  <a:srgbClr val="241E19"/>
+                </a:solidFill>
+              </a:defRPr>
+            </a:pPr>
+            <a:r>
+              <a:t>슈리베다식 푸드 테라피 : 12시간 단식 &amp; 4대 체질 미역국</a:t>
+            </a:r>
+          </a:p>
+        </p:txBody>
+      </p:sp>
+      <p:sp>
+        <p:nvSpPr>
+          <p:cNvPr id="5" name="Rectangle 4"/>
+          <p:cNvSpPr/>
+          <p:nvPr/>
+        </p:nvSpPr>
+        <p:spPr>
+          <a:xfrm>
+            <a:off x="731520" y="1261872"/>
+            <a:ext cx="2011680" cy="22860"/>
+          </a:xfrm>
+          <a:prstGeom prst="rect">
+            <a:avLst/>
+          </a:prstGeom>
+          <a:solidFill>
+            <a:srgbClr val="C9A876"/>
+          </a:solidFill>
+          <a:ln>
+            <a:noFill/>
+          </a:ln>
+        </p:spPr>
+        <p:style>
+          <a:lnRef idx="1">
+            <a:schemeClr val="accent1"/>
+          </a:lnRef>
+          <a:fillRef idx="3">
+            <a:schemeClr val="accent1"/>
+          </a:fillRef>
+          <a:effectRef idx="2">
+            <a:schemeClr val="accent1"/>
+          </a:effectRef>
+          <a:fontRef idx="minor">
+            <a:schemeClr val="lt1"/>
+          </a:fontRef>
+        </p:style>
+        <p:txBody>
+          <a:bodyPr rtlCol="0" anchor="ctr"/>
+          <a:lstStyle/>
+          <a:p>
+            <a:pPr algn="ctr"/>
+          </a:p>
+        </p:txBody>
+      </p:sp>
+      <p:sp>
+        <p:nvSpPr>
+          <p:cNvPr id="6" name="Rounded Rectangle 5"/>
+          <p:cNvSpPr/>
+          <p:nvPr/>
+        </p:nvSpPr>
+        <p:spPr>
+          <a:xfrm>
+            <a:off x="731520" y="1463040"/>
+            <a:ext cx="5120640" cy="4846320"/>
+          </a:xfrm>
+          <a:prstGeom prst="roundRect">
+            <a:avLst/>
+          </a:prstGeom>
+          <a:solidFill>
+            <a:srgbClr val="1C362B"/>
+          </a:solidFill>
+          <a:ln w="13970">
+            <a:solidFill>
+              <a:srgbClr val="C9A876"/>
+            </a:solidFill>
+          </a:ln>
+        </p:spPr>
+        <p:style>
+          <a:lnRef idx="1">
+            <a:schemeClr val="accent1"/>
+          </a:lnRef>
+          <a:fillRef idx="3">
+            <a:schemeClr val="accent1"/>
+          </a:fillRef>
+          <a:effectRef idx="2">
+            <a:schemeClr val="accent1"/>
+          </a:effectRef>
+          <a:fontRef idx="minor">
+            <a:schemeClr val="lt1"/>
+          </a:fontRef>
+        </p:style>
+        <p:txBody>
+          <a:bodyPr rtlCol="0" anchor="ctr"/>
+          <a:lstStyle/>
+          <a:p>
+            <a:pPr algn="ctr"/>
+          </a:p>
+        </p:txBody>
+      </p:sp>
+      <p:sp>
+        <p:nvSpPr>
+          <p:cNvPr id="7" name="TextBox 6"/>
+          <p:cNvSpPr txBox="1"/>
+          <p:nvPr/>
+        </p:nvSpPr>
+        <p:spPr>
+          <a:xfrm>
+            <a:off x="1005840" y="1737360"/>
+            <a:ext cx="4572000" cy="4297680"/>
+          </a:xfrm>
+          <a:prstGeom prst="rect">
+            <a:avLst/>
+          </a:prstGeom>
+          <a:noFill/>
+        </p:spPr>
+        <p:txBody>
+          <a:bodyPr wrap="square">
+            <a:spAutoFit/>
+          </a:bodyPr>
+          <a:lstStyle/>
+          <a:p>
+            <a:pPr>
+              <a:spcAft>
+                <a:spcPts val="1200"/>
+              </a:spcAft>
+              <a:defRPr sz="1650" b="1">
+                <a:solidFill>
+                  <a:srgbClr val="C9A876"/>
+                </a:solidFill>
+              </a:defRPr>
+            </a:pPr>
+            <a:r>
+              <a:t>12시간 단식 자가포식(Autophagy) 프로토콜</a:t>
+            </a:r>
+          </a:p>
+          <a:p>
+            <a:pPr>
+              <a:lnSpc>
+                <a:spcPct val="135000"/>
+              </a:lnSpc>
+              <a:defRPr sz="1200">
+                <a:solidFill>
+                  <a:srgbClr val="DCD7C8"/>
+                </a:solidFill>
+              </a:defRPr>
+            </a:pPr>
+            <a:r>
+              <a:t>• 18:00 저녁 약선 식사 종료 및 12시간 단식 돌입</a:t>
+            </a:r>
+            <a:br/>
+            <a:r>
+              <a:t>• 20:00 산화질소(NO) 수 음용 &amp; 30분 침묵 명상</a:t>
+            </a:r>
+            <a:br/>
+            <a:r>
+              <a:t>• 06:00 12시간 단식 완료 ➔ 기상 직후 미온수 &amp; 체질 주스</a:t>
+            </a:r>
+            <a:br/>
+            <a:r>
+              <a:t>• 07:30 4대 체질 맞춤 영양 미역국 조식 정식 제공</a:t>
+            </a:r>
+            <a:br/>
+            <a:br/>
+            <a:r>
+              <a:t>💡 자가포식 효과: 12시간 동안 소화기를 완전히 쉬게 함으로써 세포 내 손상된 단백질과 노폐물을 청소하고 장내 미생물 환경을 리셋합니다.</a:t>
+            </a:r>
+          </a:p>
+        </p:txBody>
+      </p:sp>
+      <p:sp>
+        <p:nvSpPr>
+          <p:cNvPr id="8" name="Rounded Rectangle 7"/>
+          <p:cNvSpPr/>
+          <p:nvPr/>
+        </p:nvSpPr>
+        <p:spPr>
+          <a:xfrm>
+            <a:off x="6217920" y="1463040"/>
+            <a:ext cx="5212080" cy="4846320"/>
+          </a:xfrm>
+          <a:prstGeom prst="roundRect">
+            <a:avLst/>
+          </a:prstGeom>
+          <a:solidFill>
+            <a:srgbClr val="FFFFFF"/>
+          </a:solidFill>
+          <a:ln w="13970">
+            <a:solidFill>
+              <a:srgbClr val="C9A876"/>
+            </a:solidFill>
+          </a:ln>
+        </p:spPr>
+        <p:style>
+          <a:lnRef idx="1">
+            <a:schemeClr val="accent1"/>
+          </a:lnRef>
+          <a:fillRef idx="3">
+            <a:schemeClr val="accent1"/>
+          </a:fillRef>
+          <a:effectRef idx="2">
+            <a:schemeClr val="accent1"/>
+          </a:effectRef>
+          <a:fontRef idx="minor">
+            <a:schemeClr val="lt1"/>
+          </a:fontRef>
+        </p:style>
+        <p:txBody>
+          <a:bodyPr rtlCol="0" anchor="ctr"/>
+          <a:lstStyle/>
+          <a:p>
+            <a:pPr algn="ctr"/>
+          </a:p>
+        </p:txBody>
+      </p:sp>
+      <p:sp>
+        <p:nvSpPr>
+          <p:cNvPr id="9" name="TextBox 8"/>
+          <p:cNvSpPr txBox="1"/>
+          <p:nvPr/>
+        </p:nvSpPr>
+        <p:spPr>
+          <a:xfrm>
+            <a:off x="6492240" y="1737360"/>
+            <a:ext cx="4663440" cy="4297680"/>
+          </a:xfrm>
+          <a:prstGeom prst="rect">
+            <a:avLst/>
+          </a:prstGeom>
+          <a:noFill/>
+        </p:spPr>
+        <p:txBody>
+          <a:bodyPr wrap="square">
+            <a:spAutoFit/>
+          </a:bodyPr>
+          <a:lstStyle/>
+          <a:p>
+            <a:pPr>
+              <a:spcAft>
+                <a:spcPts val="1200"/>
+              </a:spcAft>
+              <a:defRPr sz="1650" b="1">
+                <a:solidFill>
+                  <a:srgbClr val="241E19"/>
+                </a:solidFill>
+              </a:defRPr>
+            </a:pPr>
+            <a:r>
+              <a:t>4대 체질 맞춤 프리미엄 미역국 조식</a:t>
             </a:r>
           </a:p>
           <a:p>
@@ -3223,71 +4241,2384 @@
               <a:spcAft>
                 <a:spcPts val="600"/>
               </a:spcAft>
-              <a:defRPr sz="4000" b="1">
-                <a:solidFill>
-                  <a:srgbClr val="FFFFFF"/>
-                </a:solidFill>
-              </a:defRPr>
-            </a:pPr>
-            <a:r>
-              <a:t>Sasang-Kuren</a:t>
-            </a:r>
-          </a:p>
-          <a:p>
-            <a:pPr>
+              <a:defRPr sz="1150">
+                <a:solidFill>
+                  <a:srgbClr val="554B44"/>
+                </a:solidFill>
+              </a:defRPr>
+            </a:pPr>
+            <a:r>
+              <a:t>• 태음인: 소고기 양지 들깨 미역국 + 율무밥 (폐/기관지 윤활 &amp; 고단백)</a:t>
+            </a:r>
+          </a:p>
+          <a:p>
+            <a:pPr>
+              <a:spcAft>
+                <a:spcPts val="600"/>
+              </a:spcAft>
+              <a:defRPr sz="1150">
+                <a:solidFill>
+                  <a:srgbClr val="554B44"/>
+                </a:solidFill>
+              </a:defRPr>
+            </a:pPr>
+            <a:r>
+              <a:t>• 소양인: 맑은 돼지고기 수육 미역국 or 조개 미역국 + 보리밥 (소화기 열 해독)</a:t>
+            </a:r>
+          </a:p>
+          <a:p>
+            <a:pPr>
+              <a:spcAft>
+                <a:spcPts val="600"/>
+              </a:spcAft>
+              <a:defRPr sz="1150">
+                <a:solidFill>
+                  <a:srgbClr val="554B44"/>
+                </a:solidFill>
+              </a:defRPr>
+            </a:pPr>
+            <a:r>
+              <a:t>• 소음인: 닭가슴살 황기 보양 미역국 + 찹쌀밥 (위장 보온 &amp; 기력 증진)</a:t>
+            </a:r>
+          </a:p>
+          <a:p>
+            <a:pPr>
+              <a:spcAft>
+                <a:spcPts val="600"/>
+              </a:spcAft>
+              <a:defRPr sz="1150">
+                <a:solidFill>
+                  <a:srgbClr val="554B44"/>
+                </a:solidFill>
+              </a:defRPr>
+            </a:pPr>
+            <a:r>
+              <a:t>• 태양인: 완도산 전복 홍합 맑은 해물 미역국 + 메밀죽 (간 해독 &amp; 하체 강화)</a:t>
+            </a:r>
+          </a:p>
+        </p:txBody>
+      </p:sp>
+    </p:spTree>
+  </p:cSld>
+  <p:clrMapOvr>
+    <a:masterClrMapping/>
+  </p:clrMapOvr>
+</p:sld>
+</file>
+
+<file path=ppt/slides/slide12.xml><?xml version="1.0" encoding="utf-8"?>
+<p:sld xmlns:a="http://schemas.openxmlformats.org/drawingml/2006/main" xmlns:p="http://schemas.openxmlformats.org/presentationml/2006/main" xmlns:r="http://schemas.openxmlformats.org/officeDocument/2006/relationships">
+  <p:cSld>
+    <p:spTree>
+      <p:nvGrpSpPr>
+        <p:cNvPr id="1" name=""/>
+        <p:cNvGrpSpPr/>
+        <p:nvPr/>
+      </p:nvGrpSpPr>
+      <p:grpSpPr/>
+      <p:sp>
+        <p:nvSpPr>
+          <p:cNvPr id="2" name="Rectangle 1"/>
+          <p:cNvSpPr/>
+          <p:nvPr/>
+        </p:nvSpPr>
+        <p:spPr>
+          <a:xfrm>
+            <a:off x="0" y="0"/>
+            <a:ext cx="12191695" cy="6858000"/>
+          </a:xfrm>
+          <a:prstGeom prst="rect">
+            <a:avLst/>
+          </a:prstGeom>
+          <a:solidFill>
+            <a:srgbClr val="FDFBF7"/>
+          </a:solidFill>
+          <a:ln>
+            <a:noFill/>
+          </a:ln>
+        </p:spPr>
+        <p:style>
+          <a:lnRef idx="1">
+            <a:schemeClr val="accent1"/>
+          </a:lnRef>
+          <a:fillRef idx="3">
+            <a:schemeClr val="accent1"/>
+          </a:fillRef>
+          <a:effectRef idx="2">
+            <a:schemeClr val="accent1"/>
+          </a:effectRef>
+          <a:fontRef idx="minor">
+            <a:schemeClr val="lt1"/>
+          </a:fontRef>
+        </p:style>
+        <p:txBody>
+          <a:bodyPr rtlCol="0" anchor="ctr"/>
+          <a:lstStyle/>
+          <a:p>
+            <a:pPr algn="ctr"/>
+          </a:p>
+        </p:txBody>
+      </p:sp>
+      <p:sp>
+        <p:nvSpPr>
+          <p:cNvPr id="3" name="TextBox 2"/>
+          <p:cNvSpPr txBox="1"/>
+          <p:nvPr/>
+        </p:nvSpPr>
+        <p:spPr>
+          <a:xfrm>
+            <a:off x="731520" y="365760"/>
+            <a:ext cx="10728655" cy="320040"/>
+          </a:xfrm>
+          <a:prstGeom prst="rect">
+            <a:avLst/>
+          </a:prstGeom>
+          <a:noFill/>
+        </p:spPr>
+        <p:txBody>
+          <a:bodyPr wrap="none">
+            <a:spAutoFit/>
+          </a:bodyPr>
+          <a:lstStyle/>
+          <a:p>
+            <a:pPr>
+              <a:defRPr sz="1000" b="1">
+                <a:solidFill>
+                  <a:srgbClr val="A37F48"/>
+                </a:solidFill>
+              </a:defRPr>
+            </a:pPr>
+            <a:r>
+              <a:t>SCIENTIFIC DIAGNOSIS</a:t>
+            </a:r>
+          </a:p>
+        </p:txBody>
+      </p:sp>
+      <p:sp>
+        <p:nvSpPr>
+          <p:cNvPr id="4" name="TextBox 3"/>
+          <p:cNvSpPr txBox="1"/>
+          <p:nvPr/>
+        </p:nvSpPr>
+        <p:spPr>
+          <a:xfrm>
+            <a:off x="731520" y="640080"/>
+            <a:ext cx="10728655" cy="640080"/>
+          </a:xfrm>
+          <a:prstGeom prst="rect">
+            <a:avLst/>
+          </a:prstGeom>
+          <a:noFill/>
+        </p:spPr>
+        <p:txBody>
+          <a:bodyPr wrap="none">
+            <a:spAutoFit/>
+          </a:bodyPr>
+          <a:lstStyle/>
+          <a:p>
+            <a:pPr>
+              <a:defRPr sz="2100" b="1">
+                <a:solidFill>
+                  <a:srgbClr val="241E19"/>
+                </a:solidFill>
+              </a:defRPr>
+            </a:pPr>
+            <a:r>
+              <a:t>데이터 기반 4단계 정밀 분석 및 체질 확정 시스템</a:t>
+            </a:r>
+          </a:p>
+        </p:txBody>
+      </p:sp>
+      <p:sp>
+        <p:nvSpPr>
+          <p:cNvPr id="5" name="Rectangle 4"/>
+          <p:cNvSpPr/>
+          <p:nvPr/>
+        </p:nvSpPr>
+        <p:spPr>
+          <a:xfrm>
+            <a:off x="731520" y="1261872"/>
+            <a:ext cx="2011680" cy="22860"/>
+          </a:xfrm>
+          <a:prstGeom prst="rect">
+            <a:avLst/>
+          </a:prstGeom>
+          <a:solidFill>
+            <a:srgbClr val="C9A876"/>
+          </a:solidFill>
+          <a:ln>
+            <a:noFill/>
+          </a:ln>
+        </p:spPr>
+        <p:style>
+          <a:lnRef idx="1">
+            <a:schemeClr val="accent1"/>
+          </a:lnRef>
+          <a:fillRef idx="3">
+            <a:schemeClr val="accent1"/>
+          </a:fillRef>
+          <a:effectRef idx="2">
+            <a:schemeClr val="accent1"/>
+          </a:effectRef>
+          <a:fontRef idx="minor">
+            <a:schemeClr val="lt1"/>
+          </a:fontRef>
+        </p:style>
+        <p:txBody>
+          <a:bodyPr rtlCol="0" anchor="ctr"/>
+          <a:lstStyle/>
+          <a:p>
+            <a:pPr algn="ctr"/>
+          </a:p>
+        </p:txBody>
+      </p:sp>
+      <p:sp>
+        <p:nvSpPr>
+          <p:cNvPr id="6" name="Rounded Rectangle 5"/>
+          <p:cNvSpPr/>
+          <p:nvPr/>
+        </p:nvSpPr>
+        <p:spPr>
+          <a:xfrm>
+            <a:off x="731520" y="1463040"/>
+            <a:ext cx="2560320" cy="4846320"/>
+          </a:xfrm>
+          <a:prstGeom prst="roundRect">
+            <a:avLst/>
+          </a:prstGeom>
+          <a:solidFill>
+            <a:srgbClr val="FFFFFF"/>
+          </a:solidFill>
+          <a:ln w="13970">
+            <a:solidFill>
+              <a:srgbClr val="C9A876"/>
+            </a:solidFill>
+          </a:ln>
+        </p:spPr>
+        <p:style>
+          <a:lnRef idx="1">
+            <a:schemeClr val="accent1"/>
+          </a:lnRef>
+          <a:fillRef idx="3">
+            <a:schemeClr val="accent1"/>
+          </a:fillRef>
+          <a:effectRef idx="2">
+            <a:schemeClr val="accent1"/>
+          </a:effectRef>
+          <a:fontRef idx="minor">
+            <a:schemeClr val="lt1"/>
+          </a:fontRef>
+        </p:style>
+        <p:txBody>
+          <a:bodyPr rtlCol="0" anchor="ctr"/>
+          <a:lstStyle/>
+          <a:p>
+            <a:pPr algn="ctr"/>
+          </a:p>
+        </p:txBody>
+      </p:sp>
+      <p:sp>
+        <p:nvSpPr>
+          <p:cNvPr id="7" name="TextBox 6"/>
+          <p:cNvSpPr txBox="1"/>
+          <p:nvPr/>
+        </p:nvSpPr>
+        <p:spPr>
+          <a:xfrm>
+            <a:off x="868680" y="1645920"/>
+            <a:ext cx="2286000" cy="4480560"/>
+          </a:xfrm>
+          <a:prstGeom prst="rect">
+            <a:avLst/>
+          </a:prstGeom>
+          <a:noFill/>
+        </p:spPr>
+        <p:txBody>
+          <a:bodyPr wrap="square">
+            <a:spAutoFit/>
+          </a:bodyPr>
+          <a:lstStyle/>
+          <a:p>
+            <a:pPr>
+              <a:defRPr sz="1300" b="1">
+                <a:solidFill>
+                  <a:srgbClr val="A37F48"/>
+                </a:solidFill>
+              </a:defRPr>
+            </a:pPr>
+            <a:r>
+              <a:t>STEP 01</a:t>
+            </a:r>
+          </a:p>
+          <a:p>
+            <a:pPr>
+              <a:spcAft>
+                <a:spcPts val="1000"/>
+              </a:spcAft>
+              <a:defRPr sz="1400" b="1">
+                <a:solidFill>
+                  <a:srgbClr val="241E19"/>
+                </a:solidFill>
+              </a:defRPr>
+            </a:pPr>
+            <a:r>
+              <a:t>기초 생체 &amp; 병력 문진표</a:t>
+            </a:r>
+          </a:p>
+          <a:p>
+            <a:pPr>
+              <a:lnSpc>
+                <a:spcPct val="130000"/>
+              </a:lnSpc>
+              <a:defRPr sz="1100">
+                <a:solidFill>
+                  <a:srgbClr val="554B44"/>
+                </a:solidFill>
+              </a:defRPr>
+            </a:pPr>
+            <a:r>
+              <a:t>• 혈압, 공복 혈당, 가족력(심혈관/암)</a:t>
+            </a:r>
+            <a:br/>
+            <a:r>
+              <a:t>• 담낭 절제 등 주요 수술력 기록</a:t>
+            </a:r>
+            <a:br/>
+            <a:r>
+              <a:t>• 개인별 알레르기 인자 전방위 분석</a:t>
+            </a:r>
+          </a:p>
+        </p:txBody>
+      </p:sp>
+      <p:sp>
+        <p:nvSpPr>
+          <p:cNvPr id="8" name="Rounded Rectangle 7"/>
+          <p:cNvSpPr/>
+          <p:nvPr/>
+        </p:nvSpPr>
+        <p:spPr>
+          <a:xfrm>
+            <a:off x="3429000" y="1463040"/>
+            <a:ext cx="2560320" cy="4846320"/>
+          </a:xfrm>
+          <a:prstGeom prst="roundRect">
+            <a:avLst/>
+          </a:prstGeom>
+          <a:solidFill>
+            <a:srgbClr val="FFFFFF"/>
+          </a:solidFill>
+          <a:ln w="13970">
+            <a:solidFill>
+              <a:srgbClr val="C9A876"/>
+            </a:solidFill>
+          </a:ln>
+        </p:spPr>
+        <p:style>
+          <a:lnRef idx="1">
+            <a:schemeClr val="accent1"/>
+          </a:lnRef>
+          <a:fillRef idx="3">
+            <a:schemeClr val="accent1"/>
+          </a:fillRef>
+          <a:effectRef idx="2">
+            <a:schemeClr val="accent1"/>
+          </a:effectRef>
+          <a:fontRef idx="minor">
+            <a:schemeClr val="lt1"/>
+          </a:fontRef>
+        </p:style>
+        <p:txBody>
+          <a:bodyPr rtlCol="0" anchor="ctr"/>
+          <a:lstStyle/>
+          <a:p>
+            <a:pPr algn="ctr"/>
+          </a:p>
+        </p:txBody>
+      </p:sp>
+      <p:sp>
+        <p:nvSpPr>
+          <p:cNvPr id="9" name="TextBox 8"/>
+          <p:cNvSpPr txBox="1"/>
+          <p:nvPr/>
+        </p:nvSpPr>
+        <p:spPr>
+          <a:xfrm>
+            <a:off x="3566160" y="1645920"/>
+            <a:ext cx="2286000" cy="4480560"/>
+          </a:xfrm>
+          <a:prstGeom prst="rect">
+            <a:avLst/>
+          </a:prstGeom>
+          <a:noFill/>
+        </p:spPr>
+        <p:txBody>
+          <a:bodyPr wrap="square">
+            <a:spAutoFit/>
+          </a:bodyPr>
+          <a:lstStyle/>
+          <a:p>
+            <a:pPr>
+              <a:defRPr sz="1300" b="1">
+                <a:solidFill>
+                  <a:srgbClr val="A37F48"/>
+                </a:solidFill>
+              </a:defRPr>
+            </a:pPr>
+            <a:r>
+              <a:t>STEP 02</a:t>
+            </a:r>
+          </a:p>
+          <a:p>
+            <a:pPr>
+              <a:spcAft>
+                <a:spcPts val="1000"/>
+              </a:spcAft>
+              <a:defRPr sz="1400" b="1">
+                <a:solidFill>
+                  <a:srgbClr val="241E19"/>
+                </a:solidFill>
+              </a:defRPr>
+            </a:pPr>
+            <a:r>
+              <a:t>인바디 &amp; 양자/뇌파(EEG)</a:t>
+            </a:r>
+          </a:p>
+          <a:p>
+            <a:pPr>
+              <a:lnSpc>
+                <a:spcPct val="130000"/>
+              </a:lnSpc>
+              <a:defRPr sz="1100">
+                <a:solidFill>
+                  <a:srgbClr val="554B44"/>
+                </a:solidFill>
+              </a:defRPr>
+            </a:pPr>
+            <a:r>
+              <a:t>• InBody 770 체수분율 &amp; 림프 정체</a:t>
+            </a:r>
+            <a:br/>
+            <a:r>
+              <a:t>• 장부 에너지 과부하/결핍 판독</a:t>
+            </a:r>
+            <a:br/>
+            <a:r>
+              <a:t>• High-Beta파 68% 뇌 피로 지수 측정</a:t>
+            </a:r>
+          </a:p>
+        </p:txBody>
+      </p:sp>
+      <p:sp>
+        <p:nvSpPr>
+          <p:cNvPr id="10" name="Rounded Rectangle 9"/>
+          <p:cNvSpPr/>
+          <p:nvPr/>
+        </p:nvSpPr>
+        <p:spPr>
+          <a:xfrm>
+            <a:off x="6126480" y="1463040"/>
+            <a:ext cx="2560320" cy="4846320"/>
+          </a:xfrm>
+          <a:prstGeom prst="roundRect">
+            <a:avLst/>
+          </a:prstGeom>
+          <a:solidFill>
+            <a:srgbClr val="FFFFFF"/>
+          </a:solidFill>
+          <a:ln w="13970">
+            <a:solidFill>
+              <a:srgbClr val="C9A876"/>
+            </a:solidFill>
+          </a:ln>
+        </p:spPr>
+        <p:style>
+          <a:lnRef idx="1">
+            <a:schemeClr val="accent1"/>
+          </a:lnRef>
+          <a:fillRef idx="3">
+            <a:schemeClr val="accent1"/>
+          </a:fillRef>
+          <a:effectRef idx="2">
+            <a:schemeClr val="accent1"/>
+          </a:effectRef>
+          <a:fontRef idx="minor">
+            <a:schemeClr val="lt1"/>
+          </a:fontRef>
+        </p:style>
+        <p:txBody>
+          <a:bodyPr rtlCol="0" anchor="ctr"/>
+          <a:lstStyle/>
+          <a:p>
+            <a:pPr algn="ctr"/>
+          </a:p>
+        </p:txBody>
+      </p:sp>
+      <p:sp>
+        <p:nvSpPr>
+          <p:cNvPr id="11" name="TextBox 10"/>
+          <p:cNvSpPr txBox="1"/>
+          <p:nvPr/>
+        </p:nvSpPr>
+        <p:spPr>
+          <a:xfrm>
+            <a:off x="6263640" y="1645920"/>
+            <a:ext cx="2286000" cy="4480560"/>
+          </a:xfrm>
+          <a:prstGeom prst="rect">
+            <a:avLst/>
+          </a:prstGeom>
+          <a:noFill/>
+        </p:spPr>
+        <p:txBody>
+          <a:bodyPr wrap="square">
+            <a:spAutoFit/>
+          </a:bodyPr>
+          <a:lstStyle/>
+          <a:p>
+            <a:pPr>
+              <a:defRPr sz="1300" b="1">
+                <a:solidFill>
+                  <a:srgbClr val="A37F48"/>
+                </a:solidFill>
+              </a:defRPr>
+            </a:pPr>
+            <a:r>
+              <a:t>STEP 03</a:t>
+            </a:r>
+          </a:p>
+          <a:p>
+            <a:pPr>
+              <a:spcAft>
+                <a:spcPts val="1000"/>
+              </a:spcAft>
+              <a:defRPr sz="1400" b="1">
+                <a:solidFill>
+                  <a:srgbClr val="241E19"/>
+                </a:solidFill>
+              </a:defRPr>
+            </a:pPr>
+            <a:r>
+              <a:t>산화질소(NO) 관리</a:t>
+            </a:r>
+          </a:p>
+          <a:p>
+            <a:pPr>
+              <a:lnSpc>
+                <a:spcPct val="130000"/>
+              </a:lnSpc>
+              <a:defRPr sz="1100">
+                <a:solidFill>
+                  <a:srgbClr val="554B44"/>
+                </a:solidFill>
+              </a:defRPr>
+            </a:pPr>
+            <a:r>
+              <a:t>• 타액 NO 산화질소 스트립 판독</a:t>
+            </a:r>
+            <a:br/>
+            <a:r>
+              <a:t>• 혈관 탄성도 측정 및 결핍 진단</a:t>
+            </a:r>
+            <a:br/>
+            <a:r>
+              <a:t>• 1일 1.5L 음용 &amp; 나노 미스트 처방</a:t>
+            </a:r>
+          </a:p>
+        </p:txBody>
+      </p:sp>
+      <p:sp>
+        <p:nvSpPr>
+          <p:cNvPr id="12" name="Rounded Rectangle 11"/>
+          <p:cNvSpPr/>
+          <p:nvPr/>
+        </p:nvSpPr>
+        <p:spPr>
+          <a:xfrm>
+            <a:off x="8823960" y="1463040"/>
+            <a:ext cx="2560320" cy="4846320"/>
+          </a:xfrm>
+          <a:prstGeom prst="roundRect">
+            <a:avLst/>
+          </a:prstGeom>
+          <a:solidFill>
+            <a:srgbClr val="FFFFFF"/>
+          </a:solidFill>
+          <a:ln w="13970">
+            <a:solidFill>
+              <a:srgbClr val="C9A876"/>
+            </a:solidFill>
+          </a:ln>
+        </p:spPr>
+        <p:style>
+          <a:lnRef idx="1">
+            <a:schemeClr val="accent1"/>
+          </a:lnRef>
+          <a:fillRef idx="3">
+            <a:schemeClr val="accent1"/>
+          </a:fillRef>
+          <a:effectRef idx="2">
+            <a:schemeClr val="accent1"/>
+          </a:effectRef>
+          <a:fontRef idx="minor">
+            <a:schemeClr val="lt1"/>
+          </a:fontRef>
+        </p:style>
+        <p:txBody>
+          <a:bodyPr rtlCol="0" anchor="ctr"/>
+          <a:lstStyle/>
+          <a:p>
+            <a:pPr algn="ctr"/>
+          </a:p>
+        </p:txBody>
+      </p:sp>
+      <p:sp>
+        <p:nvSpPr>
+          <p:cNvPr id="13" name="TextBox 12"/>
+          <p:cNvSpPr txBox="1"/>
+          <p:nvPr/>
+        </p:nvSpPr>
+        <p:spPr>
+          <a:xfrm>
+            <a:off x="8961120" y="1645920"/>
+            <a:ext cx="2286000" cy="4480560"/>
+          </a:xfrm>
+          <a:prstGeom prst="rect">
+            <a:avLst/>
+          </a:prstGeom>
+          <a:noFill/>
+        </p:spPr>
+        <p:txBody>
+          <a:bodyPr wrap="square">
+            <a:spAutoFit/>
+          </a:bodyPr>
+          <a:lstStyle/>
+          <a:p>
+            <a:pPr>
+              <a:defRPr sz="1300" b="1">
+                <a:solidFill>
+                  <a:srgbClr val="A37F48"/>
+                </a:solidFill>
+              </a:defRPr>
+            </a:pPr>
+            <a:r>
+              <a:t>STEP 04</a:t>
+            </a:r>
+          </a:p>
+          <a:p>
+            <a:pPr>
+              <a:spcAft>
+                <a:spcPts val="1000"/>
+              </a:spcAft>
+              <a:defRPr sz="1400" b="1">
+                <a:solidFill>
+                  <a:srgbClr val="241E19"/>
+                </a:solidFill>
+              </a:defRPr>
+            </a:pPr>
+            <a:r>
+              <a:t>사상체질 최종 확정</a:t>
+            </a:r>
+          </a:p>
+          <a:p>
+            <a:pPr>
+              <a:lnSpc>
+                <a:spcPct val="130000"/>
+              </a:lnSpc>
+              <a:defRPr sz="1100">
+                <a:solidFill>
+                  <a:srgbClr val="554B44"/>
+                </a:solidFill>
+              </a:defRPr>
+            </a:pPr>
+            <a:r>
+              <a:t>• 태음/소양/소음/태양 장부 확정</a:t>
+            </a:r>
+            <a:br/>
+            <a:r>
+              <a:t>• 1:1 맞춤 VIP 웹 처방전 발행</a:t>
+            </a:r>
+            <a:br/>
+            <a:r>
+              <a:t>• 은반지 착용 및 4대 컬러 가운 배정</a:t>
+            </a:r>
+          </a:p>
+        </p:txBody>
+      </p:sp>
+    </p:spTree>
+  </p:cSld>
+  <p:clrMapOvr>
+    <a:masterClrMapping/>
+  </p:clrMapOvr>
+</p:sld>
+</file>
+
+<file path=ppt/slides/slide13.xml><?xml version="1.0" encoding="utf-8"?>
+<p:sld xmlns:a="http://schemas.openxmlformats.org/drawingml/2006/main" xmlns:p="http://schemas.openxmlformats.org/presentationml/2006/main" xmlns:r="http://schemas.openxmlformats.org/officeDocument/2006/relationships">
+  <p:cSld>
+    <p:spTree>
+      <p:nvGrpSpPr>
+        <p:cNvPr id="1" name=""/>
+        <p:cNvGrpSpPr/>
+        <p:nvPr/>
+      </p:nvGrpSpPr>
+      <p:grpSpPr/>
+      <p:sp>
+        <p:nvSpPr>
+          <p:cNvPr id="2" name="Rectangle 1"/>
+          <p:cNvSpPr/>
+          <p:nvPr/>
+        </p:nvSpPr>
+        <p:spPr>
+          <a:xfrm>
+            <a:off x="0" y="0"/>
+            <a:ext cx="12191695" cy="6858000"/>
+          </a:xfrm>
+          <a:prstGeom prst="rect">
+            <a:avLst/>
+          </a:prstGeom>
+          <a:solidFill>
+            <a:srgbClr val="FDFBF7"/>
+          </a:solidFill>
+          <a:ln>
+            <a:noFill/>
+          </a:ln>
+        </p:spPr>
+        <p:style>
+          <a:lnRef idx="1">
+            <a:schemeClr val="accent1"/>
+          </a:lnRef>
+          <a:fillRef idx="3">
+            <a:schemeClr val="accent1"/>
+          </a:fillRef>
+          <a:effectRef idx="2">
+            <a:schemeClr val="accent1"/>
+          </a:effectRef>
+          <a:fontRef idx="minor">
+            <a:schemeClr val="lt1"/>
+          </a:fontRef>
+        </p:style>
+        <p:txBody>
+          <a:bodyPr rtlCol="0" anchor="ctr"/>
+          <a:lstStyle/>
+          <a:p>
+            <a:pPr algn="ctr"/>
+          </a:p>
+        </p:txBody>
+      </p:sp>
+      <p:sp>
+        <p:nvSpPr>
+          <p:cNvPr id="3" name="TextBox 2"/>
+          <p:cNvSpPr txBox="1"/>
+          <p:nvPr/>
+        </p:nvSpPr>
+        <p:spPr>
+          <a:xfrm>
+            <a:off x="731520" y="365760"/>
+            <a:ext cx="10728655" cy="320040"/>
+          </a:xfrm>
+          <a:prstGeom prst="rect">
+            <a:avLst/>
+          </a:prstGeom>
+          <a:noFill/>
+        </p:spPr>
+        <p:txBody>
+          <a:bodyPr wrap="none">
+            <a:spAutoFit/>
+          </a:bodyPr>
+          <a:lstStyle/>
+          <a:p>
+            <a:pPr>
+              <a:defRPr sz="1000" b="1">
+                <a:solidFill>
+                  <a:srgbClr val="A37F48"/>
+                </a:solidFill>
+              </a:defRPr>
+            </a:pPr>
+            <a:r>
+              <a:t>EXCLUSIVE RETREATS</a:t>
+            </a:r>
+          </a:p>
+        </p:txBody>
+      </p:sp>
+      <p:sp>
+        <p:nvSpPr>
+          <p:cNvPr id="4" name="TextBox 3"/>
+          <p:cNvSpPr txBox="1"/>
+          <p:nvPr/>
+        </p:nvSpPr>
+        <p:spPr>
+          <a:xfrm>
+            <a:off x="731520" y="640080"/>
+            <a:ext cx="10728655" cy="640080"/>
+          </a:xfrm>
+          <a:prstGeom prst="rect">
+            <a:avLst/>
+          </a:prstGeom>
+          <a:noFill/>
+        </p:spPr>
+        <p:txBody>
+          <a:bodyPr wrap="none">
+            <a:spAutoFit/>
+          </a:bodyPr>
+          <a:lstStyle/>
+          <a:p>
+            <a:pPr>
+              <a:defRPr sz="2100" b="1">
+                <a:solidFill>
+                  <a:srgbClr val="241E19"/>
+                </a:solidFill>
+              </a:defRPr>
+            </a:pPr>
+            <a:r>
+              <a:t>VIP 맞춤형 4대 체류 프로그램 (Stay Programs)</a:t>
+            </a:r>
+          </a:p>
+        </p:txBody>
+      </p:sp>
+      <p:sp>
+        <p:nvSpPr>
+          <p:cNvPr id="5" name="Rectangle 4"/>
+          <p:cNvSpPr/>
+          <p:nvPr/>
+        </p:nvSpPr>
+        <p:spPr>
+          <a:xfrm>
+            <a:off x="731520" y="1261872"/>
+            <a:ext cx="2011680" cy="22860"/>
+          </a:xfrm>
+          <a:prstGeom prst="rect">
+            <a:avLst/>
+          </a:prstGeom>
+          <a:solidFill>
+            <a:srgbClr val="C9A876"/>
+          </a:solidFill>
+          <a:ln>
+            <a:noFill/>
+          </a:ln>
+        </p:spPr>
+        <p:style>
+          <a:lnRef idx="1">
+            <a:schemeClr val="accent1"/>
+          </a:lnRef>
+          <a:fillRef idx="3">
+            <a:schemeClr val="accent1"/>
+          </a:fillRef>
+          <a:effectRef idx="2">
+            <a:schemeClr val="accent1"/>
+          </a:effectRef>
+          <a:fontRef idx="minor">
+            <a:schemeClr val="lt1"/>
+          </a:fontRef>
+        </p:style>
+        <p:txBody>
+          <a:bodyPr rtlCol="0" anchor="ctr"/>
+          <a:lstStyle/>
+          <a:p>
+            <a:pPr algn="ctr"/>
+          </a:p>
+        </p:txBody>
+      </p:sp>
+      <p:sp>
+        <p:nvSpPr>
+          <p:cNvPr id="6" name="Rounded Rectangle 5"/>
+          <p:cNvSpPr/>
+          <p:nvPr/>
+        </p:nvSpPr>
+        <p:spPr>
+          <a:xfrm>
+            <a:off x="731520" y="1508760"/>
+            <a:ext cx="5120640" cy="2148840"/>
+          </a:xfrm>
+          <a:prstGeom prst="roundRect">
+            <a:avLst/>
+          </a:prstGeom>
+          <a:solidFill>
+            <a:srgbClr val="FFFFFF"/>
+          </a:solidFill>
+          <a:ln w="13970">
+            <a:solidFill>
+              <a:srgbClr val="C9A876"/>
+            </a:solidFill>
+          </a:ln>
+        </p:spPr>
+        <p:style>
+          <a:lnRef idx="1">
+            <a:schemeClr val="accent1"/>
+          </a:lnRef>
+          <a:fillRef idx="3">
+            <a:schemeClr val="accent1"/>
+          </a:fillRef>
+          <a:effectRef idx="2">
+            <a:schemeClr val="accent1"/>
+          </a:effectRef>
+          <a:fontRef idx="minor">
+            <a:schemeClr val="lt1"/>
+          </a:fontRef>
+        </p:style>
+        <p:txBody>
+          <a:bodyPr rtlCol="0" anchor="ctr"/>
+          <a:lstStyle/>
+          <a:p>
+            <a:pPr algn="ctr"/>
+          </a:p>
+        </p:txBody>
+      </p:sp>
+      <p:sp>
+        <p:nvSpPr>
+          <p:cNvPr id="7" name="TextBox 6"/>
+          <p:cNvSpPr txBox="1"/>
+          <p:nvPr/>
+        </p:nvSpPr>
+        <p:spPr>
+          <a:xfrm>
+            <a:off x="960120" y="1691640"/>
+            <a:ext cx="4663440" cy="1783080"/>
+          </a:xfrm>
+          <a:prstGeom prst="rect">
+            <a:avLst/>
+          </a:prstGeom>
+          <a:noFill/>
+        </p:spPr>
+        <p:txBody>
+          <a:bodyPr wrap="square">
+            <a:spAutoFit/>
+          </a:bodyPr>
+          <a:lstStyle/>
+          <a:p>
+            <a:pPr>
+              <a:spcAft>
+                <a:spcPts val="600"/>
+              </a:spcAft>
+              <a:defRPr sz="1550" b="1">
+                <a:solidFill>
+                  <a:srgbClr val="A37F48"/>
+                </a:solidFill>
+              </a:defRPr>
+            </a:pPr>
+            <a:r>
+              <a:t>2박 3일 (단기 리프레시)</a:t>
+            </a:r>
+          </a:p>
+          <a:p>
+            <a:pPr>
+              <a:lnSpc>
+                <a:spcPct val="120000"/>
+              </a:lnSpc>
+              <a:defRPr sz="1100">
+                <a:solidFill>
+                  <a:srgbClr val="554B44"/>
+                </a:solidFill>
+              </a:defRPr>
+            </a:pPr>
+            <a:r>
+              <a:t>• 대상: 주말 힐링 VIP, 비즈니스 출장객</a:t>
+            </a:r>
+            <a:br/>
+            <a:r>
+              <a:t>• 플로우: 진단 ➔ 족욕 ➔ 80분 바디 ➔ 12h 단식 ➔ 태극선법 ➔ 나노 미스트</a:t>
+            </a:r>
+            <a:br/>
+            <a:r>
+              <a:t>• 효과: 뇌 피로 70% 감소, 근육 긴장 완화, 숙면 유도</a:t>
+            </a:r>
+          </a:p>
+        </p:txBody>
+      </p:sp>
+      <p:sp>
+        <p:nvSpPr>
+          <p:cNvPr id="8" name="Rounded Rectangle 7"/>
+          <p:cNvSpPr/>
+          <p:nvPr/>
+        </p:nvSpPr>
+        <p:spPr>
+          <a:xfrm>
+            <a:off x="6126480" y="1508760"/>
+            <a:ext cx="5120640" cy="2148840"/>
+          </a:xfrm>
+          <a:prstGeom prst="roundRect">
+            <a:avLst/>
+          </a:prstGeom>
+          <a:solidFill>
+            <a:srgbClr val="FFFFFF"/>
+          </a:solidFill>
+          <a:ln w="13970">
+            <a:solidFill>
+              <a:srgbClr val="C9A876"/>
+            </a:solidFill>
+          </a:ln>
+        </p:spPr>
+        <p:style>
+          <a:lnRef idx="1">
+            <a:schemeClr val="accent1"/>
+          </a:lnRef>
+          <a:fillRef idx="3">
+            <a:schemeClr val="accent1"/>
+          </a:fillRef>
+          <a:effectRef idx="2">
+            <a:schemeClr val="accent1"/>
+          </a:effectRef>
+          <a:fontRef idx="minor">
+            <a:schemeClr val="lt1"/>
+          </a:fontRef>
+        </p:style>
+        <p:txBody>
+          <a:bodyPr rtlCol="0" anchor="ctr"/>
+          <a:lstStyle/>
+          <a:p>
+            <a:pPr algn="ctr"/>
+          </a:p>
+        </p:txBody>
+      </p:sp>
+      <p:sp>
+        <p:nvSpPr>
+          <p:cNvPr id="9" name="TextBox 8"/>
+          <p:cNvSpPr txBox="1"/>
+          <p:nvPr/>
+        </p:nvSpPr>
+        <p:spPr>
+          <a:xfrm>
+            <a:off x="6355080" y="1691640"/>
+            <a:ext cx="4663440" cy="1783080"/>
+          </a:xfrm>
+          <a:prstGeom prst="rect">
+            <a:avLst/>
+          </a:prstGeom>
+          <a:noFill/>
+        </p:spPr>
+        <p:txBody>
+          <a:bodyPr wrap="square">
+            <a:spAutoFit/>
+          </a:bodyPr>
+          <a:lstStyle/>
+          <a:p>
+            <a:pPr>
+              <a:spcAft>
+                <a:spcPts val="600"/>
+              </a:spcAft>
+              <a:defRPr sz="1550" b="1">
+                <a:solidFill>
+                  <a:srgbClr val="A37F48"/>
+                </a:solidFill>
+              </a:defRPr>
+            </a:pPr>
+            <a:r>
+              <a:t>5박 6일 (중기 디톡스)</a:t>
+            </a:r>
+          </a:p>
+          <a:p>
+            <a:pPr>
+              <a:lnSpc>
+                <a:spcPct val="120000"/>
+              </a:lnSpc>
+              <a:defRPr sz="1100">
+                <a:solidFill>
+                  <a:srgbClr val="554B44"/>
+                </a:solidFill>
+              </a:defRPr>
+            </a:pPr>
+            <a:r>
+              <a:t>• 대상: 만성 피로 및 림프 부종 보유자</a:t>
+            </a:r>
+            <a:br/>
+            <a:r>
+              <a:t>• 플로우: 1~3일 림프 배농 &amp; 온열(체온 1℃ 상승) ➔ 4~6일 마이크로바이옴 &amp; 기체조</a:t>
+            </a:r>
+            <a:br/>
+            <a:r>
+              <a:t>• 효과: 림프 정체 85% 개선, 안색 정화, 활력 복원</a:t>
+            </a:r>
+          </a:p>
+        </p:txBody>
+      </p:sp>
+      <p:sp>
+        <p:nvSpPr>
+          <p:cNvPr id="10" name="Rounded Rectangle 9"/>
+          <p:cNvSpPr/>
+          <p:nvPr/>
+        </p:nvSpPr>
+        <p:spPr>
+          <a:xfrm>
+            <a:off x="731520" y="3931920"/>
+            <a:ext cx="5120640" cy="2148840"/>
+          </a:xfrm>
+          <a:prstGeom prst="roundRect">
+            <a:avLst/>
+          </a:prstGeom>
+          <a:solidFill>
+            <a:srgbClr val="FFFFFF"/>
+          </a:solidFill>
+          <a:ln w="13970">
+            <a:solidFill>
+              <a:srgbClr val="C9A876"/>
+            </a:solidFill>
+          </a:ln>
+        </p:spPr>
+        <p:style>
+          <a:lnRef idx="1">
+            <a:schemeClr val="accent1"/>
+          </a:lnRef>
+          <a:fillRef idx="3">
+            <a:schemeClr val="accent1"/>
+          </a:fillRef>
+          <a:effectRef idx="2">
+            <a:schemeClr val="accent1"/>
+          </a:effectRef>
+          <a:fontRef idx="minor">
+            <a:schemeClr val="lt1"/>
+          </a:fontRef>
+        </p:style>
+        <p:txBody>
+          <a:bodyPr rtlCol="0" anchor="ctr"/>
+          <a:lstStyle/>
+          <a:p>
+            <a:pPr algn="ctr"/>
+          </a:p>
+        </p:txBody>
+      </p:sp>
+      <p:sp>
+        <p:nvSpPr>
+          <p:cNvPr id="11" name="TextBox 10"/>
+          <p:cNvSpPr txBox="1"/>
+          <p:nvPr/>
+        </p:nvSpPr>
+        <p:spPr>
+          <a:xfrm>
+            <a:off x="960120" y="4114800"/>
+            <a:ext cx="4663440" cy="1783080"/>
+          </a:xfrm>
+          <a:prstGeom prst="rect">
+            <a:avLst/>
+          </a:prstGeom>
+          <a:noFill/>
+        </p:spPr>
+        <p:txBody>
+          <a:bodyPr wrap="square">
+            <a:spAutoFit/>
+          </a:bodyPr>
+          <a:lstStyle/>
+          <a:p>
+            <a:pPr>
+              <a:spcAft>
+                <a:spcPts val="600"/>
+              </a:spcAft>
+              <a:defRPr sz="1550" b="1">
+                <a:solidFill>
+                  <a:srgbClr val="A37F48"/>
+                </a:solidFill>
+              </a:defRPr>
+            </a:pPr>
+            <a:r>
+              <a:t>15박 16일 (장기 리셋)</a:t>
+            </a:r>
+          </a:p>
+          <a:p>
+            <a:pPr>
+              <a:lnSpc>
+                <a:spcPct val="120000"/>
+              </a:lnSpc>
+              <a:defRPr sz="1100">
+                <a:solidFill>
+                  <a:srgbClr val="554B44"/>
+                </a:solidFill>
+              </a:defRPr>
+            </a:pPr>
+            <a:r>
+              <a:t>• 대상: 대사증후군 개선 희망 기업 최고경영진</a:t>
+            </a:r>
+            <a:br/>
+            <a:r>
+              <a:t>• 플로우: DTC 유전자 검사 ➔ 10대 테마 매일 순환 ➔ 1:1 라이프스타일 매뉴얼북</a:t>
+            </a:r>
+            <a:br/>
+            <a:r>
+              <a:t>• 효과: 면역 나이 5년 리셋, 평생 섭생 습관 정착</a:t>
+            </a:r>
+          </a:p>
+        </p:txBody>
+      </p:sp>
+      <p:sp>
+        <p:nvSpPr>
+          <p:cNvPr id="12" name="Rounded Rectangle 11"/>
+          <p:cNvSpPr/>
+          <p:nvPr/>
+        </p:nvSpPr>
+        <p:spPr>
+          <a:xfrm>
+            <a:off x="6126480" y="3931920"/>
+            <a:ext cx="5120640" cy="2148840"/>
+          </a:xfrm>
+          <a:prstGeom prst="roundRect">
+            <a:avLst/>
+          </a:prstGeom>
+          <a:solidFill>
+            <a:srgbClr val="FFFFFF"/>
+          </a:solidFill>
+          <a:ln w="13970">
+            <a:solidFill>
+              <a:srgbClr val="C9A876"/>
+            </a:solidFill>
+          </a:ln>
+        </p:spPr>
+        <p:style>
+          <a:lnRef idx="1">
+            <a:schemeClr val="accent1"/>
+          </a:lnRef>
+          <a:fillRef idx="3">
+            <a:schemeClr val="accent1"/>
+          </a:fillRef>
+          <a:effectRef idx="2">
+            <a:schemeClr val="accent1"/>
+          </a:effectRef>
+          <a:fontRef idx="minor">
+            <a:schemeClr val="lt1"/>
+          </a:fontRef>
+        </p:style>
+        <p:txBody>
+          <a:bodyPr rtlCol="0" anchor="ctr"/>
+          <a:lstStyle/>
+          <a:p>
+            <a:pPr algn="ctr"/>
+          </a:p>
+        </p:txBody>
+      </p:sp>
+      <p:sp>
+        <p:nvSpPr>
+          <p:cNvPr id="13" name="TextBox 12"/>
+          <p:cNvSpPr txBox="1"/>
+          <p:nvPr/>
+        </p:nvSpPr>
+        <p:spPr>
+          <a:xfrm>
+            <a:off x="6355080" y="4114800"/>
+            <a:ext cx="4663440" cy="1783080"/>
+          </a:xfrm>
+          <a:prstGeom prst="rect">
+            <a:avLst/>
+          </a:prstGeom>
+          <a:noFill/>
+        </p:spPr>
+        <p:txBody>
+          <a:bodyPr wrap="square">
+            <a:spAutoFit/>
+          </a:bodyPr>
+          <a:lstStyle/>
+          <a:p>
+            <a:pPr>
+              <a:spcAft>
+                <a:spcPts val="600"/>
+              </a:spcAft>
+              <a:defRPr sz="1550" b="1">
+                <a:solidFill>
+                  <a:srgbClr val="A37F48"/>
+                </a:solidFill>
+              </a:defRPr>
+            </a:pPr>
+            <a:r>
+              <a:t>1개월 (특수 집중 케어)</a:t>
+            </a:r>
+          </a:p>
+          <a:p>
+            <a:pPr>
+              <a:lnSpc>
+                <a:spcPct val="120000"/>
+              </a:lnSpc>
+              <a:defRPr sz="1100">
+                <a:solidFill>
+                  <a:srgbClr val="554B44"/>
+                </a:solidFill>
+              </a:defRPr>
+            </a:pPr>
+            <a:r>
+              <a:t>• 대상: 수술 후 회복기 고객, 고령 시니어 VIP</a:t>
+            </a:r>
+            <a:br/>
+            <a:r>
+              <a:t>• 플로우: 37.5℃ 무자극 족욕 ➔ 프랑킨센스 세포 진정 ➔ 면역 NK세포 증대</a:t>
+            </a:r>
+            <a:br/>
+            <a:r>
+              <a:t>• 시설: 프라이빗 단독 빌라 및 메디컬 스파 룸 배정</a:t>
+            </a:r>
+          </a:p>
+        </p:txBody>
+      </p:sp>
+    </p:spTree>
+  </p:cSld>
+  <p:clrMapOvr>
+    <a:masterClrMapping/>
+  </p:clrMapOvr>
+</p:sld>
+</file>
+
+<file path=ppt/slides/slide14.xml><?xml version="1.0" encoding="utf-8"?>
+<p:sld xmlns:a="http://schemas.openxmlformats.org/drawingml/2006/main" xmlns:p="http://schemas.openxmlformats.org/presentationml/2006/main" xmlns:r="http://schemas.openxmlformats.org/officeDocument/2006/relationships">
+  <p:cSld>
+    <p:spTree>
+      <p:nvGrpSpPr>
+        <p:cNvPr id="1" name=""/>
+        <p:cNvGrpSpPr/>
+        <p:nvPr/>
+      </p:nvGrpSpPr>
+      <p:grpSpPr/>
+      <p:sp>
+        <p:nvSpPr>
+          <p:cNvPr id="2" name="Rectangle 1"/>
+          <p:cNvSpPr/>
+          <p:nvPr/>
+        </p:nvSpPr>
+        <p:spPr>
+          <a:xfrm>
+            <a:off x="0" y="0"/>
+            <a:ext cx="12191695" cy="6858000"/>
+          </a:xfrm>
+          <a:prstGeom prst="rect">
+            <a:avLst/>
+          </a:prstGeom>
+          <a:solidFill>
+            <a:srgbClr val="FDFBF7"/>
+          </a:solidFill>
+          <a:ln>
+            <a:noFill/>
+          </a:ln>
+        </p:spPr>
+        <p:style>
+          <a:lnRef idx="1">
+            <a:schemeClr val="accent1"/>
+          </a:lnRef>
+          <a:fillRef idx="3">
+            <a:schemeClr val="accent1"/>
+          </a:fillRef>
+          <a:effectRef idx="2">
+            <a:schemeClr val="accent1"/>
+          </a:effectRef>
+          <a:fontRef idx="minor">
+            <a:schemeClr val="lt1"/>
+          </a:fontRef>
+        </p:style>
+        <p:txBody>
+          <a:bodyPr rtlCol="0" anchor="ctr"/>
+          <a:lstStyle/>
+          <a:p>
+            <a:pPr algn="ctr"/>
+          </a:p>
+        </p:txBody>
+      </p:sp>
+      <p:sp>
+        <p:nvSpPr>
+          <p:cNvPr id="3" name="TextBox 2"/>
+          <p:cNvSpPr txBox="1"/>
+          <p:nvPr/>
+        </p:nvSpPr>
+        <p:spPr>
+          <a:xfrm>
+            <a:off x="731520" y="365760"/>
+            <a:ext cx="10728655" cy="320040"/>
+          </a:xfrm>
+          <a:prstGeom prst="rect">
+            <a:avLst/>
+          </a:prstGeom>
+          <a:noFill/>
+        </p:spPr>
+        <p:txBody>
+          <a:bodyPr wrap="none">
+            <a:spAutoFit/>
+          </a:bodyPr>
+          <a:lstStyle/>
+          <a:p>
+            <a:pPr>
+              <a:defRPr sz="1000" b="1">
+                <a:solidFill>
+                  <a:srgbClr val="A37F48"/>
+                </a:solidFill>
+              </a:defRPr>
+            </a:pPr>
+            <a:r>
+              <a:t>BUSINESS ECOSYSTEM</a:t>
+            </a:r>
+          </a:p>
+        </p:txBody>
+      </p:sp>
+      <p:sp>
+        <p:nvSpPr>
+          <p:cNvPr id="4" name="TextBox 3"/>
+          <p:cNvSpPr txBox="1"/>
+          <p:nvPr/>
+        </p:nvSpPr>
+        <p:spPr>
+          <a:xfrm>
+            <a:off x="731520" y="640080"/>
+            <a:ext cx="10728655" cy="640080"/>
+          </a:xfrm>
+          <a:prstGeom prst="rect">
+            <a:avLst/>
+          </a:prstGeom>
+          <a:noFill/>
+        </p:spPr>
+        <p:txBody>
+          <a:bodyPr wrap="none">
+            <a:spAutoFit/>
+          </a:bodyPr>
+          <a:lstStyle/>
+          <a:p>
+            <a:pPr>
+              <a:defRPr sz="2100" b="1">
+                <a:solidFill>
+                  <a:srgbClr val="241E19"/>
+                </a:solidFill>
+              </a:defRPr>
+            </a:pPr>
+            <a:r>
+              <a:t>VIP 멤버십 &amp; 바이오 LTV 비즈니스 모델</a:t>
+            </a:r>
+          </a:p>
+        </p:txBody>
+      </p:sp>
+      <p:sp>
+        <p:nvSpPr>
+          <p:cNvPr id="5" name="Rectangle 4"/>
+          <p:cNvSpPr/>
+          <p:nvPr/>
+        </p:nvSpPr>
+        <p:spPr>
+          <a:xfrm>
+            <a:off x="731520" y="1261872"/>
+            <a:ext cx="2011680" cy="22860"/>
+          </a:xfrm>
+          <a:prstGeom prst="rect">
+            <a:avLst/>
+          </a:prstGeom>
+          <a:solidFill>
+            <a:srgbClr val="C9A876"/>
+          </a:solidFill>
+          <a:ln>
+            <a:noFill/>
+          </a:ln>
+        </p:spPr>
+        <p:style>
+          <a:lnRef idx="1">
+            <a:schemeClr val="accent1"/>
+          </a:lnRef>
+          <a:fillRef idx="3">
+            <a:schemeClr val="accent1"/>
+          </a:fillRef>
+          <a:effectRef idx="2">
+            <a:schemeClr val="accent1"/>
+          </a:effectRef>
+          <a:fontRef idx="minor">
+            <a:schemeClr val="lt1"/>
+          </a:fontRef>
+        </p:style>
+        <p:txBody>
+          <a:bodyPr rtlCol="0" anchor="ctr"/>
+          <a:lstStyle/>
+          <a:p>
+            <a:pPr algn="ctr"/>
+          </a:p>
+        </p:txBody>
+      </p:sp>
+      <p:sp>
+        <p:nvSpPr>
+          <p:cNvPr id="6" name="Rounded Rectangle 5"/>
+          <p:cNvSpPr/>
+          <p:nvPr/>
+        </p:nvSpPr>
+        <p:spPr>
+          <a:xfrm>
+            <a:off x="731520" y="1463040"/>
+            <a:ext cx="3383280" cy="4846320"/>
+          </a:xfrm>
+          <a:prstGeom prst="roundRect">
+            <a:avLst/>
+          </a:prstGeom>
+          <a:solidFill>
+            <a:srgbClr val="F5F1E9"/>
+          </a:solidFill>
+          <a:ln w="13970">
+            <a:solidFill>
+              <a:srgbClr val="C9A876"/>
+            </a:solidFill>
+          </a:ln>
+        </p:spPr>
+        <p:style>
+          <a:lnRef idx="1">
+            <a:schemeClr val="accent1"/>
+          </a:lnRef>
+          <a:fillRef idx="3">
+            <a:schemeClr val="accent1"/>
+          </a:fillRef>
+          <a:effectRef idx="2">
+            <a:schemeClr val="accent1"/>
+          </a:effectRef>
+          <a:fontRef idx="minor">
+            <a:schemeClr val="lt1"/>
+          </a:fontRef>
+        </p:style>
+        <p:txBody>
+          <a:bodyPr rtlCol="0" anchor="ctr"/>
+          <a:lstStyle/>
+          <a:p>
+            <a:pPr algn="ctr"/>
+          </a:p>
+        </p:txBody>
+      </p:sp>
+      <p:sp>
+        <p:nvSpPr>
+          <p:cNvPr id="7" name="TextBox 6"/>
+          <p:cNvSpPr txBox="1"/>
+          <p:nvPr/>
+        </p:nvSpPr>
+        <p:spPr>
+          <a:xfrm>
+            <a:off x="914400" y="1737360"/>
+            <a:ext cx="3017520" cy="4297680"/>
+          </a:xfrm>
+          <a:prstGeom prst="rect">
+            <a:avLst/>
+          </a:prstGeom>
+          <a:noFill/>
+        </p:spPr>
+        <p:txBody>
+          <a:bodyPr wrap="square">
+            <a:spAutoFit/>
+          </a:bodyPr>
+          <a:lstStyle/>
+          <a:p>
+            <a:pPr>
+              <a:spcAft>
+                <a:spcPts val="1400"/>
+              </a:spcAft>
+              <a:defRPr sz="1600" b="1">
+                <a:solidFill>
+                  <a:srgbClr val="1C362B"/>
+                </a:solidFill>
+              </a:defRPr>
+            </a:pPr>
+            <a:r>
+              <a:t>Step 01. 스파 방문 &amp; 키트 채취</a:t>
+            </a:r>
+          </a:p>
+          <a:p>
+            <a:pPr>
+              <a:lnSpc>
+                <a:spcPct val="135000"/>
+              </a:lnSpc>
+              <a:defRPr sz="1200">
+                <a:solidFill>
+                  <a:srgbClr val="554B44"/>
+                </a:solidFill>
+              </a:defRPr>
+            </a:pPr>
+            <a:r>
+              <a:t>스파 체크인 시 타액 및 장내 미생물(마이크로바이옴) 키트를 채취하여 전문 분석 기관에 실시간 의뢰.</a:t>
+            </a:r>
+          </a:p>
+        </p:txBody>
+      </p:sp>
+      <p:sp>
+        <p:nvSpPr>
+          <p:cNvPr id="8" name="Rounded Rectangle 7"/>
+          <p:cNvSpPr/>
+          <p:nvPr/>
+        </p:nvSpPr>
+        <p:spPr>
+          <a:xfrm>
+            <a:off x="4343400" y="1463040"/>
+            <a:ext cx="3383280" cy="4846320"/>
+          </a:xfrm>
+          <a:prstGeom prst="roundRect">
+            <a:avLst/>
+          </a:prstGeom>
+          <a:solidFill>
+            <a:srgbClr val="F5F1E9"/>
+          </a:solidFill>
+          <a:ln w="13970">
+            <a:solidFill>
+              <a:srgbClr val="C9A876"/>
+            </a:solidFill>
+          </a:ln>
+        </p:spPr>
+        <p:style>
+          <a:lnRef idx="1">
+            <a:schemeClr val="accent1"/>
+          </a:lnRef>
+          <a:fillRef idx="3">
+            <a:schemeClr val="accent1"/>
+          </a:fillRef>
+          <a:effectRef idx="2">
+            <a:schemeClr val="accent1"/>
+          </a:effectRef>
+          <a:fontRef idx="minor">
+            <a:schemeClr val="lt1"/>
+          </a:fontRef>
+        </p:style>
+        <p:txBody>
+          <a:bodyPr rtlCol="0" anchor="ctr"/>
+          <a:lstStyle/>
+          <a:p>
+            <a:pPr algn="ctr"/>
+          </a:p>
+        </p:txBody>
+      </p:sp>
+      <p:sp>
+        <p:nvSpPr>
+          <p:cNvPr id="9" name="TextBox 8"/>
+          <p:cNvSpPr txBox="1"/>
+          <p:nvPr/>
+        </p:nvSpPr>
+        <p:spPr>
+          <a:xfrm>
+            <a:off x="4526280" y="1737360"/>
+            <a:ext cx="3017520" cy="4297680"/>
+          </a:xfrm>
+          <a:prstGeom prst="rect">
+            <a:avLst/>
+          </a:prstGeom>
+          <a:noFill/>
+        </p:spPr>
+        <p:txBody>
+          <a:bodyPr wrap="square">
+            <a:spAutoFit/>
+          </a:bodyPr>
+          <a:lstStyle/>
+          <a:p>
+            <a:pPr>
+              <a:spcAft>
+                <a:spcPts val="1400"/>
+              </a:spcAft>
+              <a:defRPr sz="1600" b="1">
+                <a:solidFill>
+                  <a:srgbClr val="1C362B"/>
+                </a:solidFill>
+              </a:defRPr>
+            </a:pPr>
+            <a:r>
+              <a:t>Step 02. 모바일 바이오 리포트</a:t>
+            </a:r>
+          </a:p>
+          <a:p>
+            <a:pPr>
+              <a:lnSpc>
+                <a:spcPct val="135000"/>
+              </a:lnSpc>
+              <a:defRPr sz="1200">
+                <a:solidFill>
+                  <a:srgbClr val="554B44"/>
+                </a:solidFill>
+              </a:defRPr>
+            </a:pPr>
+            <a:r>
+              <a:t>7일 후 전용 모바일 웹으로 초개인화 유전체 &amp; 장내 균총 분석 리포트 및 식음 가이드라인 발행.</a:t>
+            </a:r>
+          </a:p>
+        </p:txBody>
+      </p:sp>
+      <p:sp>
+        <p:nvSpPr>
+          <p:cNvPr id="10" name="Rounded Rectangle 9"/>
+          <p:cNvSpPr/>
+          <p:nvPr/>
+        </p:nvSpPr>
+        <p:spPr>
+          <a:xfrm>
+            <a:off x="7955280" y="1463040"/>
+            <a:ext cx="3383280" cy="4846320"/>
+          </a:xfrm>
+          <a:prstGeom prst="roundRect">
+            <a:avLst/>
+          </a:prstGeom>
+          <a:solidFill>
+            <a:srgbClr val="F5F1E9"/>
+          </a:solidFill>
+          <a:ln w="13970">
+            <a:solidFill>
+              <a:srgbClr val="C9A876"/>
+            </a:solidFill>
+          </a:ln>
+        </p:spPr>
+        <p:style>
+          <a:lnRef idx="1">
+            <a:schemeClr val="accent1"/>
+          </a:lnRef>
+          <a:fillRef idx="3">
+            <a:schemeClr val="accent1"/>
+          </a:fillRef>
+          <a:effectRef idx="2">
+            <a:schemeClr val="accent1"/>
+          </a:effectRef>
+          <a:fontRef idx="minor">
+            <a:schemeClr val="lt1"/>
+          </a:fontRef>
+        </p:style>
+        <p:txBody>
+          <a:bodyPr rtlCol="0" anchor="ctr"/>
+          <a:lstStyle/>
+          <a:p>
+            <a:pPr algn="ctr"/>
+          </a:p>
+        </p:txBody>
+      </p:sp>
+      <p:sp>
+        <p:nvSpPr>
+          <p:cNvPr id="11" name="TextBox 10"/>
+          <p:cNvSpPr txBox="1"/>
+          <p:nvPr/>
+        </p:nvSpPr>
+        <p:spPr>
+          <a:xfrm>
+            <a:off x="8138160" y="1737360"/>
+            <a:ext cx="3017520" cy="4297680"/>
+          </a:xfrm>
+          <a:prstGeom prst="rect">
+            <a:avLst/>
+          </a:prstGeom>
+          <a:noFill/>
+        </p:spPr>
+        <p:txBody>
+          <a:bodyPr wrap="square">
+            <a:spAutoFit/>
+          </a:bodyPr>
+          <a:lstStyle/>
+          <a:p>
+            <a:pPr>
+              <a:spcAft>
+                <a:spcPts val="1400"/>
+              </a:spcAft>
+              <a:defRPr sz="1600" b="1">
+                <a:solidFill>
+                  <a:srgbClr val="1C362B"/>
+                </a:solidFill>
+              </a:defRPr>
+            </a:pPr>
+            <a:r>
+              <a:t>Step 03. 월간 맞춤 오일 정기구독(LRP)</a:t>
+            </a:r>
+          </a:p>
+          <a:p>
+            <a:pPr>
+              <a:lnSpc>
+                <a:spcPct val="135000"/>
+              </a:lnSpc>
+              <a:defRPr sz="1200">
+                <a:solidFill>
+                  <a:srgbClr val="554B44"/>
+                </a:solidFill>
+              </a:defRPr>
+            </a:pPr>
+            <a:r>
+              <a:t>일상 복귀 후에도 체질 맞춤 최고급 100% 순수 에센셜 오일과 섭생 제품을 매월 정기 배송하는 고수익 구독 모델.</a:t>
+            </a:r>
+          </a:p>
+        </p:txBody>
+      </p:sp>
+    </p:spTree>
+  </p:cSld>
+  <p:clrMapOvr>
+    <a:masterClrMapping/>
+  </p:clrMapOvr>
+</p:sld>
+</file>
+
+<file path=ppt/slides/slide15.xml><?xml version="1.0" encoding="utf-8"?>
+<p:sld xmlns:a="http://schemas.openxmlformats.org/drawingml/2006/main" xmlns:p="http://schemas.openxmlformats.org/presentationml/2006/main" xmlns:r="http://schemas.openxmlformats.org/officeDocument/2006/relationships">
+  <p:cSld>
+    <p:spTree>
+      <p:nvGrpSpPr>
+        <p:cNvPr id="1" name=""/>
+        <p:cNvGrpSpPr/>
+        <p:nvPr/>
+      </p:nvGrpSpPr>
+      <p:grpSpPr/>
+      <p:sp>
+        <p:nvSpPr>
+          <p:cNvPr id="2" name="Rectangle 1"/>
+          <p:cNvSpPr/>
+          <p:nvPr/>
+        </p:nvSpPr>
+        <p:spPr>
+          <a:xfrm>
+            <a:off x="0" y="0"/>
+            <a:ext cx="12191695" cy="6858000"/>
+          </a:xfrm>
+          <a:prstGeom prst="rect">
+            <a:avLst/>
+          </a:prstGeom>
+          <a:solidFill>
+            <a:srgbClr val="FDFBF7"/>
+          </a:solidFill>
+          <a:ln>
+            <a:noFill/>
+          </a:ln>
+        </p:spPr>
+        <p:style>
+          <a:lnRef idx="1">
+            <a:schemeClr val="accent1"/>
+          </a:lnRef>
+          <a:fillRef idx="3">
+            <a:schemeClr val="accent1"/>
+          </a:fillRef>
+          <a:effectRef idx="2">
+            <a:schemeClr val="accent1"/>
+          </a:effectRef>
+          <a:fontRef idx="minor">
+            <a:schemeClr val="lt1"/>
+          </a:fontRef>
+        </p:style>
+        <p:txBody>
+          <a:bodyPr rtlCol="0" anchor="ctr"/>
+          <a:lstStyle/>
+          <a:p>
+            <a:pPr algn="ctr"/>
+          </a:p>
+        </p:txBody>
+      </p:sp>
+      <p:sp>
+        <p:nvSpPr>
+          <p:cNvPr id="3" name="TextBox 2"/>
+          <p:cNvSpPr txBox="1"/>
+          <p:nvPr/>
+        </p:nvSpPr>
+        <p:spPr>
+          <a:xfrm>
+            <a:off x="731520" y="365760"/>
+            <a:ext cx="10728655" cy="320040"/>
+          </a:xfrm>
+          <a:prstGeom prst="rect">
+            <a:avLst/>
+          </a:prstGeom>
+          <a:noFill/>
+        </p:spPr>
+        <p:txBody>
+          <a:bodyPr wrap="none">
+            <a:spAutoFit/>
+          </a:bodyPr>
+          <a:lstStyle/>
+          <a:p>
+            <a:pPr>
+              <a:defRPr sz="1000" b="1">
+                <a:solidFill>
+                  <a:srgbClr val="A37F48"/>
+                </a:solidFill>
+              </a:defRPr>
+            </a:pPr>
+            <a:r>
+              <a:t>OUR DIRECTORS</a:t>
+            </a:r>
+          </a:p>
+        </p:txBody>
+      </p:sp>
+      <p:sp>
+        <p:nvSpPr>
+          <p:cNvPr id="4" name="TextBox 3"/>
+          <p:cNvSpPr txBox="1"/>
+          <p:nvPr/>
+        </p:nvSpPr>
+        <p:spPr>
+          <a:xfrm>
+            <a:off x="731520" y="640080"/>
+            <a:ext cx="10728655" cy="640080"/>
+          </a:xfrm>
+          <a:prstGeom prst="rect">
+            <a:avLst/>
+          </a:prstGeom>
+          <a:noFill/>
+        </p:spPr>
+        <p:txBody>
+          <a:bodyPr wrap="none">
+            <a:spAutoFit/>
+          </a:bodyPr>
+          <a:lstStyle/>
+          <a:p>
+            <a:pPr>
+              <a:defRPr sz="2100" b="1">
+                <a:solidFill>
+                  <a:srgbClr val="241E19"/>
+                </a:solidFill>
+              </a:defRPr>
+            </a:pPr>
+            <a:r>
+              <a:t>총괄 연구진 및 디렉터 프로필</a:t>
+            </a:r>
+          </a:p>
+        </p:txBody>
+      </p:sp>
+      <p:sp>
+        <p:nvSpPr>
+          <p:cNvPr id="5" name="Rectangle 4"/>
+          <p:cNvSpPr/>
+          <p:nvPr/>
+        </p:nvSpPr>
+        <p:spPr>
+          <a:xfrm>
+            <a:off x="731520" y="1261872"/>
+            <a:ext cx="2011680" cy="22860"/>
+          </a:xfrm>
+          <a:prstGeom prst="rect">
+            <a:avLst/>
+          </a:prstGeom>
+          <a:solidFill>
+            <a:srgbClr val="C9A876"/>
+          </a:solidFill>
+          <a:ln>
+            <a:noFill/>
+          </a:ln>
+        </p:spPr>
+        <p:style>
+          <a:lnRef idx="1">
+            <a:schemeClr val="accent1"/>
+          </a:lnRef>
+          <a:fillRef idx="3">
+            <a:schemeClr val="accent1"/>
+          </a:fillRef>
+          <a:effectRef idx="2">
+            <a:schemeClr val="accent1"/>
+          </a:effectRef>
+          <a:fontRef idx="minor">
+            <a:schemeClr val="lt1"/>
+          </a:fontRef>
+        </p:style>
+        <p:txBody>
+          <a:bodyPr rtlCol="0" anchor="ctr"/>
+          <a:lstStyle/>
+          <a:p>
+            <a:pPr algn="ctr"/>
+          </a:p>
+        </p:txBody>
+      </p:sp>
+      <p:sp>
+        <p:nvSpPr>
+          <p:cNvPr id="6" name="Rounded Rectangle 5"/>
+          <p:cNvSpPr/>
+          <p:nvPr/>
+        </p:nvSpPr>
+        <p:spPr>
+          <a:xfrm>
+            <a:off x="731520" y="1463040"/>
+            <a:ext cx="5120640" cy="4846320"/>
+          </a:xfrm>
+          <a:prstGeom prst="roundRect">
+            <a:avLst/>
+          </a:prstGeom>
+          <a:solidFill>
+            <a:srgbClr val="FFFFFF"/>
+          </a:solidFill>
+          <a:ln w="13970">
+            <a:solidFill>
+              <a:srgbClr val="C9A876"/>
+            </a:solidFill>
+          </a:ln>
+        </p:spPr>
+        <p:style>
+          <a:lnRef idx="1">
+            <a:schemeClr val="accent1"/>
+          </a:lnRef>
+          <a:fillRef idx="3">
+            <a:schemeClr val="accent1"/>
+          </a:fillRef>
+          <a:effectRef idx="2">
+            <a:schemeClr val="accent1"/>
+          </a:effectRef>
+          <a:fontRef idx="minor">
+            <a:schemeClr val="lt1"/>
+          </a:fontRef>
+        </p:style>
+        <p:txBody>
+          <a:bodyPr rtlCol="0" anchor="ctr"/>
+          <a:lstStyle/>
+          <a:p>
+            <a:pPr algn="ctr"/>
+          </a:p>
+        </p:txBody>
+      </p:sp>
+      <p:sp>
+        <p:nvSpPr>
+          <p:cNvPr id="7" name="TextBox 6"/>
+          <p:cNvSpPr txBox="1"/>
+          <p:nvPr/>
+        </p:nvSpPr>
+        <p:spPr>
+          <a:xfrm>
+            <a:off x="1005840" y="1737360"/>
+            <a:ext cx="4572000" cy="4297680"/>
+          </a:xfrm>
+          <a:prstGeom prst="rect">
+            <a:avLst/>
+          </a:prstGeom>
+          <a:noFill/>
+        </p:spPr>
+        <p:txBody>
+          <a:bodyPr wrap="square">
+            <a:spAutoFit/>
+          </a:bodyPr>
+          <a:lstStyle/>
+          <a:p>
+            <a:pPr>
+              <a:defRPr sz="1100" b="1">
+                <a:solidFill>
+                  <a:srgbClr val="A37F48"/>
+                </a:solidFill>
+              </a:defRPr>
+            </a:pPr>
+            <a:r>
+              <a:t>WELLNESS MASTER DIRECTOR</a:t>
+            </a:r>
+          </a:p>
+          <a:p>
+            <a:pPr>
+              <a:spcAft>
+                <a:spcPts val="1000"/>
+              </a:spcAft>
+              <a:defRPr sz="2400" b="1">
+                <a:solidFill>
+                  <a:srgbClr val="241E19"/>
+                </a:solidFill>
+              </a:defRPr>
+            </a:pPr>
+            <a:r>
+              <a:t>유정근 (Ryu Jean)</a:t>
+            </a:r>
+          </a:p>
+          <a:p>
+            <a:pPr>
+              <a:lnSpc>
+                <a:spcPct val="130000"/>
+              </a:lnSpc>
+              <a:defRPr sz="1200">
+                <a:solidFill>
+                  <a:srgbClr val="554B44"/>
+                </a:solidFill>
+              </a:defRPr>
+            </a:pPr>
+            <a:r>
+              <a:t>• 웰니스 총괄 디렉터 / 전담 테라피스트</a:t>
+            </a:r>
+            <a:br/>
+            <a:r>
+              <a:t>• 사상체질 10대 시그니처 테라피 의전 설계</a:t>
+            </a:r>
+            <a:br/>
+            <a:r>
+              <a:t>• 글로벌 호텔/리조트 파트너십 및 브랜드 총괄</a:t>
+            </a:r>
+            <a:br/>
+            <a:r>
+              <a:t>• 1:1 VIP 프라이빗 컨설팅 및 트리트먼트 마스터</a:t>
+            </a:r>
+            <a:br/>
+            <a:br/>
+            <a:r>
+              <a:t>📞 연락처: 010-4728-9917</a:t>
+            </a:r>
+            <a:br/>
+            <a:r>
+              <a:t>✉️ 이메일: ryujean77@gmail.com</a:t>
+            </a:r>
+          </a:p>
+        </p:txBody>
+      </p:sp>
+      <p:sp>
+        <p:nvSpPr>
+          <p:cNvPr id="8" name="Rounded Rectangle 7"/>
+          <p:cNvSpPr/>
+          <p:nvPr/>
+        </p:nvSpPr>
+        <p:spPr>
+          <a:xfrm>
+            <a:off x="6217920" y="1463040"/>
+            <a:ext cx="5212080" cy="4846320"/>
+          </a:xfrm>
+          <a:prstGeom prst="roundRect">
+            <a:avLst/>
+          </a:prstGeom>
+          <a:solidFill>
+            <a:srgbClr val="FFFFFF"/>
+          </a:solidFill>
+          <a:ln w="13970">
+            <a:solidFill>
+              <a:srgbClr val="C9A876"/>
+            </a:solidFill>
+          </a:ln>
+        </p:spPr>
+        <p:style>
+          <a:lnRef idx="1">
+            <a:schemeClr val="accent1"/>
+          </a:lnRef>
+          <a:fillRef idx="3">
+            <a:schemeClr val="accent1"/>
+          </a:fillRef>
+          <a:effectRef idx="2">
+            <a:schemeClr val="accent1"/>
+          </a:effectRef>
+          <a:fontRef idx="minor">
+            <a:schemeClr val="lt1"/>
+          </a:fontRef>
+        </p:style>
+        <p:txBody>
+          <a:bodyPr rtlCol="0" anchor="ctr"/>
+          <a:lstStyle/>
+          <a:p>
+            <a:pPr algn="ctr"/>
+          </a:p>
+        </p:txBody>
+      </p:sp>
+      <p:sp>
+        <p:nvSpPr>
+          <p:cNvPr id="9" name="TextBox 8"/>
+          <p:cNvSpPr txBox="1"/>
+          <p:nvPr/>
+        </p:nvSpPr>
+        <p:spPr>
+          <a:xfrm>
+            <a:off x="6492240" y="1737360"/>
+            <a:ext cx="4663440" cy="4297680"/>
+          </a:xfrm>
+          <a:prstGeom prst="rect">
+            <a:avLst/>
+          </a:prstGeom>
+          <a:noFill/>
+        </p:spPr>
+        <p:txBody>
+          <a:bodyPr wrap="square">
+            <a:spAutoFit/>
+          </a:bodyPr>
+          <a:lstStyle/>
+          <a:p>
+            <a:pPr>
+              <a:defRPr sz="1100" b="1">
+                <a:solidFill>
+                  <a:srgbClr val="A37F48"/>
+                </a:solidFill>
+              </a:defRPr>
+            </a:pPr>
+            <a:r>
+              <a:t>ACADEMIC &amp; MEDICAL DIRECTOR</a:t>
+            </a:r>
+          </a:p>
+          <a:p>
+            <a:pPr>
+              <a:spcAft>
+                <a:spcPts val="1000"/>
+              </a:spcAft>
+              <a:defRPr sz="2400" b="1">
+                <a:solidFill>
+                  <a:srgbClr val="241E19"/>
+                </a:solidFill>
+              </a:defRPr>
+            </a:pPr>
+            <a:r>
+              <a:t>임동구 박사 (Dr. Dong-Ku Yim)</a:t>
+            </a:r>
+          </a:p>
+          <a:p>
+            <a:pPr>
+              <a:lnSpc>
+                <a:spcPct val="130000"/>
+              </a:lnSpc>
+              <a:defRPr sz="1200">
+                <a:solidFill>
+                  <a:srgbClr val="554B44"/>
+                </a:solidFill>
+              </a:defRPr>
+            </a:pPr>
+            <a:r>
+              <a:t>• 식품공학박사 / Dr.Yim's 체질라이프스타일 연구소장</a:t>
+            </a:r>
+            <a:br/>
+            <a:r>
+              <a:t>• 사상체질 의학의 식품공학적 섭생 연구 권위자</a:t>
+            </a:r>
+            <a:br/>
+            <a:r>
+              <a:t>• 4대 체질 맞춤 미역국 &amp; 아로마 배합비 감수</a:t>
+            </a:r>
+            <a:br/>
+            <a:r>
+              <a:t>• 현대 생체 데이터 분석 및 체질 확정 알고리즘 구축</a:t>
+            </a:r>
+            <a:br/>
+            <a:br/>
+            <a:r>
+              <a:t>📞 연락처: 010-2323-4662</a:t>
+            </a:r>
+            <a:br/>
+            <a:r>
+              <a:t>✉️ 이메일: ydoko@daum.net</a:t>
+            </a:r>
+          </a:p>
+        </p:txBody>
+      </p:sp>
+    </p:spTree>
+  </p:cSld>
+  <p:clrMapOvr>
+    <a:masterClrMapping/>
+  </p:clrMapOvr>
+</p:sld>
+</file>
+
+<file path=ppt/slides/slide16.xml><?xml version="1.0" encoding="utf-8"?>
+<p:sld xmlns:a="http://schemas.openxmlformats.org/drawingml/2006/main" xmlns:p="http://schemas.openxmlformats.org/presentationml/2006/main" xmlns:r="http://schemas.openxmlformats.org/officeDocument/2006/relationships">
+  <p:cSld>
+    <p:spTree>
+      <p:nvGrpSpPr>
+        <p:cNvPr id="1" name=""/>
+        <p:cNvGrpSpPr/>
+        <p:nvPr/>
+      </p:nvGrpSpPr>
+      <p:grpSpPr/>
+      <p:sp>
+        <p:nvSpPr>
+          <p:cNvPr id="2" name="Rectangle 1"/>
+          <p:cNvSpPr/>
+          <p:nvPr/>
+        </p:nvSpPr>
+        <p:spPr>
+          <a:xfrm>
+            <a:off x="0" y="0"/>
+            <a:ext cx="12191695" cy="6858000"/>
+          </a:xfrm>
+          <a:prstGeom prst="rect">
+            <a:avLst/>
+          </a:prstGeom>
+          <a:solidFill>
+            <a:srgbClr val="0E1F18"/>
+          </a:solidFill>
+          <a:ln>
+            <a:noFill/>
+          </a:ln>
+        </p:spPr>
+        <p:style>
+          <a:lnRef idx="1">
+            <a:schemeClr val="accent1"/>
+          </a:lnRef>
+          <a:fillRef idx="3">
+            <a:schemeClr val="accent1"/>
+          </a:fillRef>
+          <a:effectRef idx="2">
+            <a:schemeClr val="accent1"/>
+          </a:effectRef>
+          <a:fontRef idx="minor">
+            <a:schemeClr val="lt1"/>
+          </a:fontRef>
+        </p:style>
+        <p:txBody>
+          <a:bodyPr rtlCol="0" anchor="ctr"/>
+          <a:lstStyle/>
+          <a:p>
+            <a:pPr algn="ctr"/>
+          </a:p>
+        </p:txBody>
+      </p:sp>
+      <p:sp>
+        <p:nvSpPr>
+          <p:cNvPr id="3" name="Rectangle 2"/>
+          <p:cNvSpPr/>
+          <p:nvPr/>
+        </p:nvSpPr>
+        <p:spPr>
+          <a:xfrm>
+            <a:off x="640080" y="640080"/>
+            <a:ext cx="10911535" cy="5577840"/>
+          </a:xfrm>
+          <a:prstGeom prst="rect">
+            <a:avLst/>
+          </a:prstGeom>
+          <a:noFill/>
+          <a:ln w="19050">
+            <a:solidFill>
+              <a:srgbClr val="C9A876"/>
+            </a:solidFill>
+          </a:ln>
+        </p:spPr>
+        <p:style>
+          <a:lnRef idx="1">
+            <a:schemeClr val="accent1"/>
+          </a:lnRef>
+          <a:fillRef idx="3">
+            <a:schemeClr val="accent1"/>
+          </a:fillRef>
+          <a:effectRef idx="2">
+            <a:schemeClr val="accent1"/>
+          </a:effectRef>
+          <a:fontRef idx="minor">
+            <a:schemeClr val="lt1"/>
+          </a:fontRef>
+        </p:style>
+        <p:txBody>
+          <a:bodyPr rtlCol="0" anchor="ctr"/>
+          <a:lstStyle/>
+          <a:p>
+            <a:pPr algn="ctr"/>
+          </a:p>
+        </p:txBody>
+      </p:sp>
+      <p:sp>
+        <p:nvSpPr>
+          <p:cNvPr id="4" name="TextBox 3"/>
+          <p:cNvSpPr txBox="1"/>
+          <p:nvPr/>
+        </p:nvSpPr>
+        <p:spPr>
+          <a:xfrm>
+            <a:off x="1371600" y="1828800"/>
+            <a:ext cx="9448495" cy="3657600"/>
+          </a:xfrm>
+          <a:prstGeom prst="rect">
+            <a:avLst/>
+          </a:prstGeom>
+          <a:noFill/>
+        </p:spPr>
+        <p:txBody>
+          <a:bodyPr wrap="square">
+            <a:spAutoFit/>
+          </a:bodyPr>
+          <a:lstStyle/>
+          <a:p>
+            <a:pPr algn="ctr">
+              <a:spcAft>
+                <a:spcPts val="1400"/>
+              </a:spcAft>
+              <a:defRPr sz="1300" b="1">
+                <a:solidFill>
+                  <a:srgbClr val="C9A876"/>
+                </a:solidFill>
+              </a:defRPr>
+            </a:pPr>
+            <a:r>
+              <a:t>K-PREMIUM WELLNESS MASTER PLAN 2026/27</a:t>
+            </a:r>
+          </a:p>
+          <a:p>
+            <a:pPr algn="ctr">
               <a:spcAft>
                 <a:spcPts val="2000"/>
               </a:spcAft>
-              <a:defRPr sz="1800">
-                <a:solidFill>
-                  <a:srgbClr val="C29B62"/>
-                </a:solidFill>
-              </a:defRPr>
-            </a:pPr>
-            <a:r>
-              <a:t>Medizin  ·  Regeneration  ·  Retreat</a:t>
-            </a:r>
-          </a:p>
-          <a:p>
-            <a:pPr>
-              <a:lnSpc>
-                <a:spcPct val="130000"/>
-              </a:lnSpc>
-              <a:spcAft>
-                <a:spcPts val="2600"/>
-              </a:spcAft>
-              <a:defRPr sz="1300">
-                <a:solidFill>
-                  <a:srgbClr val="E1DACD"/>
-                </a:solidFill>
-              </a:defRPr>
-            </a:pPr>
-            <a:r>
-              <a:t>한국 고유의 사상체질 의학이 완성한 정통 메디컬 쿠어(Kur) 프로그램</a:t>
+              <a:defRPr sz="3200" b="1">
+                <a:solidFill>
+                  <a:srgbClr val="FFFFFF"/>
+                </a:solidFill>
+              </a:defRPr>
+            </a:pPr>
+            <a:r>
+              <a:t>가장 한국적인 사상체질 의학이</a:t>
             </a:r>
             <a:br/>
             <a:r>
-              <a:t>현대인의 만성 질환과 불균형을 해결하는 1:1 맞춤 신체 리셋 솔루션</a:t>
-            </a:r>
-          </a:p>
-          <a:p>
-            <a:pPr>
-              <a:defRPr sz="1050">
-                <a:solidFill>
-                  <a:srgbClr val="B4AA9B"/>
-                </a:solidFill>
-              </a:defRPr>
-            </a:pPr>
-            <a:r>
-              <a:t>• 총괄 디렉터: 유정근 (웰니스 총괄 / 전담 테라피스트 | 010-4728-9917)</a:t>
+              <a:t>가장 세계적인 럭셔리 스파가 됩니다</a:t>
+            </a:r>
+          </a:p>
+          <a:p>
+            <a:pPr algn="ctr">
+              <a:defRPr sz="1350">
+                <a:solidFill>
+                  <a:srgbClr val="C9A876"/>
+                </a:solidFill>
+              </a:defRPr>
+            </a:pPr>
+            <a:r>
+              <a:t>공식 웹 포털 실시간 확인: https://ryujean77.github.io/ryujean-slides/sasang-spa/</a:t>
             </a:r>
             <a:br/>
             <a:r>
-              <a:t>• 학술/의학 총괄: 임동구 식품공학박사 (Dr.Yim's 체질라이프스타일 연구소장 | 010-2323-4662)</a:t>
-            </a:r>
-            <a:br/>
-            <a:r>
-              <a:t>• 온라인 웹 포털: https://ryujean77.github.io/ryujean-slides/sasang-spa/</a:t>
+              <a:t>문의: 유정근 총괄 디렉터 (010-4728-9917 | ryujean77@gmail.com)</a:t>
             </a:r>
           </a:p>
         </p:txBody>
@@ -3325,7 +6656,7 @@
             <a:avLst/>
           </a:prstGeom>
           <a:solidFill>
-            <a:srgbClr val="FAF8F3"/>
+            <a:srgbClr val="FDFBF7"/>
           </a:solidFill>
           <a:ln>
             <a:noFill/>
@@ -3376,14 +6707,14 @@
           <a:lstStyle/>
           <a:p>
             <a:pPr>
-              <a:defRPr sz="950" b="1">
-                <a:solidFill>
-                  <a:srgbClr val="94723E"/>
-                </a:solidFill>
-              </a:defRPr>
-            </a:pPr>
-            <a:r>
-              <a:t>2026/27 SASANG-KUREN : MEDIZIN · REGENERATION · RETREAT</a:t>
+              <a:defRPr sz="1000" b="1">
+                <a:solidFill>
+                  <a:srgbClr val="A37F48"/>
+                </a:solidFill>
+              </a:defRPr>
+            </a:pPr>
+            <a:r>
+              <a:t>THE PROBLEM</a:t>
             </a:r>
           </a:p>
         </p:txBody>
@@ -3413,12 +6744,12 @@
             <a:pPr>
               <a:defRPr sz="2100" b="1">
                 <a:solidFill>
-                  <a:srgbClr val="26201C"/>
-                </a:solidFill>
-              </a:defRPr>
-            </a:pPr>
-            <a:r>
-              <a:t>Mein neues Ich : 사상체질 스파의 4대 품질 기준 (Qualitätsmerkmale)</a:t>
+                  <a:srgbClr val="241E19"/>
+                </a:solidFill>
+              </a:defRPr>
+            </a:pPr>
+            <a:r>
+              <a:t>Problem Statement : 기존 일반 스파와 디톡스의 3대 치명적 한계</a:t>
             </a:r>
           </a:p>
         </p:txBody>
@@ -3431,14 +6762,14 @@
         </p:nvSpPr>
         <p:spPr>
           <a:xfrm>
-            <a:off x="731520" y="1280160"/>
-            <a:ext cx="2286000" cy="22860"/>
+            <a:off x="731520" y="1261872"/>
+            <a:ext cx="2011680" cy="22860"/>
           </a:xfrm>
           <a:prstGeom prst="rect">
             <a:avLst/>
           </a:prstGeom>
           <a:solidFill>
-            <a:srgbClr val="C29B62"/>
+            <a:srgbClr val="C9A876"/>
           </a:solidFill>
           <a:ln>
             <a:noFill/>
@@ -3468,24 +6799,24 @@
       </p:sp>
       <p:sp>
         <p:nvSpPr>
-          <p:cNvPr id="6" name="Rectangle 5"/>
+          <p:cNvPr id="6" name="Rounded Rectangle 5"/>
           <p:cNvSpPr/>
           <p:nvPr/>
         </p:nvSpPr>
         <p:spPr>
           <a:xfrm>
-            <a:off x="731520" y="1508760"/>
-            <a:ext cx="5120640" cy="2148840"/>
-          </a:xfrm>
-          <a:prstGeom prst="rect">
+            <a:off x="731520" y="1463040"/>
+            <a:ext cx="3383280" cy="4846320"/>
+          </a:xfrm>
+          <a:prstGeom prst="roundRect">
             <a:avLst/>
           </a:prstGeom>
           <a:solidFill>
-            <a:srgbClr val="FFFFFF"/>
+            <a:srgbClr val="FEF2F2"/>
           </a:solidFill>
-          <a:ln w="12700">
+          <a:ln w="13970">
             <a:solidFill>
-              <a:srgbClr val="C29B62"/>
+              <a:srgbClr val="EF4444"/>
             </a:solidFill>
           </a:ln>
         </p:spPr>
@@ -3519,8 +6850,8 @@
         </p:nvSpPr>
         <p:spPr>
           <a:xfrm>
-            <a:off x="960120" y="1691640"/>
-            <a:ext cx="4663440" cy="1783080"/>
+            <a:off x="914400" y="1645920"/>
+            <a:ext cx="3017520" cy="4480560"/>
           </a:xfrm>
           <a:prstGeom prst="rect">
             <a:avLst/>
@@ -3535,16 +6866,31 @@
           <a:p>
             <a:pPr>
               <a:spcAft>
-                <a:spcPts val="800"/>
+                <a:spcPts val="600"/>
               </a:spcAft>
-              <a:defRPr sz="1400" b="1">
-                <a:solidFill>
-                  <a:srgbClr val="1C362B"/>
-                </a:solidFill>
-              </a:defRPr>
-            </a:pPr>
-            <a:r>
-              <a:t>01. Fachkundige Begleitung (전문가 1:1 동행)</a:t>
+              <a:defRPr sz="1100" b="1">
+                <a:solidFill>
+                  <a:srgbClr val="B91C1C"/>
+                </a:solidFill>
+              </a:defRPr>
+            </a:pPr>
+            <a:r>
+              <a:t>PROBLEM 01</a:t>
+            </a:r>
+          </a:p>
+          <a:p>
+            <a:pPr>
+              <a:spcAft>
+                <a:spcPts val="1000"/>
+              </a:spcAft>
+              <a:defRPr sz="1450" b="1">
+                <a:solidFill>
+                  <a:srgbClr val="241E19"/>
+                </a:solidFill>
+              </a:defRPr>
+            </a:pPr>
+            <a:r>
+              <a:t>획일적 처방의 부작용 ('One-Size-Fits-All')</a:t>
             </a:r>
           </a:p>
           <a:p>
@@ -3552,38 +6898,43 @@
               <a:lnSpc>
                 <a:spcPct val="130000"/>
               </a:lnSpc>
-              <a:defRPr sz="1150">
-                <a:solidFill>
-                  <a:srgbClr val="5F5750"/>
-                </a:solidFill>
-              </a:defRPr>
-            </a:pPr>
-            <a:r>
-              <a:t>임동구 식품공학박사의 사상체질 의학 이론과 유정근 총괄 디렉터의 VIP 전담 테라피스트 1:1 배정으로 치료 효과 극대화.</a:t>
-            </a:r>
-          </a:p>
-        </p:txBody>
-      </p:sp>
-      <p:sp>
-        <p:nvSpPr>
-          <p:cNvPr id="8" name="Rectangle 7"/>
+              <a:defRPr sz="1100">
+                <a:solidFill>
+                  <a:srgbClr val="554B44"/>
+                </a:solidFill>
+              </a:defRPr>
+            </a:pPr>
+            <a:r>
+              <a:t>기존 스파는 '만인에게 좋은 것'이라는 전제로 라벤더/페퍼민트/온열 사우나를 획일 적용합니다.</a:t>
+            </a:r>
+            <a:br/>
+            <a:br/>
+            <a:r>
+              <a:t>⚠️ 위험성: 열이 많은 사람에게 고온 사우나나 진저 오일을 쓰면 두통·상열감·불면이 악화되고, 몸이 찬 사람에게 찬 탄산스파나 페퍼민트를 쓰면 극심한 냉증과 복통을 유발합니다.</a:t>
+            </a:r>
+          </a:p>
+        </p:txBody>
+      </p:sp>
+      <p:sp>
+        <p:nvSpPr>
+          <p:cNvPr id="8" name="Rounded Rectangle 7"/>
           <p:cNvSpPr/>
           <p:nvPr/>
         </p:nvSpPr>
         <p:spPr>
           <a:xfrm>
-            <a:off x="6126480" y="1508760"/>
-            <a:ext cx="5120640" cy="2148840"/>
-          </a:xfrm>
-          <a:prstGeom prst="rect">
+            <a:off x="4343400" y="1463040"/>
+            <a:ext cx="3383280" cy="4846320"/>
+          </a:xfrm>
+          <a:prstGeom prst="roundRect">
             <a:avLst/>
           </a:prstGeom>
           <a:solidFill>
-            <a:srgbClr val="FFFFFF"/>
+            <a:srgbClr val="FEF2F2"/>
           </a:solidFill>
-          <a:ln w="12700">
+          <a:ln w="13970">
             <a:solidFill>
-              <a:srgbClr val="C29B62"/>
+              <a:srgbClr val="EF4444"/>
             </a:solidFill>
           </a:ln>
         </p:spPr>
@@ -3617,8 +6968,8 @@
         </p:nvSpPr>
         <p:spPr>
           <a:xfrm>
-            <a:off x="6355080" y="1691640"/>
-            <a:ext cx="4663440" cy="1783080"/>
+            <a:off x="4526280" y="1645920"/>
+            <a:ext cx="3017520" cy="4480560"/>
           </a:xfrm>
           <a:prstGeom prst="rect">
             <a:avLst/>
@@ -3633,16 +6984,31 @@
           <a:p>
             <a:pPr>
               <a:spcAft>
-                <a:spcPts val="800"/>
+                <a:spcPts val="600"/>
               </a:spcAft>
-              <a:defRPr sz="1400" b="1">
-                <a:solidFill>
-                  <a:srgbClr val="1C362B"/>
-                </a:solidFill>
-              </a:defRPr>
-            </a:pPr>
-            <a:r>
-              <a:t>02. Individuelle Betreuung (소수 정예 프라이빗)</a:t>
+              <a:defRPr sz="1100" b="1">
+                <a:solidFill>
+                  <a:srgbClr val="B91C1C"/>
+                </a:solidFill>
+              </a:defRPr>
+            </a:pPr>
+            <a:r>
+              <a:t>PROBLEM 02</a:t>
+            </a:r>
+          </a:p>
+          <a:p>
+            <a:pPr>
+              <a:spcAft>
+                <a:spcPts val="1000"/>
+              </a:spcAft>
+              <a:defRPr sz="1450" b="1">
+                <a:solidFill>
+                  <a:srgbClr val="241E19"/>
+                </a:solidFill>
+              </a:defRPr>
+            </a:pPr>
+            <a:r>
+              <a:t>1회성 마사지의 한계 (Temporary Relief)</a:t>
             </a:r>
           </a:p>
           <a:p>
@@ -3650,38 +7016,43 @@
               <a:lnSpc>
                 <a:spcPct val="130000"/>
               </a:lnSpc>
-              <a:defRPr sz="1150">
-                <a:solidFill>
-                  <a:srgbClr val="5F5750"/>
-                </a:solidFill>
-              </a:defRPr>
-            </a:pPr>
-            <a:r>
-              <a:t>대형 스파의 번잡함을 배제하고 프라이빗 스위트룸에서 고객의 장부 편차에 맞춘 100% 비언어(은반지/가운) 의전 제공.</a:t>
-            </a:r>
-          </a:p>
-        </p:txBody>
-      </p:sp>
-      <p:sp>
-        <p:nvSpPr>
-          <p:cNvPr id="10" name="Rectangle 9"/>
+              <a:defRPr sz="1100">
+                <a:solidFill>
+                  <a:srgbClr val="554B44"/>
+                </a:solidFill>
+              </a:defRPr>
+            </a:pPr>
+            <a:r>
+              <a:t>단순 오일 마사지는 표층 근육만 일시적으로 만져줄 뿐, 체내 장부(간·폐·비·신)의 대사 불균형과 심부 노폐물 정체를 해결하지 못합니다.</a:t>
+            </a:r>
+            <a:br/>
+            <a:br/>
+            <a:r>
+              <a:t>⚠️ 한계: 스파 당일 밤만 잠시 편안할 뿐, 다음 날 아침이면 피로와 뻐근함이 100% 원상복귀되는 악순환이 반복됩니다.</a:t>
+            </a:r>
+          </a:p>
+        </p:txBody>
+      </p:sp>
+      <p:sp>
+        <p:nvSpPr>
+          <p:cNvPr id="10" name="Rounded Rectangle 9"/>
           <p:cNvSpPr/>
           <p:nvPr/>
         </p:nvSpPr>
         <p:spPr>
           <a:xfrm>
-            <a:off x="731520" y="3931920"/>
-            <a:ext cx="5120640" cy="2148840"/>
-          </a:xfrm>
-          <a:prstGeom prst="rect">
+            <a:off x="7955280" y="1463040"/>
+            <a:ext cx="3383280" cy="4846320"/>
+          </a:xfrm>
+          <a:prstGeom prst="roundRect">
             <a:avLst/>
           </a:prstGeom>
           <a:solidFill>
-            <a:srgbClr val="FFFFFF"/>
+            <a:srgbClr val="FEF2F2"/>
           </a:solidFill>
-          <a:ln w="12700">
+          <a:ln w="13970">
             <a:solidFill>
-              <a:srgbClr val="C29B62"/>
+              <a:srgbClr val="EF4444"/>
             </a:solidFill>
           </a:ln>
         </p:spPr>
@@ -3715,8 +7086,8 @@
         </p:nvSpPr>
         <p:spPr>
           <a:xfrm>
-            <a:off x="960120" y="4114800"/>
-            <a:ext cx="4663440" cy="1783080"/>
+            <a:off x="8138160" y="1645920"/>
+            <a:ext cx="3017520" cy="4480560"/>
           </a:xfrm>
           <a:prstGeom prst="rect">
             <a:avLst/>
@@ -3731,16 +7102,31 @@
           <a:p>
             <a:pPr>
               <a:spcAft>
-                <a:spcPts val="800"/>
+                <a:spcPts val="600"/>
               </a:spcAft>
-              <a:defRPr sz="1400" b="1">
-                <a:solidFill>
-                  <a:srgbClr val="1C362B"/>
-                </a:solidFill>
-              </a:defRPr>
-            </a:pPr>
-            <a:r>
-              <a:t>03. Bewegung &amp; Meditation (기체조 &amp; 침묵 명상)</a:t>
+              <a:defRPr sz="1100" b="1">
+                <a:solidFill>
+                  <a:srgbClr val="B91C1C"/>
+                </a:solidFill>
+              </a:defRPr>
+            </a:pPr>
+            <a:r>
+              <a:t>PROBLEM 03</a:t>
+            </a:r>
+          </a:p>
+          <a:p>
+            <a:pPr>
+              <a:spcAft>
+                <a:spcPts val="1000"/>
+              </a:spcAft>
+              <a:defRPr sz="1450" b="1">
+                <a:solidFill>
+                  <a:srgbClr val="241E19"/>
+                </a:solidFill>
+              </a:defRPr>
+            </a:pPr>
+            <a:r>
+              <a:t>무분별한 디톡스의 역효과 (Blind Detox)</a:t>
             </a:r>
           </a:p>
           <a:p>
@@ -3748,112 +7134,19 @@
               <a:lnSpc>
                 <a:spcPct val="130000"/>
               </a:lnSpc>
-              <a:defRPr sz="1150">
-                <a:solidFill>
-                  <a:srgbClr val="5F5750"/>
-                </a:solidFill>
-              </a:defRPr>
-            </a:pPr>
-            <a:r>
-              <a:t>서양식 격렬한 운동 대신 단전 호흡으로 탁기를 배출하는 태극선법 8초식과 사찰/선도의 30분 고요 침묵 명상 융합.</a:t>
-            </a:r>
-          </a:p>
-        </p:txBody>
-      </p:sp>
-      <p:sp>
-        <p:nvSpPr>
-          <p:cNvPr id="12" name="Rectangle 11"/>
-          <p:cNvSpPr/>
-          <p:nvPr/>
-        </p:nvSpPr>
-        <p:spPr>
-          <a:xfrm>
-            <a:off x="6126480" y="3931920"/>
-            <a:ext cx="5120640" cy="2148840"/>
-          </a:xfrm>
-          <a:prstGeom prst="rect">
-            <a:avLst/>
-          </a:prstGeom>
-          <a:solidFill>
-            <a:srgbClr val="FFFFFF"/>
-          </a:solidFill>
-          <a:ln w="12700">
-            <a:solidFill>
-              <a:srgbClr val="C29B62"/>
-            </a:solidFill>
-          </a:ln>
-        </p:spPr>
-        <p:style>
-          <a:lnRef idx="1">
-            <a:schemeClr val="accent1"/>
-          </a:lnRef>
-          <a:fillRef idx="3">
-            <a:schemeClr val="accent1"/>
-          </a:fillRef>
-          <a:effectRef idx="2">
-            <a:schemeClr val="accent1"/>
-          </a:effectRef>
-          <a:fontRef idx="minor">
-            <a:schemeClr val="lt1"/>
-          </a:fontRef>
-        </p:style>
-        <p:txBody>
-          <a:bodyPr rtlCol="0" anchor="ctr"/>
-          <a:lstStyle/>
-          <a:p>
-            <a:pPr algn="ctr"/>
-          </a:p>
-        </p:txBody>
-      </p:sp>
-      <p:sp>
-        <p:nvSpPr>
-          <p:cNvPr id="13" name="TextBox 12"/>
-          <p:cNvSpPr txBox="1"/>
-          <p:nvPr/>
-        </p:nvSpPr>
-        <p:spPr>
-          <a:xfrm>
-            <a:off x="6355080" y="4114800"/>
-            <a:ext cx="4663440" cy="1783080"/>
-          </a:xfrm>
-          <a:prstGeom prst="rect">
-            <a:avLst/>
-          </a:prstGeom>
-          <a:noFill/>
-        </p:spPr>
-        <p:txBody>
-          <a:bodyPr wrap="square">
-            <a:spAutoFit/>
-          </a:bodyPr>
-          <a:lstStyle/>
-          <a:p>
-            <a:pPr>
-              <a:spcAft>
-                <a:spcPts val="800"/>
-              </a:spcAft>
-              <a:defRPr sz="1400" b="1">
-                <a:solidFill>
-                  <a:srgbClr val="1C362B"/>
-                </a:solidFill>
-              </a:defRPr>
-            </a:pPr>
-            <a:r>
-              <a:t>04. Bio-Sasang Cuisine (유기농 체질 맞춤 섭생)</a:t>
-            </a:r>
-          </a:p>
-          <a:p>
-            <a:pPr>
-              <a:lnSpc>
-                <a:spcPct val="130000"/>
-              </a:lnSpc>
-              <a:defRPr sz="1150">
-                <a:solidFill>
-                  <a:srgbClr val="5F5750"/>
-                </a:solidFill>
-              </a:defRPr>
-            </a:pPr>
-            <a:r>
-              <a:t>18:00~06:00 12시간 단식(자가포식)과 기상 직후 4대 체질 맞춤 영양 미역국(소고기/돼지고기/닭가슴살/전복) 정식 공급.</a:t>
+              <a:defRPr sz="1100">
+                <a:solidFill>
+                  <a:srgbClr val="554B44"/>
+                </a:solidFill>
+              </a:defRPr>
+            </a:pPr>
+            <a:r>
+              <a:t>체질을 무시한 유행성 디톡스 주스(케일/오이 등 찬 성질)나 무작정 굶는 단식은 소화기 장부를 심각하게 훼손합니다.</a:t>
+            </a:r>
+            <a:br/>
+            <a:br/>
+            <a:r>
+              <a:t>⚠️ 피해: 비위가 찬 소음인에게 찬 녹즙은 위장 마비를 일으키고, 고단백 육류 과다는 태양인의 간 해독력을 파괴합니다.</a:t>
             </a:r>
           </a:p>
         </p:txBody>
@@ -3891,7 +7184,7 @@
             <a:avLst/>
           </a:prstGeom>
           <a:solidFill>
-            <a:srgbClr val="FAF8F3"/>
+            <a:srgbClr val="FDFBF7"/>
           </a:solidFill>
           <a:ln>
             <a:noFill/>
@@ -3942,14 +7235,14 @@
           <a:lstStyle/>
           <a:p>
             <a:pPr>
-              <a:defRPr sz="950" b="1">
-                <a:solidFill>
-                  <a:srgbClr val="94723E"/>
-                </a:solidFill>
-              </a:defRPr>
-            </a:pPr>
-            <a:r>
-              <a:t>THE PROBLEM</a:t>
+              <a:defRPr sz="1000" b="1">
+                <a:solidFill>
+                  <a:srgbClr val="A37F48"/>
+                </a:solidFill>
+              </a:defRPr>
+            </a:pPr>
+            <a:r>
+              <a:t>THE SOLUTION</a:t>
             </a:r>
           </a:p>
         </p:txBody>
@@ -3979,12 +7272,12 @@
             <a:pPr>
               <a:defRPr sz="2100" b="1">
                 <a:solidFill>
-                  <a:srgbClr val="26201C"/>
-                </a:solidFill>
-              </a:defRPr>
-            </a:pPr>
-            <a:r>
-              <a:t>Die Entstehung von Ungleichgewicht : 현대인이 겪는 3대 고질적 문제</a:t>
+                  <a:srgbClr val="241E19"/>
+                </a:solidFill>
+              </a:defRPr>
+            </a:pPr>
+            <a:r>
+              <a:t>Our Solution : 사상체질 스파가 제시하는 3대 근본 해결책</a:t>
             </a:r>
           </a:p>
         </p:txBody>
@@ -3997,14 +7290,14 @@
         </p:nvSpPr>
         <p:spPr>
           <a:xfrm>
-            <a:off x="731520" y="1280160"/>
-            <a:ext cx="2286000" cy="22860"/>
+            <a:off x="731520" y="1261872"/>
+            <a:ext cx="2011680" cy="22860"/>
           </a:xfrm>
           <a:prstGeom prst="rect">
             <a:avLst/>
           </a:prstGeom>
           <a:solidFill>
-            <a:srgbClr val="C29B62"/>
+            <a:srgbClr val="C9A876"/>
           </a:solidFill>
           <a:ln>
             <a:noFill/>
@@ -4034,24 +7327,24 @@
       </p:sp>
       <p:sp>
         <p:nvSpPr>
-          <p:cNvPr id="6" name="Rectangle 5"/>
+          <p:cNvPr id="6" name="Rounded Rectangle 5"/>
           <p:cNvSpPr/>
           <p:nvPr/>
         </p:nvSpPr>
         <p:spPr>
           <a:xfrm>
-            <a:off x="731520" y="1508760"/>
+            <a:off x="731520" y="1463040"/>
             <a:ext cx="3383280" cy="4846320"/>
           </a:xfrm>
-          <a:prstGeom prst="rect">
+          <a:prstGeom prst="roundRect">
             <a:avLst/>
           </a:prstGeom>
           <a:solidFill>
-            <a:srgbClr val="FDF2F2"/>
+            <a:srgbClr val="ECFDF5"/>
           </a:solidFill>
-          <a:ln w="12700">
+          <a:ln w="13970">
             <a:solidFill>
-              <a:srgbClr val="EF4444"/>
+              <a:srgbClr val="1C362B"/>
             </a:solidFill>
           </a:ln>
         </p:spPr>
@@ -4085,7 +7378,7 @@
         </p:nvSpPr>
         <p:spPr>
           <a:xfrm>
-            <a:off x="914400" y="1691640"/>
+            <a:off x="914400" y="1645920"/>
             <a:ext cx="3017520" cy="4480560"/>
           </a:xfrm>
           <a:prstGeom prst="rect">
@@ -4105,12 +7398,12 @@
               </a:spcAft>
               <a:defRPr sz="1100" b="1">
                 <a:solidFill>
-                  <a:srgbClr val="B91C1C"/>
-                </a:solidFill>
-              </a:defRPr>
-            </a:pPr>
-            <a:r>
-              <a:t>PROBLEM 01</a:t>
+                  <a:srgbClr val="1C362B"/>
+                </a:solidFill>
+              </a:defRPr>
+            </a:pPr>
+            <a:r>
+              <a:t>SOLUTION 01</a:t>
             </a:r>
           </a:p>
           <a:p>
@@ -4118,14 +7411,14 @@
               <a:spcAft>
                 <a:spcPts val="1000"/>
               </a:spcAft>
-              <a:defRPr sz="1400" b="1">
-                <a:solidFill>
-                  <a:srgbClr val="26201C"/>
-                </a:solidFill>
-              </a:defRPr>
-            </a:pPr>
-            <a:r>
-              <a:t>획일적 처방의 부작용 ('One-Size-Fits-All')</a:t>
+              <a:defRPr sz="1450" b="1">
+                <a:solidFill>
+                  <a:srgbClr val="241E19"/>
+                </a:solidFill>
+              </a:defRPr>
+            </a:pPr>
+            <a:r>
+              <a:t>장부대소 기반 0% 부작용 초개인화</a:t>
             </a:r>
           </a:p>
           <a:p>
@@ -4133,43 +7426,43 @@
               <a:lnSpc>
                 <a:spcPct val="130000"/>
               </a:lnSpc>
-              <a:defRPr sz="1050">
-                <a:solidFill>
-                  <a:srgbClr val="5F5750"/>
-                </a:solidFill>
-              </a:defRPr>
-            </a:pPr>
-            <a:r>
-              <a:t>기존 스파는 '만인에게 좋은 것'이라는 전제로 라벤더/페퍼민트/온열 사우나를 획일 적용합니다.</a:t>
+              <a:defRPr sz="1100">
+                <a:solidFill>
+                  <a:srgbClr val="554B44"/>
+                </a:solidFill>
+              </a:defRPr>
+            </a:pPr>
+            <a:r>
+              <a:t>1894년 이제마의 해부생리학과 생체 데이터를 결합하여 간·폐·비·신의 장부 용량을 정밀 진단합니다.</a:t>
             </a:r>
             <a:br/>
             <a:br/>
             <a:r>
-              <a:t>⚠️ 위험성: 열이 많은 사람에게 고온 사우나나 진저 오일을 쓰면 두통·상열감·불면이 악화되고, 몸이 찬 사람에게 찬 탄산스파나 페퍼민트를 쓰면 극심한 냉증과 복통을 유발합니다.</a:t>
-            </a:r>
-          </a:p>
-        </p:txBody>
-      </p:sp>
-      <p:sp>
-        <p:nvSpPr>
-          <p:cNvPr id="8" name="Rectangle 7"/>
+              <a:t>✨ 해결: 오직 내 몸의 장부 편차에만 유효한 최고급 100% 순수 에센셜 오일과 맞춤 수온(41℃ 온열탕 vs 38.5℃ 쿨링탕)을 처방하여 부작용을 원천 차단합니다.</a:t>
+            </a:r>
+          </a:p>
+        </p:txBody>
+      </p:sp>
+      <p:sp>
+        <p:nvSpPr>
+          <p:cNvPr id="8" name="Rounded Rectangle 7"/>
           <p:cNvSpPr/>
           <p:nvPr/>
         </p:nvSpPr>
         <p:spPr>
           <a:xfrm>
-            <a:off x="4343400" y="1508760"/>
+            <a:off x="4343400" y="1463040"/>
             <a:ext cx="3383280" cy="4846320"/>
           </a:xfrm>
-          <a:prstGeom prst="rect">
+          <a:prstGeom prst="roundRect">
             <a:avLst/>
           </a:prstGeom>
           <a:solidFill>
-            <a:srgbClr val="FDF2F2"/>
+            <a:srgbClr val="ECFDF5"/>
           </a:solidFill>
-          <a:ln w="12700">
+          <a:ln w="13970">
             <a:solidFill>
-              <a:srgbClr val="EF4444"/>
+              <a:srgbClr val="1C362B"/>
             </a:solidFill>
           </a:ln>
         </p:spPr>
@@ -4203,7 +7496,7 @@
         </p:nvSpPr>
         <p:spPr>
           <a:xfrm>
-            <a:off x="4526280" y="1691640"/>
+            <a:off x="4526280" y="1645920"/>
             <a:ext cx="3017520" cy="4480560"/>
           </a:xfrm>
           <a:prstGeom prst="rect">
@@ -4223,12 +7516,12 @@
               </a:spcAft>
               <a:defRPr sz="1100" b="1">
                 <a:solidFill>
-                  <a:srgbClr val="B91C1C"/>
-                </a:solidFill>
-              </a:defRPr>
-            </a:pPr>
-            <a:r>
-              <a:t>PROBLEM 02</a:t>
+                  <a:srgbClr val="1C362B"/>
+                </a:solidFill>
+              </a:defRPr>
+            </a:pPr>
+            <a:r>
+              <a:t>SOLUTION 02</a:t>
             </a:r>
           </a:p>
           <a:p>
@@ -4236,14 +7529,14 @@
               <a:spcAft>
                 <a:spcPts val="1000"/>
               </a:spcAft>
-              <a:defRPr sz="1400" b="1">
-                <a:solidFill>
-                  <a:srgbClr val="26201C"/>
-                </a:solidFill>
-              </a:defRPr>
-            </a:pPr>
-            <a:r>
-              <a:t>1회성 마사지의 한계 (Temporary Relief)</a:t>
+              <a:defRPr sz="1450" b="1">
+                <a:solidFill>
+                  <a:srgbClr val="241E19"/>
+                </a:solidFill>
+              </a:defRPr>
+            </a:pPr>
+            <a:r>
+              <a:t>3중 융합 신체 리셋 (스파+단식+섭생)</a:t>
             </a:r>
           </a:p>
           <a:p>
@@ -4251,43 +7544,43 @@
               <a:lnSpc>
                 <a:spcPct val="130000"/>
               </a:lnSpc>
-              <a:defRPr sz="1050">
-                <a:solidFill>
-                  <a:srgbClr val="5F5750"/>
-                </a:solidFill>
-              </a:defRPr>
-            </a:pPr>
-            <a:r>
-              <a:t>단순 오일 마사지는 표층 근육만 일시적으로 만져줄 뿐, 체내 장부(간·폐·비·신)의 대사 불균형과 심부 노폐물 정체를 해결하지 못합니다.</a:t>
+              <a:defRPr sz="1100">
+                <a:solidFill>
+                  <a:srgbClr val="554B44"/>
+                </a:solidFill>
+              </a:defRPr>
+            </a:pPr>
+            <a:r>
+              <a:t>80분 이원화 바디 테라피(수기 지압+순수 오일 림프 드레나쥐)와 저녁 18:00~익일 06:00 12시간 단식(자가포식)을 결합합니다.</a:t>
             </a:r>
             <a:br/>
             <a:br/>
             <a:r>
-              <a:t>⚠️ 한계: 스파 당일 밤만 잠시 편안할 뿐, 다음 날 아침이면 피로와 뻐근함이 100% 원상복귀되는 악순환이 반복됩니다.</a:t>
-            </a:r>
-          </a:p>
-        </p:txBody>
-      </p:sp>
-      <p:sp>
-        <p:nvSpPr>
-          <p:cNvPr id="10" name="Rectangle 9"/>
+              <a:t>✨ 해결: 단식으로 세포 내 찌꺼기를 청소하고, 기상 직후 4대 체질 맞춤 영양 미역국 조식으로 장부를 완벽히 영양 재건합니다.</a:t>
+            </a:r>
+          </a:p>
+        </p:txBody>
+      </p:sp>
+      <p:sp>
+        <p:nvSpPr>
+          <p:cNvPr id="10" name="Rounded Rectangle 9"/>
           <p:cNvSpPr/>
           <p:nvPr/>
         </p:nvSpPr>
         <p:spPr>
           <a:xfrm>
-            <a:off x="7955280" y="1508760"/>
+            <a:off x="7955280" y="1463040"/>
             <a:ext cx="3383280" cy="4846320"/>
           </a:xfrm>
-          <a:prstGeom prst="rect">
+          <a:prstGeom prst="roundRect">
             <a:avLst/>
           </a:prstGeom>
           <a:solidFill>
-            <a:srgbClr val="FDF2F2"/>
+            <a:srgbClr val="ECFDF5"/>
           </a:solidFill>
-          <a:ln w="12700">
+          <a:ln w="13970">
             <a:solidFill>
-              <a:srgbClr val="EF4444"/>
+              <a:srgbClr val="1C362B"/>
             </a:solidFill>
           </a:ln>
         </p:spPr>
@@ -4321,7 +7614,7 @@
         </p:nvSpPr>
         <p:spPr>
           <a:xfrm>
-            <a:off x="8138160" y="1691640"/>
+            <a:off x="8138160" y="1645920"/>
             <a:ext cx="3017520" cy="4480560"/>
           </a:xfrm>
           <a:prstGeom prst="rect">
@@ -4341,12 +7634,12 @@
               </a:spcAft>
               <a:defRPr sz="1100" b="1">
                 <a:solidFill>
-                  <a:srgbClr val="B91C1C"/>
-                </a:solidFill>
-              </a:defRPr>
-            </a:pPr>
-            <a:r>
-              <a:t>PROBLEM 03</a:t>
+                  <a:srgbClr val="1C362B"/>
+                </a:solidFill>
+              </a:defRPr>
+            </a:pPr>
+            <a:r>
+              <a:t>SOLUTION 03</a:t>
             </a:r>
           </a:p>
           <a:p>
@@ -4354,14 +7647,14 @@
               <a:spcAft>
                 <a:spcPts val="1000"/>
               </a:spcAft>
-              <a:defRPr sz="1400" b="1">
-                <a:solidFill>
-                  <a:srgbClr val="26201C"/>
-                </a:solidFill>
-              </a:defRPr>
-            </a:pPr>
-            <a:r>
-              <a:t>무분별한 디톡스의 역효과 (Blind Detox)</a:t>
+              <a:defRPr sz="1450" b="1">
+                <a:solidFill>
+                  <a:srgbClr val="241E19"/>
+                </a:solidFill>
+              </a:defRPr>
+            </a:pPr>
+            <a:r>
+              <a:t>평생 지속 가능한 바이오 LTV 라이프스타일</a:t>
             </a:r>
           </a:p>
           <a:p>
@@ -4369,19 +7662,19 @@
               <a:lnSpc>
                 <a:spcPct val="130000"/>
               </a:lnSpc>
-              <a:defRPr sz="1050">
-                <a:solidFill>
-                  <a:srgbClr val="5F5750"/>
-                </a:solidFill>
-              </a:defRPr>
-            </a:pPr>
-            <a:r>
-              <a:t>체질을 무시한 유행성 디톡스 주스(케일/오이 등 찬 성질)나 무작정 굶는 단식은 소화기 장부를 심각하게 훼손합니다.</a:t>
+              <a:defRPr sz="1100">
+                <a:solidFill>
+                  <a:srgbClr val="554B44"/>
+                </a:solidFill>
+              </a:defRPr>
+            </a:pPr>
+            <a:r>
+              <a:t>1회성 방문을 넘어 DTC 유전자 분석 및 장내 미생물(마이크로바이옴) 키트를 연동하여 1:1 모바일 바이오 리포트를 발행합니다.</a:t>
             </a:r>
             <a:br/>
             <a:br/>
             <a:r>
-              <a:t>⚠️ 피해: 비위가 찬 소음인에게 찬 녹즙은 위장 마비를 일으키고, 고단백 육류 과다는 태양인의 간 해독력을 파괴합니다.</a:t>
+              <a:t>✨ 해결: 일상 복귀 후에도 모바일 웹 처방전과 월간 맞춤 오일 정기구독(LRP)을 통해 체질 섭생을 평생 습관화합니다.</a:t>
             </a:r>
           </a:p>
         </p:txBody>
@@ -4419,7 +7712,7 @@
             <a:avLst/>
           </a:prstGeom>
           <a:solidFill>
-            <a:srgbClr val="FAF8F3"/>
+            <a:srgbClr val="FDFBF7"/>
           </a:solidFill>
           <a:ln>
             <a:noFill/>
@@ -4470,14 +7763,14 @@
           <a:lstStyle/>
           <a:p>
             <a:pPr>
-              <a:defRPr sz="950" b="1">
-                <a:solidFill>
-                  <a:srgbClr val="94723E"/>
-                </a:solidFill>
-              </a:defRPr>
-            </a:pPr>
-            <a:r>
-              <a:t>THE SOLUTION</a:t>
+              <a:defRPr sz="1000" b="1">
+                <a:solidFill>
+                  <a:srgbClr val="A37F48"/>
+                </a:solidFill>
+              </a:defRPr>
+            </a:pPr>
+            <a:r>
+              <a:t>ROOT CAUSE MATCHING</a:t>
             </a:r>
           </a:p>
         </p:txBody>
@@ -4507,12 +7800,12 @@
             <a:pPr>
               <a:defRPr sz="2100" b="1">
                 <a:solidFill>
-                  <a:srgbClr val="26201C"/>
-                </a:solidFill>
-              </a:defRPr>
-            </a:pPr>
-            <a:r>
-              <a:t>Ganzheitlich heilen : 사상체질 스파가 제시하는 3대 근본 해결책</a:t>
+                  <a:srgbClr val="241E19"/>
+                </a:solidFill>
+              </a:defRPr>
+            </a:pPr>
+            <a:r>
+              <a:t>체질별 4대 고질적 병리 문제 &amp; 1:1 맞춤 해결 프로토콜</a:t>
             </a:r>
           </a:p>
         </p:txBody>
@@ -4525,14 +7818,14 @@
         </p:nvSpPr>
         <p:spPr>
           <a:xfrm>
-            <a:off x="731520" y="1280160"/>
-            <a:ext cx="2286000" cy="22860"/>
+            <a:off x="731520" y="1261872"/>
+            <a:ext cx="2011680" cy="22860"/>
           </a:xfrm>
           <a:prstGeom prst="rect">
             <a:avLst/>
           </a:prstGeom>
           <a:solidFill>
-            <a:srgbClr val="C29B62"/>
+            <a:srgbClr val="C9A876"/>
           </a:solidFill>
           <a:ln>
             <a:noFill/>
@@ -4562,24 +7855,24 @@
       </p:sp>
       <p:sp>
         <p:nvSpPr>
-          <p:cNvPr id="6" name="Rectangle 5"/>
+          <p:cNvPr id="6" name="Rounded Rectangle 5"/>
           <p:cNvSpPr/>
           <p:nvPr/>
         </p:nvSpPr>
         <p:spPr>
           <a:xfrm>
-            <a:off x="731520" y="1508760"/>
-            <a:ext cx="3383280" cy="4846320"/>
-          </a:xfrm>
-          <a:prstGeom prst="rect">
+            <a:off x="731520" y="1463040"/>
+            <a:ext cx="2560320" cy="4846320"/>
+          </a:xfrm>
+          <a:prstGeom prst="roundRect">
             <a:avLst/>
           </a:prstGeom>
           <a:solidFill>
-            <a:srgbClr val="F0F9F4"/>
+            <a:srgbClr val="FFFFFF"/>
           </a:solidFill>
-          <a:ln w="12700">
+          <a:ln w="13970">
             <a:solidFill>
-              <a:srgbClr val="1C362B"/>
+              <a:srgbClr val="A37F48"/>
             </a:solidFill>
           </a:ln>
         </p:spPr>
@@ -4613,8 +7906,8 @@
         </p:nvSpPr>
         <p:spPr>
           <a:xfrm>
-            <a:off x="914400" y="1691640"/>
-            <a:ext cx="3017520" cy="4480560"/>
+            <a:off x="868680" y="1600200"/>
+            <a:ext cx="2286000" cy="4572000"/>
           </a:xfrm>
           <a:prstGeom prst="rect">
             <a:avLst/>
@@ -4628,74 +7921,91 @@
           <a:lstStyle/>
           <a:p>
             <a:pPr>
+              <a:defRPr sz="1400" b="1">
+                <a:solidFill>
+                  <a:srgbClr val="A37F48"/>
+                </a:solidFill>
+              </a:defRPr>
+            </a:pPr>
+            <a:r>
+              <a:t>태음인 (肝大肺小)</a:t>
+            </a:r>
+          </a:p>
+          <a:p>
+            <a:pPr>
               <a:spcAft>
-                <a:spcPts val="600"/>
+                <a:spcPts val="800"/>
               </a:spcAft>
-              <a:defRPr sz="1100" b="1">
-                <a:solidFill>
-                  <a:srgbClr val="1C362B"/>
-                </a:solidFill>
-              </a:defRPr>
-            </a:pPr>
-            <a:r>
-              <a:t>SOLUTION 01</a:t>
-            </a:r>
-          </a:p>
-          <a:p>
-            <a:pPr>
-              <a:spcAft>
-                <a:spcPts val="1000"/>
-              </a:spcAft>
-              <a:defRPr sz="1400" b="1">
-                <a:solidFill>
-                  <a:srgbClr val="26201C"/>
-                </a:solidFill>
-              </a:defRPr>
-            </a:pPr>
-            <a:r>
-              <a:t>장부대소 기반 0% 부작용 초개인화</a:t>
+              <a:defRPr sz="950">
+                <a:solidFill>
+                  <a:srgbClr val="A37F48"/>
+                </a:solidFill>
+              </a:defRPr>
+            </a:pPr>
+            <a:r>
+              <a:t>간 기능 강함 / 폐·기관지 허약</a:t>
             </a:r>
           </a:p>
           <a:p>
             <a:pPr>
               <a:lnSpc>
-                <a:spcPct val="130000"/>
+                <a:spcPct val="125000"/>
               </a:lnSpc>
-              <a:defRPr sz="1050">
-                <a:solidFill>
-                  <a:srgbClr val="5F5750"/>
-                </a:solidFill>
-              </a:defRPr>
-            </a:pPr>
-            <a:r>
-              <a:t>1894년 이제마의 해부생리학과 생체 데이터를 결합하여 간·폐·비·신의 장부 용량을 정밀 진단합니다.</a:t>
+              <a:defRPr sz="1000">
+                <a:solidFill>
+                  <a:srgbClr val="241E19"/>
+                </a:solidFill>
+              </a:defRPr>
+            </a:pPr>
+            <a:r>
+              <a:t>🚨 고질적 문제:</a:t>
+            </a:r>
+            <a:br/>
+            <a:r>
+              <a:t>• 폐/호흡기 건조 및 림프 노폐물 정체</a:t>
+            </a:r>
+            <a:br/>
+            <a:r>
+              <a:t>• 비만 및 심혈관 대사 정체 경향</a:t>
             </a:r>
             <a:br/>
             <a:br/>
             <a:r>
-              <a:t>✨ 해결: 오직 내 몸의 장부 편차에만 유효한 최고급 100% 순수 에센셜 오일과 맞춤 수온(41℃ 온열탕 vs 38.5℃ 쿨링탕)을 처방하여 부작용을 원천 차단합니다.</a:t>
-            </a:r>
-          </a:p>
-        </p:txBody>
-      </p:sp>
-      <p:sp>
-        <p:nvSpPr>
-          <p:cNvPr id="8" name="Rectangle 7"/>
+              <a:t>💡 사상체질 스파 해법:</a:t>
+            </a:r>
+            <a:br/>
+            <a:r>
+              <a:t>• 디톡스 림프 배농 &amp; 에어 스팀 스파</a:t>
+            </a:r>
+            <a:br/>
+            <a:r>
+              <a:t>• 유칼립투스, 이지에어, 샌달우드 오일</a:t>
+            </a:r>
+            <a:br/>
+            <a:r>
+              <a:t>• 소고기 양지 들깨 미역국 + 우측 4지 은반지</a:t>
+            </a:r>
+          </a:p>
+        </p:txBody>
+      </p:sp>
+      <p:sp>
+        <p:nvSpPr>
+          <p:cNvPr id="8" name="Rounded Rectangle 7"/>
           <p:cNvSpPr/>
           <p:nvPr/>
         </p:nvSpPr>
         <p:spPr>
           <a:xfrm>
-            <a:off x="4343400" y="1508760"/>
-            <a:ext cx="3383280" cy="4846320"/>
-          </a:xfrm>
-          <a:prstGeom prst="rect">
+            <a:off x="3429000" y="1463040"/>
+            <a:ext cx="2560320" cy="4846320"/>
+          </a:xfrm>
+          <a:prstGeom prst="roundRect">
             <a:avLst/>
           </a:prstGeom>
           <a:solidFill>
-            <a:srgbClr val="F0F9F4"/>
+            <a:srgbClr val="FFFFFF"/>
           </a:solidFill>
-          <a:ln w="12700">
+          <a:ln w="13970">
             <a:solidFill>
               <a:srgbClr val="1C362B"/>
             </a:solidFill>
@@ -4731,8 +8041,8 @@
         </p:nvSpPr>
         <p:spPr>
           <a:xfrm>
-            <a:off x="4526280" y="1691640"/>
-            <a:ext cx="3017520" cy="4480560"/>
+            <a:off x="3566160" y="1600200"/>
+            <a:ext cx="2286000" cy="4572000"/>
           </a:xfrm>
           <a:prstGeom prst="rect">
             <a:avLst/>
@@ -4746,76 +8056,93 @@
           <a:lstStyle/>
           <a:p>
             <a:pPr>
+              <a:defRPr sz="1400" b="1">
+                <a:solidFill>
+                  <a:srgbClr val="1C362B"/>
+                </a:solidFill>
+              </a:defRPr>
+            </a:pPr>
+            <a:r>
+              <a:t>소양인 (脾大腎小)</a:t>
+            </a:r>
+          </a:p>
+          <a:p>
+            <a:pPr>
               <a:spcAft>
-                <a:spcPts val="600"/>
+                <a:spcPts val="800"/>
               </a:spcAft>
-              <a:defRPr sz="1100" b="1">
-                <a:solidFill>
-                  <a:srgbClr val="1C362B"/>
-                </a:solidFill>
-              </a:defRPr>
-            </a:pPr>
-            <a:r>
-              <a:t>SOLUTION 02</a:t>
-            </a:r>
-          </a:p>
-          <a:p>
-            <a:pPr>
-              <a:spcAft>
-                <a:spcPts val="1000"/>
-              </a:spcAft>
-              <a:defRPr sz="1400" b="1">
-                <a:solidFill>
-                  <a:srgbClr val="26201C"/>
-                </a:solidFill>
-              </a:defRPr>
-            </a:pPr>
-            <a:r>
-              <a:t>3중 융합 신체 리셋 (스파+단식+섭생)</a:t>
+              <a:defRPr sz="950">
+                <a:solidFill>
+                  <a:srgbClr val="A37F48"/>
+                </a:solidFill>
+              </a:defRPr>
+            </a:pPr>
+            <a:r>
+              <a:t>소화기 열 많음 / 신장 음기 허약</a:t>
             </a:r>
           </a:p>
           <a:p>
             <a:pPr>
               <a:lnSpc>
-                <a:spcPct val="130000"/>
+                <a:spcPct val="125000"/>
               </a:lnSpc>
-              <a:defRPr sz="1050">
-                <a:solidFill>
-                  <a:srgbClr val="5F5750"/>
-                </a:solidFill>
-              </a:defRPr>
-            </a:pPr>
-            <a:r>
-              <a:t>80분 이원화 바디 테라피(수기 지압+순수 오일 림프 드레나쥐)와 저녁 18:00~익일 06:00 12시간 단식(자가포식)을 결합합니다.</a:t>
+              <a:defRPr sz="1000">
+                <a:solidFill>
+                  <a:srgbClr val="241E19"/>
+                </a:solidFill>
+              </a:defRPr>
+            </a:pPr>
+            <a:r>
+              <a:t>🚨 고질적 문제:</a:t>
+            </a:r>
+            <a:br/>
+            <a:r>
+              <a:t>• 상체 열감, 두통, 가슴 답답, 불면증</a:t>
+            </a:r>
+            <a:br/>
+            <a:r>
+              <a:t>• 신장 음기 고갈 및 급격한 감정 기복</a:t>
             </a:r>
             <a:br/>
             <a:br/>
             <a:r>
-              <a:t>✨ 해결: 단식으로 세포 내 찌꺼기를 청소하고, 기상 직후 4대 체질 맞춤 영양 미역국 조식으로 장부를 완벽히 영양 재건합니다.</a:t>
-            </a:r>
-          </a:p>
-        </p:txBody>
-      </p:sp>
-      <p:sp>
-        <p:nvSpPr>
-          <p:cNvPr id="10" name="Rectangle 9"/>
+              <a:t>💡 사상체질 스파 해법:</a:t>
+            </a:r>
+            <a:br/>
+            <a:r>
+              <a:t>• 38.5℃ 쿨링 하이드로 탄산 스파</a:t>
+            </a:r>
+            <a:br/>
+            <a:r>
+              <a:t>• 페퍼민트, 라벤더, 세레니티 뇌파 진정</a:t>
+            </a:r>
+            <a:br/>
+            <a:r>
+              <a:t>• 돼지고기 수육 / 조개 미역국 + 좌측 2지 은반지</a:t>
+            </a:r>
+          </a:p>
+        </p:txBody>
+      </p:sp>
+      <p:sp>
+        <p:nvSpPr>
+          <p:cNvPr id="10" name="Rounded Rectangle 9"/>
           <p:cNvSpPr/>
           <p:nvPr/>
         </p:nvSpPr>
         <p:spPr>
           <a:xfrm>
-            <a:off x="7955280" y="1508760"/>
-            <a:ext cx="3383280" cy="4846320"/>
-          </a:xfrm>
-          <a:prstGeom prst="rect">
+            <a:off x="6126480" y="1463040"/>
+            <a:ext cx="2560320" cy="4846320"/>
+          </a:xfrm>
+          <a:prstGeom prst="roundRect">
             <a:avLst/>
           </a:prstGeom>
           <a:solidFill>
-            <a:srgbClr val="F0F9F4"/>
+            <a:srgbClr val="FFFFFF"/>
           </a:solidFill>
-          <a:ln w="12700">
+          <a:ln w="13970">
             <a:solidFill>
-              <a:srgbClr val="1C362B"/>
+              <a:srgbClr val="A37F48"/>
             </a:solidFill>
           </a:ln>
         </p:spPr>
@@ -4849,8 +8176,8 @@
         </p:nvSpPr>
         <p:spPr>
           <a:xfrm>
-            <a:off x="8138160" y="1691640"/>
-            <a:ext cx="3017520" cy="4480560"/>
+            <a:off x="6263640" y="1600200"/>
+            <a:ext cx="2286000" cy="4572000"/>
           </a:xfrm>
           <a:prstGeom prst="rect">
             <a:avLst/>
@@ -4864,52 +8191,204 @@
           <a:lstStyle/>
           <a:p>
             <a:pPr>
+              <a:defRPr sz="1400" b="1">
+                <a:solidFill>
+                  <a:srgbClr val="A37F48"/>
+                </a:solidFill>
+              </a:defRPr>
+            </a:pPr>
+            <a:r>
+              <a:t>소음인 (腎大脾小)</a:t>
+            </a:r>
+          </a:p>
+          <a:p>
+            <a:pPr>
               <a:spcAft>
-                <a:spcPts val="600"/>
+                <a:spcPts val="800"/>
               </a:spcAft>
-              <a:defRPr sz="1100" b="1">
-                <a:solidFill>
-                  <a:srgbClr val="1C362B"/>
-                </a:solidFill>
-              </a:defRPr>
-            </a:pPr>
-            <a:r>
-              <a:t>SOLUTION 03</a:t>
-            </a:r>
-          </a:p>
-          <a:p>
-            <a:pPr>
-              <a:spcAft>
-                <a:spcPts val="1000"/>
-              </a:spcAft>
-              <a:defRPr sz="1400" b="1">
-                <a:solidFill>
-                  <a:srgbClr val="26201C"/>
-                </a:solidFill>
-              </a:defRPr>
-            </a:pPr>
-            <a:r>
-              <a:t>평생 지속 가능한 바이오 LTV 라이프스타일</a:t>
+              <a:defRPr sz="950">
+                <a:solidFill>
+                  <a:srgbClr val="A37F48"/>
+                </a:solidFill>
+              </a:defRPr>
+            </a:pPr>
+            <a:r>
+              <a:t>신장 기능 튼튼 / 비위 차고 약함</a:t>
             </a:r>
           </a:p>
           <a:p>
             <a:pPr>
               <a:lnSpc>
-                <a:spcPct val="130000"/>
+                <a:spcPct val="125000"/>
               </a:lnSpc>
-              <a:defRPr sz="1050">
-                <a:solidFill>
-                  <a:srgbClr val="5F5750"/>
-                </a:solidFill>
-              </a:defRPr>
-            </a:pPr>
-            <a:r>
-              <a:t>1회성 방문을 넘어 DTC 유전자 분석 및 장내 미생물(마이크로바이옴) 키트를 연동하여 1:1 모바일 바이오 리포트를 발행합니다.</a:t>
+              <a:defRPr sz="1000">
+                <a:solidFill>
+                  <a:srgbClr val="241E19"/>
+                </a:solidFill>
+              </a:defRPr>
+            </a:pPr>
+            <a:r>
+              <a:t>🚨 고질적 문제:</a:t>
+            </a:r>
+            <a:br/>
+            <a:r>
+              <a:t>• 수족냉증, 위장 냉증, 만성 소화불량</a:t>
+            </a:r>
+            <a:br/>
+            <a:r>
+              <a:t>• 자율신경 예민 및 만성 무기력/피로</a:t>
             </a:r>
             <a:br/>
             <a:br/>
             <a:r>
-              <a:t>✨ 해결: 일상 복귀 후에도 모바일 웹 처방전과 월간 맞춤 오일 정기구독(LRP)을 통해 체질 섭생을 평생 습관화합니다.</a:t>
+              <a:t>💡 사상체질 스파 해법:</a:t>
+            </a:r>
+            <a:br/>
+            <a:r>
+              <a:t>• 41℃ 한방 온열 족욕 + 42~45℃ 온열 챔버</a:t>
+            </a:r>
+            <a:br/>
+            <a:r>
+              <a:t>• 진저, 온가드, 시나몬 심부 체온 1℃ 상승</a:t>
+            </a:r>
+            <a:br/>
+            <a:r>
+              <a:t>• 닭가슴살 황기 보양 미역국 + 우측 3지 은반지</a:t>
+            </a:r>
+          </a:p>
+        </p:txBody>
+      </p:sp>
+      <p:sp>
+        <p:nvSpPr>
+          <p:cNvPr id="12" name="Rounded Rectangle 11"/>
+          <p:cNvSpPr/>
+          <p:nvPr/>
+        </p:nvSpPr>
+        <p:spPr>
+          <a:xfrm>
+            <a:off x="8823960" y="1463040"/>
+            <a:ext cx="2560320" cy="4846320"/>
+          </a:xfrm>
+          <a:prstGeom prst="roundRect">
+            <a:avLst/>
+          </a:prstGeom>
+          <a:solidFill>
+            <a:srgbClr val="FFFFFF"/>
+          </a:solidFill>
+          <a:ln w="13970">
+            <a:solidFill>
+              <a:srgbClr val="1C362B"/>
+            </a:solidFill>
+          </a:ln>
+        </p:spPr>
+        <p:style>
+          <a:lnRef idx="1">
+            <a:schemeClr val="accent1"/>
+          </a:lnRef>
+          <a:fillRef idx="3">
+            <a:schemeClr val="accent1"/>
+          </a:fillRef>
+          <a:effectRef idx="2">
+            <a:schemeClr val="accent1"/>
+          </a:effectRef>
+          <a:fontRef idx="minor">
+            <a:schemeClr val="lt1"/>
+          </a:fontRef>
+        </p:style>
+        <p:txBody>
+          <a:bodyPr rtlCol="0" anchor="ctr"/>
+          <a:lstStyle/>
+          <a:p>
+            <a:pPr algn="ctr"/>
+          </a:p>
+        </p:txBody>
+      </p:sp>
+      <p:sp>
+        <p:nvSpPr>
+          <p:cNvPr id="13" name="TextBox 12"/>
+          <p:cNvSpPr txBox="1"/>
+          <p:nvPr/>
+        </p:nvSpPr>
+        <p:spPr>
+          <a:xfrm>
+            <a:off x="8961120" y="1600200"/>
+            <a:ext cx="2286000" cy="4572000"/>
+          </a:xfrm>
+          <a:prstGeom prst="rect">
+            <a:avLst/>
+          </a:prstGeom>
+          <a:noFill/>
+        </p:spPr>
+        <p:txBody>
+          <a:bodyPr wrap="square">
+            <a:spAutoFit/>
+          </a:bodyPr>
+          <a:lstStyle/>
+          <a:p>
+            <a:pPr>
+              <a:defRPr sz="1400" b="1">
+                <a:solidFill>
+                  <a:srgbClr val="1C362B"/>
+                </a:solidFill>
+              </a:defRPr>
+            </a:pPr>
+            <a:r>
+              <a:t>태양인 (肺大肝小)</a:t>
+            </a:r>
+          </a:p>
+          <a:p>
+            <a:pPr>
+              <a:spcAft>
+                <a:spcPts val="800"/>
+              </a:spcAft>
+              <a:defRPr sz="950">
+                <a:solidFill>
+                  <a:srgbClr val="A37F48"/>
+                </a:solidFill>
+              </a:defRPr>
+            </a:pPr>
+            <a:r>
+              <a:t>폐 기능 강함 / 간 해독·하체 허약</a:t>
+            </a:r>
+          </a:p>
+          <a:p>
+            <a:pPr>
+              <a:lnSpc>
+                <a:spcPct val="125000"/>
+              </a:lnSpc>
+              <a:defRPr sz="1000">
+                <a:solidFill>
+                  <a:srgbClr val="241E19"/>
+                </a:solidFill>
+              </a:defRPr>
+            </a:pPr>
+            <a:r>
+              <a:t>🚨 고질적 문제:</a:t>
+            </a:r>
+            <a:br/>
+            <a:r>
+              <a:t>• 기운 상기(上氣), 목덜미 강직</a:t>
+            </a:r>
+            <a:br/>
+            <a:r>
+              <a:t>• 간 해독력 저하 및 하체 무력감</a:t>
+            </a:r>
+            <a:br/>
+            <a:br/>
+            <a:r>
+              <a:t>💡 사상체질 스파 해법:</a:t>
+            </a:r>
+            <a:br/>
+            <a:r>
+              <a:t>• 단전 호흡 태극선법 기체조(그라운딩)</a:t>
+            </a:r>
+            <a:br/>
+            <a:r>
+              <a:t>• 베티버, 프랑킨센스 기운 하강 오일</a:t>
+            </a:r>
+            <a:br/>
+            <a:r>
+              <a:t>• 완도산 전복 홍합 맑은 해물 미역국 + 좌측 4지 은반지</a:t>
             </a:r>
           </a:p>
         </p:txBody>
@@ -4947,7 +8426,7 @@
             <a:avLst/>
           </a:prstGeom>
           <a:solidFill>
-            <a:srgbClr val="FAF8F3"/>
+            <a:srgbClr val="FDFBF7"/>
           </a:solidFill>
           <a:ln>
             <a:noFill/>
@@ -4998,14 +8477,14 @@
           <a:lstStyle/>
           <a:p>
             <a:pPr>
-              <a:defRPr sz="950" b="1">
-                <a:solidFill>
-                  <a:srgbClr val="94723E"/>
-                </a:solidFill>
-              </a:defRPr>
-            </a:pPr>
-            <a:r>
-              <a:t>PROGRAMS AT A GLANCE</a:t>
+              <a:defRPr sz="1000" b="1">
+                <a:solidFill>
+                  <a:srgbClr val="A37F48"/>
+                </a:solidFill>
+              </a:defRPr>
+            </a:pPr>
+            <a:r>
+              <a:t>PROJECT OVERVIEW</a:t>
             </a:r>
           </a:p>
         </p:txBody>
@@ -5035,12 +8514,12 @@
             <a:pPr>
               <a:defRPr sz="2100" b="1">
                 <a:solidFill>
-                  <a:srgbClr val="26201C"/>
-                </a:solidFill>
-              </a:defRPr>
-            </a:pPr>
-            <a:r>
-              <a:t>Sasang-Kuren im Überblick : 6대 메디컬 쿠어 프로그램 총람</a:t>
+                  <a:srgbClr val="241E19"/>
+                </a:solidFill>
+              </a:defRPr>
+            </a:pPr>
+            <a:r>
+              <a:t>Executive Summary : 사상체질 스파 4대 핵심 축</a:t>
             </a:r>
           </a:p>
         </p:txBody>
@@ -5053,14 +8532,14 @@
         </p:nvSpPr>
         <p:spPr>
           <a:xfrm>
-            <a:off x="731520" y="1280160"/>
-            <a:ext cx="2286000" cy="22860"/>
+            <a:off x="731520" y="1261872"/>
+            <a:ext cx="2011680" cy="22860"/>
           </a:xfrm>
           <a:prstGeom prst="rect">
             <a:avLst/>
           </a:prstGeom>
           <a:solidFill>
-            <a:srgbClr val="C29B62"/>
+            <a:srgbClr val="C9A876"/>
           </a:solidFill>
           <a:ln>
             <a:noFill/>
@@ -5090,24 +8569,24 @@
       </p:sp>
       <p:sp>
         <p:nvSpPr>
-          <p:cNvPr id="6" name="Rectangle 5"/>
+          <p:cNvPr id="6" name="Rounded Rectangle 5"/>
           <p:cNvSpPr/>
           <p:nvPr/>
         </p:nvSpPr>
         <p:spPr>
           <a:xfrm>
             <a:off x="731520" y="1508760"/>
-            <a:ext cx="5120640" cy="1417320"/>
-          </a:xfrm>
-          <a:prstGeom prst="rect">
+            <a:ext cx="5120640" cy="2148840"/>
+          </a:xfrm>
+          <a:prstGeom prst="roundRect">
             <a:avLst/>
           </a:prstGeom>
           <a:solidFill>
             <a:srgbClr val="FFFFFF"/>
           </a:solidFill>
-          <a:ln w="12700">
+          <a:ln w="13970">
             <a:solidFill>
-              <a:srgbClr val="C29B62"/>
+              <a:srgbClr val="C9A876"/>
             </a:solidFill>
           </a:ln>
         </p:spPr>
@@ -5141,8 +8620,8 @@
         </p:nvSpPr>
         <p:spPr>
           <a:xfrm>
-            <a:off x="914400" y="1618488"/>
-            <a:ext cx="4754880" cy="1188720"/>
+            <a:off x="960120" y="1691640"/>
+            <a:ext cx="4663440" cy="1783080"/>
           </a:xfrm>
           <a:prstGeom prst="rect">
             <a:avLst/>
@@ -5156,65 +8635,56 @@
           <a:lstStyle/>
           <a:p>
             <a:pPr>
-              <a:defRPr sz="1300" b="1">
-                <a:solidFill>
-                  <a:srgbClr val="94723E"/>
-                </a:solidFill>
-              </a:defRPr>
-            </a:pPr>
-            <a:r>
-              <a:t>01. Sasang-ResetMed (15/16박)</a:t>
-            </a:r>
-          </a:p>
-          <a:p>
-            <a:pPr>
               <a:spcAft>
-                <a:spcPts val="200"/>
+                <a:spcPts val="800"/>
               </a:spcAft>
-              <a:defRPr sz="1100" b="1">
-                <a:solidFill>
-                  <a:srgbClr val="26201C"/>
-                </a:solidFill>
-              </a:defRPr>
-            </a:pPr>
-            <a:r>
-              <a:t>클래식 사상체질 전신 재건 쿠어</a:t>
-            </a:r>
-          </a:p>
-          <a:p>
-            <a:pPr>
-              <a:defRPr sz="950">
-                <a:solidFill>
-                  <a:srgbClr val="5F5750"/>
-                </a:solidFill>
-              </a:defRPr>
-            </a:pPr>
-            <a:r>
-              <a:t>DTC 유전자 검사 + 10대 테마 매일 3단계 순환 + 1:1 라이프스타일 매뉴얼북 발행 (면역 나이 5년 리셋)</a:t>
-            </a:r>
-          </a:p>
-        </p:txBody>
-      </p:sp>
-      <p:sp>
-        <p:nvSpPr>
-          <p:cNvPr id="8" name="Rectangle 7"/>
+              <a:defRPr sz="1500" b="1">
+                <a:solidFill>
+                  <a:srgbClr val="1C362B"/>
+                </a:solidFill>
+              </a:defRPr>
+            </a:pPr>
+            <a:r>
+              <a:t>01. 사상체질 의학 과학화</a:t>
+            </a:r>
+          </a:p>
+          <a:p>
+            <a:pPr>
+              <a:lnSpc>
+                <a:spcPct val="130000"/>
+              </a:lnSpc>
+              <a:defRPr sz="1150">
+                <a:solidFill>
+                  <a:srgbClr val="554B44"/>
+                </a:solidFill>
+              </a:defRPr>
+            </a:pPr>
+            <a:r>
+              <a:t>1894년 이제마 『동의수세보원』 장부대소(臟腑大小) 원리와 인바디/뇌파/산화질소 데이터의 완벽한 융합</a:t>
+            </a:r>
+          </a:p>
+        </p:txBody>
+      </p:sp>
+      <p:sp>
+        <p:nvSpPr>
+          <p:cNvPr id="8" name="Rounded Rectangle 7"/>
           <p:cNvSpPr/>
           <p:nvPr/>
         </p:nvSpPr>
         <p:spPr>
           <a:xfrm>
             <a:off x="6126480" y="1508760"/>
-            <a:ext cx="5120640" cy="1417320"/>
-          </a:xfrm>
-          <a:prstGeom prst="rect">
+            <a:ext cx="5120640" cy="2148840"/>
+          </a:xfrm>
+          <a:prstGeom prst="roundRect">
             <a:avLst/>
           </a:prstGeom>
           <a:solidFill>
             <a:srgbClr val="FFFFFF"/>
           </a:solidFill>
-          <a:ln w="12700">
+          <a:ln w="13970">
             <a:solidFill>
-              <a:srgbClr val="C29B62"/>
+              <a:srgbClr val="C9A876"/>
             </a:solidFill>
           </a:ln>
         </p:spPr>
@@ -5248,8 +8718,8 @@
         </p:nvSpPr>
         <p:spPr>
           <a:xfrm>
-            <a:off x="6309360" y="1618488"/>
-            <a:ext cx="4754880" cy="1188720"/>
+            <a:off x="6355080" y="1691640"/>
+            <a:ext cx="4663440" cy="1783080"/>
           </a:xfrm>
           <a:prstGeom prst="rect">
             <a:avLst/>
@@ -5263,65 +8733,56 @@
           <a:lstStyle/>
           <a:p>
             <a:pPr>
-              <a:defRPr sz="1300" b="1">
-                <a:solidFill>
-                  <a:srgbClr val="94723E"/>
-                </a:solidFill>
-              </a:defRPr>
-            </a:pPr>
-            <a:r>
-              <a:t>02. SvasthaMed (5/6박)</a:t>
-            </a:r>
-          </a:p>
-          <a:p>
-            <a:pPr>
               <a:spcAft>
-                <a:spcPts val="200"/>
+                <a:spcPts val="800"/>
               </a:spcAft>
-              <a:defRPr sz="1100" b="1">
-                <a:solidFill>
-                  <a:srgbClr val="26201C"/>
-                </a:solidFill>
-              </a:defRPr>
-            </a:pPr>
-            <a:r>
-              <a:t>1:1 집중 디톡스 &amp; 림프 배농 쿠어</a:t>
-            </a:r>
-          </a:p>
-          <a:p>
-            <a:pPr>
-              <a:defRPr sz="950">
-                <a:solidFill>
-                  <a:srgbClr val="5F5750"/>
-                </a:solidFill>
-              </a:defRPr>
-            </a:pPr>
-            <a:r>
-              <a:t>1~3일 림프 배농 &amp; 온열 챔버(체온 1℃ 상승) ➔ 4~6일 마이크로바이옴 검사 &amp; 태극선법 (부종 85% 개선)</a:t>
-            </a:r>
-          </a:p>
-        </p:txBody>
-      </p:sp>
-      <p:sp>
-        <p:nvSpPr>
-          <p:cNvPr id="10" name="Rectangle 9"/>
+              <a:defRPr sz="1500" b="1">
+                <a:solidFill>
+                  <a:srgbClr val="A37F48"/>
+                </a:solidFill>
+              </a:defRPr>
+            </a:pPr>
+            <a:r>
+              <a:t>02. 10대 시그니처 테라피</a:t>
+            </a:r>
+          </a:p>
+          <a:p>
+            <a:pPr>
+              <a:lnSpc>
+                <a:spcPct val="130000"/>
+              </a:lnSpc>
+              <a:defRPr sz="1150">
+                <a:solidFill>
+                  <a:srgbClr val="554B44"/>
+                </a:solidFill>
+              </a:defRPr>
+            </a:pPr>
+            <a:r>
+              <a:t>20분 약재 족욕, 은반지 의전, 80분 이원화 바디(한의 수기+순수 오일), 1시간 심부 온열, 태극선법 기체조</a:t>
+            </a:r>
+          </a:p>
+        </p:txBody>
+      </p:sp>
+      <p:sp>
+        <p:nvSpPr>
+          <p:cNvPr id="10" name="Rounded Rectangle 9"/>
           <p:cNvSpPr/>
           <p:nvPr/>
         </p:nvSpPr>
         <p:spPr>
           <a:xfrm>
-            <a:off x="731520" y="3108960"/>
-            <a:ext cx="5120640" cy="1417320"/>
-          </a:xfrm>
-          <a:prstGeom prst="rect">
+            <a:off x="731520" y="3931920"/>
+            <a:ext cx="5120640" cy="2148840"/>
+          </a:xfrm>
+          <a:prstGeom prst="roundRect">
             <a:avLst/>
           </a:prstGeom>
           <a:solidFill>
             <a:srgbClr val="FFFFFF"/>
           </a:solidFill>
-          <a:ln w="12700">
+          <a:ln w="13970">
             <a:solidFill>
-              <a:srgbClr val="C29B62"/>
+              <a:srgbClr val="C9A876"/>
             </a:solidFill>
           </a:ln>
         </p:spPr>
@@ -5355,8 +8816,8 @@
         </p:nvSpPr>
         <p:spPr>
           <a:xfrm>
-            <a:off x="914400" y="3218688"/>
-            <a:ext cx="4754880" cy="1188720"/>
+            <a:off x="960120" y="4114800"/>
+            <a:ext cx="4663440" cy="1783080"/>
           </a:xfrm>
           <a:prstGeom prst="rect">
             <a:avLst/>
@@ -5370,65 +8831,56 @@
           <a:lstStyle/>
           <a:p>
             <a:pPr>
-              <a:defRPr sz="1300" b="1">
-                <a:solidFill>
-                  <a:srgbClr val="94723E"/>
-                </a:solidFill>
-              </a:defRPr>
-            </a:pPr>
-            <a:r>
-              <a:t>03. BalaMental (5/6박)</a:t>
-            </a:r>
-          </a:p>
-          <a:p>
-            <a:pPr>
               <a:spcAft>
-                <a:spcPts val="200"/>
+                <a:spcPts val="800"/>
               </a:spcAft>
-              <a:defRPr sz="1100" b="1">
-                <a:solidFill>
-                  <a:srgbClr val="26201C"/>
-                </a:solidFill>
-              </a:defRPr>
-            </a:pPr>
-            <a:r>
-              <a:t>스트레스 해소 &amp; 자율신경 회복 쿠어</a:t>
-            </a:r>
-          </a:p>
-          <a:p>
-            <a:pPr>
-              <a:defRPr sz="950">
-                <a:solidFill>
-                  <a:srgbClr val="5F5750"/>
-                </a:solidFill>
-              </a:defRPr>
-            </a:pPr>
-            <a:r>
-              <a:t>High-Beta파 뇌 피로 해소, 30분 전통 다기 침묵 명상, 프랑킨센스 뇌파 안정화 (뇌 피로도 70% 감소)</a:t>
-            </a:r>
-          </a:p>
-        </p:txBody>
-      </p:sp>
-      <p:sp>
-        <p:nvSpPr>
-          <p:cNvPr id="12" name="Rectangle 11"/>
+              <a:defRPr sz="1500" b="1">
+                <a:solidFill>
+                  <a:srgbClr val="1C362B"/>
+                </a:solidFill>
+              </a:defRPr>
+            </a:pPr>
+            <a:r>
+              <a:t>03. 12시간 단식 &amp; 맞춤 섭생</a:t>
+            </a:r>
+          </a:p>
+          <a:p>
+            <a:pPr>
+              <a:lnSpc>
+                <a:spcPct val="130000"/>
+              </a:lnSpc>
+              <a:defRPr sz="1150">
+                <a:solidFill>
+                  <a:srgbClr val="554B44"/>
+                </a:solidFill>
+              </a:defRPr>
+            </a:pPr>
+            <a:r>
+              <a:t>18:00~06:00 단식을 통한 자가포식(Autophagy) 활성화 및 기상 후 4대 체질 맞춤 영양 미역국 조식</a:t>
+            </a:r>
+          </a:p>
+        </p:txBody>
+      </p:sp>
+      <p:sp>
+        <p:nvSpPr>
+          <p:cNvPr id="12" name="Rounded Rectangle 11"/>
           <p:cNvSpPr/>
           <p:nvPr/>
         </p:nvSpPr>
         <p:spPr>
           <a:xfrm>
-            <a:off x="6126480" y="3108960"/>
-            <a:ext cx="5120640" cy="1417320"/>
-          </a:xfrm>
-          <a:prstGeom prst="rect">
+            <a:off x="6126480" y="3931920"/>
+            <a:ext cx="5120640" cy="2148840"/>
+          </a:xfrm>
+          <a:prstGeom prst="roundRect">
             <a:avLst/>
           </a:prstGeom>
           <a:solidFill>
             <a:srgbClr val="FFFFFF"/>
           </a:solidFill>
-          <a:ln w="12700">
+          <a:ln w="13970">
             <a:solidFill>
-              <a:srgbClr val="C29B62"/>
+              <a:srgbClr val="C9A876"/>
             </a:solidFill>
           </a:ln>
         </p:spPr>
@@ -5462,8 +8914,8 @@
         </p:nvSpPr>
         <p:spPr>
           <a:xfrm>
-            <a:off x="6309360" y="3218688"/>
-            <a:ext cx="4754880" cy="1188720"/>
+            <a:off x="6355080" y="4114800"/>
+            <a:ext cx="4663440" cy="1783080"/>
           </a:xfrm>
           <a:prstGeom prst="rect">
             <a:avLst/>
@@ -5477,255 +8929,32 @@
           <a:lstStyle/>
           <a:p>
             <a:pPr>
-              <a:defRPr sz="1300" b="1">
-                <a:solidFill>
-                  <a:srgbClr val="94723E"/>
-                </a:solidFill>
-              </a:defRPr>
-            </a:pPr>
-            <a:r>
-              <a:t>04. SasangDetox (5/6박)</a:t>
-            </a:r>
-          </a:p>
-          <a:p>
-            <a:pPr>
               <a:spcAft>
-                <a:spcPts val="200"/>
+                <a:spcPts val="800"/>
               </a:spcAft>
-              <a:defRPr sz="1100" b="1">
-                <a:solidFill>
-                  <a:srgbClr val="26201C"/>
-                </a:solidFill>
-              </a:defRPr>
-            </a:pPr>
-            <a:r>
-              <a:t>12시간 단식 &amp; 세포 자가포식 쿠어</a:t>
-            </a:r>
-          </a:p>
-          <a:p>
-            <a:pPr>
-              <a:defRPr sz="950">
-                <a:solidFill>
-                  <a:srgbClr val="5F5750"/>
-                </a:solidFill>
-              </a:defRPr>
-            </a:pPr>
-            <a:r>
-              <a:t>18:00~06:00 12h 단식으로 손상 단백질 분해 청소 + 기상 직후 4대 맞춤 영양 미역국 공급</a:t>
-            </a:r>
-          </a:p>
-        </p:txBody>
-      </p:sp>
-      <p:sp>
-        <p:nvSpPr>
-          <p:cNvPr id="14" name="Rectangle 13"/>
-          <p:cNvSpPr/>
-          <p:nvPr/>
-        </p:nvSpPr>
-        <p:spPr>
-          <a:xfrm>
-            <a:off x="731520" y="4709160"/>
-            <a:ext cx="5120640" cy="1417320"/>
-          </a:xfrm>
-          <a:prstGeom prst="rect">
-            <a:avLst/>
-          </a:prstGeom>
-          <a:solidFill>
-            <a:srgbClr val="FFFFFF"/>
-          </a:solidFill>
-          <a:ln w="12700">
-            <a:solidFill>
-              <a:srgbClr val="C29B62"/>
-            </a:solidFill>
-          </a:ln>
-        </p:spPr>
-        <p:style>
-          <a:lnRef idx="1">
-            <a:schemeClr val="accent1"/>
-          </a:lnRef>
-          <a:fillRef idx="3">
-            <a:schemeClr val="accent1"/>
-          </a:fillRef>
-          <a:effectRef idx="2">
-            <a:schemeClr val="accent1"/>
-          </a:effectRef>
-          <a:fontRef idx="minor">
-            <a:schemeClr val="lt1"/>
-          </a:fontRef>
-        </p:style>
-        <p:txBody>
-          <a:bodyPr rtlCol="0" anchor="ctr"/>
-          <a:lstStyle/>
-          <a:p>
-            <a:pPr algn="ctr"/>
-          </a:p>
-        </p:txBody>
-      </p:sp>
-      <p:sp>
-        <p:nvSpPr>
-          <p:cNvPr id="15" name="TextBox 14"/>
-          <p:cNvSpPr txBox="1"/>
-          <p:nvPr/>
-        </p:nvSpPr>
-        <p:spPr>
-          <a:xfrm>
-            <a:off x="914400" y="4818888"/>
-            <a:ext cx="4754880" cy="1188720"/>
-          </a:xfrm>
-          <a:prstGeom prst="rect">
-            <a:avLst/>
-          </a:prstGeom>
-          <a:noFill/>
-        </p:spPr>
-        <p:txBody>
-          <a:bodyPr wrap="square">
-            <a:spAutoFit/>
-          </a:bodyPr>
-          <a:lstStyle/>
-          <a:p>
-            <a:pPr>
-              <a:defRPr sz="1300" b="1">
-                <a:solidFill>
-                  <a:srgbClr val="94723E"/>
-                </a:solidFill>
-              </a:defRPr>
-            </a:pPr>
-            <a:r>
-              <a:t>05. PhysioSasang (5/6박)</a:t>
-            </a:r>
-          </a:p>
-          <a:p>
-            <a:pPr>
-              <a:spcAft>
-                <a:spcPts val="200"/>
-              </a:spcAft>
-              <a:defRPr sz="1100" b="1">
-                <a:solidFill>
-                  <a:srgbClr val="26201C"/>
-                </a:solidFill>
-              </a:defRPr>
-            </a:pPr>
-            <a:r>
-              <a:t>근골격계 &amp; 척추 온열 이원화 쿠어</a:t>
-            </a:r>
-          </a:p>
-          <a:p>
-            <a:pPr>
-              <a:defRPr sz="950">
-                <a:solidFill>
-                  <a:srgbClr val="5F5750"/>
-                </a:solidFill>
-              </a:defRPr>
-            </a:pPr>
-            <a:r>
-              <a:t>1단계 30분 한의 수기 지압으로 기혈 순환로 개방 + 2단계 50분 최고급 순수 에센셜 오일 림프 드레나쥐</a:t>
-            </a:r>
-          </a:p>
-        </p:txBody>
-      </p:sp>
-      <p:sp>
-        <p:nvSpPr>
-          <p:cNvPr id="16" name="Rectangle 15"/>
-          <p:cNvSpPr/>
-          <p:nvPr/>
-        </p:nvSpPr>
-        <p:spPr>
-          <a:xfrm>
-            <a:off x="6126480" y="4709160"/>
-            <a:ext cx="5120640" cy="1417320"/>
-          </a:xfrm>
-          <a:prstGeom prst="rect">
-            <a:avLst/>
-          </a:prstGeom>
-          <a:solidFill>
-            <a:srgbClr val="FFFFFF"/>
-          </a:solidFill>
-          <a:ln w="12700">
-            <a:solidFill>
-              <a:srgbClr val="C29B62"/>
-            </a:solidFill>
-          </a:ln>
-        </p:spPr>
-        <p:style>
-          <a:lnRef idx="1">
-            <a:schemeClr val="accent1"/>
-          </a:lnRef>
-          <a:fillRef idx="3">
-            <a:schemeClr val="accent1"/>
-          </a:fillRef>
-          <a:effectRef idx="2">
-            <a:schemeClr val="accent1"/>
-          </a:effectRef>
-          <a:fontRef idx="minor">
-            <a:schemeClr val="lt1"/>
-          </a:fontRef>
-        </p:style>
-        <p:txBody>
-          <a:bodyPr rtlCol="0" anchor="ctr"/>
-          <a:lstStyle/>
-          <a:p>
-            <a:pPr algn="ctr"/>
-          </a:p>
-        </p:txBody>
-      </p:sp>
-      <p:sp>
-        <p:nvSpPr>
-          <p:cNvPr id="17" name="TextBox 16"/>
-          <p:cNvSpPr txBox="1"/>
-          <p:nvPr/>
-        </p:nvSpPr>
-        <p:spPr>
-          <a:xfrm>
-            <a:off x="6309360" y="4818888"/>
-            <a:ext cx="4754880" cy="1188720"/>
-          </a:xfrm>
-          <a:prstGeom prst="rect">
-            <a:avLst/>
-          </a:prstGeom>
-          <a:noFill/>
-        </p:spPr>
-        <p:txBody>
-          <a:bodyPr wrap="square">
-            <a:spAutoFit/>
-          </a:bodyPr>
-          <a:lstStyle/>
-          <a:p>
-            <a:pPr>
-              <a:defRPr sz="1300" b="1">
-                <a:solidFill>
-                  <a:srgbClr val="94723E"/>
-                </a:solidFill>
-              </a:defRPr>
-            </a:pPr>
-            <a:r>
-              <a:t>06. SasangWellMed (2/3박)</a:t>
-            </a:r>
-          </a:p>
-          <a:p>
-            <a:pPr>
-              <a:spcAft>
-                <a:spcPts val="200"/>
-              </a:spcAft>
-              <a:defRPr sz="1100" b="1">
-                <a:solidFill>
-                  <a:srgbClr val="26201C"/>
-                </a:solidFill>
-              </a:defRPr>
-            </a:pPr>
-            <a:r>
-              <a:t>주말 힐링 &amp; 긴급 생체 리프레시</a:t>
-            </a:r>
-          </a:p>
-          <a:p>
-            <a:pPr>
-              <a:defRPr sz="950">
-                <a:solidFill>
-                  <a:srgbClr val="5F5750"/>
-                </a:solidFill>
-              </a:defRPr>
-            </a:pPr>
-            <a:r>
-              <a:t>단기 입소 VIP를 위한 문진 ➔ 족욕 ➔ 80분 바디 ➔ 12h 단식 ➔ 산화질소 나노 미스트 코어 리프레시</a:t>
+              <a:defRPr sz="1500" b="1">
+                <a:solidFill>
+                  <a:srgbClr val="A37F48"/>
+                </a:solidFill>
+              </a:defRPr>
+            </a:pPr>
+            <a:r>
+              <a:t>04. VIP 평생 LTV 모델</a:t>
+            </a:r>
+          </a:p>
+          <a:p>
+            <a:pPr>
+              <a:lnSpc>
+                <a:spcPct val="130000"/>
+              </a:lnSpc>
+              <a:defRPr sz="1150">
+                <a:solidFill>
+                  <a:srgbClr val="554B44"/>
+                </a:solidFill>
+              </a:defRPr>
+            </a:pPr>
+            <a:r>
+              <a:t>DTC 유전자 및 마이크로바이옴 검사 연동, 7일 후 1:1 바이오 리포트, 월간 맞춤 오일 정기구독(LRP) 생태계</a:t>
             </a:r>
           </a:p>
         </p:txBody>
@@ -5763,7 +8992,7 @@
             <a:avLst/>
           </a:prstGeom>
           <a:solidFill>
-            <a:srgbClr val="FAF8F3"/>
+            <a:srgbClr val="FDFBF7"/>
           </a:solidFill>
           <a:ln>
             <a:noFill/>
@@ -5814,14 +9043,14 @@
           <a:lstStyle/>
           <a:p>
             <a:pPr>
-              <a:defRPr sz="950" b="1">
-                <a:solidFill>
-                  <a:srgbClr val="94723E"/>
-                </a:solidFill>
-              </a:defRPr>
-            </a:pPr>
-            <a:r>
-              <a:t>FOUR CONSTITUTIONS</a:t>
+              <a:defRPr sz="1000" b="1">
+                <a:solidFill>
+                  <a:srgbClr val="A37F48"/>
+                </a:solidFill>
+              </a:defRPr>
+            </a:pPr>
+            <a:r>
+              <a:t>MARKET OPPORTUNITY</a:t>
             </a:r>
           </a:p>
         </p:txBody>
@@ -5851,12 +9080,12 @@
             <a:pPr>
               <a:defRPr sz="2100" b="1">
                 <a:solidFill>
-                  <a:srgbClr val="26201C"/>
-                </a:solidFill>
-              </a:defRPr>
-            </a:pPr>
-            <a:r>
-              <a:t>Die Vier Konstitutionstypen : 4대 사상체질 심층 가이드</a:t>
+                  <a:srgbClr val="241E19"/>
+                </a:solidFill>
+              </a:defRPr>
+            </a:pPr>
+            <a:r>
+              <a:t>글로벌 웰니스 시장(GWI)과 3세대 처방형 스파의 급부상</a:t>
             </a:r>
           </a:p>
         </p:txBody>
@@ -5869,14 +9098,14 @@
         </p:nvSpPr>
         <p:spPr>
           <a:xfrm>
-            <a:off x="731520" y="1280160"/>
-            <a:ext cx="2286000" cy="22860"/>
+            <a:off x="731520" y="1261872"/>
+            <a:ext cx="2011680" cy="22860"/>
           </a:xfrm>
           <a:prstGeom prst="rect">
             <a:avLst/>
           </a:prstGeom>
           <a:solidFill>
-            <a:srgbClr val="C29B62"/>
+            <a:srgbClr val="C9A876"/>
           </a:solidFill>
           <a:ln>
             <a:noFill/>
@@ -5906,24 +9135,24 @@
       </p:sp>
       <p:sp>
         <p:nvSpPr>
-          <p:cNvPr id="6" name="Rectangle 5"/>
+          <p:cNvPr id="6" name="Rounded Rectangle 5"/>
           <p:cNvSpPr/>
           <p:nvPr/>
         </p:nvSpPr>
         <p:spPr>
           <a:xfrm>
-            <a:off x="731520" y="1508760"/>
-            <a:ext cx="2560320" cy="4846320"/>
-          </a:xfrm>
-          <a:prstGeom prst="rect">
+            <a:off x="731520" y="1463040"/>
+            <a:ext cx="3474720" cy="4846320"/>
+          </a:xfrm>
+          <a:prstGeom prst="roundRect">
             <a:avLst/>
           </a:prstGeom>
           <a:solidFill>
-            <a:srgbClr val="FFFFFF"/>
+            <a:srgbClr val="1C362B"/>
           </a:solidFill>
-          <a:ln w="12700">
+          <a:ln w="13970">
             <a:solidFill>
-              <a:srgbClr val="94723E"/>
+              <a:srgbClr val="C9A876"/>
             </a:solidFill>
           </a:ln>
         </p:spPr>
@@ -5957,8 +9186,8 @@
         </p:nvSpPr>
         <p:spPr>
           <a:xfrm>
-            <a:off x="868680" y="1645920"/>
-            <a:ext cx="2286000" cy="4572000"/>
+            <a:off x="914400" y="1737360"/>
+            <a:ext cx="3108960" cy="4297680"/>
           </a:xfrm>
           <a:prstGeom prst="rect">
             <a:avLst/>
@@ -5972,14 +9201,17 @@
           <a:lstStyle/>
           <a:p>
             <a:pPr>
-              <a:defRPr sz="1400" b="1">
-                <a:solidFill>
-                  <a:srgbClr val="94723E"/>
-                </a:solidFill>
-              </a:defRPr>
-            </a:pPr>
-            <a:r>
-              <a:t>Tae-eum (태음인)</a:t>
+              <a:spcAft>
+                <a:spcPts val="1200"/>
+              </a:spcAft>
+              <a:defRPr sz="1100" b="1">
+                <a:solidFill>
+                  <a:srgbClr val="C9A876"/>
+                </a:solidFill>
+              </a:defRPr>
+            </a:pPr>
+            <a:r>
+              <a:t>GLOBAL WELLNESS 2026</a:t>
             </a:r>
           </a:p>
           <a:p>
@@ -5987,69 +9219,53 @@
               <a:spcAft>
                 <a:spcPts val="800"/>
               </a:spcAft>
-              <a:defRPr sz="1000">
-                <a:solidFill>
-                  <a:srgbClr val="94723E"/>
-                </a:solidFill>
-              </a:defRPr>
-            </a:pPr>
-            <a:r>
-              <a:t>간대폐소 (肝大肺小)</a:t>
+              <a:defRPr sz="3200" b="1">
+                <a:solidFill>
+                  <a:srgbClr val="FFFFFF"/>
+                </a:solidFill>
+              </a:defRPr>
+            </a:pPr>
+            <a:r>
+              <a:t>$7.0 Trillion</a:t>
             </a:r>
           </a:p>
           <a:p>
             <a:pPr>
               <a:lnSpc>
-                <a:spcPct val="125000"/>
+                <a:spcPct val="130000"/>
               </a:lnSpc>
-              <a:defRPr sz="1000">
-                <a:solidFill>
-                  <a:srgbClr val="26201C"/>
-                </a:solidFill>
-              </a:defRPr>
-            </a:pPr>
-            <a:r>
-              <a:t>• 장부 특성: 간 기능 강함, 폐/기관지 허약</a:t>
-            </a:r>
-            <a:br/>
-            <a:r>
-              <a:t>• 취약 증상: 림프 정체, 비만, 기관지 건조</a:t>
-            </a:r>
-            <a:br/>
-            <a:r>
-              <a:t>• 전용 오일: 유칼립투스, 샌달우드</a:t>
-            </a:r>
-            <a:br/>
-            <a:r>
-              <a:t>• 쿠어 식단: 소고기 양지 들깨 미역국 + 율무밥</a:t>
-            </a:r>
-            <a:br/>
-            <a:r>
-              <a:t>• 비언어 의전: 황색 가운 / 우측 4지 은반지</a:t>
-            </a:r>
-          </a:p>
-        </p:txBody>
-      </p:sp>
-      <p:sp>
-        <p:nvSpPr>
-          <p:cNvPr id="8" name="Rectangle 7"/>
+              <a:defRPr sz="1150">
+                <a:solidFill>
+                  <a:srgbClr val="D2C8B4"/>
+                </a:solidFill>
+              </a:defRPr>
+            </a:pPr>
+            <a:r>
+              <a:t>연평균 8.6% 초고속 성장 중인 글로벌 웰니스 이코노미(약 9,500조 원). 글로벌 VIP 고객층은 단순 휴식을 넘어 '생체 데이터를 기반으로 내 몸을 리셋하는 처방형 스파'에 지갑을 열고 있습니다.</a:t>
+            </a:r>
+          </a:p>
+        </p:txBody>
+      </p:sp>
+      <p:sp>
+        <p:nvSpPr>
+          <p:cNvPr id="8" name="Rounded Rectangle 7"/>
           <p:cNvSpPr/>
           <p:nvPr/>
         </p:nvSpPr>
         <p:spPr>
           <a:xfrm>
-            <a:off x="3429000" y="1508760"/>
-            <a:ext cx="2560320" cy="4846320"/>
-          </a:xfrm>
-          <a:prstGeom prst="rect">
+            <a:off x="4480560" y="1463040"/>
+            <a:ext cx="6949440" cy="2286000"/>
+          </a:xfrm>
+          <a:prstGeom prst="roundRect">
             <a:avLst/>
           </a:prstGeom>
           <a:solidFill>
             <a:srgbClr val="FFFFFF"/>
           </a:solidFill>
-          <a:ln w="12700">
+          <a:ln w="13970">
             <a:solidFill>
-              <a:srgbClr val="1C362B"/>
+              <a:srgbClr val="C9A876"/>
             </a:solidFill>
           </a:ln>
         </p:spPr>
@@ -6083,8 +9299,8 @@
         </p:nvSpPr>
         <p:spPr>
           <a:xfrm>
-            <a:off x="3566160" y="1645920"/>
-            <a:ext cx="2286000" cy="4572000"/>
+            <a:off x="4663440" y="1645920"/>
+            <a:ext cx="6583680" cy="1920240"/>
           </a:xfrm>
           <a:prstGeom prst="rect">
             <a:avLst/>
@@ -6098,84 +9314,64 @@
           <a:lstStyle/>
           <a:p>
             <a:pPr>
-              <a:defRPr sz="1400" b="1">
-                <a:solidFill>
-                  <a:srgbClr val="1C362B"/>
-                </a:solidFill>
-              </a:defRPr>
-            </a:pPr>
-            <a:r>
-              <a:t>So-yang (소양인)</a:t>
-            </a:r>
-          </a:p>
-          <a:p>
-            <a:pPr>
               <a:spcAft>
-                <a:spcPts val="800"/>
+                <a:spcPts val="600"/>
               </a:spcAft>
-              <a:defRPr sz="1000">
-                <a:solidFill>
-                  <a:srgbClr val="94723E"/>
-                </a:solidFill>
-              </a:defRPr>
-            </a:pPr>
-            <a:r>
-              <a:t>비대신소 (脾大腎小)</a:t>
+              <a:defRPr sz="1500" b="1">
+                <a:solidFill>
+                  <a:srgbClr val="241E19"/>
+                </a:solidFill>
+              </a:defRPr>
+            </a:pPr>
+            <a:r>
+              <a:t>스파 패러다임의 3단계 진화</a:t>
             </a:r>
           </a:p>
           <a:p>
             <a:pPr>
               <a:lnSpc>
-                <a:spcPct val="125000"/>
+                <a:spcPct val="130000"/>
               </a:lnSpc>
-              <a:defRPr sz="1000">
-                <a:solidFill>
-                  <a:srgbClr val="26201C"/>
-                </a:solidFill>
-              </a:defRPr>
-            </a:pPr>
-            <a:r>
-              <a:t>• 장부 특성: 소화기 열 많음, 신장 음기 허약</a:t>
+              <a:defRPr sz="1150">
+                <a:solidFill>
+                  <a:srgbClr val="554B44"/>
+                </a:solidFill>
+              </a:defRPr>
+            </a:pPr>
+            <a:r>
+              <a:t>• 1세대 (휴식형): 서양식 스웨디시, 단순 근육 이완 (차별화 한계)</a:t>
             </a:r>
             <a:br/>
             <a:r>
-              <a:t>• 취약 증상: 상열감, 편두통, 가슴 답답, 불면</a:t>
+              <a:t>• 2세대 (시설/메디컬형): 5성급 리조트 하드웨어 및 의료 시술 결합 (고비용/부작용 리스크)</a:t>
             </a:r>
             <a:br/>
             <a:r>
-              <a:t>• 전용 오일: 페퍼민트, 라벤더</a:t>
-            </a:r>
-            <a:br/>
-            <a:r>
-              <a:t>• 쿠어 식단: 돼지고기 수육 / 조개 미역국 + 보리밥</a:t>
-            </a:r>
-            <a:br/>
-            <a:r>
-              <a:t>• 비언어 의전: 청색 가운 / 좌측 2지 은반지</a:t>
-            </a:r>
-          </a:p>
-        </p:txBody>
-      </p:sp>
-      <p:sp>
-        <p:nvSpPr>
-          <p:cNvPr id="10" name="Rectangle 9"/>
+              <a:t>• 👑 3세대 (초개인화 처방형): 생체 데이터 기반 사상체질 맞춤 신체 리셋 (사상체질 스파)</a:t>
+            </a:r>
+          </a:p>
+        </p:txBody>
+      </p:sp>
+      <p:sp>
+        <p:nvSpPr>
+          <p:cNvPr id="10" name="Rounded Rectangle 9"/>
           <p:cNvSpPr/>
           <p:nvPr/>
         </p:nvSpPr>
         <p:spPr>
           <a:xfrm>
-            <a:off x="6126480" y="1508760"/>
-            <a:ext cx="2560320" cy="4846320"/>
-          </a:xfrm>
-          <a:prstGeom prst="rect">
+            <a:off x="4480560" y="4023360"/>
+            <a:ext cx="6949440" cy="2286000"/>
+          </a:xfrm>
+          <a:prstGeom prst="roundRect">
             <a:avLst/>
           </a:prstGeom>
           <a:solidFill>
-            <a:srgbClr val="FFFFFF"/>
+            <a:srgbClr val="F5F1E9"/>
           </a:solidFill>
-          <a:ln w="12700">
+          <a:ln w="13970">
             <a:solidFill>
-              <a:srgbClr val="94723E"/>
+              <a:srgbClr val="C9A876"/>
             </a:solidFill>
           </a:ln>
         </p:spPr>
@@ -6209,8 +9405,8 @@
         </p:nvSpPr>
         <p:spPr>
           <a:xfrm>
-            <a:off x="6263640" y="1645920"/>
-            <a:ext cx="2286000" cy="4572000"/>
+            <a:off x="4663440" y="4206240"/>
+            <a:ext cx="6583680" cy="1920240"/>
           </a:xfrm>
           <a:prstGeom prst="rect">
             <a:avLst/>
@@ -6224,186 +9420,36 @@
           <a:lstStyle/>
           <a:p>
             <a:pPr>
-              <a:defRPr sz="1400" b="1">
-                <a:solidFill>
-                  <a:srgbClr val="94723E"/>
-                </a:solidFill>
-              </a:defRPr>
-            </a:pPr>
-            <a:r>
-              <a:t>So-eum (소음인)</a:t>
-            </a:r>
-          </a:p>
-          <a:p>
-            <a:pPr>
               <a:spcAft>
-                <a:spcPts val="800"/>
+                <a:spcPts val="600"/>
               </a:spcAft>
-              <a:defRPr sz="1000">
-                <a:solidFill>
-                  <a:srgbClr val="94723E"/>
-                </a:solidFill>
-              </a:defRPr>
-            </a:pPr>
-            <a:r>
-              <a:t>신대비소 (腎大脾小)</a:t>
+              <a:defRPr sz="1500" b="1">
+                <a:solidFill>
+                  <a:srgbClr val="A37F48"/>
+                </a:solidFill>
+              </a:defRPr>
+            </a:pPr>
+            <a:r>
+              <a:t>인도 아유르베다(3도샤) 대비 사상체질의 비교 우위</a:t>
             </a:r>
           </a:p>
           <a:p>
             <a:pPr>
               <a:lnSpc>
-                <a:spcPct val="125000"/>
+                <a:spcPct val="130000"/>
               </a:lnSpc>
-              <a:defRPr sz="1000">
-                <a:solidFill>
-                  <a:srgbClr val="26201C"/>
-                </a:solidFill>
-              </a:defRPr>
-            </a:pPr>
-            <a:r>
-              <a:t>• 장부 특성: 신장 기능 튼튼, 비위 차고 약함</a:t>
+              <a:defRPr sz="1150">
+                <a:solidFill>
+                  <a:srgbClr val="554B44"/>
+                </a:solidFill>
+              </a:defRPr>
+            </a:pPr>
+            <a:r>
+              <a:t>• 아유르베다: 3도샤(바타/피타/카파) 에너지의 철학적 분류 및 중금속 약재 안전성 논란</a:t>
             </a:r>
             <a:br/>
             <a:r>
-              <a:t>• 취약 증상: 수족냉증, 만성 소화불량, 피로</a:t>
-            </a:r>
-            <a:br/>
-            <a:r>
-              <a:t>• 전용 오일: 진저, 온가드, 시나몬</a:t>
-            </a:r>
-            <a:br/>
-            <a:r>
-              <a:t>• 쿠어 식단: 닭가슴살 황기 보양 미역국 + 찹쌀밥</a:t>
-            </a:r>
-            <a:br/>
-            <a:r>
-              <a:t>• 비언어 의전: 백색 가운 / 우측 3지 은반지</a:t>
-            </a:r>
-          </a:p>
-        </p:txBody>
-      </p:sp>
-      <p:sp>
-        <p:nvSpPr>
-          <p:cNvPr id="12" name="Rectangle 11"/>
-          <p:cNvSpPr/>
-          <p:nvPr/>
-        </p:nvSpPr>
-        <p:spPr>
-          <a:xfrm>
-            <a:off x="8823960" y="1508760"/>
-            <a:ext cx="2560320" cy="4846320"/>
-          </a:xfrm>
-          <a:prstGeom prst="rect">
-            <a:avLst/>
-          </a:prstGeom>
-          <a:solidFill>
-            <a:srgbClr val="FFFFFF"/>
-          </a:solidFill>
-          <a:ln w="12700">
-            <a:solidFill>
-              <a:srgbClr val="1C362B"/>
-            </a:solidFill>
-          </a:ln>
-        </p:spPr>
-        <p:style>
-          <a:lnRef idx="1">
-            <a:schemeClr val="accent1"/>
-          </a:lnRef>
-          <a:fillRef idx="3">
-            <a:schemeClr val="accent1"/>
-          </a:fillRef>
-          <a:effectRef idx="2">
-            <a:schemeClr val="accent1"/>
-          </a:effectRef>
-          <a:fontRef idx="minor">
-            <a:schemeClr val="lt1"/>
-          </a:fontRef>
-        </p:style>
-        <p:txBody>
-          <a:bodyPr rtlCol="0" anchor="ctr"/>
-          <a:lstStyle/>
-          <a:p>
-            <a:pPr algn="ctr"/>
-          </a:p>
-        </p:txBody>
-      </p:sp>
-      <p:sp>
-        <p:nvSpPr>
-          <p:cNvPr id="13" name="TextBox 12"/>
-          <p:cNvSpPr txBox="1"/>
-          <p:nvPr/>
-        </p:nvSpPr>
-        <p:spPr>
-          <a:xfrm>
-            <a:off x="8961120" y="1645920"/>
-            <a:ext cx="2286000" cy="4572000"/>
-          </a:xfrm>
-          <a:prstGeom prst="rect">
-            <a:avLst/>
-          </a:prstGeom>
-          <a:noFill/>
-        </p:spPr>
-        <p:txBody>
-          <a:bodyPr wrap="square">
-            <a:spAutoFit/>
-          </a:bodyPr>
-          <a:lstStyle/>
-          <a:p>
-            <a:pPr>
-              <a:defRPr sz="1400" b="1">
-                <a:solidFill>
-                  <a:srgbClr val="1C362B"/>
-                </a:solidFill>
-              </a:defRPr>
-            </a:pPr>
-            <a:r>
-              <a:t>Tae-yang (태양인)</a:t>
-            </a:r>
-          </a:p>
-          <a:p>
-            <a:pPr>
-              <a:spcAft>
-                <a:spcPts val="800"/>
-              </a:spcAft>
-              <a:defRPr sz="1000">
-                <a:solidFill>
-                  <a:srgbClr val="94723E"/>
-                </a:solidFill>
-              </a:defRPr>
-            </a:pPr>
-            <a:r>
-              <a:t>폐대간소 (肺大肝小)</a:t>
-            </a:r>
-          </a:p>
-          <a:p>
-            <a:pPr>
-              <a:lnSpc>
-                <a:spcPct val="125000"/>
-              </a:lnSpc>
-              <a:defRPr sz="1000">
-                <a:solidFill>
-                  <a:srgbClr val="26201C"/>
-                </a:solidFill>
-              </a:defRPr>
-            </a:pPr>
-            <a:r>
-              <a:t>• 장부 특성: 폐 기능 강함, 간 해독/하체 허약</a:t>
-            </a:r>
-            <a:br/>
-            <a:r>
-              <a:t>• 취약 증상: 상기증, 목덜미 강직, 하지 무력</a:t>
-            </a:r>
-            <a:br/>
-            <a:r>
-              <a:t>• 전용 오일: 베티버, 프랑킨센스</a:t>
-            </a:r>
-            <a:br/>
-            <a:r>
-              <a:t>• 쿠어 식단: 완도산 전복 홍합 해물 미역국 + 메밀죽</a:t>
-            </a:r>
-            <a:br/>
-            <a:r>
-              <a:t>• 비언어 의전: 적색 가운 / 좌측 4지 은반지</a:t>
+              <a:t>• 사상체질 스파: 간·폐·비·신 장부대소 해부생리학적 균형점 + 최고급 순수 에센셜 오일과 12시간 단식으로 부작용 0% 실현</a:t>
             </a:r>
           </a:p>
         </p:txBody>
@@ -6441,7 +9487,7 @@
             <a:avLst/>
           </a:prstGeom>
           <a:solidFill>
-            <a:srgbClr val="FAF8F3"/>
+            <a:srgbClr val="FDFBF7"/>
           </a:solidFill>
           <a:ln>
             <a:noFill/>
@@ -6492,14 +9538,14 @@
           <a:lstStyle/>
           <a:p>
             <a:pPr>
-              <a:defRPr sz="950" b="1">
-                <a:solidFill>
-                  <a:srgbClr val="94723E"/>
-                </a:solidFill>
-              </a:defRPr>
-            </a:pPr>
-            <a:r>
-              <a:t>SIGNATURE TREATMENTS</a:t>
+              <a:defRPr sz="1000" b="1">
+                <a:solidFill>
+                  <a:srgbClr val="A37F48"/>
+                </a:solidFill>
+              </a:defRPr>
+            </a:pPr>
+            <a:r>
+              <a:t>HERITAGE &amp; SCIENCE</a:t>
             </a:r>
           </a:p>
         </p:txBody>
@@ -6529,12 +9575,12 @@
             <a:pPr>
               <a:defRPr sz="2100" b="1">
                 <a:solidFill>
-                  <a:srgbClr val="26201C"/>
-                </a:solidFill>
-              </a:defRPr>
-            </a:pPr>
-            <a:r>
-              <a:t>Die 10 Kur-Therapien : 사상체질 10대 시그니처 테라피</a:t>
+                  <a:srgbClr val="241E19"/>
+                </a:solidFill>
+              </a:defRPr>
+            </a:pPr>
+            <a:r>
+              <a:t>핵심 의학 철학 : 1894년 이제마의 동의수세보원</a:t>
             </a:r>
           </a:p>
         </p:txBody>
@@ -6547,14 +9593,14 @@
         </p:nvSpPr>
         <p:spPr>
           <a:xfrm>
-            <a:off x="731520" y="1280160"/>
-            <a:ext cx="2286000" cy="22860"/>
+            <a:off x="731520" y="1261872"/>
+            <a:ext cx="2011680" cy="22860"/>
           </a:xfrm>
           <a:prstGeom prst="rect">
             <a:avLst/>
           </a:prstGeom>
           <a:solidFill>
-            <a:srgbClr val="C29B62"/>
+            <a:srgbClr val="C9A876"/>
           </a:solidFill>
           <a:ln>
             <a:noFill/>
@@ -6584,24 +9630,24 @@
       </p:sp>
       <p:sp>
         <p:nvSpPr>
-          <p:cNvPr id="6" name="Rectangle 5"/>
+          <p:cNvPr id="6" name="Rounded Rectangle 5"/>
           <p:cNvSpPr/>
           <p:nvPr/>
         </p:nvSpPr>
         <p:spPr>
           <a:xfrm>
-            <a:off x="731520" y="1508760"/>
-            <a:ext cx="2057400" cy="2240280"/>
-          </a:xfrm>
-          <a:prstGeom prst="rect">
+            <a:off x="731520" y="1463040"/>
+            <a:ext cx="5120640" cy="4846320"/>
+          </a:xfrm>
+          <a:prstGeom prst="roundRect">
             <a:avLst/>
           </a:prstGeom>
           <a:solidFill>
             <a:srgbClr val="FFFFFF"/>
           </a:solidFill>
-          <a:ln w="12700">
+          <a:ln w="13970">
             <a:solidFill>
-              <a:srgbClr val="C29B62"/>
+              <a:srgbClr val="C9A876"/>
             </a:solidFill>
           </a:ln>
         </p:spPr>
@@ -6635,8 +9681,8 @@
         </p:nvSpPr>
         <p:spPr>
           <a:xfrm>
-            <a:off x="841248" y="1618488"/>
-            <a:ext cx="1828800" cy="2011680"/>
+            <a:off x="1005840" y="1737360"/>
+            <a:ext cx="4572000" cy="4297680"/>
           </a:xfrm>
           <a:prstGeom prst="rect">
             <a:avLst/>
@@ -6651,70 +9697,67 @@
           <a:p>
             <a:pPr>
               <a:spcAft>
-                <a:spcPts val="300"/>
+                <a:spcPts val="1000"/>
               </a:spcAft>
-              <a:defRPr sz="950" b="1">
-                <a:solidFill>
-                  <a:srgbClr val="94723E"/>
-                </a:solidFill>
-              </a:defRPr>
-            </a:pPr>
-            <a:r>
-              <a:t>THERAPIE 01</a:t>
-            </a:r>
-          </a:p>
-          <a:p>
-            <a:pPr>
-              <a:spcAft>
-                <a:spcPts val="500"/>
-              </a:spcAft>
-              <a:defRPr sz="1150" b="1">
-                <a:solidFill>
-                  <a:srgbClr val="26201C"/>
-                </a:solidFill>
-              </a:defRPr>
-            </a:pPr>
-            <a:r>
-              <a:t>웰컴 오리엔테이션</a:t>
+              <a:defRPr sz="1700" b="1">
+                <a:solidFill>
+                  <a:srgbClr val="241E19"/>
+                </a:solidFill>
+              </a:defRPr>
+            </a:pPr>
+            <a:r>
+              <a:t>장부대소(臟腑大小)의 의학적 실체</a:t>
             </a:r>
           </a:p>
           <a:p>
             <a:pPr>
               <a:lnSpc>
-                <a:spcPct val="120000"/>
+                <a:spcPct val="135000"/>
               </a:lnSpc>
-              <a:defRPr sz="950">
-                <a:solidFill>
-                  <a:srgbClr val="5F5750"/>
-                </a:solidFill>
-              </a:defRPr>
-            </a:pPr>
-            <a:r>
-              <a:t>다실 1:1 상담 및 체질별 맞춤 웰컴 티 음용</a:t>
-            </a:r>
-          </a:p>
-        </p:txBody>
-      </p:sp>
-      <p:sp>
-        <p:nvSpPr>
-          <p:cNvPr id="8" name="Rectangle 7"/>
+              <a:defRPr sz="1200">
+                <a:solidFill>
+                  <a:srgbClr val="554B44"/>
+                </a:solidFill>
+              </a:defRPr>
+            </a:pPr>
+            <a:r>
+              <a:t>• 1894년 조선 실학자 이제마 선생 집대성</a:t>
+            </a:r>
+            <a:br/>
+            <a:r>
+              <a:t>• 인간을 획일적이지 않은 4가지 독자적 생명체로 해석</a:t>
+            </a:r>
+            <a:br/>
+            <a:r>
+              <a:t>• 간(肝)·폐(肺)·비(脾)·신(腎) 장기 용량의 생리적 편차 규명</a:t>
+            </a:r>
+            <a:br/>
+            <a:r>
+              <a:t>• 장부 편차에 따라 자율신경계와 영양 대사 경로가 완전히 상이함</a:t>
+            </a:r>
+          </a:p>
+        </p:txBody>
+      </p:sp>
+      <p:sp>
+        <p:nvSpPr>
+          <p:cNvPr id="8" name="Rounded Rectangle 7"/>
           <p:cNvSpPr/>
           <p:nvPr/>
         </p:nvSpPr>
         <p:spPr>
           <a:xfrm>
-            <a:off x="2907791" y="1508760"/>
-            <a:ext cx="2057400" cy="2240280"/>
-          </a:xfrm>
-          <a:prstGeom prst="rect">
+            <a:off x="6217920" y="1463040"/>
+            <a:ext cx="5212080" cy="4846320"/>
+          </a:xfrm>
+          <a:prstGeom prst="roundRect">
             <a:avLst/>
           </a:prstGeom>
           <a:solidFill>
-            <a:srgbClr val="FFFFFF"/>
+            <a:srgbClr val="1C362B"/>
           </a:solidFill>
-          <a:ln w="12700">
+          <a:ln w="13970">
             <a:solidFill>
-              <a:srgbClr val="C29B62"/>
+              <a:srgbClr val="C9A876"/>
             </a:solidFill>
           </a:ln>
         </p:spPr>
@@ -6748,8 +9791,8 @@
         </p:nvSpPr>
         <p:spPr>
           <a:xfrm>
-            <a:off x="3017519" y="1618488"/>
-            <a:ext cx="1828800" cy="2011680"/>
+            <a:off x="6492240" y="1737360"/>
+            <a:ext cx="4663440" cy="4297680"/>
           </a:xfrm>
           <a:prstGeom prst="rect">
             <a:avLst/>
@@ -6764,950 +9807,47 @@
           <a:p>
             <a:pPr>
               <a:spcAft>
-                <a:spcPts val="300"/>
+                <a:spcPts val="1000"/>
               </a:spcAft>
-              <a:defRPr sz="950" b="1">
-                <a:solidFill>
-                  <a:srgbClr val="94723E"/>
-                </a:solidFill>
-              </a:defRPr>
-            </a:pPr>
-            <a:r>
-              <a:t>THERAPIE 02</a:t>
-            </a:r>
-          </a:p>
-          <a:p>
-            <a:pPr>
-              <a:spcAft>
-                <a:spcPts val="500"/>
-              </a:spcAft>
-              <a:defRPr sz="1150" b="1">
-                <a:solidFill>
-                  <a:srgbClr val="26201C"/>
-                </a:solidFill>
-              </a:defRPr>
-            </a:pPr>
-            <a:r>
-              <a:t>20분 맞춤 약재 족욕</a:t>
+              <a:defRPr sz="1700" b="1">
+                <a:solidFill>
+                  <a:srgbClr val="C9A876"/>
+                </a:solidFill>
+              </a:defRPr>
+            </a:pPr>
+            <a:r>
+              <a:t>현대 바이오 사이언스와의 융합</a:t>
             </a:r>
           </a:p>
           <a:p>
             <a:pPr>
               <a:lnSpc>
-                <a:spcPct val="120000"/>
+                <a:spcPct val="135000"/>
               </a:lnSpc>
-              <a:defRPr sz="950">
-                <a:solidFill>
-                  <a:srgbClr val="5F5750"/>
-                </a:solidFill>
-              </a:defRPr>
-            </a:pPr>
-            <a:r>
-              <a:t>두한족열 순환. 41℃ 온열탕 vs 38.5℃ 쿨링탕</a:t>
-            </a:r>
-          </a:p>
-        </p:txBody>
-      </p:sp>
-      <p:sp>
-        <p:nvSpPr>
-          <p:cNvPr id="10" name="Rectangle 9"/>
-          <p:cNvSpPr/>
-          <p:nvPr/>
-        </p:nvSpPr>
-        <p:spPr>
-          <a:xfrm>
-            <a:off x="5084064" y="1508760"/>
-            <a:ext cx="2057400" cy="2240280"/>
-          </a:xfrm>
-          <a:prstGeom prst="rect">
-            <a:avLst/>
-          </a:prstGeom>
-          <a:solidFill>
-            <a:srgbClr val="FFFFFF"/>
-          </a:solidFill>
-          <a:ln w="12700">
-            <a:solidFill>
-              <a:srgbClr val="C29B62"/>
-            </a:solidFill>
-          </a:ln>
-        </p:spPr>
-        <p:style>
-          <a:lnRef idx="1">
-            <a:schemeClr val="accent1"/>
-          </a:lnRef>
-          <a:fillRef idx="3">
-            <a:schemeClr val="accent1"/>
-          </a:fillRef>
-          <a:effectRef idx="2">
-            <a:schemeClr val="accent1"/>
-          </a:effectRef>
-          <a:fontRef idx="minor">
-            <a:schemeClr val="lt1"/>
-          </a:fontRef>
-        </p:style>
-        <p:txBody>
-          <a:bodyPr rtlCol="0" anchor="ctr"/>
-          <a:lstStyle/>
-          <a:p>
-            <a:pPr algn="ctr"/>
-          </a:p>
-        </p:txBody>
-      </p:sp>
-      <p:sp>
-        <p:nvSpPr>
-          <p:cNvPr id="11" name="TextBox 10"/>
-          <p:cNvSpPr txBox="1"/>
-          <p:nvPr/>
-        </p:nvSpPr>
-        <p:spPr>
-          <a:xfrm>
-            <a:off x="5193792" y="1618488"/>
-            <a:ext cx="1828800" cy="2011680"/>
-          </a:xfrm>
-          <a:prstGeom prst="rect">
-            <a:avLst/>
-          </a:prstGeom>
-          <a:noFill/>
-        </p:spPr>
-        <p:txBody>
-          <a:bodyPr wrap="square">
-            <a:spAutoFit/>
-          </a:bodyPr>
-          <a:lstStyle/>
-          <a:p>
-            <a:pPr>
-              <a:spcAft>
-                <a:spcPts val="300"/>
-              </a:spcAft>
-              <a:defRPr sz="950" b="1">
-                <a:solidFill>
-                  <a:srgbClr val="94723E"/>
-                </a:solidFill>
-              </a:defRPr>
-            </a:pPr>
-            <a:r>
-              <a:t>THERAPIE 03</a:t>
-            </a:r>
-          </a:p>
-          <a:p>
-            <a:pPr>
-              <a:spcAft>
-                <a:spcPts val="500"/>
-              </a:spcAft>
-              <a:defRPr sz="1150" b="1">
-                <a:solidFill>
-                  <a:srgbClr val="26201C"/>
-                </a:solidFill>
-              </a:defRPr>
-            </a:pPr>
-            <a:r>
-              <a:t>은반지 비언어 의전</a:t>
-            </a:r>
-          </a:p>
-          <a:p>
-            <a:pPr>
-              <a:lnSpc>
-                <a:spcPct val="120000"/>
-              </a:lnSpc>
-              <a:defRPr sz="950">
-                <a:solidFill>
-                  <a:srgbClr val="5F5750"/>
-                </a:solidFill>
-              </a:defRPr>
-            </a:pPr>
-            <a:r>
-              <a:t>경락별 은반지 착용 및 4대 컬러 가운 비언어 의전</a:t>
-            </a:r>
-          </a:p>
-        </p:txBody>
-      </p:sp>
-      <p:sp>
-        <p:nvSpPr>
-          <p:cNvPr id="12" name="Rectangle 11"/>
-          <p:cNvSpPr/>
-          <p:nvPr/>
-        </p:nvSpPr>
-        <p:spPr>
-          <a:xfrm>
-            <a:off x="7260336" y="1508760"/>
-            <a:ext cx="2057400" cy="2240280"/>
-          </a:xfrm>
-          <a:prstGeom prst="rect">
-            <a:avLst/>
-          </a:prstGeom>
-          <a:solidFill>
-            <a:srgbClr val="FFFFFF"/>
-          </a:solidFill>
-          <a:ln w="12700">
-            <a:solidFill>
-              <a:srgbClr val="C29B62"/>
-            </a:solidFill>
-          </a:ln>
-        </p:spPr>
-        <p:style>
-          <a:lnRef idx="1">
-            <a:schemeClr val="accent1"/>
-          </a:lnRef>
-          <a:fillRef idx="3">
-            <a:schemeClr val="accent1"/>
-          </a:fillRef>
-          <a:effectRef idx="2">
-            <a:schemeClr val="accent1"/>
-          </a:effectRef>
-          <a:fontRef idx="minor">
-            <a:schemeClr val="lt1"/>
-          </a:fontRef>
-        </p:style>
-        <p:txBody>
-          <a:bodyPr rtlCol="0" anchor="ctr"/>
-          <a:lstStyle/>
-          <a:p>
-            <a:pPr algn="ctr"/>
-          </a:p>
-        </p:txBody>
-      </p:sp>
-      <p:sp>
-        <p:nvSpPr>
-          <p:cNvPr id="13" name="TextBox 12"/>
-          <p:cNvSpPr txBox="1"/>
-          <p:nvPr/>
-        </p:nvSpPr>
-        <p:spPr>
-          <a:xfrm>
-            <a:off x="7370064" y="1618488"/>
-            <a:ext cx="1828800" cy="2011680"/>
-          </a:xfrm>
-          <a:prstGeom prst="rect">
-            <a:avLst/>
-          </a:prstGeom>
-          <a:noFill/>
-        </p:spPr>
-        <p:txBody>
-          <a:bodyPr wrap="square">
-            <a:spAutoFit/>
-          </a:bodyPr>
-          <a:lstStyle/>
-          <a:p>
-            <a:pPr>
-              <a:spcAft>
-                <a:spcPts val="300"/>
-              </a:spcAft>
-              <a:defRPr sz="950" b="1">
-                <a:solidFill>
-                  <a:srgbClr val="94723E"/>
-                </a:solidFill>
-              </a:defRPr>
-            </a:pPr>
-            <a:r>
-              <a:t>THERAPIE 04</a:t>
-            </a:r>
-          </a:p>
-          <a:p>
-            <a:pPr>
-              <a:spcAft>
-                <a:spcPts val="500"/>
-              </a:spcAft>
-              <a:defRPr sz="1150" b="1">
-                <a:solidFill>
-                  <a:srgbClr val="26201C"/>
-                </a:solidFill>
-              </a:defRPr>
-            </a:pPr>
-            <a:r>
-              <a:t>12h 단식 &amp; 미역국</a:t>
-            </a:r>
-          </a:p>
-          <a:p>
-            <a:pPr>
-              <a:lnSpc>
-                <a:spcPct val="120000"/>
-              </a:lnSpc>
-              <a:defRPr sz="950">
-                <a:solidFill>
-                  <a:srgbClr val="5F5750"/>
-                </a:solidFill>
-              </a:defRPr>
-            </a:pPr>
-            <a:r>
-              <a:t>18:00~06:00 자가포식 해독 &amp; 4대 맞춤 미역국</a:t>
-            </a:r>
-          </a:p>
-        </p:txBody>
-      </p:sp>
-      <p:sp>
-        <p:nvSpPr>
-          <p:cNvPr id="14" name="Rectangle 13"/>
-          <p:cNvSpPr/>
-          <p:nvPr/>
-        </p:nvSpPr>
-        <p:spPr>
-          <a:xfrm>
-            <a:off x="9436608" y="1508760"/>
-            <a:ext cx="2057400" cy="2240280"/>
-          </a:xfrm>
-          <a:prstGeom prst="rect">
-            <a:avLst/>
-          </a:prstGeom>
-          <a:solidFill>
-            <a:srgbClr val="FFFFFF"/>
-          </a:solidFill>
-          <a:ln w="12700">
-            <a:solidFill>
-              <a:srgbClr val="C29B62"/>
-            </a:solidFill>
-          </a:ln>
-        </p:spPr>
-        <p:style>
-          <a:lnRef idx="1">
-            <a:schemeClr val="accent1"/>
-          </a:lnRef>
-          <a:fillRef idx="3">
-            <a:schemeClr val="accent1"/>
-          </a:fillRef>
-          <a:effectRef idx="2">
-            <a:schemeClr val="accent1"/>
-          </a:effectRef>
-          <a:fontRef idx="minor">
-            <a:schemeClr val="lt1"/>
-          </a:fontRef>
-        </p:style>
-        <p:txBody>
-          <a:bodyPr rtlCol="0" anchor="ctr"/>
-          <a:lstStyle/>
-          <a:p>
-            <a:pPr algn="ctr"/>
-          </a:p>
-        </p:txBody>
-      </p:sp>
-      <p:sp>
-        <p:nvSpPr>
-          <p:cNvPr id="15" name="TextBox 14"/>
-          <p:cNvSpPr txBox="1"/>
-          <p:nvPr/>
-        </p:nvSpPr>
-        <p:spPr>
-          <a:xfrm>
-            <a:off x="9546336" y="1618488"/>
-            <a:ext cx="1828800" cy="2011680"/>
-          </a:xfrm>
-          <a:prstGeom prst="rect">
-            <a:avLst/>
-          </a:prstGeom>
-          <a:noFill/>
-        </p:spPr>
-        <p:txBody>
-          <a:bodyPr wrap="square">
-            <a:spAutoFit/>
-          </a:bodyPr>
-          <a:lstStyle/>
-          <a:p>
-            <a:pPr>
-              <a:spcAft>
-                <a:spcPts val="300"/>
-              </a:spcAft>
-              <a:defRPr sz="950" b="1">
-                <a:solidFill>
-                  <a:srgbClr val="94723E"/>
-                </a:solidFill>
-              </a:defRPr>
-            </a:pPr>
-            <a:r>
-              <a:t>THERAPIE 05</a:t>
-            </a:r>
-          </a:p>
-          <a:p>
-            <a:pPr>
-              <a:spcAft>
-                <a:spcPts val="500"/>
-              </a:spcAft>
-              <a:defRPr sz="1150" b="1">
-                <a:solidFill>
-                  <a:srgbClr val="26201C"/>
-                </a:solidFill>
-              </a:defRPr>
-            </a:pPr>
-            <a:r>
-              <a:t>80분 이원화 바디</a:t>
-            </a:r>
-          </a:p>
-          <a:p>
-            <a:pPr>
-              <a:lnSpc>
-                <a:spcPct val="120000"/>
-              </a:lnSpc>
-              <a:defRPr sz="950">
-                <a:solidFill>
-                  <a:srgbClr val="5F5750"/>
-                </a:solidFill>
-              </a:defRPr>
-            </a:pPr>
-            <a:r>
-              <a:t>한의 수기 지압(30분) + 순수 에센셜 오일(50분)</a:t>
-            </a:r>
-          </a:p>
-        </p:txBody>
-      </p:sp>
-      <p:sp>
-        <p:nvSpPr>
-          <p:cNvPr id="16" name="Rectangle 15"/>
-          <p:cNvSpPr/>
-          <p:nvPr/>
-        </p:nvSpPr>
-        <p:spPr>
-          <a:xfrm>
-            <a:off x="731520" y="3931920"/>
-            <a:ext cx="2057400" cy="2240280"/>
-          </a:xfrm>
-          <a:prstGeom prst="rect">
-            <a:avLst/>
-          </a:prstGeom>
-          <a:solidFill>
-            <a:srgbClr val="FFFFFF"/>
-          </a:solidFill>
-          <a:ln w="12700">
-            <a:solidFill>
-              <a:srgbClr val="C29B62"/>
-            </a:solidFill>
-          </a:ln>
-        </p:spPr>
-        <p:style>
-          <a:lnRef idx="1">
-            <a:schemeClr val="accent1"/>
-          </a:lnRef>
-          <a:fillRef idx="3">
-            <a:schemeClr val="accent1"/>
-          </a:fillRef>
-          <a:effectRef idx="2">
-            <a:schemeClr val="accent1"/>
-          </a:effectRef>
-          <a:fontRef idx="minor">
-            <a:schemeClr val="lt1"/>
-          </a:fontRef>
-        </p:style>
-        <p:txBody>
-          <a:bodyPr rtlCol="0" anchor="ctr"/>
-          <a:lstStyle/>
-          <a:p>
-            <a:pPr algn="ctr"/>
-          </a:p>
-        </p:txBody>
-      </p:sp>
-      <p:sp>
-        <p:nvSpPr>
-          <p:cNvPr id="17" name="TextBox 16"/>
-          <p:cNvSpPr txBox="1"/>
-          <p:nvPr/>
-        </p:nvSpPr>
-        <p:spPr>
-          <a:xfrm>
-            <a:off x="841248" y="4041648"/>
-            <a:ext cx="1828800" cy="2011680"/>
-          </a:xfrm>
-          <a:prstGeom prst="rect">
-            <a:avLst/>
-          </a:prstGeom>
-          <a:noFill/>
-        </p:spPr>
-        <p:txBody>
-          <a:bodyPr wrap="square">
-            <a:spAutoFit/>
-          </a:bodyPr>
-          <a:lstStyle/>
-          <a:p>
-            <a:pPr>
-              <a:spcAft>
-                <a:spcPts val="300"/>
-              </a:spcAft>
-              <a:defRPr sz="950" b="1">
-                <a:solidFill>
-                  <a:srgbClr val="94723E"/>
-                </a:solidFill>
-              </a:defRPr>
-            </a:pPr>
-            <a:r>
-              <a:t>THERAPIE 06</a:t>
-            </a:r>
-          </a:p>
-          <a:p>
-            <a:pPr>
-              <a:spcAft>
-                <a:spcPts val="500"/>
-              </a:spcAft>
-              <a:defRPr sz="1150" b="1">
-                <a:solidFill>
-                  <a:srgbClr val="26201C"/>
-                </a:solidFill>
-              </a:defRPr>
-            </a:pPr>
-            <a:r>
-              <a:t>티 &amp; 30분 침묵 명상</a:t>
-            </a:r>
-          </a:p>
-          <a:p>
-            <a:pPr>
-              <a:lnSpc>
-                <a:spcPct val="120000"/>
-              </a:lnSpc>
-              <a:defRPr sz="950">
-                <a:solidFill>
-                  <a:srgbClr val="5F5750"/>
-                </a:solidFill>
-              </a:defRPr>
-            </a:pPr>
-            <a:r>
-              <a:t>장인 도자기 다기 시연 &amp; 무언 침묵 명상(부교감 40%)</a:t>
-            </a:r>
-          </a:p>
-        </p:txBody>
-      </p:sp>
-      <p:sp>
-        <p:nvSpPr>
-          <p:cNvPr id="18" name="Rectangle 17"/>
-          <p:cNvSpPr/>
-          <p:nvPr/>
-        </p:nvSpPr>
-        <p:spPr>
-          <a:xfrm>
-            <a:off x="2907791" y="3931920"/>
-            <a:ext cx="2057400" cy="2240280"/>
-          </a:xfrm>
-          <a:prstGeom prst="rect">
-            <a:avLst/>
-          </a:prstGeom>
-          <a:solidFill>
-            <a:srgbClr val="FFFFFF"/>
-          </a:solidFill>
-          <a:ln w="12700">
-            <a:solidFill>
-              <a:srgbClr val="C29B62"/>
-            </a:solidFill>
-          </a:ln>
-        </p:spPr>
-        <p:style>
-          <a:lnRef idx="1">
-            <a:schemeClr val="accent1"/>
-          </a:lnRef>
-          <a:fillRef idx="3">
-            <a:schemeClr val="accent1"/>
-          </a:fillRef>
-          <a:effectRef idx="2">
-            <a:schemeClr val="accent1"/>
-          </a:effectRef>
-          <a:fontRef idx="minor">
-            <a:schemeClr val="lt1"/>
-          </a:fontRef>
-        </p:style>
-        <p:txBody>
-          <a:bodyPr rtlCol="0" anchor="ctr"/>
-          <a:lstStyle/>
-          <a:p>
-            <a:pPr algn="ctr"/>
-          </a:p>
-        </p:txBody>
-      </p:sp>
-      <p:sp>
-        <p:nvSpPr>
-          <p:cNvPr id="19" name="TextBox 18"/>
-          <p:cNvSpPr txBox="1"/>
-          <p:nvPr/>
-        </p:nvSpPr>
-        <p:spPr>
-          <a:xfrm>
-            <a:off x="3017519" y="4041648"/>
-            <a:ext cx="1828800" cy="2011680"/>
-          </a:xfrm>
-          <a:prstGeom prst="rect">
-            <a:avLst/>
-          </a:prstGeom>
-          <a:noFill/>
-        </p:spPr>
-        <p:txBody>
-          <a:bodyPr wrap="square">
-            <a:spAutoFit/>
-          </a:bodyPr>
-          <a:lstStyle/>
-          <a:p>
-            <a:pPr>
-              <a:spcAft>
-                <a:spcPts val="300"/>
-              </a:spcAft>
-              <a:defRPr sz="950" b="1">
-                <a:solidFill>
-                  <a:srgbClr val="94723E"/>
-                </a:solidFill>
-              </a:defRPr>
-            </a:pPr>
-            <a:r>
-              <a:t>THERAPIE 07</a:t>
-            </a:r>
-          </a:p>
-          <a:p>
-            <a:pPr>
-              <a:spcAft>
-                <a:spcPts val="500"/>
-              </a:spcAft>
-              <a:defRPr sz="1150" b="1">
-                <a:solidFill>
-                  <a:srgbClr val="26201C"/>
-                </a:solidFill>
-              </a:defRPr>
-            </a:pPr>
-            <a:r>
-              <a:t>수(水) 산화질소 테라피</a:t>
-            </a:r>
-          </a:p>
-          <a:p>
-            <a:pPr>
-              <a:lnSpc>
-                <a:spcPct val="120000"/>
-              </a:lnSpc>
-              <a:defRPr sz="950">
-                <a:solidFill>
-                  <a:srgbClr val="5F5750"/>
-                </a:solidFill>
-              </a:defRPr>
-            </a:pPr>
-            <a:r>
-              <a:t>NO 수 1.5L 음용 및 15분 전신 나노 미스트 챔버</a:t>
-            </a:r>
-          </a:p>
-        </p:txBody>
-      </p:sp>
-      <p:sp>
-        <p:nvSpPr>
-          <p:cNvPr id="20" name="Rectangle 19"/>
-          <p:cNvSpPr/>
-          <p:nvPr/>
-        </p:nvSpPr>
-        <p:spPr>
-          <a:xfrm>
-            <a:off x="5084064" y="3931920"/>
-            <a:ext cx="2057400" cy="2240280"/>
-          </a:xfrm>
-          <a:prstGeom prst="rect">
-            <a:avLst/>
-          </a:prstGeom>
-          <a:solidFill>
-            <a:srgbClr val="FFFFFF"/>
-          </a:solidFill>
-          <a:ln w="12700">
-            <a:solidFill>
-              <a:srgbClr val="C29B62"/>
-            </a:solidFill>
-          </a:ln>
-        </p:spPr>
-        <p:style>
-          <a:lnRef idx="1">
-            <a:schemeClr val="accent1"/>
-          </a:lnRef>
-          <a:fillRef idx="3">
-            <a:schemeClr val="accent1"/>
-          </a:fillRef>
-          <a:effectRef idx="2">
-            <a:schemeClr val="accent1"/>
-          </a:effectRef>
-          <a:fontRef idx="minor">
-            <a:schemeClr val="lt1"/>
-          </a:fontRef>
-        </p:style>
-        <p:txBody>
-          <a:bodyPr rtlCol="0" anchor="ctr"/>
-          <a:lstStyle/>
-          <a:p>
-            <a:pPr algn="ctr"/>
-          </a:p>
-        </p:txBody>
-      </p:sp>
-      <p:sp>
-        <p:nvSpPr>
-          <p:cNvPr id="21" name="TextBox 20"/>
-          <p:cNvSpPr txBox="1"/>
-          <p:nvPr/>
-        </p:nvSpPr>
-        <p:spPr>
-          <a:xfrm>
-            <a:off x="5193792" y="4041648"/>
-            <a:ext cx="1828800" cy="2011680"/>
-          </a:xfrm>
-          <a:prstGeom prst="rect">
-            <a:avLst/>
-          </a:prstGeom>
-          <a:noFill/>
-        </p:spPr>
-        <p:txBody>
-          <a:bodyPr wrap="square">
-            <a:spAutoFit/>
-          </a:bodyPr>
-          <a:lstStyle/>
-          <a:p>
-            <a:pPr>
-              <a:spcAft>
-                <a:spcPts val="300"/>
-              </a:spcAft>
-              <a:defRPr sz="950" b="1">
-                <a:solidFill>
-                  <a:srgbClr val="94723E"/>
-                </a:solidFill>
-              </a:defRPr>
-            </a:pPr>
-            <a:r>
-              <a:t>THERAPIE 08</a:t>
-            </a:r>
-          </a:p>
-          <a:p>
-            <a:pPr>
-              <a:spcAft>
-                <a:spcPts val="500"/>
-              </a:spcAft>
-              <a:defRPr sz="1150" b="1">
-                <a:solidFill>
-                  <a:srgbClr val="26201C"/>
-                </a:solidFill>
-              </a:defRPr>
-            </a:pPr>
-            <a:r>
-              <a:t>온열 테라피 (체온 1℃↑)</a:t>
-            </a:r>
-          </a:p>
-          <a:p>
-            <a:pPr>
-              <a:lnSpc>
-                <a:spcPct val="120000"/>
-              </a:lnSpc>
-              <a:defRPr sz="950">
-                <a:solidFill>
-                  <a:srgbClr val="5F5750"/>
-                </a:solidFill>
-              </a:defRPr>
-            </a:pPr>
-            <a:r>
-              <a:t>42~45℃ 1시간 원적외선 챔버 (면역 NK세포 5배)</a:t>
-            </a:r>
-          </a:p>
-        </p:txBody>
-      </p:sp>
-      <p:sp>
-        <p:nvSpPr>
-          <p:cNvPr id="22" name="Rectangle 21"/>
-          <p:cNvSpPr/>
-          <p:nvPr/>
-        </p:nvSpPr>
-        <p:spPr>
-          <a:xfrm>
-            <a:off x="7260336" y="3931920"/>
-            <a:ext cx="2057400" cy="2240280"/>
-          </a:xfrm>
-          <a:prstGeom prst="rect">
-            <a:avLst/>
-          </a:prstGeom>
-          <a:solidFill>
-            <a:srgbClr val="FFFFFF"/>
-          </a:solidFill>
-          <a:ln w="12700">
-            <a:solidFill>
-              <a:srgbClr val="C29B62"/>
-            </a:solidFill>
-          </a:ln>
-        </p:spPr>
-        <p:style>
-          <a:lnRef idx="1">
-            <a:schemeClr val="accent1"/>
-          </a:lnRef>
-          <a:fillRef idx="3">
-            <a:schemeClr val="accent1"/>
-          </a:fillRef>
-          <a:effectRef idx="2">
-            <a:schemeClr val="accent1"/>
-          </a:effectRef>
-          <a:fontRef idx="minor">
-            <a:schemeClr val="lt1"/>
-          </a:fontRef>
-        </p:style>
-        <p:txBody>
-          <a:bodyPr rtlCol="0" anchor="ctr"/>
-          <a:lstStyle/>
-          <a:p>
-            <a:pPr algn="ctr"/>
-          </a:p>
-        </p:txBody>
-      </p:sp>
-      <p:sp>
-        <p:nvSpPr>
-          <p:cNvPr id="23" name="TextBox 22"/>
-          <p:cNvSpPr txBox="1"/>
-          <p:nvPr/>
-        </p:nvSpPr>
-        <p:spPr>
-          <a:xfrm>
-            <a:off x="7370064" y="4041648"/>
-            <a:ext cx="1828800" cy="2011680"/>
-          </a:xfrm>
-          <a:prstGeom prst="rect">
-            <a:avLst/>
-          </a:prstGeom>
-          <a:noFill/>
-        </p:spPr>
-        <p:txBody>
-          <a:bodyPr wrap="square">
-            <a:spAutoFit/>
-          </a:bodyPr>
-          <a:lstStyle/>
-          <a:p>
-            <a:pPr>
-              <a:spcAft>
-                <a:spcPts val="300"/>
-              </a:spcAft>
-              <a:defRPr sz="950" b="1">
-                <a:solidFill>
-                  <a:srgbClr val="94723E"/>
-                </a:solidFill>
-              </a:defRPr>
-            </a:pPr>
-            <a:r>
-              <a:t>THERAPIE 09</a:t>
-            </a:r>
-          </a:p>
-          <a:p>
-            <a:pPr>
-              <a:spcAft>
-                <a:spcPts val="500"/>
-              </a:spcAft>
-              <a:defRPr sz="1150" b="1">
-                <a:solidFill>
-                  <a:srgbClr val="26201C"/>
-                </a:solidFill>
-              </a:defRPr>
-            </a:pPr>
-            <a:r>
-              <a:t>전통 기체조: 태극선법</a:t>
-            </a:r>
-          </a:p>
-          <a:p>
-            <a:pPr>
-              <a:lnSpc>
-                <a:spcPct val="120000"/>
-              </a:lnSpc>
-              <a:defRPr sz="950">
-                <a:solidFill>
-                  <a:srgbClr val="5F5750"/>
-                </a:solidFill>
-              </a:defRPr>
-            </a:pPr>
-            <a:r>
-              <a:t>단전 호흡 탁기 배출 &amp; 태극선법 8초식 동적 기혈 순환</a:t>
-            </a:r>
-          </a:p>
-        </p:txBody>
-      </p:sp>
-      <p:sp>
-        <p:nvSpPr>
-          <p:cNvPr id="24" name="Rectangle 23"/>
-          <p:cNvSpPr/>
-          <p:nvPr/>
-        </p:nvSpPr>
-        <p:spPr>
-          <a:xfrm>
-            <a:off x="9436608" y="3931920"/>
-            <a:ext cx="2057400" cy="2240280"/>
-          </a:xfrm>
-          <a:prstGeom prst="rect">
-            <a:avLst/>
-          </a:prstGeom>
-          <a:solidFill>
-            <a:srgbClr val="FFFFFF"/>
-          </a:solidFill>
-          <a:ln w="12700">
-            <a:solidFill>
-              <a:srgbClr val="C29B62"/>
-            </a:solidFill>
-          </a:ln>
-        </p:spPr>
-        <p:style>
-          <a:lnRef idx="1">
-            <a:schemeClr val="accent1"/>
-          </a:lnRef>
-          <a:fillRef idx="3">
-            <a:schemeClr val="accent1"/>
-          </a:fillRef>
-          <a:effectRef idx="2">
-            <a:schemeClr val="accent1"/>
-          </a:effectRef>
-          <a:fontRef idx="minor">
-            <a:schemeClr val="lt1"/>
-          </a:fontRef>
-        </p:style>
-        <p:txBody>
-          <a:bodyPr rtlCol="0" anchor="ctr"/>
-          <a:lstStyle/>
-          <a:p>
-            <a:pPr algn="ctr"/>
-          </a:p>
-        </p:txBody>
-      </p:sp>
-      <p:sp>
-        <p:nvSpPr>
-          <p:cNvPr id="25" name="TextBox 24"/>
-          <p:cNvSpPr txBox="1"/>
-          <p:nvPr/>
-        </p:nvSpPr>
-        <p:spPr>
-          <a:xfrm>
-            <a:off x="9546336" y="4041648"/>
-            <a:ext cx="1828800" cy="2011680"/>
-          </a:xfrm>
-          <a:prstGeom prst="rect">
-            <a:avLst/>
-          </a:prstGeom>
-          <a:noFill/>
-        </p:spPr>
-        <p:txBody>
-          <a:bodyPr wrap="square">
-            <a:spAutoFit/>
-          </a:bodyPr>
-          <a:lstStyle/>
-          <a:p>
-            <a:pPr>
-              <a:spcAft>
-                <a:spcPts val="300"/>
-              </a:spcAft>
-              <a:defRPr sz="950" b="1">
-                <a:solidFill>
-                  <a:srgbClr val="94723E"/>
-                </a:solidFill>
-              </a:defRPr>
-            </a:pPr>
-            <a:r>
-              <a:t>THERAPIE 10</a:t>
-            </a:r>
-          </a:p>
-          <a:p>
-            <a:pPr>
-              <a:spcAft>
-                <a:spcPts val="500"/>
-              </a:spcAft>
-              <a:defRPr sz="1150" b="1">
-                <a:solidFill>
-                  <a:srgbClr val="26201C"/>
-                </a:solidFill>
-              </a:defRPr>
-            </a:pPr>
-            <a:r>
-              <a:t>멘탈: 정통 고요 명상</a:t>
-            </a:r>
-          </a:p>
-          <a:p>
-            <a:pPr>
-              <a:lnSpc>
-                <a:spcPct val="120000"/>
-              </a:lnSpc>
-              <a:defRPr sz="950">
-                <a:solidFill>
-                  <a:srgbClr val="5F5750"/>
-                </a:solidFill>
-              </a:defRPr>
-            </a:pPr>
-            <a:r>
-              <a:t>사찰/선도 침묵 명상으로 뇌 피로도 70% 감소</a:t>
+              <a:defRPr sz="1200">
+                <a:solidFill>
+                  <a:srgbClr val="DCD7C8"/>
+                </a:solidFill>
+              </a:defRPr>
+            </a:pPr>
+            <a:r>
+              <a:t>• 전통 한의학의 경험론을 넘어 현대 생체 데이터와 융합</a:t>
+            </a:r>
+            <a:br/>
+            <a:r>
+              <a:t>• InBody 770 세포외수분비율 및 림프 부종 정밀 측정</a:t>
+            </a:r>
+            <a:br/>
+            <a:r>
+              <a:t>• EEG 뇌파 분석을 통한 High-Beta파 교감신경 긴장도 평가</a:t>
+            </a:r>
+            <a:br/>
+            <a:r>
+              <a:t>• 타액 산화질소(NO) 스트립을 통한 혈관 탄력도 진단</a:t>
+            </a:r>
+            <a:br/>
+            <a:r>
+              <a:t>• 최고급 100% 순수 에센셜 오일과 12시간 단식 섭생 처방</a:t>
             </a:r>
           </a:p>
         </p:txBody>
@@ -7745,7 +9885,7 @@
             <a:avLst/>
           </a:prstGeom>
           <a:solidFill>
-            <a:srgbClr val="FAF8F3"/>
+            <a:srgbClr val="FDFBF7"/>
           </a:solidFill>
           <a:ln>
             <a:noFill/>
@@ -7796,14 +9936,14 @@
           <a:lstStyle/>
           <a:p>
             <a:pPr>
-              <a:defRPr sz="950" b="1">
-                <a:solidFill>
-                  <a:srgbClr val="94723E"/>
-                </a:solidFill>
-              </a:defRPr>
-            </a:pPr>
-            <a:r>
-              <a:t>EXPERTS &amp; TEAM</a:t>
+              <a:defRPr sz="1000" b="1">
+                <a:solidFill>
+                  <a:srgbClr val="A37F48"/>
+                </a:solidFill>
+              </a:defRPr>
+            </a:pPr>
+            <a:r>
+              <a:t>FOUR CONSTITUTIONS</a:t>
             </a:r>
           </a:p>
         </p:txBody>
@@ -7833,12 +9973,12 @@
             <a:pPr>
               <a:defRPr sz="2100" b="1">
                 <a:solidFill>
-                  <a:srgbClr val="26201C"/>
-                </a:solidFill>
-              </a:defRPr>
-            </a:pPr>
-            <a:r>
-              <a:t>Experten &amp; Leitung : 총괄 연구진 및 디렉터 프로필</a:t>
+                  <a:srgbClr val="241E19"/>
+                </a:solidFill>
+              </a:defRPr>
+            </a:pPr>
+            <a:r>
+              <a:t>4대 사상체질 심층 처방 매트릭스</a:t>
             </a:r>
           </a:p>
         </p:txBody>
@@ -7851,14 +9991,14 @@
         </p:nvSpPr>
         <p:spPr>
           <a:xfrm>
-            <a:off x="731520" y="1280160"/>
-            <a:ext cx="2286000" cy="22860"/>
+            <a:off x="731520" y="1261872"/>
+            <a:ext cx="2011680" cy="22860"/>
           </a:xfrm>
           <a:prstGeom prst="rect">
             <a:avLst/>
           </a:prstGeom>
           <a:solidFill>
-            <a:srgbClr val="C29B62"/>
+            <a:srgbClr val="C9A876"/>
           </a:solidFill>
           <a:ln>
             <a:noFill/>
@@ -7888,24 +10028,24 @@
       </p:sp>
       <p:sp>
         <p:nvSpPr>
-          <p:cNvPr id="6" name="Rectangle 5"/>
+          <p:cNvPr id="6" name="Rounded Rectangle 5"/>
           <p:cNvSpPr/>
           <p:nvPr/>
         </p:nvSpPr>
         <p:spPr>
           <a:xfrm>
-            <a:off x="731520" y="1508760"/>
-            <a:ext cx="5120640" cy="4846320"/>
-          </a:xfrm>
-          <a:prstGeom prst="rect">
+            <a:off x="731520" y="1463040"/>
+            <a:ext cx="2560320" cy="4846320"/>
+          </a:xfrm>
+          <a:prstGeom prst="roundRect">
             <a:avLst/>
           </a:prstGeom>
           <a:solidFill>
             <a:srgbClr val="FFFFFF"/>
           </a:solidFill>
-          <a:ln w="12700">
+          <a:ln w="13970">
             <a:solidFill>
-              <a:srgbClr val="C29B62"/>
+              <a:srgbClr val="A37F48"/>
             </a:solidFill>
           </a:ln>
         </p:spPr>
@@ -7939,8 +10079,8 @@
         </p:nvSpPr>
         <p:spPr>
           <a:xfrm>
-            <a:off x="1005840" y="1737360"/>
-            <a:ext cx="4572000" cy="4389120"/>
+            <a:off x="868680" y="1645920"/>
+            <a:ext cx="2286000" cy="4480560"/>
           </a:xfrm>
           <a:prstGeom prst="rect">
             <a:avLst/>
@@ -7954,89 +10094,72 @@
           <a:lstStyle/>
           <a:p>
             <a:pPr>
-              <a:defRPr sz="1100" b="1">
-                <a:solidFill>
-                  <a:srgbClr val="94723E"/>
-                </a:solidFill>
-              </a:defRPr>
-            </a:pPr>
-            <a:r>
-              <a:t>WELLNESS MASTER DIRECTOR</a:t>
-            </a:r>
-          </a:p>
-          <a:p>
-            <a:pPr>
               <a:spcAft>
                 <a:spcPts val="1000"/>
               </a:spcAft>
-              <a:defRPr sz="2400" b="1">
-                <a:solidFill>
-                  <a:srgbClr val="26201C"/>
-                </a:solidFill>
-              </a:defRPr>
-            </a:pPr>
-            <a:r>
-              <a:t>유정근 (Ryu Jean)</a:t>
+              <a:defRPr sz="1450" b="1">
+                <a:solidFill>
+                  <a:srgbClr val="A37F48"/>
+                </a:solidFill>
+              </a:defRPr>
+            </a:pPr>
+            <a:r>
+              <a:t>태음인 (肝大肺小)</a:t>
             </a:r>
           </a:p>
           <a:p>
             <a:pPr>
               <a:lnSpc>
-                <a:spcPct val="130000"/>
+                <a:spcPct val="125000"/>
               </a:lnSpc>
-              <a:defRPr sz="1200">
-                <a:solidFill>
-                  <a:srgbClr val="5F5750"/>
-                </a:solidFill>
-              </a:defRPr>
-            </a:pPr>
-            <a:r>
-              <a:t>• 웰니스 총괄 디렉터 / 전담 테라피스트</a:t>
+              <a:defRPr sz="1050">
+                <a:solidFill>
+                  <a:srgbClr val="241E19"/>
+                </a:solidFill>
+              </a:defRPr>
+            </a:pPr>
+            <a:r>
+              <a:t>• 장부 특성: 간 기능 왕성, 폐/기관지 허약</a:t>
             </a:r>
             <a:br/>
             <a:r>
-              <a:t>• 사상체질 10대 시그니처 테라피 의전 설계</a:t>
+              <a:t>• 취약 증상: 목 답답함, 피부 건조, 림프 정체</a:t>
             </a:r>
             <a:br/>
             <a:r>
-              <a:t>• 글로벌 호텔/리조트 파트너십 및 브랜드 총괄</a:t>
+              <a:t>• 오일 처방: 유칼립투스, 이지에어, 샌달우드</a:t>
             </a:r>
             <a:br/>
             <a:r>
-              <a:t>• 1:1 VIP 프라이빗 컨설팅 및 트리트먼트 마스터</a:t>
+              <a:t>• 맞춤 식단: 소고기 양지 들깨 미역국 + 율무밥</a:t>
             </a:r>
             <a:br/>
-            <a:br/>
-            <a:r>
-              <a:t>📞 연락처: 010-4728-9917</a:t>
-            </a:r>
-            <a:br/>
-            <a:r>
-              <a:t>✉️ 이메일: ryujean77@gmail.com</a:t>
-            </a:r>
-          </a:p>
-        </p:txBody>
-      </p:sp>
-      <p:sp>
-        <p:nvSpPr>
-          <p:cNvPr id="8" name="Rectangle 7"/>
+            <a:r>
+              <a:t>• 의전 세팅: 황색 가운 + 우측 4지 은반지</a:t>
+            </a:r>
+          </a:p>
+        </p:txBody>
+      </p:sp>
+      <p:sp>
+        <p:nvSpPr>
+          <p:cNvPr id="8" name="Rounded Rectangle 7"/>
           <p:cNvSpPr/>
           <p:nvPr/>
         </p:nvSpPr>
         <p:spPr>
           <a:xfrm>
-            <a:off x="6217920" y="1508760"/>
-            <a:ext cx="5212080" cy="4846320"/>
-          </a:xfrm>
-          <a:prstGeom prst="rect">
+            <a:off x="3429000" y="1463040"/>
+            <a:ext cx="2560320" cy="4846320"/>
+          </a:xfrm>
+          <a:prstGeom prst="roundRect">
             <a:avLst/>
           </a:prstGeom>
           <a:solidFill>
             <a:srgbClr val="FFFFFF"/>
           </a:solidFill>
-          <a:ln w="12700">
+          <a:ln w="13970">
             <a:solidFill>
-              <a:srgbClr val="C29B62"/>
+              <a:srgbClr val="1C362B"/>
             </a:solidFill>
           </a:ln>
         </p:spPr>
@@ -8070,8 +10193,8 @@
         </p:nvSpPr>
         <p:spPr>
           <a:xfrm>
-            <a:off x="6492240" y="1737360"/>
-            <a:ext cx="4663440" cy="4389120"/>
+            <a:off x="3566160" y="1645920"/>
+            <a:ext cx="2286000" cy="4480560"/>
           </a:xfrm>
           <a:prstGeom prst="rect">
             <a:avLst/>
@@ -8085,65 +10208,276 @@
           <a:lstStyle/>
           <a:p>
             <a:pPr>
-              <a:defRPr sz="1100" b="1">
-                <a:solidFill>
-                  <a:srgbClr val="94723E"/>
-                </a:solidFill>
-              </a:defRPr>
-            </a:pPr>
-            <a:r>
-              <a:t>ACADEMIC &amp; MEDICAL DIRECTOR</a:t>
-            </a:r>
-          </a:p>
-          <a:p>
-            <a:pPr>
               <a:spcAft>
                 <a:spcPts val="1000"/>
               </a:spcAft>
-              <a:defRPr sz="2400" b="1">
-                <a:solidFill>
-                  <a:srgbClr val="26201C"/>
-                </a:solidFill>
-              </a:defRPr>
-            </a:pPr>
-            <a:r>
-              <a:t>임동구 박사 (Dr. Dong-Ku Yim)</a:t>
+              <a:defRPr sz="1450" b="1">
+                <a:solidFill>
+                  <a:srgbClr val="1C362B"/>
+                </a:solidFill>
+              </a:defRPr>
+            </a:pPr>
+            <a:r>
+              <a:t>소양인 (脾大腎小)</a:t>
             </a:r>
           </a:p>
           <a:p>
             <a:pPr>
               <a:lnSpc>
-                <a:spcPct val="130000"/>
+                <a:spcPct val="125000"/>
               </a:lnSpc>
-              <a:defRPr sz="1200">
-                <a:solidFill>
-                  <a:srgbClr val="5F5750"/>
-                </a:solidFill>
-              </a:defRPr>
-            </a:pPr>
-            <a:r>
-              <a:t>• 식품공학박사 / Dr.Yim's 체질라이프스타일 연구소장</a:t>
+              <a:defRPr sz="1050">
+                <a:solidFill>
+                  <a:srgbClr val="241E19"/>
+                </a:solidFill>
+              </a:defRPr>
+            </a:pPr>
+            <a:r>
+              <a:t>• 장부 특성: 소화기 열 많음, 신장 음기 허약</a:t>
             </a:r>
             <a:br/>
             <a:r>
-              <a:t>• 사상체질 의학의 식품공학적 섭생 연구 권위자</a:t>
+              <a:t>• 취약 증상: 상체 열감, 두통, 가슴 답답, 불면</a:t>
             </a:r>
             <a:br/>
             <a:r>
-              <a:t>• 4대 체질 맞춤 미역국 &amp; 아로마 배합비 감수</a:t>
+              <a:t>• 오일 처방: 페퍼민트, 라벤더, 세레니티</a:t>
             </a:r>
             <a:br/>
             <a:r>
-              <a:t>• 현대 생체 데이터 분석 및 체질 확정 알고리즘 구축</a:t>
+              <a:t>• 맞춤 식단: 돼지고기 수육 / 조개 미역국</a:t>
             </a:r>
             <a:br/>
+            <a:r>
+              <a:t>• 의전 세팅: 청색 가운 + 좌측 2지 은반지</a:t>
+            </a:r>
+          </a:p>
+        </p:txBody>
+      </p:sp>
+      <p:sp>
+        <p:nvSpPr>
+          <p:cNvPr id="10" name="Rounded Rectangle 9"/>
+          <p:cNvSpPr/>
+          <p:nvPr/>
+        </p:nvSpPr>
+        <p:spPr>
+          <a:xfrm>
+            <a:off x="6126480" y="1463040"/>
+            <a:ext cx="2560320" cy="4846320"/>
+          </a:xfrm>
+          <a:prstGeom prst="roundRect">
+            <a:avLst/>
+          </a:prstGeom>
+          <a:solidFill>
+            <a:srgbClr val="FFFFFF"/>
+          </a:solidFill>
+          <a:ln w="13970">
+            <a:solidFill>
+              <a:srgbClr val="A37F48"/>
+            </a:solidFill>
+          </a:ln>
+        </p:spPr>
+        <p:style>
+          <a:lnRef idx="1">
+            <a:schemeClr val="accent1"/>
+          </a:lnRef>
+          <a:fillRef idx="3">
+            <a:schemeClr val="accent1"/>
+          </a:fillRef>
+          <a:effectRef idx="2">
+            <a:schemeClr val="accent1"/>
+          </a:effectRef>
+          <a:fontRef idx="minor">
+            <a:schemeClr val="lt1"/>
+          </a:fontRef>
+        </p:style>
+        <p:txBody>
+          <a:bodyPr rtlCol="0" anchor="ctr"/>
+          <a:lstStyle/>
+          <a:p>
+            <a:pPr algn="ctr"/>
+          </a:p>
+        </p:txBody>
+      </p:sp>
+      <p:sp>
+        <p:nvSpPr>
+          <p:cNvPr id="11" name="TextBox 10"/>
+          <p:cNvSpPr txBox="1"/>
+          <p:nvPr/>
+        </p:nvSpPr>
+        <p:spPr>
+          <a:xfrm>
+            <a:off x="6263640" y="1645920"/>
+            <a:ext cx="2286000" cy="4480560"/>
+          </a:xfrm>
+          <a:prstGeom prst="rect">
+            <a:avLst/>
+          </a:prstGeom>
+          <a:noFill/>
+        </p:spPr>
+        <p:txBody>
+          <a:bodyPr wrap="square">
+            <a:spAutoFit/>
+          </a:bodyPr>
+          <a:lstStyle/>
+          <a:p>
+            <a:pPr>
+              <a:spcAft>
+                <a:spcPts val="1000"/>
+              </a:spcAft>
+              <a:defRPr sz="1450" b="1">
+                <a:solidFill>
+                  <a:srgbClr val="A37F48"/>
+                </a:solidFill>
+              </a:defRPr>
+            </a:pPr>
+            <a:r>
+              <a:t>소음인 (腎大脾小)</a:t>
+            </a:r>
+          </a:p>
+          <a:p>
+            <a:pPr>
+              <a:lnSpc>
+                <a:spcPct val="125000"/>
+              </a:lnSpc>
+              <a:defRPr sz="1050">
+                <a:solidFill>
+                  <a:srgbClr val="241E19"/>
+                </a:solidFill>
+              </a:defRPr>
+            </a:pPr>
+            <a:r>
+              <a:t>• 장부 특성: 신장 기능 튼튼, 비위 차고 약함</a:t>
+            </a:r>
             <a:br/>
             <a:r>
-              <a:t>📞 연락처: 010-2323-4662</a:t>
+              <a:t>• 취약 증상: 수족냉증, 만성 소화불량, 피로</a:t>
             </a:r>
             <a:br/>
             <a:r>
-              <a:t>✉️ 이메일: ydoko@daum.net</a:t>
+              <a:t>• 오일 처방: 온가드, 진저, 시나몬, 오렌지</a:t>
+            </a:r>
+            <a:br/>
+            <a:r>
+              <a:t>• 맞춤 식단: 닭가슴살 황기 보양 미역국</a:t>
+            </a:r>
+            <a:br/>
+            <a:r>
+              <a:t>• 의전 세팅: 백색 가운 + 우측 3지 은반지</a:t>
+            </a:r>
+          </a:p>
+        </p:txBody>
+      </p:sp>
+      <p:sp>
+        <p:nvSpPr>
+          <p:cNvPr id="12" name="Rounded Rectangle 11"/>
+          <p:cNvSpPr/>
+          <p:nvPr/>
+        </p:nvSpPr>
+        <p:spPr>
+          <a:xfrm>
+            <a:off x="8823960" y="1463040"/>
+            <a:ext cx="2560320" cy="4846320"/>
+          </a:xfrm>
+          <a:prstGeom prst="roundRect">
+            <a:avLst/>
+          </a:prstGeom>
+          <a:solidFill>
+            <a:srgbClr val="FFFFFF"/>
+          </a:solidFill>
+          <a:ln w="13970">
+            <a:solidFill>
+              <a:srgbClr val="1C362B"/>
+            </a:solidFill>
+          </a:ln>
+        </p:spPr>
+        <p:style>
+          <a:lnRef idx="1">
+            <a:schemeClr val="accent1"/>
+          </a:lnRef>
+          <a:fillRef idx="3">
+            <a:schemeClr val="accent1"/>
+          </a:fillRef>
+          <a:effectRef idx="2">
+            <a:schemeClr val="accent1"/>
+          </a:effectRef>
+          <a:fontRef idx="minor">
+            <a:schemeClr val="lt1"/>
+          </a:fontRef>
+        </p:style>
+        <p:txBody>
+          <a:bodyPr rtlCol="0" anchor="ctr"/>
+          <a:lstStyle/>
+          <a:p>
+            <a:pPr algn="ctr"/>
+          </a:p>
+        </p:txBody>
+      </p:sp>
+      <p:sp>
+        <p:nvSpPr>
+          <p:cNvPr id="13" name="TextBox 12"/>
+          <p:cNvSpPr txBox="1"/>
+          <p:nvPr/>
+        </p:nvSpPr>
+        <p:spPr>
+          <a:xfrm>
+            <a:off x="8961120" y="1645920"/>
+            <a:ext cx="2286000" cy="4480560"/>
+          </a:xfrm>
+          <a:prstGeom prst="rect">
+            <a:avLst/>
+          </a:prstGeom>
+          <a:noFill/>
+        </p:spPr>
+        <p:txBody>
+          <a:bodyPr wrap="square">
+            <a:spAutoFit/>
+          </a:bodyPr>
+          <a:lstStyle/>
+          <a:p>
+            <a:pPr>
+              <a:spcAft>
+                <a:spcPts val="1000"/>
+              </a:spcAft>
+              <a:defRPr sz="1450" b="1">
+                <a:solidFill>
+                  <a:srgbClr val="1C362B"/>
+                </a:solidFill>
+              </a:defRPr>
+            </a:pPr>
+            <a:r>
+              <a:t>태양인 (肺大肝小)</a:t>
+            </a:r>
+          </a:p>
+          <a:p>
+            <a:pPr>
+              <a:lnSpc>
+                <a:spcPct val="125000"/>
+              </a:lnSpc>
+              <a:defRPr sz="1050">
+                <a:solidFill>
+                  <a:srgbClr val="241E19"/>
+                </a:solidFill>
+              </a:defRPr>
+            </a:pPr>
+            <a:r>
+              <a:t>• 장부 특성: 폐 기능 강함, 간 해독/하체 허약</a:t>
+            </a:r>
+            <a:br/>
+            <a:r>
+              <a:t>• 취약 증상: 상기증, 목덜미 뻣뻣, 하지 무력</a:t>
+            </a:r>
+            <a:br/>
+            <a:r>
+              <a:t>• 오일 처방: 베티버, 프랑킨센스, 레몬</a:t>
+            </a:r>
+            <a:br/>
+            <a:r>
+              <a:t>• 맞춤 식단: 완도산 전복 홍합 맑은 해물 미역국</a:t>
+            </a:r>
+            <a:br/>
+            <a:r>
+              <a:t>• 의전 세팅: 적색 가운 + 좌측 4지 은반지</a:t>
             </a:r>
           </a:p>
         </p:txBody>
@@ -8181,7 +10515,7 @@
             <a:avLst/>
           </a:prstGeom>
           <a:solidFill>
-            <a:srgbClr val="0F2019"/>
+            <a:srgbClr val="FDFBF7"/>
           </a:solidFill>
           <a:ln>
             <a:noFill/>
@@ -8211,23 +10545,93 @@
       </p:sp>
       <p:sp>
         <p:nvSpPr>
-          <p:cNvPr id="3" name="Rectangle 2"/>
+          <p:cNvPr id="3" name="TextBox 2"/>
+          <p:cNvSpPr txBox="1"/>
+          <p:nvPr/>
+        </p:nvSpPr>
+        <p:spPr>
+          <a:xfrm>
+            <a:off x="731520" y="365760"/>
+            <a:ext cx="10728655" cy="320040"/>
+          </a:xfrm>
+          <a:prstGeom prst="rect">
+            <a:avLst/>
+          </a:prstGeom>
+          <a:noFill/>
+        </p:spPr>
+        <p:txBody>
+          <a:bodyPr wrap="none">
+            <a:spAutoFit/>
+          </a:bodyPr>
+          <a:lstStyle/>
+          <a:p>
+            <a:pPr>
+              <a:defRPr sz="1000" b="1">
+                <a:solidFill>
+                  <a:srgbClr val="A37F48"/>
+                </a:solidFill>
+              </a:defRPr>
+            </a:pPr>
+            <a:r>
+              <a:t>SIGNATURE TREATMENTS</a:t>
+            </a:r>
+          </a:p>
+        </p:txBody>
+      </p:sp>
+      <p:sp>
+        <p:nvSpPr>
+          <p:cNvPr id="4" name="TextBox 3"/>
+          <p:cNvSpPr txBox="1"/>
+          <p:nvPr/>
+        </p:nvSpPr>
+        <p:spPr>
+          <a:xfrm>
+            <a:off x="731520" y="640080"/>
+            <a:ext cx="10728655" cy="640080"/>
+          </a:xfrm>
+          <a:prstGeom prst="rect">
+            <a:avLst/>
+          </a:prstGeom>
+          <a:noFill/>
+        </p:spPr>
+        <p:txBody>
+          <a:bodyPr wrap="none">
+            <a:spAutoFit/>
+          </a:bodyPr>
+          <a:lstStyle/>
+          <a:p>
+            <a:pPr>
+              <a:defRPr sz="2100" b="1">
+                <a:solidFill>
+                  <a:srgbClr val="241E19"/>
+                </a:solidFill>
+              </a:defRPr>
+            </a:pPr>
+            <a:r>
+              <a:t>10대 시그니처 테라피 가이드 (Part 1: Themes 01 ~ 05)</a:t>
+            </a:r>
+          </a:p>
+        </p:txBody>
+      </p:sp>
+      <p:sp>
+        <p:nvSpPr>
+          <p:cNvPr id="5" name="Rectangle 4"/>
           <p:cNvSpPr/>
           <p:nvPr/>
         </p:nvSpPr>
         <p:spPr>
           <a:xfrm>
-            <a:off x="640080" y="640080"/>
-            <a:ext cx="10911535" cy="5577840"/>
-          </a:xfrm>
-          <a:prstGeom prst="rect">
-            <a:avLst/>
-          </a:prstGeom>
-          <a:noFill/>
-          <a:ln w="19050">
-            <a:solidFill>
-              <a:srgbClr val="C29B62"/>
-            </a:solidFill>
+            <a:off x="731520" y="1261872"/>
+            <a:ext cx="2011680" cy="22860"/>
+          </a:xfrm>
+          <a:prstGeom prst="rect">
+            <a:avLst/>
+          </a:prstGeom>
+          <a:solidFill>
+            <a:srgbClr val="C9A876"/>
+          </a:solidFill>
+          <a:ln>
+            <a:noFill/>
           </a:ln>
         </p:spPr>
         <p:style>
@@ -8254,14 +10658,59 @@
       </p:sp>
       <p:sp>
         <p:nvSpPr>
-          <p:cNvPr id="4" name="TextBox 3"/>
+          <p:cNvPr id="6" name="Rounded Rectangle 5"/>
+          <p:cNvSpPr/>
+          <p:nvPr/>
+        </p:nvSpPr>
+        <p:spPr>
+          <a:xfrm>
+            <a:off x="731520" y="1463040"/>
+            <a:ext cx="10728655" cy="822960"/>
+          </a:xfrm>
+          <a:prstGeom prst="roundRect">
+            <a:avLst/>
+          </a:prstGeom>
+          <a:solidFill>
+            <a:srgbClr val="FFFFFF"/>
+          </a:solidFill>
+          <a:ln w="13970">
+            <a:solidFill>
+              <a:srgbClr val="C9A876"/>
+            </a:solidFill>
+          </a:ln>
+        </p:spPr>
+        <p:style>
+          <a:lnRef idx="1">
+            <a:schemeClr val="accent1"/>
+          </a:lnRef>
+          <a:fillRef idx="3">
+            <a:schemeClr val="accent1"/>
+          </a:fillRef>
+          <a:effectRef idx="2">
+            <a:schemeClr val="accent1"/>
+          </a:effectRef>
+          <a:fontRef idx="minor">
+            <a:schemeClr val="lt1"/>
+          </a:fontRef>
+        </p:style>
+        <p:txBody>
+          <a:bodyPr rtlCol="0" anchor="ctr"/>
+          <a:lstStyle/>
+          <a:p>
+            <a:pPr algn="ctr"/>
+          </a:p>
+        </p:txBody>
+      </p:sp>
+      <p:sp>
+        <p:nvSpPr>
+          <p:cNvPr id="7" name="TextBox 6"/>
           <p:cNvSpPr txBox="1"/>
           <p:nvPr/>
         </p:nvSpPr>
         <p:spPr>
           <a:xfrm>
-            <a:off x="1371600" y="1828800"/>
-            <a:ext cx="9448495" cy="3657600"/>
+            <a:off x="914400" y="1572768"/>
+            <a:ext cx="10332720" cy="621792"/>
           </a:xfrm>
           <a:prstGeom prst="rect">
             <a:avLst/>
@@ -8274,53 +10723,335 @@
           </a:bodyPr>
           <a:lstStyle/>
           <a:p>
-            <a:pPr algn="ctr">
-              <a:spcAft>
-                <a:spcPts val="1400"/>
-              </a:spcAft>
-              <a:defRPr sz="1300" b="1">
-                <a:solidFill>
-                  <a:srgbClr val="C29B62"/>
-                </a:solidFill>
-              </a:defRPr>
-            </a:pPr>
-            <a:r>
-              <a:t>K-PREMIUM WELLNESS RETREAT 2026/27</a:t>
-            </a:r>
-          </a:p>
-          <a:p>
-            <a:pPr algn="ctr">
-              <a:spcAft>
-                <a:spcPts val="2000"/>
-              </a:spcAft>
-              <a:defRPr sz="3200" b="1">
-                <a:solidFill>
-                  <a:srgbClr val="FFFFFF"/>
-                </a:solidFill>
-              </a:defRPr>
-            </a:pPr>
-            <a:r>
-              <a:t>가장 한국적인 사상체질 의학이</a:t>
-            </a:r>
-            <a:br/>
-            <a:r>
-              <a:t>가장 세계적인 럭셔리 쿠어(Kur)가 됩니다</a:t>
-            </a:r>
-          </a:p>
-          <a:p>
-            <a:pPr algn="ctr">
-              <a:defRPr sz="1350">
-                <a:solidFill>
-                  <a:srgbClr val="C29B62"/>
-                </a:solidFill>
-              </a:defRPr>
-            </a:pPr>
-            <a:r>
-              <a:t>공식 웹 포털 실시간 확인: https://ryujean77.github.io/ryujean-slides/sasang-spa/</a:t>
-            </a:r>
-            <a:br/>
-            <a:r>
-              <a:t>문의: 유정근 총괄 디렉터 (010-4728-9917 | ryujean77@gmail.com)</a:t>
+            <a:pPr>
+              <a:defRPr sz="1200">
+                <a:solidFill>
+                  <a:srgbClr val="241E19"/>
+                </a:solidFill>
+              </a:defRPr>
+            </a:pPr>
+            <a:r>
+              <a:t>01. 웰컴 오리엔테이션  |  프라이빗 다실 1:1 상담 및 4대 체질 맞춤 웰컴 티(소음 38℃ 대추계피차 ~ 소양 상온 구기자차) 제공</a:t>
+            </a:r>
+          </a:p>
+        </p:txBody>
+      </p:sp>
+      <p:sp>
+        <p:nvSpPr>
+          <p:cNvPr id="8" name="Rounded Rectangle 7"/>
+          <p:cNvSpPr/>
+          <p:nvPr/>
+        </p:nvSpPr>
+        <p:spPr>
+          <a:xfrm>
+            <a:off x="731520" y="2423160"/>
+            <a:ext cx="10728655" cy="822960"/>
+          </a:xfrm>
+          <a:prstGeom prst="roundRect">
+            <a:avLst/>
+          </a:prstGeom>
+          <a:solidFill>
+            <a:srgbClr val="FFFFFF"/>
+          </a:solidFill>
+          <a:ln w="13970">
+            <a:solidFill>
+              <a:srgbClr val="C9A876"/>
+            </a:solidFill>
+          </a:ln>
+        </p:spPr>
+        <p:style>
+          <a:lnRef idx="1">
+            <a:schemeClr val="accent1"/>
+          </a:lnRef>
+          <a:fillRef idx="3">
+            <a:schemeClr val="accent1"/>
+          </a:fillRef>
+          <a:effectRef idx="2">
+            <a:schemeClr val="accent1"/>
+          </a:effectRef>
+          <a:fontRef idx="minor">
+            <a:schemeClr val="lt1"/>
+          </a:fontRef>
+        </p:style>
+        <p:txBody>
+          <a:bodyPr rtlCol="0" anchor="ctr"/>
+          <a:lstStyle/>
+          <a:p>
+            <a:pPr algn="ctr"/>
+          </a:p>
+        </p:txBody>
+      </p:sp>
+      <p:sp>
+        <p:nvSpPr>
+          <p:cNvPr id="9" name="TextBox 8"/>
+          <p:cNvSpPr txBox="1"/>
+          <p:nvPr/>
+        </p:nvSpPr>
+        <p:spPr>
+          <a:xfrm>
+            <a:off x="914400" y="2532888"/>
+            <a:ext cx="10332720" cy="621792"/>
+          </a:xfrm>
+          <a:prstGeom prst="rect">
+            <a:avLst/>
+          </a:prstGeom>
+          <a:noFill/>
+        </p:spPr>
+        <p:txBody>
+          <a:bodyPr wrap="square">
+            <a:spAutoFit/>
+          </a:bodyPr>
+          <a:lstStyle/>
+          <a:p>
+            <a:pPr>
+              <a:defRPr sz="1200">
+                <a:solidFill>
+                  <a:srgbClr val="241E19"/>
+                </a:solidFill>
+              </a:defRPr>
+            </a:pPr>
+            <a:r>
+              <a:t>02. 20분 맞춤 약재 족욕  |  두한족열(頭寒足熱) 순환 개방. 온열탕(41℃ 당귀/생강) vs 쿨링탕(38.5℃ 박하/결명자) + 순수 에센셜 오일</a:t>
+            </a:r>
+          </a:p>
+        </p:txBody>
+      </p:sp>
+      <p:sp>
+        <p:nvSpPr>
+          <p:cNvPr id="10" name="Rounded Rectangle 9"/>
+          <p:cNvSpPr/>
+          <p:nvPr/>
+        </p:nvSpPr>
+        <p:spPr>
+          <a:xfrm>
+            <a:off x="731520" y="3383280"/>
+            <a:ext cx="10728655" cy="822960"/>
+          </a:xfrm>
+          <a:prstGeom prst="roundRect">
+            <a:avLst/>
+          </a:prstGeom>
+          <a:solidFill>
+            <a:srgbClr val="FFFFFF"/>
+          </a:solidFill>
+          <a:ln w="13970">
+            <a:solidFill>
+              <a:srgbClr val="C9A876"/>
+            </a:solidFill>
+          </a:ln>
+        </p:spPr>
+        <p:style>
+          <a:lnRef idx="1">
+            <a:schemeClr val="accent1"/>
+          </a:lnRef>
+          <a:fillRef idx="3">
+            <a:schemeClr val="accent1"/>
+          </a:fillRef>
+          <a:effectRef idx="2">
+            <a:schemeClr val="accent1"/>
+          </a:effectRef>
+          <a:fontRef idx="minor">
+            <a:schemeClr val="lt1"/>
+          </a:fontRef>
+        </p:style>
+        <p:txBody>
+          <a:bodyPr rtlCol="0" anchor="ctr"/>
+          <a:lstStyle/>
+          <a:p>
+            <a:pPr algn="ctr"/>
+          </a:p>
+        </p:txBody>
+      </p:sp>
+      <p:sp>
+        <p:nvSpPr>
+          <p:cNvPr id="11" name="TextBox 10"/>
+          <p:cNvSpPr txBox="1"/>
+          <p:nvPr/>
+        </p:nvSpPr>
+        <p:spPr>
+          <a:xfrm>
+            <a:off x="914400" y="3493008"/>
+            <a:ext cx="10332720" cy="621792"/>
+          </a:xfrm>
+          <a:prstGeom prst="rect">
+            <a:avLst/>
+          </a:prstGeom>
+          <a:noFill/>
+        </p:spPr>
+        <p:txBody>
+          <a:bodyPr wrap="square">
+            <a:spAutoFit/>
+          </a:bodyPr>
+          <a:lstStyle/>
+          <a:p>
+            <a:pPr>
+              <a:defRPr sz="1200">
+                <a:solidFill>
+                  <a:srgbClr val="241E19"/>
+                </a:solidFill>
+              </a:defRPr>
+            </a:pPr>
+            <a:r>
+              <a:t>03. 에너지 테라피 &amp; 은반지  |  사상체질 경락별 은반지(Eun-banji) 착용 및 4대 조화 가운을 통한 스태프 비언어 맞춤 의전 시스템</a:t>
+            </a:r>
+          </a:p>
+        </p:txBody>
+      </p:sp>
+      <p:sp>
+        <p:nvSpPr>
+          <p:cNvPr id="12" name="Rounded Rectangle 11"/>
+          <p:cNvSpPr/>
+          <p:nvPr/>
+        </p:nvSpPr>
+        <p:spPr>
+          <a:xfrm>
+            <a:off x="731520" y="4343400"/>
+            <a:ext cx="10728655" cy="822960"/>
+          </a:xfrm>
+          <a:prstGeom prst="roundRect">
+            <a:avLst/>
+          </a:prstGeom>
+          <a:solidFill>
+            <a:srgbClr val="FFFFFF"/>
+          </a:solidFill>
+          <a:ln w="13970">
+            <a:solidFill>
+              <a:srgbClr val="C9A876"/>
+            </a:solidFill>
+          </a:ln>
+        </p:spPr>
+        <p:style>
+          <a:lnRef idx="1">
+            <a:schemeClr val="accent1"/>
+          </a:lnRef>
+          <a:fillRef idx="3">
+            <a:schemeClr val="accent1"/>
+          </a:fillRef>
+          <a:effectRef idx="2">
+            <a:schemeClr val="accent1"/>
+          </a:effectRef>
+          <a:fontRef idx="minor">
+            <a:schemeClr val="lt1"/>
+          </a:fontRef>
+        </p:style>
+        <p:txBody>
+          <a:bodyPr rtlCol="0" anchor="ctr"/>
+          <a:lstStyle/>
+          <a:p>
+            <a:pPr algn="ctr"/>
+          </a:p>
+        </p:txBody>
+      </p:sp>
+      <p:sp>
+        <p:nvSpPr>
+          <p:cNvPr id="13" name="TextBox 12"/>
+          <p:cNvSpPr txBox="1"/>
+          <p:nvPr/>
+        </p:nvSpPr>
+        <p:spPr>
+          <a:xfrm>
+            <a:off x="914400" y="4453128"/>
+            <a:ext cx="10332720" cy="621792"/>
+          </a:xfrm>
+          <a:prstGeom prst="rect">
+            <a:avLst/>
+          </a:prstGeom>
+          <a:noFill/>
+        </p:spPr>
+        <p:txBody>
+          <a:bodyPr wrap="square">
+            <a:spAutoFit/>
+          </a:bodyPr>
+          <a:lstStyle/>
+          <a:p>
+            <a:pPr>
+              <a:defRPr sz="1200">
+                <a:solidFill>
+                  <a:srgbClr val="241E19"/>
+                </a:solidFill>
+              </a:defRPr>
+            </a:pPr>
+            <a:r>
+              <a:t>04. 푸드 테라피 (12h 단식)  |  저녁 18:00~익일 06:00 12시간 단식(자가포식) 후 기상 직후 4대 체질 맞춤 영양 미역국 조식 정식 제공</a:t>
+            </a:r>
+          </a:p>
+        </p:txBody>
+      </p:sp>
+      <p:sp>
+        <p:nvSpPr>
+          <p:cNvPr id="14" name="Rounded Rectangle 13"/>
+          <p:cNvSpPr/>
+          <p:nvPr/>
+        </p:nvSpPr>
+        <p:spPr>
+          <a:xfrm>
+            <a:off x="731520" y="5303520"/>
+            <a:ext cx="10728655" cy="822960"/>
+          </a:xfrm>
+          <a:prstGeom prst="roundRect">
+            <a:avLst/>
+          </a:prstGeom>
+          <a:solidFill>
+            <a:srgbClr val="FFFFFF"/>
+          </a:solidFill>
+          <a:ln w="13970">
+            <a:solidFill>
+              <a:srgbClr val="C9A876"/>
+            </a:solidFill>
+          </a:ln>
+        </p:spPr>
+        <p:style>
+          <a:lnRef idx="1">
+            <a:schemeClr val="accent1"/>
+          </a:lnRef>
+          <a:fillRef idx="3">
+            <a:schemeClr val="accent1"/>
+          </a:fillRef>
+          <a:effectRef idx="2">
+            <a:schemeClr val="accent1"/>
+          </a:effectRef>
+          <a:fontRef idx="minor">
+            <a:schemeClr val="lt1"/>
+          </a:fontRef>
+        </p:style>
+        <p:txBody>
+          <a:bodyPr rtlCol="0" anchor="ctr"/>
+          <a:lstStyle/>
+          <a:p>
+            <a:pPr algn="ctr"/>
+          </a:p>
+        </p:txBody>
+      </p:sp>
+      <p:sp>
+        <p:nvSpPr>
+          <p:cNvPr id="15" name="TextBox 14"/>
+          <p:cNvSpPr txBox="1"/>
+          <p:nvPr/>
+        </p:nvSpPr>
+        <p:spPr>
+          <a:xfrm>
+            <a:off x="914400" y="5413248"/>
+            <a:ext cx="10332720" cy="621792"/>
+          </a:xfrm>
+          <a:prstGeom prst="rect">
+            <a:avLst/>
+          </a:prstGeom>
+          <a:noFill/>
+        </p:spPr>
+        <p:txBody>
+          <a:bodyPr wrap="square">
+            <a:spAutoFit/>
+          </a:bodyPr>
+          <a:lstStyle/>
+          <a:p>
+            <a:pPr>
+              <a:defRPr sz="1200">
+                <a:solidFill>
+                  <a:srgbClr val="241E19"/>
+                </a:solidFill>
+              </a:defRPr>
+            </a:pPr>
+            <a:r>
+              <a:t>05. 80분 이원화 바디 테라피  |  1단계 한의학 경락 수기 지압(30분)으로 순환로 개방 + 2단계 최고급 100% 순수 에센셜 오일 림프 드레나쥐(50분)</a:t>
             </a:r>
           </a:p>
         </p:txBody>

--- a/sasang-spa/사상체질_프리미엄_스파_프로젝트_제안서_발표자료.pptx
+++ b/sasang-spa/사상체질_프리미엄_스파_프로젝트_제안서_발표자료.pptx
@@ -4939,7 +4939,7 @@
             </a:r>
             <a:br/>
             <a:r>
-              <a:t>• 은반지 착용 및 4대 컬러 가운 배정</a:t>
+              <a:t>• 반지(은/금) 착용 및 4대 가운 배정</a:t>
             </a:r>
           </a:p>
         </p:txBody>
@@ -7934,7 +7934,7 @@
           <a:p>
             <a:pPr>
               <a:spcAft>
-                <a:spcPts val="800"/>
+                <a:spcPts val="600"/>
               </a:spcAft>
               <a:defRPr sz="950">
                 <a:solidFill>
@@ -7951,7 +7951,7 @@
               <a:lnSpc>
                 <a:spcPct val="125000"/>
               </a:lnSpc>
-              <a:defRPr sz="1000">
+              <a:defRPr sz="980">
                 <a:solidFill>
                   <a:srgbClr val="241E19"/>
                 </a:solidFill>
@@ -7983,7 +7983,11 @@
             </a:r>
             <a:br/>
             <a:r>
-              <a:t>• 소고기 양지 들깨 미역국 + 우측 4지 은반지</a:t>
+              <a:t>• 소고기 양지 들깨 미역국</a:t>
+            </a:r>
+            <a:br/>
+            <a:r>
+              <a:t>• 💍 은반지: 엄지(1지) / 금반지: 넷째(4지)</a:t>
             </a:r>
           </a:p>
         </p:txBody>
@@ -8069,7 +8073,7 @@
           <a:p>
             <a:pPr>
               <a:spcAft>
-                <a:spcPts val="800"/>
+                <a:spcPts val="600"/>
               </a:spcAft>
               <a:defRPr sz="950">
                 <a:solidFill>
@@ -8086,7 +8090,7 @@
               <a:lnSpc>
                 <a:spcPct val="125000"/>
               </a:lnSpc>
-              <a:defRPr sz="1000">
+              <a:defRPr sz="980">
                 <a:solidFill>
                   <a:srgbClr val="241E19"/>
                 </a:solidFill>
@@ -8118,7 +8122,11 @@
             </a:r>
             <a:br/>
             <a:r>
-              <a:t>• 돼지고기 수육 / 조개 미역국 + 좌측 2지 은반지</a:t>
+              <a:t>• 돼지고기 수육 / 조개 미역국</a:t>
+            </a:r>
+            <a:br/>
+            <a:r>
+              <a:t>• 💍 은반지: 가운데(3지) / 금반지: 새끼(5지)</a:t>
             </a:r>
           </a:p>
         </p:txBody>
@@ -8204,7 +8212,7 @@
           <a:p>
             <a:pPr>
               <a:spcAft>
-                <a:spcPts val="800"/>
+                <a:spcPts val="600"/>
               </a:spcAft>
               <a:defRPr sz="950">
                 <a:solidFill>
@@ -8221,7 +8229,7 @@
               <a:lnSpc>
                 <a:spcPct val="125000"/>
               </a:lnSpc>
-              <a:defRPr sz="1000">
+              <a:defRPr sz="980">
                 <a:solidFill>
                   <a:srgbClr val="241E19"/>
                 </a:solidFill>
@@ -8253,7 +8261,11 @@
             </a:r>
             <a:br/>
             <a:r>
-              <a:t>• 닭가슴살 황기 보양 미역국 + 우측 3지 은반지</a:t>
+              <a:t>• 닭가슴살 황기 보양 미역국</a:t>
+            </a:r>
+            <a:br/>
+            <a:r>
+              <a:t>• 💍 은반지: 새끼(5지) / 금반지: 가운데(3지)</a:t>
             </a:r>
           </a:p>
         </p:txBody>
@@ -8339,7 +8351,7 @@
           <a:p>
             <a:pPr>
               <a:spcAft>
-                <a:spcPts val="800"/>
+                <a:spcPts val="600"/>
               </a:spcAft>
               <a:defRPr sz="950">
                 <a:solidFill>
@@ -8356,7 +8368,7 @@
               <a:lnSpc>
                 <a:spcPct val="125000"/>
               </a:lnSpc>
-              <a:defRPr sz="1000">
+              <a:defRPr sz="980">
                 <a:solidFill>
                   <a:srgbClr val="241E19"/>
                 </a:solidFill>
@@ -8388,7 +8400,11 @@
             </a:r>
             <a:br/>
             <a:r>
-              <a:t>• 완도산 전복 홍합 맑은 해물 미역국 + 좌측 4지 은반지</a:t>
+              <a:t>• 완도산 전복 홍합 맑은 해물 미역국</a:t>
+            </a:r>
+            <a:br/>
+            <a:r>
+              <a:t>• 💍 은반지: 넷째(4지) / 금반지: 엄지(1지)</a:t>
             </a:r>
           </a:p>
         </p:txBody>
@@ -8758,7 +8774,7 @@
               </a:defRPr>
             </a:pPr>
             <a:r>
-              <a:t>20분 약재 족욕, 은반지 의전, 80분 이원화 바디(한의 수기+순수 오일), 1시간 심부 온열, 태극선법 기체조</a:t>
+              <a:t>20분 약재 족욕, 은반지/금반지 비언어 의전, 80분 이원화 바디(한의 수기+순수 오일), 1시간 심부 온열, 태극선법</a:t>
             </a:r>
           </a:p>
         </p:txBody>
@@ -9978,7 +9994,7 @@
               </a:defRPr>
             </a:pPr>
             <a:r>
-              <a:t>4대 사상체질 심층 처방 매트릭스</a:t>
+              <a:t>4대 사상체질 심층 처방 및 의전 매트릭스</a:t>
             </a:r>
           </a:p>
         </p:txBody>
@@ -10079,8 +10095,8 @@
         </p:nvSpPr>
         <p:spPr>
           <a:xfrm>
-            <a:off x="868680" y="1645920"/>
-            <a:ext cx="2286000" cy="4480560"/>
+            <a:off x="868680" y="1600200"/>
+            <a:ext cx="2286000" cy="4572000"/>
           </a:xfrm>
           <a:prstGeom prst="rect">
             <a:avLst/>
@@ -10095,9 +10111,9 @@
           <a:p>
             <a:pPr>
               <a:spcAft>
-                <a:spcPts val="1000"/>
+                <a:spcPts val="800"/>
               </a:spcAft>
-              <a:defRPr sz="1450" b="1">
+              <a:defRPr sz="1400" b="1">
                 <a:solidFill>
                   <a:srgbClr val="A37F48"/>
                 </a:solidFill>
@@ -10112,18 +10128,18 @@
               <a:lnSpc>
                 <a:spcPct val="125000"/>
               </a:lnSpc>
-              <a:defRPr sz="1050">
+              <a:defRPr sz="1000">
                 <a:solidFill>
                   <a:srgbClr val="241E19"/>
                 </a:solidFill>
               </a:defRPr>
             </a:pPr>
             <a:r>
-              <a:t>• 장부 특성: 간 기능 왕성, 폐/기관지 허약</a:t>
+              <a:t>• 장부 특성: 간 왕성, 폐/기관지 허약</a:t>
             </a:r>
             <a:br/>
             <a:r>
-              <a:t>• 취약 증상: 목 답답함, 피부 건조, 림프 정체</a:t>
+              <a:t>• 취약 증상: 목 답답함, 피부건조, 림프정체</a:t>
             </a:r>
             <a:br/>
             <a:r>
@@ -10131,11 +10147,15 @@
             </a:r>
             <a:br/>
             <a:r>
-              <a:t>• 맞춤 식단: 소고기 양지 들깨 미역국 + 율무밥</a:t>
+              <a:t>• 맞춤 식단: 소고기 양지 들깨 미역국</a:t>
             </a:r>
             <a:br/>
             <a:r>
-              <a:t>• 의전 세팅: 황색 가운 + 우측 4지 은반지</a:t>
+              <a:t>• 💍 은반지: 엄지(1지) / 금반지: 넷째(4지)</a:t>
+            </a:r>
+            <a:br/>
+            <a:r>
+              <a:t>• 의전 가운: 황색(Gold) 가운 세팅</a:t>
             </a:r>
           </a:p>
         </p:txBody>
@@ -10193,8 +10213,8 @@
         </p:nvSpPr>
         <p:spPr>
           <a:xfrm>
-            <a:off x="3566160" y="1645920"/>
-            <a:ext cx="2286000" cy="4480560"/>
+            <a:off x="3566160" y="1600200"/>
+            <a:ext cx="2286000" cy="4572000"/>
           </a:xfrm>
           <a:prstGeom prst="rect">
             <a:avLst/>
@@ -10209,9 +10229,9 @@
           <a:p>
             <a:pPr>
               <a:spcAft>
-                <a:spcPts val="1000"/>
+                <a:spcPts val="800"/>
               </a:spcAft>
-              <a:defRPr sz="1450" b="1">
+              <a:defRPr sz="1400" b="1">
                 <a:solidFill>
                   <a:srgbClr val="1C362B"/>
                 </a:solidFill>
@@ -10226,18 +10246,18 @@
               <a:lnSpc>
                 <a:spcPct val="125000"/>
               </a:lnSpc>
-              <a:defRPr sz="1050">
+              <a:defRPr sz="1000">
                 <a:solidFill>
                   <a:srgbClr val="241E19"/>
                 </a:solidFill>
               </a:defRPr>
             </a:pPr>
             <a:r>
-              <a:t>• 장부 특성: 소화기 열 많음, 신장 음기 허약</a:t>
+              <a:t>• 장부 특성: 소화기 열, 신장 음기 허약</a:t>
             </a:r>
             <a:br/>
             <a:r>
-              <a:t>• 취약 증상: 상체 열감, 두통, 가슴 답답, 불면</a:t>
+              <a:t>• 취약 증상: 상체 열감, 두통, 가슴답답, 불면</a:t>
             </a:r>
             <a:br/>
             <a:r>
@@ -10249,7 +10269,11 @@
             </a:r>
             <a:br/>
             <a:r>
-              <a:t>• 의전 세팅: 청색 가운 + 좌측 2지 은반지</a:t>
+              <a:t>• 💍 은반지: 가운데(3지) / 금반지: 새끼(5지)</a:t>
+            </a:r>
+            <a:br/>
+            <a:r>
+              <a:t>• 의전 가운: 청색(Blue) 가운 세팅</a:t>
             </a:r>
           </a:p>
         </p:txBody>
@@ -10307,8 +10331,8 @@
         </p:nvSpPr>
         <p:spPr>
           <a:xfrm>
-            <a:off x="6263640" y="1645920"/>
-            <a:ext cx="2286000" cy="4480560"/>
+            <a:off x="6263640" y="1600200"/>
+            <a:ext cx="2286000" cy="4572000"/>
           </a:xfrm>
           <a:prstGeom prst="rect">
             <a:avLst/>
@@ -10323,9 +10347,9 @@
           <a:p>
             <a:pPr>
               <a:spcAft>
-                <a:spcPts val="1000"/>
+                <a:spcPts val="800"/>
               </a:spcAft>
-              <a:defRPr sz="1450" b="1">
+              <a:defRPr sz="1400" b="1">
                 <a:solidFill>
                   <a:srgbClr val="A37F48"/>
                 </a:solidFill>
@@ -10340,18 +10364,18 @@
               <a:lnSpc>
                 <a:spcPct val="125000"/>
               </a:lnSpc>
-              <a:defRPr sz="1050">
+              <a:defRPr sz="1000">
                 <a:solidFill>
                   <a:srgbClr val="241E19"/>
                 </a:solidFill>
               </a:defRPr>
             </a:pPr>
             <a:r>
-              <a:t>• 장부 특성: 신장 기능 튼튼, 비위 차고 약함</a:t>
+              <a:t>• 장부 특성: 신장 튼튼, 비위 차고 약함</a:t>
             </a:r>
             <a:br/>
             <a:r>
-              <a:t>• 취약 증상: 수족냉증, 만성 소화불량, 피로</a:t>
+              <a:t>• 취약 증상: 수족냉증, 소화불량, 만성피로</a:t>
             </a:r>
             <a:br/>
             <a:r>
@@ -10363,7 +10387,11 @@
             </a:r>
             <a:br/>
             <a:r>
-              <a:t>• 의전 세팅: 백색 가운 + 우측 3지 은반지</a:t>
+              <a:t>• 💍 은반지: 새끼(5지) / 금반지: 가운데(3지)</a:t>
+            </a:r>
+            <a:br/>
+            <a:r>
+              <a:t>• 의전 가운: 백색(Ivory) 가운 세팅</a:t>
             </a:r>
           </a:p>
         </p:txBody>
@@ -10421,8 +10449,8 @@
         </p:nvSpPr>
         <p:spPr>
           <a:xfrm>
-            <a:off x="8961120" y="1645920"/>
-            <a:ext cx="2286000" cy="4480560"/>
+            <a:off x="8961120" y="1600200"/>
+            <a:ext cx="2286000" cy="4572000"/>
           </a:xfrm>
           <a:prstGeom prst="rect">
             <a:avLst/>
@@ -10437,9 +10465,9 @@
           <a:p>
             <a:pPr>
               <a:spcAft>
-                <a:spcPts val="1000"/>
+                <a:spcPts val="800"/>
               </a:spcAft>
-              <a:defRPr sz="1450" b="1">
+              <a:defRPr sz="1400" b="1">
                 <a:solidFill>
                   <a:srgbClr val="1C362B"/>
                 </a:solidFill>
@@ -10454,7 +10482,7 @@
               <a:lnSpc>
                 <a:spcPct val="125000"/>
               </a:lnSpc>
-              <a:defRPr sz="1050">
+              <a:defRPr sz="1000">
                 <a:solidFill>
                   <a:srgbClr val="241E19"/>
                 </a:solidFill>
@@ -10465,7 +10493,7 @@
             </a:r>
             <a:br/>
             <a:r>
-              <a:t>• 취약 증상: 상기증, 목덜미 뻣뻣, 하지 무력</a:t>
+              <a:t>• 취약 증상: 상기증, 목덜미 뻣뻣, 하지무력</a:t>
             </a:r>
             <a:br/>
             <a:r>
@@ -10473,11 +10501,15 @@
             </a:r>
             <a:br/>
             <a:r>
-              <a:t>• 맞춤 식단: 완도산 전복 홍합 맑은 해물 미역국</a:t>
+              <a:t>• 맞춤 식단: 완도 전복 홍합 맑은 미역국</a:t>
             </a:r>
             <a:br/>
             <a:r>
-              <a:t>• 의전 세팅: 적색 가운 + 좌측 4지 은반지</a:t>
+              <a:t>• 💍 은반지: 넷째(4지) / 금반지: 엄지(1지)</a:t>
+            </a:r>
+            <a:br/>
+            <a:r>
+              <a:t>• 의전 가운: 적색(Crimson) 가운 세팅</a:t>
             </a:r>
           </a:p>
         </p:txBody>
@@ -10891,7 +10923,7 @@
               </a:defRPr>
             </a:pPr>
             <a:r>
-              <a:t>03. 에너지 테라피 &amp; 은반지  |  사상체질 경락별 은반지(Eun-banji) 착용 및 4대 조화 가운을 통한 스태프 비언어 맞춤 의전 시스템</a:t>
+              <a:t>03. 에너지 테라피 &amp; 반지 의전  |  체질 경락별 은반지(음기 조절) 및 금반지(양기 보강) 착용 + 4대 컬러 가운을 통한 스태프 비언어 맞춤 의전</a:t>
             </a:r>
           </a:p>
         </p:txBody>
